--- a/Digital Learning Unlocked - Slide Deck.pptx
+++ b/Digital Learning Unlocked - Slide Deck.pptx
@@ -11366,6 +11366,44 @@
       <p:grpSpPr/>
       <p:sp>
         <p:nvSpPr>
+          <p:cNvPr id="13" name="Oval 6"/>
+          <p:cNvSpPr/>
+          <p:nvPr/>
+        </p:nvSpPr>
+        <p:spPr>
+          <a:xfrm>
+            <a:off x="45720" y="320040"/>
+            <a:ext cx="365760" cy="365760"/>
+          </a:xfrm>
+          <a:prstGeom prst="ellipse">
+            <a:avLst/>
+          </a:prstGeom>
+          <a:solidFill>
+            <a:srgbClr val="E8833A"/>
+          </a:solidFill>
+          <a:ln>
+            <a:noFill/>
+          </a:ln>
+        </p:spPr>
+        <p:txBody>
+          <a:bodyPr rtlCol="0" anchor="ctr"/>
+          <a:lstStyle/>
+          <a:p>
+            <a:pPr algn="ctr">
+              <a:defRPr sz="2000" b="1">
+                <a:solidFill>
+                  <a:srgbClr val="FFFFFF"/>
+                </a:solidFill>
+              </a:defRPr>
+            </a:pPr>
+            <a:r>
+              <a:t>6</a:t>
+            </a:r>
+          </a:p>
+        </p:txBody>
+      </p:sp>
+      <p:sp>
+        <p:nvSpPr>
           <p:cNvPr id="2" name="Rectangle 1"/>
           <p:cNvSpPr/>
           <p:nvPr/>
@@ -15625,7 +15663,7 @@
               </a:defRPr>
             </a:pPr>
             <a:r>
-              <a:t>• 75 min: 40 min presentation + 30 min workshop + 5 min wrap</a:t>
+              <a:t>• 75 min: 43 min presentation + 30 min workshop + 2 min wrap</a:t>
             </a:r>
           </a:p>
           <a:p>

--- a/Digital Learning Unlocked - Slide Deck.pptx
+++ b/Digital Learning Unlocked - Slide Deck.pptx
@@ -11568,6 +11568,594 @@
                           </a:solidFill>
                         </a:rPr>
                         <a:t>Case presentations, peer feedback</a:t>
+                      </a:r>
+                    </a:p>
+                  </a:txBody>
+                  <a:tcPr marL="45720" marR="45720" marT="45720" marB="45720" anchor="t" anchorCtr="0" horzOverflow="overflow">
+                    <a:solidFill>
+                      <a:srgbClr val="FFFFFF"/>
+                    </a:solidFill>
+                  </a:tcPr>
+                </a:tc>
+              </a:tr>
+              <a:tr h="320040">
+                <a:tc>
+                  <a:txBody>
+                    <a:bodyPr/>
+                    <a:lstStyle/>
+                    <a:p>
+                      <a:pPr algn="l">
+                        <a:defRPr sz="1800"/>
+                      </a:pPr>
+                      <a:r>
+                        <a:rPr b="1" sz="1100">
+                          <a:solidFill>
+                            <a:srgbClr val="2D5F7C"/>
+                          </a:solidFill>
+                        </a:rPr>
+                        <a:t>Text/Audio</a:t>
+                      </a:r>
+                    </a:p>
+                  </a:txBody>
+                  <a:tcPr marL="45720" marR="45720" marT="45720" marB="45720" anchor="t" anchorCtr="0" horzOverflow="overflow">
+                    <a:solidFill>
+                      <a:srgbClr val="F0F4F8"/>
+                    </a:solidFill>
+                  </a:tcPr>
+                </a:tc>
+                <a:tc>
+                  <a:txBody>
+                    <a:bodyPr/>
+                    <a:lstStyle/>
+                    <a:p>
+                      <a:pPr algn="l">
+                        <a:defRPr sz="1800"/>
+                      </a:pPr>
+                      <a:r>
+                        <a:rPr sz="1100">
+                          <a:solidFill>
+                            <a:srgbClr val="1A2332"/>
+                          </a:solidFill>
+                        </a:rPr>
+                        <a:t>Sketchy</a:t>
+                      </a:r>
+                    </a:p>
+                  </a:txBody>
+                  <a:tcPr marL="45720" marR="45720" marT="45720" marB="45720" anchor="t" anchorCtr="0" horzOverflow="overflow">
+                    <a:solidFill>
+                      <a:srgbClr val="F0F4F8"/>
+                    </a:solidFill>
+                  </a:tcPr>
+                </a:tc>
+                <a:tc>
+                  <a:txBody>
+                    <a:bodyPr/>
+                    <a:lstStyle/>
+                    <a:p>
+                      <a:pPr algn="l">
+                        <a:defRPr sz="1800"/>
+                      </a:pPr>
+                      <a:r>
+                        <a:rPr sz="1100">
+                          <a:solidFill>
+                            <a:srgbClr val="1A2332"/>
+                          </a:solidFill>
+                        </a:rPr>
+                        <a:t>Subscription</a:t>
+                      </a:r>
+                    </a:p>
+                  </a:txBody>
+                  <a:tcPr marL="45720" marR="45720" marT="45720" marB="45720" anchor="t" anchorCtr="0" horzOverflow="overflow">
+                    <a:solidFill>
+                      <a:srgbClr val="F0F4F8"/>
+                    </a:solidFill>
+                  </a:tcPr>
+                </a:tc>
+                <a:tc>
+                  <a:txBody>
+                    <a:bodyPr/>
+                    <a:lstStyle/>
+                    <a:p>
+                      <a:pPr algn="l">
+                        <a:defRPr sz="1800"/>
+                      </a:pPr>
+                      <a:r>
+                        <a:rPr sz="1100">
+                          <a:solidFill>
+                            <a:srgbClr val="1A2332"/>
+                          </a:solidFill>
+                        </a:rPr>
+                        <a:t>Visual mnemonic learning</a:t>
+                      </a:r>
+                    </a:p>
+                  </a:txBody>
+                  <a:tcPr marL="45720" marR="45720" marT="45720" marB="45720" anchor="t" anchorCtr="0" horzOverflow="overflow">
+                    <a:solidFill>
+                      <a:srgbClr val="F0F4F8"/>
+                    </a:solidFill>
+                  </a:tcPr>
+                </a:tc>
+              </a:tr>
+              <a:tr h="320040">
+                <a:tc>
+                  <a:txBody>
+                    <a:bodyPr/>
+                    <a:lstStyle/>
+                    <a:p>
+                      <a:pPr algn="l">
+                        <a:defRPr sz="1800"/>
+                      </a:pPr>
+                      <a:r>
+                        <a:rPr b="1" sz="1100">
+                          <a:solidFill>
+                            <a:srgbClr val="2D5F7C"/>
+                          </a:solidFill>
+                        </a:rPr>
+                        <a:t>Text/Audio</a:t>
+                      </a:r>
+                    </a:p>
+                  </a:txBody>
+                  <a:tcPr marL="45720" marR="45720" marT="45720" marB="45720" anchor="t" anchorCtr="0" horzOverflow="overflow">
+                    <a:solidFill>
+                      <a:srgbClr val="FFFFFF"/>
+                    </a:solidFill>
+                  </a:tcPr>
+                </a:tc>
+                <a:tc>
+                  <a:txBody>
+                    <a:bodyPr/>
+                    <a:lstStyle/>
+                    <a:p>
+                      <a:pPr algn="l">
+                        <a:defRPr sz="1800"/>
+                      </a:pPr>
+                      <a:r>
+                        <a:rPr sz="1100">
+                          <a:solidFill>
+                            <a:srgbClr val="1A2332"/>
+                          </a:solidFill>
+                        </a:rPr>
+                        <a:t>Xuron</a:t>
+                      </a:r>
+                    </a:p>
+                  </a:txBody>
+                  <a:tcPr marL="45720" marR="45720" marT="45720" marB="45720" anchor="t" anchorCtr="0" horzOverflow="overflow">
+                    <a:solidFill>
+                      <a:srgbClr val="FFFFFF"/>
+                    </a:solidFill>
+                  </a:tcPr>
+                </a:tc>
+                <a:tc>
+                  <a:txBody>
+                    <a:bodyPr/>
+                    <a:lstStyle/>
+                    <a:p>
+                      <a:pPr algn="l">
+                        <a:defRPr sz="1800"/>
+                      </a:pPr>
+                      <a:r>
+                        <a:rPr sz="1100">
+                          <a:solidFill>
+                            <a:srgbClr val="1A2332"/>
+                          </a:solidFill>
+                        </a:rPr>
+                        <a:t>Subscription</a:t>
+                      </a:r>
+                    </a:p>
+                  </a:txBody>
+                  <a:tcPr marL="45720" marR="45720" marT="45720" marB="45720" anchor="t" anchorCtr="0" horzOverflow="overflow">
+                    <a:solidFill>
+                      <a:srgbClr val="FFFFFF"/>
+                    </a:solidFill>
+                  </a:tcPr>
+                </a:tc>
+                <a:tc>
+                  <a:txBody>
+                    <a:bodyPr/>
+                    <a:lstStyle/>
+                    <a:p>
+                      <a:pPr algn="l">
+                        <a:defRPr sz="1800"/>
+                      </a:pPr>
+                      <a:r>
+                        <a:rPr sz="1100">
+                          <a:solidFill>
+                            <a:srgbClr val="1A2332"/>
+                          </a:solidFill>
+                        </a:rPr>
+                        <a:t>AI virtual patient encounters</a:t>
+                      </a:r>
+                    </a:p>
+                  </a:txBody>
+                  <a:tcPr marL="45720" marR="45720" marT="45720" marB="45720" anchor="t" anchorCtr="0" horzOverflow="overflow">
+                    <a:solidFill>
+                      <a:srgbClr val="FFFFFF"/>
+                    </a:solidFill>
+                  </a:tcPr>
+                </a:tc>
+              </a:tr>
+              <a:tr h="320040">
+                <a:tc>
+                  <a:txBody>
+                    <a:bodyPr/>
+                    <a:lstStyle/>
+                    <a:p>
+                      <a:pPr algn="l">
+                        <a:defRPr sz="1800"/>
+                      </a:pPr>
+                      <a:r>
+                        <a:rPr b="1" sz="1100">
+                          <a:solidFill>
+                            <a:srgbClr val="2D5F7C"/>
+                          </a:solidFill>
+                        </a:rPr>
+                        <a:t>Text/Audio</a:t>
+                      </a:r>
+                    </a:p>
+                  </a:txBody>
+                  <a:tcPr marL="45720" marR="45720" marT="45720" marB="45720" anchor="t" anchorCtr="0" horzOverflow="overflow">
+                    <a:solidFill>
+                      <a:srgbClr val="F0F4F8"/>
+                    </a:solidFill>
+                  </a:tcPr>
+                </a:tc>
+                <a:tc>
+                  <a:txBody>
+                    <a:bodyPr/>
+                    <a:lstStyle/>
+                    <a:p>
+                      <a:pPr algn="l">
+                        <a:defRPr sz="1800"/>
+                      </a:pPr>
+                      <a:r>
+                        <a:rPr sz="1100">
+                          <a:solidFill>
+                            <a:srgbClr val="1A2332"/>
+                          </a:solidFill>
+                        </a:rPr>
+                        <a:t>SimConverse</a:t>
+                      </a:r>
+                    </a:p>
+                  </a:txBody>
+                  <a:tcPr marL="45720" marR="45720" marT="45720" marB="45720" anchor="t" anchorCtr="0" horzOverflow="overflow">
+                    <a:solidFill>
+                      <a:srgbClr val="F0F4F8"/>
+                    </a:solidFill>
+                  </a:tcPr>
+                </a:tc>
+                <a:tc>
+                  <a:txBody>
+                    <a:bodyPr/>
+                    <a:lstStyle/>
+                    <a:p>
+                      <a:pPr algn="l">
+                        <a:defRPr sz="1800"/>
+                      </a:pPr>
+                      <a:r>
+                        <a:rPr sz="1100">
+                          <a:solidFill>
+                            <a:srgbClr val="1A2332"/>
+                          </a:solidFill>
+                        </a:rPr>
+                        <a:t>Subscription</a:t>
+                      </a:r>
+                    </a:p>
+                  </a:txBody>
+                  <a:tcPr marL="45720" marR="45720" marT="45720" marB="45720" anchor="t" anchorCtr="0" horzOverflow="overflow">
+                    <a:solidFill>
+                      <a:srgbClr val="F0F4F8"/>
+                    </a:solidFill>
+                  </a:tcPr>
+                </a:tc>
+                <a:tc>
+                  <a:txBody>
+                    <a:bodyPr/>
+                    <a:lstStyle/>
+                    <a:p>
+                      <a:pPr algn="l">
+                        <a:defRPr sz="1800"/>
+                      </a:pPr>
+                      <a:r>
+                        <a:rPr sz="1100">
+                          <a:solidFill>
+                            <a:srgbClr val="1A2332"/>
+                          </a:solidFill>
+                        </a:rPr>
+                        <a:t>AI communication skills sim</a:t>
+                      </a:r>
+                    </a:p>
+                  </a:txBody>
+                  <a:tcPr marL="45720" marR="45720" marT="45720" marB="45720" anchor="t" anchorCtr="0" horzOverflow="overflow">
+                    <a:solidFill>
+                      <a:srgbClr val="F0F4F8"/>
+                    </a:solidFill>
+                  </a:tcPr>
+                </a:tc>
+              </a:tr>
+              <a:tr h="320040">
+                <a:tc>
+                  <a:txBody>
+                    <a:bodyPr/>
+                    <a:lstStyle/>
+                    <a:p>
+                      <a:pPr algn="l">
+                        <a:defRPr sz="1800"/>
+                      </a:pPr>
+                      <a:r>
+                        <a:rPr b="1" sz="1100">
+                          <a:solidFill>
+                            <a:srgbClr val="2D5F7C"/>
+                          </a:solidFill>
+                        </a:rPr>
+                        <a:t>Text/Audio</a:t>
+                      </a:r>
+                    </a:p>
+                  </a:txBody>
+                  <a:tcPr marL="45720" marR="45720" marT="45720" marB="45720" anchor="t" anchorCtr="0" horzOverflow="overflow">
+                    <a:solidFill>
+                      <a:srgbClr val="FFFFFF"/>
+                    </a:solidFill>
+                  </a:tcPr>
+                </a:tc>
+                <a:tc>
+                  <a:txBody>
+                    <a:bodyPr/>
+                    <a:lstStyle/>
+                    <a:p>
+                      <a:pPr algn="l">
+                        <a:defRPr sz="1800"/>
+                      </a:pPr>
+                      <a:r>
+                        <a:rPr sz="1100">
+                          <a:solidFill>
+                            <a:srgbClr val="1A2332"/>
+                          </a:solidFill>
+                        </a:rPr>
+                        <a:t>Geeky Medics</a:t>
+                      </a:r>
+                    </a:p>
+                  </a:txBody>
+                  <a:tcPr marL="45720" marR="45720" marT="45720" marB="45720" anchor="t" anchorCtr="0" horzOverflow="overflow">
+                    <a:solidFill>
+                      <a:srgbClr val="FFFFFF"/>
+                    </a:solidFill>
+                  </a:tcPr>
+                </a:tc>
+                <a:tc>
+                  <a:txBody>
+                    <a:bodyPr/>
+                    <a:lstStyle/>
+                    <a:p>
+                      <a:pPr algn="l">
+                        <a:defRPr sz="1800"/>
+                      </a:pPr>
+                      <a:r>
+                        <a:rPr sz="1100">
+                          <a:solidFill>
+                            <a:srgbClr val="1A2332"/>
+                          </a:solidFill>
+                        </a:rPr>
+                        <a:t>Free / Premium</a:t>
+                      </a:r>
+                    </a:p>
+                  </a:txBody>
+                  <a:tcPr marL="45720" marR="45720" marT="45720" marB="45720" anchor="t" anchorCtr="0" horzOverflow="overflow">
+                    <a:solidFill>
+                      <a:srgbClr val="FFFFFF"/>
+                    </a:solidFill>
+                  </a:tcPr>
+                </a:tc>
+                <a:tc>
+                  <a:txBody>
+                    <a:bodyPr/>
+                    <a:lstStyle/>
+                    <a:p>
+                      <a:pPr algn="l">
+                        <a:defRPr sz="1800"/>
+                      </a:pPr>
+                      <a:r>
+                        <a:rPr sz="1100">
+                          <a:solidFill>
+                            <a:srgbClr val="1A2332"/>
+                          </a:solidFill>
+                        </a:rPr>
+                        <a:t>OSCE cases and exam prep</a:t>
+                      </a:r>
+                    </a:p>
+                  </a:txBody>
+                  <a:tcPr marL="45720" marR="45720" marT="45720" marB="45720" anchor="t" anchorCtr="0" horzOverflow="overflow">
+                    <a:solidFill>
+                      <a:srgbClr val="FFFFFF"/>
+                    </a:solidFill>
+                  </a:tcPr>
+                </a:tc>
+              </a:tr>
+              <a:tr h="320040">
+                <a:tc>
+                  <a:txBody>
+                    <a:bodyPr/>
+                    <a:lstStyle/>
+                    <a:p>
+                      <a:pPr algn="l">
+                        <a:defRPr sz="1800"/>
+                      </a:pPr>
+                      <a:r>
+                        <a:rPr b="1" sz="1100">
+                          <a:solidFill>
+                            <a:srgbClr val="2D5F7C"/>
+                          </a:solidFill>
+                        </a:rPr>
+                        <a:t>Text/Audio</a:t>
+                      </a:r>
+                    </a:p>
+                  </a:txBody>
+                  <a:tcPr marL="45720" marR="45720" marT="45720" marB="45720" anchor="t" anchorCtr="0" horzOverflow="overflow">
+                    <a:solidFill>
+                      <a:srgbClr val="F0F4F8"/>
+                    </a:solidFill>
+                  </a:tcPr>
+                </a:tc>
+                <a:tc>
+                  <a:txBody>
+                    <a:bodyPr/>
+                    <a:lstStyle/>
+                    <a:p>
+                      <a:pPr algn="l">
+                        <a:defRPr sz="1800"/>
+                      </a:pPr>
+                      <a:r>
+                        <a:rPr sz="1100">
+                          <a:solidFill>
+                            <a:srgbClr val="1A2332"/>
+                          </a:solidFill>
+                        </a:rPr>
+                        <a:t>Lecturio</a:t>
+                      </a:r>
+                    </a:p>
+                  </a:txBody>
+                  <a:tcPr marL="45720" marR="45720" marT="45720" marB="45720" anchor="t" anchorCtr="0" horzOverflow="overflow">
+                    <a:solidFill>
+                      <a:srgbClr val="F0F4F8"/>
+                    </a:solidFill>
+                  </a:tcPr>
+                </a:tc>
+                <a:tc>
+                  <a:txBody>
+                    <a:bodyPr/>
+                    <a:lstStyle/>
+                    <a:p>
+                      <a:pPr algn="l">
+                        <a:defRPr sz="1800"/>
+                      </a:pPr>
+                      <a:r>
+                        <a:rPr sz="1100">
+                          <a:solidFill>
+                            <a:srgbClr val="1A2332"/>
+                          </a:solidFill>
+                        </a:rPr>
+                        <a:t>Subscription</a:t>
+                      </a:r>
+                    </a:p>
+                  </a:txBody>
+                  <a:tcPr marL="45720" marR="45720" marT="45720" marB="45720" anchor="t" anchorCtr="0" horzOverflow="overflow">
+                    <a:solidFill>
+                      <a:srgbClr val="F0F4F8"/>
+                    </a:solidFill>
+                  </a:tcPr>
+                </a:tc>
+                <a:tc>
+                  <a:txBody>
+                    <a:bodyPr/>
+                    <a:lstStyle/>
+                    <a:p>
+                      <a:pPr algn="l">
+                        <a:defRPr sz="1800"/>
+                      </a:pPr>
+                      <a:r>
+                        <a:rPr sz="1100">
+                          <a:solidFill>
+                            <a:srgbClr val="1A2332"/>
+                          </a:solidFill>
+                        </a:rPr>
+                        <a:t>Video library + clinical cases</a:t>
+                      </a:r>
+                    </a:p>
+                  </a:txBody>
+                  <a:tcPr marL="45720" marR="45720" marT="45720" marB="45720" anchor="t" anchorCtr="0" horzOverflow="overflow">
+                    <a:solidFill>
+                      <a:srgbClr val="F0F4F8"/>
+                    </a:solidFill>
+                  </a:tcPr>
+                </a:tc>
+              </a:tr>
+              <a:tr h="320040">
+                <a:tc>
+                  <a:txBody>
+                    <a:bodyPr/>
+                    <a:lstStyle/>
+                    <a:p>
+                      <a:pPr algn="l">
+                        <a:defRPr sz="1800"/>
+                      </a:pPr>
+                      <a:r>
+                        <a:rPr b="1" sz="1100">
+                          <a:solidFill>
+                            <a:srgbClr val="2D5F7C"/>
+                          </a:solidFill>
+                        </a:rPr>
+                        <a:t>Text/Audio</a:t>
+                      </a:r>
+                    </a:p>
+                  </a:txBody>
+                  <a:tcPr marL="45720" marR="45720" marT="45720" marB="45720" anchor="t" anchorCtr="0" horzOverflow="overflow">
+                    <a:solidFill>
+                      <a:srgbClr val="FFFFFF"/>
+                    </a:solidFill>
+                  </a:tcPr>
+                </a:tc>
+                <a:tc>
+                  <a:txBody>
+                    <a:bodyPr/>
+                    <a:lstStyle/>
+                    <a:p>
+                      <a:pPr algn="l">
+                        <a:defRPr sz="1800"/>
+                      </a:pPr>
+                      <a:r>
+                        <a:rPr sz="1100">
+                          <a:solidFill>
+                            <a:srgbClr val="1A2332"/>
+                          </a:solidFill>
+                        </a:rPr>
+                        <a:t>Sapient Clinician</a:t>
+                      </a:r>
+                    </a:p>
+                  </a:txBody>
+                  <a:tcPr marL="45720" marR="45720" marT="45720" marB="45720" anchor="t" anchorCtr="0" horzOverflow="overflow">
+                    <a:solidFill>
+                      <a:srgbClr val="FFFFFF"/>
+                    </a:solidFill>
+                  </a:tcPr>
+                </a:tc>
+                <a:tc>
+                  <a:txBody>
+                    <a:bodyPr/>
+                    <a:lstStyle/>
+                    <a:p>
+                      <a:pPr algn="l">
+                        <a:defRPr sz="1800"/>
+                      </a:pPr>
+                      <a:r>
+                        <a:rPr sz="1100">
+                          <a:solidFill>
+                            <a:srgbClr val="1A2332"/>
+                          </a:solidFill>
+                        </a:rPr>
+                        <a:t>Subscription</a:t>
+                      </a:r>
+                    </a:p>
+                  </a:txBody>
+                  <a:tcPr marL="45720" marR="45720" marT="45720" marB="45720" anchor="t" anchorCtr="0" horzOverflow="overflow">
+                    <a:solidFill>
+                      <a:srgbClr val="FFFFFF"/>
+                    </a:solidFill>
+                  </a:tcPr>
+                </a:tc>
+                <a:tc>
+                  <a:txBody>
+                    <a:bodyPr/>
+                    <a:lstStyle/>
+                    <a:p>
+                      <a:pPr algn="l">
+                        <a:defRPr sz="1800"/>
+                      </a:pPr>
+                      <a:r>
+                        <a:rPr sz="1100">
+                          <a:solidFill>
+                            <a:srgbClr val="1A2332"/>
+                          </a:solidFill>
+                        </a:rPr>
+                        <a:t>Clinical reasoning assessment</a:t>
                       </a:r>
                     </a:p>
                   </a:txBody>

--- a/Digital Learning Unlocked - Slide Deck.pptx
+++ b/Digital Learning Unlocked - Slide Deck.pptx
@@ -15271,6 +15271,65 @@
           </a:p>
         </p:txBody>
       </p:sp>
+      <p:pic>
+        <p:nvPicPr>
+          <p:cNvPr id="438" name="Picture 437" descr="workshop-guide-qr.png"/>
+          <p:cNvPicPr>
+            <a:picLocks noChangeAspect="1"/>
+          </p:cNvPicPr>
+          <p:nvPr/>
+        </p:nvPicPr>
+        <p:blipFill>
+          <a:blip r:embed="rId3"/>
+          <a:stretch>
+            <a:fillRect/>
+          </a:stretch>
+        </p:blipFill>
+        <p:spPr>
+          <a:xfrm>
+            <a:off x="9144000" y="2331720"/>
+            <a:ext cx="1828800" cy="1828800"/>
+          </a:xfrm>
+          <a:prstGeom prst="rect">
+            <a:avLst/>
+          </a:prstGeom>
+        </p:spPr>
+      </p:pic>
+      <p:sp>
+        <p:nvSpPr>
+          <p:cNvPr id="439" name="TextBox 438"/>
+          <p:cNvSpPr txBox="1"/>
+          <p:nvPr/>
+        </p:nvSpPr>
+        <p:spPr>
+          <a:xfrm>
+            <a:off x="8503920" y="4315968"/>
+            <a:ext cx="3108960" cy="320040"/>
+          </a:xfrm>
+          <a:prstGeom prst="rect">
+            <a:avLst/>
+          </a:prstGeom>
+          <a:noFill/>
+        </p:spPr>
+        <p:txBody>
+          <a:bodyPr wrap="square">
+            <a:spAutoFit/>
+          </a:bodyPr>
+          <a:lstStyle/>
+          <a:p>
+            <a:pPr algn="ctr"/>
+            <a:r>
+              <a:rPr sz="1400">
+                <a:solidFill>
+                  <a:srgbClr val="1E4258"/>
+                </a:solidFill>
+                <a:latin typeface="Arial"/>
+              </a:rPr>
+              <a:t>Scan for the Workshop Guide</a:t>
+            </a:r>
+          </a:p>
+        </p:txBody>
+      </p:sp>
     </p:spTree>
   </p:cSld>
   <p:clrMapOvr>
@@ -15542,53 +15601,35 @@
           <a:p>
             <a:pPr/>
             <a:r>
-              <a:t>[QR code → Workshop Guide page]</a:t>
-            </a:r>
-          </a:p>
-        </p:txBody>
-      </p:sp>
-      <p:sp>
-        <p:nvSpPr>
-          <p:cNvPr id="109" name="Rectangle 5"/>
-          <p:cNvSpPr/>
-          <p:nvPr/>
-        </p:nvSpPr>
+              <a:t>Scan for the Workshop Guide page</a:t>
+            </a:r>
+          </a:p>
+        </p:txBody>
+      </p:sp>
+      <p:pic>
+        <p:nvPicPr>
+          <p:cNvPr id="109" name="Picture 108" descr="workshop-guide-qr.png"/>
+          <p:cNvPicPr>
+            <a:picLocks noChangeAspect="1"/>
+          </p:cNvPicPr>
+          <p:nvPr/>
+        </p:nvPicPr>
+        <p:blipFill>
+          <a:blip r:embed="rId2"/>
+          <a:stretch>
+            <a:fillRect/>
+          </a:stretch>
+        </p:blipFill>
         <p:spPr>
           <a:xfrm>
             <a:off x="7772400" y="2560320"/>
-            <a:ext cx="3200400" cy="3200401"/>
-          </a:xfrm>
-          <a:prstGeom prst="rect">
-            <a:avLst/>
-          </a:prstGeom>
-          <a:solidFill>
-            <a:srgbClr val="F0F4F8"/>
-          </a:solidFill>
-          <a:ln w="12700">
-            <a:miter lim="400000"/>
-          </a:ln>
-          <a:effectLst>
-            <a:outerShdw sx="100000" sy="100000" kx="0" ky="0" algn="b" rotWithShape="0" blurRad="38100" dist="23000" dir="5400000">
-              <a:srgbClr val="000000">
-                <a:alpha val="35000"/>
-              </a:srgbClr>
-            </a:outerShdw>
-          </a:effectLst>
-        </p:spPr>
-        <p:txBody>
-          <a:bodyPr lIns="45719" rIns="45719" anchor="ctr"/>
-          <a:lstStyle/>
-          <a:p>
-            <a:pPr algn="ctr">
-              <a:defRPr>
-                <a:solidFill>
-                  <a:srgbClr val="FFFFFF"/>
-                </a:solidFill>
-              </a:defRPr>
-            </a:pPr>
-          </a:p>
-        </p:txBody>
-      </p:sp>
+            <a:ext cx="3200400" cy="3200400"/>
+          </a:xfrm>
+          <a:prstGeom prst="rect">
+            <a:avLst/>
+          </a:prstGeom>
+        </p:spPr>
+      </p:pic>
     </p:spTree>
   </p:cSld>
   <p:clrMapOvr>

--- a/Digital Learning Unlocked - Slide Deck.pptx
+++ b/Digital Learning Unlocked - Slide Deck.pptx
@@ -22,7 +22,6 @@
     <p:sldId id="271" r:id="rId23"/>
     <p:sldId id="272" r:id="rId24"/>
     <p:sldId id="274" r:id="rId26"/>
-    <p:sldId id="277" r:id="rId29"/>
     <p:sldId id="279" r:id="rId31"/>
     <p:sldId id="281" r:id="rId33"/>
     <p:sldId id="282" r:id="rId34"/>
@@ -4507,7 +4506,7 @@
       </p:grpSpPr>
       <p:sp>
         <p:nvSpPr>
-          <p:cNvPr id="220" name="Rectangle 1"/>
+          <p:cNvPr id="2" name="Rectangle 1"/>
           <p:cNvSpPr/>
           <p:nvPr/>
         </p:nvSpPr>
@@ -4522,124 +4521,36 @@
           <a:solidFill>
             <a:srgbClr val="2D5F7C"/>
           </a:solidFill>
-          <a:ln w="12700">
-            <a:miter lim="400000"/>
+          <a:ln>
+            <a:noFill/>
           </a:ln>
-          <a:effectLst>
-            <a:outerShdw sx="100000" sy="100000" kx="0" ky="0" algn="b" rotWithShape="0" blurRad="38100" dist="23000" dir="5400000">
-              <a:srgbClr val="000000">
-                <a:alpha val="35000"/>
-              </a:srgbClr>
-            </a:outerShdw>
-          </a:effectLst>
-        </p:spPr>
-        <p:txBody>
-          <a:bodyPr lIns="45719" rIns="45719" anchor="ctr"/>
-          <a:lstStyle/>
-          <a:p>
-            <a:pPr algn="ctr">
-              <a:defRPr>
-                <a:solidFill>
-                  <a:srgbClr val="FFFFFF"/>
-                </a:solidFill>
-              </a:defRPr>
-            </a:pPr>
-          </a:p>
-        </p:txBody>
-      </p:sp>
-      <p:sp>
-        <p:nvSpPr>
-          <p:cNvPr id="221" name="TextBox 2"/>
-          <p:cNvSpPr txBox="1"/>
-          <p:nvPr/>
-        </p:nvSpPr>
-        <p:spPr>
-          <a:xfrm>
-            <a:off x="502919" y="182879"/>
-            <a:ext cx="11155682" cy="444759"/>
-          </a:xfrm>
-          <a:prstGeom prst="rect">
-            <a:avLst/>
-          </a:prstGeom>
-          <a:ln w="12700">
-            <a:miter lim="400000"/>
-          </a:ln>
-          <a:extLst>
-            <a:ext uri="{C572A759-6A51-4108-AA02-DFA0A04FC94B}">
-              <ma14:wrappingTextBoxFlag xmlns:ma14="http://schemas.microsoft.com/office/mac/drawingml/2011/main" val="1"/>
-            </a:ext>
-          </a:extLst>
-        </p:spPr>
-        <p:txBody>
-          <a:bodyPr lIns="45719" rIns="45719">
-            <a:spAutoFit/>
-          </a:bodyPr>
-          <a:lstStyle>
-            <a:lvl1pPr>
-              <a:defRPr b="1" sz="2800">
-                <a:solidFill>
-                  <a:srgbClr val="FFFFFF"/>
-                </a:solidFill>
-              </a:defRPr>
-            </a:lvl1pPr>
-          </a:lstStyle>
-          <a:p>
-            <a:pPr/>
-            <a:r>
-              <a:rPr/>
-              <a:t>Live Demo: The Same Case, Grounded</a:t>
-            </a:r>
-          </a:p>
-        </p:txBody>
-      </p:sp>
-      <p:sp>
-        <p:nvSpPr>
-          <p:cNvPr id="222" name="TextBox 3"/>
-          <p:cNvSpPr txBox="1"/>
-          <p:nvPr/>
-        </p:nvSpPr>
-        <p:spPr>
-          <a:xfrm>
-            <a:off x="502919" y="1097280"/>
-            <a:ext cx="11155682" cy="300594"/>
-          </a:xfrm>
-          <a:prstGeom prst="rect">
-            <a:avLst/>
-          </a:prstGeom>
-          <a:ln w="12700">
-            <a:miter lim="400000"/>
-          </a:ln>
-          <a:extLst>
-            <a:ext uri="{C572A759-6A51-4108-AA02-DFA0A04FC94B}">
-              <ma14:wrappingTextBoxFlag xmlns:ma14="http://schemas.microsoft.com/office/mac/drawingml/2011/main" val="1"/>
-            </a:ext>
-          </a:extLst>
-        </p:spPr>
-        <p:txBody>
-          <a:bodyPr lIns="45719" rIns="45719">
-            <a:spAutoFit/>
-          </a:bodyPr>
-          <a:lstStyle>
-            <a:lvl1pPr>
-              <a:defRPr sz="1600">
-                <a:solidFill>
-                  <a:srgbClr val="5A6B7E"/>
-                </a:solidFill>
-              </a:defRPr>
-            </a:lvl1pPr>
-          </a:lstStyle>
-          <a:p>
-            <a:pPr/>
-            <a:r>
-              <a:rPr/>
-              <a:t>Same question, asked twice</a:t>
-            </a:r>
-          </a:p>
-        </p:txBody>
-      </p:sp>
-      <p:sp>
-        <p:nvSpPr>
-          <p:cNvPr id="223" name="Rectangle 4"/>
+          <a:effectLst/>
+        </p:spPr>
+        <p:style>
+          <a:lnRef idx="1">
+            <a:schemeClr val="accent1"/>
+          </a:lnRef>
+          <a:fillRef idx="3">
+            <a:schemeClr val="accent1"/>
+          </a:fillRef>
+          <a:effectRef idx="2">
+            <a:schemeClr val="accent1"/>
+          </a:effectRef>
+          <a:fontRef idx="minor">
+            <a:schemeClr val="lt1"/>
+          </a:fontRef>
+        </p:style>
+        <p:txBody>
+          <a:bodyPr rtlCol="0" anchor="ctr"/>
+          <a:lstStyle/>
+          <a:p>
+            <a:pPr algn="ctr"/>
+          </a:p>
+        </p:txBody>
+      </p:sp>
+      <p:sp>
+        <p:nvSpPr>
+          <p:cNvPr id="3" name="Rectangle 2"/>
           <p:cNvSpPr/>
           <p:nvPr/>
         </p:nvSpPr>
@@ -4654,34 +4565,36 @@
           <a:solidFill>
             <a:srgbClr val="F0F4F8"/>
           </a:solidFill>
-          <a:ln w="12700">
-            <a:miter lim="400000"/>
+          <a:ln>
+            <a:noFill/>
           </a:ln>
-          <a:effectLst>
-            <a:outerShdw sx="100000" sy="100000" kx="0" ky="0" algn="b" rotWithShape="0" blurRad="38100" dist="23000" dir="5400000">
-              <a:srgbClr val="000000">
-                <a:alpha val="35000"/>
-              </a:srgbClr>
-            </a:outerShdw>
-          </a:effectLst>
-        </p:spPr>
-        <p:txBody>
-          <a:bodyPr lIns="45719" rIns="45719" anchor="ctr"/>
-          <a:lstStyle/>
-          <a:p>
-            <a:pPr algn="ctr">
-              <a:defRPr>
-                <a:solidFill>
-                  <a:srgbClr val="FFFFFF"/>
-                </a:solidFill>
-              </a:defRPr>
-            </a:pPr>
-          </a:p>
-        </p:txBody>
-      </p:sp>
-      <p:sp>
-        <p:nvSpPr>
-          <p:cNvPr id="224" name="Rectangle 5"/>
+          <a:effectLst/>
+        </p:spPr>
+        <p:style>
+          <a:lnRef idx="1">
+            <a:schemeClr val="accent1"/>
+          </a:lnRef>
+          <a:fillRef idx="3">
+            <a:schemeClr val="accent1"/>
+          </a:fillRef>
+          <a:effectRef idx="2">
+            <a:schemeClr val="accent1"/>
+          </a:effectRef>
+          <a:fontRef idx="minor">
+            <a:schemeClr val="lt1"/>
+          </a:fontRef>
+        </p:style>
+        <p:txBody>
+          <a:bodyPr rtlCol="0" anchor="ctr"/>
+          <a:lstStyle/>
+          <a:p>
+            <a:pPr algn="ctr"/>
+          </a:p>
+        </p:txBody>
+      </p:sp>
+      <p:sp>
+        <p:nvSpPr>
+          <p:cNvPr id="4" name="Rectangle 3"/>
           <p:cNvSpPr/>
           <p:nvPr/>
         </p:nvSpPr>
@@ -4696,144 +4609,43 @@
           <a:solidFill>
             <a:srgbClr val="2D5F7C"/>
           </a:solidFill>
-          <a:ln w="12700">
-            <a:miter lim="400000"/>
+          <a:ln>
+            <a:noFill/>
           </a:ln>
-          <a:effectLst>
-            <a:outerShdw sx="100000" sy="100000" kx="0" ky="0" algn="b" rotWithShape="0" blurRad="38100" dist="23000" dir="5400000">
-              <a:srgbClr val="000000">
-                <a:alpha val="35000"/>
-              </a:srgbClr>
-            </a:outerShdw>
-          </a:effectLst>
-        </p:spPr>
-        <p:txBody>
-          <a:bodyPr lIns="45719" rIns="45719" anchor="ctr"/>
-          <a:lstStyle/>
-          <a:p>
-            <a:pPr algn="ctr">
-              <a:defRPr>
-                <a:solidFill>
-                  <a:srgbClr val="FFFFFF"/>
-                </a:solidFill>
-              </a:defRPr>
-            </a:pPr>
-          </a:p>
-        </p:txBody>
-      </p:sp>
-      <p:sp>
-        <p:nvSpPr>
-          <p:cNvPr id="225" name="TextBox 6"/>
-          <p:cNvSpPr txBox="1"/>
-          <p:nvPr/>
-        </p:nvSpPr>
-        <p:spPr>
-          <a:xfrm>
-            <a:off x="960119" y="1554480"/>
-            <a:ext cx="4937762" cy="225708"/>
-          </a:xfrm>
-          <a:prstGeom prst="rect">
-            <a:avLst/>
-          </a:prstGeom>
-          <a:ln w="12700">
-            <a:miter lim="400000"/>
-          </a:ln>
-          <a:extLst>
-            <a:ext uri="{C572A759-6A51-4108-AA02-DFA0A04FC94B}">
-              <ma14:wrappingTextBoxFlag xmlns:ma14="http://schemas.microsoft.com/office/mac/drawingml/2011/main" val="1"/>
-            </a:ext>
-          </a:extLst>
-        </p:spPr>
-        <p:txBody>
-          <a:bodyPr lIns="45719" rIns="45719">
-            <a:spAutoFit/>
-          </a:bodyPr>
-          <a:lstStyle>
-            <a:lvl1pPr>
-              <a:defRPr b="1" sz="1100">
-                <a:solidFill>
-                  <a:srgbClr val="2D5F7C"/>
-                </a:solidFill>
-              </a:defRPr>
-            </a:lvl1pPr>
-          </a:lstStyle>
-          <a:p>
-            <a:pPr/>
-            <a:r>
-              <a:rPr/>
-              <a:t>THE BEAT</a:t>
-            </a:r>
-          </a:p>
-        </p:txBody>
-      </p:sp>
-      <p:sp>
-        <p:nvSpPr>
-          <p:cNvPr id="226" name="TextBox 7"/>
-          <p:cNvSpPr txBox="1"/>
-          <p:nvPr/>
-        </p:nvSpPr>
-        <p:spPr>
-          <a:xfrm>
-            <a:off x="960119" y="1920239"/>
-            <a:ext cx="4937762" cy="1783692"/>
-          </a:xfrm>
-          <a:prstGeom prst="rect">
-            <a:avLst/>
-          </a:prstGeom>
-          <a:ln w="12700">
-            <a:miter lim="400000"/>
-          </a:ln>
-          <a:extLst>
-            <a:ext uri="{C572A759-6A51-4108-AA02-DFA0A04FC94B}">
-              <ma14:wrappingTextBoxFlag xmlns:ma14="http://schemas.microsoft.com/office/mac/drawingml/2011/main" val="1"/>
-            </a:ext>
-          </a:extLst>
-        </p:spPr>
-        <p:txBody>
-          <a:bodyPr lIns="45719" rIns="45719">
-            <a:spAutoFit/>
-          </a:bodyPr>
-          <a:lstStyle/>
-          <a:p>
-            <a:pPr>
-              <a:spcBef>
-                <a:spcPts val="800"/>
-              </a:spcBef>
-              <a:defRPr sz="1700">
-                <a:solidFill>
-                  <a:srgbClr val="1A2332"/>
-                </a:solidFill>
-              </a:defRPr>
-            </a:pPr>
-            <a:r>
-              <a:rPr/>
-              <a:t>1 · Ungrounded: the same question, no sources</a:t>
-            </a:r>
-          </a:p>
-          <a:p>
-            <a:r>
-              <a:rPr/>
-              <a:t>2 · Grounded: the pre-built notebook, answers cite sources</a:t>
-            </a:r>
-          </a:p>
-          <a:p>
-            <a:r>
-              <a:rPr/>
-              <a:t>3 · Bonus: a rubric and 15 seconds of the audio overview</a:t>
-            </a:r>
-          </a:p>
-        </p:txBody>
-      </p:sp>
-      <p:sp>
-        <p:nvSpPr>
-          <p:cNvPr id="227" name="Rectangle 8"/>
+          <a:effectLst/>
+        </p:spPr>
+        <p:style>
+          <a:lnRef idx="1">
+            <a:schemeClr val="accent1"/>
+          </a:lnRef>
+          <a:fillRef idx="3">
+            <a:schemeClr val="accent1"/>
+          </a:fillRef>
+          <a:effectRef idx="2">
+            <a:schemeClr val="accent1"/>
+          </a:effectRef>
+          <a:fontRef idx="minor">
+            <a:schemeClr val="lt1"/>
+          </a:fontRef>
+        </p:style>
+        <p:txBody>
+          <a:bodyPr rtlCol="0" anchor="ctr"/>
+          <a:lstStyle/>
+          <a:p>
+            <a:pPr algn="ctr"/>
+          </a:p>
+        </p:txBody>
+      </p:sp>
+      <p:sp>
+        <p:nvSpPr>
+          <p:cNvPr id="5" name="Rectangle 4"/>
           <p:cNvSpPr/>
           <p:nvPr/>
         </p:nvSpPr>
         <p:spPr>
           <a:xfrm>
             <a:off x="6583680" y="1371600"/>
-            <a:ext cx="5029201" cy="1828800"/>
+            <a:ext cx="5029201" cy="4114800"/>
           </a:xfrm>
           <a:prstGeom prst="rect">
             <a:avLst/>
@@ -4841,41 +4653,43 @@
           <a:solidFill>
             <a:srgbClr val="FDF6F0"/>
           </a:solidFill>
-          <a:ln w="12700">
-            <a:miter lim="400000"/>
+          <a:ln>
+            <a:noFill/>
           </a:ln>
-          <a:effectLst>
-            <a:outerShdw sx="100000" sy="100000" kx="0" ky="0" algn="b" rotWithShape="0" blurRad="38100" dist="23000" dir="5400000">
-              <a:srgbClr val="000000">
-                <a:alpha val="35000"/>
-              </a:srgbClr>
-            </a:outerShdw>
-          </a:effectLst>
-        </p:spPr>
-        <p:txBody>
-          <a:bodyPr lIns="45719" rIns="45719" anchor="ctr"/>
-          <a:lstStyle/>
-          <a:p>
-            <a:pPr algn="ctr">
-              <a:defRPr>
-                <a:solidFill>
-                  <a:srgbClr val="FFFFFF"/>
-                </a:solidFill>
-              </a:defRPr>
-            </a:pPr>
-          </a:p>
-        </p:txBody>
-      </p:sp>
-      <p:sp>
-        <p:nvSpPr>
-          <p:cNvPr id="228" name="Rectangle 9"/>
+          <a:effectLst/>
+        </p:spPr>
+        <p:style>
+          <a:lnRef idx="1">
+            <a:schemeClr val="accent1"/>
+          </a:lnRef>
+          <a:fillRef idx="3">
+            <a:schemeClr val="accent1"/>
+          </a:fillRef>
+          <a:effectRef idx="2">
+            <a:schemeClr val="accent1"/>
+          </a:effectRef>
+          <a:fontRef idx="minor">
+            <a:schemeClr val="lt1"/>
+          </a:fontRef>
+        </p:style>
+        <p:txBody>
+          <a:bodyPr rtlCol="0" anchor="ctr"/>
+          <a:lstStyle/>
+          <a:p>
+            <a:pPr algn="ctr"/>
+          </a:p>
+        </p:txBody>
+      </p:sp>
+      <p:sp>
+        <p:nvSpPr>
+          <p:cNvPr id="6" name="Rectangle 5"/>
           <p:cNvSpPr/>
           <p:nvPr/>
         </p:nvSpPr>
         <p:spPr>
           <a:xfrm>
             <a:off x="6583680" y="1371600"/>
-            <a:ext cx="50801" cy="1828800"/>
+            <a:ext cx="50801" cy="4114800"/>
           </a:xfrm>
           <a:prstGeom prst="rect">
             <a:avLst/>
@@ -4883,34 +4697,198 @@
           <a:solidFill>
             <a:srgbClr val="E8833A"/>
           </a:solidFill>
-          <a:ln w="12700">
-            <a:miter lim="400000"/>
+          <a:ln>
+            <a:noFill/>
           </a:ln>
-          <a:effectLst>
-            <a:outerShdw sx="100000" sy="100000" kx="0" ky="0" algn="b" rotWithShape="0" blurRad="38100" dist="23000" dir="5400000">
-              <a:srgbClr val="000000">
-                <a:alpha val="35000"/>
-              </a:srgbClr>
-            </a:outerShdw>
-          </a:effectLst>
-        </p:spPr>
-        <p:txBody>
-          <a:bodyPr lIns="45719" rIns="45719" anchor="ctr"/>
-          <a:lstStyle/>
-          <a:p>
-            <a:pPr algn="ctr">
-              <a:defRPr>
+          <a:effectLst/>
+        </p:spPr>
+        <p:style>
+          <a:lnRef idx="1">
+            <a:schemeClr val="accent1"/>
+          </a:lnRef>
+          <a:fillRef idx="3">
+            <a:schemeClr val="accent1"/>
+          </a:fillRef>
+          <a:effectRef idx="2">
+            <a:schemeClr val="accent1"/>
+          </a:effectRef>
+          <a:fontRef idx="minor">
+            <a:schemeClr val="lt1"/>
+          </a:fontRef>
+        </p:style>
+        <p:txBody>
+          <a:bodyPr rtlCol="0" anchor="ctr"/>
+          <a:lstStyle/>
+          <a:p>
+            <a:pPr algn="ctr"/>
+          </a:p>
+        </p:txBody>
+      </p:sp>
+      <p:sp>
+        <p:nvSpPr>
+          <p:cNvPr id="7" name="TextBox 6"/>
+          <p:cNvSpPr txBox="1"/>
+          <p:nvPr/>
+        </p:nvSpPr>
+        <p:spPr>
+          <a:xfrm>
+            <a:off x="502919" y="182879"/>
+            <a:ext cx="11155682" cy="444759"/>
+          </a:xfrm>
+          <a:prstGeom prst="rect">
+            <a:avLst/>
+          </a:prstGeom>
+          <a:noFill/>
+        </p:spPr>
+        <p:txBody>
+          <a:bodyPr wrap="square">
+            <a:spAutoFit/>
+          </a:bodyPr>
+          <a:lstStyle/>
+          <a:p>
+            <a:r>
+              <a:rPr sz="2800" b="1">
                 <a:solidFill>
                   <a:srgbClr val="FFFFFF"/>
                 </a:solidFill>
-              </a:defRPr>
+              </a:rPr>
+              <a:t>Live Demo: The Same Case, Grounded</a:t>
+            </a:r>
+          </a:p>
+        </p:txBody>
+      </p:sp>
+      <p:sp>
+        <p:nvSpPr>
+          <p:cNvPr id="8" name="TextBox 7"/>
+          <p:cNvSpPr txBox="1"/>
+          <p:nvPr/>
+        </p:nvSpPr>
+        <p:spPr>
+          <a:xfrm>
+            <a:off x="502919" y="1097280"/>
+            <a:ext cx="11155682" cy="300594"/>
+          </a:xfrm>
+          <a:prstGeom prst="rect">
+            <a:avLst/>
+          </a:prstGeom>
+          <a:noFill/>
+        </p:spPr>
+        <p:txBody>
+          <a:bodyPr wrap="square">
+            <a:spAutoFit/>
+          </a:bodyPr>
+          <a:lstStyle/>
+          <a:p>
+            <a:r>
+              <a:rPr sz="1600" b="0">
+                <a:solidFill>
+                  <a:srgbClr val="5B6B7C"/>
+                </a:solidFill>
+              </a:rPr>
+              <a:t>Same question, asked twice</a:t>
+            </a:r>
+          </a:p>
+        </p:txBody>
+      </p:sp>
+      <p:sp>
+        <p:nvSpPr>
+          <p:cNvPr id="9" name="TextBox 8"/>
+          <p:cNvSpPr txBox="1"/>
+          <p:nvPr/>
+        </p:nvSpPr>
+        <p:spPr>
+          <a:xfrm>
+            <a:off x="960119" y="1554480"/>
+            <a:ext cx="4937762" cy="225708"/>
+          </a:xfrm>
+          <a:prstGeom prst="rect">
+            <a:avLst/>
+          </a:prstGeom>
+          <a:noFill/>
+        </p:spPr>
+        <p:txBody>
+          <a:bodyPr wrap="square">
+            <a:spAutoFit/>
+          </a:bodyPr>
+          <a:lstStyle/>
+          <a:p>
+            <a:r>
+              <a:rPr sz="1100" b="1">
+                <a:solidFill>
+                  <a:srgbClr val="2D5F7C"/>
+                </a:solidFill>
+              </a:rPr>
+              <a:t>ON SCREEN, DIANA DRIVES</a:t>
+            </a:r>
+          </a:p>
+        </p:txBody>
+      </p:sp>
+      <p:sp>
+        <p:nvSpPr>
+          <p:cNvPr id="10" name="TextBox 9"/>
+          <p:cNvSpPr txBox="1"/>
+          <p:nvPr/>
+        </p:nvSpPr>
+        <p:spPr>
+          <a:xfrm>
+            <a:off x="960119" y="1920239"/>
+            <a:ext cx="4937762" cy="2301589"/>
+          </a:xfrm>
+          <a:prstGeom prst="rect">
+            <a:avLst/>
+          </a:prstGeom>
+          <a:noFill/>
+        </p:spPr>
+        <p:txBody>
+          <a:bodyPr wrap="square">
+            <a:spAutoFit/>
+          </a:bodyPr>
+          <a:lstStyle/>
+          <a:p>
+            <a:r>
+              <a:rPr sz="1800" b="0">
+                <a:solidFill>
+                  <a:srgbClr val="1A2332"/>
+                </a:solidFill>
+              </a:rPr>
+              <a:t>1 · Ungrounded: the same question, no sources</a:t>
+            </a:r>
+          </a:p>
+          <a:p>
+            <a:pPr>
+              <a:spcBef>
+                <a:spcPts val="1000"/>
+              </a:spcBef>
             </a:pPr>
-          </a:p>
-        </p:txBody>
-      </p:sp>
-      <p:sp>
-        <p:nvSpPr>
-          <p:cNvPr id="229" name="TextBox 10"/>
+            <a:r>
+              <a:rPr sz="1800" b="0">
+                <a:solidFill>
+                  <a:srgbClr val="1A2332"/>
+                </a:solidFill>
+              </a:rPr>
+              <a:t>2 · Grounded: the pre-built notebook answers with citations</a:t>
+            </a:r>
+          </a:p>
+          <a:p>
+            <a:pPr>
+              <a:spcBef>
+                <a:spcPts val="1000"/>
+              </a:spcBef>
+            </a:pPr>
+            <a:r>
+              <a:rPr sz="1800" b="0">
+                <a:solidFill>
+                  <a:srgbClr val="1A2332"/>
+                </a:solidFill>
+              </a:rPr>
+              <a:t>3 · Bonus: a rubric, and 15 seconds of the audio overview</a:t>
+            </a:r>
+          </a:p>
+        </p:txBody>
+      </p:sp>
+      <p:sp>
+        <p:nvSpPr>
+          <p:cNvPr id="11" name="TextBox 10"/>
           <p:cNvSpPr txBox="1"/>
           <p:nvPr/>
         </p:nvSpPr>
@@ -4922,162 +4900,117 @@
           <a:prstGeom prst="rect">
             <a:avLst/>
           </a:prstGeom>
-          <a:ln w="12700">
-            <a:miter lim="400000"/>
-          </a:ln>
-          <a:extLst>
-            <a:ext uri="{C572A759-6A51-4108-AA02-DFA0A04FC94B}">
-              <ma14:wrappingTextBoxFlag xmlns:ma14="http://schemas.microsoft.com/office/mac/drawingml/2011/main" val="1"/>
-            </a:ext>
-          </a:extLst>
-        </p:spPr>
-        <p:txBody>
-          <a:bodyPr lIns="45719" rIns="45719">
+          <a:noFill/>
+        </p:spPr>
+        <p:txBody>
+          <a:bodyPr wrap="square">
             <a:spAutoFit/>
           </a:bodyPr>
-          <a:lstStyle>
-            <a:lvl1pPr>
-              <a:defRPr b="1" sz="1100">
-                <a:solidFill>
-                  <a:srgbClr val="C66A28"/>
-                </a:solidFill>
-              </a:defRPr>
-            </a:lvl1pPr>
-          </a:lstStyle>
-          <a:p>
-            <a:pPr/>
-            <a:r>
-              <a:t>OPEN NOW</a:t>
-            </a:r>
-          </a:p>
-        </p:txBody>
-      </p:sp>
-      <p:sp>
-        <p:nvSpPr>
-          <p:cNvPr id="230" name="TextBox 11"/>
+          <a:lstStyle/>
+          <a:p>
+            <a:r>
+              <a:rPr sz="1100" b="1">
+                <a:solidFill>
+                  <a:srgbClr val="E8833A"/>
+                </a:solidFill>
+              </a:rPr>
+              <a:t>ON YOUR PHONE</a:t>
+            </a:r>
+          </a:p>
+        </p:txBody>
+      </p:sp>
+      <p:sp>
+        <p:nvSpPr>
+          <p:cNvPr id="12" name="TextBox 11"/>
           <p:cNvSpPr txBox="1"/>
           <p:nvPr/>
         </p:nvSpPr>
         <p:spPr>
           <a:xfrm>
             <a:off x="6903719" y="1920239"/>
-            <a:ext cx="4480562" cy="367071"/>
-          </a:xfrm>
-          <a:prstGeom prst="rect">
-            <a:avLst/>
-          </a:prstGeom>
-          <a:ln w="12700">
-            <a:miter lim="400000"/>
-          </a:ln>
-          <a:extLst>
-            <a:ext uri="{C572A759-6A51-4108-AA02-DFA0A04FC94B}">
-              <ma14:wrappingTextBoxFlag xmlns:ma14="http://schemas.microsoft.com/office/mac/drawingml/2011/main" val="1"/>
-            </a:ext>
-          </a:extLst>
-        </p:spPr>
-        <p:txBody>
-          <a:bodyPr lIns="45719" rIns="45719">
+            <a:ext cx="4480562" cy="2301589"/>
+          </a:xfrm>
+          <a:prstGeom prst="rect">
+            <a:avLst/>
+          </a:prstGeom>
+          <a:noFill/>
+        </p:spPr>
+        <p:txBody>
+          <a:bodyPr wrap="square">
             <a:spAutoFit/>
           </a:bodyPr>
-          <a:lstStyle>
-            <a:lvl1pPr>
-              <a:defRPr b="1" u="sng">
-                <a:solidFill>
-                  <a:srgbClr val="0000FF"/>
-                </a:solidFill>
-                <a:uFill>
-                  <a:solidFill>
-                    <a:srgbClr val="0000FF"/>
-                  </a:solidFill>
-                </a:uFill>
-                <a:hlinkClick r:id="rId2" invalidUrl="" action="" tgtFrame="" tooltip="" history="1" highlightClick="0" endSnd="0"/>
-              </a:defRPr>
-            </a:lvl1pPr>
-          </a:lstStyle>
+          <a:lstStyle/>
+          <a:p>
+            <a:r>
+              <a:rPr sz="1800" b="0">
+                <a:solidFill>
+                  <a:srgbClr val="1A2332"/>
+                </a:solidFill>
+              </a:rPr>
+              <a:t>Open NotebookLM and try it yourself:</a:t>
+            </a:r>
+          </a:p>
           <a:p>
             <a:pPr>
-              <a:defRPr u="none">
-                <a:solidFill>
-                  <a:srgbClr val="2D5F7C"/>
-                </a:solidFill>
-                <a:uFillTx/>
-              </a:defRPr>
+              <a:spcBef>
+                <a:spcPts val="1000"/>
+              </a:spcBef>
             </a:pPr>
             <a:r>
-              <a:rPr>
-                <a:solidFill>
-                  <a:srgbClr val="0000FF"/>
+              <a:rPr sz="1800" b="0">
+                <a:solidFill>
+                  <a:srgbClr val="1A2332"/>
                 </a:solidFill>
               </a:rPr>
-              <a:t>▶ NotebookLM: Pericarditis Teaching Case</a:t>
-            </a:r>
-          </a:p>
-        </p:txBody>
-      </p:sp>
-      <p:sp>
-        <p:nvSpPr>
-          <p:cNvPr id="231" name="TextBox 12"/>
+              <a:t>notebooklm.google.com</a:t>
+            </a:r>
+          </a:p>
+          <a:p>
+            <a:pPr>
+              <a:spcBef>
+                <a:spcPts val="1000"/>
+              </a:spcBef>
+            </a:pPr>
+            <a:r>
+              <a:rPr sz="1800" b="0">
+                <a:solidFill>
+                  <a:srgbClr val="1A2332"/>
+                </a:solidFill>
+              </a:rPr>
+              <a:t>Then run Prompt #1 with the MedEdPORTAL files (guide → Section 4).</a:t>
+            </a:r>
+          </a:p>
+        </p:txBody>
+      </p:sp>
+      <p:sp>
+        <p:nvSpPr>
+          <p:cNvPr id="13" name="TextBox 12"/>
           <p:cNvSpPr txBox="1"/>
           <p:nvPr/>
         </p:nvSpPr>
         <p:spPr>
           <a:xfrm>
-            <a:off x="6903719" y="3657600"/>
-            <a:ext cx="4480562" cy="280799"/>
-          </a:xfrm>
-          <a:prstGeom prst="rect">
-            <a:avLst/>
-          </a:prstGeom>
-          <a:ln w="12700">
-            <a:miter lim="400000"/>
-          </a:ln>
-          <a:extLst>
-            <a:ext uri="{C572A759-6A51-4108-AA02-DFA0A04FC94B}">
-              <ma14:wrappingTextBoxFlag xmlns:ma14="http://schemas.microsoft.com/office/mac/drawingml/2011/main" val="1"/>
-            </a:ext>
-          </a:extLst>
-        </p:spPr>
-        <p:txBody>
-          <a:bodyPr lIns="45719" rIns="45719">
+            <a:off x="502919" y="5303520"/>
+            <a:ext cx="11155682" cy="300594"/>
+          </a:xfrm>
+          <a:prstGeom prst="rect">
+            <a:avLst/>
+          </a:prstGeom>
+          <a:noFill/>
+        </p:spPr>
+        <p:txBody>
+          <a:bodyPr wrap="square">
             <a:spAutoFit/>
           </a:bodyPr>
-          <a:lstStyle>
-            <a:lvl1pPr>
-              <a:defRPr sz="1400" u="sng">
+          <a:lstStyle/>
+          <a:p>
+            <a:r>
+              <a:rPr sz="1600" b="0">
                 <a:solidFill>
                   <a:srgbClr val="0000FF"/>
                 </a:solidFill>
-                <a:uFill>
-                  <a:solidFill>
-                    <a:srgbClr val="0000FF"/>
-                  </a:solidFill>
-                </a:uFill>
-                <a:hlinkClick r:id="rId3" invalidUrl="" action="" tgtFrame="" tooltip="" history="1" highlightClick="0" endSnd="0"/>
-              </a:defRPr>
-            </a:lvl1pPr>
-          </a:lstStyle>
-          <a:p>
-            <a:pPr>
-              <a:defRPr u="none">
-                <a:solidFill>
-                  <a:srgbClr val="2D5F7C"/>
-                </a:solidFill>
-                <a:uFillTx/>
-              </a:defRPr>
-            </a:pPr>
-            <a:r>
-              <a:rPr u="sng">
-                <a:solidFill>
-                  <a:srgbClr val="0000FF"/>
-                </a:solidFill>
-                <a:uFill>
-                  <a:solidFill>
-                    <a:srgbClr val="0000FF"/>
-                  </a:solidFill>
-                </a:uFill>
-                <a:hlinkClick r:id="rId3" invalidUrl="" action="" tgtFrame="" tooltip="" history="1" highlightClick="0" endSnd="0"/>
               </a:rPr>
-              <a:t>Workshop Guide → Section 4 (prompts)</a:t>
+              <a:t>Workshop Guide → Section 4 (Prompt #1)</a:t>
             </a:r>
           </a:p>
         </p:txBody>
@@ -5110,7 +5043,7 @@
       </p:grpSpPr>
       <p:sp>
         <p:nvSpPr>
-          <p:cNvPr id="257" name="Rectangle 1"/>
+          <p:cNvPr id="2" name="Rectangle 1"/>
           <p:cNvSpPr/>
           <p:nvPr/>
         </p:nvSpPr>
@@ -5125,79 +5058,36 @@
           <a:solidFill>
             <a:srgbClr val="2D5F7C"/>
           </a:solidFill>
-          <a:ln w="12700">
-            <a:miter lim="400000"/>
+          <a:ln>
+            <a:noFill/>
           </a:ln>
-          <a:effectLst>
-            <a:outerShdw sx="100000" sy="100000" kx="0" ky="0" algn="b" rotWithShape="0" blurRad="38100" dist="23000" dir="5400000">
-              <a:srgbClr val="000000">
-                <a:alpha val="35000"/>
-              </a:srgbClr>
-            </a:outerShdw>
-          </a:effectLst>
-        </p:spPr>
-        <p:txBody>
-          <a:bodyPr lIns="45719" rIns="45719" anchor="ctr"/>
-          <a:lstStyle/>
-          <a:p>
-            <a:pPr algn="ctr">
-              <a:defRPr>
-                <a:solidFill>
-                  <a:srgbClr val="FFFFFF"/>
-                </a:solidFill>
-              </a:defRPr>
-            </a:pPr>
-          </a:p>
-        </p:txBody>
-      </p:sp>
-      <p:sp>
-        <p:nvSpPr>
-          <p:cNvPr id="258" name="TextBox 2"/>
-          <p:cNvSpPr txBox="1"/>
-          <p:nvPr/>
-        </p:nvSpPr>
-        <p:spPr>
-          <a:xfrm>
-            <a:off x="502919" y="182879"/>
-            <a:ext cx="11155682" cy="444759"/>
-          </a:xfrm>
-          <a:prstGeom prst="rect">
-            <a:avLst/>
-          </a:prstGeom>
-          <a:ln w="12700">
-            <a:miter lim="400000"/>
-          </a:ln>
-          <a:extLst>
-            <a:ext uri="{C572A759-6A51-4108-AA02-DFA0A04FC94B}">
-              <ma14:wrappingTextBoxFlag xmlns:ma14="http://schemas.microsoft.com/office/mac/drawingml/2011/main" val="1"/>
-            </a:ext>
-          </a:extLst>
-        </p:spPr>
-        <p:txBody>
-          <a:bodyPr lIns="45719" rIns="45719">
-            <a:spAutoFit/>
-          </a:bodyPr>
-          <a:lstStyle>
-            <a:lvl1pPr>
-              <a:defRPr b="1" sz="2800">
-                <a:solidFill>
-                  <a:srgbClr val="FFFFFF"/>
-                </a:solidFill>
-              </a:defRPr>
-            </a:lvl1pPr>
-          </a:lstStyle>
-          <a:p>
-            <a:pPr/>
-            <a:r>
-              <a:rPr/>
-              <a:t>Think · Pair · Share: Try It Now (4 min)</a:t>
-            </a:r>
-          </a:p>
-        </p:txBody>
-      </p:sp>
-      <p:sp>
-        <p:nvSpPr>
-          <p:cNvPr id="259" name="Rectangle 3"/>
+          <a:effectLst/>
+        </p:spPr>
+        <p:style>
+          <a:lnRef idx="1">
+            <a:schemeClr val="accent1"/>
+          </a:lnRef>
+          <a:fillRef idx="3">
+            <a:schemeClr val="accent1"/>
+          </a:fillRef>
+          <a:effectRef idx="2">
+            <a:schemeClr val="accent1"/>
+          </a:effectRef>
+          <a:fontRef idx="minor">
+            <a:schemeClr val="lt1"/>
+          </a:fontRef>
+        </p:style>
+        <p:txBody>
+          <a:bodyPr rtlCol="0" anchor="ctr"/>
+          <a:lstStyle/>
+          <a:p>
+            <a:pPr algn="ctr"/>
+          </a:p>
+        </p:txBody>
+      </p:sp>
+      <p:sp>
+        <p:nvSpPr>
+          <p:cNvPr id="3" name="Rectangle 2"/>
           <p:cNvSpPr/>
           <p:nvPr/>
         </p:nvSpPr>
@@ -5212,34 +5102,36 @@
           <a:solidFill>
             <a:srgbClr val="F0F4F8"/>
           </a:solidFill>
-          <a:ln w="12700">
-            <a:miter lim="400000"/>
+          <a:ln>
+            <a:noFill/>
           </a:ln>
-          <a:effectLst>
-            <a:outerShdw sx="100000" sy="100000" kx="0" ky="0" algn="b" rotWithShape="0" blurRad="38100" dist="23000" dir="5400000">
-              <a:srgbClr val="000000">
-                <a:alpha val="35000"/>
-              </a:srgbClr>
-            </a:outerShdw>
-          </a:effectLst>
-        </p:spPr>
-        <p:txBody>
-          <a:bodyPr lIns="45719" rIns="45719" anchor="ctr"/>
-          <a:lstStyle/>
-          <a:p>
-            <a:pPr algn="ctr">
-              <a:defRPr>
-                <a:solidFill>
-                  <a:srgbClr val="FFFFFF"/>
-                </a:solidFill>
-              </a:defRPr>
-            </a:pPr>
-          </a:p>
-        </p:txBody>
-      </p:sp>
-      <p:sp>
-        <p:nvSpPr>
-          <p:cNvPr id="260" name="Rectangle 4"/>
+          <a:effectLst/>
+        </p:spPr>
+        <p:style>
+          <a:lnRef idx="1">
+            <a:schemeClr val="accent1"/>
+          </a:lnRef>
+          <a:fillRef idx="3">
+            <a:schemeClr val="accent1"/>
+          </a:fillRef>
+          <a:effectRef idx="2">
+            <a:schemeClr val="accent1"/>
+          </a:effectRef>
+          <a:fontRef idx="minor">
+            <a:schemeClr val="lt1"/>
+          </a:fontRef>
+        </p:style>
+        <p:txBody>
+          <a:bodyPr rtlCol="0" anchor="ctr"/>
+          <a:lstStyle/>
+          <a:p>
+            <a:pPr algn="ctr"/>
+          </a:p>
+        </p:txBody>
+      </p:sp>
+      <p:sp>
+        <p:nvSpPr>
+          <p:cNvPr id="4" name="Rectangle 3"/>
           <p:cNvSpPr/>
           <p:nvPr/>
         </p:nvSpPr>
@@ -5254,34 +5146,69 @@
           <a:solidFill>
             <a:srgbClr val="2D5F7C"/>
           </a:solidFill>
-          <a:ln w="12700">
-            <a:miter lim="400000"/>
+          <a:ln>
+            <a:noFill/>
           </a:ln>
-          <a:effectLst>
-            <a:outerShdw sx="100000" sy="100000" kx="0" ky="0" algn="b" rotWithShape="0" blurRad="38100" dist="23000" dir="5400000">
-              <a:srgbClr val="000000">
-                <a:alpha val="35000"/>
-              </a:srgbClr>
-            </a:outerShdw>
-          </a:effectLst>
-        </p:spPr>
-        <p:txBody>
-          <a:bodyPr lIns="45719" rIns="45719" anchor="ctr"/>
-          <a:lstStyle/>
-          <a:p>
-            <a:pPr algn="ctr">
-              <a:defRPr>
+          <a:effectLst/>
+        </p:spPr>
+        <p:style>
+          <a:lnRef idx="1">
+            <a:schemeClr val="accent1"/>
+          </a:lnRef>
+          <a:fillRef idx="3">
+            <a:schemeClr val="accent1"/>
+          </a:fillRef>
+          <a:effectRef idx="2">
+            <a:schemeClr val="accent1"/>
+          </a:effectRef>
+          <a:fontRef idx="minor">
+            <a:schemeClr val="lt1"/>
+          </a:fontRef>
+        </p:style>
+        <p:txBody>
+          <a:bodyPr rtlCol="0" anchor="ctr"/>
+          <a:lstStyle/>
+          <a:p>
+            <a:pPr algn="ctr"/>
+          </a:p>
+        </p:txBody>
+      </p:sp>
+      <p:sp>
+        <p:nvSpPr>
+          <p:cNvPr id="5" name="TextBox 4"/>
+          <p:cNvSpPr txBox="1"/>
+          <p:nvPr/>
+        </p:nvSpPr>
+        <p:spPr>
+          <a:xfrm>
+            <a:off x="502919" y="182879"/>
+            <a:ext cx="11155682" cy="444759"/>
+          </a:xfrm>
+          <a:prstGeom prst="rect">
+            <a:avLst/>
+          </a:prstGeom>
+          <a:noFill/>
+        </p:spPr>
+        <p:txBody>
+          <a:bodyPr wrap="square">
+            <a:spAutoFit/>
+          </a:bodyPr>
+          <a:lstStyle/>
+          <a:p>
+            <a:r>
+              <a:rPr sz="2800" b="1">
                 <a:solidFill>
                   <a:srgbClr val="FFFFFF"/>
                 </a:solidFill>
-              </a:defRPr>
-            </a:pPr>
-          </a:p>
-        </p:txBody>
-      </p:sp>
-      <p:sp>
-        <p:nvSpPr>
-          <p:cNvPr id="261" name="TextBox 5"/>
+              </a:rPr>
+              <a:t>Think · Pair · Share: Try It Now (4 min)</a:t>
+            </a:r>
+          </a:p>
+        </p:txBody>
+      </p:sp>
+      <p:sp>
+        <p:nvSpPr>
+          <p:cNvPr id="6" name="TextBox 5"/>
           <p:cNvSpPr txBox="1"/>
           <p:nvPr/>
         </p:nvSpPr>
@@ -5293,53 +5220,58 @@
           <a:prstGeom prst="rect">
             <a:avLst/>
           </a:prstGeom>
-          <a:ln w="12700">
-            <a:miter lim="400000"/>
-          </a:ln>
-          <a:extLst>
-            <a:ext uri="{C572A759-6A51-4108-AA02-DFA0A04FC94B}">
-              <ma14:wrappingTextBoxFlag xmlns:ma14="http://schemas.microsoft.com/office/mac/drawingml/2011/main" val="1"/>
-            </a:ext>
-          </a:extLst>
-        </p:spPr>
-        <p:txBody>
-          <a:bodyPr lIns="45719" rIns="45719">
+          <a:noFill/>
+        </p:spPr>
+        <p:txBody>
+          <a:bodyPr wrap="square">
             <a:spAutoFit/>
           </a:bodyPr>
           <a:lstStyle/>
           <a:p>
+            <a:r>
+              <a:rPr sz="2200" b="0">
+                <a:solidFill>
+                  <a:srgbClr val="1E4258"/>
+                </a:solidFill>
+              </a:rPr>
+              <a:t>Run Today's Demo Case on your phone (guide → Section 4, prompt 5b).</a:t>
+            </a:r>
+          </a:p>
+          <a:p>
             <a:pPr>
               <a:spcBef>
-                <a:spcPts val="1400"/>
+                <a:spcPts val="1600"/>
               </a:spcBef>
-              <a:defRPr sz="2200">
+            </a:pPr>
+            <a:r>
+              <a:rPr sz="2200" b="0">
                 <a:solidFill>
                   <a:srgbClr val="1E4258"/>
                 </a:solidFill>
-              </a:defRPr>
+              </a:rPr>
+              <a:t>Then the grounded version: the MedEdPORTAL files into NotebookLM, Prompt #1.</a:t>
+            </a:r>
+          </a:p>
+          <a:p>
+            <a:pPr>
+              <a:spcBef>
+                <a:spcPts val="1600"/>
+              </a:spcBef>
             </a:pPr>
             <a:r>
-              <a:rPr/>
-              <a:t>Run Today's Demo Case (Section 4, prompt 5b) in any chatbot</a:t>
-            </a:r>
-          </a:p>
-          <a:p>
-            <a:r>
-              <a:rPr/>
-              <a:t>Then the grounded contrast: download the MedEdPORTAL files, upload 1 and 2 into NotebookLM, run Prompt #1</a:t>
-            </a:r>
-          </a:p>
-          <a:p>
-            <a:r>
-              <a:rPr/>
-              <a:t>Ask your table: who wrote that case?</a:t>
-            </a:r>
-          </a:p>
-        </p:txBody>
-      </p:sp>
-      <p:sp>
-        <p:nvSpPr>
-          <p:cNvPr id="262" name="TextBox 6"/>
+              <a:rPr sz="2200" b="0">
+                <a:solidFill>
+                  <a:srgbClr val="1E4258"/>
+                </a:solidFill>
+              </a:rPr>
+              <a:t>Compare: what would you verify before this case touches a learner?</a:t>
+            </a:r>
+          </a:p>
+        </p:txBody>
+      </p:sp>
+      <p:sp>
+        <p:nvSpPr>
+          <p:cNvPr id="7" name="TextBox 6"/>
           <p:cNvSpPr txBox="1"/>
           <p:nvPr/>
         </p:nvSpPr>
@@ -5351,56 +5283,21 @@
           <a:prstGeom prst="rect">
             <a:avLst/>
           </a:prstGeom>
-          <a:ln w="12700">
-            <a:miter lim="400000"/>
-          </a:ln>
-          <a:extLst>
-            <a:ext uri="{C572A759-6A51-4108-AA02-DFA0A04FC94B}">
-              <ma14:wrappingTextBoxFlag xmlns:ma14="http://schemas.microsoft.com/office/mac/drawingml/2011/main" val="1"/>
-            </a:ext>
-          </a:extLst>
-        </p:spPr>
-        <p:txBody>
-          <a:bodyPr lIns="45719" rIns="45719">
+          <a:noFill/>
+        </p:spPr>
+        <p:txBody>
+          <a:bodyPr wrap="square">
             <a:spAutoFit/>
           </a:bodyPr>
-          <a:lstStyle>
-            <a:lvl1pPr>
-              <a:defRPr sz="1600" u="sng">
+          <a:lstStyle/>
+          <a:p>
+            <a:r>
+              <a:rPr sz="1600" b="0">
                 <a:solidFill>
                   <a:srgbClr val="0000FF"/>
                 </a:solidFill>
-                <a:uFill>
-                  <a:solidFill>
-                    <a:srgbClr val="0000FF"/>
-                  </a:solidFill>
-                </a:uFill>
-                <a:hlinkClick r:id="rId2" invalidUrl="" action="" tgtFrame="" tooltip="" history="1" highlightClick="0" endSnd="0"/>
-              </a:defRPr>
-            </a:lvl1pPr>
-          </a:lstStyle>
-          <a:p>
-            <a:pPr>
-              <a:defRPr u="none">
-                <a:solidFill>
-                  <a:srgbClr val="2D5F7C"/>
-                </a:solidFill>
-                <a:uFillTx/>
-              </a:defRPr>
-            </a:pPr>
-            <a:r>
-              <a:rPr u="sng">
-                <a:solidFill>
-                  <a:srgbClr val="0000FF"/>
-                </a:solidFill>
-                <a:uFill>
-                  <a:solidFill>
-                    <a:srgbClr val="0000FF"/>
-                  </a:solidFill>
-                </a:uFill>
-                <a:hlinkClick r:id="rId2" invalidUrl="" action="" tgtFrame="" tooltip="" history="1" highlightClick="0" endSnd="0"/>
               </a:rPr>
-              <a:t>Workshop Guide</a:t>
+              <a:t>Workshop Guide → Section 4</a:t>
             </a:r>
           </a:p>
         </p:txBody>
@@ -5662,7 +5559,7 @@
       </p:grpSpPr>
       <p:sp>
         <p:nvSpPr>
-          <p:cNvPr id="277" name="Rectangle 1"/>
+          <p:cNvPr id="2" name="Rectangle 1"/>
           <p:cNvSpPr/>
           <p:nvPr/>
         </p:nvSpPr>
@@ -5677,130 +5574,43 @@
           <a:solidFill>
             <a:srgbClr val="2D5F7C"/>
           </a:solidFill>
-          <a:ln w="12700">
-            <a:miter lim="400000"/>
+          <a:ln>
+            <a:noFill/>
           </a:ln>
-          <a:effectLst>
-            <a:outerShdw sx="100000" sy="100000" kx="0" ky="0" algn="b" rotWithShape="0" blurRad="38100" dist="23000" dir="5400000">
-              <a:srgbClr val="000000">
-                <a:alpha val="35000"/>
-              </a:srgbClr>
-            </a:outerShdw>
-          </a:effectLst>
-        </p:spPr>
-        <p:txBody>
-          <a:bodyPr lIns="45719" rIns="45719" anchor="ctr"/>
-          <a:lstStyle/>
-          <a:p>
-            <a:pPr algn="ctr">
-              <a:defRPr>
-                <a:solidFill>
-                  <a:srgbClr val="FFFFFF"/>
-                </a:solidFill>
-              </a:defRPr>
-            </a:pPr>
-          </a:p>
-        </p:txBody>
-      </p:sp>
-      <p:sp>
-        <p:nvSpPr>
-          <p:cNvPr id="278" name="TextBox 2"/>
-          <p:cNvSpPr txBox="1"/>
-          <p:nvPr/>
-        </p:nvSpPr>
-        <p:spPr>
-          <a:xfrm>
-            <a:off x="502919" y="182879"/>
-            <a:ext cx="11155682" cy="444759"/>
-          </a:xfrm>
-          <a:prstGeom prst="rect">
-            <a:avLst/>
-          </a:prstGeom>
-          <a:ln w="12700">
-            <a:miter lim="400000"/>
-          </a:ln>
-          <a:extLst>
-            <a:ext uri="{C572A759-6A51-4108-AA02-DFA0A04FC94B}">
-              <ma14:wrappingTextBoxFlag xmlns:ma14="http://schemas.microsoft.com/office/mac/drawingml/2011/main" val="1"/>
-            </a:ext>
-          </a:extLst>
-        </p:spPr>
-        <p:txBody>
-          <a:bodyPr lIns="45719" rIns="45719">
-            <a:spAutoFit/>
-          </a:bodyPr>
-          <a:lstStyle>
-            <a:lvl1pPr>
-              <a:defRPr b="1" sz="2800">
-                <a:solidFill>
-                  <a:srgbClr val="FFFFFF"/>
-                </a:solidFill>
-              </a:defRPr>
-            </a:lvl1pPr>
-          </a:lstStyle>
-          <a:p>
-            <a:pPr/>
-            <a:r>
-              <a:t>The Fidelity Spectrum</a:t>
-            </a:r>
-          </a:p>
-        </p:txBody>
-      </p:sp>
-      <p:sp>
-        <p:nvSpPr>
-          <p:cNvPr id="279" name="TextBox 3"/>
-          <p:cNvSpPr txBox="1"/>
-          <p:nvPr/>
-        </p:nvSpPr>
-        <p:spPr>
-          <a:xfrm>
-            <a:off x="502919" y="1097280"/>
-            <a:ext cx="11155682" cy="300594"/>
-          </a:xfrm>
-          <a:prstGeom prst="rect">
-            <a:avLst/>
-          </a:prstGeom>
-          <a:ln w="12700">
-            <a:miter lim="400000"/>
-          </a:ln>
-          <a:extLst>
-            <a:ext uri="{C572A759-6A51-4108-AA02-DFA0A04FC94B}">
-              <ma14:wrappingTextBoxFlag xmlns:ma14="http://schemas.microsoft.com/office/mac/drawingml/2011/main" val="1"/>
-            </a:ext>
-          </a:extLst>
-        </p:spPr>
-        <p:txBody>
-          <a:bodyPr lIns="45719" rIns="45719">
-            <a:spAutoFit/>
-          </a:bodyPr>
-          <a:lstStyle>
-            <a:lvl1pPr>
-              <a:defRPr sz="1600">
-                <a:solidFill>
-                  <a:srgbClr val="5A6B7E"/>
-                </a:solidFill>
-              </a:defRPr>
-            </a:lvl1pPr>
-          </a:lstStyle>
-          <a:p>
-            <a:pPr/>
-            <a:r>
-              <a:rPr/>
-              <a:t>The most expensive simulation is not the best. Reasoning lives at the text-and-audio end, images included.</a:t>
-            </a:r>
-          </a:p>
-        </p:txBody>
-      </p:sp>
-      <p:sp>
-        <p:nvSpPr>
-          <p:cNvPr id="280" name="Rectangle 4"/>
+          <a:effectLst/>
+        </p:spPr>
+        <p:style>
+          <a:lnRef idx="1">
+            <a:schemeClr val="accent1"/>
+          </a:lnRef>
+          <a:fillRef idx="3">
+            <a:schemeClr val="accent1"/>
+          </a:fillRef>
+          <a:effectRef idx="2">
+            <a:schemeClr val="accent1"/>
+          </a:effectRef>
+          <a:fontRef idx="minor">
+            <a:schemeClr val="lt1"/>
+          </a:fontRef>
+        </p:style>
+        <p:txBody>
+          <a:bodyPr rtlCol="0" anchor="ctr"/>
+          <a:lstStyle/>
+          <a:p>
+            <a:pPr algn="ctr"/>
+          </a:p>
+        </p:txBody>
+      </p:sp>
+      <p:sp>
+        <p:nvSpPr>
+          <p:cNvPr id="3" name="Rectangle 2"/>
           <p:cNvSpPr/>
           <p:nvPr/>
         </p:nvSpPr>
         <p:spPr>
           <a:xfrm>
-            <a:off x="365759" y="1371600"/>
-            <a:ext cx="2194562" cy="3840480"/>
+            <a:off x="640080" y="1371600"/>
+            <a:ext cx="5486401" cy="4114800"/>
           </a:xfrm>
           <a:prstGeom prst="rect">
             <a:avLst/>
@@ -5808,41 +5618,43 @@
           <a:solidFill>
             <a:srgbClr val="F0F4F8"/>
           </a:solidFill>
-          <a:ln w="12700">
-            <a:miter lim="400000"/>
+          <a:ln>
+            <a:noFill/>
           </a:ln>
-          <a:effectLst>
-            <a:outerShdw sx="100000" sy="100000" kx="0" ky="0" algn="b" rotWithShape="0" blurRad="38100" dist="23000" dir="5400000">
-              <a:srgbClr val="000000">
-                <a:alpha val="35000"/>
-              </a:srgbClr>
-            </a:outerShdw>
-          </a:effectLst>
-        </p:spPr>
-        <p:txBody>
-          <a:bodyPr lIns="45719" rIns="45719" anchor="ctr"/>
-          <a:lstStyle/>
-          <a:p>
-            <a:pPr algn="ctr">
-              <a:defRPr>
-                <a:solidFill>
-                  <a:srgbClr val="FFFFFF"/>
-                </a:solidFill>
-              </a:defRPr>
-            </a:pPr>
-          </a:p>
-        </p:txBody>
-      </p:sp>
-      <p:sp>
-        <p:nvSpPr>
-          <p:cNvPr id="281" name="Rectangle 5"/>
+          <a:effectLst/>
+        </p:spPr>
+        <p:style>
+          <a:lnRef idx="1">
+            <a:schemeClr val="accent1"/>
+          </a:lnRef>
+          <a:fillRef idx="3">
+            <a:schemeClr val="accent1"/>
+          </a:fillRef>
+          <a:effectRef idx="2">
+            <a:schemeClr val="accent1"/>
+          </a:effectRef>
+          <a:fontRef idx="minor">
+            <a:schemeClr val="lt1"/>
+          </a:fontRef>
+        </p:style>
+        <p:txBody>
+          <a:bodyPr rtlCol="0" anchor="ctr"/>
+          <a:lstStyle/>
+          <a:p>
+            <a:pPr algn="ctr"/>
+          </a:p>
+        </p:txBody>
+      </p:sp>
+      <p:sp>
+        <p:nvSpPr>
+          <p:cNvPr id="4" name="Rectangle 3"/>
           <p:cNvSpPr/>
           <p:nvPr/>
         </p:nvSpPr>
         <p:spPr>
           <a:xfrm>
-            <a:off x="365759" y="1371600"/>
-            <a:ext cx="2194562" cy="50800"/>
+            <a:off x="640080" y="1371600"/>
+            <a:ext cx="50801" cy="4114800"/>
           </a:xfrm>
           <a:prstGeom prst="rect">
             <a:avLst/>
@@ -5850,260 +5662,87 @@
           <a:solidFill>
             <a:srgbClr val="2D5F7C"/>
           </a:solidFill>
-          <a:ln w="12700">
-            <a:miter lim="400000"/>
+          <a:ln>
+            <a:noFill/>
           </a:ln>
-          <a:effectLst>
-            <a:outerShdw sx="100000" sy="100000" kx="0" ky="0" algn="b" rotWithShape="0" blurRad="38100" dist="23000" dir="5400000">
-              <a:srgbClr val="000000">
-                <a:alpha val="35000"/>
-              </a:srgbClr>
-            </a:outerShdw>
-          </a:effectLst>
-        </p:spPr>
-        <p:txBody>
-          <a:bodyPr lIns="45719" rIns="45719" anchor="ctr"/>
-          <a:lstStyle/>
-          <a:p>
-            <a:pPr algn="ctr">
-              <a:defRPr>
-                <a:solidFill>
-                  <a:srgbClr val="FFFFFF"/>
-                </a:solidFill>
-              </a:defRPr>
-            </a:pPr>
-          </a:p>
-        </p:txBody>
-      </p:sp>
-      <p:sp>
-        <p:nvSpPr>
-          <p:cNvPr id="282" name="TextBox 6"/>
-          <p:cNvSpPr txBox="1"/>
-          <p:nvPr/>
-        </p:nvSpPr>
-        <p:spPr>
-          <a:xfrm>
-            <a:off x="502920" y="1554480"/>
-            <a:ext cx="1920239" cy="248305"/>
-          </a:xfrm>
-          <a:prstGeom prst="rect">
-            <a:avLst/>
-          </a:prstGeom>
-          <a:ln w="12700">
-            <a:miter lim="400000"/>
+          <a:effectLst/>
+        </p:spPr>
+        <p:style>
+          <a:lnRef idx="1">
+            <a:schemeClr val="accent1"/>
+          </a:lnRef>
+          <a:fillRef idx="3">
+            <a:schemeClr val="accent1"/>
+          </a:fillRef>
+          <a:effectRef idx="2">
+            <a:schemeClr val="accent1"/>
+          </a:effectRef>
+          <a:fontRef idx="minor">
+            <a:schemeClr val="lt1"/>
+          </a:fontRef>
+        </p:style>
+        <p:txBody>
+          <a:bodyPr rtlCol="0" anchor="ctr"/>
+          <a:lstStyle/>
+          <a:p>
+            <a:pPr algn="ctr"/>
+          </a:p>
+        </p:txBody>
+      </p:sp>
+      <p:sp>
+        <p:nvSpPr>
+          <p:cNvPr id="5" name="Rectangle 4"/>
+          <p:cNvSpPr/>
+          <p:nvPr/>
+        </p:nvSpPr>
+        <p:spPr>
+          <a:xfrm>
+            <a:off x="6583680" y="1371600"/>
+            <a:ext cx="5029201" cy="4114800"/>
+          </a:xfrm>
+          <a:prstGeom prst="rect">
+            <a:avLst/>
+          </a:prstGeom>
+          <a:solidFill>
+            <a:srgbClr val="FDF6F0"/>
+          </a:solidFill>
+          <a:ln>
+            <a:noFill/>
           </a:ln>
-          <a:extLst>
-            <a:ext uri="{C572A759-6A51-4108-AA02-DFA0A04FC94B}">
-              <ma14:wrappingTextBoxFlag xmlns:ma14="http://schemas.microsoft.com/office/mac/drawingml/2011/main" val="1"/>
-            </a:ext>
-          </a:extLst>
-        </p:spPr>
-        <p:txBody>
-          <a:bodyPr lIns="45719" rIns="45719">
-            <a:spAutoFit/>
-          </a:bodyPr>
-          <a:lstStyle>
-            <a:lvl1pPr>
-              <a:defRPr b="1" sz="1200">
-                <a:solidFill>
-                  <a:srgbClr val="E8833A"/>
-                </a:solidFill>
-              </a:defRPr>
-            </a:lvl1pPr>
-          </a:lstStyle>
-          <a:p>
-            <a:pPr/>
-            <a:r>
-              <a:rPr/>
-              <a:t>Free</a:t>
-            </a:r>
-          </a:p>
-        </p:txBody>
-      </p:sp>
-      <p:sp>
-        <p:nvSpPr>
-          <p:cNvPr id="283" name="TextBox 7"/>
-          <p:cNvSpPr txBox="1"/>
-          <p:nvPr/>
-        </p:nvSpPr>
-        <p:spPr>
-          <a:xfrm>
-            <a:off x="502920" y="1920239"/>
-            <a:ext cx="1920239" cy="310492"/>
-          </a:xfrm>
-          <a:prstGeom prst="rect">
-            <a:avLst/>
-          </a:prstGeom>
-          <a:ln w="12700">
-            <a:miter lim="400000"/>
-          </a:ln>
-          <a:extLst>
-            <a:ext uri="{C572A759-6A51-4108-AA02-DFA0A04FC94B}">
-              <ma14:wrappingTextBoxFlag xmlns:ma14="http://schemas.microsoft.com/office/mac/drawingml/2011/main" val="1"/>
-            </a:ext>
-          </a:extLst>
-        </p:spPr>
-        <p:txBody>
-          <a:bodyPr lIns="45719" rIns="45719">
-            <a:spAutoFit/>
-          </a:bodyPr>
-          <a:lstStyle>
-            <a:lvl1pPr>
-              <a:defRPr b="1" sz="1700">
-                <a:solidFill>
-                  <a:srgbClr val="1E4258"/>
-                </a:solidFill>
-              </a:defRPr>
-            </a:lvl1pPr>
-          </a:lstStyle>
-          <a:p>
-            <a:pPr/>
-            <a:r>
-              <a:t>Text &amp; Audio</a:t>
-            </a:r>
-          </a:p>
-        </p:txBody>
-      </p:sp>
-      <p:sp>
-        <p:nvSpPr>
-          <p:cNvPr id="284" name="TextBox 8"/>
-          <p:cNvSpPr txBox="1"/>
-          <p:nvPr/>
-        </p:nvSpPr>
-        <p:spPr>
-          <a:xfrm>
-            <a:off x="502920" y="2560320"/>
-            <a:ext cx="1920239" cy="258202"/>
-          </a:xfrm>
-          <a:prstGeom prst="rect">
-            <a:avLst/>
-          </a:prstGeom>
-          <a:ln w="12700">
-            <a:miter lim="400000"/>
-          </a:ln>
-          <a:extLst>
-            <a:ext uri="{C572A759-6A51-4108-AA02-DFA0A04FC94B}">
-              <ma14:wrappingTextBoxFlag xmlns:ma14="http://schemas.microsoft.com/office/mac/drawingml/2011/main" val="1"/>
-            </a:ext>
-          </a:extLst>
-        </p:spPr>
-        <p:txBody>
-          <a:bodyPr lIns="45719" rIns="45719">
-            <a:spAutoFit/>
-          </a:bodyPr>
-          <a:lstStyle>
-            <a:lvl1pPr>
-              <a:defRPr b="1" sz="1300">
-                <a:solidFill>
-                  <a:srgbClr val="2D8659"/>
-                </a:solidFill>
-              </a:defRPr>
-            </a:lvl1pPr>
-          </a:lstStyle>
-          <a:p>
-            <a:pPr/>
-            <a:r>
-              <a:t>Free, $20/mo</a:t>
-            </a:r>
-          </a:p>
-        </p:txBody>
-      </p:sp>
-      <p:sp>
-        <p:nvSpPr>
-          <p:cNvPr id="285" name="TextBox 9"/>
-          <p:cNvSpPr txBox="1"/>
-          <p:nvPr/>
-        </p:nvSpPr>
-        <p:spPr>
-          <a:xfrm>
-            <a:off x="502920" y="3017520"/>
-            <a:ext cx="1920239" cy="461402"/>
-          </a:xfrm>
-          <a:prstGeom prst="rect">
-            <a:avLst/>
-          </a:prstGeom>
-          <a:ln w="12700">
-            <a:miter lim="400000"/>
-          </a:ln>
-          <a:extLst>
-            <a:ext uri="{C572A759-6A51-4108-AA02-DFA0A04FC94B}">
-              <ma14:wrappingTextBoxFlag xmlns:ma14="http://schemas.microsoft.com/office/mac/drawingml/2011/main" val="1"/>
-            </a:ext>
-          </a:extLst>
-        </p:spPr>
-        <p:txBody>
-          <a:bodyPr lIns="45719" rIns="45719">
-            <a:spAutoFit/>
-          </a:bodyPr>
-          <a:lstStyle>
-            <a:lvl1pPr>
-              <a:defRPr sz="1300">
-                <a:solidFill>
-                  <a:srgbClr val="5A6B7E"/>
-                </a:solidFill>
-              </a:defRPr>
-            </a:lvl1pPr>
-          </a:lstStyle>
-          <a:p>
-            <a:pPr/>
-            <a:r>
-              <a:t>Interview, labs, differential, images</a:t>
-            </a:r>
-          </a:p>
-        </p:txBody>
-      </p:sp>
-      <p:sp>
-        <p:nvSpPr>
-          <p:cNvPr id="286" name="Rectangle 10"/>
+          <a:effectLst/>
+        </p:spPr>
+        <p:style>
+          <a:lnRef idx="1">
+            <a:schemeClr val="accent1"/>
+          </a:lnRef>
+          <a:fillRef idx="3">
+            <a:schemeClr val="accent1"/>
+          </a:fillRef>
+          <a:effectRef idx="2">
+            <a:schemeClr val="accent1"/>
+          </a:effectRef>
+          <a:fontRef idx="minor">
+            <a:schemeClr val="lt1"/>
+          </a:fontRef>
+        </p:style>
+        <p:txBody>
+          <a:bodyPr rtlCol="0" anchor="ctr"/>
+          <a:lstStyle/>
+          <a:p>
+            <a:pPr algn="ctr"/>
+          </a:p>
+        </p:txBody>
+      </p:sp>
+      <p:sp>
+        <p:nvSpPr>
+          <p:cNvPr id="6" name="Rectangle 5"/>
           <p:cNvSpPr/>
           <p:nvPr/>
         </p:nvSpPr>
         <p:spPr>
           <a:xfrm>
-            <a:off x="2743199" y="1371600"/>
-            <a:ext cx="2194562" cy="3840480"/>
-          </a:xfrm>
-          <a:prstGeom prst="rect">
-            <a:avLst/>
-          </a:prstGeom>
-          <a:solidFill>
-            <a:srgbClr val="F0F4F8"/>
-          </a:solidFill>
-          <a:ln w="12700">
-            <a:miter lim="400000"/>
-          </a:ln>
-          <a:effectLst>
-            <a:outerShdw sx="100000" sy="100000" kx="0" ky="0" algn="b" rotWithShape="0" blurRad="38100" dist="23000" dir="5400000">
-              <a:srgbClr val="000000">
-                <a:alpha val="35000"/>
-              </a:srgbClr>
-            </a:outerShdw>
-          </a:effectLst>
-        </p:spPr>
-        <p:txBody>
-          <a:bodyPr lIns="45719" rIns="45719" anchor="ctr"/>
-          <a:lstStyle/>
-          <a:p>
-            <a:pPr algn="ctr">
-              <a:defRPr>
-                <a:solidFill>
-                  <a:srgbClr val="FFFFFF"/>
-                </a:solidFill>
-              </a:defRPr>
-            </a:pPr>
-          </a:p>
-        </p:txBody>
-      </p:sp>
-      <p:sp>
-        <p:nvSpPr>
-          <p:cNvPr id="287" name="Rectangle 11"/>
-          <p:cNvSpPr/>
-          <p:nvPr/>
-        </p:nvSpPr>
-        <p:spPr>
-          <a:xfrm>
-            <a:off x="2743199" y="1371600"/>
-            <a:ext cx="2194562" cy="50800"/>
+            <a:off x="6583680" y="1371600"/>
+            <a:ext cx="50801" cy="4114800"/>
           </a:xfrm>
           <a:prstGeom prst="rect">
             <a:avLst/>
@@ -6111,1575 +5750,350 @@
           <a:solidFill>
             <a:srgbClr val="E8833A"/>
           </a:solidFill>
-          <a:ln w="12700">
-            <a:miter lim="400000"/>
+          <a:ln>
+            <a:noFill/>
           </a:ln>
-          <a:effectLst>
-            <a:outerShdw sx="100000" sy="100000" kx="0" ky="0" algn="b" rotWithShape="0" blurRad="38100" dist="23000" dir="5400000">
-              <a:srgbClr val="000000">
-                <a:alpha val="35000"/>
-              </a:srgbClr>
-            </a:outerShdw>
-          </a:effectLst>
-        </p:spPr>
-        <p:txBody>
-          <a:bodyPr lIns="45719" rIns="45719" anchor="ctr"/>
-          <a:lstStyle/>
-          <a:p>
-            <a:pPr algn="ctr">
-              <a:defRPr>
-                <a:solidFill>
-                  <a:srgbClr val="FFFFFF"/>
-                </a:solidFill>
-              </a:defRPr>
-            </a:pPr>
-          </a:p>
-        </p:txBody>
-      </p:sp>
-      <p:sp>
-        <p:nvSpPr>
-          <p:cNvPr id="288" name="TextBox 12"/>
+          <a:effectLst/>
+        </p:spPr>
+        <p:style>
+          <a:lnRef idx="1">
+            <a:schemeClr val="accent1"/>
+          </a:lnRef>
+          <a:fillRef idx="3">
+            <a:schemeClr val="accent1"/>
+          </a:fillRef>
+          <a:effectRef idx="2">
+            <a:schemeClr val="accent1"/>
+          </a:effectRef>
+          <a:fontRef idx="minor">
+            <a:schemeClr val="lt1"/>
+          </a:fontRef>
+        </p:style>
+        <p:txBody>
+          <a:bodyPr rtlCol="0" anchor="ctr"/>
+          <a:lstStyle/>
+          <a:p>
+            <a:pPr algn="ctr"/>
+          </a:p>
+        </p:txBody>
+      </p:sp>
+      <p:sp>
+        <p:nvSpPr>
+          <p:cNvPr id="7" name="TextBox 6"/>
           <p:cNvSpPr txBox="1"/>
           <p:nvPr/>
         </p:nvSpPr>
         <p:spPr>
           <a:xfrm>
-            <a:off x="2880359" y="1554480"/>
-            <a:ext cx="1920240" cy="248305"/>
-          </a:xfrm>
-          <a:prstGeom prst="rect">
-            <a:avLst/>
-          </a:prstGeom>
-          <a:ln w="12700">
-            <a:miter lim="400000"/>
-          </a:ln>
-          <a:extLst>
-            <a:ext uri="{C572A759-6A51-4108-AA02-DFA0A04FC94B}">
-              <ma14:wrappingTextBoxFlag xmlns:ma14="http://schemas.microsoft.com/office/mac/drawingml/2011/main" val="1"/>
-            </a:ext>
-          </a:extLst>
-        </p:spPr>
-        <p:txBody>
-          <a:bodyPr lIns="45719" rIns="45719">
+            <a:off x="502919" y="182879"/>
+            <a:ext cx="11155682" cy="444759"/>
+          </a:xfrm>
+          <a:prstGeom prst="rect">
+            <a:avLst/>
+          </a:prstGeom>
+          <a:noFill/>
+        </p:spPr>
+        <p:txBody>
+          <a:bodyPr wrap="square">
             <a:spAutoFit/>
           </a:bodyPr>
-          <a:lstStyle>
-            <a:lvl1pPr>
-              <a:defRPr b="1" sz="1200">
-                <a:solidFill>
-                  <a:srgbClr val="E8833A"/>
-                </a:solidFill>
-              </a:defRPr>
-            </a:lvl1pPr>
-          </a:lstStyle>
-          <a:p>
-            <a:pPr/>
-            <a:r>
-              <a:rPr/>
-              <a:t>Free / Low</a:t>
-            </a:r>
-          </a:p>
-        </p:txBody>
-      </p:sp>
-      <p:sp>
-        <p:nvSpPr>
-          <p:cNvPr id="289" name="TextBox 13"/>
+          <a:lstStyle/>
+          <a:p>
+            <a:r>
+              <a:rPr sz="2800" b="1">
+                <a:solidFill>
+                  <a:srgbClr val="FFFFFF"/>
+                </a:solidFill>
+              </a:rPr>
+              <a:t>The Fidelity Spectrum</a:t>
+            </a:r>
+          </a:p>
+        </p:txBody>
+      </p:sp>
+      <p:sp>
+        <p:nvSpPr>
+          <p:cNvPr id="8" name="TextBox 7"/>
           <p:cNvSpPr txBox="1"/>
           <p:nvPr/>
         </p:nvSpPr>
         <p:spPr>
           <a:xfrm>
-            <a:off x="2880359" y="1920239"/>
-            <a:ext cx="1920240" cy="310492"/>
-          </a:xfrm>
-          <a:prstGeom prst="rect">
-            <a:avLst/>
-          </a:prstGeom>
-          <a:ln w="12700">
-            <a:miter lim="400000"/>
-          </a:ln>
-          <a:extLst>
-            <a:ext uri="{C572A759-6A51-4108-AA02-DFA0A04FC94B}">
-              <ma14:wrappingTextBoxFlag xmlns:ma14="http://schemas.microsoft.com/office/mac/drawingml/2011/main" val="1"/>
-            </a:ext>
-          </a:extLst>
-        </p:spPr>
-        <p:txBody>
-          <a:bodyPr lIns="45719" rIns="45719">
+            <a:off x="502919" y="1097280"/>
+            <a:ext cx="11155682" cy="300594"/>
+          </a:xfrm>
+          <a:prstGeom prst="rect">
+            <a:avLst/>
+          </a:prstGeom>
+          <a:noFill/>
+        </p:spPr>
+        <p:txBody>
+          <a:bodyPr wrap="square">
             <a:spAutoFit/>
           </a:bodyPr>
-          <a:lstStyle>
-            <a:lvl1pPr>
-              <a:defRPr b="1" sz="1700">
-                <a:solidFill>
-                  <a:srgbClr val="1E4258"/>
-                </a:solidFill>
-              </a:defRPr>
-            </a:lvl1pPr>
-          </a:lstStyle>
-          <a:p>
-            <a:pPr/>
-            <a:r>
-              <a:t>Image-Based</a:t>
-            </a:r>
-          </a:p>
-        </p:txBody>
-      </p:sp>
-      <p:sp>
-        <p:nvSpPr>
-          <p:cNvPr id="290" name="TextBox 14"/>
+          <a:lstStyle/>
+          <a:p>
+            <a:r>
+              <a:rPr sz="1600" b="0">
+                <a:solidFill>
+                  <a:srgbClr val="5B6B7C"/>
+                </a:solidFill>
+              </a:rPr>
+              <a:t>Match the tool to the goal, not the other way around</a:t>
+            </a:r>
+          </a:p>
+        </p:txBody>
+      </p:sp>
+      <p:sp>
+        <p:nvSpPr>
+          <p:cNvPr id="9" name="TextBox 8"/>
           <p:cNvSpPr txBox="1"/>
           <p:nvPr/>
         </p:nvSpPr>
         <p:spPr>
           <a:xfrm>
-            <a:off x="2880359" y="2560320"/>
-            <a:ext cx="1920240" cy="258202"/>
-          </a:xfrm>
-          <a:prstGeom prst="rect">
-            <a:avLst/>
-          </a:prstGeom>
-          <a:ln w="12700">
-            <a:miter lim="400000"/>
-          </a:ln>
-          <a:extLst>
-            <a:ext uri="{C572A759-6A51-4108-AA02-DFA0A04FC94B}">
-              <ma14:wrappingTextBoxFlag xmlns:ma14="http://schemas.microsoft.com/office/mac/drawingml/2011/main" val="1"/>
-            </a:ext>
-          </a:extLst>
-        </p:spPr>
-        <p:txBody>
-          <a:bodyPr lIns="45719" rIns="45719">
+            <a:off x="960119" y="1554480"/>
+            <a:ext cx="4937762" cy="225708"/>
+          </a:xfrm>
+          <a:prstGeom prst="rect">
+            <a:avLst/>
+          </a:prstGeom>
+          <a:noFill/>
+        </p:spPr>
+        <p:txBody>
+          <a:bodyPr wrap="square">
             <a:spAutoFit/>
           </a:bodyPr>
-          <a:lstStyle>
-            <a:lvl1pPr>
-              <a:defRPr b="1" sz="1300">
-                <a:solidFill>
-                  <a:srgbClr val="2D8659"/>
-                </a:solidFill>
-              </a:defRPr>
-            </a:lvl1pPr>
-          </a:lstStyle>
-          <a:p>
-            <a:pPr/>
-            <a:r>
-              <a:t>Free, $25</a:t>
-            </a:r>
-          </a:p>
-        </p:txBody>
-      </p:sp>
-      <p:sp>
-        <p:nvSpPr>
-          <p:cNvPr id="291" name="TextBox 15"/>
+          <a:lstStyle/>
+          <a:p>
+            <a:r>
+              <a:rPr sz="1100" b="1">
+                <a:solidFill>
+                  <a:srgbClr val="2D5F7C"/>
+                </a:solidFill>
+              </a:rPr>
+              <a:t>THE SPECTRUM, LEFT TO RIGHT</a:t>
+            </a:r>
+          </a:p>
+        </p:txBody>
+      </p:sp>
+      <p:sp>
+        <p:nvSpPr>
+          <p:cNvPr id="10" name="TextBox 9"/>
           <p:cNvSpPr txBox="1"/>
           <p:nvPr/>
         </p:nvSpPr>
         <p:spPr>
           <a:xfrm>
-            <a:off x="2880359" y="3017520"/>
-            <a:ext cx="1920240" cy="461402"/>
-          </a:xfrm>
-          <a:prstGeom prst="rect">
-            <a:avLst/>
-          </a:prstGeom>
-          <a:ln w="12700">
-            <a:miter lim="400000"/>
-          </a:ln>
-          <a:extLst>
-            <a:ext uri="{C572A759-6A51-4108-AA02-DFA0A04FC94B}">
-              <ma14:wrappingTextBoxFlag xmlns:ma14="http://schemas.microsoft.com/office/mac/drawingml/2011/main" val="1"/>
-            </a:ext>
-          </a:extLst>
-        </p:spPr>
-        <p:txBody>
-          <a:bodyPr lIns="45719" rIns="45719">
+            <a:off x="960119" y="1920239"/>
+            <a:ext cx="4937762" cy="2301589"/>
+          </a:xfrm>
+          <a:prstGeom prst="rect">
+            <a:avLst/>
+          </a:prstGeom>
+          <a:noFill/>
+        </p:spPr>
+        <p:txBody>
+          <a:bodyPr wrap="square">
             <a:spAutoFit/>
           </a:bodyPr>
-          <a:lstStyle>
-            <a:lvl1pPr>
-              <a:defRPr sz="1300">
-                <a:solidFill>
-                  <a:srgbClr val="5A6B7E"/>
-                </a:solidFill>
-              </a:defRPr>
-            </a:lvl1pPr>
-          </a:lstStyle>
-          <a:p>
-            <a:pPr/>
-            <a:r>
-              <a:t>ECGs, radiology, lab interpretation</a:t>
-            </a:r>
-          </a:p>
-        </p:txBody>
-      </p:sp>
-      <p:sp>
-        <p:nvSpPr>
-          <p:cNvPr id="292" name="Rectangle 16"/>
-          <p:cNvSpPr/>
-          <p:nvPr/>
-        </p:nvSpPr>
-        <p:spPr>
-          <a:xfrm>
-            <a:off x="5120640" y="1371600"/>
-            <a:ext cx="2194561" cy="3840480"/>
-          </a:xfrm>
-          <a:prstGeom prst="rect">
-            <a:avLst/>
-          </a:prstGeom>
-          <a:solidFill>
-            <a:srgbClr val="F0F4F8"/>
-          </a:solidFill>
-          <a:ln w="12700">
-            <a:miter lim="400000"/>
-          </a:ln>
-          <a:effectLst>
-            <a:outerShdw sx="100000" sy="100000" kx="0" ky="0" algn="b" rotWithShape="0" blurRad="38100" dist="23000" dir="5400000">
-              <a:srgbClr val="000000">
-                <a:alpha val="35000"/>
-              </a:srgbClr>
-            </a:outerShdw>
-          </a:effectLst>
-        </p:spPr>
-        <p:txBody>
-          <a:bodyPr lIns="45719" rIns="45719" anchor="ctr"/>
-          <a:lstStyle/>
-          <a:p>
-            <a:pPr algn="ctr">
-              <a:defRPr>
-                <a:solidFill>
-                  <a:srgbClr val="FFFFFF"/>
-                </a:solidFill>
-              </a:defRPr>
+          <a:lstStyle/>
+          <a:p>
+            <a:r>
+              <a:rPr sz="1800" b="0">
+                <a:solidFill>
+                  <a:srgbClr val="1A2332"/>
+                </a:solidFill>
+              </a:rPr>
+              <a:t>• Text and audio, free</a:t>
+            </a:r>
+          </a:p>
+          <a:p>
+            <a:pPr>
+              <a:spcBef>
+                <a:spcPts val="1000"/>
+              </a:spcBef>
             </a:pPr>
-          </a:p>
-        </p:txBody>
-      </p:sp>
-      <p:sp>
-        <p:nvSpPr>
-          <p:cNvPr id="293" name="Rectangle 17"/>
-          <p:cNvSpPr/>
-          <p:nvPr/>
-        </p:nvSpPr>
-        <p:spPr>
-          <a:xfrm>
-            <a:off x="5120640" y="1371600"/>
-            <a:ext cx="2194561" cy="50800"/>
-          </a:xfrm>
-          <a:prstGeom prst="rect">
-            <a:avLst/>
-          </a:prstGeom>
-          <a:solidFill>
-            <a:srgbClr val="2D5F7C"/>
-          </a:solidFill>
-          <a:ln w="12700">
-            <a:miter lim="400000"/>
-          </a:ln>
-          <a:effectLst>
-            <a:outerShdw sx="100000" sy="100000" kx="0" ky="0" algn="b" rotWithShape="0" blurRad="38100" dist="23000" dir="5400000">
-              <a:srgbClr val="000000">
-                <a:alpha val="35000"/>
-              </a:srgbClr>
-            </a:outerShdw>
-          </a:effectLst>
-        </p:spPr>
-        <p:txBody>
-          <a:bodyPr lIns="45719" rIns="45719" anchor="ctr"/>
-          <a:lstStyle/>
-          <a:p>
-            <a:pPr algn="ctr">
-              <a:defRPr>
-                <a:solidFill>
-                  <a:srgbClr val="FFFFFF"/>
-                </a:solidFill>
-              </a:defRPr>
+            <a:r>
+              <a:rPr sz="1800" b="0">
+                <a:solidFill>
+                  <a:srgbClr val="1A2332"/>
+                </a:solidFill>
+              </a:rPr>
+              <a:t>• Image-based, free to $25</a:t>
+            </a:r>
+          </a:p>
+          <a:p>
+            <a:pPr>
+              <a:spcBef>
+                <a:spcPts val="1000"/>
+              </a:spcBef>
             </a:pPr>
-          </a:p>
-        </p:txBody>
-      </p:sp>
-      <p:sp>
-        <p:nvSpPr>
-          <p:cNvPr id="294" name="TextBox 18"/>
+            <a:r>
+              <a:rPr sz="1800" b="0">
+                <a:solidFill>
+                  <a:srgbClr val="1A2332"/>
+                </a:solidFill>
+              </a:rPr>
+              <a:t>• Screen-based, free trials</a:t>
+            </a:r>
+          </a:p>
+          <a:p>
+            <a:pPr>
+              <a:spcBef>
+                <a:spcPts val="1000"/>
+              </a:spcBef>
+            </a:pPr>
+            <a:r>
+              <a:rPr sz="1800" b="0">
+                <a:solidFill>
+                  <a:srgbClr val="1A2332"/>
+                </a:solidFill>
+              </a:rPr>
+              <a:t>• AR on your phone, free to $25</a:t>
+            </a:r>
+          </a:p>
+          <a:p>
+            <a:pPr>
+              <a:spcBef>
+                <a:spcPts val="1000"/>
+              </a:spcBef>
+            </a:pPr>
+            <a:r>
+              <a:rPr sz="1800" b="0">
+                <a:solidFill>
+                  <a:srgbClr val="1A2332"/>
+                </a:solidFill>
+              </a:rPr>
+              <a:t>• Immersive VR, $100 to $600</a:t>
+            </a:r>
+          </a:p>
+        </p:txBody>
+      </p:sp>
+      <p:sp>
+        <p:nvSpPr>
+          <p:cNvPr id="11" name="TextBox 10"/>
           <p:cNvSpPr txBox="1"/>
           <p:nvPr/>
         </p:nvSpPr>
         <p:spPr>
           <a:xfrm>
-            <a:off x="5257799" y="1554480"/>
-            <a:ext cx="1920240" cy="248305"/>
-          </a:xfrm>
-          <a:prstGeom prst="rect">
-            <a:avLst/>
-          </a:prstGeom>
-          <a:ln w="12700">
-            <a:miter lim="400000"/>
-          </a:ln>
-          <a:extLst>
-            <a:ext uri="{C572A759-6A51-4108-AA02-DFA0A04FC94B}">
-              <ma14:wrappingTextBoxFlag xmlns:ma14="http://schemas.microsoft.com/office/mac/drawingml/2011/main" val="1"/>
-            </a:ext>
-          </a:extLst>
-        </p:spPr>
-        <p:txBody>
-          <a:bodyPr lIns="45719" rIns="45719">
+            <a:off x="6903719" y="1554480"/>
+            <a:ext cx="4480562" cy="225708"/>
+          </a:xfrm>
+          <a:prstGeom prst="rect">
+            <a:avLst/>
+          </a:prstGeom>
+          <a:noFill/>
+        </p:spPr>
+        <p:txBody>
+          <a:bodyPr wrap="square">
             <a:spAutoFit/>
           </a:bodyPr>
-          <a:lstStyle>
-            <a:lvl1pPr>
-              <a:defRPr b="1" sz="1200">
+          <a:lstStyle/>
+          <a:p>
+            <a:r>
+              <a:rPr sz="1100" b="1">
                 <a:solidFill>
                   <a:srgbClr val="E8833A"/>
                 </a:solidFill>
-              </a:defRPr>
-            </a:lvl1pPr>
-          </a:lstStyle>
-          <a:p>
-            <a:pPr/>
-            <a:r>
-              <a:rPr/>
-              <a:t>Free / Low</a:t>
-            </a:r>
-          </a:p>
-        </p:txBody>
-      </p:sp>
-      <p:sp>
-        <p:nvSpPr>
-          <p:cNvPr id="295" name="TextBox 19"/>
+              </a:rPr>
+              <a:t>WHERE REASONING LIVES</a:t>
+            </a:r>
+          </a:p>
+        </p:txBody>
+      </p:sp>
+      <p:sp>
+        <p:nvSpPr>
+          <p:cNvPr id="12" name="TextBox 11"/>
           <p:cNvSpPr txBox="1"/>
           <p:nvPr/>
         </p:nvSpPr>
         <p:spPr>
           <a:xfrm>
-            <a:off x="5257799" y="1920239"/>
-            <a:ext cx="1920240" cy="310492"/>
-          </a:xfrm>
-          <a:prstGeom prst="rect">
-            <a:avLst/>
-          </a:prstGeom>
-          <a:ln w="12700">
-            <a:miter lim="400000"/>
-          </a:ln>
-          <a:extLst>
-            <a:ext uri="{C572A759-6A51-4108-AA02-DFA0A04FC94B}">
-              <ma14:wrappingTextBoxFlag xmlns:ma14="http://schemas.microsoft.com/office/mac/drawingml/2011/main" val="1"/>
-            </a:ext>
-          </a:extLst>
-        </p:spPr>
-        <p:txBody>
-          <a:bodyPr lIns="45719" rIns="45719">
+            <a:off x="6903719" y="1920239"/>
+            <a:ext cx="4480562" cy="2301589"/>
+          </a:xfrm>
+          <a:prstGeom prst="rect">
+            <a:avLst/>
+          </a:prstGeom>
+          <a:noFill/>
+        </p:spPr>
+        <p:txBody>
+          <a:bodyPr wrap="square">
             <a:spAutoFit/>
           </a:bodyPr>
-          <a:lstStyle>
-            <a:lvl1pPr>
-              <a:defRPr b="1" sz="1700">
-                <a:solidFill>
-                  <a:srgbClr val="1E4258"/>
-                </a:solidFill>
-              </a:defRPr>
-            </a:lvl1pPr>
-          </a:lstStyle>
-          <a:p>
-            <a:pPr/>
-            <a:r>
-              <a:t>Screen-Based</a:t>
-            </a:r>
-          </a:p>
-        </p:txBody>
-      </p:sp>
-      <p:sp>
-        <p:nvSpPr>
-          <p:cNvPr id="296" name="TextBox 20"/>
+          <a:lstStyle/>
+          <a:p>
+            <a:r>
+              <a:rPr sz="1800" b="0">
+                <a:solidFill>
+                  <a:srgbClr val="1A2332"/>
+                </a:solidFill>
+              </a:rPr>
+              <a:t>Text and audio, images included: ECG, X-ray, CT, labs.</a:t>
+            </a:r>
+          </a:p>
+          <a:p>
+            <a:pPr>
+              <a:spcBef>
+                <a:spcPts val="1000"/>
+              </a:spcBef>
+            </a:pPr>
+            <a:r>
+              <a:rPr sz="1800" b="0">
+                <a:solidFill>
+                  <a:srgbClr val="1A2332"/>
+                </a:solidFill>
+              </a:rPr>
+              <a:t>The uncanny valley of avatar tools is real.</a:t>
+            </a:r>
+          </a:p>
+          <a:p>
+            <a:pPr>
+              <a:spcBef>
+                <a:spcPts val="1000"/>
+              </a:spcBef>
+            </a:pPr>
+            <a:r>
+              <a:rPr sz="1800" b="0">
+                <a:solidFill>
+                  <a:srgbClr val="1A2332"/>
+                </a:solidFill>
+              </a:rPr>
+              <a:t>Sapient Clinician does this well (see the COI slide).</a:t>
+            </a:r>
+          </a:p>
+        </p:txBody>
+      </p:sp>
+      <p:sp>
+        <p:nvSpPr>
+          <p:cNvPr id="13" name="TextBox 12"/>
           <p:cNvSpPr txBox="1"/>
           <p:nvPr/>
         </p:nvSpPr>
         <p:spPr>
           <a:xfrm>
-            <a:off x="5257799" y="2560320"/>
-            <a:ext cx="1920240" cy="258202"/>
-          </a:xfrm>
-          <a:prstGeom prst="rect">
-            <a:avLst/>
-          </a:prstGeom>
-          <a:ln w="12700">
-            <a:miter lim="400000"/>
-          </a:ln>
-          <a:extLst>
-            <a:ext uri="{C572A759-6A51-4108-AA02-DFA0A04FC94B}">
-              <ma14:wrappingTextBoxFlag xmlns:ma14="http://schemas.microsoft.com/office/mac/drawingml/2011/main" val="1"/>
-            </a:ext>
-          </a:extLst>
-        </p:spPr>
-        <p:txBody>
-          <a:bodyPr lIns="45719" rIns="45719">
+            <a:off x="502919" y="5303520"/>
+            <a:ext cx="11155682" cy="300594"/>
+          </a:xfrm>
+          <a:prstGeom prst="rect">
+            <a:avLst/>
+          </a:prstGeom>
+          <a:noFill/>
+        </p:spPr>
+        <p:txBody>
+          <a:bodyPr wrap="square">
             <a:spAutoFit/>
           </a:bodyPr>
-          <a:lstStyle>
-            <a:lvl1pPr>
-              <a:defRPr b="1" sz="1300">
-                <a:solidFill>
-                  <a:srgbClr val="2D8659"/>
-                </a:solidFill>
-              </a:defRPr>
-            </a:lvl1pPr>
-          </a:lstStyle>
-          <a:p>
-            <a:pPr/>
-            <a:r>
-              <a:t>Free trial, inst.</a:t>
-            </a:r>
-          </a:p>
-        </p:txBody>
-      </p:sp>
-      <p:sp>
-        <p:nvSpPr>
-          <p:cNvPr id="297" name="TextBox 21"/>
-          <p:cNvSpPr txBox="1"/>
-          <p:nvPr/>
-        </p:nvSpPr>
-        <p:spPr>
-          <a:xfrm>
-            <a:off x="5257799" y="3017520"/>
-            <a:ext cx="1920240" cy="461402"/>
-          </a:xfrm>
-          <a:prstGeom prst="rect">
-            <a:avLst/>
-          </a:prstGeom>
-          <a:ln w="12700">
-            <a:miter lim="400000"/>
-          </a:ln>
-          <a:extLst>
-            <a:ext uri="{C572A759-6A51-4108-AA02-DFA0A04FC94B}">
-              <ma14:wrappingTextBoxFlag xmlns:ma14="http://schemas.microsoft.com/office/mac/drawingml/2011/main" val="1"/>
-            </a:ext>
-          </a:extLst>
-        </p:spPr>
-        <p:txBody>
-          <a:bodyPr lIns="45719" rIns="45719">
-            <a:spAutoFit/>
-          </a:bodyPr>
-          <a:lstStyle>
-            <a:lvl1pPr>
-              <a:defRPr sz="1300">
-                <a:solidFill>
-                  <a:srgbClr val="5A6B7E"/>
-                </a:solidFill>
-              </a:defRPr>
-            </a:lvl1pPr>
-          </a:lstStyle>
-          <a:p>
-            <a:pPr/>
-            <a:r>
-              <a:t>Virtual patients, branching scenarios</a:t>
-            </a:r>
-          </a:p>
-        </p:txBody>
-      </p:sp>
-      <p:sp>
-        <p:nvSpPr>
-          <p:cNvPr id="298" name="Rectangle 22"/>
-          <p:cNvSpPr/>
-          <p:nvPr/>
-        </p:nvSpPr>
-        <p:spPr>
-          <a:xfrm>
-            <a:off x="7498080" y="1371600"/>
-            <a:ext cx="2194561" cy="3840480"/>
-          </a:xfrm>
-          <a:prstGeom prst="rect">
-            <a:avLst/>
-          </a:prstGeom>
-          <a:solidFill>
-            <a:srgbClr val="F0F4F8"/>
-          </a:solidFill>
-          <a:ln w="12700">
-            <a:miter lim="400000"/>
-          </a:ln>
-          <a:effectLst>
-            <a:outerShdw sx="100000" sy="100000" kx="0" ky="0" algn="b" rotWithShape="0" blurRad="38100" dist="23000" dir="5400000">
-              <a:srgbClr val="000000">
-                <a:alpha val="35000"/>
-              </a:srgbClr>
-            </a:outerShdw>
-          </a:effectLst>
-        </p:spPr>
-        <p:txBody>
-          <a:bodyPr lIns="45719" rIns="45719" anchor="ctr"/>
-          <a:lstStyle/>
-          <a:p>
-            <a:pPr algn="ctr">
-              <a:defRPr>
-                <a:solidFill>
-                  <a:srgbClr val="FFFFFF"/>
-                </a:solidFill>
-              </a:defRPr>
-            </a:pPr>
-          </a:p>
-        </p:txBody>
-      </p:sp>
-      <p:sp>
-        <p:nvSpPr>
-          <p:cNvPr id="299" name="Rectangle 23"/>
-          <p:cNvSpPr/>
-          <p:nvPr/>
-        </p:nvSpPr>
-        <p:spPr>
-          <a:xfrm>
-            <a:off x="7498080" y="1371600"/>
-            <a:ext cx="2194561" cy="50800"/>
-          </a:xfrm>
-          <a:prstGeom prst="rect">
-            <a:avLst/>
-          </a:prstGeom>
-          <a:solidFill>
-            <a:srgbClr val="E8833A"/>
-          </a:solidFill>
-          <a:ln w="12700">
-            <a:miter lim="400000"/>
-          </a:ln>
-          <a:effectLst>
-            <a:outerShdw sx="100000" sy="100000" kx="0" ky="0" algn="b" rotWithShape="0" blurRad="38100" dist="23000" dir="5400000">
-              <a:srgbClr val="000000">
-                <a:alpha val="35000"/>
-              </a:srgbClr>
-            </a:outerShdw>
-          </a:effectLst>
-        </p:spPr>
-        <p:txBody>
-          <a:bodyPr lIns="45719" rIns="45719" anchor="ctr"/>
-          <a:lstStyle/>
-          <a:p>
-            <a:pPr algn="ctr">
-              <a:defRPr>
-                <a:solidFill>
-                  <a:srgbClr val="FFFFFF"/>
-                </a:solidFill>
-              </a:defRPr>
-            </a:pPr>
-          </a:p>
-        </p:txBody>
-      </p:sp>
-      <p:sp>
-        <p:nvSpPr>
-          <p:cNvPr id="300" name="TextBox 24"/>
-          <p:cNvSpPr txBox="1"/>
-          <p:nvPr/>
-        </p:nvSpPr>
-        <p:spPr>
-          <a:xfrm>
-            <a:off x="7635239" y="1554480"/>
-            <a:ext cx="1920240" cy="248305"/>
-          </a:xfrm>
-          <a:prstGeom prst="rect">
-            <a:avLst/>
-          </a:prstGeom>
-          <a:ln w="12700">
-            <a:miter lim="400000"/>
-          </a:ln>
-          <a:extLst>
-            <a:ext uri="{C572A759-6A51-4108-AA02-DFA0A04FC94B}">
-              <ma14:wrappingTextBoxFlag xmlns:ma14="http://schemas.microsoft.com/office/mac/drawingml/2011/main" val="1"/>
-            </a:ext>
-          </a:extLst>
-        </p:spPr>
-        <p:txBody>
-          <a:bodyPr lIns="45719" rIns="45719">
-            <a:spAutoFit/>
-          </a:bodyPr>
-          <a:lstStyle>
-            <a:lvl1pPr>
-              <a:defRPr b="1" sz="1200">
-                <a:solidFill>
-                  <a:srgbClr val="E8833A"/>
-                </a:solidFill>
-              </a:defRPr>
-            </a:lvl1pPr>
-          </a:lstStyle>
-          <a:p>
-            <a:pPr/>
-            <a:r>
-              <a:rPr/>
-              <a:t>Free / Low</a:t>
-            </a:r>
-          </a:p>
-        </p:txBody>
-      </p:sp>
-      <p:sp>
-        <p:nvSpPr>
-          <p:cNvPr id="301" name="TextBox 25"/>
-          <p:cNvSpPr txBox="1"/>
-          <p:nvPr/>
-        </p:nvSpPr>
-        <p:spPr>
-          <a:xfrm>
-            <a:off x="7635239" y="1920239"/>
-            <a:ext cx="1920240" cy="310492"/>
-          </a:xfrm>
-          <a:prstGeom prst="rect">
-            <a:avLst/>
-          </a:prstGeom>
-          <a:ln w="12700">
-            <a:miter lim="400000"/>
-          </a:ln>
-          <a:extLst>
-            <a:ext uri="{C572A759-6A51-4108-AA02-DFA0A04FC94B}">
-              <ma14:wrappingTextBoxFlag xmlns:ma14="http://schemas.microsoft.com/office/mac/drawingml/2011/main" val="1"/>
-            </a:ext>
-          </a:extLst>
-        </p:spPr>
-        <p:txBody>
-          <a:bodyPr lIns="45719" rIns="45719">
-            <a:spAutoFit/>
-          </a:bodyPr>
-          <a:lstStyle>
-            <a:lvl1pPr>
-              <a:defRPr b="1" sz="1700">
-                <a:solidFill>
-                  <a:srgbClr val="1E4258"/>
-                </a:solidFill>
-              </a:defRPr>
-            </a:lvl1pPr>
-          </a:lstStyle>
-          <a:p>
-            <a:pPr/>
-            <a:r>
-              <a:t>AR (Phone)</a:t>
-            </a:r>
-          </a:p>
-        </p:txBody>
-      </p:sp>
-      <p:sp>
-        <p:nvSpPr>
-          <p:cNvPr id="302" name="TextBox 26"/>
-          <p:cNvSpPr txBox="1"/>
-          <p:nvPr/>
-        </p:nvSpPr>
-        <p:spPr>
-          <a:xfrm>
-            <a:off x="7635239" y="2560320"/>
-            <a:ext cx="1920240" cy="258202"/>
-          </a:xfrm>
-          <a:prstGeom prst="rect">
-            <a:avLst/>
-          </a:prstGeom>
-          <a:ln w="12700">
-            <a:miter lim="400000"/>
-          </a:ln>
-          <a:extLst>
-            <a:ext uri="{C572A759-6A51-4108-AA02-DFA0A04FC94B}">
-              <ma14:wrappingTextBoxFlag xmlns:ma14="http://schemas.microsoft.com/office/mac/drawingml/2011/main" val="1"/>
-            </a:ext>
-          </a:extLst>
-        </p:spPr>
-        <p:txBody>
-          <a:bodyPr lIns="45719" rIns="45719">
-            <a:spAutoFit/>
-          </a:bodyPr>
-          <a:lstStyle>
-            <a:lvl1pPr>
-              <a:defRPr b="1" sz="1300">
-                <a:solidFill>
-                  <a:srgbClr val="2D8659"/>
-                </a:solidFill>
-              </a:defRPr>
-            </a:lvl1pPr>
-          </a:lstStyle>
-          <a:p>
-            <a:pPr/>
-            <a:r>
-              <a:t>Free, $25</a:t>
-            </a:r>
-          </a:p>
-        </p:txBody>
-      </p:sp>
-      <p:sp>
-        <p:nvSpPr>
-          <p:cNvPr id="303" name="TextBox 27"/>
-          <p:cNvSpPr txBox="1"/>
-          <p:nvPr/>
-        </p:nvSpPr>
-        <p:spPr>
-          <a:xfrm>
-            <a:off x="7635239" y="3017520"/>
-            <a:ext cx="1920240" cy="461402"/>
-          </a:xfrm>
-          <a:prstGeom prst="rect">
-            <a:avLst/>
-          </a:prstGeom>
-          <a:ln w="12700">
-            <a:miter lim="400000"/>
-          </a:ln>
-          <a:extLst>
-            <a:ext uri="{C572A759-6A51-4108-AA02-DFA0A04FC94B}">
-              <ma14:wrappingTextBoxFlag xmlns:ma14="http://schemas.microsoft.com/office/mac/drawingml/2011/main" val="1"/>
-            </a:ext>
-          </a:extLst>
-        </p:spPr>
-        <p:txBody>
-          <a:bodyPr lIns="45719" rIns="45719">
-            <a:spAutoFit/>
-          </a:bodyPr>
-          <a:lstStyle>
-            <a:lvl1pPr>
-              <a:defRPr sz="1300">
-                <a:solidFill>
-                  <a:srgbClr val="5A6B7E"/>
-                </a:solidFill>
-              </a:defRPr>
-            </a:lvl1pPr>
-          </a:lstStyle>
-          <a:p>
-            <a:pPr/>
-            <a:r>
-              <a:t>3D anatomy on phone, no headset</a:t>
-            </a:r>
-          </a:p>
-        </p:txBody>
-      </p:sp>
-      <p:sp>
-        <p:nvSpPr>
-          <p:cNvPr id="304" name="Rectangle 28"/>
-          <p:cNvSpPr/>
-          <p:nvPr/>
-        </p:nvSpPr>
-        <p:spPr>
-          <a:xfrm>
-            <a:off x="9875519" y="1371600"/>
-            <a:ext cx="2194561" cy="3840480"/>
-          </a:xfrm>
-          <a:prstGeom prst="rect">
-            <a:avLst/>
-          </a:prstGeom>
-          <a:solidFill>
-            <a:srgbClr val="F0F4F8"/>
-          </a:solidFill>
-          <a:ln w="12700">
-            <a:miter lim="400000"/>
-          </a:ln>
-          <a:effectLst>
-            <a:outerShdw sx="100000" sy="100000" kx="0" ky="0" algn="b" rotWithShape="0" blurRad="38100" dist="23000" dir="5400000">
-              <a:srgbClr val="000000">
-                <a:alpha val="35000"/>
-              </a:srgbClr>
-            </a:outerShdw>
-          </a:effectLst>
-        </p:spPr>
-        <p:txBody>
-          <a:bodyPr lIns="45719" rIns="45719" anchor="ctr"/>
-          <a:lstStyle/>
-          <a:p>
-            <a:pPr algn="ctr">
-              <a:defRPr>
-                <a:solidFill>
-                  <a:srgbClr val="FFFFFF"/>
-                </a:solidFill>
-              </a:defRPr>
-            </a:pPr>
-          </a:p>
-        </p:txBody>
-      </p:sp>
-      <p:sp>
-        <p:nvSpPr>
-          <p:cNvPr id="305" name="Rectangle 29"/>
-          <p:cNvSpPr/>
-          <p:nvPr/>
-        </p:nvSpPr>
-        <p:spPr>
-          <a:xfrm>
-            <a:off x="9875519" y="1371600"/>
-            <a:ext cx="2194561" cy="50800"/>
-          </a:xfrm>
-          <a:prstGeom prst="rect">
-            <a:avLst/>
-          </a:prstGeom>
-          <a:solidFill>
-            <a:srgbClr val="2D5F7C"/>
-          </a:solidFill>
-          <a:ln w="12700">
-            <a:miter lim="400000"/>
-          </a:ln>
-          <a:effectLst>
-            <a:outerShdw sx="100000" sy="100000" kx="0" ky="0" algn="b" rotWithShape="0" blurRad="38100" dist="23000" dir="5400000">
-              <a:srgbClr val="000000">
-                <a:alpha val="35000"/>
-              </a:srgbClr>
-            </a:outerShdw>
-          </a:effectLst>
-        </p:spPr>
-        <p:txBody>
-          <a:bodyPr lIns="45719" rIns="45719" anchor="ctr"/>
-          <a:lstStyle/>
-          <a:p>
-            <a:pPr algn="ctr">
-              <a:defRPr>
-                <a:solidFill>
-                  <a:srgbClr val="FFFFFF"/>
-                </a:solidFill>
-              </a:defRPr>
-            </a:pPr>
-          </a:p>
-        </p:txBody>
-      </p:sp>
-      <p:sp>
-        <p:nvSpPr>
-          <p:cNvPr id="306" name="TextBox 30"/>
-          <p:cNvSpPr txBox="1"/>
-          <p:nvPr/>
-        </p:nvSpPr>
-        <p:spPr>
-          <a:xfrm>
-            <a:off x="10012679" y="1554480"/>
-            <a:ext cx="1920240" cy="248305"/>
-          </a:xfrm>
-          <a:prstGeom prst="rect">
-            <a:avLst/>
-          </a:prstGeom>
-          <a:ln w="12700">
-            <a:miter lim="400000"/>
-          </a:ln>
-          <a:extLst>
-            <a:ext uri="{C572A759-6A51-4108-AA02-DFA0A04FC94B}">
-              <ma14:wrappingTextBoxFlag xmlns:ma14="http://schemas.microsoft.com/office/mac/drawingml/2011/main" val="1"/>
-            </a:ext>
-          </a:extLst>
-        </p:spPr>
-        <p:txBody>
-          <a:bodyPr lIns="45719" rIns="45719">
-            <a:spAutoFit/>
-          </a:bodyPr>
-          <a:lstStyle>
-            <a:lvl1pPr>
-              <a:defRPr b="1" sz="1200">
-                <a:solidFill>
-                  <a:srgbClr val="E8833A"/>
-                </a:solidFill>
-              </a:defRPr>
-            </a:lvl1pPr>
-          </a:lstStyle>
-          <a:p>
-            <a:pPr/>
-            <a:r>
-              <a:rPr/>
-              <a:t>Investment</a:t>
-            </a:r>
-          </a:p>
-        </p:txBody>
-      </p:sp>
-      <p:sp>
-        <p:nvSpPr>
-          <p:cNvPr id="307" name="TextBox 31"/>
-          <p:cNvSpPr txBox="1"/>
-          <p:nvPr/>
-        </p:nvSpPr>
-        <p:spPr>
-          <a:xfrm>
-            <a:off x="10012679" y="1920239"/>
-            <a:ext cx="1920240" cy="310492"/>
-          </a:xfrm>
-          <a:prstGeom prst="rect">
-            <a:avLst/>
-          </a:prstGeom>
-          <a:ln w="12700">
-            <a:miter lim="400000"/>
-          </a:ln>
-          <a:extLst>
-            <a:ext uri="{C572A759-6A51-4108-AA02-DFA0A04FC94B}">
-              <ma14:wrappingTextBoxFlag xmlns:ma14="http://schemas.microsoft.com/office/mac/drawingml/2011/main" val="1"/>
-            </a:ext>
-          </a:extLst>
-        </p:spPr>
-        <p:txBody>
-          <a:bodyPr lIns="45719" rIns="45719">
-            <a:spAutoFit/>
-          </a:bodyPr>
-          <a:lstStyle>
-            <a:lvl1pPr>
-              <a:defRPr b="1" sz="1700">
-                <a:solidFill>
-                  <a:srgbClr val="1E4258"/>
-                </a:solidFill>
-              </a:defRPr>
-            </a:lvl1pPr>
-          </a:lstStyle>
-          <a:p>
-            <a:pPr/>
-            <a:r>
-              <a:t>Immersive VR</a:t>
-            </a:r>
-          </a:p>
-        </p:txBody>
-      </p:sp>
-      <p:sp>
-        <p:nvSpPr>
-          <p:cNvPr id="308" name="TextBox 32"/>
-          <p:cNvSpPr txBox="1"/>
-          <p:nvPr/>
-        </p:nvSpPr>
-        <p:spPr>
-          <a:xfrm>
-            <a:off x="10012679" y="2560320"/>
-            <a:ext cx="1920240" cy="258202"/>
-          </a:xfrm>
-          <a:prstGeom prst="rect">
-            <a:avLst/>
-          </a:prstGeom>
-          <a:ln w="12700">
-            <a:miter lim="400000"/>
-          </a:ln>
-          <a:extLst>
-            <a:ext uri="{C572A759-6A51-4108-AA02-DFA0A04FC94B}">
-              <ma14:wrappingTextBoxFlag xmlns:ma14="http://schemas.microsoft.com/office/mac/drawingml/2011/main" val="1"/>
-            </a:ext>
-          </a:extLst>
-        </p:spPr>
-        <p:txBody>
-          <a:bodyPr lIns="45719" rIns="45719">
-            <a:spAutoFit/>
-          </a:bodyPr>
-          <a:lstStyle>
-            <a:lvl1pPr>
-              <a:defRPr b="1" sz="1300">
-                <a:solidFill>
-                  <a:srgbClr val="2D8659"/>
-                </a:solidFill>
-              </a:defRPr>
-            </a:lvl1pPr>
-          </a:lstStyle>
-          <a:p>
-            <a:pPr/>
-            <a:r>
-              <a:t>$100  to $600</a:t>
-            </a:r>
-          </a:p>
-        </p:txBody>
-      </p:sp>
-      <p:sp>
-        <p:nvSpPr>
-          <p:cNvPr id="309" name="TextBox 33"/>
-          <p:cNvSpPr txBox="1"/>
-          <p:nvPr/>
-        </p:nvSpPr>
-        <p:spPr>
-          <a:xfrm>
-            <a:off x="10012679" y="3017520"/>
-            <a:ext cx="1920240" cy="461402"/>
-          </a:xfrm>
-          <a:prstGeom prst="rect">
-            <a:avLst/>
-          </a:prstGeom>
-          <a:ln w="12700">
-            <a:miter lim="400000"/>
-          </a:ln>
-          <a:extLst>
-            <a:ext uri="{C572A759-6A51-4108-AA02-DFA0A04FC94B}">
-              <ma14:wrappingTextBoxFlag xmlns:ma14="http://schemas.microsoft.com/office/mac/drawingml/2011/main" val="1"/>
-            </a:ext>
-          </a:extLst>
-        </p:spPr>
-        <p:txBody>
-          <a:bodyPr lIns="45719" rIns="45719">
-            <a:spAutoFit/>
-          </a:bodyPr>
-          <a:lstStyle>
-            <a:lvl1pPr>
-              <a:defRPr sz="1300">
-                <a:solidFill>
-                  <a:srgbClr val="5A6B7E"/>
-                </a:solidFill>
-              </a:defRPr>
-            </a:lvl1pPr>
-          </a:lstStyle>
-          <a:p>
-            <a:pPr/>
-            <a:r>
-              <a:t>Procedures, team scenarios, physical skills</a:t>
-            </a:r>
-          </a:p>
-        </p:txBody>
-      </p:sp>
-    </p:spTree>
-  </p:cSld>
-  <p:clrMapOvr>
-    <a:masterClrMapping/>
-  </p:clrMapOvr>
-  <p:transition xmlns:p14="http://schemas.microsoft.com/office/powerpoint/2010/main" spd="med" advClick="1"/>
-</p:sld>
-</file>
-
-<file path=ppt/slides/slide15.xml><?xml version="1.0" encoding="utf-8"?>
-<p:sld xmlns:a="http://schemas.openxmlformats.org/drawingml/2006/main" xmlns:r="http://schemas.openxmlformats.org/officeDocument/2006/relationships" xmlns:p="http://schemas.openxmlformats.org/presentationml/2006/main" xmlns:m="http://schemas.openxmlformats.org/officeDocument/2006/math" xmlns:a14="http://schemas.microsoft.com/office/drawing/2010/main" showMasterSp="1" showMasterPhAnim="1">
-  <p:cSld>
-    <p:spTree>
-      <p:nvGrpSpPr>
-        <p:cNvPr id="1" name=""/>
-        <p:cNvGrpSpPr/>
-        <p:nvPr/>
-      </p:nvGrpSpPr>
-      <p:grpSpPr>
-        <a:xfrm>
-          <a:off x="0" y="0"/>
-          <a:ext cx="0" cy="0"/>
-          <a:chOff x="0" y="0"/>
-          <a:chExt cx="0" cy="0"/>
-        </a:xfrm>
-      </p:grpSpPr>
-      <p:grpSp>
-        <p:nvGrpSpPr>
-          <p:cNvPr id="334" name="Oval 6"/>
-          <p:cNvGrpSpPr/>
-          <p:nvPr/>
-        </p:nvGrpSpPr>
-        <p:grpSpPr>
-          <a:xfrm>
-            <a:off x="45719" y="320040"/>
-            <a:ext cx="365762" cy="365761"/>
-            <a:chOff x="0" y="0"/>
-            <a:chExt cx="365760" cy="365760"/>
-          </a:xfrm>
-        </p:grpSpPr>
-        <p:sp>
-          <p:nvSpPr>
-            <p:cNvPr id="332" name="Circle"/>
-            <p:cNvSpPr/>
-            <p:nvPr/>
-          </p:nvSpPr>
-          <p:spPr>
-            <a:xfrm>
-              <a:off x="-1" y="-1"/>
-              <a:ext cx="365762" cy="365762"/>
-            </a:xfrm>
-            <a:prstGeom prst="ellipse">
-              <a:avLst/>
-            </a:prstGeom>
-            <a:solidFill>
-              <a:srgbClr val="E8833A"/>
-            </a:solidFill>
-            <a:ln w="12700" cap="flat">
-              <a:noFill/>
-              <a:miter lim="400000"/>
-            </a:ln>
-            <a:effectLst/>
-          </p:spPr>
-          <p:txBody>
-            <a:bodyPr wrap="square" lIns="45719" tIns="45719" rIns="45719" bIns="45719" numCol="1" anchor="ctr">
-              <a:noAutofit/>
-            </a:bodyPr>
-            <a:lstStyle/>
-            <a:p>
-              <a:pPr algn="ctr">
-                <a:defRPr b="1" sz="2000">
-                  <a:solidFill>
-                    <a:srgbClr val="FFFFFF"/>
-                  </a:solidFill>
-                </a:defRPr>
-              </a:pPr>
-            </a:p>
-          </p:txBody>
-        </p:sp>
-        <p:sp>
-          <p:nvSpPr>
-            <p:cNvPr id="333" name="6"/>
-            <p:cNvSpPr txBox="1"/>
-            <p:nvPr/>
-          </p:nvSpPr>
-          <p:spPr>
-            <a:xfrm>
-              <a:off x="99283" y="12789"/>
-              <a:ext cx="167194" cy="340182"/>
-            </a:xfrm>
-            <a:prstGeom prst="rect">
-              <a:avLst/>
-            </a:prstGeom>
-            <a:noFill/>
-            <a:ln w="12700" cap="flat">
-              <a:noFill/>
-              <a:miter lim="400000"/>
-            </a:ln>
-            <a:effectLst/>
-            <a:extLst>
-              <a:ext uri="{C572A759-6A51-4108-AA02-DFA0A04FC94B}">
-                <ma14:wrappingTextBoxFlag xmlns:ma14="http://schemas.microsoft.com/office/mac/drawingml/2011/main" val="1"/>
-              </a:ext>
-            </a:extLst>
-          </p:spPr>
-          <p:txBody>
-            <a:bodyPr wrap="square" lIns="45719" tIns="45719" rIns="45719" bIns="45719" numCol="1" anchor="ctr">
-              <a:spAutoFit/>
-            </a:bodyPr>
-            <a:lstStyle>
-              <a:lvl1pPr algn="ctr">
-                <a:defRPr b="1" sz="2000">
-                  <a:solidFill>
-                    <a:srgbClr val="FFFFFF"/>
-                  </a:solidFill>
-                </a:defRPr>
-              </a:lvl1pPr>
-            </a:lstStyle>
-            <a:p>
-              <a:pPr/>
-              <a:r>
-                <a:t>6</a:t>
-              </a:r>
-            </a:p>
-          </p:txBody>
-        </p:sp>
-      </p:grpSp>
-      <p:sp>
-        <p:nvSpPr>
-          <p:cNvPr id="335" name="Rectangle 1"/>
-          <p:cNvSpPr/>
-          <p:nvPr/>
-        </p:nvSpPr>
-        <p:spPr>
-          <a:xfrm>
-            <a:off x="-1" y="0"/>
-            <a:ext cx="12191697" cy="1005839"/>
-          </a:xfrm>
-          <a:prstGeom prst="rect">
-            <a:avLst/>
-          </a:prstGeom>
-          <a:solidFill>
-            <a:srgbClr val="2D5F7C"/>
-          </a:solidFill>
-          <a:ln w="12700">
-            <a:miter lim="400000"/>
-          </a:ln>
-          <a:effectLst>
-            <a:outerShdw sx="100000" sy="100000" kx="0" ky="0" algn="b" rotWithShape="0" blurRad="38100" dist="23000" dir="5400000">
-              <a:srgbClr val="000000">
-                <a:alpha val="35000"/>
-              </a:srgbClr>
-            </a:outerShdw>
-          </a:effectLst>
-        </p:spPr>
-        <p:txBody>
-          <a:bodyPr lIns="45719" rIns="45719" anchor="ctr"/>
-          <a:lstStyle/>
-          <a:p>
-            <a:pPr algn="ctr">
-              <a:defRPr>
-                <a:solidFill>
-                  <a:srgbClr val="FFFFFF"/>
-                </a:solidFill>
-              </a:defRPr>
-            </a:pPr>
-          </a:p>
-        </p:txBody>
-      </p:sp>
-      <p:sp>
-        <p:nvSpPr>
-          <p:cNvPr id="336" name="TextBox 2"/>
-          <p:cNvSpPr txBox="1"/>
-          <p:nvPr/>
-        </p:nvSpPr>
-        <p:spPr>
-          <a:xfrm>
-            <a:off x="502919" y="182879"/>
-            <a:ext cx="11155682" cy="444759"/>
-          </a:xfrm>
-          <a:prstGeom prst="rect">
-            <a:avLst/>
-          </a:prstGeom>
-          <a:ln w="12700">
-            <a:miter lim="400000"/>
-          </a:ln>
-          <a:extLst>
-            <a:ext uri="{C572A759-6A51-4108-AA02-DFA0A04FC94B}">
-              <ma14:wrappingTextBoxFlag xmlns:ma14="http://schemas.microsoft.com/office/mac/drawingml/2011/main" val="1"/>
-            </a:ext>
-          </a:extLst>
-        </p:spPr>
-        <p:txBody>
-          <a:bodyPr lIns="45719" rIns="45719">
-            <a:spAutoFit/>
-          </a:bodyPr>
-          <a:lstStyle>
-            <a:lvl1pPr>
-              <a:defRPr b="1" sz="2800">
-                <a:solidFill>
-                  <a:srgbClr val="FFFFFF"/>
-                </a:solidFill>
-              </a:defRPr>
-            </a:lvl1pPr>
-          </a:lstStyle>
-          <a:p>
-            <a:pPr/>
-            <a:r>
-              <a:rPr/>
-              <a:t>You Don't Need a Grant</a:t>
-            </a:r>
-          </a:p>
-        </p:txBody>
-      </p:sp>
-      <p:sp>
-        <p:nvSpPr>
-          <p:cNvPr id="338" name="Rectangle 4"/>
-          <p:cNvSpPr/>
-          <p:nvPr/>
-        </p:nvSpPr>
-        <p:spPr>
-          <a:xfrm>
-            <a:off x="457200" y="4572000"/>
-            <a:ext cx="5486400" cy="1828800"/>
-          </a:xfrm>
-          <a:prstGeom prst="rect">
-            <a:avLst/>
-          </a:prstGeom>
-          <a:solidFill>
-            <a:srgbClr val="F0F8F4"/>
-          </a:solidFill>
-          <a:ln w="12700">
-            <a:miter lim="400000"/>
-          </a:ln>
-          <a:effectLst>
-            <a:outerShdw sx="100000" sy="100000" kx="0" ky="0" algn="b" rotWithShape="0" blurRad="38100" dist="23000" dir="5400000">
-              <a:srgbClr val="000000">
-                <a:alpha val="35000"/>
-              </a:srgbClr>
-            </a:outerShdw>
-          </a:effectLst>
-        </p:spPr>
-        <p:txBody>
-          <a:bodyPr lIns="45719" rIns="45719" anchor="ctr"/>
-          <a:lstStyle/>
-          <a:p>
-            <a:pPr algn="ctr">
-              <a:defRPr>
-                <a:solidFill>
-                  <a:srgbClr val="FFFFFF"/>
-                </a:solidFill>
-              </a:defRPr>
-            </a:pPr>
-          </a:p>
-        </p:txBody>
-      </p:sp>
-      <p:sp>
-        <p:nvSpPr>
-          <p:cNvPr id="339" name="Rectangle 5"/>
-          <p:cNvSpPr/>
-          <p:nvPr/>
-        </p:nvSpPr>
-        <p:spPr>
-          <a:xfrm>
-            <a:off x="457200" y="4572000"/>
-            <a:ext cx="50800" cy="1828800"/>
-          </a:xfrm>
-          <a:prstGeom prst="rect">
-            <a:avLst/>
-          </a:prstGeom>
-          <a:solidFill>
-            <a:srgbClr val="2D8659"/>
-          </a:solidFill>
-          <a:ln w="12700">
-            <a:miter lim="400000"/>
-          </a:ln>
-          <a:effectLst>
-            <a:outerShdw sx="100000" sy="100000" kx="0" ky="0" algn="b" rotWithShape="0" blurRad="38100" dist="23000" dir="5400000">
-              <a:srgbClr val="000000">
-                <a:alpha val="35000"/>
-              </a:srgbClr>
-            </a:outerShdw>
-          </a:effectLst>
-        </p:spPr>
-        <p:txBody>
-          <a:bodyPr lIns="45719" rIns="45719" anchor="ctr"/>
-          <a:lstStyle/>
-          <a:p>
-            <a:pPr algn="ctr">
-              <a:defRPr>
-                <a:solidFill>
-                  <a:srgbClr val="FFFFFF"/>
-                </a:solidFill>
-              </a:defRPr>
-            </a:pPr>
-          </a:p>
-        </p:txBody>
-      </p:sp>
-      <p:sp>
-        <p:nvSpPr>
-          <p:cNvPr id="340" name="TextBox 6"/>
-          <p:cNvSpPr txBox="1"/>
-          <p:nvPr/>
-        </p:nvSpPr>
-        <p:spPr>
-          <a:xfrm>
-            <a:off x="731519" y="4645152"/>
-            <a:ext cx="5029202" cy="225708"/>
-          </a:xfrm>
-          <a:prstGeom prst="rect">
-            <a:avLst/>
-          </a:prstGeom>
-          <a:ln w="12700">
-            <a:miter lim="400000"/>
-          </a:ln>
-          <a:extLst>
-            <a:ext uri="{C572A759-6A51-4108-AA02-DFA0A04FC94B}">
-              <ma14:wrappingTextBoxFlag xmlns:ma14="http://schemas.microsoft.com/office/mac/drawingml/2011/main" val="1"/>
-            </a:ext>
-          </a:extLst>
-        </p:spPr>
-        <p:txBody>
-          <a:bodyPr lIns="45719" rIns="45719">
-            <a:spAutoFit/>
-          </a:bodyPr>
-          <a:lstStyle>
-            <a:lvl1pPr>
-              <a:defRPr b="1" sz="1100">
-                <a:solidFill>
-                  <a:srgbClr val="2D8659"/>
-                </a:solidFill>
-              </a:defRPr>
-            </a:lvl1pPr>
-          </a:lstStyle>
-          <a:p>
-            <a:pPr/>
-            <a:r>
-              <a:t>USE VR WHEN</a:t>
-            </a:r>
-          </a:p>
-        </p:txBody>
-      </p:sp>
-      <p:sp>
-        <p:nvSpPr>
-          <p:cNvPr id="341" name="TextBox 7"/>
-          <p:cNvSpPr txBox="1"/>
-          <p:nvPr/>
-        </p:nvSpPr>
-        <p:spPr>
-          <a:xfrm>
-            <a:off x="731519" y="4937759"/>
-            <a:ext cx="5029202" cy="506597"/>
-          </a:xfrm>
-          <a:prstGeom prst="rect">
-            <a:avLst/>
-          </a:prstGeom>
-          <a:ln w="12700">
-            <a:miter lim="400000"/>
-          </a:ln>
-          <a:extLst>
-            <a:ext uri="{C572A759-6A51-4108-AA02-DFA0A04FC94B}">
-              <ma14:wrappingTextBoxFlag xmlns:ma14="http://schemas.microsoft.com/office/mac/drawingml/2011/main" val="1"/>
-            </a:ext>
-          </a:extLst>
-        </p:spPr>
-        <p:txBody>
-          <a:bodyPr lIns="45719" rIns="45719">
-            <a:spAutoFit/>
-          </a:bodyPr>
-          <a:lstStyle>
-            <a:lvl1pPr>
-              <a:defRPr sz="1500">
-                <a:solidFill>
-                  <a:srgbClr val="1A2332"/>
-                </a:solidFill>
-              </a:defRPr>
-            </a:lvl1pPr>
-          </a:lstStyle>
-          <a:p>
-            <a:pPr/>
-            <a:r>
-              <a:t>Procedural skills, team scenarios, high-acuity rehearsal, regular use</a:t>
-            </a:r>
-          </a:p>
-        </p:txBody>
-      </p:sp>
-      <p:sp>
-        <p:nvSpPr>
-          <p:cNvPr id="342" name="Rectangle 8"/>
-          <p:cNvSpPr/>
-          <p:nvPr/>
-        </p:nvSpPr>
-        <p:spPr>
-          <a:xfrm>
-            <a:off x="6217920" y="4572000"/>
-            <a:ext cx="5486401" cy="1828800"/>
-          </a:xfrm>
-          <a:prstGeom prst="rect">
-            <a:avLst/>
-          </a:prstGeom>
-          <a:solidFill>
-            <a:srgbClr val="FDF6F0"/>
-          </a:solidFill>
-          <a:ln w="12700">
-            <a:miter lim="400000"/>
-          </a:ln>
-          <a:effectLst>
-            <a:outerShdw sx="100000" sy="100000" kx="0" ky="0" algn="b" rotWithShape="0" blurRad="38100" dist="23000" dir="5400000">
-              <a:srgbClr val="000000">
-                <a:alpha val="35000"/>
-              </a:srgbClr>
-            </a:outerShdw>
-          </a:effectLst>
-        </p:spPr>
-        <p:txBody>
-          <a:bodyPr lIns="45719" rIns="45719" anchor="ctr"/>
-          <a:lstStyle/>
-          <a:p>
-            <a:pPr algn="ctr">
-              <a:defRPr>
-                <a:solidFill>
-                  <a:srgbClr val="FFFFFF"/>
-                </a:solidFill>
-              </a:defRPr>
-            </a:pPr>
-          </a:p>
-        </p:txBody>
-      </p:sp>
-      <p:sp>
-        <p:nvSpPr>
-          <p:cNvPr id="343" name="Rectangle 9"/>
-          <p:cNvSpPr/>
-          <p:nvPr/>
-        </p:nvSpPr>
-        <p:spPr>
-          <a:xfrm>
-            <a:off x="6217920" y="4572000"/>
-            <a:ext cx="50801" cy="1828800"/>
-          </a:xfrm>
-          <a:prstGeom prst="rect">
-            <a:avLst/>
-          </a:prstGeom>
-          <a:solidFill>
-            <a:srgbClr val="E8833A"/>
-          </a:solidFill>
-          <a:ln w="12700">
-            <a:miter lim="400000"/>
-          </a:ln>
-          <a:effectLst>
-            <a:outerShdw sx="100000" sy="100000" kx="0" ky="0" algn="b" rotWithShape="0" blurRad="38100" dist="23000" dir="5400000">
-              <a:srgbClr val="000000">
-                <a:alpha val="35000"/>
-              </a:srgbClr>
-            </a:outerShdw>
-          </a:effectLst>
-        </p:spPr>
-        <p:txBody>
-          <a:bodyPr lIns="45719" rIns="45719" anchor="ctr"/>
-          <a:lstStyle/>
-          <a:p>
-            <a:pPr algn="ctr">
-              <a:defRPr>
-                <a:solidFill>
-                  <a:srgbClr val="FFFFFF"/>
-                </a:solidFill>
-              </a:defRPr>
-            </a:pPr>
-          </a:p>
-        </p:txBody>
-      </p:sp>
-      <p:sp>
-        <p:nvSpPr>
-          <p:cNvPr id="344" name="TextBox 10"/>
-          <p:cNvSpPr txBox="1"/>
-          <p:nvPr/>
-        </p:nvSpPr>
-        <p:spPr>
-          <a:xfrm>
-            <a:off x="6492239" y="4645152"/>
-            <a:ext cx="5029202" cy="225708"/>
-          </a:xfrm>
-          <a:prstGeom prst="rect">
-            <a:avLst/>
-          </a:prstGeom>
-          <a:ln w="12700">
-            <a:miter lim="400000"/>
-          </a:ln>
-          <a:extLst>
-            <a:ext uri="{C572A759-6A51-4108-AA02-DFA0A04FC94B}">
-              <ma14:wrappingTextBoxFlag xmlns:ma14="http://schemas.microsoft.com/office/mac/drawingml/2011/main" val="1"/>
-            </a:ext>
-          </a:extLst>
-        </p:spPr>
-        <p:txBody>
-          <a:bodyPr lIns="45719" rIns="45719">
-            <a:spAutoFit/>
-          </a:bodyPr>
-          <a:lstStyle>
-            <a:lvl1pPr>
-              <a:defRPr b="1" sz="1100">
-                <a:solidFill>
-                  <a:srgbClr val="E8833A"/>
-                </a:solidFill>
-              </a:defRPr>
-            </a:lvl1pPr>
-          </a:lstStyle>
-          <a:p>
-            <a:pPr/>
-            <a:r>
-              <a:rPr/>
-              <a:t>THE REST</a:t>
-            </a:r>
-          </a:p>
-        </p:txBody>
-      </p:sp>
-      <p:sp>
-        <p:nvSpPr>
-          <p:cNvPr id="345" name="TextBox 11"/>
-          <p:cNvSpPr txBox="1"/>
-          <p:nvPr/>
-        </p:nvSpPr>
-        <p:spPr>
-          <a:xfrm>
-            <a:off x="6492239" y="4937759"/>
-            <a:ext cx="5029202" cy="506597"/>
-          </a:xfrm>
-          <a:prstGeom prst="rect">
-            <a:avLst/>
-          </a:prstGeom>
-          <a:ln w="12700">
-            <a:miter lim="400000"/>
-          </a:ln>
-          <a:extLst>
-            <a:ext uri="{C572A759-6A51-4108-AA02-DFA0A04FC94B}">
-              <ma14:wrappingTextBoxFlag xmlns:ma14="http://schemas.microsoft.com/office/mac/drawingml/2011/main" val="1"/>
-            </a:ext>
-          </a:extLst>
-        </p:spPr>
-        <p:txBody>
-          <a:bodyPr lIns="45719" rIns="45719">
-            <a:spAutoFit/>
-          </a:bodyPr>
-          <a:lstStyle>
-            <a:lvl1pPr>
-              <a:defRPr sz="1500">
-                <a:solidFill>
-                  <a:srgbClr val="1A2332"/>
-                </a:solidFill>
-              </a:defRPr>
-            </a:lvl1pPr>
-          </a:lstStyle>
-          <a:p>
-            <a:pPr/>
-            <a:r>
-              <a:t>The learning goal is clinical reasoning, text/screen does the job</a:t>
-            </a:r>
-          </a:p>
-        </p:txBody>
-      </p:sp>
-      <p:sp>
-        <p:nvSpPr>
-          <p:cNvPr id="346" name="TextBox 345"/>
-          <p:cNvSpPr txBox="1"/>
-          <p:nvPr/>
-        </p:nvSpPr>
-        <p:spPr>
-          <a:xfrm>
-            <a:off x="502919" y="1097280"/>
-            <a:ext cx="8229600" cy="457200"/>
-          </a:xfrm>
-          <a:prstGeom prst="rect">
-            <a:avLst/>
-          </a:prstGeom>
-          <a:noFill/>
-        </p:spPr>
-        <p:txBody>
-          <a:bodyPr wrap="none">
-            <a:spAutoFit/>
-          </a:bodyPr>
-          <a:lstStyle/>
-          <a:p>
-            <a:r>
-              <a:rPr sz="2000"/>
-              <a:t>$0 today · $25 next month · $100 next year · full starter stack in the Workshop Guide, Section 6</a:t>
+          <a:lstStyle/>
+          <a:p>
+            <a:r>
+              <a:rPr sz="1600" b="0">
+                <a:solidFill>
+                  <a:srgbClr val="0000FF"/>
+                </a:solidFill>
+              </a:rPr>
+              <a:t>Workshop Guide → Section 5</a:t>
             </a:r>
           </a:p>
         </p:txBody>
@@ -7712,7 +6126,7 @@
       </p:grpSpPr>
       <p:sp>
         <p:nvSpPr>
-          <p:cNvPr id="370" name="Rectangle 1"/>
+          <p:cNvPr id="2" name="Rectangle 1"/>
           <p:cNvSpPr/>
           <p:nvPr/>
         </p:nvSpPr>
@@ -7727,78 +6141,36 @@
           <a:solidFill>
             <a:srgbClr val="2D5F7C"/>
           </a:solidFill>
-          <a:ln w="12700">
-            <a:miter lim="400000"/>
+          <a:ln>
+            <a:noFill/>
           </a:ln>
-          <a:effectLst>
-            <a:outerShdw sx="100000" sy="100000" kx="0" ky="0" algn="b" rotWithShape="0" blurRad="38100" dist="23000" dir="5400000">
-              <a:srgbClr val="000000">
-                <a:alpha val="35000"/>
-              </a:srgbClr>
-            </a:outerShdw>
-          </a:effectLst>
-        </p:spPr>
-        <p:txBody>
-          <a:bodyPr lIns="45719" rIns="45719" anchor="ctr"/>
-          <a:lstStyle/>
-          <a:p>
-            <a:pPr algn="ctr">
-              <a:defRPr>
-                <a:solidFill>
-                  <a:srgbClr val="FFFFFF"/>
-                </a:solidFill>
-              </a:defRPr>
-            </a:pPr>
-          </a:p>
-        </p:txBody>
-      </p:sp>
-      <p:sp>
-        <p:nvSpPr>
-          <p:cNvPr id="371" name="TextBox 2"/>
-          <p:cNvSpPr txBox="1"/>
-          <p:nvPr/>
-        </p:nvSpPr>
-        <p:spPr>
-          <a:xfrm>
-            <a:off x="502919" y="182879"/>
-            <a:ext cx="11155682" cy="444759"/>
-          </a:xfrm>
-          <a:prstGeom prst="rect">
-            <a:avLst/>
-          </a:prstGeom>
-          <a:ln w="12700">
-            <a:miter lim="400000"/>
-          </a:ln>
-          <a:extLst>
-            <a:ext uri="{C572A759-6A51-4108-AA02-DFA0A04FC94B}">
-              <ma14:wrappingTextBoxFlag xmlns:ma14="http://schemas.microsoft.com/office/mac/drawingml/2011/main" val="1"/>
-            </a:ext>
-          </a:extLst>
-        </p:spPr>
-        <p:txBody>
-          <a:bodyPr lIns="45719" rIns="45719">
-            <a:spAutoFit/>
-          </a:bodyPr>
-          <a:lstStyle>
-            <a:lvl1pPr>
-              <a:defRPr b="1" sz="2800">
-                <a:solidFill>
-                  <a:srgbClr val="FFFFFF"/>
-                </a:solidFill>
-              </a:defRPr>
-            </a:lvl1pPr>
-          </a:lstStyle>
-          <a:p>
-            <a:pPr/>
-            <a:r>
-              <a:t>Think · Pair · Share (2 min)</a:t>
-            </a:r>
-          </a:p>
-        </p:txBody>
-      </p:sp>
-      <p:sp>
-        <p:nvSpPr>
-          <p:cNvPr id="372" name="Rectangle 3"/>
+          <a:effectLst/>
+        </p:spPr>
+        <p:style>
+          <a:lnRef idx="1">
+            <a:schemeClr val="accent1"/>
+          </a:lnRef>
+          <a:fillRef idx="3">
+            <a:schemeClr val="accent1"/>
+          </a:fillRef>
+          <a:effectRef idx="2">
+            <a:schemeClr val="accent1"/>
+          </a:effectRef>
+          <a:fontRef idx="minor">
+            <a:schemeClr val="lt1"/>
+          </a:fontRef>
+        </p:style>
+        <p:txBody>
+          <a:bodyPr rtlCol="0" anchor="ctr"/>
+          <a:lstStyle/>
+          <a:p>
+            <a:pPr algn="ctr"/>
+          </a:p>
+        </p:txBody>
+      </p:sp>
+      <p:sp>
+        <p:nvSpPr>
+          <p:cNvPr id="3" name="Rectangle 2"/>
           <p:cNvSpPr/>
           <p:nvPr/>
         </p:nvSpPr>
@@ -7813,34 +6185,36 @@
           <a:solidFill>
             <a:srgbClr val="F0F4F8"/>
           </a:solidFill>
-          <a:ln w="12700">
-            <a:miter lim="400000"/>
+          <a:ln>
+            <a:noFill/>
           </a:ln>
-          <a:effectLst>
-            <a:outerShdw sx="100000" sy="100000" kx="0" ky="0" algn="b" rotWithShape="0" blurRad="38100" dist="23000" dir="5400000">
-              <a:srgbClr val="000000">
-                <a:alpha val="35000"/>
-              </a:srgbClr>
-            </a:outerShdw>
-          </a:effectLst>
-        </p:spPr>
-        <p:txBody>
-          <a:bodyPr lIns="45719" rIns="45719" anchor="ctr"/>
-          <a:lstStyle/>
-          <a:p>
-            <a:pPr algn="ctr">
-              <a:defRPr>
-                <a:solidFill>
-                  <a:srgbClr val="FFFFFF"/>
-                </a:solidFill>
-              </a:defRPr>
-            </a:pPr>
-          </a:p>
-        </p:txBody>
-      </p:sp>
-      <p:sp>
-        <p:nvSpPr>
-          <p:cNvPr id="373" name="Rectangle 4"/>
+          <a:effectLst/>
+        </p:spPr>
+        <p:style>
+          <a:lnRef idx="1">
+            <a:schemeClr val="accent1"/>
+          </a:lnRef>
+          <a:fillRef idx="3">
+            <a:schemeClr val="accent1"/>
+          </a:fillRef>
+          <a:effectRef idx="2">
+            <a:schemeClr val="accent1"/>
+          </a:effectRef>
+          <a:fontRef idx="minor">
+            <a:schemeClr val="lt1"/>
+          </a:fontRef>
+        </p:style>
+        <p:txBody>
+          <a:bodyPr rtlCol="0" anchor="ctr"/>
+          <a:lstStyle/>
+          <a:p>
+            <a:pPr algn="ctr"/>
+          </a:p>
+        </p:txBody>
+      </p:sp>
+      <p:sp>
+        <p:nvSpPr>
+          <p:cNvPr id="4" name="Rectangle 3"/>
           <p:cNvSpPr/>
           <p:nvPr/>
         </p:nvSpPr>
@@ -7855,34 +6229,69 @@
           <a:solidFill>
             <a:srgbClr val="2D5F7C"/>
           </a:solidFill>
-          <a:ln w="12700">
-            <a:miter lim="400000"/>
+          <a:ln>
+            <a:noFill/>
           </a:ln>
-          <a:effectLst>
-            <a:outerShdw sx="100000" sy="100000" kx="0" ky="0" algn="b" rotWithShape="0" blurRad="38100" dist="23000" dir="5400000">
-              <a:srgbClr val="000000">
-                <a:alpha val="35000"/>
-              </a:srgbClr>
-            </a:outerShdw>
-          </a:effectLst>
-        </p:spPr>
-        <p:txBody>
-          <a:bodyPr lIns="45719" rIns="45719" anchor="ctr"/>
-          <a:lstStyle/>
-          <a:p>
-            <a:pPr algn="ctr">
-              <a:defRPr>
+          <a:effectLst/>
+        </p:spPr>
+        <p:style>
+          <a:lnRef idx="1">
+            <a:schemeClr val="accent1"/>
+          </a:lnRef>
+          <a:fillRef idx="3">
+            <a:schemeClr val="accent1"/>
+          </a:fillRef>
+          <a:effectRef idx="2">
+            <a:schemeClr val="accent1"/>
+          </a:effectRef>
+          <a:fontRef idx="minor">
+            <a:schemeClr val="lt1"/>
+          </a:fontRef>
+        </p:style>
+        <p:txBody>
+          <a:bodyPr rtlCol="0" anchor="ctr"/>
+          <a:lstStyle/>
+          <a:p>
+            <a:pPr algn="ctr"/>
+          </a:p>
+        </p:txBody>
+      </p:sp>
+      <p:sp>
+        <p:nvSpPr>
+          <p:cNvPr id="5" name="TextBox 4"/>
+          <p:cNvSpPr txBox="1"/>
+          <p:nvPr/>
+        </p:nvSpPr>
+        <p:spPr>
+          <a:xfrm>
+            <a:off x="502919" y="182879"/>
+            <a:ext cx="11155682" cy="444759"/>
+          </a:xfrm>
+          <a:prstGeom prst="rect">
+            <a:avLst/>
+          </a:prstGeom>
+          <a:noFill/>
+        </p:spPr>
+        <p:txBody>
+          <a:bodyPr wrap="square">
+            <a:spAutoFit/>
+          </a:bodyPr>
+          <a:lstStyle/>
+          <a:p>
+            <a:r>
+              <a:rPr sz="2800" b="1">
                 <a:solidFill>
                   <a:srgbClr val="FFFFFF"/>
                 </a:solidFill>
-              </a:defRPr>
-            </a:pPr>
-          </a:p>
-        </p:txBody>
-      </p:sp>
-      <p:sp>
-        <p:nvSpPr>
-          <p:cNvPr id="374" name="TextBox 5"/>
+              </a:rPr>
+              <a:t>Think · Pair · Share: Match the Tool (2 min)</a:t>
+            </a:r>
+          </a:p>
+        </p:txBody>
+      </p:sp>
+      <p:sp>
+        <p:nvSpPr>
+          <p:cNvPr id="6" name="TextBox 5"/>
           <p:cNvSpPr txBox="1"/>
           <p:nvPr/>
         </p:nvSpPr>
@@ -7894,59 +6303,43 @@
           <a:prstGeom prst="rect">
             <a:avLst/>
           </a:prstGeom>
-          <a:ln w="12700">
-            <a:miter lim="400000"/>
-          </a:ln>
-          <a:extLst>
-            <a:ext uri="{C572A759-6A51-4108-AA02-DFA0A04FC94B}">
-              <ma14:wrappingTextBoxFlag xmlns:ma14="http://schemas.microsoft.com/office/mac/drawingml/2011/main" val="1"/>
-            </a:ext>
-          </a:extLst>
-        </p:spPr>
-        <p:txBody>
-          <a:bodyPr lIns="45719" rIns="45719">
+          <a:noFill/>
+        </p:spPr>
+        <p:txBody>
+          <a:bodyPr wrap="square">
             <a:spAutoFit/>
           </a:bodyPr>
           <a:lstStyle/>
           <a:p>
+            <a:r>
+              <a:rPr sz="2200" b="0">
+                <a:solidFill>
+                  <a:srgbClr val="1E4258"/>
+                </a:solidFill>
+              </a:rPr>
+              <a:t>Pick a clinical skill your fellows need to learn.</a:t>
+            </a:r>
+          </a:p>
+          <a:p>
             <a:pPr>
               <a:spcBef>
-                <a:spcPts val="1400"/>
+                <a:spcPts val="1600"/>
               </a:spcBef>
-              <a:defRPr sz="2200">
+            </a:pPr>
+            <a:r>
+              <a:rPr sz="2200" b="0">
                 <a:solidFill>
                   <a:srgbClr val="1E4258"/>
                 </a:solidFill>
-              </a:defRPr>
-            </a:pPr>
-            <a:r>
-              <a:rPr/>
-              <a:t>Think of a clinical skill your fellows need to learn</a:t>
-            </a:r>
-          </a:p>
-          <a:p>
-            <a:r>
-              <a:rPr/>
-              <a:t>Text and audio, images included: ECG, X-ray, CT, labs? AR? Screen-based? VR?</a:t>
-            </a:r>
-          </a:p>
-          <a:p>
-            <a:r>
-              <a:rPr/>
-              <a:t>Which fits, and would the free option work?</a:t>
-            </a:r>
-          </a:p>
-          <a:p>
-            <a:r>
-              <a:rPr/>
-              <a:t>Share your reasoning with your table group</a:t>
-            </a:r>
-          </a:p>
-        </p:txBody>
-      </p:sp>
-      <p:sp>
-        <p:nvSpPr>
-          <p:cNvPr id="375" name="TextBox 6"/>
+              </a:rPr>
+              <a:t>Which point on the spectrum fits, and would the free option do the job?</a:t>
+            </a:r>
+          </a:p>
+        </p:txBody>
+      </p:sp>
+      <p:sp>
+        <p:nvSpPr>
+          <p:cNvPr id="7" name="TextBox 6"/>
           <p:cNvSpPr txBox="1"/>
           <p:nvPr/>
         </p:nvSpPr>
@@ -7958,56 +6351,21 @@
           <a:prstGeom prst="rect">
             <a:avLst/>
           </a:prstGeom>
-          <a:ln w="12700">
-            <a:miter lim="400000"/>
-          </a:ln>
-          <a:extLst>
-            <a:ext uri="{C572A759-6A51-4108-AA02-DFA0A04FC94B}">
-              <ma14:wrappingTextBoxFlag xmlns:ma14="http://schemas.microsoft.com/office/mac/drawingml/2011/main" val="1"/>
-            </a:ext>
-          </a:extLst>
-        </p:spPr>
-        <p:txBody>
-          <a:bodyPr lIns="45719" rIns="45719">
+          <a:noFill/>
+        </p:spPr>
+        <p:txBody>
+          <a:bodyPr wrap="square">
             <a:spAutoFit/>
           </a:bodyPr>
-          <a:lstStyle>
-            <a:lvl1pPr>
-              <a:defRPr sz="1600" u="sng">
+          <a:lstStyle/>
+          <a:p>
+            <a:r>
+              <a:rPr sz="1600" b="0">
                 <a:solidFill>
                   <a:srgbClr val="0000FF"/>
                 </a:solidFill>
-                <a:uFill>
-                  <a:solidFill>
-                    <a:srgbClr val="0000FF"/>
-                  </a:solidFill>
-                </a:uFill>
-                <a:hlinkClick r:id="rId2" invalidUrl="" action="" tgtFrame="" tooltip="" history="1" highlightClick="0" endSnd="0"/>
-              </a:defRPr>
-            </a:lvl1pPr>
-          </a:lstStyle>
-          <a:p>
-            <a:pPr>
-              <a:defRPr u="none">
-                <a:solidFill>
-                  <a:srgbClr val="2D5F7C"/>
-                </a:solidFill>
-                <a:uFillTx/>
-              </a:defRPr>
-            </a:pPr>
-            <a:r>
-              <a:rPr u="sng">
-                <a:solidFill>
-                  <a:srgbClr val="0000FF"/>
-                </a:solidFill>
-                <a:uFill>
-                  <a:solidFill>
-                    <a:srgbClr val="0000FF"/>
-                  </a:solidFill>
-                </a:uFill>
-                <a:hlinkClick r:id="rId2" invalidUrl="" action="" tgtFrame="" tooltip="" history="1" highlightClick="0" endSnd="0"/>
               </a:rPr>
-              <a:t>Workshop Guide</a:t>
+              <a:t>Workshop Guide → Section 5</a:t>
             </a:r>
           </a:p>
         </p:txBody>
@@ -9622,7 +7980,7 @@
       </p:grpSpPr>
       <p:sp>
         <p:nvSpPr>
-          <p:cNvPr id="422" name="Rectangle 1"/>
+          <p:cNvPr id="2" name="Rectangle 1"/>
           <p:cNvSpPr/>
           <p:nvPr/>
         </p:nvSpPr>
@@ -9637,85 +7995,43 @@
           <a:solidFill>
             <a:srgbClr val="2D5F7C"/>
           </a:solidFill>
-          <a:ln w="12700">
-            <a:miter lim="400000"/>
+          <a:ln>
+            <a:noFill/>
           </a:ln>
-          <a:effectLst>
-            <a:outerShdw sx="100000" sy="100000" kx="0" ky="0" algn="b" rotWithShape="0" blurRad="38100" dist="23000" dir="5400000">
-              <a:srgbClr val="000000">
-                <a:alpha val="35000"/>
-              </a:srgbClr>
-            </a:outerShdw>
-          </a:effectLst>
-        </p:spPr>
-        <p:txBody>
-          <a:bodyPr lIns="45719" rIns="45719" anchor="ctr"/>
-          <a:lstStyle/>
-          <a:p>
-            <a:pPr algn="ctr">
-              <a:defRPr>
-                <a:solidFill>
-                  <a:srgbClr val="FFFFFF"/>
-                </a:solidFill>
-              </a:defRPr>
-            </a:pPr>
-          </a:p>
-        </p:txBody>
-      </p:sp>
-      <p:sp>
-        <p:nvSpPr>
-          <p:cNvPr id="423" name="TextBox 2"/>
-          <p:cNvSpPr txBox="1"/>
-          <p:nvPr/>
-        </p:nvSpPr>
-        <p:spPr>
-          <a:xfrm>
-            <a:off x="502919" y="182879"/>
-            <a:ext cx="11155682" cy="444759"/>
-          </a:xfrm>
-          <a:prstGeom prst="rect">
-            <a:avLst/>
-          </a:prstGeom>
-          <a:ln w="12700">
-            <a:miter lim="400000"/>
-          </a:ln>
-          <a:extLst>
-            <a:ext uri="{C572A759-6A51-4108-AA02-DFA0A04FC94B}">
-              <ma14:wrappingTextBoxFlag xmlns:ma14="http://schemas.microsoft.com/office/mac/drawingml/2011/main" val="1"/>
-            </a:ext>
-          </a:extLst>
-        </p:spPr>
-        <p:txBody>
-          <a:bodyPr lIns="45719" rIns="45719">
-            <a:spAutoFit/>
-          </a:bodyPr>
-          <a:lstStyle>
-            <a:lvl1pPr>
-              <a:defRPr b="1" sz="2800">
-                <a:solidFill>
-                  <a:srgbClr val="FFFFFF"/>
-                </a:solidFill>
-              </a:defRPr>
-            </a:lvl1pPr>
-          </a:lstStyle>
-          <a:p>
-            <a:pPr/>
-            <a:r>
-              <a:t>Share-Out, 3 min</a:t>
-            </a:r>
-          </a:p>
-        </p:txBody>
-      </p:sp>
-      <p:sp>
-        <p:nvSpPr>
-          <p:cNvPr id="424" name="Rectangle 3"/>
+          <a:effectLst/>
+        </p:spPr>
+        <p:style>
+          <a:lnRef idx="1">
+            <a:schemeClr val="accent1"/>
+          </a:lnRef>
+          <a:fillRef idx="3">
+            <a:schemeClr val="accent1"/>
+          </a:fillRef>
+          <a:effectRef idx="2">
+            <a:schemeClr val="accent1"/>
+          </a:effectRef>
+          <a:fontRef idx="minor">
+            <a:schemeClr val="lt1"/>
+          </a:fontRef>
+        </p:style>
+        <p:txBody>
+          <a:bodyPr rtlCol="0" anchor="ctr"/>
+          <a:lstStyle/>
+          <a:p>
+            <a:pPr algn="ctr"/>
+          </a:p>
+        </p:txBody>
+      </p:sp>
+      <p:sp>
+        <p:nvSpPr>
+          <p:cNvPr id="3" name="Rectangle 2"/>
           <p:cNvSpPr/>
           <p:nvPr/>
         </p:nvSpPr>
         <p:spPr>
           <a:xfrm>
             <a:off x="640080" y="1371600"/>
-            <a:ext cx="10972801" cy="3200400"/>
+            <a:ext cx="10972801" cy="3657600"/>
           </a:xfrm>
           <a:prstGeom prst="rect">
             <a:avLst/>
@@ -9723,117 +8039,187 @@
           <a:solidFill>
             <a:srgbClr val="F0F4F8"/>
           </a:solidFill>
-          <a:ln w="12700">
-            <a:miter lim="400000"/>
+          <a:ln>
+            <a:noFill/>
           </a:ln>
-          <a:effectLst>
-            <a:outerShdw sx="100000" sy="100000" kx="0" ky="0" algn="b" rotWithShape="0" blurRad="38100" dist="23000" dir="5400000">
-              <a:srgbClr val="000000">
-                <a:alpha val="35000"/>
-              </a:srgbClr>
-            </a:outerShdw>
-          </a:effectLst>
-        </p:spPr>
-        <p:txBody>
-          <a:bodyPr lIns="45719" rIns="45719" anchor="ctr"/>
-          <a:lstStyle/>
-          <a:p>
-            <a:pPr algn="ctr">
-              <a:defRPr>
-                <a:solidFill>
-                  <a:srgbClr val="FFFFFF"/>
-                </a:solidFill>
-              </a:defRPr>
-            </a:pPr>
-          </a:p>
-        </p:txBody>
-      </p:sp>
-      <p:sp>
-        <p:nvSpPr>
-          <p:cNvPr id="425" name="TextBox 4"/>
+          <a:effectLst/>
+        </p:spPr>
+        <p:style>
+          <a:lnRef idx="1">
+            <a:schemeClr val="accent1"/>
+          </a:lnRef>
+          <a:fillRef idx="3">
+            <a:schemeClr val="accent1"/>
+          </a:fillRef>
+          <a:effectRef idx="2">
+            <a:schemeClr val="accent1"/>
+          </a:effectRef>
+          <a:fontRef idx="minor">
+            <a:schemeClr val="lt1"/>
+          </a:fontRef>
+        </p:style>
+        <p:txBody>
+          <a:bodyPr rtlCol="0" anchor="ctr"/>
+          <a:lstStyle/>
+          <a:p>
+            <a:pPr algn="ctr"/>
+          </a:p>
+        </p:txBody>
+      </p:sp>
+      <p:sp>
+        <p:nvSpPr>
+          <p:cNvPr id="4" name="Rectangle 3"/>
+          <p:cNvSpPr/>
+          <p:nvPr/>
+        </p:nvSpPr>
+        <p:spPr>
+          <a:xfrm>
+            <a:off x="640080" y="1371600"/>
+            <a:ext cx="50801" cy="3657600"/>
+          </a:xfrm>
+          <a:prstGeom prst="rect">
+            <a:avLst/>
+          </a:prstGeom>
+          <a:solidFill>
+            <a:srgbClr val="2D5F7C"/>
+          </a:solidFill>
+          <a:ln>
+            <a:noFill/>
+          </a:ln>
+          <a:effectLst/>
+        </p:spPr>
+        <p:style>
+          <a:lnRef idx="1">
+            <a:schemeClr val="accent1"/>
+          </a:lnRef>
+          <a:fillRef idx="3">
+            <a:schemeClr val="accent1"/>
+          </a:fillRef>
+          <a:effectRef idx="2">
+            <a:schemeClr val="accent1"/>
+          </a:effectRef>
+          <a:fontRef idx="minor">
+            <a:schemeClr val="lt1"/>
+          </a:fontRef>
+        </p:style>
+        <p:txBody>
+          <a:bodyPr rtlCol="0" anchor="ctr"/>
+          <a:lstStyle/>
+          <a:p>
+            <a:pPr algn="ctr"/>
+          </a:p>
+        </p:txBody>
+      </p:sp>
+      <p:sp>
+        <p:nvSpPr>
+          <p:cNvPr id="5" name="TextBox 4"/>
           <p:cNvSpPr txBox="1"/>
           <p:nvPr/>
         </p:nvSpPr>
         <p:spPr>
           <a:xfrm>
-            <a:off x="1143000" y="1828800"/>
-            <a:ext cx="9966961" cy="1756976"/>
-          </a:xfrm>
-          <a:prstGeom prst="rect">
-            <a:avLst/>
-          </a:prstGeom>
-          <a:ln w="12700">
-            <a:miter lim="400000"/>
-          </a:ln>
-          <a:extLst>
-            <a:ext uri="{C572A759-6A51-4108-AA02-DFA0A04FC94B}">
-              <ma14:wrappingTextBoxFlag xmlns:ma14="http://schemas.microsoft.com/office/mac/drawingml/2011/main" val="1"/>
-            </a:ext>
-          </a:extLst>
-        </p:spPr>
-        <p:txBody>
-          <a:bodyPr lIns="45719" rIns="45719">
+            <a:off x="502919" y="182879"/>
+            <a:ext cx="11155682" cy="444759"/>
+          </a:xfrm>
+          <a:prstGeom prst="rect">
+            <a:avLst/>
+          </a:prstGeom>
+          <a:noFill/>
+        </p:spPr>
+        <p:txBody>
+          <a:bodyPr wrap="square">
             <a:spAutoFit/>
           </a:bodyPr>
           <a:lstStyle/>
           <a:p>
+            <a:r>
+              <a:rPr sz="2800" b="1">
+                <a:solidFill>
+                  <a:srgbClr val="FFFFFF"/>
+                </a:solidFill>
+              </a:rPr>
+              <a:t>Share-Out (4 min)</a:t>
+            </a:r>
+          </a:p>
+        </p:txBody>
+      </p:sp>
+      <p:sp>
+        <p:nvSpPr>
+          <p:cNvPr id="6" name="TextBox 5"/>
+          <p:cNvSpPr txBox="1"/>
+          <p:nvPr/>
+        </p:nvSpPr>
+        <p:spPr>
+          <a:xfrm>
+            <a:off x="1143000" y="1828800"/>
+            <a:ext cx="9966961" cy="1985576"/>
+          </a:xfrm>
+          <a:prstGeom prst="rect">
+            <a:avLst/>
+          </a:prstGeom>
+          <a:noFill/>
+        </p:spPr>
+        <p:txBody>
+          <a:bodyPr wrap="square">
+            <a:spAutoFit/>
+          </a:bodyPr>
+          <a:lstStyle/>
+          <a:p>
+            <a:r>
+              <a:rPr sz="2200" b="0">
+                <a:solidFill>
+                  <a:srgbClr val="1E4258"/>
+                </a:solidFill>
+              </a:rPr>
+              <a:t>Two or three groups share their plan, 60 seconds each.</a:t>
+            </a:r>
+          </a:p>
+          <a:p>
             <a:pPr>
               <a:spcBef>
-                <a:spcPts val="800"/>
+                <a:spcPts val="1600"/>
               </a:spcBef>
-              <a:defRPr sz="2200">
+            </a:pPr>
+            <a:r>
+              <a:rPr sz="2200" b="0">
                 <a:solidFill>
                   <a:srgbClr val="1E4258"/>
                 </a:solidFill>
-              </a:defRPr>
-            </a:pPr>
-            <a:r>
-              <a:t>• 2-3 groups share their plan (60 seconds each)</a:t>
-            </a:r>
-          </a:p>
-          <a:p>
-            <a:pPr>
-              <a:spcBef>
-                <a:spcPts val="800"/>
-              </a:spcBef>
-              <a:defRPr sz="2200">
-                <a:solidFill>
-                  <a:srgbClr val="1E4258"/>
-                </a:solidFill>
-              </a:defRPr>
-            </a:pPr>
-            <a:r>
-              <a:t>• What's your educational need?</a:t>
-            </a:r>
-          </a:p>
-          <a:p>
-            <a:pPr>
-              <a:spcBef>
-                <a:spcPts val="800"/>
-              </a:spcBef>
-              <a:defRPr sz="2200">
-                <a:solidFill>
-                  <a:srgbClr val="1E4258"/>
-                </a:solidFill>
-              </a:defRPr>
-            </a:pPr>
-            <a:r>
-              <a:t>• What tool did you pick, and why?</a:t>
-            </a:r>
-          </a:p>
-          <a:p>
-            <a:pPr>
-              <a:spcBef>
-                <a:spcPts val="800"/>
-              </a:spcBef>
-              <a:defRPr sz="2200">
-                <a:solidFill>
-                  <a:srgbClr val="1E4258"/>
-                </a:solidFill>
-              </a:defRPr>
-            </a:pPr>
-            <a:r>
-              <a:t>• What's one barrier and how will you handle it?</a:t>
+              </a:rPr>
+              <a:t>What is your educational need? Your tool? Your first step?</a:t>
+            </a:r>
+          </a:p>
+        </p:txBody>
+      </p:sp>
+      <p:sp>
+        <p:nvSpPr>
+          <p:cNvPr id="7" name="TextBox 6"/>
+          <p:cNvSpPr txBox="1"/>
+          <p:nvPr/>
+        </p:nvSpPr>
+        <p:spPr>
+          <a:xfrm>
+            <a:off x="1143000" y="5303520"/>
+            <a:ext cx="9966961" cy="300594"/>
+          </a:xfrm>
+          <a:prstGeom prst="rect">
+            <a:avLst/>
+          </a:prstGeom>
+          <a:noFill/>
+        </p:spPr>
+        <p:txBody>
+          <a:bodyPr wrap="square">
+            <a:spAutoFit/>
+          </a:bodyPr>
+          <a:lstStyle/>
+          <a:p>
+            <a:r>
+              <a:rPr sz="1600" b="0">
+                <a:solidFill>
+                  <a:srgbClr val="0000FF"/>
+                </a:solidFill>
+              </a:rPr>
+              <a:t>Workshop Guide → Section 7 (the worksheet)</a:t>
             </a:r>
           </a:p>
         </p:txBody>
@@ -9866,7 +8252,7 @@
       </p:grpSpPr>
       <p:sp>
         <p:nvSpPr>
-          <p:cNvPr id="427" name="Rectangle 1"/>
+          <p:cNvPr id="2" name="Rectangle 1"/>
           <p:cNvSpPr/>
           <p:nvPr/>
         </p:nvSpPr>
@@ -9881,34 +8267,124 @@
           <a:solidFill>
             <a:srgbClr val="2D5F7C"/>
           </a:solidFill>
-          <a:ln w="12700">
-            <a:miter lim="400000"/>
+          <a:ln>
+            <a:noFill/>
           </a:ln>
-          <a:effectLst>
-            <a:outerShdw sx="100000" sy="100000" kx="0" ky="0" algn="b" rotWithShape="0" blurRad="38100" dist="23000" dir="5400000">
-              <a:srgbClr val="000000">
-                <a:alpha val="35000"/>
-              </a:srgbClr>
-            </a:outerShdw>
-          </a:effectLst>
-        </p:spPr>
-        <p:txBody>
-          <a:bodyPr lIns="45719" rIns="45719" anchor="ctr"/>
-          <a:lstStyle/>
-          <a:p>
-            <a:pPr algn="ctr">
-              <a:defRPr>
-                <a:solidFill>
-                  <a:srgbClr val="FFFFFF"/>
-                </a:solidFill>
-              </a:defRPr>
-            </a:pPr>
-          </a:p>
-        </p:txBody>
-      </p:sp>
-      <p:sp>
-        <p:nvSpPr>
-          <p:cNvPr id="428" name="TextBox 2"/>
+          <a:effectLst/>
+        </p:spPr>
+        <p:style>
+          <a:lnRef idx="1">
+            <a:schemeClr val="accent1"/>
+          </a:lnRef>
+          <a:fillRef idx="3">
+            <a:schemeClr val="accent1"/>
+          </a:fillRef>
+          <a:effectRef idx="2">
+            <a:schemeClr val="accent1"/>
+          </a:effectRef>
+          <a:fontRef idx="minor">
+            <a:schemeClr val="lt1"/>
+          </a:fontRef>
+        </p:style>
+        <p:txBody>
+          <a:bodyPr rtlCol="0" anchor="ctr"/>
+          <a:lstStyle/>
+          <a:p>
+            <a:pPr algn="ctr"/>
+          </a:p>
+        </p:txBody>
+      </p:sp>
+      <p:sp>
+        <p:nvSpPr>
+          <p:cNvPr id="3" name="Rectangle 2"/>
+          <p:cNvSpPr/>
+          <p:nvPr/>
+        </p:nvSpPr>
+        <p:spPr>
+          <a:xfrm>
+            <a:off x="640080" y="1371600"/>
+            <a:ext cx="10972801" cy="3657600"/>
+          </a:xfrm>
+          <a:prstGeom prst="rect">
+            <a:avLst/>
+          </a:prstGeom>
+          <a:solidFill>
+            <a:srgbClr val="F0F4F8"/>
+          </a:solidFill>
+          <a:ln>
+            <a:noFill/>
+          </a:ln>
+          <a:effectLst/>
+        </p:spPr>
+        <p:style>
+          <a:lnRef idx="1">
+            <a:schemeClr val="accent1"/>
+          </a:lnRef>
+          <a:fillRef idx="3">
+            <a:schemeClr val="accent1"/>
+          </a:fillRef>
+          <a:effectRef idx="2">
+            <a:schemeClr val="accent1"/>
+          </a:effectRef>
+          <a:fontRef idx="minor">
+            <a:schemeClr val="lt1"/>
+          </a:fontRef>
+        </p:style>
+        <p:txBody>
+          <a:bodyPr rtlCol="0" anchor="ctr"/>
+          <a:lstStyle/>
+          <a:p>
+            <a:pPr algn="ctr"/>
+          </a:p>
+        </p:txBody>
+      </p:sp>
+      <p:sp>
+        <p:nvSpPr>
+          <p:cNvPr id="4" name="Rectangle 3"/>
+          <p:cNvSpPr/>
+          <p:nvPr/>
+        </p:nvSpPr>
+        <p:spPr>
+          <a:xfrm>
+            <a:off x="640080" y="1371600"/>
+            <a:ext cx="50801" cy="3657600"/>
+          </a:xfrm>
+          <a:prstGeom prst="rect">
+            <a:avLst/>
+          </a:prstGeom>
+          <a:solidFill>
+            <a:srgbClr val="2D5F7C"/>
+          </a:solidFill>
+          <a:ln>
+            <a:noFill/>
+          </a:ln>
+          <a:effectLst/>
+        </p:spPr>
+        <p:style>
+          <a:lnRef idx="1">
+            <a:schemeClr val="accent1"/>
+          </a:lnRef>
+          <a:fillRef idx="3">
+            <a:schemeClr val="accent1"/>
+          </a:fillRef>
+          <a:effectRef idx="2">
+            <a:schemeClr val="accent1"/>
+          </a:effectRef>
+          <a:fontRef idx="minor">
+            <a:schemeClr val="lt1"/>
+          </a:fontRef>
+        </p:style>
+        <p:txBody>
+          <a:bodyPr rtlCol="0" anchor="ctr"/>
+          <a:lstStyle/>
+          <a:p>
+            <a:pPr algn="ctr"/>
+          </a:p>
+        </p:txBody>
+      </p:sp>
+      <p:sp>
+        <p:nvSpPr>
+          <p:cNvPr id="5" name="TextBox 4"/>
           <p:cNvSpPr txBox="1"/>
           <p:nvPr/>
         </p:nvSpPr>
@@ -9920,31 +8396,20 @@
           <a:prstGeom prst="rect">
             <a:avLst/>
           </a:prstGeom>
-          <a:ln w="12700">
-            <a:miter lim="400000"/>
-          </a:ln>
-          <a:extLst>
-            <a:ext uri="{C572A759-6A51-4108-AA02-DFA0A04FC94B}">
-              <ma14:wrappingTextBoxFlag xmlns:ma14="http://schemas.microsoft.com/office/mac/drawingml/2011/main" val="1"/>
-            </a:ext>
-          </a:extLst>
-        </p:spPr>
-        <p:txBody>
-          <a:bodyPr lIns="45719" rIns="45719">
+          <a:noFill/>
+        </p:spPr>
+        <p:txBody>
+          <a:bodyPr wrap="square">
             <a:spAutoFit/>
           </a:bodyPr>
-          <a:lstStyle>
-            <a:lvl1pPr>
-              <a:defRPr b="1" sz="2800">
+          <a:lstStyle/>
+          <a:p>
+            <a:r>
+              <a:rPr sz="2800" b="1">
                 <a:solidFill>
                   <a:srgbClr val="FFFFFF"/>
                 </a:solidFill>
-              </a:defRPr>
-            </a:lvl1pPr>
-          </a:lstStyle>
-          <a:p>
-            <a:pPr/>
-            <a:r>
+              </a:rPr>
               <a:t>Wrap-Up</a:t>
             </a:r>
           </a:p>
@@ -9952,217 +8417,96 @@
       </p:sp>
       <p:sp>
         <p:nvSpPr>
-          <p:cNvPr id="429" name="TextBox 3"/>
+          <p:cNvPr id="6" name="TextBox 5"/>
           <p:cNvSpPr txBox="1"/>
           <p:nvPr/>
         </p:nvSpPr>
         <p:spPr>
           <a:xfrm>
-            <a:off x="502919" y="1097280"/>
-            <a:ext cx="11155682" cy="300594"/>
-          </a:xfrm>
-          <a:prstGeom prst="rect">
-            <a:avLst/>
-          </a:prstGeom>
-          <a:ln w="12700">
-            <a:miter lim="400000"/>
-          </a:ln>
-          <a:extLst>
-            <a:ext uri="{C572A759-6A51-4108-AA02-DFA0A04FC94B}">
-              <ma14:wrappingTextBoxFlag xmlns:ma14="http://schemas.microsoft.com/office/mac/drawingml/2011/main" val="1"/>
-            </a:ext>
-          </a:extLst>
-        </p:spPr>
-        <p:txBody>
-          <a:bodyPr lIns="45719" rIns="45719">
+            <a:off x="1143000" y="1828800"/>
+            <a:ext cx="9966961" cy="1985576"/>
+          </a:xfrm>
+          <a:prstGeom prst="rect">
+            <a:avLst/>
+          </a:prstGeom>
+          <a:noFill/>
+        </p:spPr>
+        <p:txBody>
+          <a:bodyPr wrap="square">
             <a:spAutoFit/>
           </a:bodyPr>
-          <a:lstStyle>
-            <a:lvl1pPr>
-              <a:defRPr sz="1600">
-                <a:solidFill>
-                  <a:srgbClr val="5A6B7E"/>
-                </a:solidFill>
-              </a:defRPr>
-            </a:lvl1pPr>
-          </a:lstStyle>
-          <a:p>
-            <a:pPr/>
-            <a:r>
-              <a:t>Start with one tool, one need, one small experiment</a:t>
-            </a:r>
-          </a:p>
-        </p:txBody>
-      </p:sp>
-      <p:sp>
-        <p:nvSpPr>
-          <p:cNvPr id="430" name="TextBox 4"/>
+          <a:lstStyle/>
+          <a:p>
+            <a:r>
+              <a:rPr sz="2200" b="0">
+                <a:solidFill>
+                  <a:srgbClr val="1E4258"/>
+                </a:solidFill>
+              </a:rPr>
+              <a:t>Start with one tool, one need, one small experiment.</a:t>
+            </a:r>
+          </a:p>
+          <a:p>
+            <a:pPr>
+              <a:spcBef>
+                <a:spcPts val="1600"/>
+              </a:spcBef>
+            </a:pPr>
+            <a:r>
+              <a:rPr sz="2200" b="0">
+                <a:solidFill>
+                  <a:srgbClr val="1E4258"/>
+                </a:solidFill>
+              </a:rPr>
+              <a:t>Everything from today is in the Workshop Guide: bookmark it now.</a:t>
+            </a:r>
+          </a:p>
+          <a:p>
+            <a:pPr>
+              <a:spcBef>
+                <a:spcPts val="1600"/>
+              </a:spcBef>
+            </a:pPr>
+            <a:r>
+              <a:rPr sz="2200" b="0">
+                <a:solidFill>
+                  <a:srgbClr val="1E4258"/>
+                </a:solidFill>
+              </a:rPr>
+              <a:t>The Zero Dollar starter kit is in Section 8.</a:t>
+            </a:r>
+          </a:p>
+        </p:txBody>
+      </p:sp>
+      <p:sp>
+        <p:nvSpPr>
+          <p:cNvPr id="7" name="TextBox 6"/>
           <p:cNvSpPr txBox="1"/>
           <p:nvPr/>
         </p:nvSpPr>
         <p:spPr>
           <a:xfrm>
-            <a:off x="685800" y="1371600"/>
-            <a:ext cx="10881361" cy="1965782"/>
-          </a:xfrm>
-          <a:prstGeom prst="rect">
-            <a:avLst/>
-          </a:prstGeom>
-          <a:ln w="12700">
-            <a:miter lim="400000"/>
-          </a:ln>
-          <a:extLst>
-            <a:ext uri="{C572A759-6A51-4108-AA02-DFA0A04FC94B}">
-              <ma14:wrappingTextBoxFlag xmlns:ma14="http://schemas.microsoft.com/office/mac/drawingml/2011/main" val="1"/>
-            </a:ext>
-          </a:extLst>
-        </p:spPr>
-        <p:txBody>
-          <a:bodyPr lIns="45719" rIns="45719">
+            <a:off x="1143000" y="5303520"/>
+            <a:ext cx="9966961" cy="300594"/>
+          </a:xfrm>
+          <a:prstGeom prst="rect">
+            <a:avLst/>
+          </a:prstGeom>
+          <a:noFill/>
+        </p:spPr>
+        <p:txBody>
+          <a:bodyPr wrap="square">
             <a:spAutoFit/>
           </a:bodyPr>
           <a:lstStyle/>
           <a:p>
-            <a:pPr>
-              <a:spcBef>
-                <a:spcPts val="800"/>
-              </a:spcBef>
-              <a:defRPr sz="2000">
-                <a:solidFill>
-                  <a:srgbClr val="1A2332"/>
-                </a:solidFill>
-              </a:defRPr>
-            </a:pPr>
-            <a:r>
-              <a:t>• Everything from today is in the Workshop Guide, bookmark it</a:t>
-            </a:r>
-          </a:p>
-          <a:p>
-            <a:pPr>
-              <a:spcBef>
-                <a:spcPts val="800"/>
-              </a:spcBef>
-              <a:defRPr sz="2000">
-                <a:solidFill>
-                  <a:srgbClr val="1A2332"/>
-                </a:solidFill>
-              </a:defRPr>
-            </a:pPr>
-            <a:r>
-              <a:t>• The Zero Dollar Starter Kit: 9 free tools you can use Monday morning</a:t>
-            </a:r>
-          </a:p>
-          <a:p>
-            <a:pPr>
-              <a:spcBef>
-                <a:spcPts val="800"/>
-              </a:spcBef>
-              <a:defRPr sz="2000">
-                <a:solidFill>
-                  <a:srgbClr val="1A2332"/>
-                </a:solidFill>
-              </a:defRPr>
-            </a:pPr>
-            <a:r>
-              <a:t>• All resource links, prompt templates, and the worksheet stay available</a:t>
-            </a:r>
-          </a:p>
-          <a:p>
-            <a:pPr>
-              <a:spcBef>
-                <a:spcPts val="800"/>
-              </a:spcBef>
-              <a:defRPr sz="2000">
-                <a:solidFill>
-                  <a:srgbClr val="1A2332"/>
-                </a:solidFill>
-              </a:defRPr>
-            </a:pPr>
-            <a:r>
-              <a:t>• You don't need a grant, an IT ticket, or a technology expert</a:t>
-            </a:r>
-          </a:p>
-          <a:p>
-            <a:pPr>
-              <a:spcBef>
-                <a:spcPts val="800"/>
-              </a:spcBef>
-              <a:defRPr sz="2000">
-                <a:solidFill>
-                  <a:srgbClr val="1A2332"/>
-                </a:solidFill>
-              </a:defRPr>
-            </a:pPr>
-            <a:r>
-              <a:t>• You need to know what your learners need, and you already know that</a:t>
-            </a:r>
-          </a:p>
-        </p:txBody>
-      </p:sp>
-      <p:sp>
-        <p:nvSpPr>
-          <p:cNvPr id="431" name="TextBox 5"/>
-          <p:cNvSpPr txBox="1"/>
-          <p:nvPr/>
-        </p:nvSpPr>
-        <p:spPr>
-          <a:xfrm>
-            <a:off x="685800" y="5486400"/>
-            <a:ext cx="10881361" cy="300594"/>
-          </a:xfrm>
-          <a:prstGeom prst="rect">
-            <a:avLst/>
-          </a:prstGeom>
-          <a:ln w="12700">
-            <a:miter lim="400000"/>
-          </a:ln>
-          <a:extLst>
-            <a:ext uri="{C572A759-6A51-4108-AA02-DFA0A04FC94B}">
-              <ma14:wrappingTextBoxFlag xmlns:ma14="http://schemas.microsoft.com/office/mac/drawingml/2011/main" val="1"/>
-            </a:ext>
-          </a:extLst>
-        </p:spPr>
-        <p:txBody>
-          <a:bodyPr lIns="45719" rIns="45719">
-            <a:spAutoFit/>
-          </a:bodyPr>
-          <a:lstStyle>
-            <a:lvl1pPr>
-              <a:defRPr sz="1600" u="sng">
+            <a:r>
+              <a:rPr sz="1600" b="0">
                 <a:solidFill>
                   <a:srgbClr val="0000FF"/>
                 </a:solidFill>
-                <a:uFill>
-                  <a:solidFill>
-                    <a:srgbClr val="0000FF"/>
-                  </a:solidFill>
-                </a:uFill>
-                <a:hlinkClick r:id="rId2" invalidUrl="" action="" tgtFrame="" tooltip="" history="1" highlightClick="0" endSnd="0"/>
-              </a:defRPr>
-            </a:lvl1pPr>
-          </a:lstStyle>
-          <a:p>
-            <a:pPr>
-              <a:defRPr u="none">
-                <a:solidFill>
-                  <a:srgbClr val="2D5F7C"/>
-                </a:solidFill>
-                <a:uFillTx/>
-              </a:defRPr>
-            </a:pPr>
-            <a:r>
-              <a:rPr u="sng">
-                <a:solidFill>
-                  <a:srgbClr val="0000FF"/>
-                </a:solidFill>
-                <a:uFill>
-                  <a:solidFill>
-                    <a:srgbClr val="0000FF"/>
-                  </a:solidFill>
-                </a:uFill>
-                <a:hlinkClick r:id="rId2" invalidUrl="" action="" tgtFrame="" tooltip="" history="1" highlightClick="0" endSnd="0"/>
               </a:rPr>
-              <a:t>Workshop Guide → Section 8 (All Resources)</a:t>
+              <a:t>Workshop Guide → Section 8 (all resources)</a:t>
             </a:r>
           </a:p>
         </p:txBody>
@@ -11279,7 +9623,7 @@
       </p:grpSpPr>
       <p:sp>
         <p:nvSpPr>
-          <p:cNvPr id="117" name="Rectangle 1"/>
+          <p:cNvPr id="2" name="Rectangle 1"/>
           <p:cNvSpPr/>
           <p:nvPr/>
         </p:nvSpPr>
@@ -11294,124 +9638,36 @@
           <a:solidFill>
             <a:srgbClr val="2D5F7C"/>
           </a:solidFill>
-          <a:ln w="12700">
-            <a:miter lim="400000"/>
+          <a:ln>
+            <a:noFill/>
           </a:ln>
-          <a:effectLst>
-            <a:outerShdw sx="100000" sy="100000" kx="0" ky="0" algn="b" rotWithShape="0" blurRad="38100" dist="23000" dir="5400000">
-              <a:srgbClr val="000000">
-                <a:alpha val="35000"/>
-              </a:srgbClr>
-            </a:outerShdw>
-          </a:effectLst>
-        </p:spPr>
-        <p:txBody>
-          <a:bodyPr lIns="45719" rIns="45719" anchor="ctr"/>
-          <a:lstStyle/>
-          <a:p>
-            <a:pPr algn="ctr">
-              <a:defRPr>
-                <a:solidFill>
-                  <a:srgbClr val="FFFFFF"/>
-                </a:solidFill>
-              </a:defRPr>
-            </a:pPr>
-          </a:p>
-        </p:txBody>
-      </p:sp>
-      <p:sp>
-        <p:nvSpPr>
-          <p:cNvPr id="118" name="TextBox 2"/>
-          <p:cNvSpPr txBox="1"/>
-          <p:nvPr/>
-        </p:nvSpPr>
-        <p:spPr>
-          <a:xfrm>
-            <a:off x="502919" y="182879"/>
-            <a:ext cx="11155682" cy="444759"/>
-          </a:xfrm>
-          <a:prstGeom prst="rect">
-            <a:avLst/>
-          </a:prstGeom>
-          <a:ln w="12700">
-            <a:miter lim="400000"/>
-          </a:ln>
-          <a:extLst>
-            <a:ext uri="{C572A759-6A51-4108-AA02-DFA0A04FC94B}">
-              <ma14:wrappingTextBoxFlag xmlns:ma14="http://schemas.microsoft.com/office/mac/drawingml/2011/main" val="1"/>
-            </a:ext>
-          </a:extLst>
-        </p:spPr>
-        <p:txBody>
-          <a:bodyPr lIns="45719" rIns="45719">
-            <a:spAutoFit/>
-          </a:bodyPr>
-          <a:lstStyle>
-            <a:lvl1pPr>
-              <a:defRPr b="1" sz="2800">
-                <a:solidFill>
-                  <a:srgbClr val="FFFFFF"/>
-                </a:solidFill>
-              </a:defRPr>
-            </a:lvl1pPr>
-          </a:lstStyle>
-          <a:p>
-            <a:pPr/>
-            <a:r>
-              <a:rPr/>
-              <a:t>Demo: The Realism Gap, Part 1: The Hand-Built Case</a:t>
-            </a:r>
-          </a:p>
-        </p:txBody>
-      </p:sp>
-      <p:sp>
-        <p:nvSpPr>
-          <p:cNvPr id="119" name="TextBox 3"/>
-          <p:cNvSpPr txBox="1"/>
-          <p:nvPr/>
-        </p:nvSpPr>
-        <p:spPr>
-          <a:xfrm>
-            <a:off x="502919" y="1097280"/>
-            <a:ext cx="11155682" cy="300594"/>
-          </a:xfrm>
-          <a:prstGeom prst="rect">
-            <a:avLst/>
-          </a:prstGeom>
-          <a:ln w="12700">
-            <a:miter lim="400000"/>
-          </a:ln>
-          <a:extLst>
-            <a:ext uri="{C572A759-6A51-4108-AA02-DFA0A04FC94B}">
-              <ma14:wrappingTextBoxFlag xmlns:ma14="http://schemas.microsoft.com/office/mac/drawingml/2011/main" val="1"/>
-            </a:ext>
-          </a:extLst>
-        </p:spPr>
-        <p:txBody>
-          <a:bodyPr lIns="45719" rIns="45719">
-            <a:spAutoFit/>
-          </a:bodyPr>
-          <a:lstStyle>
-            <a:lvl1pPr>
-              <a:defRPr sz="1600">
-                <a:solidFill>
-                  <a:srgbClr val="5A6B7E"/>
-                </a:solidFill>
-              </a:defRPr>
-            </a:lvl1pPr>
-          </a:lstStyle>
-          <a:p>
-            <a:pPr/>
-            <a:r>
-              <a:rPr/>
-              <a:t>Built by hand, grounded by hand</a:t>
-            </a:r>
-          </a:p>
-        </p:txBody>
-      </p:sp>
-      <p:sp>
-        <p:nvSpPr>
-          <p:cNvPr id="120" name="Rectangle 4"/>
+          <a:effectLst/>
+        </p:spPr>
+        <p:style>
+          <a:lnRef idx="1">
+            <a:schemeClr val="accent1"/>
+          </a:lnRef>
+          <a:fillRef idx="3">
+            <a:schemeClr val="accent1"/>
+          </a:fillRef>
+          <a:effectRef idx="2">
+            <a:schemeClr val="accent1"/>
+          </a:effectRef>
+          <a:fontRef idx="minor">
+            <a:schemeClr val="lt1"/>
+          </a:fontRef>
+        </p:style>
+        <p:txBody>
+          <a:bodyPr rtlCol="0" anchor="ctr"/>
+          <a:lstStyle/>
+          <a:p>
+            <a:pPr algn="ctr"/>
+          </a:p>
+        </p:txBody>
+      </p:sp>
+      <p:sp>
+        <p:nvSpPr>
+          <p:cNvPr id="3" name="Rectangle 2"/>
           <p:cNvSpPr/>
           <p:nvPr/>
         </p:nvSpPr>
@@ -11426,34 +9682,36 @@
           <a:solidFill>
             <a:srgbClr val="F0F4F8"/>
           </a:solidFill>
-          <a:ln w="12700">
-            <a:miter lim="400000"/>
+          <a:ln>
+            <a:noFill/>
           </a:ln>
-          <a:effectLst>
-            <a:outerShdw sx="100000" sy="100000" kx="0" ky="0" algn="b" rotWithShape="0" blurRad="38100" dist="23000" dir="5400000">
-              <a:srgbClr val="000000">
-                <a:alpha val="35000"/>
-              </a:srgbClr>
-            </a:outerShdw>
-          </a:effectLst>
-        </p:spPr>
-        <p:txBody>
-          <a:bodyPr lIns="45719" rIns="45719" anchor="ctr"/>
-          <a:lstStyle/>
-          <a:p>
-            <a:pPr algn="ctr">
-              <a:defRPr>
-                <a:solidFill>
-                  <a:srgbClr val="FFFFFF"/>
-                </a:solidFill>
-              </a:defRPr>
-            </a:pPr>
-          </a:p>
-        </p:txBody>
-      </p:sp>
-      <p:sp>
-        <p:nvSpPr>
-          <p:cNvPr id="121" name="Rectangle 5"/>
+          <a:effectLst/>
+        </p:spPr>
+        <p:style>
+          <a:lnRef idx="1">
+            <a:schemeClr val="accent1"/>
+          </a:lnRef>
+          <a:fillRef idx="3">
+            <a:schemeClr val="accent1"/>
+          </a:fillRef>
+          <a:effectRef idx="2">
+            <a:schemeClr val="accent1"/>
+          </a:effectRef>
+          <a:fontRef idx="minor">
+            <a:schemeClr val="lt1"/>
+          </a:fontRef>
+        </p:style>
+        <p:txBody>
+          <a:bodyPr rtlCol="0" anchor="ctr"/>
+          <a:lstStyle/>
+          <a:p>
+            <a:pPr algn="ctr"/>
+          </a:p>
+        </p:txBody>
+      </p:sp>
+      <p:sp>
+        <p:nvSpPr>
+          <p:cNvPr id="4" name="Rectangle 3"/>
           <p:cNvSpPr/>
           <p:nvPr/>
         </p:nvSpPr>
@@ -11468,144 +9726,43 @@
           <a:solidFill>
             <a:srgbClr val="2D5F7C"/>
           </a:solidFill>
-          <a:ln w="12700">
-            <a:miter lim="400000"/>
+          <a:ln>
+            <a:noFill/>
           </a:ln>
-          <a:effectLst>
-            <a:outerShdw sx="100000" sy="100000" kx="0" ky="0" algn="b" rotWithShape="0" blurRad="38100" dist="23000" dir="5400000">
-              <a:srgbClr val="000000">
-                <a:alpha val="35000"/>
-              </a:srgbClr>
-            </a:outerShdw>
-          </a:effectLst>
-        </p:spPr>
-        <p:txBody>
-          <a:bodyPr lIns="45719" rIns="45719" anchor="ctr"/>
-          <a:lstStyle/>
-          <a:p>
-            <a:pPr algn="ctr">
-              <a:defRPr>
-                <a:solidFill>
-                  <a:srgbClr val="FFFFFF"/>
-                </a:solidFill>
-              </a:defRPr>
-            </a:pPr>
-          </a:p>
-        </p:txBody>
-      </p:sp>
-      <p:sp>
-        <p:nvSpPr>
-          <p:cNvPr id="122" name="TextBox 6"/>
-          <p:cNvSpPr txBox="1"/>
-          <p:nvPr/>
-        </p:nvSpPr>
-        <p:spPr>
-          <a:xfrm>
-            <a:off x="960119" y="1554480"/>
-            <a:ext cx="4937762" cy="225708"/>
-          </a:xfrm>
-          <a:prstGeom prst="rect">
-            <a:avLst/>
-          </a:prstGeom>
-          <a:ln w="12700">
-            <a:miter lim="400000"/>
-          </a:ln>
-          <a:extLst>
-            <a:ext uri="{C572A759-6A51-4108-AA02-DFA0A04FC94B}">
-              <ma14:wrappingTextBoxFlag xmlns:ma14="http://schemas.microsoft.com/office/mac/drawingml/2011/main" val="1"/>
-            </a:ext>
-          </a:extLst>
-        </p:spPr>
-        <p:txBody>
-          <a:bodyPr lIns="45719" rIns="45719">
-            <a:spAutoFit/>
-          </a:bodyPr>
-          <a:lstStyle>
-            <a:lvl1pPr>
-              <a:defRPr b="1" sz="1100">
-                <a:solidFill>
-                  <a:srgbClr val="2D5F7C"/>
-                </a:solidFill>
-              </a:defRPr>
-            </a:lvl1pPr>
-          </a:lstStyle>
-          <a:p>
-            <a:pPr/>
-            <a:r>
-              <a:rPr/>
-              <a:t>WHAT IT DOES WELL</a:t>
-            </a:r>
-          </a:p>
-        </p:txBody>
-      </p:sp>
-      <p:sp>
-        <p:nvSpPr>
-          <p:cNvPr id="123" name="TextBox 7"/>
-          <p:cNvSpPr txBox="1"/>
-          <p:nvPr/>
-        </p:nvSpPr>
-        <p:spPr>
-          <a:xfrm>
-            <a:off x="960119" y="1920239"/>
-            <a:ext cx="4937762" cy="2301589"/>
-          </a:xfrm>
-          <a:prstGeom prst="rect">
-            <a:avLst/>
-          </a:prstGeom>
-          <a:ln w="12700">
-            <a:miter lim="400000"/>
-          </a:ln>
-          <a:extLst>
-            <a:ext uri="{C572A759-6A51-4108-AA02-DFA0A04FC94B}">
-              <ma14:wrappingTextBoxFlag xmlns:ma14="http://schemas.microsoft.com/office/mac/drawingml/2011/main" val="1"/>
-            </a:ext>
-          </a:extLst>
-        </p:spPr>
-        <p:txBody>
-          <a:bodyPr lIns="45719" rIns="45719">
-            <a:spAutoFit/>
-          </a:bodyPr>
-          <a:lstStyle/>
-          <a:p>
-            <a:pPr>
-              <a:spcBef>
-                <a:spcPts val="800"/>
-              </a:spcBef>
-              <a:defRPr>
-                <a:solidFill>
-                  <a:srgbClr val="1A2332"/>
-                </a:solidFill>
-              </a:defRPr>
-            </a:pPr>
-            <a:r>
-              <a:rPr/>
-              <a:t>• 65-year-old with acute confusion</a:t>
-            </a:r>
-          </a:p>
-          <a:p>
-            <a:r>
-              <a:rPr/>
-              <a:t>• Captures clinical reasoning, branch by branch</a:t>
-            </a:r>
-          </a:p>
-          <a:p>
-            <a:r>
-              <a:rPr/>
-              <a:t>• Grounded: a human vetted every decision</a:t>
-            </a:r>
-          </a:p>
-        </p:txBody>
-      </p:sp>
-      <p:sp>
-        <p:nvSpPr>
-          <p:cNvPr id="124" name="Rectangle 8"/>
+          <a:effectLst/>
+        </p:spPr>
+        <p:style>
+          <a:lnRef idx="1">
+            <a:schemeClr val="accent1"/>
+          </a:lnRef>
+          <a:fillRef idx="3">
+            <a:schemeClr val="accent1"/>
+          </a:fillRef>
+          <a:effectRef idx="2">
+            <a:schemeClr val="accent1"/>
+          </a:effectRef>
+          <a:fontRef idx="minor">
+            <a:schemeClr val="lt1"/>
+          </a:fontRef>
+        </p:style>
+        <p:txBody>
+          <a:bodyPr rtlCol="0" anchor="ctr"/>
+          <a:lstStyle/>
+          <a:p>
+            <a:pPr algn="ctr"/>
+          </a:p>
+        </p:txBody>
+      </p:sp>
+      <p:sp>
+        <p:nvSpPr>
+          <p:cNvPr id="5" name="Rectangle 4"/>
           <p:cNvSpPr/>
           <p:nvPr/>
         </p:nvSpPr>
         <p:spPr>
           <a:xfrm>
             <a:off x="6583680" y="1371600"/>
-            <a:ext cx="5029201" cy="1828800"/>
+            <a:ext cx="5029201" cy="4114800"/>
           </a:xfrm>
           <a:prstGeom prst="rect">
             <a:avLst/>
@@ -11613,41 +9770,43 @@
           <a:solidFill>
             <a:srgbClr val="FDF6F0"/>
           </a:solidFill>
-          <a:ln w="12700">
-            <a:miter lim="400000"/>
+          <a:ln>
+            <a:noFill/>
           </a:ln>
-          <a:effectLst>
-            <a:outerShdw sx="100000" sy="100000" kx="0" ky="0" algn="b" rotWithShape="0" blurRad="38100" dist="23000" dir="5400000">
-              <a:srgbClr val="000000">
-                <a:alpha val="35000"/>
-              </a:srgbClr>
-            </a:outerShdw>
-          </a:effectLst>
-        </p:spPr>
-        <p:txBody>
-          <a:bodyPr lIns="45719" rIns="45719" anchor="ctr"/>
-          <a:lstStyle/>
-          <a:p>
-            <a:pPr algn="ctr">
-              <a:defRPr>
-                <a:solidFill>
-                  <a:srgbClr val="FFFFFF"/>
-                </a:solidFill>
-              </a:defRPr>
-            </a:pPr>
-          </a:p>
-        </p:txBody>
-      </p:sp>
-      <p:sp>
-        <p:nvSpPr>
-          <p:cNvPr id="125" name="Rectangle 9"/>
+          <a:effectLst/>
+        </p:spPr>
+        <p:style>
+          <a:lnRef idx="1">
+            <a:schemeClr val="accent1"/>
+          </a:lnRef>
+          <a:fillRef idx="3">
+            <a:schemeClr val="accent1"/>
+          </a:fillRef>
+          <a:effectRef idx="2">
+            <a:schemeClr val="accent1"/>
+          </a:effectRef>
+          <a:fontRef idx="minor">
+            <a:schemeClr val="lt1"/>
+          </a:fontRef>
+        </p:style>
+        <p:txBody>
+          <a:bodyPr rtlCol="0" anchor="ctr"/>
+          <a:lstStyle/>
+          <a:p>
+            <a:pPr algn="ctr"/>
+          </a:p>
+        </p:txBody>
+      </p:sp>
+      <p:sp>
+        <p:nvSpPr>
+          <p:cNvPr id="6" name="Rectangle 5"/>
           <p:cNvSpPr/>
           <p:nvPr/>
         </p:nvSpPr>
         <p:spPr>
           <a:xfrm>
             <a:off x="6583680" y="1371600"/>
-            <a:ext cx="50801" cy="1828800"/>
+            <a:ext cx="50801" cy="4114800"/>
           </a:xfrm>
           <a:prstGeom prst="rect">
             <a:avLst/>
@@ -11655,34 +9814,198 @@
           <a:solidFill>
             <a:srgbClr val="E8833A"/>
           </a:solidFill>
-          <a:ln w="12700">
-            <a:miter lim="400000"/>
+          <a:ln>
+            <a:noFill/>
           </a:ln>
-          <a:effectLst>
-            <a:outerShdw sx="100000" sy="100000" kx="0" ky="0" algn="b" rotWithShape="0" blurRad="38100" dist="23000" dir="5400000">
-              <a:srgbClr val="000000">
-                <a:alpha val="35000"/>
-              </a:srgbClr>
-            </a:outerShdw>
-          </a:effectLst>
-        </p:spPr>
-        <p:txBody>
-          <a:bodyPr lIns="45719" rIns="45719" anchor="ctr"/>
-          <a:lstStyle/>
-          <a:p>
-            <a:pPr algn="ctr">
-              <a:defRPr>
+          <a:effectLst/>
+        </p:spPr>
+        <p:style>
+          <a:lnRef idx="1">
+            <a:schemeClr val="accent1"/>
+          </a:lnRef>
+          <a:fillRef idx="3">
+            <a:schemeClr val="accent1"/>
+          </a:fillRef>
+          <a:effectRef idx="2">
+            <a:schemeClr val="accent1"/>
+          </a:effectRef>
+          <a:fontRef idx="minor">
+            <a:schemeClr val="lt1"/>
+          </a:fontRef>
+        </p:style>
+        <p:txBody>
+          <a:bodyPr rtlCol="0" anchor="ctr"/>
+          <a:lstStyle/>
+          <a:p>
+            <a:pPr algn="ctr"/>
+          </a:p>
+        </p:txBody>
+      </p:sp>
+      <p:sp>
+        <p:nvSpPr>
+          <p:cNvPr id="7" name="TextBox 6"/>
+          <p:cNvSpPr txBox="1"/>
+          <p:nvPr/>
+        </p:nvSpPr>
+        <p:spPr>
+          <a:xfrm>
+            <a:off x="502919" y="182879"/>
+            <a:ext cx="11155682" cy="444759"/>
+          </a:xfrm>
+          <a:prstGeom prst="rect">
+            <a:avLst/>
+          </a:prstGeom>
+          <a:noFill/>
+        </p:spPr>
+        <p:txBody>
+          <a:bodyPr wrap="square">
+            <a:spAutoFit/>
+          </a:bodyPr>
+          <a:lstStyle/>
+          <a:p>
+            <a:r>
+              <a:rPr sz="2800" b="1">
                 <a:solidFill>
                   <a:srgbClr val="FFFFFF"/>
                 </a:solidFill>
-              </a:defRPr>
+              </a:rPr>
+              <a:t>Demo: The Realism Gap, Part 1: The Hand-Built Case</a:t>
+            </a:r>
+          </a:p>
+        </p:txBody>
+      </p:sp>
+      <p:sp>
+        <p:nvSpPr>
+          <p:cNvPr id="8" name="TextBox 7"/>
+          <p:cNvSpPr txBox="1"/>
+          <p:nvPr/>
+        </p:nvSpPr>
+        <p:spPr>
+          <a:xfrm>
+            <a:off x="502919" y="1097280"/>
+            <a:ext cx="11155682" cy="300594"/>
+          </a:xfrm>
+          <a:prstGeom prst="rect">
+            <a:avLst/>
+          </a:prstGeom>
+          <a:noFill/>
+        </p:spPr>
+        <p:txBody>
+          <a:bodyPr wrap="square">
+            <a:spAutoFit/>
+          </a:bodyPr>
+          <a:lstStyle/>
+          <a:p>
+            <a:r>
+              <a:rPr sz="1600" b="0">
+                <a:solidFill>
+                  <a:srgbClr val="5B6B7C"/>
+                </a:solidFill>
+              </a:rPr>
+              <a:t>Built by hand, grounded by hand, live on screen now</a:t>
+            </a:r>
+          </a:p>
+        </p:txBody>
+      </p:sp>
+      <p:sp>
+        <p:nvSpPr>
+          <p:cNvPr id="9" name="TextBox 8"/>
+          <p:cNvSpPr txBox="1"/>
+          <p:nvPr/>
+        </p:nvSpPr>
+        <p:spPr>
+          <a:xfrm>
+            <a:off x="960119" y="1554480"/>
+            <a:ext cx="4937762" cy="225708"/>
+          </a:xfrm>
+          <a:prstGeom prst="rect">
+            <a:avLst/>
+          </a:prstGeom>
+          <a:noFill/>
+        </p:spPr>
+        <p:txBody>
+          <a:bodyPr wrap="square">
+            <a:spAutoFit/>
+          </a:bodyPr>
+          <a:lstStyle/>
+          <a:p>
+            <a:r>
+              <a:rPr sz="1100" b="1">
+                <a:solidFill>
+                  <a:srgbClr val="2D5F7C"/>
+                </a:solidFill>
+              </a:rPr>
+              <a:t>WHAT IT DOES WELL</a:t>
+            </a:r>
+          </a:p>
+        </p:txBody>
+      </p:sp>
+      <p:sp>
+        <p:nvSpPr>
+          <p:cNvPr id="10" name="TextBox 9"/>
+          <p:cNvSpPr txBox="1"/>
+          <p:nvPr/>
+        </p:nvSpPr>
+        <p:spPr>
+          <a:xfrm>
+            <a:off x="960119" y="1920239"/>
+            <a:ext cx="4937762" cy="2301589"/>
+          </a:xfrm>
+          <a:prstGeom prst="rect">
+            <a:avLst/>
+          </a:prstGeom>
+          <a:noFill/>
+        </p:spPr>
+        <p:txBody>
+          <a:bodyPr wrap="square">
+            <a:spAutoFit/>
+          </a:bodyPr>
+          <a:lstStyle/>
+          <a:p>
+            <a:r>
+              <a:rPr sz="1800" b="0">
+                <a:solidFill>
+                  <a:srgbClr val="1A2332"/>
+                </a:solidFill>
+              </a:rPr>
+              <a:t>• Captures clinical reasoning, branch by branch</a:t>
+            </a:r>
+          </a:p>
+          <a:p>
+            <a:pPr>
+              <a:spcBef>
+                <a:spcPts val="1000"/>
+              </a:spcBef>
             </a:pPr>
-          </a:p>
-        </p:txBody>
-      </p:sp>
-      <p:sp>
-        <p:nvSpPr>
-          <p:cNvPr id="126" name="TextBox 10"/>
+            <a:r>
+              <a:rPr sz="1800" b="0">
+                <a:solidFill>
+                  <a:srgbClr val="1A2332"/>
+                </a:solidFill>
+              </a:rPr>
+              <a:t>• Grounded: a human vetted every decision</a:t>
+            </a:r>
+          </a:p>
+          <a:p>
+            <a:pPr>
+              <a:spcBef>
+                <a:spcPts val="1000"/>
+              </a:spcBef>
+            </a:pPr>
+            <a:r>
+              <a:rPr sz="1800" b="0">
+                <a:solidFill>
+                  <a:srgbClr val="1A2332"/>
+                </a:solidFill>
+              </a:rPr>
+              <a:t>• Reusable: runs the same for every learner</a:t>
+            </a:r>
+          </a:p>
+        </p:txBody>
+      </p:sp>
+      <p:sp>
+        <p:nvSpPr>
+          <p:cNvPr id="11" name="TextBox 10"/>
           <p:cNvSpPr txBox="1"/>
           <p:nvPr/>
         </p:nvSpPr>
@@ -11694,32 +10017,20 @@
           <a:prstGeom prst="rect">
             <a:avLst/>
           </a:prstGeom>
-          <a:ln w="12700">
-            <a:miter lim="400000"/>
-          </a:ln>
-          <a:extLst>
-            <a:ext uri="{C572A759-6A51-4108-AA02-DFA0A04FC94B}">
-              <ma14:wrappingTextBoxFlag xmlns:ma14="http://schemas.microsoft.com/office/mac/drawingml/2011/main" val="1"/>
-            </a:ext>
-          </a:extLst>
-        </p:spPr>
-        <p:txBody>
-          <a:bodyPr lIns="45719" rIns="45719">
+          <a:noFill/>
+        </p:spPr>
+        <p:txBody>
+          <a:bodyPr wrap="square">
             <a:spAutoFit/>
           </a:bodyPr>
-          <a:lstStyle>
-            <a:lvl1pPr>
-              <a:defRPr b="1" sz="1100">
-                <a:solidFill>
-                  <a:srgbClr val="C66A28"/>
-                </a:solidFill>
-              </a:defRPr>
-            </a:lvl1pPr>
-          </a:lstStyle>
-          <a:p>
-            <a:pPr/>
-            <a:r>
-              <a:rPr/>
+          <a:lstStyle/>
+          <a:p>
+            <a:r>
+              <a:rPr sz="1100" b="1">
+                <a:solidFill>
+                  <a:srgbClr val="E8833A"/>
+                </a:solidFill>
+              </a:rPr>
               <a:t>THE GAP</a:t>
             </a:r>
           </a:p>
@@ -11727,179 +10038,96 @@
       </p:sp>
       <p:sp>
         <p:nvSpPr>
-          <p:cNvPr id="127" name="TextBox 11"/>
+          <p:cNvPr id="12" name="TextBox 11"/>
           <p:cNvSpPr txBox="1"/>
           <p:nvPr/>
         </p:nvSpPr>
         <p:spPr>
           <a:xfrm>
             <a:off x="6903719" y="1920239"/>
-            <a:ext cx="4480562" cy="367071"/>
-          </a:xfrm>
-          <a:prstGeom prst="rect">
-            <a:avLst/>
-          </a:prstGeom>
-          <a:ln w="12700">
-            <a:miter lim="400000"/>
-          </a:ln>
-          <a:extLst>
-            <a:ext uri="{C572A759-6A51-4108-AA02-DFA0A04FC94B}">
-              <ma14:wrappingTextBoxFlag xmlns:ma14="http://schemas.microsoft.com/office/mac/drawingml/2011/main" val="1"/>
-            </a:ext>
-          </a:extLst>
-        </p:spPr>
-        <p:txBody>
-          <a:bodyPr lIns="45719" rIns="45719">
+            <a:ext cx="4480562" cy="2301589"/>
+          </a:xfrm>
+          <a:prstGeom prst="rect">
+            <a:avLst/>
+          </a:prstGeom>
+          <a:noFill/>
+        </p:spPr>
+        <p:txBody>
+          <a:bodyPr wrap="square">
             <a:spAutoFit/>
           </a:bodyPr>
-          <a:lstStyle>
-            <a:lvl1pPr>
-              <a:defRPr b="1" u="sng">
-                <a:solidFill>
-                  <a:srgbClr val="0000FF"/>
-                </a:solidFill>
-                <a:uFill>
-                  <a:solidFill>
-                    <a:srgbClr val="0000FF"/>
-                  </a:solidFill>
-                </a:uFill>
-                <a:hlinkClick r:id="rId2" invalidUrl="" action="" tgtFrame="" tooltip="" history="1" highlightClick="0" endSnd="0"/>
-              </a:defRPr>
-            </a:lvl1pPr>
-          </a:lstStyle>
-          <a:p>
-            <a:pPr>
-              <a:defRPr u="none">
-                <a:solidFill>
-                  <a:srgbClr val="2D5F7C"/>
-                </a:solidFill>
-                <a:uFillTx/>
-              </a:defRPr>
-            </a:pPr>
-            <a:r>
-              <a:rPr>
-                <a:solidFill>
-                  <a:srgbClr val="0000FF"/>
+          <a:lstStyle/>
+          <a:p>
+            <a:r>
+              <a:rPr sz="1800" b="0">
+                <a:solidFill>
+                  <a:srgbClr val="1A2332"/>
                 </a:solidFill>
               </a:rPr>
               <a:t>Real patients are not multiple choice.</a:t>
             </a:r>
           </a:p>
           <a:p>
-            <a:r>
-              <a:rPr>
-                <a:solidFill>
-                  <a:srgbClr val="0000FF"/>
+            <a:pPr>
+              <a:spcBef>
+                <a:spcPts val="1000"/>
+              </a:spcBef>
+            </a:pPr>
+            <a:r>
+              <a:rPr sz="1800" b="0">
+                <a:solidFill>
+                  <a:srgbClr val="1A2332"/>
                 </a:solidFill>
               </a:rPr>
               <a:t>It only answers what its author pre-imagined.</a:t>
             </a:r>
           </a:p>
-        </p:txBody>
-      </p:sp>
-      <p:sp>
-        <p:nvSpPr>
-          <p:cNvPr id="128" name="TextBox 12"/>
+          <a:p>
+            <a:pPr>
+              <a:spcBef>
+                <a:spcPts val="1000"/>
+              </a:spcBef>
+            </a:pPr>
+            <a:r>
+              <a:rPr sz="1800" b="0">
+                <a:solidFill>
+                  <a:srgbClr val="1A2332"/>
+                </a:solidFill>
+              </a:rPr>
+              <a:t>A hiking trail, not open country.</a:t>
+            </a:r>
+          </a:p>
+        </p:txBody>
+      </p:sp>
+      <p:sp>
+        <p:nvSpPr>
+          <p:cNvPr id="13" name="TextBox 12"/>
           <p:cNvSpPr txBox="1"/>
           <p:nvPr/>
         </p:nvSpPr>
         <p:spPr>
           <a:xfrm>
-            <a:off x="6903719" y="2743200"/>
-            <a:ext cx="4480562" cy="258202"/>
-          </a:xfrm>
-          <a:prstGeom prst="rect">
-            <a:avLst/>
-          </a:prstGeom>
-          <a:ln w="12700">
-            <a:miter lim="400000"/>
-          </a:ln>
-          <a:extLst>
-            <a:ext uri="{C572A759-6A51-4108-AA02-DFA0A04FC94B}">
-              <ma14:wrappingTextBoxFlag xmlns:ma14="http://schemas.microsoft.com/office/mac/drawingml/2011/main" val="1"/>
-            </a:ext>
-          </a:extLst>
-        </p:spPr>
-        <p:txBody>
-          <a:bodyPr lIns="45719" rIns="45719">
+            <a:off x="502919" y="5303520"/>
+            <a:ext cx="11155682" cy="300594"/>
+          </a:xfrm>
+          <a:prstGeom prst="rect">
+            <a:avLst/>
+          </a:prstGeom>
+          <a:noFill/>
+        </p:spPr>
+        <p:txBody>
+          <a:bodyPr wrap="square">
             <a:spAutoFit/>
           </a:bodyPr>
-          <a:lstStyle>
-            <a:lvl1pPr>
-              <a:defRPr sz="1300">
-                <a:solidFill>
-                  <a:srgbClr val="5A6B7E"/>
-                </a:solidFill>
-              </a:defRPr>
-            </a:lvl1pPr>
-          </a:lstStyle>
-          <a:p>
-            <a:pPr/>
-            <a:r>
-              <a:rPr/>
-              <a:t>▶ The branching demo, on screen now</a:t>
-            </a:r>
-          </a:p>
-        </p:txBody>
-      </p:sp>
-      <p:sp>
-        <p:nvSpPr>
-          <p:cNvPr id="129" name="TextBox 13"/>
-          <p:cNvSpPr txBox="1"/>
-          <p:nvPr/>
-        </p:nvSpPr>
-        <p:spPr>
-          <a:xfrm>
-            <a:off x="6903719" y="3657600"/>
-            <a:ext cx="4480562" cy="280799"/>
-          </a:xfrm>
-          <a:prstGeom prst="rect">
-            <a:avLst/>
-          </a:prstGeom>
-          <a:ln w="12700">
-            <a:miter lim="400000"/>
-          </a:ln>
-          <a:extLst>
-            <a:ext uri="{C572A759-6A51-4108-AA02-DFA0A04FC94B}">
-              <ma14:wrappingTextBoxFlag xmlns:ma14="http://schemas.microsoft.com/office/mac/drawingml/2011/main" val="1"/>
-            </a:ext>
-          </a:extLst>
-        </p:spPr>
-        <p:txBody>
-          <a:bodyPr lIns="45719" rIns="45719">
-            <a:spAutoFit/>
-          </a:bodyPr>
-          <a:lstStyle>
-            <a:lvl1pPr>
-              <a:defRPr sz="1400" u="sng">
+          <a:lstStyle/>
+          <a:p>
+            <a:r>
+              <a:rPr sz="1600" b="0">
                 <a:solidFill>
                   <a:srgbClr val="0000FF"/>
                 </a:solidFill>
-                <a:uFill>
-                  <a:solidFill>
-                    <a:srgbClr val="0000FF"/>
-                  </a:solidFill>
-                </a:uFill>
-                <a:hlinkClick r:id="rId3" invalidUrl="" action="" tgtFrame="" tooltip="" history="1" highlightClick="0" endSnd="0"/>
-              </a:defRPr>
-            </a:lvl1pPr>
-          </a:lstStyle>
-          <a:p>
-            <a:pPr>
-              <a:defRPr u="none">
-                <a:solidFill>
-                  <a:srgbClr val="2D5F7C"/>
-                </a:solidFill>
-                <a:uFillTx/>
-              </a:defRPr>
-            </a:pPr>
-            <a:r>
-              <a:rPr>
-                <a:solidFill>
-                  <a:srgbClr val="0000FF"/>
-                </a:solidFill>
               </a:rPr>
-              <a:t>Workshop Guide → Section 2</a:t>
+              <a:t>Workshop Guide → Section 2 (run the demo on your phone)</a:t>
             </a:r>
           </a:p>
         </p:txBody>
@@ -11925,7 +10153,7 @@
       <p:grpSpPr/>
       <p:sp>
         <p:nvSpPr>
-          <p:cNvPr id="117" name="Rectangle 1"/>
+          <p:cNvPr id="2" name="Rectangle 1"/>
           <p:cNvSpPr/>
           <p:nvPr/>
         </p:nvSpPr>
@@ -11940,124 +10168,36 @@
           <a:solidFill>
             <a:srgbClr val="2D5F7C"/>
           </a:solidFill>
-          <a:ln w="12700">
-            <a:miter lim="400000"/>
+          <a:ln>
+            <a:noFill/>
           </a:ln>
-          <a:effectLst>
-            <a:outerShdw sx="100000" sy="100000" kx="0" ky="0" algn="b" rotWithShape="0" blurRad="38100" dist="23000" dir="5400000">
-              <a:srgbClr val="000000">
-                <a:alpha val="35000"/>
-              </a:srgbClr>
-            </a:outerShdw>
-          </a:effectLst>
-        </p:spPr>
-        <p:txBody>
-          <a:bodyPr lIns="45719" rIns="45719" anchor="ctr"/>
-          <a:lstStyle/>
-          <a:p>
-            <a:pPr algn="ctr">
-              <a:defRPr>
-                <a:solidFill>
-                  <a:srgbClr val="FFFFFF"/>
-                </a:solidFill>
-              </a:defRPr>
-            </a:pPr>
-          </a:p>
-        </p:txBody>
-      </p:sp>
-      <p:sp>
-        <p:nvSpPr>
-          <p:cNvPr id="118" name="TextBox 2"/>
-          <p:cNvSpPr txBox="1"/>
-          <p:nvPr/>
-        </p:nvSpPr>
-        <p:spPr>
-          <a:xfrm>
-            <a:off x="502919" y="182879"/>
-            <a:ext cx="11155682" cy="444759"/>
-          </a:xfrm>
-          <a:prstGeom prst="rect">
-            <a:avLst/>
-          </a:prstGeom>
-          <a:ln w="12700">
-            <a:miter lim="400000"/>
-          </a:ln>
-          <a:extLst>
-            <a:ext uri="{C572A759-6A51-4108-AA02-DFA0A04FC94B}">
-              <ma14:wrappingTextBoxFlag xmlns:ma14="http://schemas.microsoft.com/office/mac/drawingml/2011/main" val="1"/>
-            </a:ext>
-          </a:extLst>
-        </p:spPr>
-        <p:txBody>
-          <a:bodyPr lIns="45719" rIns="45719">
-            <a:spAutoFit/>
-          </a:bodyPr>
-          <a:lstStyle>
-            <a:lvl1pPr>
-              <a:defRPr b="1" sz="2800">
-                <a:solidFill>
-                  <a:srgbClr val="FFFFFF"/>
-                </a:solidFill>
-              </a:defRPr>
-            </a:lvl1pPr>
-          </a:lstStyle>
-          <a:p>
-            <a:pPr/>
-            <a:r>
-              <a:rPr/>
-              <a:t>Demo: The Realism Gap, Part 2: The AI Case, Live</a:t>
-            </a:r>
-          </a:p>
-        </p:txBody>
-      </p:sp>
-      <p:sp>
-        <p:nvSpPr>
-          <p:cNvPr id="119" name="TextBox 3"/>
-          <p:cNvSpPr txBox="1"/>
-          <p:nvPr/>
-        </p:nvSpPr>
-        <p:spPr>
-          <a:xfrm>
-            <a:off x="502919" y="1097280"/>
-            <a:ext cx="11155682" cy="300594"/>
-          </a:xfrm>
-          <a:prstGeom prst="rect">
-            <a:avLst/>
-          </a:prstGeom>
-          <a:ln w="12700">
-            <a:miter lim="400000"/>
-          </a:ln>
-          <a:extLst>
-            <a:ext uri="{C572A759-6A51-4108-AA02-DFA0A04FC94B}">
-              <ma14:wrappingTextBoxFlag xmlns:ma14="http://schemas.microsoft.com/office/mac/drawingml/2011/main" val="1"/>
-            </a:ext>
-          </a:extLst>
-        </p:spPr>
-        <p:txBody>
-          <a:bodyPr lIns="45719" rIns="45719">
-            <a:spAutoFit/>
-          </a:bodyPr>
-          <a:lstStyle>
-            <a:lvl1pPr>
-              <a:defRPr sz="1600">
-                <a:solidFill>
-                  <a:srgbClr val="5A6B7E"/>
-                </a:solidFill>
-              </a:defRPr>
-            </a:lvl1pPr>
-          </a:lstStyle>
-          <a:p>
-            <a:pPr/>
-            <a:r>
-              <a:rPr/>
-              <a:t>One paste, about sixty seconds</a:t>
-            </a:r>
-          </a:p>
-        </p:txBody>
-      </p:sp>
-      <p:sp>
-        <p:nvSpPr>
-          <p:cNvPr id="120" name="Rectangle 4"/>
+          <a:effectLst/>
+        </p:spPr>
+        <p:style>
+          <a:lnRef idx="1">
+            <a:schemeClr val="accent1"/>
+          </a:lnRef>
+          <a:fillRef idx="3">
+            <a:schemeClr val="accent1"/>
+          </a:fillRef>
+          <a:effectRef idx="2">
+            <a:schemeClr val="accent1"/>
+          </a:effectRef>
+          <a:fontRef idx="minor">
+            <a:schemeClr val="lt1"/>
+          </a:fontRef>
+        </p:style>
+        <p:txBody>
+          <a:bodyPr rtlCol="0" anchor="ctr"/>
+          <a:lstStyle/>
+          <a:p>
+            <a:pPr algn="ctr"/>
+          </a:p>
+        </p:txBody>
+      </p:sp>
+      <p:sp>
+        <p:nvSpPr>
+          <p:cNvPr id="3" name="Rectangle 2"/>
           <p:cNvSpPr/>
           <p:nvPr/>
         </p:nvSpPr>
@@ -12072,34 +10212,36 @@
           <a:solidFill>
             <a:srgbClr val="F0F4F8"/>
           </a:solidFill>
-          <a:ln w="12700">
-            <a:miter lim="400000"/>
+          <a:ln>
+            <a:noFill/>
           </a:ln>
-          <a:effectLst>
-            <a:outerShdw sx="100000" sy="100000" kx="0" ky="0" algn="b" rotWithShape="0" blurRad="38100" dist="23000" dir="5400000">
-              <a:srgbClr val="000000">
-                <a:alpha val="35000"/>
-              </a:srgbClr>
-            </a:outerShdw>
-          </a:effectLst>
-        </p:spPr>
-        <p:txBody>
-          <a:bodyPr lIns="45719" rIns="45719" anchor="ctr"/>
-          <a:lstStyle/>
-          <a:p>
-            <a:pPr algn="ctr">
-              <a:defRPr>
-                <a:solidFill>
-                  <a:srgbClr val="FFFFFF"/>
-                </a:solidFill>
-              </a:defRPr>
-            </a:pPr>
-          </a:p>
-        </p:txBody>
-      </p:sp>
-      <p:sp>
-        <p:nvSpPr>
-          <p:cNvPr id="121" name="Rectangle 5"/>
+          <a:effectLst/>
+        </p:spPr>
+        <p:style>
+          <a:lnRef idx="1">
+            <a:schemeClr val="accent1"/>
+          </a:lnRef>
+          <a:fillRef idx="3">
+            <a:schemeClr val="accent1"/>
+          </a:fillRef>
+          <a:effectRef idx="2">
+            <a:schemeClr val="accent1"/>
+          </a:effectRef>
+          <a:fontRef idx="minor">
+            <a:schemeClr val="lt1"/>
+          </a:fontRef>
+        </p:style>
+        <p:txBody>
+          <a:bodyPr rtlCol="0" anchor="ctr"/>
+          <a:lstStyle/>
+          <a:p>
+            <a:pPr algn="ctr"/>
+          </a:p>
+        </p:txBody>
+      </p:sp>
+      <p:sp>
+        <p:nvSpPr>
+          <p:cNvPr id="4" name="Rectangle 3"/>
           <p:cNvSpPr/>
           <p:nvPr/>
         </p:nvSpPr>
@@ -12114,144 +10256,43 @@
           <a:solidFill>
             <a:srgbClr val="2D5F7C"/>
           </a:solidFill>
-          <a:ln w="12700">
-            <a:miter lim="400000"/>
+          <a:ln>
+            <a:noFill/>
           </a:ln>
-          <a:effectLst>
-            <a:outerShdw sx="100000" sy="100000" kx="0" ky="0" algn="b" rotWithShape="0" blurRad="38100" dist="23000" dir="5400000">
-              <a:srgbClr val="000000">
-                <a:alpha val="35000"/>
-              </a:srgbClr>
-            </a:outerShdw>
-          </a:effectLst>
-        </p:spPr>
-        <p:txBody>
-          <a:bodyPr lIns="45719" rIns="45719" anchor="ctr"/>
-          <a:lstStyle/>
-          <a:p>
-            <a:pPr algn="ctr">
-              <a:defRPr>
-                <a:solidFill>
-                  <a:srgbClr val="FFFFFF"/>
-                </a:solidFill>
-              </a:defRPr>
-            </a:pPr>
-          </a:p>
-        </p:txBody>
-      </p:sp>
-      <p:sp>
-        <p:nvSpPr>
-          <p:cNvPr id="122" name="TextBox 6"/>
-          <p:cNvSpPr txBox="1"/>
-          <p:nvPr/>
-        </p:nvSpPr>
-        <p:spPr>
-          <a:xfrm>
-            <a:off x="960119" y="1554480"/>
-            <a:ext cx="4937762" cy="225708"/>
-          </a:xfrm>
-          <a:prstGeom prst="rect">
-            <a:avLst/>
-          </a:prstGeom>
-          <a:ln w="12700">
-            <a:miter lim="400000"/>
-          </a:ln>
-          <a:extLst>
-            <a:ext uri="{C572A759-6A51-4108-AA02-DFA0A04FC94B}">
-              <ma14:wrappingTextBoxFlag xmlns:ma14="http://schemas.microsoft.com/office/mac/drawingml/2011/main" val="1"/>
-            </a:ext>
-          </a:extLst>
-        </p:spPr>
-        <p:txBody>
-          <a:bodyPr lIns="45719" rIns="45719">
-            <a:spAutoFit/>
-          </a:bodyPr>
-          <a:lstStyle>
-            <a:lvl1pPr>
-              <a:defRPr b="1" sz="1100">
-                <a:solidFill>
-                  <a:srgbClr val="2D5F7C"/>
-                </a:solidFill>
-              </a:defRPr>
-            </a:lvl1pPr>
-          </a:lstStyle>
-          <a:p>
-            <a:pPr/>
-            <a:r>
-              <a:rPr/>
-              <a:t>WHAT THE PASTE PRODUCES</a:t>
-            </a:r>
-          </a:p>
-        </p:txBody>
-      </p:sp>
-      <p:sp>
-        <p:nvSpPr>
-          <p:cNvPr id="123" name="TextBox 7"/>
-          <p:cNvSpPr txBox="1"/>
-          <p:nvPr/>
-        </p:nvSpPr>
-        <p:spPr>
-          <a:xfrm>
-            <a:off x="960119" y="1920239"/>
-            <a:ext cx="4937762" cy="2301589"/>
-          </a:xfrm>
-          <a:prstGeom prst="rect">
-            <a:avLst/>
-          </a:prstGeom>
-          <a:ln w="12700">
-            <a:miter lim="400000"/>
-          </a:ln>
-          <a:extLst>
-            <a:ext uri="{C572A759-6A51-4108-AA02-DFA0A04FC94B}">
-              <ma14:wrappingTextBoxFlag xmlns:ma14="http://schemas.microsoft.com/office/mac/drawingml/2011/main" val="1"/>
-            </a:ext>
-          </a:extLst>
-        </p:spPr>
-        <p:txBody>
-          <a:bodyPr lIns="45719" rIns="45719">
-            <a:spAutoFit/>
-          </a:bodyPr>
-          <a:lstStyle/>
-          <a:p>
-            <a:pPr>
-              <a:spcBef>
-                <a:spcPts val="800"/>
-              </a:spcBef>
-              <a:defRPr>
-                <a:solidFill>
-                  <a:srgbClr val="1A2332"/>
-                </a:solidFill>
-              </a:defRPr>
-            </a:pPr>
-            <a:r>
-              <a:rPr/>
-              <a:t>• An open-ended case: the learner asks anything</a:t>
-            </a:r>
-          </a:p>
-          <a:p>
-            <a:r>
-              <a:rPr/>
-              <a:t>• A student-ready prompt with rubric feedback</a:t>
-            </a:r>
-          </a:p>
-          <a:p>
-            <a:r>
-              <a:rPr/>
-              <a:t>• A provenance warning it writes itself</a:t>
-            </a:r>
-          </a:p>
-        </p:txBody>
-      </p:sp>
-      <p:sp>
-        <p:nvSpPr>
-          <p:cNvPr id="124" name="Rectangle 8"/>
+          <a:effectLst/>
+        </p:spPr>
+        <p:style>
+          <a:lnRef idx="1">
+            <a:schemeClr val="accent1"/>
+          </a:lnRef>
+          <a:fillRef idx="3">
+            <a:schemeClr val="accent1"/>
+          </a:fillRef>
+          <a:effectRef idx="2">
+            <a:schemeClr val="accent1"/>
+          </a:effectRef>
+          <a:fontRef idx="minor">
+            <a:schemeClr val="lt1"/>
+          </a:fontRef>
+        </p:style>
+        <p:txBody>
+          <a:bodyPr rtlCol="0" anchor="ctr"/>
+          <a:lstStyle/>
+          <a:p>
+            <a:pPr algn="ctr"/>
+          </a:p>
+        </p:txBody>
+      </p:sp>
+      <p:sp>
+        <p:nvSpPr>
+          <p:cNvPr id="5" name="Rectangle 4"/>
           <p:cNvSpPr/>
           <p:nvPr/>
         </p:nvSpPr>
         <p:spPr>
           <a:xfrm>
             <a:off x="6583680" y="1371600"/>
-            <a:ext cx="5029201" cy="1828800"/>
+            <a:ext cx="5029201" cy="4114800"/>
           </a:xfrm>
           <a:prstGeom prst="rect">
             <a:avLst/>
@@ -12259,41 +10300,43 @@
           <a:solidFill>
             <a:srgbClr val="FDF6F0"/>
           </a:solidFill>
-          <a:ln w="12700">
-            <a:miter lim="400000"/>
+          <a:ln>
+            <a:noFill/>
           </a:ln>
-          <a:effectLst>
-            <a:outerShdw sx="100000" sy="100000" kx="0" ky="0" algn="b" rotWithShape="0" blurRad="38100" dist="23000" dir="5400000">
-              <a:srgbClr val="000000">
-                <a:alpha val="35000"/>
-              </a:srgbClr>
-            </a:outerShdw>
-          </a:effectLst>
-        </p:spPr>
-        <p:txBody>
-          <a:bodyPr lIns="45719" rIns="45719" anchor="ctr"/>
-          <a:lstStyle/>
-          <a:p>
-            <a:pPr algn="ctr">
-              <a:defRPr>
-                <a:solidFill>
-                  <a:srgbClr val="FFFFFF"/>
-                </a:solidFill>
-              </a:defRPr>
-            </a:pPr>
-          </a:p>
-        </p:txBody>
-      </p:sp>
-      <p:sp>
-        <p:nvSpPr>
-          <p:cNvPr id="125" name="Rectangle 9"/>
+          <a:effectLst/>
+        </p:spPr>
+        <p:style>
+          <a:lnRef idx="1">
+            <a:schemeClr val="accent1"/>
+          </a:lnRef>
+          <a:fillRef idx="3">
+            <a:schemeClr val="accent1"/>
+          </a:fillRef>
+          <a:effectRef idx="2">
+            <a:schemeClr val="accent1"/>
+          </a:effectRef>
+          <a:fontRef idx="minor">
+            <a:schemeClr val="lt1"/>
+          </a:fontRef>
+        </p:style>
+        <p:txBody>
+          <a:bodyPr rtlCol="0" anchor="ctr"/>
+          <a:lstStyle/>
+          <a:p>
+            <a:pPr algn="ctr"/>
+          </a:p>
+        </p:txBody>
+      </p:sp>
+      <p:sp>
+        <p:nvSpPr>
+          <p:cNvPr id="6" name="Rectangle 5"/>
           <p:cNvSpPr/>
           <p:nvPr/>
         </p:nvSpPr>
         <p:spPr>
           <a:xfrm>
             <a:off x="6583680" y="1371600"/>
-            <a:ext cx="50801" cy="1828800"/>
+            <a:ext cx="50801" cy="4114800"/>
           </a:xfrm>
           <a:prstGeom prst="rect">
             <a:avLst/>
@@ -12301,34 +10344,198 @@
           <a:solidFill>
             <a:srgbClr val="E8833A"/>
           </a:solidFill>
-          <a:ln w="12700">
-            <a:miter lim="400000"/>
+          <a:ln>
+            <a:noFill/>
           </a:ln>
-          <a:effectLst>
-            <a:outerShdw sx="100000" sy="100000" kx="0" ky="0" algn="b" rotWithShape="0" blurRad="38100" dist="23000" dir="5400000">
-              <a:srgbClr val="000000">
-                <a:alpha val="35000"/>
-              </a:srgbClr>
-            </a:outerShdw>
-          </a:effectLst>
-        </p:spPr>
-        <p:txBody>
-          <a:bodyPr lIns="45719" rIns="45719" anchor="ctr"/>
-          <a:lstStyle/>
-          <a:p>
-            <a:pPr algn="ctr">
-              <a:defRPr>
+          <a:effectLst/>
+        </p:spPr>
+        <p:style>
+          <a:lnRef idx="1">
+            <a:schemeClr val="accent1"/>
+          </a:lnRef>
+          <a:fillRef idx="3">
+            <a:schemeClr val="accent1"/>
+          </a:fillRef>
+          <a:effectRef idx="2">
+            <a:schemeClr val="accent1"/>
+          </a:effectRef>
+          <a:fontRef idx="minor">
+            <a:schemeClr val="lt1"/>
+          </a:fontRef>
+        </p:style>
+        <p:txBody>
+          <a:bodyPr rtlCol="0" anchor="ctr"/>
+          <a:lstStyle/>
+          <a:p>
+            <a:pPr algn="ctr"/>
+          </a:p>
+        </p:txBody>
+      </p:sp>
+      <p:sp>
+        <p:nvSpPr>
+          <p:cNvPr id="7" name="TextBox 6"/>
+          <p:cNvSpPr txBox="1"/>
+          <p:nvPr/>
+        </p:nvSpPr>
+        <p:spPr>
+          <a:xfrm>
+            <a:off x="502919" y="182879"/>
+            <a:ext cx="11155682" cy="444759"/>
+          </a:xfrm>
+          <a:prstGeom prst="rect">
+            <a:avLst/>
+          </a:prstGeom>
+          <a:noFill/>
+        </p:spPr>
+        <p:txBody>
+          <a:bodyPr wrap="square">
+            <a:spAutoFit/>
+          </a:bodyPr>
+          <a:lstStyle/>
+          <a:p>
+            <a:r>
+              <a:rPr sz="2800" b="1">
                 <a:solidFill>
                   <a:srgbClr val="FFFFFF"/>
                 </a:solidFill>
-              </a:defRPr>
+              </a:rPr>
+              <a:t>Demo: The Realism Gap, Part 2: The AI Case, Live</a:t>
+            </a:r>
+          </a:p>
+        </p:txBody>
+      </p:sp>
+      <p:sp>
+        <p:nvSpPr>
+          <p:cNvPr id="8" name="TextBox 7"/>
+          <p:cNvSpPr txBox="1"/>
+          <p:nvPr/>
+        </p:nvSpPr>
+        <p:spPr>
+          <a:xfrm>
+            <a:off x="502919" y="1097280"/>
+            <a:ext cx="11155682" cy="300594"/>
+          </a:xfrm>
+          <a:prstGeom prst="rect">
+            <a:avLst/>
+          </a:prstGeom>
+          <a:noFill/>
+        </p:spPr>
+        <p:txBody>
+          <a:bodyPr wrap="square">
+            <a:spAutoFit/>
+          </a:bodyPr>
+          <a:lstStyle/>
+          <a:p>
+            <a:r>
+              <a:rPr sz="1600" b="0">
+                <a:solidFill>
+                  <a:srgbClr val="5B6B7C"/>
+                </a:solidFill>
+              </a:rPr>
+              <a:t>One paste, about sixty seconds, on screen now</a:t>
+            </a:r>
+          </a:p>
+        </p:txBody>
+      </p:sp>
+      <p:sp>
+        <p:nvSpPr>
+          <p:cNvPr id="9" name="TextBox 8"/>
+          <p:cNvSpPr txBox="1"/>
+          <p:nvPr/>
+        </p:nvSpPr>
+        <p:spPr>
+          <a:xfrm>
+            <a:off x="960119" y="1554480"/>
+            <a:ext cx="4937762" cy="225708"/>
+          </a:xfrm>
+          <a:prstGeom prst="rect">
+            <a:avLst/>
+          </a:prstGeom>
+          <a:noFill/>
+        </p:spPr>
+        <p:txBody>
+          <a:bodyPr wrap="square">
+            <a:spAutoFit/>
+          </a:bodyPr>
+          <a:lstStyle/>
+          <a:p>
+            <a:r>
+              <a:rPr sz="1100" b="1">
+                <a:solidFill>
+                  <a:srgbClr val="2D5F7C"/>
+                </a:solidFill>
+              </a:rPr>
+              <a:t>WHAT THE PASTE PRODUCES</a:t>
+            </a:r>
+          </a:p>
+        </p:txBody>
+      </p:sp>
+      <p:sp>
+        <p:nvSpPr>
+          <p:cNvPr id="10" name="TextBox 9"/>
+          <p:cNvSpPr txBox="1"/>
+          <p:nvPr/>
+        </p:nvSpPr>
+        <p:spPr>
+          <a:xfrm>
+            <a:off x="960119" y="1920239"/>
+            <a:ext cx="4937762" cy="2301589"/>
+          </a:xfrm>
+          <a:prstGeom prst="rect">
+            <a:avLst/>
+          </a:prstGeom>
+          <a:noFill/>
+        </p:spPr>
+        <p:txBody>
+          <a:bodyPr wrap="square">
+            <a:spAutoFit/>
+          </a:bodyPr>
+          <a:lstStyle/>
+          <a:p>
+            <a:r>
+              <a:rPr sz="1800" b="0">
+                <a:solidFill>
+                  <a:srgbClr val="1A2332"/>
+                </a:solidFill>
+              </a:rPr>
+              <a:t>• An open-ended case: the learner asks anything</a:t>
+            </a:r>
+          </a:p>
+          <a:p>
+            <a:pPr>
+              <a:spcBef>
+                <a:spcPts val="1000"/>
+              </a:spcBef>
             </a:pPr>
-          </a:p>
-        </p:txBody>
-      </p:sp>
-      <p:sp>
-        <p:nvSpPr>
-          <p:cNvPr id="126" name="TextBox 10"/>
+            <a:r>
+              <a:rPr sz="1800" b="0">
+                <a:solidFill>
+                  <a:srgbClr val="1A2332"/>
+                </a:solidFill>
+              </a:rPr>
+              <a:t>• A student-ready prompt with rubric feedback</a:t>
+            </a:r>
+          </a:p>
+          <a:p>
+            <a:pPr>
+              <a:spcBef>
+                <a:spcPts val="1000"/>
+              </a:spcBef>
+            </a:pPr>
+            <a:r>
+              <a:rPr sz="1800" b="0">
+                <a:solidFill>
+                  <a:srgbClr val="1A2332"/>
+                </a:solidFill>
+              </a:rPr>
+              <a:t>• A provenance warning it writes itself</a:t>
+            </a:r>
+          </a:p>
+        </p:txBody>
+      </p:sp>
+      <p:sp>
+        <p:nvSpPr>
+          <p:cNvPr id="11" name="TextBox 10"/>
           <p:cNvSpPr txBox="1"/>
           <p:nvPr/>
         </p:nvSpPr>
@@ -12340,202 +10547,117 @@
           <a:prstGeom prst="rect">
             <a:avLst/>
           </a:prstGeom>
-          <a:ln w="12700">
-            <a:miter lim="400000"/>
-          </a:ln>
-          <a:extLst>
-            <a:ext uri="{C572A759-6A51-4108-AA02-DFA0A04FC94B}">
-              <ma14:wrappingTextBoxFlag xmlns:ma14="http://schemas.microsoft.com/office/mac/drawingml/2011/main" val="1"/>
-            </a:ext>
-          </a:extLst>
-        </p:spPr>
-        <p:txBody>
-          <a:bodyPr lIns="45719" rIns="45719">
+          <a:noFill/>
+        </p:spPr>
+        <p:txBody>
+          <a:bodyPr wrap="square">
             <a:spAutoFit/>
           </a:bodyPr>
-          <a:lstStyle>
-            <a:lvl1pPr>
-              <a:defRPr b="1" sz="1100">
-                <a:solidFill>
-                  <a:srgbClr val="C66A28"/>
-                </a:solidFill>
-              </a:defRPr>
-            </a:lvl1pPr>
-          </a:lstStyle>
-          <a:p>
-            <a:pPr/>
-            <a:r>
-              <a:rPr/>
-              <a:t>TRY IT NOW</a:t>
-            </a:r>
-          </a:p>
-        </p:txBody>
-      </p:sp>
-      <p:sp>
-        <p:nvSpPr>
-          <p:cNvPr id="127" name="TextBox 11"/>
+          <a:lstStyle/>
+          <a:p>
+            <a:r>
+              <a:rPr sz="1100" b="1">
+                <a:solidFill>
+                  <a:srgbClr val="E8833A"/>
+                </a:solidFill>
+              </a:rPr>
+              <a:t>YOUR TURN COMES AT THE TPS</a:t>
+            </a:r>
+          </a:p>
+        </p:txBody>
+      </p:sp>
+      <p:sp>
+        <p:nvSpPr>
+          <p:cNvPr id="12" name="TextBox 11"/>
           <p:cNvSpPr txBox="1"/>
           <p:nvPr/>
         </p:nvSpPr>
         <p:spPr>
           <a:xfrm>
             <a:off x="6903719" y="1920239"/>
-            <a:ext cx="4480562" cy="367071"/>
-          </a:xfrm>
-          <a:prstGeom prst="rect">
-            <a:avLst/>
-          </a:prstGeom>
-          <a:ln w="12700">
-            <a:miter lim="400000"/>
-          </a:ln>
-          <a:extLst>
-            <a:ext uri="{C572A759-6A51-4108-AA02-DFA0A04FC94B}">
-              <ma14:wrappingTextBoxFlag xmlns:ma14="http://schemas.microsoft.com/office/mac/drawingml/2011/main" val="1"/>
-            </a:ext>
-          </a:extLst>
-        </p:spPr>
-        <p:txBody>
-          <a:bodyPr lIns="45719" rIns="45719">
+            <a:ext cx="4480562" cy="2301589"/>
+          </a:xfrm>
+          <a:prstGeom prst="rect">
+            <a:avLst/>
+          </a:prstGeom>
+          <a:noFill/>
+        </p:spPr>
+        <p:txBody>
+          <a:bodyPr wrap="square">
             <a:spAutoFit/>
           </a:bodyPr>
-          <a:lstStyle>
-            <a:lvl1pPr>
-              <a:defRPr b="1" u="sng">
-                <a:solidFill>
-                  <a:srgbClr val="0000FF"/>
-                </a:solidFill>
-                <a:uFill>
-                  <a:solidFill>
-                    <a:srgbClr val="0000FF"/>
-                  </a:solidFill>
-                </a:uFill>
-                <a:hlinkClick r:id="rId2" invalidUrl="" action="" tgtFrame="" tooltip="" history="1" highlightClick="0" endSnd="0"/>
-              </a:defRPr>
-            </a:lvl1pPr>
-          </a:lstStyle>
+          <a:lstStyle/>
+          <a:p>
+            <a:r>
+              <a:rPr sz="1800" b="0">
+                <a:solidFill>
+                  <a:srgbClr val="1A2332"/>
+                </a:solidFill>
+              </a:rPr>
+              <a:t>The exact prompt is in the guide:</a:t>
+            </a:r>
+          </a:p>
           <a:p>
             <a:pPr>
-              <a:defRPr u="none">
-                <a:solidFill>
-                  <a:srgbClr val="2D5F7C"/>
-                </a:solidFill>
-                <a:uFillTx/>
-              </a:defRPr>
+              <a:spcBef>
+                <a:spcPts val="1000"/>
+              </a:spcBef>
             </a:pPr>
             <a:r>
-              <a:rPr>
-                <a:solidFill>
-                  <a:srgbClr val="0000FF"/>
+              <a:rPr sz="1800" b="0">
+                <a:solidFill>
+                  <a:srgbClr val="1A2332"/>
                 </a:solidFill>
               </a:rPr>
-              <a:t>▶ Today's Demo Case, pre-filled for the sore throat case</a:t>
-            </a:r>
-          </a:p>
-        </p:txBody>
-      </p:sp>
-      <p:sp>
-        <p:nvSpPr>
-          <p:cNvPr id="128" name="TextBox 12"/>
+              <a:t>Section 4, prompt 5b: Today's Demo Case.</a:t>
+            </a:r>
+          </a:p>
+          <a:p>
+            <a:pPr>
+              <a:spcBef>
+                <a:spcPts val="1000"/>
+              </a:spcBef>
+            </a:pPr>
+            <a:r>
+              <a:rPr sz="1800" b="0">
+                <a:solidFill>
+                  <a:srgbClr val="1A2332"/>
+                </a:solidFill>
+              </a:rPr>
+              <a:t>Copy it on your phone when we get there.</a:t>
+            </a:r>
+          </a:p>
+        </p:txBody>
+      </p:sp>
+      <p:sp>
+        <p:nvSpPr>
+          <p:cNvPr id="13" name="TextBox 12"/>
           <p:cNvSpPr txBox="1"/>
           <p:nvPr/>
         </p:nvSpPr>
         <p:spPr>
           <a:xfrm>
-            <a:off x="6903719" y="2743200"/>
-            <a:ext cx="4480562" cy="258202"/>
-          </a:xfrm>
-          <a:prstGeom prst="rect">
-            <a:avLst/>
-          </a:prstGeom>
-          <a:ln w="12700">
-            <a:miter lim="400000"/>
-          </a:ln>
-          <a:extLst>
-            <a:ext uri="{C572A759-6A51-4108-AA02-DFA0A04FC94B}">
-              <ma14:wrappingTextBoxFlag xmlns:ma14="http://schemas.microsoft.com/office/mac/drawingml/2011/main" val="1"/>
-            </a:ext>
-          </a:extLst>
-        </p:spPr>
-        <p:txBody>
-          <a:bodyPr lIns="45719" rIns="45719">
+            <a:off x="502919" y="5303520"/>
+            <a:ext cx="11155682" cy="300594"/>
+          </a:xfrm>
+          <a:prstGeom prst="rect">
+            <a:avLst/>
+          </a:prstGeom>
+          <a:noFill/>
+        </p:spPr>
+        <p:txBody>
+          <a:bodyPr wrap="square">
             <a:spAutoFit/>
           </a:bodyPr>
-          <a:lstStyle>
-            <a:lvl1pPr>
-              <a:defRPr sz="1300">
-                <a:solidFill>
-                  <a:srgbClr val="5A6B7E"/>
-                </a:solidFill>
-              </a:defRPr>
-            </a:lvl1pPr>
-          </a:lstStyle>
-          <a:p>
-            <a:pPr/>
-            <a:r>
-              <a:rPr/>
-              <a:t>Cost: $0 · Every run: a fresh case</a:t>
-            </a:r>
-          </a:p>
-        </p:txBody>
-      </p:sp>
-      <p:sp>
-        <p:nvSpPr>
-          <p:cNvPr id="129" name="TextBox 13"/>
-          <p:cNvSpPr txBox="1"/>
-          <p:nvPr/>
-        </p:nvSpPr>
-        <p:spPr>
-          <a:xfrm>
-            <a:off x="6903719" y="3657600"/>
-            <a:ext cx="4480562" cy="280799"/>
-          </a:xfrm>
-          <a:prstGeom prst="rect">
-            <a:avLst/>
-          </a:prstGeom>
-          <a:ln w="12700">
-            <a:miter lim="400000"/>
-          </a:ln>
-          <a:extLst>
-            <a:ext uri="{C572A759-6A51-4108-AA02-DFA0A04FC94B}">
-              <ma14:wrappingTextBoxFlag xmlns:ma14="http://schemas.microsoft.com/office/mac/drawingml/2011/main" val="1"/>
-            </a:ext>
-          </a:extLst>
-        </p:spPr>
-        <p:txBody>
-          <a:bodyPr lIns="45719" rIns="45719">
-            <a:spAutoFit/>
-          </a:bodyPr>
-          <a:lstStyle>
-            <a:lvl1pPr>
-              <a:defRPr sz="1400" u="sng">
+          <a:lstStyle/>
+          <a:p>
+            <a:r>
+              <a:rPr sz="1600" b="0">
                 <a:solidFill>
                   <a:srgbClr val="0000FF"/>
                 </a:solidFill>
-                <a:uFill>
-                  <a:solidFill>
-                    <a:srgbClr val="0000FF"/>
-                  </a:solidFill>
-                </a:uFill>
-                <a:hlinkClick r:id="rId3" invalidUrl="" action="" tgtFrame="" tooltip="" history="1" highlightClick="0" endSnd="0"/>
-              </a:defRPr>
-            </a:lvl1pPr>
-          </a:lstStyle>
-          <a:p>
-            <a:pPr>
-              <a:defRPr u="none">
-                <a:solidFill>
-                  <a:srgbClr val="2D5F7C"/>
-                </a:solidFill>
-                <a:uFillTx/>
-              </a:defRPr>
-            </a:pPr>
-            <a:r>
-              <a:rPr>
-                <a:solidFill>
-                  <a:srgbClr val="0000FF"/>
-                </a:solidFill>
               </a:rPr>
-              <a:t>Workshop Guide → Section 4 (Today's Demo Case, 5b)</a:t>
+              <a:t>Workshop Guide → Section 4 (prompts 5 and 5b)</a:t>
             </a:r>
           </a:p>
         </p:txBody>
@@ -12567,7 +10689,7 @@
       </p:grpSpPr>
       <p:sp>
         <p:nvSpPr>
-          <p:cNvPr id="140" name="Rectangle 1"/>
+          <p:cNvPr id="2" name="Rectangle 1"/>
           <p:cNvSpPr/>
           <p:nvPr/>
         </p:nvSpPr>
@@ -12582,78 +10704,36 @@
           <a:solidFill>
             <a:srgbClr val="2D5F7C"/>
           </a:solidFill>
-          <a:ln w="12700">
-            <a:miter lim="400000"/>
+          <a:ln>
+            <a:noFill/>
           </a:ln>
-          <a:effectLst>
-            <a:outerShdw sx="100000" sy="100000" kx="0" ky="0" algn="b" rotWithShape="0" blurRad="38100" dist="23000" dir="5400000">
-              <a:srgbClr val="000000">
-                <a:alpha val="35000"/>
-              </a:srgbClr>
-            </a:outerShdw>
-          </a:effectLst>
-        </p:spPr>
-        <p:txBody>
-          <a:bodyPr lIns="45719" rIns="45719" anchor="ctr"/>
-          <a:lstStyle/>
-          <a:p>
-            <a:pPr algn="ctr">
-              <a:defRPr>
-                <a:solidFill>
-                  <a:srgbClr val="FFFFFF"/>
-                </a:solidFill>
-              </a:defRPr>
-            </a:pPr>
-          </a:p>
-        </p:txBody>
-      </p:sp>
-      <p:sp>
-        <p:nvSpPr>
-          <p:cNvPr id="141" name="TextBox 2"/>
-          <p:cNvSpPr txBox="1"/>
-          <p:nvPr/>
-        </p:nvSpPr>
-        <p:spPr>
-          <a:xfrm>
-            <a:off x="502919" y="182879"/>
-            <a:ext cx="11155682" cy="444759"/>
-          </a:xfrm>
-          <a:prstGeom prst="rect">
-            <a:avLst/>
-          </a:prstGeom>
-          <a:ln w="12700">
-            <a:miter lim="400000"/>
-          </a:ln>
-          <a:extLst>
-            <a:ext uri="{C572A759-6A51-4108-AA02-DFA0A04FC94B}">
-              <ma14:wrappingTextBoxFlag xmlns:ma14="http://schemas.microsoft.com/office/mac/drawingml/2011/main" val="1"/>
-            </a:ext>
-          </a:extLst>
-        </p:spPr>
-        <p:txBody>
-          <a:bodyPr lIns="45719" rIns="45719">
-            <a:spAutoFit/>
-          </a:bodyPr>
-          <a:lstStyle>
-            <a:lvl1pPr>
-              <a:defRPr b="1" sz="2800">
-                <a:solidFill>
-                  <a:srgbClr val="FFFFFF"/>
-                </a:solidFill>
-              </a:defRPr>
-            </a:lvl1pPr>
-          </a:lstStyle>
-          <a:p>
-            <a:pPr/>
-            <a:r>
-              <a:t>Think · Pair · Share (2 min)</a:t>
-            </a:r>
-          </a:p>
-        </p:txBody>
-      </p:sp>
-      <p:sp>
-        <p:nvSpPr>
-          <p:cNvPr id="142" name="Rectangle 3"/>
+          <a:effectLst/>
+        </p:spPr>
+        <p:style>
+          <a:lnRef idx="1">
+            <a:schemeClr val="accent1"/>
+          </a:lnRef>
+          <a:fillRef idx="3">
+            <a:schemeClr val="accent1"/>
+          </a:fillRef>
+          <a:effectRef idx="2">
+            <a:schemeClr val="accent1"/>
+          </a:effectRef>
+          <a:fontRef idx="minor">
+            <a:schemeClr val="lt1"/>
+          </a:fontRef>
+        </p:style>
+        <p:txBody>
+          <a:bodyPr rtlCol="0" anchor="ctr"/>
+          <a:lstStyle/>
+          <a:p>
+            <a:pPr algn="ctr"/>
+          </a:p>
+        </p:txBody>
+      </p:sp>
+      <p:sp>
+        <p:nvSpPr>
+          <p:cNvPr id="3" name="Rectangle 2"/>
           <p:cNvSpPr/>
           <p:nvPr/>
         </p:nvSpPr>
@@ -12668,34 +10748,36 @@
           <a:solidFill>
             <a:srgbClr val="F0F4F8"/>
           </a:solidFill>
-          <a:ln w="12700">
-            <a:miter lim="400000"/>
+          <a:ln>
+            <a:noFill/>
           </a:ln>
-          <a:effectLst>
-            <a:outerShdw sx="100000" sy="100000" kx="0" ky="0" algn="b" rotWithShape="0" blurRad="38100" dist="23000" dir="5400000">
-              <a:srgbClr val="000000">
-                <a:alpha val="35000"/>
-              </a:srgbClr>
-            </a:outerShdw>
-          </a:effectLst>
-        </p:spPr>
-        <p:txBody>
-          <a:bodyPr lIns="45719" rIns="45719" anchor="ctr"/>
-          <a:lstStyle/>
-          <a:p>
-            <a:pPr algn="ctr">
-              <a:defRPr>
-                <a:solidFill>
-                  <a:srgbClr val="FFFFFF"/>
-                </a:solidFill>
-              </a:defRPr>
-            </a:pPr>
-          </a:p>
-        </p:txBody>
-      </p:sp>
-      <p:sp>
-        <p:nvSpPr>
-          <p:cNvPr id="143" name="Rectangle 4"/>
+          <a:effectLst/>
+        </p:spPr>
+        <p:style>
+          <a:lnRef idx="1">
+            <a:schemeClr val="accent1"/>
+          </a:lnRef>
+          <a:fillRef idx="3">
+            <a:schemeClr val="accent1"/>
+          </a:fillRef>
+          <a:effectRef idx="2">
+            <a:schemeClr val="accent1"/>
+          </a:effectRef>
+          <a:fontRef idx="minor">
+            <a:schemeClr val="lt1"/>
+          </a:fontRef>
+        </p:style>
+        <p:txBody>
+          <a:bodyPr rtlCol="0" anchor="ctr"/>
+          <a:lstStyle/>
+          <a:p>
+            <a:pPr algn="ctr"/>
+          </a:p>
+        </p:txBody>
+      </p:sp>
+      <p:sp>
+        <p:nvSpPr>
+          <p:cNvPr id="4" name="Rectangle 3"/>
           <p:cNvSpPr/>
           <p:nvPr/>
         </p:nvSpPr>
@@ -12710,34 +10792,69 @@
           <a:solidFill>
             <a:srgbClr val="2D5F7C"/>
           </a:solidFill>
-          <a:ln w="12700">
-            <a:miter lim="400000"/>
+          <a:ln>
+            <a:noFill/>
           </a:ln>
-          <a:effectLst>
-            <a:outerShdw sx="100000" sy="100000" kx="0" ky="0" algn="b" rotWithShape="0" blurRad="38100" dist="23000" dir="5400000">
-              <a:srgbClr val="000000">
-                <a:alpha val="35000"/>
-              </a:srgbClr>
-            </a:outerShdw>
-          </a:effectLst>
-        </p:spPr>
-        <p:txBody>
-          <a:bodyPr lIns="45719" rIns="45719" anchor="ctr"/>
-          <a:lstStyle/>
-          <a:p>
-            <a:pPr algn="ctr">
-              <a:defRPr>
+          <a:effectLst/>
+        </p:spPr>
+        <p:style>
+          <a:lnRef idx="1">
+            <a:schemeClr val="accent1"/>
+          </a:lnRef>
+          <a:fillRef idx="3">
+            <a:schemeClr val="accent1"/>
+          </a:fillRef>
+          <a:effectRef idx="2">
+            <a:schemeClr val="accent1"/>
+          </a:effectRef>
+          <a:fontRef idx="minor">
+            <a:schemeClr val="lt1"/>
+          </a:fontRef>
+        </p:style>
+        <p:txBody>
+          <a:bodyPr rtlCol="0" anchor="ctr"/>
+          <a:lstStyle/>
+          <a:p>
+            <a:pPr algn="ctr"/>
+          </a:p>
+        </p:txBody>
+      </p:sp>
+      <p:sp>
+        <p:nvSpPr>
+          <p:cNvPr id="5" name="TextBox 4"/>
+          <p:cNvSpPr txBox="1"/>
+          <p:nvPr/>
+        </p:nvSpPr>
+        <p:spPr>
+          <a:xfrm>
+            <a:off x="502919" y="182879"/>
+            <a:ext cx="11155682" cy="444759"/>
+          </a:xfrm>
+          <a:prstGeom prst="rect">
+            <a:avLst/>
+          </a:prstGeom>
+          <a:noFill/>
+        </p:spPr>
+        <p:txBody>
+          <a:bodyPr wrap="square">
+            <a:spAutoFit/>
+          </a:bodyPr>
+          <a:lstStyle/>
+          <a:p>
+            <a:r>
+              <a:rPr sz="2800" b="1">
                 <a:solidFill>
                   <a:srgbClr val="FFFFFF"/>
                 </a:solidFill>
-              </a:defRPr>
-            </a:pPr>
-          </a:p>
-        </p:txBody>
-      </p:sp>
-      <p:sp>
-        <p:nvSpPr>
-          <p:cNvPr id="144" name="TextBox 5"/>
+              </a:rPr>
+              <a:t>Think · Pair · Share: The Realism Gap (2 min)</a:t>
+            </a:r>
+          </a:p>
+        </p:txBody>
+      </p:sp>
+      <p:sp>
+        <p:nvSpPr>
+          <p:cNvPr id="6" name="TextBox 5"/>
           <p:cNvSpPr txBox="1"/>
           <p:nvPr/>
         </p:nvSpPr>
@@ -12749,53 +10866,58 @@
           <a:prstGeom prst="rect">
             <a:avLst/>
           </a:prstGeom>
-          <a:ln w="12700">
-            <a:miter lim="400000"/>
-          </a:ln>
-          <a:extLst>
-            <a:ext uri="{C572A759-6A51-4108-AA02-DFA0A04FC94B}">
-              <ma14:wrappingTextBoxFlag xmlns:ma14="http://schemas.microsoft.com/office/mac/drawingml/2011/main" val="1"/>
-            </a:ext>
-          </a:extLst>
-        </p:spPr>
-        <p:txBody>
-          <a:bodyPr lIns="45719" rIns="45719">
+          <a:noFill/>
+        </p:spPr>
+        <p:txBody>
+          <a:bodyPr wrap="square">
             <a:spAutoFit/>
           </a:bodyPr>
           <a:lstStyle/>
           <a:p>
+            <a:r>
+              <a:rPr sz="2200" b="0">
+                <a:solidFill>
+                  <a:srgbClr val="1E4258"/>
+                </a:solidFill>
+              </a:rPr>
+              <a:t>Pick one thing you already teach: a case, a treatment update, a procedure, a journal club.</a:t>
+            </a:r>
+          </a:p>
+          <a:p>
             <a:pPr>
               <a:spcBef>
-                <a:spcPts val="1400"/>
+                <a:spcPts val="1600"/>
               </a:spcBef>
-              <a:defRPr sz="2200">
+            </a:pPr>
+            <a:r>
+              <a:rPr sz="2200" b="0">
                 <a:solidFill>
                   <a:srgbClr val="1E4258"/>
                 </a:solidFill>
-              </a:defRPr>
+              </a:rPr>
+              <a:t>Where is its realism gap?</a:t>
+            </a:r>
+          </a:p>
+          <a:p>
+            <a:pPr>
+              <a:spcBef>
+                <a:spcPts val="1600"/>
+              </a:spcBef>
             </a:pPr>
             <a:r>
-              <a:rPr/>
-              <a:t>Pick one thing you already teach</a:t>
-            </a:r>
-          </a:p>
-          <a:p>
-            <a:r>
-              <a:rPr/>
-              <a:t>A case, a treatment update, a procedure, a journal club</a:t>
-            </a:r>
-          </a:p>
-          <a:p>
-            <a:r>
-              <a:rPr/>
-              <a:t>Where is its realism gap?  Which tool would you try first?</a:t>
-            </a:r>
-          </a:p>
-        </p:txBody>
-      </p:sp>
-      <p:sp>
-        <p:nvSpPr>
-          <p:cNvPr id="145" name="TextBox 6"/>
+              <a:rPr sz="2200" b="0">
+                <a:solidFill>
+                  <a:srgbClr val="1E4258"/>
+                </a:solidFill>
+              </a:rPr>
+              <a:t>Which format would you try first?</a:t>
+            </a:r>
+          </a:p>
+        </p:txBody>
+      </p:sp>
+      <p:sp>
+        <p:nvSpPr>
+          <p:cNvPr id="7" name="TextBox 6"/>
           <p:cNvSpPr txBox="1"/>
           <p:nvPr/>
         </p:nvSpPr>
@@ -12807,56 +10929,21 @@
           <a:prstGeom prst="rect">
             <a:avLst/>
           </a:prstGeom>
-          <a:ln w="12700">
-            <a:miter lim="400000"/>
-          </a:ln>
-          <a:extLst>
-            <a:ext uri="{C572A759-6A51-4108-AA02-DFA0A04FC94B}">
-              <ma14:wrappingTextBoxFlag xmlns:ma14="http://schemas.microsoft.com/office/mac/drawingml/2011/main" val="1"/>
-            </a:ext>
-          </a:extLst>
-        </p:spPr>
-        <p:txBody>
-          <a:bodyPr lIns="45719" rIns="45719">
+          <a:noFill/>
+        </p:spPr>
+        <p:txBody>
+          <a:bodyPr wrap="square">
             <a:spAutoFit/>
           </a:bodyPr>
-          <a:lstStyle>
-            <a:lvl1pPr>
-              <a:defRPr sz="1600" u="sng">
+          <a:lstStyle/>
+          <a:p>
+            <a:r>
+              <a:rPr sz="1600" b="0">
                 <a:solidFill>
                   <a:srgbClr val="0000FF"/>
                 </a:solidFill>
-                <a:uFill>
-                  <a:solidFill>
-                    <a:srgbClr val="0000FF"/>
-                  </a:solidFill>
-                </a:uFill>
-                <a:hlinkClick r:id="rId2" invalidUrl="" action="" tgtFrame="" tooltip="" history="1" highlightClick="0" endSnd="0"/>
-              </a:defRPr>
-            </a:lvl1pPr>
-          </a:lstStyle>
-          <a:p>
-            <a:pPr>
-              <a:defRPr u="none">
-                <a:solidFill>
-                  <a:srgbClr val="2D5F7C"/>
-                </a:solidFill>
-                <a:uFillTx/>
-              </a:defRPr>
-            </a:pPr>
-            <a:r>
-              <a:rPr u="sng">
-                <a:solidFill>
-                  <a:srgbClr val="0000FF"/>
-                </a:solidFill>
-                <a:uFill>
-                  <a:solidFill>
-                    <a:srgbClr val="0000FF"/>
-                  </a:solidFill>
-                </a:uFill>
-                <a:hlinkClick r:id="rId2" invalidUrl="" action="" tgtFrame="" tooltip="" history="1" highlightClick="0" endSnd="0"/>
               </a:rPr>
-              <a:t>Workshop Guide</a:t>
+              <a:t>Workshop Guide → Section 2</a:t>
             </a:r>
           </a:p>
         </p:txBody>
@@ -12894,153 +10981,254 @@
           <a:chExt cx="0" cy="0"/>
         </a:xfrm>
       </p:grpSpPr>
-      <p:grpSp>
-        <p:nvGrpSpPr>
-          <p:cNvPr id="168" name="Oval 1"/>
-          <p:cNvGrpSpPr/>
-          <p:nvPr/>
-        </p:nvGrpSpPr>
-        <p:grpSpPr>
-          <a:xfrm>
-            <a:off x="914399" y="2285999"/>
-            <a:ext cx="1097282" cy="1097282"/>
-            <a:chOff x="0" y="0"/>
-            <a:chExt cx="1097280" cy="1097280"/>
-          </a:xfrm>
-        </p:grpSpPr>
-        <p:sp>
-          <p:nvSpPr>
-            <p:cNvPr id="166" name="Circle"/>
-            <p:cNvSpPr/>
-            <p:nvPr/>
-          </p:nvSpPr>
-          <p:spPr>
-            <a:xfrm>
-              <a:off x="-1" y="-1"/>
-              <a:ext cx="1097282" cy="1097282"/>
-            </a:xfrm>
-            <a:prstGeom prst="ellipse">
-              <a:avLst/>
-            </a:prstGeom>
-            <a:solidFill>
-              <a:srgbClr val="E8833A"/>
-            </a:solidFill>
-            <a:ln w="12700" cap="flat">
-              <a:noFill/>
-              <a:miter lim="400000"/>
-            </a:ln>
-            <a:effectLst>
-              <a:outerShdw sx="100000" sy="100000" kx="0" ky="0" algn="b" rotWithShape="0" blurRad="38100" dist="23000" dir="5400000">
-                <a:srgbClr val="000000">
-                  <a:alpha val="35000"/>
-                </a:srgbClr>
-              </a:outerShdw>
-            </a:effectLst>
-          </p:spPr>
-          <p:txBody>
-            <a:bodyPr wrap="square" lIns="45719" tIns="45719" rIns="45719" bIns="45719" numCol="1" anchor="ctr">
-              <a:noAutofit/>
-            </a:bodyPr>
-            <a:lstStyle/>
-            <a:p>
-              <a:pPr algn="ctr">
-                <a:defRPr b="1" sz="3600">
-                  <a:solidFill>
-                    <a:srgbClr val="FFFFFF"/>
-                  </a:solidFill>
-                </a:defRPr>
-              </a:pPr>
-            </a:p>
-          </p:txBody>
-        </p:sp>
-        <p:sp>
-          <p:nvSpPr>
-            <p:cNvPr id="167" name="4"/>
-            <p:cNvSpPr txBox="1"/>
-            <p:nvPr/>
-          </p:nvSpPr>
-          <p:spPr>
-            <a:xfrm>
-              <a:off x="206412" y="273972"/>
-              <a:ext cx="684456" cy="549336"/>
-            </a:xfrm>
-            <a:prstGeom prst="rect">
-              <a:avLst/>
-            </a:prstGeom>
+      <p:sp>
+        <p:nvSpPr>
+          <p:cNvPr id="2" name="Rectangle 1"/>
+          <p:cNvSpPr/>
+          <p:nvPr/>
+        </p:nvSpPr>
+        <p:spPr>
+          <a:xfrm>
+            <a:off x="-1" y="0"/>
+            <a:ext cx="12191697" cy="1005839"/>
+          </a:xfrm>
+          <a:prstGeom prst="rect">
+            <a:avLst/>
+          </a:prstGeom>
+          <a:solidFill>
+            <a:srgbClr val="2D5F7C"/>
+          </a:solidFill>
+          <a:ln>
             <a:noFill/>
-            <a:ln w="12700" cap="flat">
-              <a:noFill/>
-              <a:miter lim="400000"/>
-            </a:ln>
-            <a:effectLst/>
-            <a:extLst>
-              <a:ext uri="{C572A759-6A51-4108-AA02-DFA0A04FC94B}">
-                <ma14:wrappingTextBoxFlag xmlns:ma14="http://schemas.microsoft.com/office/mac/drawingml/2011/main" val="1"/>
-              </a:ext>
-            </a:extLst>
-          </p:spPr>
-          <p:txBody>
-            <a:bodyPr wrap="square" lIns="45719" tIns="45719" rIns="45719" bIns="45719" numCol="1" anchor="ctr">
-              <a:spAutoFit/>
-            </a:bodyPr>
-            <a:lstStyle>
-              <a:lvl1pPr algn="ctr">
-                <a:defRPr b="1" sz="3600">
-                  <a:solidFill>
-                    <a:srgbClr val="FFFFFF"/>
-                  </a:solidFill>
-                </a:defRPr>
-              </a:lvl1pPr>
-            </a:lstStyle>
-            <a:p>
-              <a:pPr/>
-              <a:r>
-                <a:t>4</a:t>
-              </a:r>
-            </a:p>
-          </p:txBody>
-        </p:sp>
-      </p:grpSp>
-      <p:sp>
-        <p:nvSpPr>
-          <p:cNvPr id="169" name="TextBox 2"/>
+          </a:ln>
+          <a:effectLst/>
+        </p:spPr>
+        <p:style>
+          <a:lnRef idx="1">
+            <a:schemeClr val="accent1"/>
+          </a:lnRef>
+          <a:fillRef idx="3">
+            <a:schemeClr val="accent1"/>
+          </a:fillRef>
+          <a:effectRef idx="2">
+            <a:schemeClr val="accent1"/>
+          </a:effectRef>
+          <a:fontRef idx="minor">
+            <a:schemeClr val="lt1"/>
+          </a:fontRef>
+        </p:style>
+        <p:txBody>
+          <a:bodyPr rtlCol="0" anchor="ctr"/>
+          <a:lstStyle/>
+          <a:p>
+            <a:pPr algn="ctr"/>
+          </a:p>
+        </p:txBody>
+      </p:sp>
+      <p:sp>
+        <p:nvSpPr>
+          <p:cNvPr id="3" name="Rectangle 2"/>
+          <p:cNvSpPr/>
+          <p:nvPr/>
+        </p:nvSpPr>
+        <p:spPr>
+          <a:xfrm>
+            <a:off x="640080" y="1371600"/>
+            <a:ext cx="5486401" cy="4114800"/>
+          </a:xfrm>
+          <a:prstGeom prst="rect">
+            <a:avLst/>
+          </a:prstGeom>
+          <a:solidFill>
+            <a:srgbClr val="F0F4F8"/>
+          </a:solidFill>
+          <a:ln>
+            <a:noFill/>
+          </a:ln>
+          <a:effectLst/>
+        </p:spPr>
+        <p:style>
+          <a:lnRef idx="1">
+            <a:schemeClr val="accent1"/>
+          </a:lnRef>
+          <a:fillRef idx="3">
+            <a:schemeClr val="accent1"/>
+          </a:fillRef>
+          <a:effectRef idx="2">
+            <a:schemeClr val="accent1"/>
+          </a:effectRef>
+          <a:fontRef idx="minor">
+            <a:schemeClr val="lt1"/>
+          </a:fontRef>
+        </p:style>
+        <p:txBody>
+          <a:bodyPr rtlCol="0" anchor="ctr"/>
+          <a:lstStyle/>
+          <a:p>
+            <a:pPr algn="ctr"/>
+          </a:p>
+        </p:txBody>
+      </p:sp>
+      <p:sp>
+        <p:nvSpPr>
+          <p:cNvPr id="4" name="Rectangle 3"/>
+          <p:cNvSpPr/>
+          <p:nvPr/>
+        </p:nvSpPr>
+        <p:spPr>
+          <a:xfrm>
+            <a:off x="640080" y="1371600"/>
+            <a:ext cx="50801" cy="4114800"/>
+          </a:xfrm>
+          <a:prstGeom prst="rect">
+            <a:avLst/>
+          </a:prstGeom>
+          <a:solidFill>
+            <a:srgbClr val="2D5F7C"/>
+          </a:solidFill>
+          <a:ln>
+            <a:noFill/>
+          </a:ln>
+          <a:effectLst/>
+        </p:spPr>
+        <p:style>
+          <a:lnRef idx="1">
+            <a:schemeClr val="accent1"/>
+          </a:lnRef>
+          <a:fillRef idx="3">
+            <a:schemeClr val="accent1"/>
+          </a:fillRef>
+          <a:effectRef idx="2">
+            <a:schemeClr val="accent1"/>
+          </a:effectRef>
+          <a:fontRef idx="minor">
+            <a:schemeClr val="lt1"/>
+          </a:fontRef>
+        </p:style>
+        <p:txBody>
+          <a:bodyPr rtlCol="0" anchor="ctr"/>
+          <a:lstStyle/>
+          <a:p>
+            <a:pPr algn="ctr"/>
+          </a:p>
+        </p:txBody>
+      </p:sp>
+      <p:sp>
+        <p:nvSpPr>
+          <p:cNvPr id="5" name="Rectangle 4"/>
+          <p:cNvSpPr/>
+          <p:nvPr/>
+        </p:nvSpPr>
+        <p:spPr>
+          <a:xfrm>
+            <a:off x="6583680" y="1371600"/>
+            <a:ext cx="5029201" cy="4114800"/>
+          </a:xfrm>
+          <a:prstGeom prst="rect">
+            <a:avLst/>
+          </a:prstGeom>
+          <a:solidFill>
+            <a:srgbClr val="FDF6F0"/>
+          </a:solidFill>
+          <a:ln>
+            <a:noFill/>
+          </a:ln>
+          <a:effectLst/>
+        </p:spPr>
+        <p:style>
+          <a:lnRef idx="1">
+            <a:schemeClr val="accent1"/>
+          </a:lnRef>
+          <a:fillRef idx="3">
+            <a:schemeClr val="accent1"/>
+          </a:fillRef>
+          <a:effectRef idx="2">
+            <a:schemeClr val="accent1"/>
+          </a:effectRef>
+          <a:fontRef idx="minor">
+            <a:schemeClr val="lt1"/>
+          </a:fontRef>
+        </p:style>
+        <p:txBody>
+          <a:bodyPr rtlCol="0" anchor="ctr"/>
+          <a:lstStyle/>
+          <a:p>
+            <a:pPr algn="ctr"/>
+          </a:p>
+        </p:txBody>
+      </p:sp>
+      <p:sp>
+        <p:nvSpPr>
+          <p:cNvPr id="6" name="Rectangle 5"/>
+          <p:cNvSpPr/>
+          <p:nvPr/>
+        </p:nvSpPr>
+        <p:spPr>
+          <a:xfrm>
+            <a:off x="6583680" y="1371600"/>
+            <a:ext cx="50801" cy="4114800"/>
+          </a:xfrm>
+          <a:prstGeom prst="rect">
+            <a:avLst/>
+          </a:prstGeom>
+          <a:solidFill>
+            <a:srgbClr val="E8833A"/>
+          </a:solidFill>
+          <a:ln>
+            <a:noFill/>
+          </a:ln>
+          <a:effectLst/>
+        </p:spPr>
+        <p:style>
+          <a:lnRef idx="1">
+            <a:schemeClr val="accent1"/>
+          </a:lnRef>
+          <a:fillRef idx="3">
+            <a:schemeClr val="accent1"/>
+          </a:fillRef>
+          <a:effectRef idx="2">
+            <a:schemeClr val="accent1"/>
+          </a:effectRef>
+          <a:fontRef idx="minor">
+            <a:schemeClr val="lt1"/>
+          </a:fontRef>
+        </p:style>
+        <p:txBody>
+          <a:bodyPr rtlCol="0" anchor="ctr"/>
+          <a:lstStyle/>
+          <a:p>
+            <a:pPr algn="ctr"/>
+          </a:p>
+        </p:txBody>
+      </p:sp>
+      <p:sp>
+        <p:nvSpPr>
+          <p:cNvPr id="7" name="TextBox 6"/>
           <p:cNvSpPr txBox="1"/>
           <p:nvPr/>
         </p:nvSpPr>
         <p:spPr>
           <a:xfrm>
-            <a:off x="2331719" y="2286000"/>
-            <a:ext cx="8595362" cy="497047"/>
-          </a:xfrm>
-          <a:prstGeom prst="rect">
-            <a:avLst/>
-          </a:prstGeom>
-          <a:ln w="12700">
-            <a:miter lim="400000"/>
-          </a:ln>
-          <a:extLst>
-            <a:ext uri="{C572A759-6A51-4108-AA02-DFA0A04FC94B}">
-              <ma14:wrappingTextBoxFlag xmlns:ma14="http://schemas.microsoft.com/office/mac/drawingml/2011/main" val="1"/>
-            </a:ext>
-          </a:extLst>
-        </p:spPr>
-        <p:txBody>
-          <a:bodyPr lIns="45719" rIns="45719">
+            <a:off x="502919" y="182879"/>
+            <a:ext cx="11155682" cy="444759"/>
+          </a:xfrm>
+          <a:prstGeom prst="rect">
+            <a:avLst/>
+          </a:prstGeom>
+          <a:noFill/>
+        </p:spPr>
+        <p:txBody>
+          <a:bodyPr wrap="square">
             <a:spAutoFit/>
           </a:bodyPr>
-          <a:lstStyle>
-            <a:lvl1pPr>
-              <a:defRPr b="1" sz="3200">
+          <a:lstStyle/>
+          <a:p>
+            <a:r>
+              <a:rPr sz="2800" b="1">
                 <a:solidFill>
                   <a:srgbClr val="FFFFFF"/>
                 </a:solidFill>
-              </a:defRPr>
-            </a:lvl1pPr>
-          </a:lstStyle>
-          <a:p>
-            <a:pPr/>
-            <a:r>
-              <a:rPr/>
+              </a:rPr>
               <a:t>The Elephant: Nobody Wrote This Case</a:t>
             </a:r>
           </a:p>
@@ -13048,51 +11236,258 @@
       </p:sp>
       <p:sp>
         <p:nvSpPr>
-          <p:cNvPr id="170" name="TextBox 3"/>
+          <p:cNvPr id="8" name="TextBox 7"/>
           <p:cNvSpPr txBox="1"/>
           <p:nvPr/>
         </p:nvSpPr>
         <p:spPr>
           <a:xfrm>
-            <a:off x="2331719" y="3200400"/>
-            <a:ext cx="8595362" cy="333088"/>
-          </a:xfrm>
-          <a:prstGeom prst="rect">
-            <a:avLst/>
-          </a:prstGeom>
-          <a:ln w="12700">
-            <a:miter lim="400000"/>
-          </a:ln>
-          <a:extLst>
-            <a:ext uri="{C572A759-6A51-4108-AA02-DFA0A04FC94B}">
-              <ma14:wrappingTextBoxFlag xmlns:ma14="http://schemas.microsoft.com/office/mac/drawingml/2011/main" val="1"/>
-            </a:ext>
-          </a:extLst>
-        </p:spPr>
-        <p:txBody>
-          <a:bodyPr lIns="45719" rIns="45719">
+            <a:off x="502919" y="1097280"/>
+            <a:ext cx="11155682" cy="300594"/>
+          </a:xfrm>
+          <a:prstGeom prst="rect">
+            <a:avLst/>
+          </a:prstGeom>
+          <a:noFill/>
+        </p:spPr>
+        <p:txBody>
+          <a:bodyPr wrap="square">
             <a:spAutoFit/>
           </a:bodyPr>
-          <a:lstStyle>
-            <a:lvl1pPr>
-              <a:defRPr>
-                <a:solidFill>
-                  <a:srgbClr val="F4A55A"/>
-                </a:solidFill>
-              </a:defRPr>
-            </a:lvl1pPr>
-          </a:lstStyle>
-          <a:p>
-            <a:pPr/>
-            <a:r>
-              <a:rPr/>
-              <a:t>Fast, realistic, and unverifiable.</a:t>
-            </a:r>
-          </a:p>
-          <a:p>
-            <a:r>
-              <a:rPr/>
-              <a:t>Every run is a fresh, unreviewed case. The pitfall scales with the stakes.</a:t>
+          <a:lstStyle/>
+          <a:p>
+            <a:r>
+              <a:rPr sz="1600" b="0">
+                <a:solidFill>
+                  <a:srgbClr val="5B6B7C"/>
+                </a:solidFill>
+              </a:rPr>
+              <a:t>Fast, realistic, and unverifiable</a:t>
+            </a:r>
+          </a:p>
+        </p:txBody>
+      </p:sp>
+      <p:sp>
+        <p:nvSpPr>
+          <p:cNvPr id="9" name="TextBox 8"/>
+          <p:cNvSpPr txBox="1"/>
+          <p:nvPr/>
+        </p:nvSpPr>
+        <p:spPr>
+          <a:xfrm>
+            <a:off x="960119" y="1554480"/>
+            <a:ext cx="4937762" cy="225708"/>
+          </a:xfrm>
+          <a:prstGeom prst="rect">
+            <a:avLst/>
+          </a:prstGeom>
+          <a:noFill/>
+        </p:spPr>
+        <p:txBody>
+          <a:bodyPr wrap="square">
+            <a:spAutoFit/>
+          </a:bodyPr>
+          <a:lstStyle/>
+          <a:p>
+            <a:r>
+              <a:rPr sz="1100" b="1">
+                <a:solidFill>
+                  <a:srgbClr val="2D5F7C"/>
+                </a:solidFill>
+              </a:rPr>
+              <a:t>THE RISK</a:t>
+            </a:r>
+          </a:p>
+        </p:txBody>
+      </p:sp>
+      <p:sp>
+        <p:nvSpPr>
+          <p:cNvPr id="10" name="TextBox 9"/>
+          <p:cNvSpPr txBox="1"/>
+          <p:nvPr/>
+        </p:nvSpPr>
+        <p:spPr>
+          <a:xfrm>
+            <a:off x="960119" y="1920239"/>
+            <a:ext cx="4937762" cy="2301589"/>
+          </a:xfrm>
+          <a:prstGeom prst="rect">
+            <a:avLst/>
+          </a:prstGeom>
+          <a:noFill/>
+        </p:spPr>
+        <p:txBody>
+          <a:bodyPr wrap="square">
+            <a:spAutoFit/>
+          </a:bodyPr>
+          <a:lstStyle/>
+          <a:p>
+            <a:r>
+              <a:rPr sz="1800" b="0">
+                <a:solidFill>
+                  <a:srgbClr val="1A2332"/>
+                </a:solidFill>
+              </a:rPr>
+              <a:t>• Every run is a fresh, unreviewed case</a:t>
+            </a:r>
+          </a:p>
+          <a:p>
+            <a:pPr>
+              <a:spcBef>
+                <a:spcPts val="1000"/>
+              </a:spcBef>
+            </a:pPr>
+            <a:r>
+              <a:rPr sz="1800" b="0">
+                <a:solidFill>
+                  <a:srgbClr val="1A2332"/>
+                </a:solidFill>
+              </a:rPr>
+              <a:t>• No source. No citation. No reviewer.</a:t>
+            </a:r>
+          </a:p>
+          <a:p>
+            <a:pPr>
+              <a:spcBef>
+                <a:spcPts val="1000"/>
+              </a:spcBef>
+            </a:pPr>
+            <a:r>
+              <a:rPr sz="1800" b="0">
+                <a:solidFill>
+                  <a:srgbClr val="1A2332"/>
+                </a:solidFill>
+              </a:rPr>
+              <a:t>• Would you sign your name to it?</a:t>
+            </a:r>
+          </a:p>
+        </p:txBody>
+      </p:sp>
+      <p:sp>
+        <p:nvSpPr>
+          <p:cNvPr id="11" name="TextBox 10"/>
+          <p:cNvSpPr txBox="1"/>
+          <p:nvPr/>
+        </p:nvSpPr>
+        <p:spPr>
+          <a:xfrm>
+            <a:off x="6903719" y="1554480"/>
+            <a:ext cx="4480562" cy="225708"/>
+          </a:xfrm>
+          <a:prstGeom prst="rect">
+            <a:avLst/>
+          </a:prstGeom>
+          <a:noFill/>
+        </p:spPr>
+        <p:txBody>
+          <a:bodyPr wrap="square">
+            <a:spAutoFit/>
+          </a:bodyPr>
+          <a:lstStyle/>
+          <a:p>
+            <a:r>
+              <a:rPr sz="1100" b="1">
+                <a:solidFill>
+                  <a:srgbClr val="E8833A"/>
+                </a:solidFill>
+              </a:rPr>
+              <a:t>THE STAKES</a:t>
+            </a:r>
+          </a:p>
+        </p:txBody>
+      </p:sp>
+      <p:sp>
+        <p:nvSpPr>
+          <p:cNvPr id="12" name="TextBox 11"/>
+          <p:cNvSpPr txBox="1"/>
+          <p:nvPr/>
+        </p:nvSpPr>
+        <p:spPr>
+          <a:xfrm>
+            <a:off x="6903719" y="1920239"/>
+            <a:ext cx="4480562" cy="2301589"/>
+          </a:xfrm>
+          <a:prstGeom prst="rect">
+            <a:avLst/>
+          </a:prstGeom>
+          <a:noFill/>
+        </p:spPr>
+        <p:txBody>
+          <a:bodyPr wrap="square">
+            <a:spAutoFit/>
+          </a:bodyPr>
+          <a:lstStyle/>
+          <a:p>
+            <a:r>
+              <a:rPr sz="1800" b="0">
+                <a:solidFill>
+                  <a:srgbClr val="1A2332"/>
+                </a:solidFill>
+              </a:rPr>
+              <a:t>An error propagates to every learner who meets it.</a:t>
+            </a:r>
+          </a:p>
+          <a:p>
+            <a:pPr>
+              <a:spcBef>
+                <a:spcPts val="1000"/>
+              </a:spcBef>
+            </a:pPr>
+            <a:r>
+              <a:rPr sz="1800" b="0">
+                <a:solidFill>
+                  <a:srgbClr val="1A2332"/>
+                </a:solidFill>
+              </a:rPr>
+              <a:t>The pitfall scales with the stakes: dosing, step order, discharge instructions.</a:t>
+            </a:r>
+          </a:p>
+          <a:p>
+            <a:pPr>
+              <a:spcBef>
+                <a:spcPts val="1000"/>
+              </a:spcBef>
+            </a:pPr>
+            <a:r>
+              <a:rPr sz="1800" b="0">
+                <a:solidFill>
+                  <a:srgbClr val="1A2332"/>
+                </a:solidFill>
+              </a:rPr>
+              <a:t>Objective 2 is how we get realism and verifiability.</a:t>
+            </a:r>
+          </a:p>
+        </p:txBody>
+      </p:sp>
+      <p:sp>
+        <p:nvSpPr>
+          <p:cNvPr id="13" name="TextBox 12"/>
+          <p:cNvSpPr txBox="1"/>
+          <p:nvPr/>
+        </p:nvSpPr>
+        <p:spPr>
+          <a:xfrm>
+            <a:off x="502919" y="5303520"/>
+            <a:ext cx="11155682" cy="300594"/>
+          </a:xfrm>
+          <a:prstGeom prst="rect">
+            <a:avLst/>
+          </a:prstGeom>
+          <a:noFill/>
+        </p:spPr>
+        <p:txBody>
+          <a:bodyPr wrap="square">
+            <a:spAutoFit/>
+          </a:bodyPr>
+          <a:lstStyle/>
+          <a:p>
+            <a:r>
+              <a:rPr sz="1600" b="0">
+                <a:solidFill>
+                  <a:srgbClr val="0000FF"/>
+                </a:solidFill>
+              </a:rPr>
+              <a:t>Workshop Guide → Section 4 (Beyond the Case)</a:t>
             </a:r>
           </a:p>
         </p:txBody>
@@ -13125,7 +11520,7 @@
       </p:grpSpPr>
       <p:sp>
         <p:nvSpPr>
-          <p:cNvPr id="172" name="Rectangle 1"/>
+          <p:cNvPr id="2" name="Rectangle 1"/>
           <p:cNvSpPr/>
           <p:nvPr/>
         </p:nvSpPr>
@@ -13140,34 +11535,212 @@
           <a:solidFill>
             <a:srgbClr val="2D5F7C"/>
           </a:solidFill>
-          <a:ln w="12700">
-            <a:miter lim="400000"/>
+          <a:ln>
+            <a:noFill/>
           </a:ln>
-          <a:effectLst>
-            <a:outerShdw sx="100000" sy="100000" kx="0" ky="0" algn="b" rotWithShape="0" blurRad="38100" dist="23000" dir="5400000">
-              <a:srgbClr val="000000">
-                <a:alpha val="35000"/>
-              </a:srgbClr>
-            </a:outerShdw>
-          </a:effectLst>
-        </p:spPr>
-        <p:txBody>
-          <a:bodyPr lIns="45719" rIns="45719" anchor="ctr"/>
-          <a:lstStyle/>
-          <a:p>
-            <a:pPr algn="ctr">
-              <a:defRPr>
-                <a:solidFill>
-                  <a:srgbClr val="FFFFFF"/>
-                </a:solidFill>
-              </a:defRPr>
-            </a:pPr>
-          </a:p>
-        </p:txBody>
-      </p:sp>
-      <p:sp>
-        <p:nvSpPr>
-          <p:cNvPr id="173" name="TextBox 2"/>
+          <a:effectLst/>
+        </p:spPr>
+        <p:style>
+          <a:lnRef idx="1">
+            <a:schemeClr val="accent1"/>
+          </a:lnRef>
+          <a:fillRef idx="3">
+            <a:schemeClr val="accent1"/>
+          </a:fillRef>
+          <a:effectRef idx="2">
+            <a:schemeClr val="accent1"/>
+          </a:effectRef>
+          <a:fontRef idx="minor">
+            <a:schemeClr val="lt1"/>
+          </a:fontRef>
+        </p:style>
+        <p:txBody>
+          <a:bodyPr rtlCol="0" anchor="ctr"/>
+          <a:lstStyle/>
+          <a:p>
+            <a:pPr algn="ctr"/>
+          </a:p>
+        </p:txBody>
+      </p:sp>
+      <p:sp>
+        <p:nvSpPr>
+          <p:cNvPr id="3" name="Rectangle 2"/>
+          <p:cNvSpPr/>
+          <p:nvPr/>
+        </p:nvSpPr>
+        <p:spPr>
+          <a:xfrm>
+            <a:off x="640080" y="1371600"/>
+            <a:ext cx="5486401" cy="4114800"/>
+          </a:xfrm>
+          <a:prstGeom prst="rect">
+            <a:avLst/>
+          </a:prstGeom>
+          <a:solidFill>
+            <a:srgbClr val="F0F4F8"/>
+          </a:solidFill>
+          <a:ln>
+            <a:noFill/>
+          </a:ln>
+          <a:effectLst/>
+        </p:spPr>
+        <p:style>
+          <a:lnRef idx="1">
+            <a:schemeClr val="accent1"/>
+          </a:lnRef>
+          <a:fillRef idx="3">
+            <a:schemeClr val="accent1"/>
+          </a:fillRef>
+          <a:effectRef idx="2">
+            <a:schemeClr val="accent1"/>
+          </a:effectRef>
+          <a:fontRef idx="minor">
+            <a:schemeClr val="lt1"/>
+          </a:fontRef>
+        </p:style>
+        <p:txBody>
+          <a:bodyPr rtlCol="0" anchor="ctr"/>
+          <a:lstStyle/>
+          <a:p>
+            <a:pPr algn="ctr"/>
+          </a:p>
+        </p:txBody>
+      </p:sp>
+      <p:sp>
+        <p:nvSpPr>
+          <p:cNvPr id="4" name="Rectangle 3"/>
+          <p:cNvSpPr/>
+          <p:nvPr/>
+        </p:nvSpPr>
+        <p:spPr>
+          <a:xfrm>
+            <a:off x="640080" y="1371600"/>
+            <a:ext cx="50801" cy="4114800"/>
+          </a:xfrm>
+          <a:prstGeom prst="rect">
+            <a:avLst/>
+          </a:prstGeom>
+          <a:solidFill>
+            <a:srgbClr val="2D5F7C"/>
+          </a:solidFill>
+          <a:ln>
+            <a:noFill/>
+          </a:ln>
+          <a:effectLst/>
+        </p:spPr>
+        <p:style>
+          <a:lnRef idx="1">
+            <a:schemeClr val="accent1"/>
+          </a:lnRef>
+          <a:fillRef idx="3">
+            <a:schemeClr val="accent1"/>
+          </a:fillRef>
+          <a:effectRef idx="2">
+            <a:schemeClr val="accent1"/>
+          </a:effectRef>
+          <a:fontRef idx="minor">
+            <a:schemeClr val="lt1"/>
+          </a:fontRef>
+        </p:style>
+        <p:txBody>
+          <a:bodyPr rtlCol="0" anchor="ctr"/>
+          <a:lstStyle/>
+          <a:p>
+            <a:pPr algn="ctr"/>
+          </a:p>
+        </p:txBody>
+      </p:sp>
+      <p:sp>
+        <p:nvSpPr>
+          <p:cNvPr id="5" name="Rectangle 4"/>
+          <p:cNvSpPr/>
+          <p:nvPr/>
+        </p:nvSpPr>
+        <p:spPr>
+          <a:xfrm>
+            <a:off x="6583680" y="1371600"/>
+            <a:ext cx="5029201" cy="4114800"/>
+          </a:xfrm>
+          <a:prstGeom prst="rect">
+            <a:avLst/>
+          </a:prstGeom>
+          <a:solidFill>
+            <a:srgbClr val="FDF6F0"/>
+          </a:solidFill>
+          <a:ln>
+            <a:noFill/>
+          </a:ln>
+          <a:effectLst/>
+        </p:spPr>
+        <p:style>
+          <a:lnRef idx="1">
+            <a:schemeClr val="accent1"/>
+          </a:lnRef>
+          <a:fillRef idx="3">
+            <a:schemeClr val="accent1"/>
+          </a:fillRef>
+          <a:effectRef idx="2">
+            <a:schemeClr val="accent1"/>
+          </a:effectRef>
+          <a:fontRef idx="minor">
+            <a:schemeClr val="lt1"/>
+          </a:fontRef>
+        </p:style>
+        <p:txBody>
+          <a:bodyPr rtlCol="0" anchor="ctr"/>
+          <a:lstStyle/>
+          <a:p>
+            <a:pPr algn="ctr"/>
+          </a:p>
+        </p:txBody>
+      </p:sp>
+      <p:sp>
+        <p:nvSpPr>
+          <p:cNvPr id="6" name="Rectangle 5"/>
+          <p:cNvSpPr/>
+          <p:nvPr/>
+        </p:nvSpPr>
+        <p:spPr>
+          <a:xfrm>
+            <a:off x="6583680" y="1371600"/>
+            <a:ext cx="50801" cy="4114800"/>
+          </a:xfrm>
+          <a:prstGeom prst="rect">
+            <a:avLst/>
+          </a:prstGeom>
+          <a:solidFill>
+            <a:srgbClr val="E8833A"/>
+          </a:solidFill>
+          <a:ln>
+            <a:noFill/>
+          </a:ln>
+          <a:effectLst/>
+        </p:spPr>
+        <p:style>
+          <a:lnRef idx="1">
+            <a:schemeClr val="accent1"/>
+          </a:lnRef>
+          <a:fillRef idx="3">
+            <a:schemeClr val="accent1"/>
+          </a:fillRef>
+          <a:effectRef idx="2">
+            <a:schemeClr val="accent1"/>
+          </a:effectRef>
+          <a:fontRef idx="minor">
+            <a:schemeClr val="lt1"/>
+          </a:fontRef>
+        </p:style>
+        <p:txBody>
+          <a:bodyPr rtlCol="0" anchor="ctr"/>
+          <a:lstStyle/>
+          <a:p>
+            <a:pPr algn="ctr"/>
+          </a:p>
+        </p:txBody>
+      </p:sp>
+      <p:sp>
+        <p:nvSpPr>
+          <p:cNvPr id="7" name="TextBox 6"/>
           <p:cNvSpPr txBox="1"/>
           <p:nvPr/>
         </p:nvSpPr>
@@ -13179,32 +11752,20 @@
           <a:prstGeom prst="rect">
             <a:avLst/>
           </a:prstGeom>
-          <a:ln w="12700">
-            <a:miter lim="400000"/>
-          </a:ln>
-          <a:extLst>
-            <a:ext uri="{C572A759-6A51-4108-AA02-DFA0A04FC94B}">
-              <ma14:wrappingTextBoxFlag xmlns:ma14="http://schemas.microsoft.com/office/mac/drawingml/2011/main" val="1"/>
-            </a:ext>
-          </a:extLst>
-        </p:spPr>
-        <p:txBody>
-          <a:bodyPr lIns="45719" rIns="45719">
+          <a:noFill/>
+        </p:spPr>
+        <p:txBody>
+          <a:bodyPr wrap="square">
             <a:spAutoFit/>
           </a:bodyPr>
-          <a:lstStyle>
-            <a:lvl1pPr>
-              <a:defRPr b="1" sz="2800">
+          <a:lstStyle/>
+          <a:p>
+            <a:r>
+              <a:rPr sz="2800" b="1">
                 <a:solidFill>
                   <a:srgbClr val="FFFFFF"/>
                 </a:solidFill>
-              </a:defRPr>
-            </a:lvl1pPr>
-          </a:lstStyle>
-          <a:p>
-            <a:pPr/>
-            <a:r>
-              <a:rPr/>
+              </a:rPr>
               <a:t>Where Ground Truth Lives</a:t>
             </a:r>
           </a:p>
@@ -13212,7 +11773,7 @@
       </p:sp>
       <p:sp>
         <p:nvSpPr>
-          <p:cNvPr id="174" name="TextBox 3"/>
+          <p:cNvPr id="8" name="TextBox 7"/>
           <p:cNvSpPr txBox="1"/>
           <p:nvPr/>
         </p:nvSpPr>
@@ -13224,161 +11785,53 @@
           <a:prstGeom prst="rect">
             <a:avLst/>
           </a:prstGeom>
-          <a:ln w="12700">
-            <a:miter lim="400000"/>
-          </a:ln>
-          <a:extLst>
-            <a:ext uri="{C572A759-6A51-4108-AA02-DFA0A04FC94B}">
-              <ma14:wrappingTextBoxFlag xmlns:ma14="http://schemas.microsoft.com/office/mac/drawingml/2011/main" val="1"/>
-            </a:ext>
-          </a:extLst>
-        </p:spPr>
-        <p:txBody>
-          <a:bodyPr lIns="45719" rIns="45719">
+          <a:noFill/>
+        </p:spPr>
+        <p:txBody>
+          <a:bodyPr wrap="square">
             <a:spAutoFit/>
           </a:bodyPr>
-          <a:lstStyle>
-            <a:lvl1pPr>
-              <a:defRPr sz="1600">
-                <a:solidFill>
-                  <a:srgbClr val="5A6B7E"/>
-                </a:solidFill>
-              </a:defRPr>
-            </a:lvl1pPr>
-          </a:lstStyle>
-          <a:p>
-            <a:pPr/>
-            <a:r>
-              <a:rPr/>
-              <a:t>Whatever you teach, someone already published it. Today's example: the MedEdPORTAL case, Section 4</a:t>
-            </a:r>
-          </a:p>
-        </p:txBody>
-      </p:sp>
-      <p:sp>
-        <p:nvSpPr>
-          <p:cNvPr id="175" name="Rectangle 4"/>
-          <p:cNvSpPr/>
-          <p:nvPr/>
-        </p:nvSpPr>
-        <p:spPr>
-          <a:xfrm>
-            <a:off x="457199" y="1371600"/>
-            <a:ext cx="11247122" cy="2743200"/>
-          </a:xfrm>
-          <a:prstGeom prst="rect">
-            <a:avLst/>
-          </a:prstGeom>
-          <a:solidFill>
-            <a:srgbClr val="F0F8F4"/>
-          </a:solidFill>
-          <a:ln w="12700">
-            <a:miter lim="400000"/>
-          </a:ln>
-          <a:effectLst>
-            <a:outerShdw sx="100000" sy="100000" kx="0" ky="0" algn="b" rotWithShape="0" blurRad="38100" dist="23000" dir="5400000">
-              <a:srgbClr val="000000">
-                <a:alpha val="35000"/>
-              </a:srgbClr>
-            </a:outerShdw>
-          </a:effectLst>
-        </p:spPr>
-        <p:txBody>
-          <a:bodyPr lIns="45719" rIns="45719" anchor="ctr"/>
-          <a:lstStyle/>
-          <a:p>
-            <a:pPr algn="ctr">
-              <a:defRPr>
-                <a:solidFill>
-                  <a:srgbClr val="FFFFFF"/>
-                </a:solidFill>
-              </a:defRPr>
-            </a:pPr>
-          </a:p>
-        </p:txBody>
-      </p:sp>
-      <p:sp>
-        <p:nvSpPr>
-          <p:cNvPr id="176" name="Rectangle 5"/>
-          <p:cNvSpPr/>
-          <p:nvPr/>
-        </p:nvSpPr>
-        <p:spPr>
-          <a:xfrm>
-            <a:off x="457200" y="1371600"/>
-            <a:ext cx="50800" cy="2743200"/>
-          </a:xfrm>
-          <a:prstGeom prst="rect">
-            <a:avLst/>
-          </a:prstGeom>
-          <a:solidFill>
-            <a:srgbClr val="2D8659"/>
-          </a:solidFill>
-          <a:ln w="12700">
-            <a:miter lim="400000"/>
-          </a:ln>
-          <a:effectLst>
-            <a:outerShdw sx="100000" sy="100000" kx="0" ky="0" algn="b" rotWithShape="0" blurRad="38100" dist="23000" dir="5400000">
-              <a:srgbClr val="000000">
-                <a:alpha val="35000"/>
-              </a:srgbClr>
-            </a:outerShdw>
-          </a:effectLst>
-        </p:spPr>
-        <p:txBody>
-          <a:bodyPr lIns="45719" rIns="45719" anchor="ctr"/>
-          <a:lstStyle/>
-          <a:p>
-            <a:pPr algn="ctr">
-              <a:defRPr>
-                <a:solidFill>
-                  <a:srgbClr val="FFFFFF"/>
-                </a:solidFill>
-              </a:defRPr>
-            </a:pPr>
-          </a:p>
-        </p:txBody>
-      </p:sp>
-      <p:sp>
-        <p:nvSpPr>
-          <p:cNvPr id="177" name="TextBox 6"/>
+          <a:lstStyle/>
+          <a:p>
+            <a:r>
+              <a:rPr sz="1600" b="0">
+                <a:solidFill>
+                  <a:srgbClr val="5B6B7C"/>
+                </a:solidFill>
+              </a:rPr>
+              <a:t>Whatever you teach, someone already published it</a:t>
+            </a:r>
+          </a:p>
+        </p:txBody>
+      </p:sp>
+      <p:sp>
+        <p:nvSpPr>
+          <p:cNvPr id="9" name="TextBox 8"/>
           <p:cNvSpPr txBox="1"/>
           <p:nvPr/>
         </p:nvSpPr>
         <p:spPr>
           <a:xfrm>
-            <a:off x="777239" y="1554480"/>
-            <a:ext cx="10424161" cy="320041"/>
-          </a:xfrm>
-          <a:prstGeom prst="rect">
-            <a:avLst/>
-          </a:prstGeom>
-          <a:ln w="12700">
-            <a:miter lim="400000"/>
-          </a:ln>
-          <a:extLst>
-            <a:ext uri="{C572A759-6A51-4108-AA02-DFA0A04FC94B}">
-              <ma14:wrappingTextBoxFlag xmlns:ma14="http://schemas.microsoft.com/office/mac/drawingml/2011/main" val="1"/>
-            </a:ext>
-          </a:extLst>
-        </p:spPr>
-        <p:txBody>
-          <a:bodyPr lIns="45719" rIns="45719">
+            <a:off x="960119" y="1554480"/>
+            <a:ext cx="4937762" cy="225708"/>
+          </a:xfrm>
+          <a:prstGeom prst="rect">
+            <a:avLst/>
+          </a:prstGeom>
+          <a:noFill/>
+        </p:spPr>
+        <p:txBody>
+          <a:bodyPr wrap="square">
             <a:spAutoFit/>
           </a:bodyPr>
-          <a:lstStyle>
-            <a:lvl1pPr>
-              <a:defRPr b="1" sz="1100">
-                <a:solidFill>
-                  <a:srgbClr val="2D8659"/>
-                </a:solidFill>
-              </a:defRPr>
-            </a:lvl1pPr>
-          </a:lstStyle>
-          <a:p>
-            <a:pPr/>
-            <a:r>
-              <a:rPr/>
+          <a:lstStyle/>
+          <a:p>
+            <a:r>
+              <a:rPr sz="1100" b="1">
+                <a:solidFill>
+                  <a:srgbClr val="2D5F7C"/>
+                </a:solidFill>
+              </a:rPr>
               <a:t>GROUNDING IS BUILT IN NOW</a:t>
             </a:r>
           </a:p>
@@ -13386,109 +11839,192 @@
       </p:sp>
       <p:sp>
         <p:nvSpPr>
-          <p:cNvPr id="178" name="TextBox 7"/>
+          <p:cNvPr id="10" name="TextBox 9"/>
           <p:cNvSpPr txBox="1"/>
           <p:nvPr/>
         </p:nvSpPr>
         <p:spPr>
           <a:xfrm>
-            <a:off x="777239" y="1920239"/>
-            <a:ext cx="10424161" cy="385377"/>
-          </a:xfrm>
-          <a:prstGeom prst="rect">
-            <a:avLst/>
-          </a:prstGeom>
-          <a:ln w="12700">
-            <a:miter lim="400000"/>
-          </a:ln>
-          <a:extLst>
-            <a:ext uri="{C572A759-6A51-4108-AA02-DFA0A04FC94B}">
-              <ma14:wrappingTextBoxFlag xmlns:ma14="http://schemas.microsoft.com/office/mac/drawingml/2011/main" val="1"/>
-            </a:ext>
-          </a:extLst>
-        </p:spPr>
-        <p:txBody>
-          <a:bodyPr lIns="45719" rIns="45719">
+            <a:off x="960119" y="1920239"/>
+            <a:ext cx="4937762" cy="2301589"/>
+          </a:xfrm>
+          <a:prstGeom prst="rect">
+            <a:avLst/>
+          </a:prstGeom>
+          <a:noFill/>
+        </p:spPr>
+        <p:txBody>
+          <a:bodyPr wrap="square">
             <a:spAutoFit/>
           </a:bodyPr>
-          <a:lstStyle>
-            <a:lvl1pPr>
-              <a:defRPr b="1" sz="2200">
-                <a:solidFill>
-                  <a:srgbClr val="1E4258"/>
-                </a:solidFill>
-              </a:defRPr>
-            </a:lvl1pPr>
-          </a:lstStyle>
-          <a:p>
-            <a:pPr/>
-            <a:r>
-              <a:rPr/>
-              <a:t>Your documents, any assistant</a:t>
-            </a:r>
-          </a:p>
-        </p:txBody>
-      </p:sp>
-      <p:sp>
-        <p:nvSpPr>
-          <p:cNvPr id="179" name="TextBox 8"/>
+          <a:lstStyle/>
+          <a:p>
+            <a:r>
+              <a:rPr sz="1800" b="0">
+                <a:solidFill>
+                  <a:srgbClr val="1A2332"/>
+                </a:solidFill>
+              </a:rPr>
+              <a:t>• ChatGPT Projects: your files and instructions</a:t>
+            </a:r>
+          </a:p>
+          <a:p>
+            <a:pPr>
+              <a:spcBef>
+                <a:spcPts val="1000"/>
+              </a:spcBef>
+            </a:pPr>
+            <a:r>
+              <a:rPr sz="1800" b="0">
+                <a:solidFill>
+                  <a:srgbClr val="1A2332"/>
+                </a:solidFill>
+              </a:rPr>
+              <a:t>• Claude: point a project at a folder</a:t>
+            </a:r>
+          </a:p>
+          <a:p>
+            <a:pPr>
+              <a:spcBef>
+                <a:spcPts val="1000"/>
+              </a:spcBef>
+            </a:pPr>
+            <a:r>
+              <a:rPr sz="1800" b="0">
+                <a:solidFill>
+                  <a:srgbClr val="1A2332"/>
+                </a:solidFill>
+              </a:rPr>
+              <a:t>• Gemini: grounded in your Google Drive</a:t>
+            </a:r>
+          </a:p>
+        </p:txBody>
+      </p:sp>
+      <p:sp>
+        <p:nvSpPr>
+          <p:cNvPr id="11" name="TextBox 10"/>
           <p:cNvSpPr txBox="1"/>
           <p:nvPr/>
         </p:nvSpPr>
         <p:spPr>
           <a:xfrm>
-            <a:off x="777239" y="2468879"/>
-            <a:ext cx="10424161" cy="1011795"/>
-          </a:xfrm>
-          <a:prstGeom prst="rect">
-            <a:avLst/>
-          </a:prstGeom>
-          <a:ln w="12700">
-            <a:miter lim="400000"/>
-          </a:ln>
-          <a:extLst>
-            <a:ext uri="{C572A759-6A51-4108-AA02-DFA0A04FC94B}">
-              <ma14:wrappingTextBoxFlag xmlns:ma14="http://schemas.microsoft.com/office/mac/drawingml/2011/main" val="1"/>
-            </a:ext>
-          </a:extLst>
-        </p:spPr>
-        <p:txBody>
-          <a:bodyPr lIns="45719" rIns="45719">
+            <a:off x="6903719" y="1554480"/>
+            <a:ext cx="4480562" cy="225708"/>
+          </a:xfrm>
+          <a:prstGeom prst="rect">
+            <a:avLst/>
+          </a:prstGeom>
+          <a:noFill/>
+        </p:spPr>
+        <p:txBody>
+          <a:bodyPr wrap="square">
             <a:spAutoFit/>
           </a:bodyPr>
           <a:lstStyle/>
           <a:p>
+            <a:r>
+              <a:rPr sz="1100" b="1">
+                <a:solidFill>
+                  <a:srgbClr val="E8833A"/>
+                </a:solidFill>
+              </a:rPr>
+              <a:t>TODAY'S RUNNING EXAMPLE</a:t>
+            </a:r>
+          </a:p>
+        </p:txBody>
+      </p:sp>
+      <p:sp>
+        <p:nvSpPr>
+          <p:cNvPr id="12" name="TextBox 11"/>
+          <p:cNvSpPr txBox="1"/>
+          <p:nvPr/>
+        </p:nvSpPr>
+        <p:spPr>
+          <a:xfrm>
+            <a:off x="6903719" y="1920239"/>
+            <a:ext cx="4480562" cy="2301589"/>
+          </a:xfrm>
+          <a:prstGeom prst="rect">
+            <a:avLst/>
+          </a:prstGeom>
+          <a:noFill/>
+        </p:spPr>
+        <p:txBody>
+          <a:bodyPr wrap="square">
+            <a:spAutoFit/>
+          </a:bodyPr>
+          <a:lstStyle/>
+          <a:p>
+            <a:r>
+              <a:rPr sz="1800" b="0">
+                <a:solidFill>
+                  <a:srgbClr val="1A2332"/>
+                </a:solidFill>
+              </a:rPr>
+              <a:t>A published MedEdPORTAL case: sore throat to peritonsillar abscess, with a benzocaine twist.</a:t>
+            </a:r>
+          </a:p>
+          <a:p>
             <a:pPr>
               <a:spcBef>
-                <a:spcPts val="800"/>
+                <a:spcPts val="1000"/>
               </a:spcBef>
-              <a:defRPr sz="1600">
+            </a:pPr>
+            <a:r>
+              <a:rPr sz="1800" b="0">
                 <a:solidFill>
                   <a:srgbClr val="1A2332"/>
                 </a:solidFill>
-              </a:defRPr>
+              </a:rPr>
+              <a:t>Six files, peer-reviewed, downloadable in the guide.</a:t>
+            </a:r>
+          </a:p>
+          <a:p>
+            <a:pPr>
+              <a:spcBef>
+                <a:spcPts val="1000"/>
+              </a:spcBef>
             </a:pPr>
             <a:r>
-              <a:rPr/>
-              <a:t>• ChatGPT Projects: your files + instructions in one workspace</a:t>
-            </a:r>
-          </a:p>
-          <a:p>
-            <a:r>
-              <a:rPr/>
-              <a:t>• Claude: point a project at a folder on your computer</a:t>
-            </a:r>
-          </a:p>
-          <a:p>
-            <a:r>
-              <a:rPr/>
-              <a:t>• Gemini: grounded in your Google Drive</a:t>
-            </a:r>
-          </a:p>
-          <a:p>
-            <a:r>
-              <a:rPr/>
-              <a:t>• NotebookLM: one easy, dedicated example. We demo it today.</a:t>
+              <a:rPr sz="1800" b="0">
+                <a:solidFill>
+                  <a:srgbClr val="1A2332"/>
+                </a:solidFill>
+              </a:rPr>
+              <a:t>NotebookLM is one easy dedicated example, demoing next.</a:t>
+            </a:r>
+          </a:p>
+        </p:txBody>
+      </p:sp>
+      <p:sp>
+        <p:nvSpPr>
+          <p:cNvPr id="13" name="TextBox 12"/>
+          <p:cNvSpPr txBox="1"/>
+          <p:nvPr/>
+        </p:nvSpPr>
+        <p:spPr>
+          <a:xfrm>
+            <a:off x="502919" y="5303520"/>
+            <a:ext cx="11155682" cy="300594"/>
+          </a:xfrm>
+          <a:prstGeom prst="rect">
+            <a:avLst/>
+          </a:prstGeom>
+          <a:noFill/>
+        </p:spPr>
+        <p:txBody>
+          <a:bodyPr wrap="square">
+            <a:spAutoFit/>
+          </a:bodyPr>
+          <a:lstStyle/>
+          <a:p>
+            <a:r>
+              <a:rPr sz="1600" b="0">
+                <a:solidFill>
+                  <a:srgbClr val="0000FF"/>
+                </a:solidFill>
+              </a:rPr>
+              <a:t>Workshop Guide → Sections 3 and 4 (tools, sources, case files)</a:t>
             </a:r>
           </a:p>
         </p:txBody>

--- a/Digital Learning Unlocked - Slide Deck.pptx
+++ b/Digital Learning Unlocked - Slide Deck.pptx
@@ -5904,7 +5904,7 @@
                   <a:srgbClr val="1A2332"/>
                 </a:solidFill>
               </a:rPr>
-              <a:t>• Text and audio, free</a:t>
+              <a:t>• Text and audio, $0 to $20/mo</a:t>
             </a:r>
           </a:p>
           <a:p>
@@ -6107,7 +6107,7 @@
 </p:sld>
 </file>
 
-<file path=ppt/slides/slide16.xml><?xml version="1.0" encoding="utf-8"?>
+<file path=ppt/slides/slide15.xml><?xml version="1.0" encoding="utf-8"?>
 <p:sld xmlns:a="http://schemas.openxmlformats.org/drawingml/2006/main" xmlns:r="http://schemas.openxmlformats.org/officeDocument/2006/relationships" xmlns:p="http://schemas.openxmlformats.org/presentationml/2006/main" xmlns:m="http://schemas.openxmlformats.org/officeDocument/2006/math" xmlns:a14="http://schemas.microsoft.com/office/drawing/2010/main" showMasterSp="1" showMasterPhAnim="1">
   <p:cSld>
     <p:spTree>
@@ -6379,7 +6379,7 @@
 </p:sld>
 </file>
 
-<file path=ppt/slides/slide17.xml><?xml version="1.0" encoding="utf-8"?>
+<file path=ppt/slides/slide16.xml><?xml version="1.0" encoding="utf-8"?>
 <p:sld xmlns:a="http://schemas.openxmlformats.org/drawingml/2006/main" xmlns:r="http://schemas.openxmlformats.org/officeDocument/2006/relationships" xmlns:p="http://schemas.openxmlformats.org/presentationml/2006/main" xmlns:m="http://schemas.openxmlformats.org/officeDocument/2006/math" xmlns:a14="http://schemas.microsoft.com/office/drawing/2010/main" showMasterSp="1" showMasterPhAnim="1">
   <p:cSld>
     <p:spTree>
@@ -7961,6 +7961,278 @@
 </p:sld>
 </file>
 
+<file path=ppt/slides/slide17.xml><?xml version="1.0" encoding="utf-8"?>
+<p:sld xmlns:a="http://schemas.openxmlformats.org/drawingml/2006/main" xmlns:r="http://schemas.openxmlformats.org/officeDocument/2006/relationships" xmlns:p="http://schemas.openxmlformats.org/presentationml/2006/main" xmlns:m="http://schemas.openxmlformats.org/officeDocument/2006/math" xmlns:a14="http://schemas.microsoft.com/office/drawing/2010/main" showMasterSp="1" showMasterPhAnim="1">
+  <p:cSld>
+    <p:spTree>
+      <p:nvGrpSpPr>
+        <p:cNvPr id="1" name=""/>
+        <p:cNvGrpSpPr/>
+        <p:nvPr/>
+      </p:nvGrpSpPr>
+      <p:grpSpPr>
+        <a:xfrm>
+          <a:off x="0" y="0"/>
+          <a:ext cx="0" cy="0"/>
+          <a:chOff x="0" y="0"/>
+          <a:chExt cx="0" cy="0"/>
+        </a:xfrm>
+      </p:grpSpPr>
+      <p:sp>
+        <p:nvSpPr>
+          <p:cNvPr id="2" name="Rectangle 1"/>
+          <p:cNvSpPr/>
+          <p:nvPr/>
+        </p:nvSpPr>
+        <p:spPr>
+          <a:xfrm>
+            <a:off x="-1" y="0"/>
+            <a:ext cx="12191697" cy="1005839"/>
+          </a:xfrm>
+          <a:prstGeom prst="rect">
+            <a:avLst/>
+          </a:prstGeom>
+          <a:solidFill>
+            <a:srgbClr val="2D5F7C"/>
+          </a:solidFill>
+          <a:ln>
+            <a:noFill/>
+          </a:ln>
+          <a:effectLst/>
+        </p:spPr>
+        <p:style>
+          <a:lnRef idx="1">
+            <a:schemeClr val="accent1"/>
+          </a:lnRef>
+          <a:fillRef idx="3">
+            <a:schemeClr val="accent1"/>
+          </a:fillRef>
+          <a:effectRef idx="2">
+            <a:schemeClr val="accent1"/>
+          </a:effectRef>
+          <a:fontRef idx="minor">
+            <a:schemeClr val="lt1"/>
+          </a:fontRef>
+        </p:style>
+        <p:txBody>
+          <a:bodyPr rtlCol="0" anchor="ctr"/>
+          <a:lstStyle/>
+          <a:p>
+            <a:pPr algn="ctr"/>
+          </a:p>
+        </p:txBody>
+      </p:sp>
+      <p:sp>
+        <p:nvSpPr>
+          <p:cNvPr id="3" name="Rectangle 2"/>
+          <p:cNvSpPr/>
+          <p:nvPr/>
+        </p:nvSpPr>
+        <p:spPr>
+          <a:xfrm>
+            <a:off x="640080" y="1371600"/>
+            <a:ext cx="10972801" cy="3657600"/>
+          </a:xfrm>
+          <a:prstGeom prst="rect">
+            <a:avLst/>
+          </a:prstGeom>
+          <a:solidFill>
+            <a:srgbClr val="F0F4F8"/>
+          </a:solidFill>
+          <a:ln>
+            <a:noFill/>
+          </a:ln>
+          <a:effectLst/>
+        </p:spPr>
+        <p:style>
+          <a:lnRef idx="1">
+            <a:schemeClr val="accent1"/>
+          </a:lnRef>
+          <a:fillRef idx="3">
+            <a:schemeClr val="accent1"/>
+          </a:fillRef>
+          <a:effectRef idx="2">
+            <a:schemeClr val="accent1"/>
+          </a:effectRef>
+          <a:fontRef idx="minor">
+            <a:schemeClr val="lt1"/>
+          </a:fontRef>
+        </p:style>
+        <p:txBody>
+          <a:bodyPr rtlCol="0" anchor="ctr"/>
+          <a:lstStyle/>
+          <a:p>
+            <a:pPr algn="ctr"/>
+          </a:p>
+        </p:txBody>
+      </p:sp>
+      <p:sp>
+        <p:nvSpPr>
+          <p:cNvPr id="4" name="Rectangle 3"/>
+          <p:cNvSpPr/>
+          <p:nvPr/>
+        </p:nvSpPr>
+        <p:spPr>
+          <a:xfrm>
+            <a:off x="640080" y="1371600"/>
+            <a:ext cx="50801" cy="3657600"/>
+          </a:xfrm>
+          <a:prstGeom prst="rect">
+            <a:avLst/>
+          </a:prstGeom>
+          <a:solidFill>
+            <a:srgbClr val="2D5F7C"/>
+          </a:solidFill>
+          <a:ln>
+            <a:noFill/>
+          </a:ln>
+          <a:effectLst/>
+        </p:spPr>
+        <p:style>
+          <a:lnRef idx="1">
+            <a:schemeClr val="accent1"/>
+          </a:lnRef>
+          <a:fillRef idx="3">
+            <a:schemeClr val="accent1"/>
+          </a:fillRef>
+          <a:effectRef idx="2">
+            <a:schemeClr val="accent1"/>
+          </a:effectRef>
+          <a:fontRef idx="minor">
+            <a:schemeClr val="lt1"/>
+          </a:fontRef>
+        </p:style>
+        <p:txBody>
+          <a:bodyPr rtlCol="0" anchor="ctr"/>
+          <a:lstStyle/>
+          <a:p>
+            <a:pPr algn="ctr"/>
+          </a:p>
+        </p:txBody>
+      </p:sp>
+      <p:sp>
+        <p:nvSpPr>
+          <p:cNvPr id="5" name="TextBox 4"/>
+          <p:cNvSpPr txBox="1"/>
+          <p:nvPr/>
+        </p:nvSpPr>
+        <p:spPr>
+          <a:xfrm>
+            <a:off x="502919" y="182879"/>
+            <a:ext cx="11155682" cy="444759"/>
+          </a:xfrm>
+          <a:prstGeom prst="rect">
+            <a:avLst/>
+          </a:prstGeom>
+          <a:noFill/>
+        </p:spPr>
+        <p:txBody>
+          <a:bodyPr wrap="square">
+            <a:spAutoFit/>
+          </a:bodyPr>
+          <a:lstStyle/>
+          <a:p>
+            <a:r>
+              <a:rPr sz="2800" b="1">
+                <a:solidFill>
+                  <a:srgbClr val="FFFFFF"/>
+                </a:solidFill>
+              </a:rPr>
+              <a:t>Share-Out (4 min)</a:t>
+            </a:r>
+          </a:p>
+        </p:txBody>
+      </p:sp>
+      <p:sp>
+        <p:nvSpPr>
+          <p:cNvPr id="6" name="TextBox 5"/>
+          <p:cNvSpPr txBox="1"/>
+          <p:nvPr/>
+        </p:nvSpPr>
+        <p:spPr>
+          <a:xfrm>
+            <a:off x="1143000" y="1828800"/>
+            <a:ext cx="9966961" cy="1985576"/>
+          </a:xfrm>
+          <a:prstGeom prst="rect">
+            <a:avLst/>
+          </a:prstGeom>
+          <a:noFill/>
+        </p:spPr>
+        <p:txBody>
+          <a:bodyPr wrap="square">
+            <a:spAutoFit/>
+          </a:bodyPr>
+          <a:lstStyle/>
+          <a:p>
+            <a:r>
+              <a:rPr sz="2200" b="0">
+                <a:solidFill>
+                  <a:srgbClr val="1E4258"/>
+                </a:solidFill>
+              </a:rPr>
+              <a:t>Two or three groups share their plan, 60 seconds each.</a:t>
+            </a:r>
+          </a:p>
+          <a:p>
+            <a:pPr>
+              <a:spcBef>
+                <a:spcPts val="1600"/>
+              </a:spcBef>
+            </a:pPr>
+            <a:r>
+              <a:rPr sz="2200" b="0">
+                <a:solidFill>
+                  <a:srgbClr val="1E4258"/>
+                </a:solidFill>
+              </a:rPr>
+              <a:t>What is your educational need? Your tool? Your first step?</a:t>
+            </a:r>
+          </a:p>
+        </p:txBody>
+      </p:sp>
+      <p:sp>
+        <p:nvSpPr>
+          <p:cNvPr id="7" name="TextBox 6"/>
+          <p:cNvSpPr txBox="1"/>
+          <p:nvPr/>
+        </p:nvSpPr>
+        <p:spPr>
+          <a:xfrm>
+            <a:off x="1143000" y="5303520"/>
+            <a:ext cx="9966961" cy="300594"/>
+          </a:xfrm>
+          <a:prstGeom prst="rect">
+            <a:avLst/>
+          </a:prstGeom>
+          <a:noFill/>
+        </p:spPr>
+        <p:txBody>
+          <a:bodyPr wrap="square">
+            <a:spAutoFit/>
+          </a:bodyPr>
+          <a:lstStyle/>
+          <a:p>
+            <a:r>
+              <a:rPr sz="1600" b="0">
+                <a:solidFill>
+                  <a:srgbClr val="0000FF"/>
+                </a:solidFill>
+              </a:rPr>
+              <a:t>Workshop Guide → Section 7 (the worksheet)</a:t>
+            </a:r>
+          </a:p>
+        </p:txBody>
+      </p:sp>
+    </p:spTree>
+  </p:cSld>
+  <p:clrMapOvr>
+    <a:masterClrMapping/>
+  </p:clrMapOvr>
+  <p:transition xmlns:p14="http://schemas.microsoft.com/office/powerpoint/2010/main" spd="med" advClick="1"/>
+</p:sld>
+</file>
+
 <file path=ppt/slides/slide18.xml><?xml version="1.0" encoding="utf-8"?>
 <p:sld xmlns:a="http://schemas.openxmlformats.org/drawingml/2006/main" xmlns:r="http://schemas.openxmlformats.org/officeDocument/2006/relationships" xmlns:p="http://schemas.openxmlformats.org/presentationml/2006/main" xmlns:m="http://schemas.openxmlformats.org/officeDocument/2006/math" xmlns:a14="http://schemas.microsoft.com/office/drawing/2010/main" showMasterSp="1" showMasterPhAnim="1">
   <p:cSld>
@@ -8138,7 +8410,7 @@
                   <a:srgbClr val="FFFFFF"/>
                 </a:solidFill>
               </a:rPr>
-              <a:t>Share-Out (4 min)</a:t>
+              <a:t>Wrap-Up</a:t>
             </a:r>
           </a:p>
         </p:txBody>
@@ -8171,7 +8443,7 @@
                   <a:srgbClr val="1E4258"/>
                 </a:solidFill>
               </a:rPr>
-              <a:t>Two or three groups share their plan, 60 seconds each.</a:t>
+              <a:t>Start with one tool, one need, one small experiment.</a:t>
             </a:r>
           </a:p>
           <a:p>
@@ -8186,7 +8458,22 @@
                   <a:srgbClr val="1E4258"/>
                 </a:solidFill>
               </a:rPr>
-              <a:t>What is your educational need? Your tool? Your first step?</a:t>
+              <a:t>Everything from today is in the Workshop Guide: bookmark it now.</a:t>
+            </a:r>
+          </a:p>
+          <a:p>
+            <a:pPr>
+              <a:spcBef>
+                <a:spcPts val="1600"/>
+              </a:spcBef>
+            </a:pPr>
+            <a:r>
+              <a:rPr sz="2200" b="0">
+                <a:solidFill>
+                  <a:srgbClr val="1E4258"/>
+                </a:solidFill>
+              </a:rPr>
+              <a:t>The Zero Dollar starter kit is in Section 8.</a:t>
             </a:r>
           </a:p>
         </p:txBody>
@@ -8219,7 +8506,7 @@
                   <a:srgbClr val="0000FF"/>
                 </a:solidFill>
               </a:rPr>
-              <a:t>Workshop Guide → Section 7 (the worksheet)</a:t>
+              <a:t>Workshop Guide → Section 8 (all resources)</a:t>
             </a:r>
           </a:p>
         </p:txBody>
@@ -8236,6 +8523,13 @@
 <file path=ppt/slides/slide19.xml><?xml version="1.0" encoding="utf-8"?>
 <p:sld xmlns:a="http://schemas.openxmlformats.org/drawingml/2006/main" xmlns:r="http://schemas.openxmlformats.org/officeDocument/2006/relationships" xmlns:p="http://schemas.openxmlformats.org/presentationml/2006/main" xmlns:m="http://schemas.openxmlformats.org/officeDocument/2006/math" xmlns:a14="http://schemas.microsoft.com/office/drawing/2010/main" showMasterSp="1" showMasterPhAnim="1">
   <p:cSld>
+    <p:bg>
+      <p:bgPr>
+        <a:solidFill>
+          <a:srgbClr val="1E4258"/>
+        </a:solidFill>
+      </p:bgPr>
+    </p:bg>
     <p:spTree>
       <p:nvGrpSpPr>
         <p:cNvPr id="1" name=""/>
@@ -8252,146 +8546,274 @@
       </p:grpSpPr>
       <p:sp>
         <p:nvSpPr>
-          <p:cNvPr id="2" name="Rectangle 1"/>
+          <p:cNvPr id="433" name="Rectangle 1"/>
           <p:cNvSpPr/>
           <p:nvPr/>
         </p:nvSpPr>
         <p:spPr>
           <a:xfrm>
-            <a:off x="-1" y="0"/>
-            <a:ext cx="12191697" cy="1005839"/>
+            <a:off x="-1" y="5943600"/>
+            <a:ext cx="12191697" cy="914400"/>
           </a:xfrm>
           <a:prstGeom prst="rect">
             <a:avLst/>
           </a:prstGeom>
           <a:solidFill>
-            <a:srgbClr val="2D5F7C"/>
+            <a:srgbClr val="E8833A"/>
           </a:solidFill>
-          <a:ln>
-            <a:noFill/>
+          <a:ln w="12700">
+            <a:miter lim="400000"/>
           </a:ln>
-          <a:effectLst/>
-        </p:spPr>
-        <p:style>
-          <a:lnRef idx="1">
-            <a:schemeClr val="accent1"/>
-          </a:lnRef>
-          <a:fillRef idx="3">
-            <a:schemeClr val="accent1"/>
-          </a:fillRef>
-          <a:effectRef idx="2">
-            <a:schemeClr val="accent1"/>
-          </a:effectRef>
-          <a:fontRef idx="minor">
-            <a:schemeClr val="lt1"/>
-          </a:fontRef>
-        </p:style>
-        <p:txBody>
-          <a:bodyPr rtlCol="0" anchor="ctr"/>
-          <a:lstStyle/>
-          <a:p>
-            <a:pPr algn="ctr"/>
-          </a:p>
-        </p:txBody>
-      </p:sp>
-      <p:sp>
-        <p:nvSpPr>
-          <p:cNvPr id="3" name="Rectangle 2"/>
-          <p:cNvSpPr/>
-          <p:nvPr/>
-        </p:nvSpPr>
-        <p:spPr>
-          <a:xfrm>
-            <a:off x="640080" y="1371600"/>
-            <a:ext cx="10972801" cy="3657600"/>
-          </a:xfrm>
-          <a:prstGeom prst="rect">
-            <a:avLst/>
-          </a:prstGeom>
-          <a:solidFill>
-            <a:srgbClr val="F0F4F8"/>
-          </a:solidFill>
-          <a:ln>
-            <a:noFill/>
+          <a:effectLst>
+            <a:outerShdw sx="100000" sy="100000" kx="0" ky="0" algn="b" rotWithShape="0" blurRad="38100" dist="23000" dir="5400000">
+              <a:srgbClr val="000000">
+                <a:alpha val="35000"/>
+              </a:srgbClr>
+            </a:outerShdw>
+          </a:effectLst>
+        </p:spPr>
+        <p:txBody>
+          <a:bodyPr lIns="45719" rIns="45719" anchor="ctr"/>
+          <a:lstStyle/>
+          <a:p>
+            <a:pPr algn="ctr">
+              <a:defRPr>
+                <a:solidFill>
+                  <a:srgbClr val="FFFFFF"/>
+                </a:solidFill>
+              </a:defRPr>
+            </a:pPr>
+          </a:p>
+        </p:txBody>
+      </p:sp>
+      <p:sp>
+        <p:nvSpPr>
+          <p:cNvPr id="434" name="TextBox 2"/>
+          <p:cNvSpPr txBox="1"/>
+          <p:nvPr/>
+        </p:nvSpPr>
+        <p:spPr>
+          <a:xfrm>
+            <a:off x="960119" y="1828800"/>
+            <a:ext cx="10241282" cy="601623"/>
+          </a:xfrm>
+          <a:prstGeom prst="rect">
+            <a:avLst/>
+          </a:prstGeom>
+          <a:ln w="12700">
+            <a:miter lim="400000"/>
           </a:ln>
-          <a:effectLst/>
-        </p:spPr>
-        <p:style>
-          <a:lnRef idx="1">
-            <a:schemeClr val="accent1"/>
-          </a:lnRef>
-          <a:fillRef idx="3">
-            <a:schemeClr val="accent1"/>
-          </a:fillRef>
-          <a:effectRef idx="2">
-            <a:schemeClr val="accent1"/>
-          </a:effectRef>
-          <a:fontRef idx="minor">
-            <a:schemeClr val="lt1"/>
-          </a:fontRef>
-        </p:style>
-        <p:txBody>
-          <a:bodyPr rtlCol="0" anchor="ctr"/>
-          <a:lstStyle/>
-          <a:p>
-            <a:pPr algn="ctr"/>
-          </a:p>
-        </p:txBody>
-      </p:sp>
-      <p:sp>
-        <p:nvSpPr>
-          <p:cNvPr id="4" name="Rectangle 3"/>
-          <p:cNvSpPr/>
-          <p:nvPr/>
-        </p:nvSpPr>
-        <p:spPr>
-          <a:xfrm>
-            <a:off x="640080" y="1371600"/>
-            <a:ext cx="50801" cy="3657600"/>
-          </a:xfrm>
-          <a:prstGeom prst="rect">
-            <a:avLst/>
-          </a:prstGeom>
-          <a:solidFill>
-            <a:srgbClr val="2D5F7C"/>
-          </a:solidFill>
-          <a:ln>
-            <a:noFill/>
+          <a:extLst>
+            <a:ext uri="{C572A759-6A51-4108-AA02-DFA0A04FC94B}">
+              <ma14:wrappingTextBoxFlag xmlns:ma14="http://schemas.microsoft.com/office/mac/drawingml/2011/main" val="1"/>
+            </a:ext>
+          </a:extLst>
+        </p:spPr>
+        <p:txBody>
+          <a:bodyPr lIns="45719" rIns="45719">
+            <a:spAutoFit/>
+          </a:bodyPr>
+          <a:lstStyle>
+            <a:lvl1pPr algn="ctr">
+              <a:defRPr b="1" sz="4000">
+                <a:solidFill>
+                  <a:srgbClr val="FFFFFF"/>
+                </a:solidFill>
+              </a:defRPr>
+            </a:lvl1pPr>
+          </a:lstStyle>
+          <a:p>
+            <a:pPr/>
+            <a:r>
+              <a:t>Thank You</a:t>
+            </a:r>
+          </a:p>
+        </p:txBody>
+      </p:sp>
+      <p:sp>
+        <p:nvSpPr>
+          <p:cNvPr id="435" name="TextBox 3"/>
+          <p:cNvSpPr txBox="1"/>
+          <p:nvPr/>
+        </p:nvSpPr>
+        <p:spPr>
+          <a:xfrm>
+            <a:off x="960119" y="2926079"/>
+            <a:ext cx="10241282" cy="340183"/>
+          </a:xfrm>
+          <a:prstGeom prst="rect">
+            <a:avLst/>
+          </a:prstGeom>
+          <a:ln w="12700">
+            <a:miter lim="400000"/>
           </a:ln>
-          <a:effectLst/>
-        </p:spPr>
-        <p:style>
-          <a:lnRef idx="1">
-            <a:schemeClr val="accent1"/>
-          </a:lnRef>
-          <a:fillRef idx="3">
-            <a:schemeClr val="accent1"/>
-          </a:fillRef>
-          <a:effectRef idx="2">
-            <a:schemeClr val="accent1"/>
-          </a:effectRef>
-          <a:fontRef idx="minor">
-            <a:schemeClr val="lt1"/>
-          </a:fontRef>
-        </p:style>
-        <p:txBody>
-          <a:bodyPr rtlCol="0" anchor="ctr"/>
-          <a:lstStyle/>
-          <a:p>
-            <a:pPr algn="ctr"/>
-          </a:p>
-        </p:txBody>
-      </p:sp>
-      <p:sp>
-        <p:nvSpPr>
-          <p:cNvPr id="5" name="TextBox 4"/>
+          <a:extLst>
+            <a:ext uri="{C572A759-6A51-4108-AA02-DFA0A04FC94B}">
+              <ma14:wrappingTextBoxFlag xmlns:ma14="http://schemas.microsoft.com/office/mac/drawingml/2011/main" val="1"/>
+            </a:ext>
+          </a:extLst>
+        </p:spPr>
+        <p:txBody>
+          <a:bodyPr lIns="45719" rIns="45719">
+            <a:spAutoFit/>
+          </a:bodyPr>
+          <a:lstStyle>
+            <a:lvl1pPr algn="ctr">
+              <a:defRPr sz="2000">
+                <a:solidFill>
+                  <a:srgbClr val="F4A55A"/>
+                </a:solidFill>
+              </a:defRPr>
+            </a:lvl1pPr>
+          </a:lstStyle>
+          <a:p>
+            <a:pPr/>
+            <a:r>
+              <a:t>Diana Brewer, PA-C</a:t>
+            </a:r>
+          </a:p>
+        </p:txBody>
+      </p:sp>
+      <p:sp>
+        <p:nvSpPr>
+          <p:cNvPr id="436" name="TextBox 4"/>
           <p:cNvSpPr txBox="1"/>
           <p:nvPr/>
         </p:nvSpPr>
         <p:spPr>
           <a:xfrm>
-            <a:off x="502919" y="182879"/>
-            <a:ext cx="11155682" cy="444759"/>
+            <a:off x="960119" y="3474720"/>
+            <a:ext cx="10241282" cy="300594"/>
+          </a:xfrm>
+          <a:prstGeom prst="rect">
+            <a:avLst/>
+          </a:prstGeom>
+          <a:ln w="12700">
+            <a:miter lim="400000"/>
+          </a:ln>
+          <a:extLst>
+            <a:ext uri="{C572A759-6A51-4108-AA02-DFA0A04FC94B}">
+              <ma14:wrappingTextBoxFlag xmlns:ma14="http://schemas.microsoft.com/office/mac/drawingml/2011/main" val="1"/>
+            </a:ext>
+          </a:extLst>
+        </p:spPr>
+        <p:txBody>
+          <a:bodyPr lIns="45719" rIns="45719">
+            <a:spAutoFit/>
+          </a:bodyPr>
+          <a:lstStyle>
+            <a:lvl1pPr algn="ctr">
+              <a:defRPr sz="1600">
+                <a:solidFill>
+                  <a:srgbClr val="FFFFFF"/>
+                </a:solidFill>
+              </a:defRPr>
+            </a:lvl1pPr>
+          </a:lstStyle>
+          <a:p>
+            <a:pPr/>
+            <a:r>
+              <a:t>Knight Cancer Institute Hem/Onc APP Fellowship Director, OHSU  ·  Co-Founder &amp; CMO, Sapient Clinician</a:t>
+            </a:r>
+          </a:p>
+        </p:txBody>
+      </p:sp>
+      <p:sp>
+        <p:nvSpPr>
+          <p:cNvPr id="437" name="TextBox 5"/>
+          <p:cNvSpPr txBox="1"/>
+          <p:nvPr/>
+        </p:nvSpPr>
+        <p:spPr>
+          <a:xfrm>
+            <a:off x="2788920" y="4114800"/>
+            <a:ext cx="6583679" cy="300594"/>
+          </a:xfrm>
+          <a:prstGeom prst="rect">
+            <a:avLst/>
+          </a:prstGeom>
+          <a:ln w="12700">
+            <a:miter lim="400000"/>
+          </a:ln>
+          <a:extLst>
+            <a:ext uri="{C572A759-6A51-4108-AA02-DFA0A04FC94B}">
+              <ma14:wrappingTextBoxFlag xmlns:ma14="http://schemas.microsoft.com/office/mac/drawingml/2011/main" val="1"/>
+            </a:ext>
+          </a:extLst>
+        </p:spPr>
+        <p:txBody>
+          <a:bodyPr lIns="45719" rIns="45719">
+            <a:spAutoFit/>
+          </a:bodyPr>
+          <a:lstStyle>
+            <a:lvl1pPr algn="ctr">
+              <a:defRPr sz="1600" u="sng">
+                <a:solidFill>
+                  <a:srgbClr val="FFFFFF"/>
+                </a:solidFill>
+                <a:uFill>
+                  <a:solidFill>
+                    <a:srgbClr val="0000FF"/>
+                  </a:solidFill>
+                </a:uFill>
+                <a:hlinkClick r:id="rId2" invalidUrl="" action="" tgtFrame="" tooltip="" history="1" highlightClick="0" endSnd="0"/>
+              </a:defRPr>
+            </a:lvl1pPr>
+          </a:lstStyle>
+          <a:p>
+            <a:pPr>
+              <a:defRPr u="none">
+                <a:uFillTx/>
+              </a:defRPr>
+            </a:pPr>
+            <a:r>
+              <a:rPr u="sng">
+                <a:uFill>
+                  <a:solidFill>
+                    <a:srgbClr val="0000FF"/>
+                  </a:solidFill>
+                </a:uFill>
+                <a:hlinkClick r:id="rId2" invalidUrl="" action="" tgtFrame="" tooltip="" history="1" highlightClick="0" endSnd="0"/>
+              </a:rPr>
+              <a:t>brewerd@ohsu.edu</a:t>
+            </a:r>
+          </a:p>
+        </p:txBody>
+      </p:sp>
+      <p:pic>
+        <p:nvPicPr>
+          <p:cNvPr id="438" name="Picture 437" descr="workshop-guide-qr.png"/>
+          <p:cNvPicPr>
+            <a:picLocks noChangeAspect="1"/>
+          </p:cNvPicPr>
+          <p:nvPr/>
+        </p:nvPicPr>
+        <p:blipFill>
+          <a:blip r:embed="rId3"/>
+          <a:stretch>
+            <a:fillRect/>
+          </a:stretch>
+        </p:blipFill>
+        <p:spPr>
+          <a:xfrm>
+            <a:off x="9144000" y="2331720"/>
+            <a:ext cx="1828800" cy="1828800"/>
+          </a:xfrm>
+          <a:prstGeom prst="rect">
+            <a:avLst/>
+          </a:prstGeom>
+        </p:spPr>
+      </p:pic>
+      <p:sp>
+        <p:nvSpPr>
+          <p:cNvPr id="439" name="TextBox 438"/>
+          <p:cNvSpPr txBox="1"/>
+          <p:nvPr/>
+        </p:nvSpPr>
+        <p:spPr>
+          <a:xfrm>
+            <a:off x="8503920" y="4315968"/>
+            <a:ext cx="3108960" cy="320040"/>
           </a:xfrm>
           <a:prstGeom prst="rect">
             <a:avLst/>
@@ -8404,109 +8826,15 @@
           </a:bodyPr>
           <a:lstStyle/>
           <a:p>
-            <a:r>
-              <a:rPr sz="2800" b="1">
-                <a:solidFill>
-                  <a:srgbClr val="FFFFFF"/>
-                </a:solidFill>
+            <a:pPr algn="ctr"/>
+            <a:r>
+              <a:rPr sz="1400">
+                <a:solidFill>
+                  <a:srgbClr val="1E4258"/>
+                </a:solidFill>
+                <a:latin typeface="Arial"/>
               </a:rPr>
-              <a:t>Wrap-Up</a:t>
-            </a:r>
-          </a:p>
-        </p:txBody>
-      </p:sp>
-      <p:sp>
-        <p:nvSpPr>
-          <p:cNvPr id="6" name="TextBox 5"/>
-          <p:cNvSpPr txBox="1"/>
-          <p:nvPr/>
-        </p:nvSpPr>
-        <p:spPr>
-          <a:xfrm>
-            <a:off x="1143000" y="1828800"/>
-            <a:ext cx="9966961" cy="1985576"/>
-          </a:xfrm>
-          <a:prstGeom prst="rect">
-            <a:avLst/>
-          </a:prstGeom>
-          <a:noFill/>
-        </p:spPr>
-        <p:txBody>
-          <a:bodyPr wrap="square">
-            <a:spAutoFit/>
-          </a:bodyPr>
-          <a:lstStyle/>
-          <a:p>
-            <a:r>
-              <a:rPr sz="2200" b="0">
-                <a:solidFill>
-                  <a:srgbClr val="1E4258"/>
-                </a:solidFill>
-              </a:rPr>
-              <a:t>Start with one tool, one need, one small experiment.</a:t>
-            </a:r>
-          </a:p>
-          <a:p>
-            <a:pPr>
-              <a:spcBef>
-                <a:spcPts val="1600"/>
-              </a:spcBef>
-            </a:pPr>
-            <a:r>
-              <a:rPr sz="2200" b="0">
-                <a:solidFill>
-                  <a:srgbClr val="1E4258"/>
-                </a:solidFill>
-              </a:rPr>
-              <a:t>Everything from today is in the Workshop Guide: bookmark it now.</a:t>
-            </a:r>
-          </a:p>
-          <a:p>
-            <a:pPr>
-              <a:spcBef>
-                <a:spcPts val="1600"/>
-              </a:spcBef>
-            </a:pPr>
-            <a:r>
-              <a:rPr sz="2200" b="0">
-                <a:solidFill>
-                  <a:srgbClr val="1E4258"/>
-                </a:solidFill>
-              </a:rPr>
-              <a:t>The Zero Dollar starter kit is in Section 8.</a:t>
-            </a:r>
-          </a:p>
-        </p:txBody>
-      </p:sp>
-      <p:sp>
-        <p:nvSpPr>
-          <p:cNvPr id="7" name="TextBox 6"/>
-          <p:cNvSpPr txBox="1"/>
-          <p:nvPr/>
-        </p:nvSpPr>
-        <p:spPr>
-          <a:xfrm>
-            <a:off x="1143000" y="5303520"/>
-            <a:ext cx="9966961" cy="300594"/>
-          </a:xfrm>
-          <a:prstGeom prst="rect">
-            <a:avLst/>
-          </a:prstGeom>
-          <a:noFill/>
-        </p:spPr>
-        <p:txBody>
-          <a:bodyPr wrap="square">
-            <a:spAutoFit/>
-          </a:bodyPr>
-          <a:lstStyle/>
-          <a:p>
-            <a:r>
-              <a:rPr sz="1600" b="0">
-                <a:solidFill>
-                  <a:srgbClr val="0000FF"/>
-                </a:solidFill>
-              </a:rPr>
-              <a:t>Workshop Guide → Section 8 (all resources)</a:t>
+              <a:t>Scan for the Workshop Guide</a:t>
             </a:r>
           </a:p>
         </p:txBody>
@@ -8735,334 +9063,6 @@
             <a:pPr/>
             <a:r>
               <a:t>You don't need to be a technology expert. You need to be a clinician who knows what your learners need.</a:t>
-            </a:r>
-          </a:p>
-        </p:txBody>
-      </p:sp>
-    </p:spTree>
-  </p:cSld>
-  <p:clrMapOvr>
-    <a:masterClrMapping/>
-  </p:clrMapOvr>
-  <p:transition xmlns:p14="http://schemas.microsoft.com/office/powerpoint/2010/main" spd="med" advClick="1"/>
-</p:sld>
-</file>
-
-<file path=ppt/slides/slide20.xml><?xml version="1.0" encoding="utf-8"?>
-<p:sld xmlns:a="http://schemas.openxmlformats.org/drawingml/2006/main" xmlns:r="http://schemas.openxmlformats.org/officeDocument/2006/relationships" xmlns:p="http://schemas.openxmlformats.org/presentationml/2006/main" xmlns:m="http://schemas.openxmlformats.org/officeDocument/2006/math" xmlns:a14="http://schemas.microsoft.com/office/drawing/2010/main" showMasterSp="1" showMasterPhAnim="1">
-  <p:cSld>
-    <p:bg>
-      <p:bgPr>
-        <a:solidFill>
-          <a:srgbClr val="1E4258"/>
-        </a:solidFill>
-      </p:bgPr>
-    </p:bg>
-    <p:spTree>
-      <p:nvGrpSpPr>
-        <p:cNvPr id="1" name=""/>
-        <p:cNvGrpSpPr/>
-        <p:nvPr/>
-      </p:nvGrpSpPr>
-      <p:grpSpPr>
-        <a:xfrm>
-          <a:off x="0" y="0"/>
-          <a:ext cx="0" cy="0"/>
-          <a:chOff x="0" y="0"/>
-          <a:chExt cx="0" cy="0"/>
-        </a:xfrm>
-      </p:grpSpPr>
-      <p:sp>
-        <p:nvSpPr>
-          <p:cNvPr id="433" name="Rectangle 1"/>
-          <p:cNvSpPr/>
-          <p:nvPr/>
-        </p:nvSpPr>
-        <p:spPr>
-          <a:xfrm>
-            <a:off x="-1" y="5943600"/>
-            <a:ext cx="12191697" cy="914400"/>
-          </a:xfrm>
-          <a:prstGeom prst="rect">
-            <a:avLst/>
-          </a:prstGeom>
-          <a:solidFill>
-            <a:srgbClr val="E8833A"/>
-          </a:solidFill>
-          <a:ln w="12700">
-            <a:miter lim="400000"/>
-          </a:ln>
-          <a:effectLst>
-            <a:outerShdw sx="100000" sy="100000" kx="0" ky="0" algn="b" rotWithShape="0" blurRad="38100" dist="23000" dir="5400000">
-              <a:srgbClr val="000000">
-                <a:alpha val="35000"/>
-              </a:srgbClr>
-            </a:outerShdw>
-          </a:effectLst>
-        </p:spPr>
-        <p:txBody>
-          <a:bodyPr lIns="45719" rIns="45719" anchor="ctr"/>
-          <a:lstStyle/>
-          <a:p>
-            <a:pPr algn="ctr">
-              <a:defRPr>
-                <a:solidFill>
-                  <a:srgbClr val="FFFFFF"/>
-                </a:solidFill>
-              </a:defRPr>
-            </a:pPr>
-          </a:p>
-        </p:txBody>
-      </p:sp>
-      <p:sp>
-        <p:nvSpPr>
-          <p:cNvPr id="434" name="TextBox 2"/>
-          <p:cNvSpPr txBox="1"/>
-          <p:nvPr/>
-        </p:nvSpPr>
-        <p:spPr>
-          <a:xfrm>
-            <a:off x="960119" y="1828800"/>
-            <a:ext cx="10241282" cy="601623"/>
-          </a:xfrm>
-          <a:prstGeom prst="rect">
-            <a:avLst/>
-          </a:prstGeom>
-          <a:ln w="12700">
-            <a:miter lim="400000"/>
-          </a:ln>
-          <a:extLst>
-            <a:ext uri="{C572A759-6A51-4108-AA02-DFA0A04FC94B}">
-              <ma14:wrappingTextBoxFlag xmlns:ma14="http://schemas.microsoft.com/office/mac/drawingml/2011/main" val="1"/>
-            </a:ext>
-          </a:extLst>
-        </p:spPr>
-        <p:txBody>
-          <a:bodyPr lIns="45719" rIns="45719">
-            <a:spAutoFit/>
-          </a:bodyPr>
-          <a:lstStyle>
-            <a:lvl1pPr algn="ctr">
-              <a:defRPr b="1" sz="4000">
-                <a:solidFill>
-                  <a:srgbClr val="FFFFFF"/>
-                </a:solidFill>
-              </a:defRPr>
-            </a:lvl1pPr>
-          </a:lstStyle>
-          <a:p>
-            <a:pPr/>
-            <a:r>
-              <a:t>Thank You</a:t>
-            </a:r>
-          </a:p>
-        </p:txBody>
-      </p:sp>
-      <p:sp>
-        <p:nvSpPr>
-          <p:cNvPr id="435" name="TextBox 3"/>
-          <p:cNvSpPr txBox="1"/>
-          <p:nvPr/>
-        </p:nvSpPr>
-        <p:spPr>
-          <a:xfrm>
-            <a:off x="960119" y="2926079"/>
-            <a:ext cx="10241282" cy="340183"/>
-          </a:xfrm>
-          <a:prstGeom prst="rect">
-            <a:avLst/>
-          </a:prstGeom>
-          <a:ln w="12700">
-            <a:miter lim="400000"/>
-          </a:ln>
-          <a:extLst>
-            <a:ext uri="{C572A759-6A51-4108-AA02-DFA0A04FC94B}">
-              <ma14:wrappingTextBoxFlag xmlns:ma14="http://schemas.microsoft.com/office/mac/drawingml/2011/main" val="1"/>
-            </a:ext>
-          </a:extLst>
-        </p:spPr>
-        <p:txBody>
-          <a:bodyPr lIns="45719" rIns="45719">
-            <a:spAutoFit/>
-          </a:bodyPr>
-          <a:lstStyle>
-            <a:lvl1pPr algn="ctr">
-              <a:defRPr sz="2000">
-                <a:solidFill>
-                  <a:srgbClr val="F4A55A"/>
-                </a:solidFill>
-              </a:defRPr>
-            </a:lvl1pPr>
-          </a:lstStyle>
-          <a:p>
-            <a:pPr/>
-            <a:r>
-              <a:t>Diana Brewer, PA-C</a:t>
-            </a:r>
-          </a:p>
-        </p:txBody>
-      </p:sp>
-      <p:sp>
-        <p:nvSpPr>
-          <p:cNvPr id="436" name="TextBox 4"/>
-          <p:cNvSpPr txBox="1"/>
-          <p:nvPr/>
-        </p:nvSpPr>
-        <p:spPr>
-          <a:xfrm>
-            <a:off x="960119" y="3474720"/>
-            <a:ext cx="10241282" cy="300594"/>
-          </a:xfrm>
-          <a:prstGeom prst="rect">
-            <a:avLst/>
-          </a:prstGeom>
-          <a:ln w="12700">
-            <a:miter lim="400000"/>
-          </a:ln>
-          <a:extLst>
-            <a:ext uri="{C572A759-6A51-4108-AA02-DFA0A04FC94B}">
-              <ma14:wrappingTextBoxFlag xmlns:ma14="http://schemas.microsoft.com/office/mac/drawingml/2011/main" val="1"/>
-            </a:ext>
-          </a:extLst>
-        </p:spPr>
-        <p:txBody>
-          <a:bodyPr lIns="45719" rIns="45719">
-            <a:spAutoFit/>
-          </a:bodyPr>
-          <a:lstStyle>
-            <a:lvl1pPr algn="ctr">
-              <a:defRPr sz="1600">
-                <a:solidFill>
-                  <a:srgbClr val="FFFFFF"/>
-                </a:solidFill>
-              </a:defRPr>
-            </a:lvl1pPr>
-          </a:lstStyle>
-          <a:p>
-            <a:pPr/>
-            <a:r>
-              <a:t>Knight Cancer Institute Hem/Onc APP Fellowship Director, OHSU  ·  Co-Founder &amp; CMO, Sapient Clinician</a:t>
-            </a:r>
-          </a:p>
-        </p:txBody>
-      </p:sp>
-      <p:sp>
-        <p:nvSpPr>
-          <p:cNvPr id="437" name="TextBox 5"/>
-          <p:cNvSpPr txBox="1"/>
-          <p:nvPr/>
-        </p:nvSpPr>
-        <p:spPr>
-          <a:xfrm>
-            <a:off x="2788920" y="4114800"/>
-            <a:ext cx="6583679" cy="300594"/>
-          </a:xfrm>
-          <a:prstGeom prst="rect">
-            <a:avLst/>
-          </a:prstGeom>
-          <a:ln w="12700">
-            <a:miter lim="400000"/>
-          </a:ln>
-          <a:extLst>
-            <a:ext uri="{C572A759-6A51-4108-AA02-DFA0A04FC94B}">
-              <ma14:wrappingTextBoxFlag xmlns:ma14="http://schemas.microsoft.com/office/mac/drawingml/2011/main" val="1"/>
-            </a:ext>
-          </a:extLst>
-        </p:spPr>
-        <p:txBody>
-          <a:bodyPr lIns="45719" rIns="45719">
-            <a:spAutoFit/>
-          </a:bodyPr>
-          <a:lstStyle>
-            <a:lvl1pPr algn="ctr">
-              <a:defRPr sz="1600" u="sng">
-                <a:solidFill>
-                  <a:srgbClr val="FFFFFF"/>
-                </a:solidFill>
-                <a:uFill>
-                  <a:solidFill>
-                    <a:srgbClr val="0000FF"/>
-                  </a:solidFill>
-                </a:uFill>
-                <a:hlinkClick r:id="rId2" invalidUrl="" action="" tgtFrame="" tooltip="" history="1" highlightClick="0" endSnd="0"/>
-              </a:defRPr>
-            </a:lvl1pPr>
-          </a:lstStyle>
-          <a:p>
-            <a:pPr>
-              <a:defRPr u="none">
-                <a:uFillTx/>
-              </a:defRPr>
-            </a:pPr>
-            <a:r>
-              <a:rPr u="sng">
-                <a:uFill>
-                  <a:solidFill>
-                    <a:srgbClr val="0000FF"/>
-                  </a:solidFill>
-                </a:uFill>
-                <a:hlinkClick r:id="rId2" invalidUrl="" action="" tgtFrame="" tooltip="" history="1" highlightClick="0" endSnd="0"/>
-              </a:rPr>
-              <a:t>brewerd@ohsu.edu</a:t>
-            </a:r>
-          </a:p>
-        </p:txBody>
-      </p:sp>
-      <p:pic>
-        <p:nvPicPr>
-          <p:cNvPr id="438" name="Picture 437" descr="workshop-guide-qr.png"/>
-          <p:cNvPicPr>
-            <a:picLocks noChangeAspect="1"/>
-          </p:cNvPicPr>
-          <p:nvPr/>
-        </p:nvPicPr>
-        <p:blipFill>
-          <a:blip r:embed="rId3"/>
-          <a:stretch>
-            <a:fillRect/>
-          </a:stretch>
-        </p:blipFill>
-        <p:spPr>
-          <a:xfrm>
-            <a:off x="9144000" y="2331720"/>
-            <a:ext cx="1828800" cy="1828800"/>
-          </a:xfrm>
-          <a:prstGeom prst="rect">
-            <a:avLst/>
-          </a:prstGeom>
-        </p:spPr>
-      </p:pic>
-      <p:sp>
-        <p:nvSpPr>
-          <p:cNvPr id="439" name="TextBox 438"/>
-          <p:cNvSpPr txBox="1"/>
-          <p:nvPr/>
-        </p:nvSpPr>
-        <p:spPr>
-          <a:xfrm>
-            <a:off x="8503920" y="4315968"/>
-            <a:ext cx="3108960" cy="320040"/>
-          </a:xfrm>
-          <a:prstGeom prst="rect">
-            <a:avLst/>
-          </a:prstGeom>
-          <a:noFill/>
-        </p:spPr>
-        <p:txBody>
-          <a:bodyPr wrap="square">
-            <a:spAutoFit/>
-          </a:bodyPr>
-          <a:lstStyle/>
-          <a:p>
-            <a:pPr algn="ctr"/>
-            <a:r>
-              <a:rPr sz="1400">
-                <a:solidFill>
-                  <a:srgbClr val="1E4258"/>
-                </a:solidFill>
-                <a:latin typeface="Arial"/>
-              </a:rPr>
-              <a:t>Scan for the Workshop Guide</a:t>
             </a:r>
           </a:p>
         </p:txBody>

--- a/Digital Learning Unlocked - Slide Deck.pptx
+++ b/Digital Learning Unlocked - Slide Deck.pptx
@@ -2843,6 +2843,7 @@
           <a:p>
             <a:pPr/>
             <a:r>
+              <a:rPr/>
               <a:t>Digital Learning Unlocked</a:t>
             </a:r>
           </a:p>
@@ -2887,6 +2888,7 @@
           <a:p>
             <a:pPr/>
             <a:r>
+              <a:rPr/>
               <a:t>Affordable Tools and Tech for Next-Gen APP Education</a:t>
             </a:r>
           </a:p>
@@ -2931,6 +2933,7 @@
           <a:p>
             <a:pPr/>
             <a:r>
+              <a:rPr/>
               <a:t>Diana Brewer, PA-C  ·  September 2026 APP Fellowship Conference  </a:t>
             </a:r>
           </a:p>
@@ -3043,6 +3046,7 @@
           <a:p>
             <a:pPr/>
             <a:r>
+              <a:rPr/>
               <a:t>The Grounded AI Workflow: No Code Required</a:t>
             </a:r>
           </a:p>
@@ -3278,6 +3282,7 @@
           <a:p>
             <a:pPr/>
             <a:r>
+              <a:rPr/>
               <a:t>Prepare</a:t>
             </a:r>
           </a:p>
@@ -3320,14 +3325,17 @@
               </a:defRPr>
             </a:pPr>
             <a:r>
+              <a:rPr sz="1300"/>
               <a:t>Gather your source material:</a:t>
             </a:r>
             <a:br/>
             <a:r>
+              <a:rPr sz="1300"/>
               <a:t>guidelines, case notes,</a:t>
             </a:r>
             <a:br/>
             <a:r>
+              <a:rPr sz="1300"/>
               <a:t>articles, lecture slides</a:t>
             </a:r>
           </a:p>
@@ -3563,6 +3571,7 @@
           <a:p>
             <a:pPr/>
             <a:r>
+              <a:rPr/>
               <a:t>Upload</a:t>
             </a:r>
           </a:p>
@@ -3605,19 +3614,19 @@
               </a:defRPr>
             </a:pPr>
             <a:r>
-              <a:rPr/>
+              <a:rPr sz="1300"/>
               <a:t>Upload to any assistant</a:t>
             </a:r>
           </a:p>
           <a:p>
             <a:r>
-              <a:rPr/>
+              <a:rPr sz="1300"/>
               <a:t>NotebookLM, a ChatGPT</a:t>
             </a:r>
           </a:p>
           <a:p>
             <a:r>
-              <a:rPr/>
+              <a:rPr sz="1300"/>
               <a:t>Project, or a Claude project</a:t>
             </a:r>
           </a:p>
@@ -3853,6 +3862,7 @@
           <a:p>
             <a:pPr/>
             <a:r>
+              <a:rPr/>
               <a:t>Ground</a:t>
             </a:r>
           </a:p>
@@ -3895,14 +3905,17 @@
               </a:defRPr>
             </a:pPr>
             <a:r>
+              <a:rPr sz="1300"/>
               <a:t>Add this instruction:</a:t>
             </a:r>
             <a:br/>
             <a:r>
+              <a:rPr sz="1300"/>
               <a:t>"Base your response only</a:t>
             </a:r>
             <a:br/>
             <a:r>
+              <a:rPr sz="1300"/>
               <a:t>on the attached documents"</a:t>
             </a:r>
           </a:p>
@@ -4138,6 +4151,7 @@
           <a:p>
             <a:pPr/>
             <a:r>
+              <a:rPr/>
               <a:t>Verify</a:t>
             </a:r>
           </a:p>
@@ -4180,14 +4194,17 @@
               </a:defRPr>
             </a:pPr>
             <a:r>
+              <a:rPr sz="1300"/>
               <a:t>Spot-check lab values,</a:t>
             </a:r>
             <a:br/>
             <a:r>
+              <a:rPr sz="1300"/>
               <a:t>drug dosages, clinical</a:t>
             </a:r>
             <a:br/>
             <a:r>
+              <a:rPr sz="1300"/>
               <a:t>facts against your source</a:t>
             </a:r>
           </a:p>
@@ -4423,6 +4440,7 @@
           <a:p>
             <a:pPr/>
             <a:r>
+              <a:rPr/>
               <a:t>Reuse</a:t>
             </a:r>
           </a:p>
@@ -4465,14 +4483,17 @@
               </a:defRPr>
             </a:pPr>
             <a:r>
+              <a:rPr sz="1300"/>
               <a:t>Save the notebook.</a:t>
             </a:r>
             <a:br/>
             <a:r>
+              <a:rPr sz="1300"/>
               <a:t>It becomes your personal</a:t>
             </a:r>
             <a:br/>
             <a:r>
+              <a:rPr sz="1300"/>
               <a:t>AI case library</a:t>
             </a:r>
           </a:p>
@@ -4990,7 +5011,7 @@
         </p:nvSpPr>
         <p:spPr>
           <a:xfrm>
-            <a:off x="502919" y="5303520"/>
+            <a:off x="502919" y="5715000"/>
             <a:ext cx="11155682" cy="300594"/>
           </a:xfrm>
           <a:prstGeom prst="rect">
@@ -5481,6 +5502,7 @@
           <a:p>
             <a:pPr/>
             <a:r>
+              <a:rPr/>
               <a:t>Objective 3: Simulation Spectrum</a:t>
             </a:r>
           </a:p>
@@ -6073,7 +6095,7 @@
         </p:nvSpPr>
         <p:spPr>
           <a:xfrm>
-            <a:off x="502919" y="5303520"/>
+            <a:off x="502919" y="5715000"/>
             <a:ext cx="11155682" cy="300594"/>
           </a:xfrm>
           <a:prstGeom prst="rect">
@@ -6522,6 +6544,7 @@
           <a:p>
             <a:pPr/>
             <a:r>
+              <a:rPr/>
               <a:t>Turn one of your ideas into a plan you can take back to your program</a:t>
             </a:r>
           </a:p>
@@ -6650,6 +6673,7 @@
           <a:p>
             <a:pPr/>
             <a:r>
+              <a:rPr/>
               <a:t>WHAT THIS IS</a:t>
             </a:r>
           </a:p>
@@ -6694,6 +6718,7 @@
           <a:p>
             <a:pPr/>
             <a:r>
+              <a:rPr/>
               <a:t>You've been discussing tools and ideas after each section, now extend that into a full implementation plan. Pick the idea that feels most feasible.</a:t>
             </a:r>
           </a:p>
@@ -6927,10 +6952,12 @@
               </a:defRPr>
             </a:pPr>
             <a:r>
+              <a:rPr/>
               <a:t>Identify</a:t>
             </a:r>
             <a:br/>
             <a:r>
+              <a:rPr/>
               <a:t>a Need</a:t>
             </a:r>
           </a:p>
@@ -7164,10 +7191,12 @@
               </a:defRPr>
             </a:pPr>
             <a:r>
+              <a:rPr/>
               <a:t>Define</a:t>
             </a:r>
             <a:br/>
             <a:r>
+              <a:rPr/>
               <a:t>Learning Goals</a:t>
             </a:r>
           </a:p>
@@ -7401,10 +7430,12 @@
               </a:defRPr>
             </a:pPr>
             <a:r>
+              <a:rPr/>
               <a:t>Select</a:t>
             </a:r>
             <a:br/>
             <a:r>
+              <a:rPr/>
               <a:t>a Tool</a:t>
             </a:r>
           </a:p>
@@ -7638,10 +7669,12 @@
               </a:defRPr>
             </a:pPr>
             <a:r>
+              <a:rPr/>
               <a:t>Map Pedagogy</a:t>
             </a:r>
             <a:br/>
             <a:r>
+              <a:rPr/>
               <a:t>to Technology</a:t>
             </a:r>
           </a:p>
@@ -7875,10 +7908,12 @@
               </a:defRPr>
             </a:pPr>
             <a:r>
+              <a:rPr/>
               <a:t>Sketch</a:t>
             </a:r>
             <a:br/>
             <a:r>
+              <a:rPr/>
               <a:t>Implementation</a:t>
             </a:r>
           </a:p>
@@ -8625,6 +8660,7 @@
           <a:p>
             <a:pPr/>
             <a:r>
+              <a:rPr/>
               <a:t>Thank You</a:t>
             </a:r>
           </a:p>
@@ -8669,6 +8705,7 @@
           <a:p>
             <a:pPr/>
             <a:r>
+              <a:rPr/>
               <a:t>Diana Brewer, PA-C</a:t>
             </a:r>
           </a:p>
@@ -8713,6 +8750,7 @@
           <a:p>
             <a:pPr/>
             <a:r>
+              <a:rPr/>
               <a:t>Knight Cancer Institute Hem/Onc APP Fellowship Director, OHSU  ·  Co-Founder &amp; CMO, Sapient Clinician</a:t>
             </a:r>
           </a:p>
@@ -9018,6 +9056,7 @@
           <a:p>
             <a:pPr/>
             <a:r>
+              <a:rPr/>
               <a:t>Welcome &amp; Framing</a:t>
             </a:r>
           </a:p>
@@ -9062,6 +9101,7 @@
           <a:p>
             <a:pPr/>
             <a:r>
+              <a:rPr/>
               <a:t>You don't need to be a technology expert. You need to be a clinician who knows what your learners need.</a:t>
             </a:r>
           </a:p>
@@ -9174,6 +9214,7 @@
           <a:p>
             <a:pPr/>
             <a:r>
+              <a:rPr/>
               <a:t>Conflict of Interest &amp; Session Format</a:t>
             </a:r>
           </a:p>
@@ -9219,6 +9260,7 @@
               </a:defRPr>
             </a:pPr>
             <a:r>
+              <a:rPr/>
               <a:t>• COI: Diana Brewer is a co-founder of Sapient Clinician</a:t>
             </a:r>
           </a:p>
@@ -9234,6 +9276,7 @@
               </a:defRPr>
             </a:pPr>
             <a:r>
+              <a:rPr/>
               <a:t>• This session is vendor-neutral</a:t>
             </a:r>
           </a:p>
@@ -9249,6 +9292,7 @@
               </a:defRPr>
             </a:pPr>
             <a:r>
+              <a:rPr/>
               <a:t>• 60 min: ~35 min presentation + 20 min workshop + 5 min share &amp; wrap</a:t>
             </a:r>
           </a:p>
@@ -9264,6 +9308,7 @@
               </a:defRPr>
             </a:pPr>
             <a:r>
+              <a:rPr/>
               <a:t>• Keep the Workshop Guide open on your phone</a:t>
             </a:r>
           </a:p>
@@ -9279,6 +9324,7 @@
               </a:defRPr>
             </a:pPr>
             <a:r>
+              <a:rPr/>
               <a:t>• Think · Pair · Share after each section</a:t>
             </a:r>
           </a:p>
@@ -9294,6 +9340,7 @@
               </a:defRPr>
             </a:pPr>
             <a:r>
+              <a:rPr/>
               <a:t>• Everything stays available after the conference</a:t>
             </a:r>
           </a:p>
@@ -9338,6 +9385,7 @@
           <a:p>
             <a:pPr/>
             <a:r>
+              <a:rPr/>
               <a:t>Scan for the Workshop Guide page</a:t>
             </a:r>
           </a:p>
@@ -9546,6 +9594,7 @@
           <a:p>
             <a:pPr/>
             <a:r>
+              <a:rPr/>
               <a:t>Objective 1: Digital Tools</a:t>
             </a:r>
           </a:p>
@@ -9590,6 +9639,7 @@
           <a:p>
             <a:pPr/>
             <a:r>
+              <a:rPr/>
               <a:t>Free or low-cost platforms for creating interactive content</a:t>
             </a:r>
           </a:p>
@@ -10107,7 +10157,7 @@
         </p:nvSpPr>
         <p:spPr>
           <a:xfrm>
-            <a:off x="502919" y="5303520"/>
+            <a:off x="502919" y="5715000"/>
             <a:ext cx="11155682" cy="300594"/>
           </a:xfrm>
           <a:prstGeom prst="rect">
@@ -10637,7 +10687,7 @@
         </p:nvSpPr>
         <p:spPr>
           <a:xfrm>
-            <a:off x="502919" y="5303520"/>
+            <a:off x="502919" y="5715000"/>
             <a:ext cx="11155682" cy="300594"/>
           </a:xfrm>
           <a:prstGeom prst="rect">
@@ -10960,13 +11010,6 @@
 <file path=ppt/slides/slide8.xml><?xml version="1.0" encoding="utf-8"?>
 <p:sld xmlns:a="http://schemas.openxmlformats.org/drawingml/2006/main" xmlns:r="http://schemas.openxmlformats.org/officeDocument/2006/relationships" xmlns:p="http://schemas.openxmlformats.org/presentationml/2006/main" xmlns:m="http://schemas.openxmlformats.org/officeDocument/2006/math" xmlns:a14="http://schemas.microsoft.com/office/drawing/2010/main" showMasterSp="1" showMasterPhAnim="1">
   <p:cSld>
-    <p:bg>
-      <p:bgPr>
-        <a:solidFill>
-          <a:srgbClr val="2D5F7C"/>
-        </a:solidFill>
-      </p:bgPr>
-    </p:bg>
     <p:spTree>
       <p:nvGrpSpPr>
         <p:cNvPr id="1" name=""/>
@@ -11467,7 +11510,7 @@
         </p:nvSpPr>
         <p:spPr>
           <a:xfrm>
-            <a:off x="502919" y="5303520"/>
+            <a:off x="502919" y="5715000"/>
             <a:ext cx="11155682" cy="300594"/>
           </a:xfrm>
           <a:prstGeom prst="rect">
@@ -12004,7 +12047,7 @@
         </p:nvSpPr>
         <p:spPr>
           <a:xfrm>
-            <a:off x="502919" y="5303520"/>
+            <a:off x="502919" y="5715000"/>
             <a:ext cx="11155682" cy="300594"/>
           </a:xfrm>
           <a:prstGeom prst="rect">

--- a/Digital Learning Unlocked - Slide Deck.pptx
+++ b/Digital Learning Unlocked - Slide Deck.pptx
@@ -4963,12 +4963,12 @@
           <a:lstStyle/>
           <a:p>
             <a:r>
-              <a:rPr sz="1800" b="0">
+              <a:rPr sz="1600">
                 <a:solidFill>
                   <a:srgbClr val="1A2332"/>
                 </a:solidFill>
               </a:rPr>
-              <a:t>Open NotebookLM and try it yourself:</a:t>
+              <a:t>The case notebook is pre-built. Link in the guide, Section 4.</a:t>
             </a:r>
           </a:p>
           <a:p>
@@ -4978,12 +4978,12 @@
               </a:spcBef>
             </a:pPr>
             <a:r>
-              <a:rPr sz="1800" b="0">
+              <a:rPr sz="1600">
                 <a:solidFill>
                   <a:srgbClr val="1A2332"/>
                 </a:solidFill>
               </a:rPr>
-              <a:t>notebooklm.google.com</a:t>
+              <a:t>Ask the benzocaine question and watch it cite the files.</a:t>
             </a:r>
           </a:p>
           <a:p>
@@ -4993,12 +4993,12 @@
               </a:spcBef>
             </a:pPr>
             <a:r>
-              <a:rPr sz="1800" b="0">
+              <a:rPr sz="1600">
                 <a:solidFill>
                   <a:srgbClr val="1A2332"/>
                 </a:solidFill>
               </a:rPr>
-              <a:t>Then run Prompt #1 with the MedEdPORTAL files (guide → Section 4).</a:t>
+              <a:t>No NotebookLM account? ChatGPT or Claude work too.</a:t>
             </a:r>
           </a:p>
         </p:txBody>
@@ -5265,12 +5265,12 @@
               </a:spcBef>
             </a:pPr>
             <a:r>
-              <a:rPr sz="2200" b="0">
+              <a:rPr sz="2200">
                 <a:solidFill>
                   <a:srgbClr val="1E4258"/>
                 </a:solidFill>
               </a:rPr>
-              <a:t>Then the grounded version: the MedEdPORTAL files into NotebookLM, Prompt #1.</a:t>
+              <a:t>Then the grounded version: open the pre-built case notebook (guide, Section 4), or build your own in NotebookLM, ChatGPT, or Claude.</a:t>
             </a:r>
           </a:p>
           <a:p>

--- a/Digital Learning Unlocked - Slide Deck.pptx
+++ b/Digital Learning Unlocked - Slide Deck.pptx
@@ -16,6 +16,7 @@
     <p:sldId id="285" r:id="rId30"/>
     <p:sldId id="262" r:id="rId14"/>
     <p:sldId id="266" r:id="rId18"/>
+    <p:sldId id="300" r:id="rId100"/>
     <p:sldId id="267" r:id="rId19"/>
     <p:sldId id="268" r:id="rId20"/>
     <p:sldId id="269" r:id="rId21"/>
@@ -9103,6 +9104,236 @@
             <a:r>
               <a:rPr/>
               <a:t>You don't need to be a technology expert. You need to be a clinician who knows what your learners need.</a:t>
+            </a:r>
+          </a:p>
+        </p:txBody>
+      </p:sp>
+    </p:spTree>
+  </p:cSld>
+  <p:clrMapOvr>
+    <a:masterClrMapping/>
+  </p:clrMapOvr>
+  <p:transition xmlns:p14="http://schemas.microsoft.com/office/powerpoint/2010/main" spd="med" advClick="1"/>
+</p:sld>
+</file>
+
+<file path=ppt/slides/slide20.xml><?xml version="1.0" encoding="utf-8"?>
+<p:sld xmlns:a="http://schemas.openxmlformats.org/drawingml/2006/main" xmlns:r="http://schemas.openxmlformats.org/officeDocument/2006/relationships" xmlns:p="http://schemas.openxmlformats.org/presentationml/2006/main" xmlns:m="http://schemas.openxmlformats.org/officeDocument/2006/math" xmlns:a14="http://schemas.microsoft.com/office/drawing/2010/main" showMasterSp="1" showMasterPhAnim="1">
+  <p:cSld>
+    <p:bg>
+      <p:bgPr>
+        <a:solidFill>
+          <a:srgbClr val="2D5F7C"/>
+        </a:solidFill>
+      </p:bgPr>
+    </p:bg>
+    <p:spTree>
+      <p:nvGrpSpPr>
+        <p:cNvPr id="1" name=""/>
+        <p:cNvGrpSpPr/>
+        <p:nvPr/>
+      </p:nvGrpSpPr>
+      <p:grpSpPr>
+        <a:xfrm>
+          <a:off x="0" y="0"/>
+          <a:ext cx="0" cy="0"/>
+          <a:chOff x="0" y="0"/>
+          <a:chExt cx="0" cy="0"/>
+        </a:xfrm>
+      </p:grpSpPr>
+      <p:grpSp>
+        <p:nvGrpSpPr>
+          <p:cNvPr id="266" name="Oval 1"/>
+          <p:cNvGrpSpPr/>
+          <p:nvPr/>
+        </p:nvGrpSpPr>
+        <p:grpSpPr>
+          <a:xfrm>
+            <a:off x="914399" y="2285999"/>
+            <a:ext cx="1097282" cy="1097282"/>
+            <a:chOff x="0" y="0"/>
+            <a:chExt cx="1097280" cy="1097280"/>
+          </a:xfrm>
+        </p:grpSpPr>
+        <p:sp>
+          <p:nvSpPr>
+            <p:cNvPr id="264" name="Circle"/>
+            <p:cNvSpPr/>
+            <p:nvPr/>
+          </p:nvSpPr>
+          <p:spPr>
+            <a:xfrm>
+              <a:off x="-1" y="-1"/>
+              <a:ext cx="1097282" cy="1097282"/>
+            </a:xfrm>
+            <a:prstGeom prst="ellipse">
+              <a:avLst/>
+            </a:prstGeom>
+            <a:solidFill>
+              <a:srgbClr val="E8833A"/>
+            </a:solidFill>
+            <a:ln w="12700" cap="flat">
+              <a:noFill/>
+              <a:miter lim="400000"/>
+            </a:ln>
+            <a:effectLst>
+              <a:outerShdw sx="100000" sy="100000" kx="0" ky="0" algn="b" rotWithShape="0" blurRad="38100" dist="23000" dir="5400000">
+                <a:srgbClr val="000000">
+                  <a:alpha val="35000"/>
+                </a:srgbClr>
+              </a:outerShdw>
+            </a:effectLst>
+          </p:spPr>
+          <p:txBody>
+            <a:bodyPr wrap="square" lIns="45719" tIns="45719" rIns="45719" bIns="45719" numCol="1" anchor="ctr">
+              <a:noAutofit/>
+            </a:bodyPr>
+            <a:lstStyle/>
+            <a:p>
+              <a:pPr algn="ctr">
+                <a:defRPr b="1" sz="3600">
+                  <a:solidFill>
+                    <a:srgbClr val="FFFFFF"/>
+                  </a:solidFill>
+                </a:defRPr>
+              </a:pPr>
+            </a:p>
+          </p:txBody>
+        </p:sp>
+        <p:sp>
+          <p:nvSpPr>
+            <p:cNvPr id="265" name="5"/>
+            <p:cNvSpPr txBox="1"/>
+            <p:nvPr/>
+          </p:nvSpPr>
+          <p:spPr>
+            <a:xfrm>
+              <a:off x="206412" y="273972"/>
+              <a:ext cx="684456" cy="549336"/>
+            </a:xfrm>
+            <a:prstGeom prst="rect">
+              <a:avLst/>
+            </a:prstGeom>
+            <a:noFill/>
+            <a:ln w="12700" cap="flat">
+              <a:noFill/>
+              <a:miter lim="400000"/>
+            </a:ln>
+            <a:effectLst/>
+            <a:extLst>
+              <a:ext uri="{C572A759-6A51-4108-AA02-DFA0A04FC94B}">
+                <ma14:wrappingTextBoxFlag xmlns:ma14="http://schemas.microsoft.com/office/mac/drawingml/2011/main" val="1"/>
+              </a:ext>
+            </a:extLst>
+          </p:spPr>
+          <p:txBody>
+            <a:bodyPr wrap="square" lIns="45719" tIns="45719" rIns="45719" bIns="45719" numCol="1" anchor="ctr">
+              <a:spAutoFit/>
+            </a:bodyPr>
+            <a:lstStyle>
+              <a:lvl1pPr algn="ctr">
+                <a:defRPr b="1" sz="3600">
+                  <a:solidFill>
+                    <a:srgbClr val="FFFFFF"/>
+                  </a:solidFill>
+                </a:defRPr>
+              </a:lvl1pPr>
+            </a:lstStyle>
+            <a:p>
+              <a:pPr/>
+              <a:r>
+                <a:t>4</a:t>
+              </a:r>
+            </a:p>
+          </p:txBody>
+        </p:sp>
+      </p:grpSp>
+      <p:sp>
+        <p:nvSpPr>
+          <p:cNvPr id="267" name="TextBox 2"/>
+          <p:cNvSpPr txBox="1"/>
+          <p:nvPr/>
+        </p:nvSpPr>
+        <p:spPr>
+          <a:xfrm>
+            <a:off x="2331719" y="2286000"/>
+            <a:ext cx="8595362" cy="497047"/>
+          </a:xfrm>
+          <a:prstGeom prst="rect">
+            <a:avLst/>
+          </a:prstGeom>
+          <a:ln w="12700">
+            <a:miter lim="400000"/>
+          </a:ln>
+          <a:extLst>
+            <a:ext uri="{C572A759-6A51-4108-AA02-DFA0A04FC94B}">
+              <ma14:wrappingTextBoxFlag xmlns:ma14="http://schemas.microsoft.com/office/mac/drawingml/2011/main" val="1"/>
+            </a:ext>
+          </a:extLst>
+        </p:spPr>
+        <p:txBody>
+          <a:bodyPr lIns="45719" rIns="45719">
+            <a:spAutoFit/>
+          </a:bodyPr>
+          <a:lstStyle>
+            <a:lvl1pPr>
+              <a:defRPr b="1" sz="3200">
+                <a:solidFill>
+                  <a:srgbClr val="FFFFFF"/>
+                </a:solidFill>
+              </a:defRPr>
+            </a:lvl1pPr>
+          </a:lstStyle>
+          <a:p>
+            <a:pPr/>
+            <a:r>
+              <a:rPr/>
+              <a:t>Objective 2: Grounded AI Workflow</a:t>
+            </a:r>
+          </a:p>
+        </p:txBody>
+      </p:sp>
+      <p:sp>
+        <p:nvSpPr>
+          <p:cNvPr id="268" name="TextBox 3"/>
+          <p:cNvSpPr txBox="1"/>
+          <p:nvPr/>
+        </p:nvSpPr>
+        <p:spPr>
+          <a:xfrm>
+            <a:off x="2331719" y="3200400"/>
+            <a:ext cx="8595362" cy="333088"/>
+          </a:xfrm>
+          <a:prstGeom prst="rect">
+            <a:avLst/>
+          </a:prstGeom>
+          <a:ln w="12700">
+            <a:miter lim="400000"/>
+          </a:ln>
+          <a:extLst>
+            <a:ext uri="{C572A759-6A51-4108-AA02-DFA0A04FC94B}">
+              <ma14:wrappingTextBoxFlag xmlns:ma14="http://schemas.microsoft.com/office/mac/drawingml/2011/main" val="1"/>
+            </a:ext>
+          </a:extLst>
+        </p:spPr>
+        <p:txBody>
+          <a:bodyPr lIns="45719" rIns="45719">
+            <a:spAutoFit/>
+          </a:bodyPr>
+          <a:lstStyle>
+            <a:lvl1pPr>
+              <a:defRPr>
+                <a:solidFill>
+                  <a:srgbClr val="F4A55A"/>
+                </a:solidFill>
+              </a:defRPr>
+            </a:lvl1pPr>
+          </a:lstStyle>
+          <a:p>
+            <a:pPr/>
+            <a:r>
+              <a:rPr/>
+              <a:t>Upload published sources, get cited answers, every time · Guide → Section 4</a:t>
             </a:r>
           </a:p>
         </p:txBody>

--- a/Digital Learning Unlocked - Slide Deck.pptx
+++ b/Digital Learning Unlocked - Slide Deck.pptx
@@ -2968,6 +2968,543 @@
       </p:grpSpPr>
       <p:sp>
         <p:nvSpPr>
+          <p:cNvPr id="2" name="Rectangle 1"/>
+          <p:cNvSpPr/>
+          <p:nvPr/>
+        </p:nvSpPr>
+        <p:spPr>
+          <a:xfrm>
+            <a:off x="-1" y="0"/>
+            <a:ext cx="12191697" cy="1005839"/>
+          </a:xfrm>
+          <a:prstGeom prst="rect">
+            <a:avLst/>
+          </a:prstGeom>
+          <a:solidFill>
+            <a:srgbClr val="2D5F7C"/>
+          </a:solidFill>
+          <a:ln>
+            <a:noFill/>
+          </a:ln>
+          <a:effectLst/>
+        </p:spPr>
+        <p:style>
+          <a:lnRef idx="1">
+            <a:schemeClr val="accent1"/>
+          </a:lnRef>
+          <a:fillRef idx="3">
+            <a:schemeClr val="accent1"/>
+          </a:fillRef>
+          <a:effectRef idx="2">
+            <a:schemeClr val="accent1"/>
+          </a:effectRef>
+          <a:fontRef idx="minor">
+            <a:schemeClr val="lt1"/>
+          </a:fontRef>
+        </p:style>
+        <p:txBody>
+          <a:bodyPr rtlCol="0" anchor="ctr"/>
+          <a:lstStyle/>
+          <a:p>
+            <a:pPr algn="ctr"/>
+          </a:p>
+        </p:txBody>
+      </p:sp>
+      <p:sp>
+        <p:nvSpPr>
+          <p:cNvPr id="3" name="Rectangle 2"/>
+          <p:cNvSpPr/>
+          <p:nvPr/>
+        </p:nvSpPr>
+        <p:spPr>
+          <a:xfrm>
+            <a:off x="640080" y="1371600"/>
+            <a:ext cx="5486401" cy="4114800"/>
+          </a:xfrm>
+          <a:prstGeom prst="rect">
+            <a:avLst/>
+          </a:prstGeom>
+          <a:solidFill>
+            <a:srgbClr val="F0F4F8"/>
+          </a:solidFill>
+          <a:ln>
+            <a:noFill/>
+          </a:ln>
+          <a:effectLst/>
+        </p:spPr>
+        <p:style>
+          <a:lnRef idx="1">
+            <a:schemeClr val="accent1"/>
+          </a:lnRef>
+          <a:fillRef idx="3">
+            <a:schemeClr val="accent1"/>
+          </a:fillRef>
+          <a:effectRef idx="2">
+            <a:schemeClr val="accent1"/>
+          </a:effectRef>
+          <a:fontRef idx="minor">
+            <a:schemeClr val="lt1"/>
+          </a:fontRef>
+        </p:style>
+        <p:txBody>
+          <a:bodyPr rtlCol="0" anchor="ctr"/>
+          <a:lstStyle/>
+          <a:p>
+            <a:pPr algn="ctr"/>
+          </a:p>
+        </p:txBody>
+      </p:sp>
+      <p:sp>
+        <p:nvSpPr>
+          <p:cNvPr id="4" name="Rectangle 3"/>
+          <p:cNvSpPr/>
+          <p:nvPr/>
+        </p:nvSpPr>
+        <p:spPr>
+          <a:xfrm>
+            <a:off x="640080" y="1371600"/>
+            <a:ext cx="50801" cy="4114800"/>
+          </a:xfrm>
+          <a:prstGeom prst="rect">
+            <a:avLst/>
+          </a:prstGeom>
+          <a:solidFill>
+            <a:srgbClr val="2D5F7C"/>
+          </a:solidFill>
+          <a:ln>
+            <a:noFill/>
+          </a:ln>
+          <a:effectLst/>
+        </p:spPr>
+        <p:style>
+          <a:lnRef idx="1">
+            <a:schemeClr val="accent1"/>
+          </a:lnRef>
+          <a:fillRef idx="3">
+            <a:schemeClr val="accent1"/>
+          </a:fillRef>
+          <a:effectRef idx="2">
+            <a:schemeClr val="accent1"/>
+          </a:effectRef>
+          <a:fontRef idx="minor">
+            <a:schemeClr val="lt1"/>
+          </a:fontRef>
+        </p:style>
+        <p:txBody>
+          <a:bodyPr rtlCol="0" anchor="ctr"/>
+          <a:lstStyle/>
+          <a:p>
+            <a:pPr algn="ctr"/>
+          </a:p>
+        </p:txBody>
+      </p:sp>
+      <p:sp>
+        <p:nvSpPr>
+          <p:cNvPr id="5" name="Rectangle 4"/>
+          <p:cNvSpPr/>
+          <p:nvPr/>
+        </p:nvSpPr>
+        <p:spPr>
+          <a:xfrm>
+            <a:off x="6583680" y="1371600"/>
+            <a:ext cx="5029201" cy="4114800"/>
+          </a:xfrm>
+          <a:prstGeom prst="rect">
+            <a:avLst/>
+          </a:prstGeom>
+          <a:solidFill>
+            <a:srgbClr val="FDF6F0"/>
+          </a:solidFill>
+          <a:ln>
+            <a:noFill/>
+          </a:ln>
+          <a:effectLst/>
+        </p:spPr>
+        <p:style>
+          <a:lnRef idx="1">
+            <a:schemeClr val="accent1"/>
+          </a:lnRef>
+          <a:fillRef idx="3">
+            <a:schemeClr val="accent1"/>
+          </a:fillRef>
+          <a:effectRef idx="2">
+            <a:schemeClr val="accent1"/>
+          </a:effectRef>
+          <a:fontRef idx="minor">
+            <a:schemeClr val="lt1"/>
+          </a:fontRef>
+        </p:style>
+        <p:txBody>
+          <a:bodyPr rtlCol="0" anchor="ctr"/>
+          <a:lstStyle/>
+          <a:p>
+            <a:pPr algn="ctr"/>
+          </a:p>
+        </p:txBody>
+      </p:sp>
+      <p:sp>
+        <p:nvSpPr>
+          <p:cNvPr id="6" name="Rectangle 5"/>
+          <p:cNvSpPr/>
+          <p:nvPr/>
+        </p:nvSpPr>
+        <p:spPr>
+          <a:xfrm>
+            <a:off x="6583680" y="1371600"/>
+            <a:ext cx="50801" cy="4114800"/>
+          </a:xfrm>
+          <a:prstGeom prst="rect">
+            <a:avLst/>
+          </a:prstGeom>
+          <a:solidFill>
+            <a:srgbClr val="E8833A"/>
+          </a:solidFill>
+          <a:ln>
+            <a:noFill/>
+          </a:ln>
+          <a:effectLst/>
+        </p:spPr>
+        <p:style>
+          <a:lnRef idx="1">
+            <a:schemeClr val="accent1"/>
+          </a:lnRef>
+          <a:fillRef idx="3">
+            <a:schemeClr val="accent1"/>
+          </a:fillRef>
+          <a:effectRef idx="2">
+            <a:schemeClr val="accent1"/>
+          </a:effectRef>
+          <a:fontRef idx="minor">
+            <a:schemeClr val="lt1"/>
+          </a:fontRef>
+        </p:style>
+        <p:txBody>
+          <a:bodyPr rtlCol="0" anchor="ctr"/>
+          <a:lstStyle/>
+          <a:p>
+            <a:pPr algn="ctr"/>
+          </a:p>
+        </p:txBody>
+      </p:sp>
+      <p:sp>
+        <p:nvSpPr>
+          <p:cNvPr id="7" name="TextBox 6"/>
+          <p:cNvSpPr txBox="1"/>
+          <p:nvPr/>
+        </p:nvSpPr>
+        <p:spPr>
+          <a:xfrm>
+            <a:off x="502919" y="182879"/>
+            <a:ext cx="11155682" cy="444759"/>
+          </a:xfrm>
+          <a:prstGeom prst="rect">
+            <a:avLst/>
+          </a:prstGeom>
+          <a:noFill/>
+        </p:spPr>
+        <p:txBody>
+          <a:bodyPr wrap="square">
+            <a:spAutoFit/>
+          </a:bodyPr>
+          <a:lstStyle/>
+          <a:p>
+            <a:r>
+              <a:rPr sz="2800" b="1">
+                <a:solidFill>
+                  <a:srgbClr val="FFFFFF"/>
+                </a:solidFill>
+              </a:rPr>
+              <a:t>Where Ground Truth Lives</a:t>
+            </a:r>
+          </a:p>
+        </p:txBody>
+      </p:sp>
+      <p:sp>
+        <p:nvSpPr>
+          <p:cNvPr id="8" name="TextBox 7"/>
+          <p:cNvSpPr txBox="1"/>
+          <p:nvPr/>
+        </p:nvSpPr>
+        <p:spPr>
+          <a:xfrm>
+            <a:off x="502919" y="1097280"/>
+            <a:ext cx="11155682" cy="300594"/>
+          </a:xfrm>
+          <a:prstGeom prst="rect">
+            <a:avLst/>
+          </a:prstGeom>
+          <a:noFill/>
+        </p:spPr>
+        <p:txBody>
+          <a:bodyPr wrap="square">
+            <a:spAutoFit/>
+          </a:bodyPr>
+          <a:lstStyle/>
+          <a:p>
+            <a:r>
+              <a:rPr sz="1600" b="0">
+                <a:solidFill>
+                  <a:srgbClr val="5B6B7C"/>
+                </a:solidFill>
+              </a:rPr>
+              <a:t>Whatever you teach, someone already published it</a:t>
+            </a:r>
+          </a:p>
+        </p:txBody>
+      </p:sp>
+      <p:sp>
+        <p:nvSpPr>
+          <p:cNvPr id="9" name="TextBox 8"/>
+          <p:cNvSpPr txBox="1"/>
+          <p:nvPr/>
+        </p:nvSpPr>
+        <p:spPr>
+          <a:xfrm>
+            <a:off x="960119" y="1554480"/>
+            <a:ext cx="4937762" cy="225708"/>
+          </a:xfrm>
+          <a:prstGeom prst="rect">
+            <a:avLst/>
+          </a:prstGeom>
+          <a:noFill/>
+        </p:spPr>
+        <p:txBody>
+          <a:bodyPr wrap="square">
+            <a:spAutoFit/>
+          </a:bodyPr>
+          <a:lstStyle/>
+          <a:p>
+            <a:r>
+              <a:rPr sz="1100" b="1">
+                <a:solidFill>
+                  <a:srgbClr val="2D5F7C"/>
+                </a:solidFill>
+              </a:rPr>
+              <a:t>GROUNDING IS BUILT IN NOW</a:t>
+            </a:r>
+          </a:p>
+        </p:txBody>
+      </p:sp>
+      <p:sp>
+        <p:nvSpPr>
+          <p:cNvPr id="10" name="TextBox 9"/>
+          <p:cNvSpPr txBox="1"/>
+          <p:nvPr/>
+        </p:nvSpPr>
+        <p:spPr>
+          <a:xfrm>
+            <a:off x="960119" y="1920239"/>
+            <a:ext cx="4937762" cy="2301589"/>
+          </a:xfrm>
+          <a:prstGeom prst="rect">
+            <a:avLst/>
+          </a:prstGeom>
+          <a:noFill/>
+        </p:spPr>
+        <p:txBody>
+          <a:bodyPr wrap="square">
+            <a:spAutoFit/>
+          </a:bodyPr>
+          <a:lstStyle/>
+          <a:p>
+            <a:r>
+              <a:rPr sz="1800" b="0">
+                <a:solidFill>
+                  <a:srgbClr val="1A2332"/>
+                </a:solidFill>
+              </a:rPr>
+              <a:t>• ChatGPT Projects: your files and instructions</a:t>
+            </a:r>
+          </a:p>
+          <a:p>
+            <a:pPr>
+              <a:spcBef>
+                <a:spcPts val="1000"/>
+              </a:spcBef>
+            </a:pPr>
+            <a:r>
+              <a:rPr sz="1800" b="0">
+                <a:solidFill>
+                  <a:srgbClr val="1A2332"/>
+                </a:solidFill>
+              </a:rPr>
+              <a:t>• Claude: point a project at a folder</a:t>
+            </a:r>
+          </a:p>
+          <a:p>
+            <a:pPr>
+              <a:spcBef>
+                <a:spcPts val="1000"/>
+              </a:spcBef>
+            </a:pPr>
+            <a:r>
+              <a:rPr sz="1800" b="0">
+                <a:solidFill>
+                  <a:srgbClr val="1A2332"/>
+                </a:solidFill>
+              </a:rPr>
+              <a:t>• Gemini: grounded in your Google Drive</a:t>
+            </a:r>
+          </a:p>
+        </p:txBody>
+      </p:sp>
+      <p:sp>
+        <p:nvSpPr>
+          <p:cNvPr id="11" name="TextBox 10"/>
+          <p:cNvSpPr txBox="1"/>
+          <p:nvPr/>
+        </p:nvSpPr>
+        <p:spPr>
+          <a:xfrm>
+            <a:off x="6903719" y="1554480"/>
+            <a:ext cx="4480562" cy="225708"/>
+          </a:xfrm>
+          <a:prstGeom prst="rect">
+            <a:avLst/>
+          </a:prstGeom>
+          <a:noFill/>
+        </p:spPr>
+        <p:txBody>
+          <a:bodyPr wrap="square">
+            <a:spAutoFit/>
+          </a:bodyPr>
+          <a:lstStyle/>
+          <a:p>
+            <a:r>
+              <a:rPr sz="1100" b="1">
+                <a:solidFill>
+                  <a:srgbClr val="E8833A"/>
+                </a:solidFill>
+              </a:rPr>
+              <a:t>TODAY'S RUNNING EXAMPLE</a:t>
+            </a:r>
+          </a:p>
+        </p:txBody>
+      </p:sp>
+      <p:sp>
+        <p:nvSpPr>
+          <p:cNvPr id="12" name="TextBox 11"/>
+          <p:cNvSpPr txBox="1"/>
+          <p:nvPr/>
+        </p:nvSpPr>
+        <p:spPr>
+          <a:xfrm>
+            <a:off x="6903719" y="1920239"/>
+            <a:ext cx="4480562" cy="2301589"/>
+          </a:xfrm>
+          <a:prstGeom prst="rect">
+            <a:avLst/>
+          </a:prstGeom>
+          <a:noFill/>
+        </p:spPr>
+        <p:txBody>
+          <a:bodyPr wrap="square">
+            <a:spAutoFit/>
+          </a:bodyPr>
+          <a:lstStyle/>
+          <a:p>
+            <a:r>
+              <a:rPr sz="1800" b="0">
+                <a:solidFill>
+                  <a:srgbClr val="1A2332"/>
+                </a:solidFill>
+              </a:rPr>
+              <a:t>A published MedEdPORTAL case: sore throat to peritonsillar abscess, with a benzocaine twist.</a:t>
+            </a:r>
+          </a:p>
+          <a:p>
+            <a:pPr>
+              <a:spcBef>
+                <a:spcPts val="1000"/>
+              </a:spcBef>
+            </a:pPr>
+            <a:r>
+              <a:rPr sz="1800" b="0">
+                <a:solidFill>
+                  <a:srgbClr val="1A2332"/>
+                </a:solidFill>
+              </a:rPr>
+              <a:t>Six files, peer-reviewed, downloadable in the guide.</a:t>
+            </a:r>
+          </a:p>
+          <a:p>
+            <a:pPr>
+              <a:spcBef>
+                <a:spcPts val="1000"/>
+              </a:spcBef>
+            </a:pPr>
+            <a:r>
+              <a:rPr sz="1800" b="0">
+                <a:solidFill>
+                  <a:srgbClr val="1A2332"/>
+                </a:solidFill>
+              </a:rPr>
+              <a:t>NotebookLM is one easy dedicated example, demoing next.</a:t>
+            </a:r>
+          </a:p>
+        </p:txBody>
+      </p:sp>
+      <p:sp>
+        <p:nvSpPr>
+          <p:cNvPr id="13" name="TextBox 12"/>
+          <p:cNvSpPr txBox="1"/>
+          <p:nvPr/>
+        </p:nvSpPr>
+        <p:spPr>
+          <a:xfrm>
+            <a:off x="502919" y="5715000"/>
+            <a:ext cx="11155682" cy="300594"/>
+          </a:xfrm>
+          <a:prstGeom prst="rect">
+            <a:avLst/>
+          </a:prstGeom>
+          <a:noFill/>
+        </p:spPr>
+        <p:txBody>
+          <a:bodyPr wrap="square">
+            <a:spAutoFit/>
+          </a:bodyPr>
+          <a:lstStyle/>
+          <a:p>
+            <a:r>
+              <a:rPr sz="1600" b="0">
+                <a:solidFill>
+                  <a:srgbClr val="0000FF"/>
+                </a:solidFill>
+              </a:rPr>
+              <a:t>Workshop Guide → Sections 3 and 4 (tools, sources, case files)</a:t>
+            </a:r>
+          </a:p>
+        </p:txBody>
+      </p:sp>
+    </p:spTree>
+  </p:cSld>
+  <p:clrMapOvr>
+    <a:masterClrMapping/>
+  </p:clrMapOvr>
+  <p:transition xmlns:p14="http://schemas.microsoft.com/office/powerpoint/2010/main" spd="med" advClick="1"/>
+</p:sld>
+</file>
+
+<file path=ppt/slides/slide11.xml><?xml version="1.0" encoding="utf-8"?>
+<p:sld xmlns:a="http://schemas.openxmlformats.org/drawingml/2006/main" xmlns:r="http://schemas.openxmlformats.org/officeDocument/2006/relationships" xmlns:p="http://schemas.openxmlformats.org/presentationml/2006/main" xmlns:m="http://schemas.openxmlformats.org/officeDocument/2006/math" xmlns:a14="http://schemas.microsoft.com/office/drawing/2010/main" showMasterSp="1" showMasterPhAnim="1">
+  <p:cSld>
+    <p:spTree>
+      <p:nvGrpSpPr>
+        <p:cNvPr id="1" name=""/>
+        <p:cNvGrpSpPr/>
+        <p:nvPr/>
+      </p:nvGrpSpPr>
+      <p:grpSpPr>
+        <a:xfrm>
+          <a:off x="0" y="0"/>
+          <a:ext cx="0" cy="0"/>
+          <a:chOff x="0" y="0"/>
+          <a:chExt cx="0" cy="0"/>
+        </a:xfrm>
+      </p:grpSpPr>
+      <p:sp>
+        <p:nvSpPr>
           <p:cNvPr id="182" name="Rectangle 1"/>
           <p:cNvSpPr/>
           <p:nvPr/>
@@ -4509,543 +5046,6 @@
 </p:sld>
 </file>
 
-<file path=ppt/slides/slide11.xml><?xml version="1.0" encoding="utf-8"?>
-<p:sld xmlns:a="http://schemas.openxmlformats.org/drawingml/2006/main" xmlns:r="http://schemas.openxmlformats.org/officeDocument/2006/relationships" xmlns:p="http://schemas.openxmlformats.org/presentationml/2006/main" xmlns:m="http://schemas.openxmlformats.org/officeDocument/2006/math" xmlns:a14="http://schemas.microsoft.com/office/drawing/2010/main" showMasterSp="1" showMasterPhAnim="1">
-  <p:cSld>
-    <p:spTree>
-      <p:nvGrpSpPr>
-        <p:cNvPr id="1" name=""/>
-        <p:cNvGrpSpPr/>
-        <p:nvPr/>
-      </p:nvGrpSpPr>
-      <p:grpSpPr>
-        <a:xfrm>
-          <a:off x="0" y="0"/>
-          <a:ext cx="0" cy="0"/>
-          <a:chOff x="0" y="0"/>
-          <a:chExt cx="0" cy="0"/>
-        </a:xfrm>
-      </p:grpSpPr>
-      <p:sp>
-        <p:nvSpPr>
-          <p:cNvPr id="2" name="Rectangle 1"/>
-          <p:cNvSpPr/>
-          <p:nvPr/>
-        </p:nvSpPr>
-        <p:spPr>
-          <a:xfrm>
-            <a:off x="-1" y="0"/>
-            <a:ext cx="12191697" cy="1005839"/>
-          </a:xfrm>
-          <a:prstGeom prst="rect">
-            <a:avLst/>
-          </a:prstGeom>
-          <a:solidFill>
-            <a:srgbClr val="2D5F7C"/>
-          </a:solidFill>
-          <a:ln>
-            <a:noFill/>
-          </a:ln>
-          <a:effectLst/>
-        </p:spPr>
-        <p:style>
-          <a:lnRef idx="1">
-            <a:schemeClr val="accent1"/>
-          </a:lnRef>
-          <a:fillRef idx="3">
-            <a:schemeClr val="accent1"/>
-          </a:fillRef>
-          <a:effectRef idx="2">
-            <a:schemeClr val="accent1"/>
-          </a:effectRef>
-          <a:fontRef idx="minor">
-            <a:schemeClr val="lt1"/>
-          </a:fontRef>
-        </p:style>
-        <p:txBody>
-          <a:bodyPr rtlCol="0" anchor="ctr"/>
-          <a:lstStyle/>
-          <a:p>
-            <a:pPr algn="ctr"/>
-          </a:p>
-        </p:txBody>
-      </p:sp>
-      <p:sp>
-        <p:nvSpPr>
-          <p:cNvPr id="3" name="Rectangle 2"/>
-          <p:cNvSpPr/>
-          <p:nvPr/>
-        </p:nvSpPr>
-        <p:spPr>
-          <a:xfrm>
-            <a:off x="640080" y="1371600"/>
-            <a:ext cx="5486401" cy="4114800"/>
-          </a:xfrm>
-          <a:prstGeom prst="rect">
-            <a:avLst/>
-          </a:prstGeom>
-          <a:solidFill>
-            <a:srgbClr val="F0F4F8"/>
-          </a:solidFill>
-          <a:ln>
-            <a:noFill/>
-          </a:ln>
-          <a:effectLst/>
-        </p:spPr>
-        <p:style>
-          <a:lnRef idx="1">
-            <a:schemeClr val="accent1"/>
-          </a:lnRef>
-          <a:fillRef idx="3">
-            <a:schemeClr val="accent1"/>
-          </a:fillRef>
-          <a:effectRef idx="2">
-            <a:schemeClr val="accent1"/>
-          </a:effectRef>
-          <a:fontRef idx="minor">
-            <a:schemeClr val="lt1"/>
-          </a:fontRef>
-        </p:style>
-        <p:txBody>
-          <a:bodyPr rtlCol="0" anchor="ctr"/>
-          <a:lstStyle/>
-          <a:p>
-            <a:pPr algn="ctr"/>
-          </a:p>
-        </p:txBody>
-      </p:sp>
-      <p:sp>
-        <p:nvSpPr>
-          <p:cNvPr id="4" name="Rectangle 3"/>
-          <p:cNvSpPr/>
-          <p:nvPr/>
-        </p:nvSpPr>
-        <p:spPr>
-          <a:xfrm>
-            <a:off x="640080" y="1371600"/>
-            <a:ext cx="50801" cy="4114800"/>
-          </a:xfrm>
-          <a:prstGeom prst="rect">
-            <a:avLst/>
-          </a:prstGeom>
-          <a:solidFill>
-            <a:srgbClr val="2D5F7C"/>
-          </a:solidFill>
-          <a:ln>
-            <a:noFill/>
-          </a:ln>
-          <a:effectLst/>
-        </p:spPr>
-        <p:style>
-          <a:lnRef idx="1">
-            <a:schemeClr val="accent1"/>
-          </a:lnRef>
-          <a:fillRef idx="3">
-            <a:schemeClr val="accent1"/>
-          </a:fillRef>
-          <a:effectRef idx="2">
-            <a:schemeClr val="accent1"/>
-          </a:effectRef>
-          <a:fontRef idx="minor">
-            <a:schemeClr val="lt1"/>
-          </a:fontRef>
-        </p:style>
-        <p:txBody>
-          <a:bodyPr rtlCol="0" anchor="ctr"/>
-          <a:lstStyle/>
-          <a:p>
-            <a:pPr algn="ctr"/>
-          </a:p>
-        </p:txBody>
-      </p:sp>
-      <p:sp>
-        <p:nvSpPr>
-          <p:cNvPr id="5" name="Rectangle 4"/>
-          <p:cNvSpPr/>
-          <p:nvPr/>
-        </p:nvSpPr>
-        <p:spPr>
-          <a:xfrm>
-            <a:off x="6583680" y="1371600"/>
-            <a:ext cx="5029201" cy="4114800"/>
-          </a:xfrm>
-          <a:prstGeom prst="rect">
-            <a:avLst/>
-          </a:prstGeom>
-          <a:solidFill>
-            <a:srgbClr val="FDF6F0"/>
-          </a:solidFill>
-          <a:ln>
-            <a:noFill/>
-          </a:ln>
-          <a:effectLst/>
-        </p:spPr>
-        <p:style>
-          <a:lnRef idx="1">
-            <a:schemeClr val="accent1"/>
-          </a:lnRef>
-          <a:fillRef idx="3">
-            <a:schemeClr val="accent1"/>
-          </a:fillRef>
-          <a:effectRef idx="2">
-            <a:schemeClr val="accent1"/>
-          </a:effectRef>
-          <a:fontRef idx="minor">
-            <a:schemeClr val="lt1"/>
-          </a:fontRef>
-        </p:style>
-        <p:txBody>
-          <a:bodyPr rtlCol="0" anchor="ctr"/>
-          <a:lstStyle/>
-          <a:p>
-            <a:pPr algn="ctr"/>
-          </a:p>
-        </p:txBody>
-      </p:sp>
-      <p:sp>
-        <p:nvSpPr>
-          <p:cNvPr id="6" name="Rectangle 5"/>
-          <p:cNvSpPr/>
-          <p:nvPr/>
-        </p:nvSpPr>
-        <p:spPr>
-          <a:xfrm>
-            <a:off x="6583680" y="1371600"/>
-            <a:ext cx="50801" cy="4114800"/>
-          </a:xfrm>
-          <a:prstGeom prst="rect">
-            <a:avLst/>
-          </a:prstGeom>
-          <a:solidFill>
-            <a:srgbClr val="E8833A"/>
-          </a:solidFill>
-          <a:ln>
-            <a:noFill/>
-          </a:ln>
-          <a:effectLst/>
-        </p:spPr>
-        <p:style>
-          <a:lnRef idx="1">
-            <a:schemeClr val="accent1"/>
-          </a:lnRef>
-          <a:fillRef idx="3">
-            <a:schemeClr val="accent1"/>
-          </a:fillRef>
-          <a:effectRef idx="2">
-            <a:schemeClr val="accent1"/>
-          </a:effectRef>
-          <a:fontRef idx="minor">
-            <a:schemeClr val="lt1"/>
-          </a:fontRef>
-        </p:style>
-        <p:txBody>
-          <a:bodyPr rtlCol="0" anchor="ctr"/>
-          <a:lstStyle/>
-          <a:p>
-            <a:pPr algn="ctr"/>
-          </a:p>
-        </p:txBody>
-      </p:sp>
-      <p:sp>
-        <p:nvSpPr>
-          <p:cNvPr id="7" name="TextBox 6"/>
-          <p:cNvSpPr txBox="1"/>
-          <p:nvPr/>
-        </p:nvSpPr>
-        <p:spPr>
-          <a:xfrm>
-            <a:off x="502919" y="182879"/>
-            <a:ext cx="11155682" cy="444759"/>
-          </a:xfrm>
-          <a:prstGeom prst="rect">
-            <a:avLst/>
-          </a:prstGeom>
-          <a:noFill/>
-        </p:spPr>
-        <p:txBody>
-          <a:bodyPr wrap="square">
-            <a:spAutoFit/>
-          </a:bodyPr>
-          <a:lstStyle/>
-          <a:p>
-            <a:r>
-              <a:rPr sz="2800" b="1">
-                <a:solidFill>
-                  <a:srgbClr val="FFFFFF"/>
-                </a:solidFill>
-              </a:rPr>
-              <a:t>Live Demo: The Same Case, Grounded</a:t>
-            </a:r>
-          </a:p>
-        </p:txBody>
-      </p:sp>
-      <p:sp>
-        <p:nvSpPr>
-          <p:cNvPr id="8" name="TextBox 7"/>
-          <p:cNvSpPr txBox="1"/>
-          <p:nvPr/>
-        </p:nvSpPr>
-        <p:spPr>
-          <a:xfrm>
-            <a:off x="502919" y="1097280"/>
-            <a:ext cx="11155682" cy="300594"/>
-          </a:xfrm>
-          <a:prstGeom prst="rect">
-            <a:avLst/>
-          </a:prstGeom>
-          <a:noFill/>
-        </p:spPr>
-        <p:txBody>
-          <a:bodyPr wrap="square">
-            <a:spAutoFit/>
-          </a:bodyPr>
-          <a:lstStyle/>
-          <a:p>
-            <a:r>
-              <a:rPr sz="1600" b="0">
-                <a:solidFill>
-                  <a:srgbClr val="5B6B7C"/>
-                </a:solidFill>
-              </a:rPr>
-              <a:t>Same question, asked twice</a:t>
-            </a:r>
-          </a:p>
-        </p:txBody>
-      </p:sp>
-      <p:sp>
-        <p:nvSpPr>
-          <p:cNvPr id="9" name="TextBox 8"/>
-          <p:cNvSpPr txBox="1"/>
-          <p:nvPr/>
-        </p:nvSpPr>
-        <p:spPr>
-          <a:xfrm>
-            <a:off x="960119" y="1554480"/>
-            <a:ext cx="4937762" cy="225708"/>
-          </a:xfrm>
-          <a:prstGeom prst="rect">
-            <a:avLst/>
-          </a:prstGeom>
-          <a:noFill/>
-        </p:spPr>
-        <p:txBody>
-          <a:bodyPr wrap="square">
-            <a:spAutoFit/>
-          </a:bodyPr>
-          <a:lstStyle/>
-          <a:p>
-            <a:r>
-              <a:rPr sz="1100" b="1">
-                <a:solidFill>
-                  <a:srgbClr val="2D5F7C"/>
-                </a:solidFill>
-              </a:rPr>
-              <a:t>ON SCREEN, DIANA DRIVES</a:t>
-            </a:r>
-          </a:p>
-        </p:txBody>
-      </p:sp>
-      <p:sp>
-        <p:nvSpPr>
-          <p:cNvPr id="10" name="TextBox 9"/>
-          <p:cNvSpPr txBox="1"/>
-          <p:nvPr/>
-        </p:nvSpPr>
-        <p:spPr>
-          <a:xfrm>
-            <a:off x="960119" y="1920239"/>
-            <a:ext cx="4937762" cy="2301589"/>
-          </a:xfrm>
-          <a:prstGeom prst="rect">
-            <a:avLst/>
-          </a:prstGeom>
-          <a:noFill/>
-        </p:spPr>
-        <p:txBody>
-          <a:bodyPr wrap="square">
-            <a:spAutoFit/>
-          </a:bodyPr>
-          <a:lstStyle/>
-          <a:p>
-            <a:r>
-              <a:rPr sz="1800" b="0">
-                <a:solidFill>
-                  <a:srgbClr val="1A2332"/>
-                </a:solidFill>
-              </a:rPr>
-              <a:t>1 · Ungrounded: the same question, no sources</a:t>
-            </a:r>
-          </a:p>
-          <a:p>
-            <a:pPr>
-              <a:spcBef>
-                <a:spcPts val="1000"/>
-              </a:spcBef>
-            </a:pPr>
-            <a:r>
-              <a:rPr sz="1800" b="0">
-                <a:solidFill>
-                  <a:srgbClr val="1A2332"/>
-                </a:solidFill>
-              </a:rPr>
-              <a:t>2 · Grounded: the pre-built notebook answers with citations</a:t>
-            </a:r>
-          </a:p>
-          <a:p>
-            <a:pPr>
-              <a:spcBef>
-                <a:spcPts val="1000"/>
-              </a:spcBef>
-            </a:pPr>
-            <a:r>
-              <a:rPr sz="1800" b="0">
-                <a:solidFill>
-                  <a:srgbClr val="1A2332"/>
-                </a:solidFill>
-              </a:rPr>
-              <a:t>3 · Bonus: a rubric, and 15 seconds of the audio overview</a:t>
-            </a:r>
-          </a:p>
-        </p:txBody>
-      </p:sp>
-      <p:sp>
-        <p:nvSpPr>
-          <p:cNvPr id="11" name="TextBox 10"/>
-          <p:cNvSpPr txBox="1"/>
-          <p:nvPr/>
-        </p:nvSpPr>
-        <p:spPr>
-          <a:xfrm>
-            <a:off x="6903719" y="1554480"/>
-            <a:ext cx="4480562" cy="225708"/>
-          </a:xfrm>
-          <a:prstGeom prst="rect">
-            <a:avLst/>
-          </a:prstGeom>
-          <a:noFill/>
-        </p:spPr>
-        <p:txBody>
-          <a:bodyPr wrap="square">
-            <a:spAutoFit/>
-          </a:bodyPr>
-          <a:lstStyle/>
-          <a:p>
-            <a:r>
-              <a:rPr sz="1100" b="1">
-                <a:solidFill>
-                  <a:srgbClr val="E8833A"/>
-                </a:solidFill>
-              </a:rPr>
-              <a:t>ON YOUR PHONE</a:t>
-            </a:r>
-          </a:p>
-        </p:txBody>
-      </p:sp>
-      <p:sp>
-        <p:nvSpPr>
-          <p:cNvPr id="12" name="TextBox 11"/>
-          <p:cNvSpPr txBox="1"/>
-          <p:nvPr/>
-        </p:nvSpPr>
-        <p:spPr>
-          <a:xfrm>
-            <a:off x="6903719" y="1920239"/>
-            <a:ext cx="4480562" cy="2301589"/>
-          </a:xfrm>
-          <a:prstGeom prst="rect">
-            <a:avLst/>
-          </a:prstGeom>
-          <a:noFill/>
-        </p:spPr>
-        <p:txBody>
-          <a:bodyPr wrap="square">
-            <a:spAutoFit/>
-          </a:bodyPr>
-          <a:lstStyle/>
-          <a:p>
-            <a:r>
-              <a:rPr sz="1600">
-                <a:solidFill>
-                  <a:srgbClr val="1A2332"/>
-                </a:solidFill>
-              </a:rPr>
-              <a:t>The case notebook is pre-built. Link in the guide, Section 4.</a:t>
-            </a:r>
-          </a:p>
-          <a:p>
-            <a:pPr>
-              <a:spcBef>
-                <a:spcPts val="1000"/>
-              </a:spcBef>
-            </a:pPr>
-            <a:r>
-              <a:rPr sz="1600">
-                <a:solidFill>
-                  <a:srgbClr val="1A2332"/>
-                </a:solidFill>
-              </a:rPr>
-              <a:t>Ask the benzocaine question and watch it cite the files.</a:t>
-            </a:r>
-          </a:p>
-          <a:p>
-            <a:pPr>
-              <a:spcBef>
-                <a:spcPts val="1000"/>
-              </a:spcBef>
-            </a:pPr>
-            <a:r>
-              <a:rPr sz="1600">
-                <a:solidFill>
-                  <a:srgbClr val="1A2332"/>
-                </a:solidFill>
-              </a:rPr>
-              <a:t>No NotebookLM account? ChatGPT or Claude work too.</a:t>
-            </a:r>
-          </a:p>
-        </p:txBody>
-      </p:sp>
-      <p:sp>
-        <p:nvSpPr>
-          <p:cNvPr id="13" name="TextBox 12"/>
-          <p:cNvSpPr txBox="1"/>
-          <p:nvPr/>
-        </p:nvSpPr>
-        <p:spPr>
-          <a:xfrm>
-            <a:off x="502919" y="5715000"/>
-            <a:ext cx="11155682" cy="300594"/>
-          </a:xfrm>
-          <a:prstGeom prst="rect">
-            <a:avLst/>
-          </a:prstGeom>
-          <a:noFill/>
-        </p:spPr>
-        <p:txBody>
-          <a:bodyPr wrap="square">
-            <a:spAutoFit/>
-          </a:bodyPr>
-          <a:lstStyle/>
-          <a:p>
-            <a:r>
-              <a:rPr sz="1600" b="0">
-                <a:solidFill>
-                  <a:srgbClr val="0000FF"/>
-                </a:solidFill>
-              </a:rPr>
-              <a:t>Workshop Guide → Section 4 (Prompt #1)</a:t>
-            </a:r>
-          </a:p>
-        </p:txBody>
-      </p:sp>
-    </p:spTree>
-  </p:cSld>
-  <p:clrMapOvr>
-    <a:masterClrMapping/>
-  </p:clrMapOvr>
-  <p:transition xmlns:p14="http://schemas.microsoft.com/office/powerpoint/2010/main" spd="med" advClick="1"/>
-</p:sld>
-</file>
-
 <file path=ppt/slides/slide12.xml><?xml version="1.0" encoding="utf-8"?>
 <p:sld xmlns:a="http://schemas.openxmlformats.org/drawingml/2006/main" xmlns:r="http://schemas.openxmlformats.org/officeDocument/2006/relationships" xmlns:p="http://schemas.openxmlformats.org/presentationml/2006/main" xmlns:m="http://schemas.openxmlformats.org/officeDocument/2006/math" xmlns:a14="http://schemas.microsoft.com/office/drawing/2010/main" showMasterSp="1" showMasterPhAnim="1">
   <p:cSld>
@@ -5116,7 +5116,7 @@
         <p:spPr>
           <a:xfrm>
             <a:off x="640080" y="1371600"/>
-            <a:ext cx="10972801" cy="3657600"/>
+            <a:ext cx="5486401" cy="4114800"/>
           </a:xfrm>
           <a:prstGeom prst="rect">
             <a:avLst/>
@@ -5160,7 +5160,7 @@
         <p:spPr>
           <a:xfrm>
             <a:off x="640080" y="1371600"/>
-            <a:ext cx="50801" cy="3657600"/>
+            <a:ext cx="50801" cy="4114800"/>
           </a:xfrm>
           <a:prstGeom prst="rect">
             <a:avLst/>
@@ -5197,7 +5197,95 @@
       </p:sp>
       <p:sp>
         <p:nvSpPr>
-          <p:cNvPr id="5" name="TextBox 4"/>
+          <p:cNvPr id="5" name="Rectangle 4"/>
+          <p:cNvSpPr/>
+          <p:nvPr/>
+        </p:nvSpPr>
+        <p:spPr>
+          <a:xfrm>
+            <a:off x="6583680" y="1371600"/>
+            <a:ext cx="5029201" cy="4114800"/>
+          </a:xfrm>
+          <a:prstGeom prst="rect">
+            <a:avLst/>
+          </a:prstGeom>
+          <a:solidFill>
+            <a:srgbClr val="FDF6F0"/>
+          </a:solidFill>
+          <a:ln>
+            <a:noFill/>
+          </a:ln>
+          <a:effectLst/>
+        </p:spPr>
+        <p:style>
+          <a:lnRef idx="1">
+            <a:schemeClr val="accent1"/>
+          </a:lnRef>
+          <a:fillRef idx="3">
+            <a:schemeClr val="accent1"/>
+          </a:fillRef>
+          <a:effectRef idx="2">
+            <a:schemeClr val="accent1"/>
+          </a:effectRef>
+          <a:fontRef idx="minor">
+            <a:schemeClr val="lt1"/>
+          </a:fontRef>
+        </p:style>
+        <p:txBody>
+          <a:bodyPr rtlCol="0" anchor="ctr"/>
+          <a:lstStyle/>
+          <a:p>
+            <a:pPr algn="ctr"/>
+          </a:p>
+        </p:txBody>
+      </p:sp>
+      <p:sp>
+        <p:nvSpPr>
+          <p:cNvPr id="6" name="Rectangle 5"/>
+          <p:cNvSpPr/>
+          <p:nvPr/>
+        </p:nvSpPr>
+        <p:spPr>
+          <a:xfrm>
+            <a:off x="6583680" y="1371600"/>
+            <a:ext cx="50801" cy="4114800"/>
+          </a:xfrm>
+          <a:prstGeom prst="rect">
+            <a:avLst/>
+          </a:prstGeom>
+          <a:solidFill>
+            <a:srgbClr val="E8833A"/>
+          </a:solidFill>
+          <a:ln>
+            <a:noFill/>
+          </a:ln>
+          <a:effectLst/>
+        </p:spPr>
+        <p:style>
+          <a:lnRef idx="1">
+            <a:schemeClr val="accent1"/>
+          </a:lnRef>
+          <a:fillRef idx="3">
+            <a:schemeClr val="accent1"/>
+          </a:fillRef>
+          <a:effectRef idx="2">
+            <a:schemeClr val="accent1"/>
+          </a:effectRef>
+          <a:fontRef idx="minor">
+            <a:schemeClr val="lt1"/>
+          </a:fontRef>
+        </p:style>
+        <p:txBody>
+          <a:bodyPr rtlCol="0" anchor="ctr"/>
+          <a:lstStyle/>
+          <a:p>
+            <a:pPr algn="ctr"/>
+          </a:p>
+        </p:txBody>
+      </p:sp>
+      <p:sp>
+        <p:nvSpPr>
+          <p:cNvPr id="7" name="TextBox 6"/>
           <p:cNvSpPr txBox="1"/>
           <p:nvPr/>
         </p:nvSpPr>
@@ -5223,21 +5311,21 @@
                   <a:srgbClr val="FFFFFF"/>
                 </a:solidFill>
               </a:rPr>
-              <a:t>Think · Pair · Share: Try It Now (4 min)</a:t>
-            </a:r>
-          </a:p>
-        </p:txBody>
-      </p:sp>
-      <p:sp>
-        <p:nvSpPr>
-          <p:cNvPr id="6" name="TextBox 5"/>
+              <a:t>Live Demo: The Same Case, Grounded</a:t>
+            </a:r>
+          </a:p>
+        </p:txBody>
+      </p:sp>
+      <p:sp>
+        <p:nvSpPr>
+          <p:cNvPr id="8" name="TextBox 7"/>
           <p:cNvSpPr txBox="1"/>
           <p:nvPr/>
         </p:nvSpPr>
         <p:spPr>
           <a:xfrm>
-            <a:off x="1143000" y="1828800"/>
-            <a:ext cx="9966961" cy="1985576"/>
+            <a:off x="502919" y="1097280"/>
+            <a:ext cx="11155682" cy="300594"/>
           </a:xfrm>
           <a:prstGeom prst="rect">
             <a:avLst/>
@@ -5251,56 +5339,26 @@
           <a:lstStyle/>
           <a:p>
             <a:r>
-              <a:rPr sz="2200" b="0">
-                <a:solidFill>
-                  <a:srgbClr val="1E4258"/>
+              <a:rPr sz="1600" b="0">
+                <a:solidFill>
+                  <a:srgbClr val="5B6B7C"/>
                 </a:solidFill>
               </a:rPr>
-              <a:t>Run Today's Demo Case on your phone (guide → Section 4, prompt 5b).</a:t>
-            </a:r>
-          </a:p>
-          <a:p>
-            <a:pPr>
-              <a:spcBef>
-                <a:spcPts val="1600"/>
-              </a:spcBef>
-            </a:pPr>
-            <a:r>
-              <a:rPr sz="2200">
-                <a:solidFill>
-                  <a:srgbClr val="1E4258"/>
-                </a:solidFill>
-              </a:rPr>
-              <a:t>Then the grounded version: open the pre-built case notebook (guide, Section 4), or build your own in NotebookLM, ChatGPT, or Claude.</a:t>
-            </a:r>
-          </a:p>
-          <a:p>
-            <a:pPr>
-              <a:spcBef>
-                <a:spcPts val="1600"/>
-              </a:spcBef>
-            </a:pPr>
-            <a:r>
-              <a:rPr sz="2200" b="0">
-                <a:solidFill>
-                  <a:srgbClr val="1E4258"/>
-                </a:solidFill>
-              </a:rPr>
-              <a:t>Compare: what would you verify before this case touches a learner?</a:t>
-            </a:r>
-          </a:p>
-        </p:txBody>
-      </p:sp>
-      <p:sp>
-        <p:nvSpPr>
-          <p:cNvPr id="7" name="TextBox 6"/>
+              <a:t>Same question, asked twice</a:t>
+            </a:r>
+          </a:p>
+        </p:txBody>
+      </p:sp>
+      <p:sp>
+        <p:nvSpPr>
+          <p:cNvPr id="9" name="TextBox 8"/>
           <p:cNvSpPr txBox="1"/>
           <p:nvPr/>
         </p:nvSpPr>
         <p:spPr>
           <a:xfrm>
-            <a:off x="1143000" y="5303520"/>
-            <a:ext cx="9966961" cy="300594"/>
+            <a:off x="960119" y="1554480"/>
+            <a:ext cx="4937762" cy="225708"/>
           </a:xfrm>
           <a:prstGeom prst="rect">
             <a:avLst/>
@@ -5314,12 +5372,204 @@
           <a:lstStyle/>
           <a:p>
             <a:r>
+              <a:rPr sz="1100" b="1">
+                <a:solidFill>
+                  <a:srgbClr val="2D5F7C"/>
+                </a:solidFill>
+              </a:rPr>
+              <a:t>ON SCREEN, DIANA DRIVES</a:t>
+            </a:r>
+          </a:p>
+        </p:txBody>
+      </p:sp>
+      <p:sp>
+        <p:nvSpPr>
+          <p:cNvPr id="10" name="TextBox 9"/>
+          <p:cNvSpPr txBox="1"/>
+          <p:nvPr/>
+        </p:nvSpPr>
+        <p:spPr>
+          <a:xfrm>
+            <a:off x="960119" y="1920239"/>
+            <a:ext cx="4937762" cy="2301589"/>
+          </a:xfrm>
+          <a:prstGeom prst="rect">
+            <a:avLst/>
+          </a:prstGeom>
+          <a:noFill/>
+        </p:spPr>
+        <p:txBody>
+          <a:bodyPr wrap="square">
+            <a:spAutoFit/>
+          </a:bodyPr>
+          <a:lstStyle/>
+          <a:p>
+            <a:r>
+              <a:rPr sz="1800" b="0">
+                <a:solidFill>
+                  <a:srgbClr val="1A2332"/>
+                </a:solidFill>
+              </a:rPr>
+              <a:t>1 · Ungrounded: the same question, no sources</a:t>
+            </a:r>
+          </a:p>
+          <a:p>
+            <a:pPr>
+              <a:spcBef>
+                <a:spcPts val="1000"/>
+              </a:spcBef>
+            </a:pPr>
+            <a:r>
+              <a:rPr sz="1800" b="0">
+                <a:solidFill>
+                  <a:srgbClr val="1A2332"/>
+                </a:solidFill>
+              </a:rPr>
+              <a:t>2 · Grounded: the pre-built notebook answers with citations</a:t>
+            </a:r>
+          </a:p>
+          <a:p>
+            <a:pPr>
+              <a:spcBef>
+                <a:spcPts val="1000"/>
+              </a:spcBef>
+            </a:pPr>
+            <a:r>
+              <a:rPr sz="1800" b="0">
+                <a:solidFill>
+                  <a:srgbClr val="1A2332"/>
+                </a:solidFill>
+              </a:rPr>
+              <a:t>3 · Bonus: a rubric, and 15 seconds of the audio overview</a:t>
+            </a:r>
+          </a:p>
+        </p:txBody>
+      </p:sp>
+      <p:sp>
+        <p:nvSpPr>
+          <p:cNvPr id="11" name="TextBox 10"/>
+          <p:cNvSpPr txBox="1"/>
+          <p:nvPr/>
+        </p:nvSpPr>
+        <p:spPr>
+          <a:xfrm>
+            <a:off x="6903719" y="1554480"/>
+            <a:ext cx="4480562" cy="225708"/>
+          </a:xfrm>
+          <a:prstGeom prst="rect">
+            <a:avLst/>
+          </a:prstGeom>
+          <a:noFill/>
+        </p:spPr>
+        <p:txBody>
+          <a:bodyPr wrap="square">
+            <a:spAutoFit/>
+          </a:bodyPr>
+          <a:lstStyle/>
+          <a:p>
+            <a:r>
+              <a:rPr sz="1100" b="1">
+                <a:solidFill>
+                  <a:srgbClr val="E8833A"/>
+                </a:solidFill>
+              </a:rPr>
+              <a:t>ON YOUR PHONE</a:t>
+            </a:r>
+          </a:p>
+        </p:txBody>
+      </p:sp>
+      <p:sp>
+        <p:nvSpPr>
+          <p:cNvPr id="12" name="TextBox 11"/>
+          <p:cNvSpPr txBox="1"/>
+          <p:nvPr/>
+        </p:nvSpPr>
+        <p:spPr>
+          <a:xfrm>
+            <a:off x="6903719" y="1920239"/>
+            <a:ext cx="4480562" cy="2301589"/>
+          </a:xfrm>
+          <a:prstGeom prst="rect">
+            <a:avLst/>
+          </a:prstGeom>
+          <a:noFill/>
+        </p:spPr>
+        <p:txBody>
+          <a:bodyPr wrap="square">
+            <a:spAutoFit/>
+          </a:bodyPr>
+          <a:lstStyle/>
+          <a:p>
+            <a:r>
+              <a:rPr sz="1600">
+                <a:solidFill>
+                  <a:srgbClr val="1A2332"/>
+                </a:solidFill>
+              </a:rPr>
+              <a:t>The case notebook is pre-built. Link in the guide, Section 4.</a:t>
+            </a:r>
+          </a:p>
+          <a:p>
+            <a:pPr>
+              <a:spcBef>
+                <a:spcPts val="1000"/>
+              </a:spcBef>
+            </a:pPr>
+            <a:r>
+              <a:rPr sz="1600">
+                <a:solidFill>
+                  <a:srgbClr val="1A2332"/>
+                </a:solidFill>
+              </a:rPr>
+              <a:t>Ask the benzocaine question and watch it cite the files.</a:t>
+            </a:r>
+          </a:p>
+          <a:p>
+            <a:pPr>
+              <a:spcBef>
+                <a:spcPts val="1000"/>
+              </a:spcBef>
+            </a:pPr>
+            <a:r>
+              <a:rPr sz="1600">
+                <a:solidFill>
+                  <a:srgbClr val="1A2332"/>
+                </a:solidFill>
+              </a:rPr>
+              <a:t>No NotebookLM account? ChatGPT or Claude work too.</a:t>
+            </a:r>
+          </a:p>
+        </p:txBody>
+      </p:sp>
+      <p:sp>
+        <p:nvSpPr>
+          <p:cNvPr id="13" name="TextBox 12"/>
+          <p:cNvSpPr txBox="1"/>
+          <p:nvPr/>
+        </p:nvSpPr>
+        <p:spPr>
+          <a:xfrm>
+            <a:off x="502919" y="5715000"/>
+            <a:ext cx="11155682" cy="300594"/>
+          </a:xfrm>
+          <a:prstGeom prst="rect">
+            <a:avLst/>
+          </a:prstGeom>
+          <a:noFill/>
+        </p:spPr>
+        <p:txBody>
+          <a:bodyPr wrap="square">
+            <a:spAutoFit/>
+          </a:bodyPr>
+          <a:lstStyle/>
+          <a:p>
+            <a:r>
               <a:rPr sz="1600" b="0">
                 <a:solidFill>
                   <a:srgbClr val="0000FF"/>
                 </a:solidFill>
               </a:rPr>
-              <a:t>Workshop Guide → Section 4</a:t>
+              <a:t>Workshop Guide → Section 4 (Prompt #1)</a:t>
             </a:r>
           </a:p>
         </p:txBody>
@@ -5334,6 +5584,293 @@
 </file>
 
 <file path=ppt/slides/slide13.xml><?xml version="1.0" encoding="utf-8"?>
+<p:sld xmlns:a="http://schemas.openxmlformats.org/drawingml/2006/main" xmlns:r="http://schemas.openxmlformats.org/officeDocument/2006/relationships" xmlns:p="http://schemas.openxmlformats.org/presentationml/2006/main" xmlns:m="http://schemas.openxmlformats.org/officeDocument/2006/math" xmlns:a14="http://schemas.microsoft.com/office/drawing/2010/main" showMasterSp="1" showMasterPhAnim="1">
+  <p:cSld>
+    <p:spTree>
+      <p:nvGrpSpPr>
+        <p:cNvPr id="1" name=""/>
+        <p:cNvGrpSpPr/>
+        <p:nvPr/>
+      </p:nvGrpSpPr>
+      <p:grpSpPr>
+        <a:xfrm>
+          <a:off x="0" y="0"/>
+          <a:ext cx="0" cy="0"/>
+          <a:chOff x="0" y="0"/>
+          <a:chExt cx="0" cy="0"/>
+        </a:xfrm>
+      </p:grpSpPr>
+      <p:sp>
+        <p:nvSpPr>
+          <p:cNvPr id="2" name="Rectangle 1"/>
+          <p:cNvSpPr/>
+          <p:nvPr/>
+        </p:nvSpPr>
+        <p:spPr>
+          <a:xfrm>
+            <a:off x="-1" y="0"/>
+            <a:ext cx="12191697" cy="1005839"/>
+          </a:xfrm>
+          <a:prstGeom prst="rect">
+            <a:avLst/>
+          </a:prstGeom>
+          <a:solidFill>
+            <a:srgbClr val="2D5F7C"/>
+          </a:solidFill>
+          <a:ln>
+            <a:noFill/>
+          </a:ln>
+          <a:effectLst/>
+        </p:spPr>
+        <p:style>
+          <a:lnRef idx="1">
+            <a:schemeClr val="accent1"/>
+          </a:lnRef>
+          <a:fillRef idx="3">
+            <a:schemeClr val="accent1"/>
+          </a:fillRef>
+          <a:effectRef idx="2">
+            <a:schemeClr val="accent1"/>
+          </a:effectRef>
+          <a:fontRef idx="minor">
+            <a:schemeClr val="lt1"/>
+          </a:fontRef>
+        </p:style>
+        <p:txBody>
+          <a:bodyPr rtlCol="0" anchor="ctr"/>
+          <a:lstStyle/>
+          <a:p>
+            <a:pPr algn="ctr"/>
+          </a:p>
+        </p:txBody>
+      </p:sp>
+      <p:sp>
+        <p:nvSpPr>
+          <p:cNvPr id="3" name="Rectangle 2"/>
+          <p:cNvSpPr/>
+          <p:nvPr/>
+        </p:nvSpPr>
+        <p:spPr>
+          <a:xfrm>
+            <a:off x="640080" y="1371600"/>
+            <a:ext cx="10972801" cy="3657600"/>
+          </a:xfrm>
+          <a:prstGeom prst="rect">
+            <a:avLst/>
+          </a:prstGeom>
+          <a:solidFill>
+            <a:srgbClr val="F0F4F8"/>
+          </a:solidFill>
+          <a:ln>
+            <a:noFill/>
+          </a:ln>
+          <a:effectLst/>
+        </p:spPr>
+        <p:style>
+          <a:lnRef idx="1">
+            <a:schemeClr val="accent1"/>
+          </a:lnRef>
+          <a:fillRef idx="3">
+            <a:schemeClr val="accent1"/>
+          </a:fillRef>
+          <a:effectRef idx="2">
+            <a:schemeClr val="accent1"/>
+          </a:effectRef>
+          <a:fontRef idx="minor">
+            <a:schemeClr val="lt1"/>
+          </a:fontRef>
+        </p:style>
+        <p:txBody>
+          <a:bodyPr rtlCol="0" anchor="ctr"/>
+          <a:lstStyle/>
+          <a:p>
+            <a:pPr algn="ctr"/>
+          </a:p>
+        </p:txBody>
+      </p:sp>
+      <p:sp>
+        <p:nvSpPr>
+          <p:cNvPr id="4" name="Rectangle 3"/>
+          <p:cNvSpPr/>
+          <p:nvPr/>
+        </p:nvSpPr>
+        <p:spPr>
+          <a:xfrm>
+            <a:off x="640080" y="1371600"/>
+            <a:ext cx="50801" cy="3657600"/>
+          </a:xfrm>
+          <a:prstGeom prst="rect">
+            <a:avLst/>
+          </a:prstGeom>
+          <a:solidFill>
+            <a:srgbClr val="2D5F7C"/>
+          </a:solidFill>
+          <a:ln>
+            <a:noFill/>
+          </a:ln>
+          <a:effectLst/>
+        </p:spPr>
+        <p:style>
+          <a:lnRef idx="1">
+            <a:schemeClr val="accent1"/>
+          </a:lnRef>
+          <a:fillRef idx="3">
+            <a:schemeClr val="accent1"/>
+          </a:fillRef>
+          <a:effectRef idx="2">
+            <a:schemeClr val="accent1"/>
+          </a:effectRef>
+          <a:fontRef idx="minor">
+            <a:schemeClr val="lt1"/>
+          </a:fontRef>
+        </p:style>
+        <p:txBody>
+          <a:bodyPr rtlCol="0" anchor="ctr"/>
+          <a:lstStyle/>
+          <a:p>
+            <a:pPr algn="ctr"/>
+          </a:p>
+        </p:txBody>
+      </p:sp>
+      <p:sp>
+        <p:nvSpPr>
+          <p:cNvPr id="5" name="TextBox 4"/>
+          <p:cNvSpPr txBox="1"/>
+          <p:nvPr/>
+        </p:nvSpPr>
+        <p:spPr>
+          <a:xfrm>
+            <a:off x="502919" y="182879"/>
+            <a:ext cx="11155682" cy="444759"/>
+          </a:xfrm>
+          <a:prstGeom prst="rect">
+            <a:avLst/>
+          </a:prstGeom>
+          <a:noFill/>
+        </p:spPr>
+        <p:txBody>
+          <a:bodyPr wrap="square">
+            <a:spAutoFit/>
+          </a:bodyPr>
+          <a:lstStyle/>
+          <a:p>
+            <a:r>
+              <a:rPr sz="2800" b="1">
+                <a:solidFill>
+                  <a:srgbClr val="FFFFFF"/>
+                </a:solidFill>
+              </a:rPr>
+              <a:t>Think · Pair · Share: Try It Now (4 min)</a:t>
+            </a:r>
+          </a:p>
+        </p:txBody>
+      </p:sp>
+      <p:sp>
+        <p:nvSpPr>
+          <p:cNvPr id="6" name="TextBox 5"/>
+          <p:cNvSpPr txBox="1"/>
+          <p:nvPr/>
+        </p:nvSpPr>
+        <p:spPr>
+          <a:xfrm>
+            <a:off x="1143000" y="1828800"/>
+            <a:ext cx="9966961" cy="1985576"/>
+          </a:xfrm>
+          <a:prstGeom prst="rect">
+            <a:avLst/>
+          </a:prstGeom>
+          <a:noFill/>
+        </p:spPr>
+        <p:txBody>
+          <a:bodyPr wrap="square">
+            <a:spAutoFit/>
+          </a:bodyPr>
+          <a:lstStyle/>
+          <a:p>
+            <a:r>
+              <a:rPr sz="2200">
+                <a:solidFill>
+                  <a:srgbClr val="1E4258"/>
+                </a:solidFill>
+              </a:rPr>
+              <a:t>The grounded contrast: open the pre-built case notebook (guide, Section 4), or build your own in NotebookLM, ChatGPT, or Claude.</a:t>
+            </a:r>
+          </a:p>
+          <a:p>
+            <a:pPr>
+              <a:spcBef>
+                <a:spcPts val="1000"/>
+              </a:spcBef>
+            </a:pPr>
+            <a:r>
+              <a:rPr sz="2200">
+                <a:solidFill>
+                  <a:srgbClr val="1E4258"/>
+                </a:solidFill>
+              </a:rPr>
+              <a:t>Upload files 1 and 2, run Prompt #1: the same 19-year-old, now with citations.</a:t>
+            </a:r>
+          </a:p>
+          <a:p>
+            <a:pPr>
+              <a:spcBef>
+                <a:spcPts val="1000"/>
+              </a:spcBef>
+            </a:pPr>
+            <a:r>
+              <a:rPr sz="2200">
+                <a:solidFill>
+                  <a:srgbClr val="1E4258"/>
+                </a:solidFill>
+              </a:rPr>
+              <a:t>Compare with Section 3's run: what did the AI invent, skip, or get right?</a:t>
+            </a:r>
+          </a:p>
+        </p:txBody>
+      </p:sp>
+      <p:sp>
+        <p:nvSpPr>
+          <p:cNvPr id="7" name="TextBox 6"/>
+          <p:cNvSpPr txBox="1"/>
+          <p:nvPr/>
+        </p:nvSpPr>
+        <p:spPr>
+          <a:xfrm>
+            <a:off x="1143000" y="5303520"/>
+            <a:ext cx="9966961" cy="300594"/>
+          </a:xfrm>
+          <a:prstGeom prst="rect">
+            <a:avLst/>
+          </a:prstGeom>
+          <a:noFill/>
+        </p:spPr>
+        <p:txBody>
+          <a:bodyPr wrap="square">
+            <a:spAutoFit/>
+          </a:bodyPr>
+          <a:lstStyle/>
+          <a:p>
+            <a:r>
+              <a:rPr sz="1600" b="0">
+                <a:solidFill>
+                  <a:srgbClr val="0000FF"/>
+                </a:solidFill>
+              </a:rPr>
+              <a:t>Workshop Guide → Section 4</a:t>
+            </a:r>
+          </a:p>
+        </p:txBody>
+      </p:sp>
+    </p:spTree>
+  </p:cSld>
+  <p:clrMapOvr>
+    <a:masterClrMapping/>
+  </p:clrMapOvr>
+  <p:transition xmlns:p14="http://schemas.microsoft.com/office/powerpoint/2010/main" spd="med" advClick="1"/>
+</p:sld>
+</file>
+
+<file path=ppt/slides/slide14.xml><?xml version="1.0" encoding="utf-8"?>
 <p:sld xmlns:a="http://schemas.openxmlformats.org/drawingml/2006/main" xmlns:r="http://schemas.openxmlformats.org/officeDocument/2006/relationships" xmlns:p="http://schemas.openxmlformats.org/presentationml/2006/main" xmlns:m="http://schemas.openxmlformats.org/officeDocument/2006/math" xmlns:a14="http://schemas.microsoft.com/office/drawing/2010/main" showMasterSp="1" showMasterPhAnim="1">
   <p:cSld>
     <p:bg>
@@ -5504,7 +6041,7 @@
             <a:pPr/>
             <a:r>
               <a:rPr/>
-              <a:t>Objective 3: Simulation Spectrum</a:t>
+              <a:t>Section 5: Simulation Spectrum</a:t>
             </a:r>
           </a:p>
         </p:txBody>
@@ -5549,574 +6086,7 @@
             <a:pPr/>
             <a:r>
               <a:rPr/>
-              <a:t>Match the technology to the learning goal, from text to VR · Guide → Section 5</a:t>
-            </a:r>
-          </a:p>
-        </p:txBody>
-      </p:sp>
-    </p:spTree>
-  </p:cSld>
-  <p:clrMapOvr>
-    <a:masterClrMapping/>
-  </p:clrMapOvr>
-  <p:transition xmlns:p14="http://schemas.microsoft.com/office/powerpoint/2010/main" spd="med" advClick="1"/>
-</p:sld>
-</file>
-
-<file path=ppt/slides/slide14.xml><?xml version="1.0" encoding="utf-8"?>
-<p:sld xmlns:a="http://schemas.openxmlformats.org/drawingml/2006/main" xmlns:r="http://schemas.openxmlformats.org/officeDocument/2006/relationships" xmlns:p="http://schemas.openxmlformats.org/presentationml/2006/main" xmlns:m="http://schemas.openxmlformats.org/officeDocument/2006/math" xmlns:a14="http://schemas.microsoft.com/office/drawing/2010/main" showMasterSp="1" showMasterPhAnim="1">
-  <p:cSld>
-    <p:spTree>
-      <p:nvGrpSpPr>
-        <p:cNvPr id="1" name=""/>
-        <p:cNvGrpSpPr/>
-        <p:nvPr/>
-      </p:nvGrpSpPr>
-      <p:grpSpPr>
-        <a:xfrm>
-          <a:off x="0" y="0"/>
-          <a:ext cx="0" cy="0"/>
-          <a:chOff x="0" y="0"/>
-          <a:chExt cx="0" cy="0"/>
-        </a:xfrm>
-      </p:grpSpPr>
-      <p:sp>
-        <p:nvSpPr>
-          <p:cNvPr id="2" name="Rectangle 1"/>
-          <p:cNvSpPr/>
-          <p:nvPr/>
-        </p:nvSpPr>
-        <p:spPr>
-          <a:xfrm>
-            <a:off x="-1" y="0"/>
-            <a:ext cx="12191697" cy="1005839"/>
-          </a:xfrm>
-          <a:prstGeom prst="rect">
-            <a:avLst/>
-          </a:prstGeom>
-          <a:solidFill>
-            <a:srgbClr val="2D5F7C"/>
-          </a:solidFill>
-          <a:ln>
-            <a:noFill/>
-          </a:ln>
-          <a:effectLst/>
-        </p:spPr>
-        <p:style>
-          <a:lnRef idx="1">
-            <a:schemeClr val="accent1"/>
-          </a:lnRef>
-          <a:fillRef idx="3">
-            <a:schemeClr val="accent1"/>
-          </a:fillRef>
-          <a:effectRef idx="2">
-            <a:schemeClr val="accent1"/>
-          </a:effectRef>
-          <a:fontRef idx="minor">
-            <a:schemeClr val="lt1"/>
-          </a:fontRef>
-        </p:style>
-        <p:txBody>
-          <a:bodyPr rtlCol="0" anchor="ctr"/>
-          <a:lstStyle/>
-          <a:p>
-            <a:pPr algn="ctr"/>
-          </a:p>
-        </p:txBody>
-      </p:sp>
-      <p:sp>
-        <p:nvSpPr>
-          <p:cNvPr id="3" name="Rectangle 2"/>
-          <p:cNvSpPr/>
-          <p:nvPr/>
-        </p:nvSpPr>
-        <p:spPr>
-          <a:xfrm>
-            <a:off x="640080" y="1371600"/>
-            <a:ext cx="5486401" cy="4114800"/>
-          </a:xfrm>
-          <a:prstGeom prst="rect">
-            <a:avLst/>
-          </a:prstGeom>
-          <a:solidFill>
-            <a:srgbClr val="F0F4F8"/>
-          </a:solidFill>
-          <a:ln>
-            <a:noFill/>
-          </a:ln>
-          <a:effectLst/>
-        </p:spPr>
-        <p:style>
-          <a:lnRef idx="1">
-            <a:schemeClr val="accent1"/>
-          </a:lnRef>
-          <a:fillRef idx="3">
-            <a:schemeClr val="accent1"/>
-          </a:fillRef>
-          <a:effectRef idx="2">
-            <a:schemeClr val="accent1"/>
-          </a:effectRef>
-          <a:fontRef idx="minor">
-            <a:schemeClr val="lt1"/>
-          </a:fontRef>
-        </p:style>
-        <p:txBody>
-          <a:bodyPr rtlCol="0" anchor="ctr"/>
-          <a:lstStyle/>
-          <a:p>
-            <a:pPr algn="ctr"/>
-          </a:p>
-        </p:txBody>
-      </p:sp>
-      <p:sp>
-        <p:nvSpPr>
-          <p:cNvPr id="4" name="Rectangle 3"/>
-          <p:cNvSpPr/>
-          <p:nvPr/>
-        </p:nvSpPr>
-        <p:spPr>
-          <a:xfrm>
-            <a:off x="640080" y="1371600"/>
-            <a:ext cx="50801" cy="4114800"/>
-          </a:xfrm>
-          <a:prstGeom prst="rect">
-            <a:avLst/>
-          </a:prstGeom>
-          <a:solidFill>
-            <a:srgbClr val="2D5F7C"/>
-          </a:solidFill>
-          <a:ln>
-            <a:noFill/>
-          </a:ln>
-          <a:effectLst/>
-        </p:spPr>
-        <p:style>
-          <a:lnRef idx="1">
-            <a:schemeClr val="accent1"/>
-          </a:lnRef>
-          <a:fillRef idx="3">
-            <a:schemeClr val="accent1"/>
-          </a:fillRef>
-          <a:effectRef idx="2">
-            <a:schemeClr val="accent1"/>
-          </a:effectRef>
-          <a:fontRef idx="minor">
-            <a:schemeClr val="lt1"/>
-          </a:fontRef>
-        </p:style>
-        <p:txBody>
-          <a:bodyPr rtlCol="0" anchor="ctr"/>
-          <a:lstStyle/>
-          <a:p>
-            <a:pPr algn="ctr"/>
-          </a:p>
-        </p:txBody>
-      </p:sp>
-      <p:sp>
-        <p:nvSpPr>
-          <p:cNvPr id="5" name="Rectangle 4"/>
-          <p:cNvSpPr/>
-          <p:nvPr/>
-        </p:nvSpPr>
-        <p:spPr>
-          <a:xfrm>
-            <a:off x="6583680" y="1371600"/>
-            <a:ext cx="5029201" cy="4114800"/>
-          </a:xfrm>
-          <a:prstGeom prst="rect">
-            <a:avLst/>
-          </a:prstGeom>
-          <a:solidFill>
-            <a:srgbClr val="FDF6F0"/>
-          </a:solidFill>
-          <a:ln>
-            <a:noFill/>
-          </a:ln>
-          <a:effectLst/>
-        </p:spPr>
-        <p:style>
-          <a:lnRef idx="1">
-            <a:schemeClr val="accent1"/>
-          </a:lnRef>
-          <a:fillRef idx="3">
-            <a:schemeClr val="accent1"/>
-          </a:fillRef>
-          <a:effectRef idx="2">
-            <a:schemeClr val="accent1"/>
-          </a:effectRef>
-          <a:fontRef idx="minor">
-            <a:schemeClr val="lt1"/>
-          </a:fontRef>
-        </p:style>
-        <p:txBody>
-          <a:bodyPr rtlCol="0" anchor="ctr"/>
-          <a:lstStyle/>
-          <a:p>
-            <a:pPr algn="ctr"/>
-          </a:p>
-        </p:txBody>
-      </p:sp>
-      <p:sp>
-        <p:nvSpPr>
-          <p:cNvPr id="6" name="Rectangle 5"/>
-          <p:cNvSpPr/>
-          <p:nvPr/>
-        </p:nvSpPr>
-        <p:spPr>
-          <a:xfrm>
-            <a:off x="6583680" y="1371600"/>
-            <a:ext cx="50801" cy="4114800"/>
-          </a:xfrm>
-          <a:prstGeom prst="rect">
-            <a:avLst/>
-          </a:prstGeom>
-          <a:solidFill>
-            <a:srgbClr val="E8833A"/>
-          </a:solidFill>
-          <a:ln>
-            <a:noFill/>
-          </a:ln>
-          <a:effectLst/>
-        </p:spPr>
-        <p:style>
-          <a:lnRef idx="1">
-            <a:schemeClr val="accent1"/>
-          </a:lnRef>
-          <a:fillRef idx="3">
-            <a:schemeClr val="accent1"/>
-          </a:fillRef>
-          <a:effectRef idx="2">
-            <a:schemeClr val="accent1"/>
-          </a:effectRef>
-          <a:fontRef idx="minor">
-            <a:schemeClr val="lt1"/>
-          </a:fontRef>
-        </p:style>
-        <p:txBody>
-          <a:bodyPr rtlCol="0" anchor="ctr"/>
-          <a:lstStyle/>
-          <a:p>
-            <a:pPr algn="ctr"/>
-          </a:p>
-        </p:txBody>
-      </p:sp>
-      <p:sp>
-        <p:nvSpPr>
-          <p:cNvPr id="7" name="TextBox 6"/>
-          <p:cNvSpPr txBox="1"/>
-          <p:nvPr/>
-        </p:nvSpPr>
-        <p:spPr>
-          <a:xfrm>
-            <a:off x="502919" y="182879"/>
-            <a:ext cx="11155682" cy="444759"/>
-          </a:xfrm>
-          <a:prstGeom prst="rect">
-            <a:avLst/>
-          </a:prstGeom>
-          <a:noFill/>
-        </p:spPr>
-        <p:txBody>
-          <a:bodyPr wrap="square">
-            <a:spAutoFit/>
-          </a:bodyPr>
-          <a:lstStyle/>
-          <a:p>
-            <a:r>
-              <a:rPr sz="2800" b="1">
-                <a:solidFill>
-                  <a:srgbClr val="FFFFFF"/>
-                </a:solidFill>
-              </a:rPr>
-              <a:t>The Fidelity Spectrum</a:t>
-            </a:r>
-          </a:p>
-        </p:txBody>
-      </p:sp>
-      <p:sp>
-        <p:nvSpPr>
-          <p:cNvPr id="8" name="TextBox 7"/>
-          <p:cNvSpPr txBox="1"/>
-          <p:nvPr/>
-        </p:nvSpPr>
-        <p:spPr>
-          <a:xfrm>
-            <a:off x="502919" y="1097280"/>
-            <a:ext cx="11155682" cy="300594"/>
-          </a:xfrm>
-          <a:prstGeom prst="rect">
-            <a:avLst/>
-          </a:prstGeom>
-          <a:noFill/>
-        </p:spPr>
-        <p:txBody>
-          <a:bodyPr wrap="square">
-            <a:spAutoFit/>
-          </a:bodyPr>
-          <a:lstStyle/>
-          <a:p>
-            <a:r>
-              <a:rPr sz="1600" b="0">
-                <a:solidFill>
-                  <a:srgbClr val="5B6B7C"/>
-                </a:solidFill>
-              </a:rPr>
-              <a:t>Match the tool to the goal, not the other way around</a:t>
-            </a:r>
-          </a:p>
-        </p:txBody>
-      </p:sp>
-      <p:sp>
-        <p:nvSpPr>
-          <p:cNvPr id="9" name="TextBox 8"/>
-          <p:cNvSpPr txBox="1"/>
-          <p:nvPr/>
-        </p:nvSpPr>
-        <p:spPr>
-          <a:xfrm>
-            <a:off x="960119" y="1554480"/>
-            <a:ext cx="4937762" cy="225708"/>
-          </a:xfrm>
-          <a:prstGeom prst="rect">
-            <a:avLst/>
-          </a:prstGeom>
-          <a:noFill/>
-        </p:spPr>
-        <p:txBody>
-          <a:bodyPr wrap="square">
-            <a:spAutoFit/>
-          </a:bodyPr>
-          <a:lstStyle/>
-          <a:p>
-            <a:r>
-              <a:rPr sz="1100" b="1">
-                <a:solidFill>
-                  <a:srgbClr val="2D5F7C"/>
-                </a:solidFill>
-              </a:rPr>
-              <a:t>THE SPECTRUM, LEFT TO RIGHT</a:t>
-            </a:r>
-          </a:p>
-        </p:txBody>
-      </p:sp>
-      <p:sp>
-        <p:nvSpPr>
-          <p:cNvPr id="10" name="TextBox 9"/>
-          <p:cNvSpPr txBox="1"/>
-          <p:nvPr/>
-        </p:nvSpPr>
-        <p:spPr>
-          <a:xfrm>
-            <a:off x="960119" y="1920239"/>
-            <a:ext cx="4937762" cy="2301589"/>
-          </a:xfrm>
-          <a:prstGeom prst="rect">
-            <a:avLst/>
-          </a:prstGeom>
-          <a:noFill/>
-        </p:spPr>
-        <p:txBody>
-          <a:bodyPr wrap="square">
-            <a:spAutoFit/>
-          </a:bodyPr>
-          <a:lstStyle/>
-          <a:p>
-            <a:r>
-              <a:rPr sz="1800" b="0">
-                <a:solidFill>
-                  <a:srgbClr val="1A2332"/>
-                </a:solidFill>
-              </a:rPr>
-              <a:t>• Text and audio, $0 to $20/mo</a:t>
-            </a:r>
-          </a:p>
-          <a:p>
-            <a:pPr>
-              <a:spcBef>
-                <a:spcPts val="1000"/>
-              </a:spcBef>
-            </a:pPr>
-            <a:r>
-              <a:rPr sz="1800" b="0">
-                <a:solidFill>
-                  <a:srgbClr val="1A2332"/>
-                </a:solidFill>
-              </a:rPr>
-              <a:t>• Image-based, free to $25</a:t>
-            </a:r>
-          </a:p>
-          <a:p>
-            <a:pPr>
-              <a:spcBef>
-                <a:spcPts val="1000"/>
-              </a:spcBef>
-            </a:pPr>
-            <a:r>
-              <a:rPr sz="1800" b="0">
-                <a:solidFill>
-                  <a:srgbClr val="1A2332"/>
-                </a:solidFill>
-              </a:rPr>
-              <a:t>• Screen-based, free trials</a:t>
-            </a:r>
-          </a:p>
-          <a:p>
-            <a:pPr>
-              <a:spcBef>
-                <a:spcPts val="1000"/>
-              </a:spcBef>
-            </a:pPr>
-            <a:r>
-              <a:rPr sz="1800" b="0">
-                <a:solidFill>
-                  <a:srgbClr val="1A2332"/>
-                </a:solidFill>
-              </a:rPr>
-              <a:t>• AR on your phone, free to $25</a:t>
-            </a:r>
-          </a:p>
-          <a:p>
-            <a:pPr>
-              <a:spcBef>
-                <a:spcPts val="1000"/>
-              </a:spcBef>
-            </a:pPr>
-            <a:r>
-              <a:rPr sz="1800" b="0">
-                <a:solidFill>
-                  <a:srgbClr val="1A2332"/>
-                </a:solidFill>
-              </a:rPr>
-              <a:t>• Immersive VR, $100 to $600</a:t>
-            </a:r>
-          </a:p>
-        </p:txBody>
-      </p:sp>
-      <p:sp>
-        <p:nvSpPr>
-          <p:cNvPr id="11" name="TextBox 10"/>
-          <p:cNvSpPr txBox="1"/>
-          <p:nvPr/>
-        </p:nvSpPr>
-        <p:spPr>
-          <a:xfrm>
-            <a:off x="6903719" y="1554480"/>
-            <a:ext cx="4480562" cy="225708"/>
-          </a:xfrm>
-          <a:prstGeom prst="rect">
-            <a:avLst/>
-          </a:prstGeom>
-          <a:noFill/>
-        </p:spPr>
-        <p:txBody>
-          <a:bodyPr wrap="square">
-            <a:spAutoFit/>
-          </a:bodyPr>
-          <a:lstStyle/>
-          <a:p>
-            <a:r>
-              <a:rPr sz="1100" b="1">
-                <a:solidFill>
-                  <a:srgbClr val="E8833A"/>
-                </a:solidFill>
-              </a:rPr>
-              <a:t>WHERE REASONING LIVES</a:t>
-            </a:r>
-          </a:p>
-        </p:txBody>
-      </p:sp>
-      <p:sp>
-        <p:nvSpPr>
-          <p:cNvPr id="12" name="TextBox 11"/>
-          <p:cNvSpPr txBox="1"/>
-          <p:nvPr/>
-        </p:nvSpPr>
-        <p:spPr>
-          <a:xfrm>
-            <a:off x="6903719" y="1920239"/>
-            <a:ext cx="4480562" cy="2301589"/>
-          </a:xfrm>
-          <a:prstGeom prst="rect">
-            <a:avLst/>
-          </a:prstGeom>
-          <a:noFill/>
-        </p:spPr>
-        <p:txBody>
-          <a:bodyPr wrap="square">
-            <a:spAutoFit/>
-          </a:bodyPr>
-          <a:lstStyle/>
-          <a:p>
-            <a:r>
-              <a:rPr sz="1800" b="0">
-                <a:solidFill>
-                  <a:srgbClr val="1A2332"/>
-                </a:solidFill>
-              </a:rPr>
-              <a:t>Text and audio, images included: ECG, X-ray, CT, labs.</a:t>
-            </a:r>
-          </a:p>
-          <a:p>
-            <a:pPr>
-              <a:spcBef>
-                <a:spcPts val="1000"/>
-              </a:spcBef>
-            </a:pPr>
-            <a:r>
-              <a:rPr sz="1800" b="0">
-                <a:solidFill>
-                  <a:srgbClr val="1A2332"/>
-                </a:solidFill>
-              </a:rPr>
-              <a:t>The uncanny valley of avatar tools is real.</a:t>
-            </a:r>
-          </a:p>
-          <a:p>
-            <a:pPr>
-              <a:spcBef>
-                <a:spcPts val="1000"/>
-              </a:spcBef>
-            </a:pPr>
-            <a:r>
-              <a:rPr sz="1800" b="0">
-                <a:solidFill>
-                  <a:srgbClr val="1A2332"/>
-                </a:solidFill>
-              </a:rPr>
-              <a:t>Sapient Clinician does this well (see the COI slide).</a:t>
-            </a:r>
-          </a:p>
-        </p:txBody>
-      </p:sp>
-      <p:sp>
-        <p:nvSpPr>
-          <p:cNvPr id="13" name="TextBox 12"/>
-          <p:cNvSpPr txBox="1"/>
-          <p:nvPr/>
-        </p:nvSpPr>
-        <p:spPr>
-          <a:xfrm>
-            <a:off x="502919" y="5715000"/>
-            <a:ext cx="11155682" cy="300594"/>
-          </a:xfrm>
-          <a:prstGeom prst="rect">
-            <a:avLst/>
-          </a:prstGeom>
-          <a:noFill/>
-        </p:spPr>
-        <p:txBody>
-          <a:bodyPr wrap="square">
-            <a:spAutoFit/>
-          </a:bodyPr>
-          <a:lstStyle/>
-          <a:p>
-            <a:r>
-              <a:rPr sz="1600" b="0">
-                <a:solidFill>
-                  <a:srgbClr val="0000FF"/>
-                </a:solidFill>
-              </a:rPr>
-              <a:t>Workshop Guide → Section 5</a:t>
+              <a:t>Match the technology to the learning goal, from text to VR</a:t>
             </a:r>
           </a:p>
         </p:txBody>
@@ -6200,7 +6170,7 @@
         <p:spPr>
           <a:xfrm>
             <a:off x="640080" y="1371600"/>
-            <a:ext cx="10972801" cy="3657600"/>
+            <a:ext cx="5486401" cy="4114800"/>
           </a:xfrm>
           <a:prstGeom prst="rect">
             <a:avLst/>
@@ -6244,7 +6214,7 @@
         <p:spPr>
           <a:xfrm>
             <a:off x="640080" y="1371600"/>
-            <a:ext cx="50801" cy="3657600"/>
+            <a:ext cx="50801" cy="4114800"/>
           </a:xfrm>
           <a:prstGeom prst="rect">
             <a:avLst/>
@@ -6281,7 +6251,95 @@
       </p:sp>
       <p:sp>
         <p:nvSpPr>
-          <p:cNvPr id="5" name="TextBox 4"/>
+          <p:cNvPr id="5" name="Rectangle 4"/>
+          <p:cNvSpPr/>
+          <p:nvPr/>
+        </p:nvSpPr>
+        <p:spPr>
+          <a:xfrm>
+            <a:off x="6583680" y="1371600"/>
+            <a:ext cx="5029201" cy="4114800"/>
+          </a:xfrm>
+          <a:prstGeom prst="rect">
+            <a:avLst/>
+          </a:prstGeom>
+          <a:solidFill>
+            <a:srgbClr val="FDF6F0"/>
+          </a:solidFill>
+          <a:ln>
+            <a:noFill/>
+          </a:ln>
+          <a:effectLst/>
+        </p:spPr>
+        <p:style>
+          <a:lnRef idx="1">
+            <a:schemeClr val="accent1"/>
+          </a:lnRef>
+          <a:fillRef idx="3">
+            <a:schemeClr val="accent1"/>
+          </a:fillRef>
+          <a:effectRef idx="2">
+            <a:schemeClr val="accent1"/>
+          </a:effectRef>
+          <a:fontRef idx="minor">
+            <a:schemeClr val="lt1"/>
+          </a:fontRef>
+        </p:style>
+        <p:txBody>
+          <a:bodyPr rtlCol="0" anchor="ctr"/>
+          <a:lstStyle/>
+          <a:p>
+            <a:pPr algn="ctr"/>
+          </a:p>
+        </p:txBody>
+      </p:sp>
+      <p:sp>
+        <p:nvSpPr>
+          <p:cNvPr id="6" name="Rectangle 5"/>
+          <p:cNvSpPr/>
+          <p:nvPr/>
+        </p:nvSpPr>
+        <p:spPr>
+          <a:xfrm>
+            <a:off x="6583680" y="1371600"/>
+            <a:ext cx="50801" cy="4114800"/>
+          </a:xfrm>
+          <a:prstGeom prst="rect">
+            <a:avLst/>
+          </a:prstGeom>
+          <a:solidFill>
+            <a:srgbClr val="E8833A"/>
+          </a:solidFill>
+          <a:ln>
+            <a:noFill/>
+          </a:ln>
+          <a:effectLst/>
+        </p:spPr>
+        <p:style>
+          <a:lnRef idx="1">
+            <a:schemeClr val="accent1"/>
+          </a:lnRef>
+          <a:fillRef idx="3">
+            <a:schemeClr val="accent1"/>
+          </a:fillRef>
+          <a:effectRef idx="2">
+            <a:schemeClr val="accent1"/>
+          </a:effectRef>
+          <a:fontRef idx="minor">
+            <a:schemeClr val="lt1"/>
+          </a:fontRef>
+        </p:style>
+        <p:txBody>
+          <a:bodyPr rtlCol="0" anchor="ctr"/>
+          <a:lstStyle/>
+          <a:p>
+            <a:pPr algn="ctr"/>
+          </a:p>
+        </p:txBody>
+      </p:sp>
+      <p:sp>
+        <p:nvSpPr>
+          <p:cNvPr id="7" name="TextBox 6"/>
           <p:cNvSpPr txBox="1"/>
           <p:nvPr/>
         </p:nvSpPr>
@@ -6307,21 +6365,21 @@
                   <a:srgbClr val="FFFFFF"/>
                 </a:solidFill>
               </a:rPr>
-              <a:t>Think · Pair · Share: Match the Tool (2 min)</a:t>
-            </a:r>
-          </a:p>
-        </p:txBody>
-      </p:sp>
-      <p:sp>
-        <p:nvSpPr>
-          <p:cNvPr id="6" name="TextBox 5"/>
+              <a:t>The Fidelity Spectrum</a:t>
+            </a:r>
+          </a:p>
+        </p:txBody>
+      </p:sp>
+      <p:sp>
+        <p:nvSpPr>
+          <p:cNvPr id="8" name="TextBox 7"/>
           <p:cNvSpPr txBox="1"/>
           <p:nvPr/>
         </p:nvSpPr>
         <p:spPr>
           <a:xfrm>
-            <a:off x="1143000" y="1828800"/>
-            <a:ext cx="9966961" cy="1985576"/>
+            <a:off x="502919" y="1097280"/>
+            <a:ext cx="11155682" cy="300594"/>
           </a:xfrm>
           <a:prstGeom prst="rect">
             <a:avLst/>
@@ -6335,41 +6393,248 @@
           <a:lstStyle/>
           <a:p>
             <a:r>
-              <a:rPr sz="2200" b="0">
-                <a:solidFill>
-                  <a:srgbClr val="1E4258"/>
+              <a:rPr sz="1600" b="0">
+                <a:solidFill>
+                  <a:srgbClr val="5B6B7C"/>
                 </a:solidFill>
               </a:rPr>
-              <a:t>Pick a clinical skill your fellows need to learn.</a:t>
+              <a:t>Match the tool to the goal, not the other way around</a:t>
+            </a:r>
+          </a:p>
+        </p:txBody>
+      </p:sp>
+      <p:sp>
+        <p:nvSpPr>
+          <p:cNvPr id="9" name="TextBox 8"/>
+          <p:cNvSpPr txBox="1"/>
+          <p:nvPr/>
+        </p:nvSpPr>
+        <p:spPr>
+          <a:xfrm>
+            <a:off x="960119" y="1554480"/>
+            <a:ext cx="4937762" cy="225708"/>
+          </a:xfrm>
+          <a:prstGeom prst="rect">
+            <a:avLst/>
+          </a:prstGeom>
+          <a:noFill/>
+        </p:spPr>
+        <p:txBody>
+          <a:bodyPr wrap="square">
+            <a:spAutoFit/>
+          </a:bodyPr>
+          <a:lstStyle/>
+          <a:p>
+            <a:r>
+              <a:rPr sz="1100" b="1">
+                <a:solidFill>
+                  <a:srgbClr val="2D5F7C"/>
+                </a:solidFill>
+              </a:rPr>
+              <a:t>THE SPECTRUM, LEFT TO RIGHT</a:t>
+            </a:r>
+          </a:p>
+        </p:txBody>
+      </p:sp>
+      <p:sp>
+        <p:nvSpPr>
+          <p:cNvPr id="10" name="TextBox 9"/>
+          <p:cNvSpPr txBox="1"/>
+          <p:nvPr/>
+        </p:nvSpPr>
+        <p:spPr>
+          <a:xfrm>
+            <a:off x="960119" y="1920239"/>
+            <a:ext cx="4937762" cy="2301589"/>
+          </a:xfrm>
+          <a:prstGeom prst="rect">
+            <a:avLst/>
+          </a:prstGeom>
+          <a:noFill/>
+        </p:spPr>
+        <p:txBody>
+          <a:bodyPr wrap="square">
+            <a:spAutoFit/>
+          </a:bodyPr>
+          <a:lstStyle/>
+          <a:p>
+            <a:r>
+              <a:rPr sz="1800" b="0">
+                <a:solidFill>
+                  <a:srgbClr val="1A2332"/>
+                </a:solidFill>
+              </a:rPr>
+              <a:t>• Text and audio, $0 to $20/mo</a:t>
             </a:r>
           </a:p>
           <a:p>
             <a:pPr>
               <a:spcBef>
-                <a:spcPts val="1600"/>
+                <a:spcPts val="1000"/>
               </a:spcBef>
             </a:pPr>
             <a:r>
-              <a:rPr sz="2200" b="0">
-                <a:solidFill>
-                  <a:srgbClr val="1E4258"/>
+              <a:rPr sz="1800" b="0">
+                <a:solidFill>
+                  <a:srgbClr val="1A2332"/>
                 </a:solidFill>
               </a:rPr>
-              <a:t>Which point on the spectrum fits, and would the free option do the job?</a:t>
-            </a:r>
-          </a:p>
-        </p:txBody>
-      </p:sp>
-      <p:sp>
-        <p:nvSpPr>
-          <p:cNvPr id="7" name="TextBox 6"/>
+              <a:t>• Image-based, free to $25</a:t>
+            </a:r>
+          </a:p>
+          <a:p>
+            <a:pPr>
+              <a:spcBef>
+                <a:spcPts val="1000"/>
+              </a:spcBef>
+            </a:pPr>
+            <a:r>
+              <a:rPr sz="1800" b="0">
+                <a:solidFill>
+                  <a:srgbClr val="1A2332"/>
+                </a:solidFill>
+              </a:rPr>
+              <a:t>• Screen-based, free trials</a:t>
+            </a:r>
+          </a:p>
+          <a:p>
+            <a:pPr>
+              <a:spcBef>
+                <a:spcPts val="1000"/>
+              </a:spcBef>
+            </a:pPr>
+            <a:r>
+              <a:rPr sz="1800" b="0">
+                <a:solidFill>
+                  <a:srgbClr val="1A2332"/>
+                </a:solidFill>
+              </a:rPr>
+              <a:t>• AR on your phone, free to $25</a:t>
+            </a:r>
+          </a:p>
+          <a:p>
+            <a:pPr>
+              <a:spcBef>
+                <a:spcPts val="1000"/>
+              </a:spcBef>
+            </a:pPr>
+            <a:r>
+              <a:rPr sz="1800" b="0">
+                <a:solidFill>
+                  <a:srgbClr val="1A2332"/>
+                </a:solidFill>
+              </a:rPr>
+              <a:t>• Immersive VR, $100 to $600</a:t>
+            </a:r>
+          </a:p>
+        </p:txBody>
+      </p:sp>
+      <p:sp>
+        <p:nvSpPr>
+          <p:cNvPr id="11" name="TextBox 10"/>
           <p:cNvSpPr txBox="1"/>
           <p:nvPr/>
         </p:nvSpPr>
         <p:spPr>
           <a:xfrm>
-            <a:off x="1143000" y="5303520"/>
-            <a:ext cx="9966961" cy="300594"/>
+            <a:off x="6903719" y="1554480"/>
+            <a:ext cx="4480562" cy="225708"/>
+          </a:xfrm>
+          <a:prstGeom prst="rect">
+            <a:avLst/>
+          </a:prstGeom>
+          <a:noFill/>
+        </p:spPr>
+        <p:txBody>
+          <a:bodyPr wrap="square">
+            <a:spAutoFit/>
+          </a:bodyPr>
+          <a:lstStyle/>
+          <a:p>
+            <a:r>
+              <a:rPr sz="1100" b="1">
+                <a:solidFill>
+                  <a:srgbClr val="E8833A"/>
+                </a:solidFill>
+              </a:rPr>
+              <a:t>WHERE REASONING LIVES</a:t>
+            </a:r>
+          </a:p>
+        </p:txBody>
+      </p:sp>
+      <p:sp>
+        <p:nvSpPr>
+          <p:cNvPr id="12" name="TextBox 11"/>
+          <p:cNvSpPr txBox="1"/>
+          <p:nvPr/>
+        </p:nvSpPr>
+        <p:spPr>
+          <a:xfrm>
+            <a:off x="6903719" y="1920239"/>
+            <a:ext cx="4480562" cy="2301589"/>
+          </a:xfrm>
+          <a:prstGeom prst="rect">
+            <a:avLst/>
+          </a:prstGeom>
+          <a:noFill/>
+        </p:spPr>
+        <p:txBody>
+          <a:bodyPr wrap="square">
+            <a:spAutoFit/>
+          </a:bodyPr>
+          <a:lstStyle/>
+          <a:p>
+            <a:r>
+              <a:rPr sz="1800" b="0">
+                <a:solidFill>
+                  <a:srgbClr val="1A2332"/>
+                </a:solidFill>
+              </a:rPr>
+              <a:t>Text and audio, images included: ECG, X-ray, CT, labs.</a:t>
+            </a:r>
+          </a:p>
+          <a:p>
+            <a:pPr>
+              <a:spcBef>
+                <a:spcPts val="1000"/>
+              </a:spcBef>
+            </a:pPr>
+            <a:r>
+              <a:rPr sz="1800" b="0">
+                <a:solidFill>
+                  <a:srgbClr val="1A2332"/>
+                </a:solidFill>
+              </a:rPr>
+              <a:t>The uncanny valley of avatar tools is real.</a:t>
+            </a:r>
+          </a:p>
+          <a:p>
+            <a:pPr>
+              <a:spcBef>
+                <a:spcPts val="1000"/>
+              </a:spcBef>
+            </a:pPr>
+            <a:r>
+              <a:rPr sz="1800" b="0">
+                <a:solidFill>
+                  <a:srgbClr val="1A2332"/>
+                </a:solidFill>
+              </a:rPr>
+              <a:t>Sapient Clinician does this well (see the COI slide).</a:t>
+            </a:r>
+          </a:p>
+        </p:txBody>
+      </p:sp>
+      <p:sp>
+        <p:nvSpPr>
+          <p:cNvPr id="13" name="TextBox 12"/>
+          <p:cNvSpPr txBox="1"/>
+          <p:nvPr/>
+        </p:nvSpPr>
+        <p:spPr>
+          <a:xfrm>
+            <a:off x="502919" y="5715000"/>
+            <a:ext cx="11155682" cy="300594"/>
           </a:xfrm>
           <a:prstGeom prst="rect">
             <a:avLst/>
@@ -6403,6 +6668,278 @@
 </file>
 
 <file path=ppt/slides/slide16.xml><?xml version="1.0" encoding="utf-8"?>
+<p:sld xmlns:a="http://schemas.openxmlformats.org/drawingml/2006/main" xmlns:r="http://schemas.openxmlformats.org/officeDocument/2006/relationships" xmlns:p="http://schemas.openxmlformats.org/presentationml/2006/main" xmlns:m="http://schemas.openxmlformats.org/officeDocument/2006/math" xmlns:a14="http://schemas.microsoft.com/office/drawing/2010/main" showMasterSp="1" showMasterPhAnim="1">
+  <p:cSld>
+    <p:spTree>
+      <p:nvGrpSpPr>
+        <p:cNvPr id="1" name=""/>
+        <p:cNvGrpSpPr/>
+        <p:nvPr/>
+      </p:nvGrpSpPr>
+      <p:grpSpPr>
+        <a:xfrm>
+          <a:off x="0" y="0"/>
+          <a:ext cx="0" cy="0"/>
+          <a:chOff x="0" y="0"/>
+          <a:chExt cx="0" cy="0"/>
+        </a:xfrm>
+      </p:grpSpPr>
+      <p:sp>
+        <p:nvSpPr>
+          <p:cNvPr id="2" name="Rectangle 1"/>
+          <p:cNvSpPr/>
+          <p:nvPr/>
+        </p:nvSpPr>
+        <p:spPr>
+          <a:xfrm>
+            <a:off x="-1" y="0"/>
+            <a:ext cx="12191697" cy="1005839"/>
+          </a:xfrm>
+          <a:prstGeom prst="rect">
+            <a:avLst/>
+          </a:prstGeom>
+          <a:solidFill>
+            <a:srgbClr val="2D5F7C"/>
+          </a:solidFill>
+          <a:ln>
+            <a:noFill/>
+          </a:ln>
+          <a:effectLst/>
+        </p:spPr>
+        <p:style>
+          <a:lnRef idx="1">
+            <a:schemeClr val="accent1"/>
+          </a:lnRef>
+          <a:fillRef idx="3">
+            <a:schemeClr val="accent1"/>
+          </a:fillRef>
+          <a:effectRef idx="2">
+            <a:schemeClr val="accent1"/>
+          </a:effectRef>
+          <a:fontRef idx="minor">
+            <a:schemeClr val="lt1"/>
+          </a:fontRef>
+        </p:style>
+        <p:txBody>
+          <a:bodyPr rtlCol="0" anchor="ctr"/>
+          <a:lstStyle/>
+          <a:p>
+            <a:pPr algn="ctr"/>
+          </a:p>
+        </p:txBody>
+      </p:sp>
+      <p:sp>
+        <p:nvSpPr>
+          <p:cNvPr id="3" name="Rectangle 2"/>
+          <p:cNvSpPr/>
+          <p:nvPr/>
+        </p:nvSpPr>
+        <p:spPr>
+          <a:xfrm>
+            <a:off x="640080" y="1371600"/>
+            <a:ext cx="10972801" cy="3657600"/>
+          </a:xfrm>
+          <a:prstGeom prst="rect">
+            <a:avLst/>
+          </a:prstGeom>
+          <a:solidFill>
+            <a:srgbClr val="F0F4F8"/>
+          </a:solidFill>
+          <a:ln>
+            <a:noFill/>
+          </a:ln>
+          <a:effectLst/>
+        </p:spPr>
+        <p:style>
+          <a:lnRef idx="1">
+            <a:schemeClr val="accent1"/>
+          </a:lnRef>
+          <a:fillRef idx="3">
+            <a:schemeClr val="accent1"/>
+          </a:fillRef>
+          <a:effectRef idx="2">
+            <a:schemeClr val="accent1"/>
+          </a:effectRef>
+          <a:fontRef idx="minor">
+            <a:schemeClr val="lt1"/>
+          </a:fontRef>
+        </p:style>
+        <p:txBody>
+          <a:bodyPr rtlCol="0" anchor="ctr"/>
+          <a:lstStyle/>
+          <a:p>
+            <a:pPr algn="ctr"/>
+          </a:p>
+        </p:txBody>
+      </p:sp>
+      <p:sp>
+        <p:nvSpPr>
+          <p:cNvPr id="4" name="Rectangle 3"/>
+          <p:cNvSpPr/>
+          <p:nvPr/>
+        </p:nvSpPr>
+        <p:spPr>
+          <a:xfrm>
+            <a:off x="640080" y="1371600"/>
+            <a:ext cx="50801" cy="3657600"/>
+          </a:xfrm>
+          <a:prstGeom prst="rect">
+            <a:avLst/>
+          </a:prstGeom>
+          <a:solidFill>
+            <a:srgbClr val="2D5F7C"/>
+          </a:solidFill>
+          <a:ln>
+            <a:noFill/>
+          </a:ln>
+          <a:effectLst/>
+        </p:spPr>
+        <p:style>
+          <a:lnRef idx="1">
+            <a:schemeClr val="accent1"/>
+          </a:lnRef>
+          <a:fillRef idx="3">
+            <a:schemeClr val="accent1"/>
+          </a:fillRef>
+          <a:effectRef idx="2">
+            <a:schemeClr val="accent1"/>
+          </a:effectRef>
+          <a:fontRef idx="minor">
+            <a:schemeClr val="lt1"/>
+          </a:fontRef>
+        </p:style>
+        <p:txBody>
+          <a:bodyPr rtlCol="0" anchor="ctr"/>
+          <a:lstStyle/>
+          <a:p>
+            <a:pPr algn="ctr"/>
+          </a:p>
+        </p:txBody>
+      </p:sp>
+      <p:sp>
+        <p:nvSpPr>
+          <p:cNvPr id="5" name="TextBox 4"/>
+          <p:cNvSpPr txBox="1"/>
+          <p:nvPr/>
+        </p:nvSpPr>
+        <p:spPr>
+          <a:xfrm>
+            <a:off x="502919" y="182879"/>
+            <a:ext cx="11155682" cy="444759"/>
+          </a:xfrm>
+          <a:prstGeom prst="rect">
+            <a:avLst/>
+          </a:prstGeom>
+          <a:noFill/>
+        </p:spPr>
+        <p:txBody>
+          <a:bodyPr wrap="square">
+            <a:spAutoFit/>
+          </a:bodyPr>
+          <a:lstStyle/>
+          <a:p>
+            <a:r>
+              <a:rPr sz="2800" b="1">
+                <a:solidFill>
+                  <a:srgbClr val="FFFFFF"/>
+                </a:solidFill>
+              </a:rPr>
+              <a:t>Think · Pair · Share: Match the Tool (2 min)</a:t>
+            </a:r>
+          </a:p>
+        </p:txBody>
+      </p:sp>
+      <p:sp>
+        <p:nvSpPr>
+          <p:cNvPr id="6" name="TextBox 5"/>
+          <p:cNvSpPr txBox="1"/>
+          <p:nvPr/>
+        </p:nvSpPr>
+        <p:spPr>
+          <a:xfrm>
+            <a:off x="1143000" y="1828800"/>
+            <a:ext cx="9966961" cy="1985576"/>
+          </a:xfrm>
+          <a:prstGeom prst="rect">
+            <a:avLst/>
+          </a:prstGeom>
+          <a:noFill/>
+        </p:spPr>
+        <p:txBody>
+          <a:bodyPr wrap="square">
+            <a:spAutoFit/>
+          </a:bodyPr>
+          <a:lstStyle/>
+          <a:p>
+            <a:r>
+              <a:rPr sz="2200" b="0">
+                <a:solidFill>
+                  <a:srgbClr val="1E4258"/>
+                </a:solidFill>
+              </a:rPr>
+              <a:t>Pick a clinical skill your fellows need to learn.</a:t>
+            </a:r>
+          </a:p>
+          <a:p>
+            <a:pPr>
+              <a:spcBef>
+                <a:spcPts val="1600"/>
+              </a:spcBef>
+            </a:pPr>
+            <a:r>
+              <a:rPr sz="2200" b="0">
+                <a:solidFill>
+                  <a:srgbClr val="1E4258"/>
+                </a:solidFill>
+              </a:rPr>
+              <a:t>Which point on the spectrum fits, and would the free option do the job?</a:t>
+            </a:r>
+          </a:p>
+        </p:txBody>
+      </p:sp>
+      <p:sp>
+        <p:nvSpPr>
+          <p:cNvPr id="7" name="TextBox 6"/>
+          <p:cNvSpPr txBox="1"/>
+          <p:nvPr/>
+        </p:nvSpPr>
+        <p:spPr>
+          <a:xfrm>
+            <a:off x="1143000" y="5303520"/>
+            <a:ext cx="9966961" cy="300594"/>
+          </a:xfrm>
+          <a:prstGeom prst="rect">
+            <a:avLst/>
+          </a:prstGeom>
+          <a:noFill/>
+        </p:spPr>
+        <p:txBody>
+          <a:bodyPr wrap="square">
+            <a:spAutoFit/>
+          </a:bodyPr>
+          <a:lstStyle/>
+          <a:p>
+            <a:r>
+              <a:rPr sz="1600" b="0">
+                <a:solidFill>
+                  <a:srgbClr val="0000FF"/>
+                </a:solidFill>
+              </a:rPr>
+              <a:t>Workshop Guide → Section 5</a:t>
+            </a:r>
+          </a:p>
+        </p:txBody>
+      </p:sp>
+    </p:spTree>
+  </p:cSld>
+  <p:clrMapOvr>
+    <a:masterClrMapping/>
+  </p:clrMapOvr>
+  <p:transition xmlns:p14="http://schemas.microsoft.com/office/powerpoint/2010/main" spd="med" advClick="1"/>
+</p:sld>
+</file>
+
+<file path=ppt/slides/slide17.xml><?xml version="1.0" encoding="utf-8"?>
 <p:sld xmlns:a="http://schemas.openxmlformats.org/drawingml/2006/main" xmlns:r="http://schemas.openxmlformats.org/officeDocument/2006/relationships" xmlns:p="http://schemas.openxmlformats.org/presentationml/2006/main" xmlns:m="http://schemas.openxmlformats.org/officeDocument/2006/math" xmlns:a14="http://schemas.microsoft.com/office/drawing/2010/main" showMasterSp="1" showMasterPhAnim="1">
   <p:cSld>
     <p:spTree>
@@ -7997,278 +8534,6 @@
 </p:sld>
 </file>
 
-<file path=ppt/slides/slide17.xml><?xml version="1.0" encoding="utf-8"?>
-<p:sld xmlns:a="http://schemas.openxmlformats.org/drawingml/2006/main" xmlns:r="http://schemas.openxmlformats.org/officeDocument/2006/relationships" xmlns:p="http://schemas.openxmlformats.org/presentationml/2006/main" xmlns:m="http://schemas.openxmlformats.org/officeDocument/2006/math" xmlns:a14="http://schemas.microsoft.com/office/drawing/2010/main" showMasterSp="1" showMasterPhAnim="1">
-  <p:cSld>
-    <p:spTree>
-      <p:nvGrpSpPr>
-        <p:cNvPr id="1" name=""/>
-        <p:cNvGrpSpPr/>
-        <p:nvPr/>
-      </p:nvGrpSpPr>
-      <p:grpSpPr>
-        <a:xfrm>
-          <a:off x="0" y="0"/>
-          <a:ext cx="0" cy="0"/>
-          <a:chOff x="0" y="0"/>
-          <a:chExt cx="0" cy="0"/>
-        </a:xfrm>
-      </p:grpSpPr>
-      <p:sp>
-        <p:nvSpPr>
-          <p:cNvPr id="2" name="Rectangle 1"/>
-          <p:cNvSpPr/>
-          <p:nvPr/>
-        </p:nvSpPr>
-        <p:spPr>
-          <a:xfrm>
-            <a:off x="-1" y="0"/>
-            <a:ext cx="12191697" cy="1005839"/>
-          </a:xfrm>
-          <a:prstGeom prst="rect">
-            <a:avLst/>
-          </a:prstGeom>
-          <a:solidFill>
-            <a:srgbClr val="2D5F7C"/>
-          </a:solidFill>
-          <a:ln>
-            <a:noFill/>
-          </a:ln>
-          <a:effectLst/>
-        </p:spPr>
-        <p:style>
-          <a:lnRef idx="1">
-            <a:schemeClr val="accent1"/>
-          </a:lnRef>
-          <a:fillRef idx="3">
-            <a:schemeClr val="accent1"/>
-          </a:fillRef>
-          <a:effectRef idx="2">
-            <a:schemeClr val="accent1"/>
-          </a:effectRef>
-          <a:fontRef idx="minor">
-            <a:schemeClr val="lt1"/>
-          </a:fontRef>
-        </p:style>
-        <p:txBody>
-          <a:bodyPr rtlCol="0" anchor="ctr"/>
-          <a:lstStyle/>
-          <a:p>
-            <a:pPr algn="ctr"/>
-          </a:p>
-        </p:txBody>
-      </p:sp>
-      <p:sp>
-        <p:nvSpPr>
-          <p:cNvPr id="3" name="Rectangle 2"/>
-          <p:cNvSpPr/>
-          <p:nvPr/>
-        </p:nvSpPr>
-        <p:spPr>
-          <a:xfrm>
-            <a:off x="640080" y="1371600"/>
-            <a:ext cx="10972801" cy="3657600"/>
-          </a:xfrm>
-          <a:prstGeom prst="rect">
-            <a:avLst/>
-          </a:prstGeom>
-          <a:solidFill>
-            <a:srgbClr val="F0F4F8"/>
-          </a:solidFill>
-          <a:ln>
-            <a:noFill/>
-          </a:ln>
-          <a:effectLst/>
-        </p:spPr>
-        <p:style>
-          <a:lnRef idx="1">
-            <a:schemeClr val="accent1"/>
-          </a:lnRef>
-          <a:fillRef idx="3">
-            <a:schemeClr val="accent1"/>
-          </a:fillRef>
-          <a:effectRef idx="2">
-            <a:schemeClr val="accent1"/>
-          </a:effectRef>
-          <a:fontRef idx="minor">
-            <a:schemeClr val="lt1"/>
-          </a:fontRef>
-        </p:style>
-        <p:txBody>
-          <a:bodyPr rtlCol="0" anchor="ctr"/>
-          <a:lstStyle/>
-          <a:p>
-            <a:pPr algn="ctr"/>
-          </a:p>
-        </p:txBody>
-      </p:sp>
-      <p:sp>
-        <p:nvSpPr>
-          <p:cNvPr id="4" name="Rectangle 3"/>
-          <p:cNvSpPr/>
-          <p:nvPr/>
-        </p:nvSpPr>
-        <p:spPr>
-          <a:xfrm>
-            <a:off x="640080" y="1371600"/>
-            <a:ext cx="50801" cy="3657600"/>
-          </a:xfrm>
-          <a:prstGeom prst="rect">
-            <a:avLst/>
-          </a:prstGeom>
-          <a:solidFill>
-            <a:srgbClr val="2D5F7C"/>
-          </a:solidFill>
-          <a:ln>
-            <a:noFill/>
-          </a:ln>
-          <a:effectLst/>
-        </p:spPr>
-        <p:style>
-          <a:lnRef idx="1">
-            <a:schemeClr val="accent1"/>
-          </a:lnRef>
-          <a:fillRef idx="3">
-            <a:schemeClr val="accent1"/>
-          </a:fillRef>
-          <a:effectRef idx="2">
-            <a:schemeClr val="accent1"/>
-          </a:effectRef>
-          <a:fontRef idx="minor">
-            <a:schemeClr val="lt1"/>
-          </a:fontRef>
-        </p:style>
-        <p:txBody>
-          <a:bodyPr rtlCol="0" anchor="ctr"/>
-          <a:lstStyle/>
-          <a:p>
-            <a:pPr algn="ctr"/>
-          </a:p>
-        </p:txBody>
-      </p:sp>
-      <p:sp>
-        <p:nvSpPr>
-          <p:cNvPr id="5" name="TextBox 4"/>
-          <p:cNvSpPr txBox="1"/>
-          <p:nvPr/>
-        </p:nvSpPr>
-        <p:spPr>
-          <a:xfrm>
-            <a:off x="502919" y="182879"/>
-            <a:ext cx="11155682" cy="444759"/>
-          </a:xfrm>
-          <a:prstGeom prst="rect">
-            <a:avLst/>
-          </a:prstGeom>
-          <a:noFill/>
-        </p:spPr>
-        <p:txBody>
-          <a:bodyPr wrap="square">
-            <a:spAutoFit/>
-          </a:bodyPr>
-          <a:lstStyle/>
-          <a:p>
-            <a:r>
-              <a:rPr sz="2800" b="1">
-                <a:solidFill>
-                  <a:srgbClr val="FFFFFF"/>
-                </a:solidFill>
-              </a:rPr>
-              <a:t>Share-Out (4 min)</a:t>
-            </a:r>
-          </a:p>
-        </p:txBody>
-      </p:sp>
-      <p:sp>
-        <p:nvSpPr>
-          <p:cNvPr id="6" name="TextBox 5"/>
-          <p:cNvSpPr txBox="1"/>
-          <p:nvPr/>
-        </p:nvSpPr>
-        <p:spPr>
-          <a:xfrm>
-            <a:off x="1143000" y="1828800"/>
-            <a:ext cx="9966961" cy="1985576"/>
-          </a:xfrm>
-          <a:prstGeom prst="rect">
-            <a:avLst/>
-          </a:prstGeom>
-          <a:noFill/>
-        </p:spPr>
-        <p:txBody>
-          <a:bodyPr wrap="square">
-            <a:spAutoFit/>
-          </a:bodyPr>
-          <a:lstStyle/>
-          <a:p>
-            <a:r>
-              <a:rPr sz="2200" b="0">
-                <a:solidFill>
-                  <a:srgbClr val="1E4258"/>
-                </a:solidFill>
-              </a:rPr>
-              <a:t>Two or three groups share their plan, 60 seconds each.</a:t>
-            </a:r>
-          </a:p>
-          <a:p>
-            <a:pPr>
-              <a:spcBef>
-                <a:spcPts val="1600"/>
-              </a:spcBef>
-            </a:pPr>
-            <a:r>
-              <a:rPr sz="2200" b="0">
-                <a:solidFill>
-                  <a:srgbClr val="1E4258"/>
-                </a:solidFill>
-              </a:rPr>
-              <a:t>What is your educational need? Your tool? Your first step?</a:t>
-            </a:r>
-          </a:p>
-        </p:txBody>
-      </p:sp>
-      <p:sp>
-        <p:nvSpPr>
-          <p:cNvPr id="7" name="TextBox 6"/>
-          <p:cNvSpPr txBox="1"/>
-          <p:nvPr/>
-        </p:nvSpPr>
-        <p:spPr>
-          <a:xfrm>
-            <a:off x="1143000" y="5303520"/>
-            <a:ext cx="9966961" cy="300594"/>
-          </a:xfrm>
-          <a:prstGeom prst="rect">
-            <a:avLst/>
-          </a:prstGeom>
-          <a:noFill/>
-        </p:spPr>
-        <p:txBody>
-          <a:bodyPr wrap="square">
-            <a:spAutoFit/>
-          </a:bodyPr>
-          <a:lstStyle/>
-          <a:p>
-            <a:r>
-              <a:rPr sz="1600" b="0">
-                <a:solidFill>
-                  <a:srgbClr val="0000FF"/>
-                </a:solidFill>
-              </a:rPr>
-              <a:t>Workshop Guide → Section 7 (the worksheet)</a:t>
-            </a:r>
-          </a:p>
-        </p:txBody>
-      </p:sp>
-    </p:spTree>
-  </p:cSld>
-  <p:clrMapOvr>
-    <a:masterClrMapping/>
-  </p:clrMapOvr>
-  <p:transition xmlns:p14="http://schemas.microsoft.com/office/powerpoint/2010/main" spd="med" advClick="1"/>
-</p:sld>
-</file>
-
 <file path=ppt/slides/slide18.xml><?xml version="1.0" encoding="utf-8"?>
 <p:sld xmlns:a="http://schemas.openxmlformats.org/drawingml/2006/main" xmlns:r="http://schemas.openxmlformats.org/officeDocument/2006/relationships" xmlns:p="http://schemas.openxmlformats.org/presentationml/2006/main" xmlns:m="http://schemas.openxmlformats.org/officeDocument/2006/math" xmlns:a14="http://schemas.microsoft.com/office/drawing/2010/main" showMasterSp="1" showMasterPhAnim="1">
   <p:cSld>
@@ -8446,7 +8711,7 @@
                   <a:srgbClr val="FFFFFF"/>
                 </a:solidFill>
               </a:rPr>
-              <a:t>Wrap-Up</a:t>
+              <a:t>Share-Out (4 min)</a:t>
             </a:r>
           </a:p>
         </p:txBody>
@@ -8479,7 +8744,7 @@
                   <a:srgbClr val="1E4258"/>
                 </a:solidFill>
               </a:rPr>
-              <a:t>Start with one tool, one need, one small experiment.</a:t>
+              <a:t>Two or three groups share their plan, 60 seconds each.</a:t>
             </a:r>
           </a:p>
           <a:p>
@@ -8494,22 +8759,7 @@
                   <a:srgbClr val="1E4258"/>
                 </a:solidFill>
               </a:rPr>
-              <a:t>Everything from today is in the Workshop Guide: bookmark it now.</a:t>
-            </a:r>
-          </a:p>
-          <a:p>
-            <a:pPr>
-              <a:spcBef>
-                <a:spcPts val="1600"/>
-              </a:spcBef>
-            </a:pPr>
-            <a:r>
-              <a:rPr sz="2200" b="0">
-                <a:solidFill>
-                  <a:srgbClr val="1E4258"/>
-                </a:solidFill>
-              </a:rPr>
-              <a:t>The Zero Dollar starter kit is in Section 8.</a:t>
+              <a:t>What is your educational need? Your tool? Your first step?</a:t>
             </a:r>
           </a:p>
         </p:txBody>
@@ -8542,7 +8792,7 @@
                   <a:srgbClr val="0000FF"/>
                 </a:solidFill>
               </a:rPr>
-              <a:t>Workshop Guide → Section 8 (all resources)</a:t>
+              <a:t>Workshop Guide → Section 7 (the worksheet)</a:t>
             </a:r>
           </a:p>
         </p:txBody>
@@ -8559,13 +8809,6 @@
 <file path=ppt/slides/slide19.xml><?xml version="1.0" encoding="utf-8"?>
 <p:sld xmlns:a="http://schemas.openxmlformats.org/drawingml/2006/main" xmlns:r="http://schemas.openxmlformats.org/officeDocument/2006/relationships" xmlns:p="http://schemas.openxmlformats.org/presentationml/2006/main" xmlns:m="http://schemas.openxmlformats.org/officeDocument/2006/math" xmlns:a14="http://schemas.microsoft.com/office/drawing/2010/main" showMasterSp="1" showMasterPhAnim="1">
   <p:cSld>
-    <p:bg>
-      <p:bgPr>
-        <a:solidFill>
-          <a:srgbClr val="1E4258"/>
-        </a:solidFill>
-      </p:bgPr>
-    </p:bg>
     <p:spTree>
       <p:nvGrpSpPr>
         <p:cNvPr id="1" name=""/>
@@ -8582,277 +8825,146 @@
       </p:grpSpPr>
       <p:sp>
         <p:nvSpPr>
-          <p:cNvPr id="433" name="Rectangle 1"/>
+          <p:cNvPr id="2" name="Rectangle 1"/>
           <p:cNvSpPr/>
           <p:nvPr/>
         </p:nvSpPr>
         <p:spPr>
           <a:xfrm>
-            <a:off x="-1" y="5943600"/>
-            <a:ext cx="12191697" cy="914400"/>
+            <a:off x="-1" y="0"/>
+            <a:ext cx="12191697" cy="1005839"/>
           </a:xfrm>
           <a:prstGeom prst="rect">
             <a:avLst/>
           </a:prstGeom>
           <a:solidFill>
-            <a:srgbClr val="E8833A"/>
+            <a:srgbClr val="2D5F7C"/>
           </a:solidFill>
-          <a:ln w="12700">
-            <a:miter lim="400000"/>
+          <a:ln>
+            <a:noFill/>
           </a:ln>
-          <a:effectLst>
-            <a:outerShdw sx="100000" sy="100000" kx="0" ky="0" algn="b" rotWithShape="0" blurRad="38100" dist="23000" dir="5400000">
-              <a:srgbClr val="000000">
-                <a:alpha val="35000"/>
-              </a:srgbClr>
-            </a:outerShdw>
-          </a:effectLst>
-        </p:spPr>
-        <p:txBody>
-          <a:bodyPr lIns="45719" rIns="45719" anchor="ctr"/>
-          <a:lstStyle/>
-          <a:p>
-            <a:pPr algn="ctr">
-              <a:defRPr>
-                <a:solidFill>
-                  <a:srgbClr val="FFFFFF"/>
-                </a:solidFill>
-              </a:defRPr>
-            </a:pPr>
-          </a:p>
-        </p:txBody>
-      </p:sp>
-      <p:sp>
-        <p:nvSpPr>
-          <p:cNvPr id="434" name="TextBox 2"/>
+          <a:effectLst/>
+        </p:spPr>
+        <p:style>
+          <a:lnRef idx="1">
+            <a:schemeClr val="accent1"/>
+          </a:lnRef>
+          <a:fillRef idx="3">
+            <a:schemeClr val="accent1"/>
+          </a:fillRef>
+          <a:effectRef idx="2">
+            <a:schemeClr val="accent1"/>
+          </a:effectRef>
+          <a:fontRef idx="minor">
+            <a:schemeClr val="lt1"/>
+          </a:fontRef>
+        </p:style>
+        <p:txBody>
+          <a:bodyPr rtlCol="0" anchor="ctr"/>
+          <a:lstStyle/>
+          <a:p>
+            <a:pPr algn="ctr"/>
+          </a:p>
+        </p:txBody>
+      </p:sp>
+      <p:sp>
+        <p:nvSpPr>
+          <p:cNvPr id="3" name="Rectangle 2"/>
+          <p:cNvSpPr/>
+          <p:nvPr/>
+        </p:nvSpPr>
+        <p:spPr>
+          <a:xfrm>
+            <a:off x="640080" y="1371600"/>
+            <a:ext cx="10972801" cy="3657600"/>
+          </a:xfrm>
+          <a:prstGeom prst="rect">
+            <a:avLst/>
+          </a:prstGeom>
+          <a:solidFill>
+            <a:srgbClr val="F0F4F8"/>
+          </a:solidFill>
+          <a:ln>
+            <a:noFill/>
+          </a:ln>
+          <a:effectLst/>
+        </p:spPr>
+        <p:style>
+          <a:lnRef idx="1">
+            <a:schemeClr val="accent1"/>
+          </a:lnRef>
+          <a:fillRef idx="3">
+            <a:schemeClr val="accent1"/>
+          </a:fillRef>
+          <a:effectRef idx="2">
+            <a:schemeClr val="accent1"/>
+          </a:effectRef>
+          <a:fontRef idx="minor">
+            <a:schemeClr val="lt1"/>
+          </a:fontRef>
+        </p:style>
+        <p:txBody>
+          <a:bodyPr rtlCol="0" anchor="ctr"/>
+          <a:lstStyle/>
+          <a:p>
+            <a:pPr algn="ctr"/>
+          </a:p>
+        </p:txBody>
+      </p:sp>
+      <p:sp>
+        <p:nvSpPr>
+          <p:cNvPr id="4" name="Rectangle 3"/>
+          <p:cNvSpPr/>
+          <p:nvPr/>
+        </p:nvSpPr>
+        <p:spPr>
+          <a:xfrm>
+            <a:off x="640080" y="1371600"/>
+            <a:ext cx="50801" cy="3657600"/>
+          </a:xfrm>
+          <a:prstGeom prst="rect">
+            <a:avLst/>
+          </a:prstGeom>
+          <a:solidFill>
+            <a:srgbClr val="2D5F7C"/>
+          </a:solidFill>
+          <a:ln>
+            <a:noFill/>
+          </a:ln>
+          <a:effectLst/>
+        </p:spPr>
+        <p:style>
+          <a:lnRef idx="1">
+            <a:schemeClr val="accent1"/>
+          </a:lnRef>
+          <a:fillRef idx="3">
+            <a:schemeClr val="accent1"/>
+          </a:fillRef>
+          <a:effectRef idx="2">
+            <a:schemeClr val="accent1"/>
+          </a:effectRef>
+          <a:fontRef idx="minor">
+            <a:schemeClr val="lt1"/>
+          </a:fontRef>
+        </p:style>
+        <p:txBody>
+          <a:bodyPr rtlCol="0" anchor="ctr"/>
+          <a:lstStyle/>
+          <a:p>
+            <a:pPr algn="ctr"/>
+          </a:p>
+        </p:txBody>
+      </p:sp>
+      <p:sp>
+        <p:nvSpPr>
+          <p:cNvPr id="5" name="TextBox 4"/>
           <p:cNvSpPr txBox="1"/>
           <p:nvPr/>
         </p:nvSpPr>
         <p:spPr>
           <a:xfrm>
-            <a:off x="960119" y="1828800"/>
-            <a:ext cx="10241282" cy="601623"/>
-          </a:xfrm>
-          <a:prstGeom prst="rect">
-            <a:avLst/>
-          </a:prstGeom>
-          <a:ln w="12700">
-            <a:miter lim="400000"/>
-          </a:ln>
-          <a:extLst>
-            <a:ext uri="{C572A759-6A51-4108-AA02-DFA0A04FC94B}">
-              <ma14:wrappingTextBoxFlag xmlns:ma14="http://schemas.microsoft.com/office/mac/drawingml/2011/main" val="1"/>
-            </a:ext>
-          </a:extLst>
-        </p:spPr>
-        <p:txBody>
-          <a:bodyPr lIns="45719" rIns="45719">
-            <a:spAutoFit/>
-          </a:bodyPr>
-          <a:lstStyle>
-            <a:lvl1pPr algn="ctr">
-              <a:defRPr b="1" sz="4000">
-                <a:solidFill>
-                  <a:srgbClr val="FFFFFF"/>
-                </a:solidFill>
-              </a:defRPr>
-            </a:lvl1pPr>
-          </a:lstStyle>
-          <a:p>
-            <a:pPr/>
-            <a:r>
-              <a:rPr/>
-              <a:t>Thank You</a:t>
-            </a:r>
-          </a:p>
-        </p:txBody>
-      </p:sp>
-      <p:sp>
-        <p:nvSpPr>
-          <p:cNvPr id="435" name="TextBox 3"/>
-          <p:cNvSpPr txBox="1"/>
-          <p:nvPr/>
-        </p:nvSpPr>
-        <p:spPr>
-          <a:xfrm>
-            <a:off x="960119" y="2926079"/>
-            <a:ext cx="10241282" cy="340183"/>
-          </a:xfrm>
-          <a:prstGeom prst="rect">
-            <a:avLst/>
-          </a:prstGeom>
-          <a:ln w="12700">
-            <a:miter lim="400000"/>
-          </a:ln>
-          <a:extLst>
-            <a:ext uri="{C572A759-6A51-4108-AA02-DFA0A04FC94B}">
-              <ma14:wrappingTextBoxFlag xmlns:ma14="http://schemas.microsoft.com/office/mac/drawingml/2011/main" val="1"/>
-            </a:ext>
-          </a:extLst>
-        </p:spPr>
-        <p:txBody>
-          <a:bodyPr lIns="45719" rIns="45719">
-            <a:spAutoFit/>
-          </a:bodyPr>
-          <a:lstStyle>
-            <a:lvl1pPr algn="ctr">
-              <a:defRPr sz="2000">
-                <a:solidFill>
-                  <a:srgbClr val="F4A55A"/>
-                </a:solidFill>
-              </a:defRPr>
-            </a:lvl1pPr>
-          </a:lstStyle>
-          <a:p>
-            <a:pPr/>
-            <a:r>
-              <a:rPr/>
-              <a:t>Diana Brewer, PA-C</a:t>
-            </a:r>
-          </a:p>
-        </p:txBody>
-      </p:sp>
-      <p:sp>
-        <p:nvSpPr>
-          <p:cNvPr id="436" name="TextBox 4"/>
-          <p:cNvSpPr txBox="1"/>
-          <p:nvPr/>
-        </p:nvSpPr>
-        <p:spPr>
-          <a:xfrm>
-            <a:off x="960119" y="3474720"/>
-            <a:ext cx="10241282" cy="300594"/>
-          </a:xfrm>
-          <a:prstGeom prst="rect">
-            <a:avLst/>
-          </a:prstGeom>
-          <a:ln w="12700">
-            <a:miter lim="400000"/>
-          </a:ln>
-          <a:extLst>
-            <a:ext uri="{C572A759-6A51-4108-AA02-DFA0A04FC94B}">
-              <ma14:wrappingTextBoxFlag xmlns:ma14="http://schemas.microsoft.com/office/mac/drawingml/2011/main" val="1"/>
-            </a:ext>
-          </a:extLst>
-        </p:spPr>
-        <p:txBody>
-          <a:bodyPr lIns="45719" rIns="45719">
-            <a:spAutoFit/>
-          </a:bodyPr>
-          <a:lstStyle>
-            <a:lvl1pPr algn="ctr">
-              <a:defRPr sz="1600">
-                <a:solidFill>
-                  <a:srgbClr val="FFFFFF"/>
-                </a:solidFill>
-              </a:defRPr>
-            </a:lvl1pPr>
-          </a:lstStyle>
-          <a:p>
-            <a:pPr/>
-            <a:r>
-              <a:rPr/>
-              <a:t>Knight Cancer Institute Hem/Onc APP Fellowship Director, OHSU  ·  Co-Founder &amp; CMO, Sapient Clinician</a:t>
-            </a:r>
-          </a:p>
-        </p:txBody>
-      </p:sp>
-      <p:sp>
-        <p:nvSpPr>
-          <p:cNvPr id="437" name="TextBox 5"/>
-          <p:cNvSpPr txBox="1"/>
-          <p:nvPr/>
-        </p:nvSpPr>
-        <p:spPr>
-          <a:xfrm>
-            <a:off x="2788920" y="4114800"/>
-            <a:ext cx="6583679" cy="300594"/>
-          </a:xfrm>
-          <a:prstGeom prst="rect">
-            <a:avLst/>
-          </a:prstGeom>
-          <a:ln w="12700">
-            <a:miter lim="400000"/>
-          </a:ln>
-          <a:extLst>
-            <a:ext uri="{C572A759-6A51-4108-AA02-DFA0A04FC94B}">
-              <ma14:wrappingTextBoxFlag xmlns:ma14="http://schemas.microsoft.com/office/mac/drawingml/2011/main" val="1"/>
-            </a:ext>
-          </a:extLst>
-        </p:spPr>
-        <p:txBody>
-          <a:bodyPr lIns="45719" rIns="45719">
-            <a:spAutoFit/>
-          </a:bodyPr>
-          <a:lstStyle>
-            <a:lvl1pPr algn="ctr">
-              <a:defRPr sz="1600" u="sng">
-                <a:solidFill>
-                  <a:srgbClr val="FFFFFF"/>
-                </a:solidFill>
-                <a:uFill>
-                  <a:solidFill>
-                    <a:srgbClr val="0000FF"/>
-                  </a:solidFill>
-                </a:uFill>
-                <a:hlinkClick r:id="rId2" invalidUrl="" action="" tgtFrame="" tooltip="" history="1" highlightClick="0" endSnd="0"/>
-              </a:defRPr>
-            </a:lvl1pPr>
-          </a:lstStyle>
-          <a:p>
-            <a:pPr>
-              <a:defRPr u="none">
-                <a:uFillTx/>
-              </a:defRPr>
-            </a:pPr>
-            <a:r>
-              <a:rPr u="sng">
-                <a:uFill>
-                  <a:solidFill>
-                    <a:srgbClr val="0000FF"/>
-                  </a:solidFill>
-                </a:uFill>
-                <a:hlinkClick r:id="rId2" invalidUrl="" action="" tgtFrame="" tooltip="" history="1" highlightClick="0" endSnd="0"/>
-              </a:rPr>
-              <a:t>brewerd@ohsu.edu</a:t>
-            </a:r>
-          </a:p>
-        </p:txBody>
-      </p:sp>
-      <p:pic>
-        <p:nvPicPr>
-          <p:cNvPr id="438" name="Picture 437" descr="workshop-guide-qr.png"/>
-          <p:cNvPicPr>
-            <a:picLocks noChangeAspect="1"/>
-          </p:cNvPicPr>
-          <p:nvPr/>
-        </p:nvPicPr>
-        <p:blipFill>
-          <a:blip r:embed="rId3"/>
-          <a:stretch>
-            <a:fillRect/>
-          </a:stretch>
-        </p:blipFill>
-        <p:spPr>
-          <a:xfrm>
-            <a:off x="9144000" y="2331720"/>
-            <a:ext cx="1828800" cy="1828800"/>
-          </a:xfrm>
-          <a:prstGeom prst="rect">
-            <a:avLst/>
-          </a:prstGeom>
-        </p:spPr>
-      </p:pic>
-      <p:sp>
-        <p:nvSpPr>
-          <p:cNvPr id="439" name="TextBox 438"/>
-          <p:cNvSpPr txBox="1"/>
-          <p:nvPr/>
-        </p:nvSpPr>
-        <p:spPr>
-          <a:xfrm>
-            <a:off x="8503920" y="4315968"/>
-            <a:ext cx="3108960" cy="320040"/>
+            <a:off x="502919" y="182879"/>
+            <a:ext cx="11155682" cy="444759"/>
           </a:xfrm>
           <a:prstGeom prst="rect">
             <a:avLst/>
@@ -8865,15 +8977,109 @@
           </a:bodyPr>
           <a:lstStyle/>
           <a:p>
-            <a:pPr algn="ctr"/>
-            <a:r>
-              <a:rPr sz="1400">
+            <a:r>
+              <a:rPr sz="2800" b="1">
+                <a:solidFill>
+                  <a:srgbClr val="FFFFFF"/>
+                </a:solidFill>
+              </a:rPr>
+              <a:t>Wrap-Up</a:t>
+            </a:r>
+          </a:p>
+        </p:txBody>
+      </p:sp>
+      <p:sp>
+        <p:nvSpPr>
+          <p:cNvPr id="6" name="TextBox 5"/>
+          <p:cNvSpPr txBox="1"/>
+          <p:nvPr/>
+        </p:nvSpPr>
+        <p:spPr>
+          <a:xfrm>
+            <a:off x="1143000" y="1828800"/>
+            <a:ext cx="9966961" cy="1985576"/>
+          </a:xfrm>
+          <a:prstGeom prst="rect">
+            <a:avLst/>
+          </a:prstGeom>
+          <a:noFill/>
+        </p:spPr>
+        <p:txBody>
+          <a:bodyPr wrap="square">
+            <a:spAutoFit/>
+          </a:bodyPr>
+          <a:lstStyle/>
+          <a:p>
+            <a:r>
+              <a:rPr sz="2200" b="0">
                 <a:solidFill>
                   <a:srgbClr val="1E4258"/>
                 </a:solidFill>
-                <a:latin typeface="Arial"/>
               </a:rPr>
-              <a:t>Scan for the Workshop Guide</a:t>
+              <a:t>Start with one tool, one need, one small experiment.</a:t>
+            </a:r>
+          </a:p>
+          <a:p>
+            <a:pPr>
+              <a:spcBef>
+                <a:spcPts val="1600"/>
+              </a:spcBef>
+            </a:pPr>
+            <a:r>
+              <a:rPr sz="2200" b="0">
+                <a:solidFill>
+                  <a:srgbClr val="1E4258"/>
+                </a:solidFill>
+              </a:rPr>
+              <a:t>Everything from today is in the Workshop Guide: bookmark it now.</a:t>
+            </a:r>
+          </a:p>
+          <a:p>
+            <a:pPr>
+              <a:spcBef>
+                <a:spcPts val="1600"/>
+              </a:spcBef>
+            </a:pPr>
+            <a:r>
+              <a:rPr sz="2200" b="0">
+                <a:solidFill>
+                  <a:srgbClr val="1E4258"/>
+                </a:solidFill>
+              </a:rPr>
+              <a:t>The Zero Dollar starter kit is in Section 8.</a:t>
+            </a:r>
+          </a:p>
+        </p:txBody>
+      </p:sp>
+      <p:sp>
+        <p:nvSpPr>
+          <p:cNvPr id="7" name="TextBox 6"/>
+          <p:cNvSpPr txBox="1"/>
+          <p:nvPr/>
+        </p:nvSpPr>
+        <p:spPr>
+          <a:xfrm>
+            <a:off x="1143000" y="5303520"/>
+            <a:ext cx="9966961" cy="300594"/>
+          </a:xfrm>
+          <a:prstGeom prst="rect">
+            <a:avLst/>
+          </a:prstGeom>
+          <a:noFill/>
+        </p:spPr>
+        <p:txBody>
+          <a:bodyPr wrap="square">
+            <a:spAutoFit/>
+          </a:bodyPr>
+          <a:lstStyle/>
+          <a:p>
+            <a:r>
+              <a:rPr sz="1600" b="0">
+                <a:solidFill>
+                  <a:srgbClr val="0000FF"/>
+                </a:solidFill>
+              </a:rPr>
+              <a:t>Workshop Guide → Section 8 (all resources)</a:t>
             </a:r>
           </a:p>
         </p:txBody>
@@ -9123,6 +9329,2715 @@
     <p:bg>
       <p:bgPr>
         <a:solidFill>
+          <a:srgbClr val="1E4258"/>
+        </a:solidFill>
+      </p:bgPr>
+    </p:bg>
+    <p:spTree>
+      <p:nvGrpSpPr>
+        <p:cNvPr id="1" name=""/>
+        <p:cNvGrpSpPr/>
+        <p:nvPr/>
+      </p:nvGrpSpPr>
+      <p:grpSpPr>
+        <a:xfrm>
+          <a:off x="0" y="0"/>
+          <a:ext cx="0" cy="0"/>
+          <a:chOff x="0" y="0"/>
+          <a:chExt cx="0" cy="0"/>
+        </a:xfrm>
+      </p:grpSpPr>
+      <p:sp>
+        <p:nvSpPr>
+          <p:cNvPr id="433" name="Rectangle 1"/>
+          <p:cNvSpPr/>
+          <p:nvPr/>
+        </p:nvSpPr>
+        <p:spPr>
+          <a:xfrm>
+            <a:off x="-1" y="5943600"/>
+            <a:ext cx="12191697" cy="914400"/>
+          </a:xfrm>
+          <a:prstGeom prst="rect">
+            <a:avLst/>
+          </a:prstGeom>
+          <a:solidFill>
+            <a:srgbClr val="E8833A"/>
+          </a:solidFill>
+          <a:ln w="12700">
+            <a:miter lim="400000"/>
+          </a:ln>
+          <a:effectLst>
+            <a:outerShdw sx="100000" sy="100000" kx="0" ky="0" algn="b" rotWithShape="0" blurRad="38100" dist="23000" dir="5400000">
+              <a:srgbClr val="000000">
+                <a:alpha val="35000"/>
+              </a:srgbClr>
+            </a:outerShdw>
+          </a:effectLst>
+        </p:spPr>
+        <p:txBody>
+          <a:bodyPr lIns="45719" rIns="45719" anchor="ctr"/>
+          <a:lstStyle/>
+          <a:p>
+            <a:pPr algn="ctr">
+              <a:defRPr>
+                <a:solidFill>
+                  <a:srgbClr val="FFFFFF"/>
+                </a:solidFill>
+              </a:defRPr>
+            </a:pPr>
+          </a:p>
+        </p:txBody>
+      </p:sp>
+      <p:sp>
+        <p:nvSpPr>
+          <p:cNvPr id="434" name="TextBox 2"/>
+          <p:cNvSpPr txBox="1"/>
+          <p:nvPr/>
+        </p:nvSpPr>
+        <p:spPr>
+          <a:xfrm>
+            <a:off x="960119" y="1828800"/>
+            <a:ext cx="10241282" cy="601623"/>
+          </a:xfrm>
+          <a:prstGeom prst="rect">
+            <a:avLst/>
+          </a:prstGeom>
+          <a:ln w="12700">
+            <a:miter lim="400000"/>
+          </a:ln>
+          <a:extLst>
+            <a:ext uri="{C572A759-6A51-4108-AA02-DFA0A04FC94B}">
+              <ma14:wrappingTextBoxFlag xmlns:ma14="http://schemas.microsoft.com/office/mac/drawingml/2011/main" val="1"/>
+            </a:ext>
+          </a:extLst>
+        </p:spPr>
+        <p:txBody>
+          <a:bodyPr lIns="45719" rIns="45719">
+            <a:spAutoFit/>
+          </a:bodyPr>
+          <a:lstStyle>
+            <a:lvl1pPr algn="ctr">
+              <a:defRPr b="1" sz="4000">
+                <a:solidFill>
+                  <a:srgbClr val="FFFFFF"/>
+                </a:solidFill>
+              </a:defRPr>
+            </a:lvl1pPr>
+          </a:lstStyle>
+          <a:p>
+            <a:pPr/>
+            <a:r>
+              <a:rPr/>
+              <a:t>Thank You</a:t>
+            </a:r>
+          </a:p>
+        </p:txBody>
+      </p:sp>
+      <p:sp>
+        <p:nvSpPr>
+          <p:cNvPr id="435" name="TextBox 3"/>
+          <p:cNvSpPr txBox="1"/>
+          <p:nvPr/>
+        </p:nvSpPr>
+        <p:spPr>
+          <a:xfrm>
+            <a:off x="960119" y="2926079"/>
+            <a:ext cx="10241282" cy="340183"/>
+          </a:xfrm>
+          <a:prstGeom prst="rect">
+            <a:avLst/>
+          </a:prstGeom>
+          <a:ln w="12700">
+            <a:miter lim="400000"/>
+          </a:ln>
+          <a:extLst>
+            <a:ext uri="{C572A759-6A51-4108-AA02-DFA0A04FC94B}">
+              <ma14:wrappingTextBoxFlag xmlns:ma14="http://schemas.microsoft.com/office/mac/drawingml/2011/main" val="1"/>
+            </a:ext>
+          </a:extLst>
+        </p:spPr>
+        <p:txBody>
+          <a:bodyPr lIns="45719" rIns="45719">
+            <a:spAutoFit/>
+          </a:bodyPr>
+          <a:lstStyle>
+            <a:lvl1pPr algn="ctr">
+              <a:defRPr sz="2000">
+                <a:solidFill>
+                  <a:srgbClr val="F4A55A"/>
+                </a:solidFill>
+              </a:defRPr>
+            </a:lvl1pPr>
+          </a:lstStyle>
+          <a:p>
+            <a:pPr/>
+            <a:r>
+              <a:rPr/>
+              <a:t>Diana Brewer, PA-C</a:t>
+            </a:r>
+          </a:p>
+        </p:txBody>
+      </p:sp>
+      <p:sp>
+        <p:nvSpPr>
+          <p:cNvPr id="436" name="TextBox 4"/>
+          <p:cNvSpPr txBox="1"/>
+          <p:nvPr/>
+        </p:nvSpPr>
+        <p:spPr>
+          <a:xfrm>
+            <a:off x="960119" y="3474720"/>
+            <a:ext cx="10241282" cy="300594"/>
+          </a:xfrm>
+          <a:prstGeom prst="rect">
+            <a:avLst/>
+          </a:prstGeom>
+          <a:ln w="12700">
+            <a:miter lim="400000"/>
+          </a:ln>
+          <a:extLst>
+            <a:ext uri="{C572A759-6A51-4108-AA02-DFA0A04FC94B}">
+              <ma14:wrappingTextBoxFlag xmlns:ma14="http://schemas.microsoft.com/office/mac/drawingml/2011/main" val="1"/>
+            </a:ext>
+          </a:extLst>
+        </p:spPr>
+        <p:txBody>
+          <a:bodyPr lIns="45719" rIns="45719">
+            <a:spAutoFit/>
+          </a:bodyPr>
+          <a:lstStyle>
+            <a:lvl1pPr algn="ctr">
+              <a:defRPr sz="1600">
+                <a:solidFill>
+                  <a:srgbClr val="FFFFFF"/>
+                </a:solidFill>
+              </a:defRPr>
+            </a:lvl1pPr>
+          </a:lstStyle>
+          <a:p>
+            <a:pPr/>
+            <a:r>
+              <a:rPr/>
+              <a:t>Knight Cancer Institute Hem/Onc APP Fellowship Director, OHSU  ·  Co-Founder &amp; CMO, Sapient Clinician</a:t>
+            </a:r>
+          </a:p>
+        </p:txBody>
+      </p:sp>
+      <p:sp>
+        <p:nvSpPr>
+          <p:cNvPr id="437" name="TextBox 5"/>
+          <p:cNvSpPr txBox="1"/>
+          <p:nvPr/>
+        </p:nvSpPr>
+        <p:spPr>
+          <a:xfrm>
+            <a:off x="2788920" y="4114800"/>
+            <a:ext cx="6583679" cy="300594"/>
+          </a:xfrm>
+          <a:prstGeom prst="rect">
+            <a:avLst/>
+          </a:prstGeom>
+          <a:ln w="12700">
+            <a:miter lim="400000"/>
+          </a:ln>
+          <a:extLst>
+            <a:ext uri="{C572A759-6A51-4108-AA02-DFA0A04FC94B}">
+              <ma14:wrappingTextBoxFlag xmlns:ma14="http://schemas.microsoft.com/office/mac/drawingml/2011/main" val="1"/>
+            </a:ext>
+          </a:extLst>
+        </p:spPr>
+        <p:txBody>
+          <a:bodyPr lIns="45719" rIns="45719">
+            <a:spAutoFit/>
+          </a:bodyPr>
+          <a:lstStyle>
+            <a:lvl1pPr algn="ctr">
+              <a:defRPr sz="1600" u="sng">
+                <a:solidFill>
+                  <a:srgbClr val="FFFFFF"/>
+                </a:solidFill>
+                <a:uFill>
+                  <a:solidFill>
+                    <a:srgbClr val="0000FF"/>
+                  </a:solidFill>
+                </a:uFill>
+                <a:hlinkClick r:id="rId2" invalidUrl="" action="" tgtFrame="" tooltip="" history="1" highlightClick="0" endSnd="0"/>
+              </a:defRPr>
+            </a:lvl1pPr>
+          </a:lstStyle>
+          <a:p>
+            <a:pPr>
+              <a:defRPr u="none">
+                <a:uFillTx/>
+              </a:defRPr>
+            </a:pPr>
+            <a:r>
+              <a:rPr u="sng">
+                <a:uFill>
+                  <a:solidFill>
+                    <a:srgbClr val="0000FF"/>
+                  </a:solidFill>
+                </a:uFill>
+                <a:hlinkClick r:id="rId2" invalidUrl="" action="" tgtFrame="" tooltip="" history="1" highlightClick="0" endSnd="0"/>
+              </a:rPr>
+              <a:t>brewerd@ohsu.edu</a:t>
+            </a:r>
+          </a:p>
+        </p:txBody>
+      </p:sp>
+      <p:pic>
+        <p:nvPicPr>
+          <p:cNvPr id="438" name="Picture 437" descr="workshop-guide-qr.png"/>
+          <p:cNvPicPr>
+            <a:picLocks noChangeAspect="1"/>
+          </p:cNvPicPr>
+          <p:nvPr/>
+        </p:nvPicPr>
+        <p:blipFill>
+          <a:blip r:embed="rId3"/>
+          <a:stretch>
+            <a:fillRect/>
+          </a:stretch>
+        </p:blipFill>
+        <p:spPr>
+          <a:xfrm>
+            <a:off x="9144000" y="2331720"/>
+            <a:ext cx="1828800" cy="1828800"/>
+          </a:xfrm>
+          <a:prstGeom prst="rect">
+            <a:avLst/>
+          </a:prstGeom>
+        </p:spPr>
+      </p:pic>
+      <p:sp>
+        <p:nvSpPr>
+          <p:cNvPr id="439" name="TextBox 438"/>
+          <p:cNvSpPr txBox="1"/>
+          <p:nvPr/>
+        </p:nvSpPr>
+        <p:spPr>
+          <a:xfrm>
+            <a:off x="8503920" y="4315968"/>
+            <a:ext cx="3108960" cy="320040"/>
+          </a:xfrm>
+          <a:prstGeom prst="rect">
+            <a:avLst/>
+          </a:prstGeom>
+          <a:noFill/>
+        </p:spPr>
+        <p:txBody>
+          <a:bodyPr wrap="square">
+            <a:spAutoFit/>
+          </a:bodyPr>
+          <a:lstStyle/>
+          <a:p>
+            <a:pPr algn="ctr"/>
+            <a:r>
+              <a:rPr sz="1400">
+                <a:solidFill>
+                  <a:srgbClr val="1E4258"/>
+                </a:solidFill>
+                <a:latin typeface="Arial"/>
+              </a:rPr>
+              <a:t>Scan for the Workshop Guide</a:t>
+            </a:r>
+          </a:p>
+        </p:txBody>
+      </p:sp>
+    </p:spTree>
+  </p:cSld>
+  <p:clrMapOvr>
+    <a:masterClrMapping/>
+  </p:clrMapOvr>
+  <p:transition xmlns:p14="http://schemas.microsoft.com/office/powerpoint/2010/main" spd="med" advClick="1"/>
+</p:sld>
+</file>
+
+<file path=ppt/slides/slide3.xml><?xml version="1.0" encoding="utf-8"?>
+<p:sld xmlns:a="http://schemas.openxmlformats.org/drawingml/2006/main" xmlns:r="http://schemas.openxmlformats.org/officeDocument/2006/relationships" xmlns:p="http://schemas.openxmlformats.org/presentationml/2006/main" xmlns:m="http://schemas.openxmlformats.org/officeDocument/2006/math" xmlns:a14="http://schemas.microsoft.com/office/drawing/2010/main" showMasterSp="1" showMasterPhAnim="1">
+  <p:cSld>
+    <p:spTree>
+      <p:nvGrpSpPr>
+        <p:cNvPr id="1" name=""/>
+        <p:cNvGrpSpPr/>
+        <p:nvPr/>
+      </p:nvGrpSpPr>
+      <p:grpSpPr>
+        <a:xfrm>
+          <a:off x="0" y="0"/>
+          <a:ext cx="0" cy="0"/>
+          <a:chOff x="0" y="0"/>
+          <a:chExt cx="0" cy="0"/>
+        </a:xfrm>
+      </p:grpSpPr>
+      <p:sp>
+        <p:nvSpPr>
+          <p:cNvPr id="105" name="Rectangle 1"/>
+          <p:cNvSpPr/>
+          <p:nvPr/>
+        </p:nvSpPr>
+        <p:spPr>
+          <a:xfrm>
+            <a:off x="-1" y="0"/>
+            <a:ext cx="12191697" cy="1005839"/>
+          </a:xfrm>
+          <a:prstGeom prst="rect">
+            <a:avLst/>
+          </a:prstGeom>
+          <a:solidFill>
+            <a:srgbClr val="2D5F7C"/>
+          </a:solidFill>
+          <a:ln w="12700">
+            <a:miter lim="400000"/>
+          </a:ln>
+          <a:effectLst>
+            <a:outerShdw sx="100000" sy="100000" kx="0" ky="0" algn="b" rotWithShape="0" blurRad="38100" dist="23000" dir="5400000">
+              <a:srgbClr val="000000">
+                <a:alpha val="35000"/>
+              </a:srgbClr>
+            </a:outerShdw>
+          </a:effectLst>
+        </p:spPr>
+        <p:txBody>
+          <a:bodyPr lIns="45719" rIns="45719" anchor="ctr"/>
+          <a:lstStyle/>
+          <a:p>
+            <a:pPr algn="ctr">
+              <a:defRPr>
+                <a:solidFill>
+                  <a:srgbClr val="FFFFFF"/>
+                </a:solidFill>
+              </a:defRPr>
+            </a:pPr>
+          </a:p>
+        </p:txBody>
+      </p:sp>
+      <p:sp>
+        <p:nvSpPr>
+          <p:cNvPr id="106" name="TextBox 2"/>
+          <p:cNvSpPr txBox="1"/>
+          <p:nvPr/>
+        </p:nvSpPr>
+        <p:spPr>
+          <a:xfrm>
+            <a:off x="502919" y="182879"/>
+            <a:ext cx="11155682" cy="444759"/>
+          </a:xfrm>
+          <a:prstGeom prst="rect">
+            <a:avLst/>
+          </a:prstGeom>
+          <a:ln w="12700">
+            <a:miter lim="400000"/>
+          </a:ln>
+          <a:extLst>
+            <a:ext uri="{C572A759-6A51-4108-AA02-DFA0A04FC94B}">
+              <ma14:wrappingTextBoxFlag xmlns:ma14="http://schemas.microsoft.com/office/mac/drawingml/2011/main" val="1"/>
+            </a:ext>
+          </a:extLst>
+        </p:spPr>
+        <p:txBody>
+          <a:bodyPr lIns="45719" rIns="45719">
+            <a:spAutoFit/>
+          </a:bodyPr>
+          <a:lstStyle>
+            <a:lvl1pPr>
+              <a:defRPr b="1" sz="2800">
+                <a:solidFill>
+                  <a:srgbClr val="FFFFFF"/>
+                </a:solidFill>
+              </a:defRPr>
+            </a:lvl1pPr>
+          </a:lstStyle>
+          <a:p>
+            <a:pPr/>
+            <a:r>
+              <a:rPr/>
+              <a:t>Conflict of Interest &amp; Session Format</a:t>
+            </a:r>
+          </a:p>
+        </p:txBody>
+      </p:sp>
+      <p:sp>
+        <p:nvSpPr>
+          <p:cNvPr id="107" name="TextBox 3"/>
+          <p:cNvSpPr txBox="1"/>
+          <p:nvPr/>
+        </p:nvSpPr>
+        <p:spPr>
+          <a:xfrm>
+            <a:off x="685800" y="1371600"/>
+            <a:ext cx="5394961" cy="2593688"/>
+          </a:xfrm>
+          <a:prstGeom prst="rect">
+            <a:avLst/>
+          </a:prstGeom>
+          <a:ln w="12700">
+            <a:miter lim="400000"/>
+          </a:ln>
+          <a:extLst>
+            <a:ext uri="{C572A759-6A51-4108-AA02-DFA0A04FC94B}">
+              <ma14:wrappingTextBoxFlag xmlns:ma14="http://schemas.microsoft.com/office/mac/drawingml/2011/main" val="1"/>
+            </a:ext>
+          </a:extLst>
+        </p:spPr>
+        <p:txBody>
+          <a:bodyPr lIns="45719" rIns="45719">
+            <a:spAutoFit/>
+          </a:bodyPr>
+          <a:lstStyle/>
+          <a:p>
+            <a:pPr>
+              <a:spcBef>
+                <a:spcPts val="800"/>
+              </a:spcBef>
+              <a:defRPr>
+                <a:solidFill>
+                  <a:srgbClr val="1A2332"/>
+                </a:solidFill>
+              </a:defRPr>
+            </a:pPr>
+            <a:r>
+              <a:rPr/>
+              <a:t>• COI: Diana Brewer is a co-founder of Sapient Clinician</a:t>
+            </a:r>
+          </a:p>
+          <a:p>
+            <a:pPr>
+              <a:spcBef>
+                <a:spcPts val="800"/>
+              </a:spcBef>
+              <a:defRPr>
+                <a:solidFill>
+                  <a:srgbClr val="1A2332"/>
+                </a:solidFill>
+              </a:defRPr>
+            </a:pPr>
+            <a:r>
+              <a:rPr/>
+              <a:t>• This session is vendor-neutral</a:t>
+            </a:r>
+          </a:p>
+          <a:p>
+            <a:pPr>
+              <a:spcBef>
+                <a:spcPts val="800"/>
+              </a:spcBef>
+              <a:defRPr>
+                <a:solidFill>
+                  <a:srgbClr val="1A2332"/>
+                </a:solidFill>
+              </a:defRPr>
+            </a:pPr>
+            <a:r>
+              <a:rPr/>
+              <a:t>• 60 min: ~35 min presentation + 20 min workshop + 5 min share &amp; wrap</a:t>
+            </a:r>
+          </a:p>
+          <a:p>
+            <a:pPr>
+              <a:spcBef>
+                <a:spcPts val="800"/>
+              </a:spcBef>
+              <a:defRPr>
+                <a:solidFill>
+                  <a:srgbClr val="1A2332"/>
+                </a:solidFill>
+              </a:defRPr>
+            </a:pPr>
+            <a:r>
+              <a:rPr/>
+              <a:t>• Keep the Workshop Guide open on your phone</a:t>
+            </a:r>
+          </a:p>
+          <a:p>
+            <a:pPr>
+              <a:spcBef>
+                <a:spcPts val="800"/>
+              </a:spcBef>
+              <a:defRPr>
+                <a:solidFill>
+                  <a:srgbClr val="1A2332"/>
+                </a:solidFill>
+              </a:defRPr>
+            </a:pPr>
+            <a:r>
+              <a:rPr/>
+              <a:t>• Think · Pair · Share after each section</a:t>
+            </a:r>
+          </a:p>
+          <a:p>
+            <a:pPr>
+              <a:spcBef>
+                <a:spcPts val="800"/>
+              </a:spcBef>
+              <a:defRPr>
+                <a:solidFill>
+                  <a:srgbClr val="1A2332"/>
+                </a:solidFill>
+              </a:defRPr>
+            </a:pPr>
+            <a:r>
+              <a:rPr/>
+              <a:t>• Everything stays available after the conference</a:t>
+            </a:r>
+          </a:p>
+        </p:txBody>
+      </p:sp>
+      <p:sp>
+        <p:nvSpPr>
+          <p:cNvPr id="108" name="TextBox 4"/>
+          <p:cNvSpPr txBox="1"/>
+          <p:nvPr/>
+        </p:nvSpPr>
+        <p:spPr>
+          <a:xfrm>
+            <a:off x="7360919" y="2286000"/>
+            <a:ext cx="4023362" cy="300594"/>
+          </a:xfrm>
+          <a:prstGeom prst="rect">
+            <a:avLst/>
+          </a:prstGeom>
+          <a:ln w="12700">
+            <a:miter lim="400000"/>
+          </a:ln>
+          <a:extLst>
+            <a:ext uri="{C572A759-6A51-4108-AA02-DFA0A04FC94B}">
+              <ma14:wrappingTextBoxFlag xmlns:ma14="http://schemas.microsoft.com/office/mac/drawingml/2011/main" val="1"/>
+            </a:ext>
+          </a:extLst>
+        </p:spPr>
+        <p:txBody>
+          <a:bodyPr lIns="45719" rIns="45719">
+            <a:spAutoFit/>
+          </a:bodyPr>
+          <a:lstStyle>
+            <a:lvl1pPr algn="ctr">
+              <a:defRPr sz="1600">
+                <a:solidFill>
+                  <a:srgbClr val="5A6B7E"/>
+                </a:solidFill>
+              </a:defRPr>
+            </a:lvl1pPr>
+          </a:lstStyle>
+          <a:p>
+            <a:pPr/>
+            <a:r>
+              <a:rPr/>
+              <a:t>Scan for the Workshop Guide page</a:t>
+            </a:r>
+          </a:p>
+        </p:txBody>
+      </p:sp>
+      <p:pic>
+        <p:nvPicPr>
+          <p:cNvPr id="109" name="Picture 108" descr="workshop-guide-qr.png"/>
+          <p:cNvPicPr>
+            <a:picLocks noChangeAspect="1"/>
+          </p:cNvPicPr>
+          <p:nvPr/>
+        </p:nvPicPr>
+        <p:blipFill>
+          <a:blip r:embed="rId2"/>
+          <a:stretch>
+            <a:fillRect/>
+          </a:stretch>
+        </p:blipFill>
+        <p:spPr>
+          <a:xfrm>
+            <a:off x="7772400" y="2560320"/>
+            <a:ext cx="3200400" cy="3200400"/>
+          </a:xfrm>
+          <a:prstGeom prst="rect">
+            <a:avLst/>
+          </a:prstGeom>
+        </p:spPr>
+      </p:pic>
+    </p:spTree>
+  </p:cSld>
+  <p:clrMapOvr>
+    <a:masterClrMapping/>
+  </p:clrMapOvr>
+  <p:transition xmlns:p14="http://schemas.microsoft.com/office/powerpoint/2010/main" spd="med" advClick="1"/>
+</p:sld>
+</file>
+
+<file path=ppt/slides/slide4.xml><?xml version="1.0" encoding="utf-8"?>
+<p:sld xmlns:a="http://schemas.openxmlformats.org/drawingml/2006/main" xmlns:r="http://schemas.openxmlformats.org/officeDocument/2006/relationships" xmlns:p="http://schemas.openxmlformats.org/presentationml/2006/main" xmlns:m="http://schemas.openxmlformats.org/officeDocument/2006/math" xmlns:a14="http://schemas.microsoft.com/office/drawing/2010/main" showMasterSp="1" showMasterPhAnim="1">
+  <p:cSld>
+    <p:bg>
+      <p:bgPr>
+        <a:solidFill>
+          <a:srgbClr val="2D5F7C"/>
+        </a:solidFill>
+      </p:bgPr>
+    </p:bg>
+    <p:spTree>
+      <p:nvGrpSpPr>
+        <p:cNvPr id="1" name=""/>
+        <p:cNvGrpSpPr/>
+        <p:nvPr/>
+      </p:nvGrpSpPr>
+      <p:grpSpPr>
+        <a:xfrm>
+          <a:off x="0" y="0"/>
+          <a:ext cx="0" cy="0"/>
+          <a:chOff x="0" y="0"/>
+          <a:chExt cx="0" cy="0"/>
+        </a:xfrm>
+      </p:grpSpPr>
+      <p:grpSp>
+        <p:nvGrpSpPr>
+          <p:cNvPr id="113" name="Oval 1"/>
+          <p:cNvGrpSpPr/>
+          <p:nvPr/>
+        </p:nvGrpSpPr>
+        <p:grpSpPr>
+          <a:xfrm>
+            <a:off x="914399" y="2285999"/>
+            <a:ext cx="1097282" cy="1097282"/>
+            <a:chOff x="0" y="0"/>
+            <a:chExt cx="1097280" cy="1097280"/>
+          </a:xfrm>
+        </p:grpSpPr>
+        <p:sp>
+          <p:nvSpPr>
+            <p:cNvPr id="111" name="Circle"/>
+            <p:cNvSpPr/>
+            <p:nvPr/>
+          </p:nvSpPr>
+          <p:spPr>
+            <a:xfrm>
+              <a:off x="-1" y="-1"/>
+              <a:ext cx="1097282" cy="1097282"/>
+            </a:xfrm>
+            <a:prstGeom prst="ellipse">
+              <a:avLst/>
+            </a:prstGeom>
+            <a:solidFill>
+              <a:srgbClr val="E8833A"/>
+            </a:solidFill>
+            <a:ln w="12700" cap="flat">
+              <a:noFill/>
+              <a:miter lim="400000"/>
+            </a:ln>
+            <a:effectLst>
+              <a:outerShdw sx="100000" sy="100000" kx="0" ky="0" algn="b" rotWithShape="0" blurRad="38100" dist="23000" dir="5400000">
+                <a:srgbClr val="000000">
+                  <a:alpha val="35000"/>
+                </a:srgbClr>
+              </a:outerShdw>
+            </a:effectLst>
+          </p:spPr>
+          <p:txBody>
+            <a:bodyPr wrap="square" lIns="45719" tIns="45719" rIns="45719" bIns="45719" numCol="1" anchor="ctr">
+              <a:noAutofit/>
+            </a:bodyPr>
+            <a:lstStyle/>
+            <a:p>
+              <a:pPr algn="ctr">
+                <a:defRPr b="1" sz="3600">
+                  <a:solidFill>
+                    <a:srgbClr val="FFFFFF"/>
+                  </a:solidFill>
+                </a:defRPr>
+              </a:pPr>
+            </a:p>
+          </p:txBody>
+        </p:sp>
+        <p:sp>
+          <p:nvSpPr>
+            <p:cNvPr id="112" name="2"/>
+            <p:cNvSpPr txBox="1"/>
+            <p:nvPr/>
+          </p:nvSpPr>
+          <p:spPr>
+            <a:xfrm>
+              <a:off x="206412" y="273972"/>
+              <a:ext cx="684456" cy="549336"/>
+            </a:xfrm>
+            <a:prstGeom prst="rect">
+              <a:avLst/>
+            </a:prstGeom>
+            <a:noFill/>
+            <a:ln w="12700" cap="flat">
+              <a:noFill/>
+              <a:miter lim="400000"/>
+            </a:ln>
+            <a:effectLst/>
+            <a:extLst>
+              <a:ext uri="{C572A759-6A51-4108-AA02-DFA0A04FC94B}">
+                <ma14:wrappingTextBoxFlag xmlns:ma14="http://schemas.microsoft.com/office/mac/drawingml/2011/main" val="1"/>
+              </a:ext>
+            </a:extLst>
+          </p:spPr>
+          <p:txBody>
+            <a:bodyPr wrap="square" lIns="45719" tIns="45719" rIns="45719" bIns="45719" numCol="1" anchor="ctr">
+              <a:spAutoFit/>
+            </a:bodyPr>
+            <a:lstStyle>
+              <a:lvl1pPr algn="ctr">
+                <a:defRPr b="1" sz="3600">
+                  <a:solidFill>
+                    <a:srgbClr val="FFFFFF"/>
+                  </a:solidFill>
+                </a:defRPr>
+              </a:lvl1pPr>
+            </a:lstStyle>
+            <a:p>
+              <a:pPr/>
+              <a:r>
+                <a:t>2</a:t>
+              </a:r>
+            </a:p>
+          </p:txBody>
+        </p:sp>
+      </p:grpSp>
+      <p:sp>
+        <p:nvSpPr>
+          <p:cNvPr id="114" name="TextBox 2"/>
+          <p:cNvSpPr txBox="1"/>
+          <p:nvPr/>
+        </p:nvSpPr>
+        <p:spPr>
+          <a:xfrm>
+            <a:off x="2331719" y="2286000"/>
+            <a:ext cx="8595362" cy="497047"/>
+          </a:xfrm>
+          <a:prstGeom prst="rect">
+            <a:avLst/>
+          </a:prstGeom>
+          <a:ln w="12700">
+            <a:miter lim="400000"/>
+          </a:ln>
+          <a:extLst>
+            <a:ext uri="{C572A759-6A51-4108-AA02-DFA0A04FC94B}">
+              <ma14:wrappingTextBoxFlag xmlns:ma14="http://schemas.microsoft.com/office/mac/drawingml/2011/main" val="1"/>
+            </a:ext>
+          </a:extLst>
+        </p:spPr>
+        <p:txBody>
+          <a:bodyPr lIns="45719" rIns="45719">
+            <a:spAutoFit/>
+          </a:bodyPr>
+          <a:lstStyle>
+            <a:lvl1pPr>
+              <a:defRPr b="1" sz="3200">
+                <a:solidFill>
+                  <a:srgbClr val="FFFFFF"/>
+                </a:solidFill>
+              </a:defRPr>
+            </a:lvl1pPr>
+          </a:lstStyle>
+          <a:p>
+            <a:pPr/>
+            <a:r>
+              <a:rPr/>
+              <a:t>Section 2: Digital Tools</a:t>
+            </a:r>
+          </a:p>
+        </p:txBody>
+      </p:sp>
+      <p:sp>
+        <p:nvSpPr>
+          <p:cNvPr id="115" name="TextBox 3"/>
+          <p:cNvSpPr txBox="1"/>
+          <p:nvPr/>
+        </p:nvSpPr>
+        <p:spPr>
+          <a:xfrm>
+            <a:off x="2331719" y="3200400"/>
+            <a:ext cx="8595362" cy="333088"/>
+          </a:xfrm>
+          <a:prstGeom prst="rect">
+            <a:avLst/>
+          </a:prstGeom>
+          <a:ln w="12700">
+            <a:miter lim="400000"/>
+          </a:ln>
+          <a:extLst>
+            <a:ext uri="{C572A759-6A51-4108-AA02-DFA0A04FC94B}">
+              <ma14:wrappingTextBoxFlag xmlns:ma14="http://schemas.microsoft.com/office/mac/drawingml/2011/main" val="1"/>
+            </a:ext>
+          </a:extLst>
+        </p:spPr>
+        <p:txBody>
+          <a:bodyPr lIns="45719" rIns="45719">
+            <a:spAutoFit/>
+          </a:bodyPr>
+          <a:lstStyle>
+            <a:lvl1pPr>
+              <a:defRPr>
+                <a:solidFill>
+                  <a:srgbClr val="F4A55A"/>
+                </a:solidFill>
+              </a:defRPr>
+            </a:lvl1pPr>
+          </a:lstStyle>
+          <a:p>
+            <a:pPr/>
+            <a:r>
+              <a:rPr/>
+              <a:t>Free or low-cost platforms for creating interactive content</a:t>
+            </a:r>
+          </a:p>
+        </p:txBody>
+      </p:sp>
+    </p:spTree>
+  </p:cSld>
+  <p:clrMapOvr>
+    <a:masterClrMapping/>
+  </p:clrMapOvr>
+  <p:transition xmlns:p14="http://schemas.microsoft.com/office/powerpoint/2010/main" spd="med" advClick="1"/>
+</p:sld>
+</file>
+
+<file path=ppt/slides/slide5.xml><?xml version="1.0" encoding="utf-8"?>
+<p:sld xmlns:a="http://schemas.openxmlformats.org/drawingml/2006/main" xmlns:r="http://schemas.openxmlformats.org/officeDocument/2006/relationships" xmlns:p="http://schemas.openxmlformats.org/presentationml/2006/main" xmlns:m="http://schemas.openxmlformats.org/officeDocument/2006/math" xmlns:a14="http://schemas.microsoft.com/office/drawing/2010/main" showMasterSp="1" showMasterPhAnim="1">
+  <p:cSld>
+    <p:spTree>
+      <p:nvGrpSpPr>
+        <p:cNvPr id="1" name=""/>
+        <p:cNvGrpSpPr/>
+        <p:nvPr/>
+      </p:nvGrpSpPr>
+      <p:grpSpPr>
+        <a:xfrm>
+          <a:off x="0" y="0"/>
+          <a:ext cx="0" cy="0"/>
+          <a:chOff x="0" y="0"/>
+          <a:chExt cx="0" cy="0"/>
+        </a:xfrm>
+      </p:grpSpPr>
+      <p:sp>
+        <p:nvSpPr>
+          <p:cNvPr id="2" name="Rectangle 1"/>
+          <p:cNvSpPr/>
+          <p:nvPr/>
+        </p:nvSpPr>
+        <p:spPr>
+          <a:xfrm>
+            <a:off x="-1" y="0"/>
+            <a:ext cx="12191697" cy="1005839"/>
+          </a:xfrm>
+          <a:prstGeom prst="rect">
+            <a:avLst/>
+          </a:prstGeom>
+          <a:solidFill>
+            <a:srgbClr val="2D5F7C"/>
+          </a:solidFill>
+          <a:ln>
+            <a:noFill/>
+          </a:ln>
+          <a:effectLst/>
+        </p:spPr>
+        <p:style>
+          <a:lnRef idx="1">
+            <a:schemeClr val="accent1"/>
+          </a:lnRef>
+          <a:fillRef idx="3">
+            <a:schemeClr val="accent1"/>
+          </a:fillRef>
+          <a:effectRef idx="2">
+            <a:schemeClr val="accent1"/>
+          </a:effectRef>
+          <a:fontRef idx="minor">
+            <a:schemeClr val="lt1"/>
+          </a:fontRef>
+        </p:style>
+        <p:txBody>
+          <a:bodyPr rtlCol="0" anchor="ctr"/>
+          <a:lstStyle/>
+          <a:p>
+            <a:pPr algn="ctr"/>
+          </a:p>
+        </p:txBody>
+      </p:sp>
+      <p:sp>
+        <p:nvSpPr>
+          <p:cNvPr id="3" name="Rectangle 2"/>
+          <p:cNvSpPr/>
+          <p:nvPr/>
+        </p:nvSpPr>
+        <p:spPr>
+          <a:xfrm>
+            <a:off x="640080" y="1371600"/>
+            <a:ext cx="5486401" cy="4114800"/>
+          </a:xfrm>
+          <a:prstGeom prst="rect">
+            <a:avLst/>
+          </a:prstGeom>
+          <a:solidFill>
+            <a:srgbClr val="F0F4F8"/>
+          </a:solidFill>
+          <a:ln>
+            <a:noFill/>
+          </a:ln>
+          <a:effectLst/>
+        </p:spPr>
+        <p:style>
+          <a:lnRef idx="1">
+            <a:schemeClr val="accent1"/>
+          </a:lnRef>
+          <a:fillRef idx="3">
+            <a:schemeClr val="accent1"/>
+          </a:fillRef>
+          <a:effectRef idx="2">
+            <a:schemeClr val="accent1"/>
+          </a:effectRef>
+          <a:fontRef idx="minor">
+            <a:schemeClr val="lt1"/>
+          </a:fontRef>
+        </p:style>
+        <p:txBody>
+          <a:bodyPr rtlCol="0" anchor="ctr"/>
+          <a:lstStyle/>
+          <a:p>
+            <a:pPr algn="ctr"/>
+          </a:p>
+        </p:txBody>
+      </p:sp>
+      <p:sp>
+        <p:nvSpPr>
+          <p:cNvPr id="4" name="Rectangle 3"/>
+          <p:cNvSpPr/>
+          <p:nvPr/>
+        </p:nvSpPr>
+        <p:spPr>
+          <a:xfrm>
+            <a:off x="640080" y="1371600"/>
+            <a:ext cx="50801" cy="4114800"/>
+          </a:xfrm>
+          <a:prstGeom prst="rect">
+            <a:avLst/>
+          </a:prstGeom>
+          <a:solidFill>
+            <a:srgbClr val="2D5F7C"/>
+          </a:solidFill>
+          <a:ln>
+            <a:noFill/>
+          </a:ln>
+          <a:effectLst/>
+        </p:spPr>
+        <p:style>
+          <a:lnRef idx="1">
+            <a:schemeClr val="accent1"/>
+          </a:lnRef>
+          <a:fillRef idx="3">
+            <a:schemeClr val="accent1"/>
+          </a:fillRef>
+          <a:effectRef idx="2">
+            <a:schemeClr val="accent1"/>
+          </a:effectRef>
+          <a:fontRef idx="minor">
+            <a:schemeClr val="lt1"/>
+          </a:fontRef>
+        </p:style>
+        <p:txBody>
+          <a:bodyPr rtlCol="0" anchor="ctr"/>
+          <a:lstStyle/>
+          <a:p>
+            <a:pPr algn="ctr"/>
+          </a:p>
+        </p:txBody>
+      </p:sp>
+      <p:sp>
+        <p:nvSpPr>
+          <p:cNvPr id="5" name="Rectangle 4"/>
+          <p:cNvSpPr/>
+          <p:nvPr/>
+        </p:nvSpPr>
+        <p:spPr>
+          <a:xfrm>
+            <a:off x="6583680" y="1371600"/>
+            <a:ext cx="5029201" cy="4114800"/>
+          </a:xfrm>
+          <a:prstGeom prst="rect">
+            <a:avLst/>
+          </a:prstGeom>
+          <a:solidFill>
+            <a:srgbClr val="FDF6F0"/>
+          </a:solidFill>
+          <a:ln>
+            <a:noFill/>
+          </a:ln>
+          <a:effectLst/>
+        </p:spPr>
+        <p:style>
+          <a:lnRef idx="1">
+            <a:schemeClr val="accent1"/>
+          </a:lnRef>
+          <a:fillRef idx="3">
+            <a:schemeClr val="accent1"/>
+          </a:fillRef>
+          <a:effectRef idx="2">
+            <a:schemeClr val="accent1"/>
+          </a:effectRef>
+          <a:fontRef idx="minor">
+            <a:schemeClr val="lt1"/>
+          </a:fontRef>
+        </p:style>
+        <p:txBody>
+          <a:bodyPr rtlCol="0" anchor="ctr"/>
+          <a:lstStyle/>
+          <a:p>
+            <a:pPr algn="ctr"/>
+          </a:p>
+        </p:txBody>
+      </p:sp>
+      <p:sp>
+        <p:nvSpPr>
+          <p:cNvPr id="6" name="Rectangle 5"/>
+          <p:cNvSpPr/>
+          <p:nvPr/>
+        </p:nvSpPr>
+        <p:spPr>
+          <a:xfrm>
+            <a:off x="6583680" y="1371600"/>
+            <a:ext cx="50801" cy="4114800"/>
+          </a:xfrm>
+          <a:prstGeom prst="rect">
+            <a:avLst/>
+          </a:prstGeom>
+          <a:solidFill>
+            <a:srgbClr val="E8833A"/>
+          </a:solidFill>
+          <a:ln>
+            <a:noFill/>
+          </a:ln>
+          <a:effectLst/>
+        </p:spPr>
+        <p:style>
+          <a:lnRef idx="1">
+            <a:schemeClr val="accent1"/>
+          </a:lnRef>
+          <a:fillRef idx="3">
+            <a:schemeClr val="accent1"/>
+          </a:fillRef>
+          <a:effectRef idx="2">
+            <a:schemeClr val="accent1"/>
+          </a:effectRef>
+          <a:fontRef idx="minor">
+            <a:schemeClr val="lt1"/>
+          </a:fontRef>
+        </p:style>
+        <p:txBody>
+          <a:bodyPr rtlCol="0" anchor="ctr"/>
+          <a:lstStyle/>
+          <a:p>
+            <a:pPr algn="ctr"/>
+          </a:p>
+        </p:txBody>
+      </p:sp>
+      <p:sp>
+        <p:nvSpPr>
+          <p:cNvPr id="7" name="TextBox 6"/>
+          <p:cNvSpPr txBox="1"/>
+          <p:nvPr/>
+        </p:nvSpPr>
+        <p:spPr>
+          <a:xfrm>
+            <a:off x="502919" y="182879"/>
+            <a:ext cx="11155682" cy="444759"/>
+          </a:xfrm>
+          <a:prstGeom prst="rect">
+            <a:avLst/>
+          </a:prstGeom>
+          <a:noFill/>
+        </p:spPr>
+        <p:txBody>
+          <a:bodyPr wrap="square">
+            <a:spAutoFit/>
+          </a:bodyPr>
+          <a:lstStyle/>
+          <a:p>
+            <a:r>
+              <a:rPr sz="2800" b="1">
+                <a:solidFill>
+                  <a:srgbClr val="FFFFFF"/>
+                </a:solidFill>
+              </a:rPr>
+              <a:t>Demo: The Realism Gap, Part 1: The Hand-Built Case</a:t>
+            </a:r>
+          </a:p>
+        </p:txBody>
+      </p:sp>
+      <p:sp>
+        <p:nvSpPr>
+          <p:cNvPr id="8" name="TextBox 7"/>
+          <p:cNvSpPr txBox="1"/>
+          <p:nvPr/>
+        </p:nvSpPr>
+        <p:spPr>
+          <a:xfrm>
+            <a:off x="502919" y="1097280"/>
+            <a:ext cx="11155682" cy="300594"/>
+          </a:xfrm>
+          <a:prstGeom prst="rect">
+            <a:avLst/>
+          </a:prstGeom>
+          <a:noFill/>
+        </p:spPr>
+        <p:txBody>
+          <a:bodyPr wrap="square">
+            <a:spAutoFit/>
+          </a:bodyPr>
+          <a:lstStyle/>
+          <a:p>
+            <a:r>
+              <a:rPr sz="1600" b="0">
+                <a:solidFill>
+                  <a:srgbClr val="5B6B7C"/>
+                </a:solidFill>
+              </a:rPr>
+              <a:t>The 19-year-old with the sore throat, built branch by branch</a:t>
+            </a:r>
+          </a:p>
+        </p:txBody>
+      </p:sp>
+      <p:sp>
+        <p:nvSpPr>
+          <p:cNvPr id="9" name="TextBox 8"/>
+          <p:cNvSpPr txBox="1"/>
+          <p:nvPr/>
+        </p:nvSpPr>
+        <p:spPr>
+          <a:xfrm>
+            <a:off x="960119" y="1554480"/>
+            <a:ext cx="4937762" cy="225708"/>
+          </a:xfrm>
+          <a:prstGeom prst="rect">
+            <a:avLst/>
+          </a:prstGeom>
+          <a:noFill/>
+        </p:spPr>
+        <p:txBody>
+          <a:bodyPr wrap="square">
+            <a:spAutoFit/>
+          </a:bodyPr>
+          <a:lstStyle/>
+          <a:p>
+            <a:r>
+              <a:rPr sz="1100" b="1">
+                <a:solidFill>
+                  <a:srgbClr val="E8833A"/>
+                </a:solidFill>
+              </a:rPr>
+              <a:t>WHAT IT DOES WELL</a:t>
+            </a:r>
+          </a:p>
+        </p:txBody>
+      </p:sp>
+      <p:sp>
+        <p:nvSpPr>
+          <p:cNvPr id="10" name="TextBox 9"/>
+          <p:cNvSpPr txBox="1"/>
+          <p:nvPr/>
+        </p:nvSpPr>
+        <p:spPr>
+          <a:xfrm>
+            <a:off x="960119" y="1920239"/>
+            <a:ext cx="4937762" cy="2301589"/>
+          </a:xfrm>
+          <a:prstGeom prst="rect">
+            <a:avLst/>
+          </a:prstGeom>
+          <a:noFill/>
+        </p:spPr>
+        <p:txBody>
+          <a:bodyPr wrap="square">
+            <a:spAutoFit/>
+          </a:bodyPr>
+          <a:lstStyle/>
+          <a:p>
+            <a:r>
+              <a:rPr sz="1800">
+                <a:solidFill>
+                  <a:srgbClr val="1A2332"/>
+                </a:solidFill>
+              </a:rPr>
+              <a:t>• Captures clinical reasoning, branch by branch</a:t>
+            </a:r>
+          </a:p>
+          <a:p>
+            <a:r>
+              <a:rPr sz="1800">
+                <a:solidFill>
+                  <a:srgbClr val="1A2332"/>
+                </a:solidFill>
+              </a:rPr>
+              <a:t>• Grounded: every number is from the published case</a:t>
+            </a:r>
+          </a:p>
+          <a:p>
+            <a:r>
+              <a:rPr sz="1800">
+                <a:solidFill>
+                  <a:srgbClr val="1A2332"/>
+                </a:solidFill>
+              </a:rPr>
+              <a:t>• Consistent: every learner sees the same one</a:t>
+            </a:r>
+          </a:p>
+        </p:txBody>
+      </p:sp>
+      <p:sp>
+        <p:nvSpPr>
+          <p:cNvPr id="11" name="TextBox 10"/>
+          <p:cNvSpPr txBox="1"/>
+          <p:nvPr/>
+        </p:nvSpPr>
+        <p:spPr>
+          <a:xfrm>
+            <a:off x="6903719" y="1554480"/>
+            <a:ext cx="4480562" cy="225708"/>
+          </a:xfrm>
+          <a:prstGeom prst="rect">
+            <a:avLst/>
+          </a:prstGeom>
+          <a:noFill/>
+        </p:spPr>
+        <p:txBody>
+          <a:bodyPr wrap="square">
+            <a:spAutoFit/>
+          </a:bodyPr>
+          <a:lstStyle/>
+          <a:p>
+            <a:r>
+              <a:rPr sz="1100" b="1">
+                <a:solidFill>
+                  <a:srgbClr val="E8833A"/>
+                </a:solidFill>
+              </a:rPr>
+              <a:t>THE GAP</a:t>
+            </a:r>
+          </a:p>
+        </p:txBody>
+      </p:sp>
+      <p:sp>
+        <p:nvSpPr>
+          <p:cNvPr id="12" name="TextBox 11"/>
+          <p:cNvSpPr txBox="1"/>
+          <p:nvPr/>
+        </p:nvSpPr>
+        <p:spPr>
+          <a:xfrm>
+            <a:off x="6903719" y="1920239"/>
+            <a:ext cx="4480562" cy="2301589"/>
+          </a:xfrm>
+          <a:prstGeom prst="rect">
+            <a:avLst/>
+          </a:prstGeom>
+          <a:noFill/>
+        </p:spPr>
+        <p:txBody>
+          <a:bodyPr wrap="square">
+            <a:spAutoFit/>
+          </a:bodyPr>
+          <a:lstStyle/>
+          <a:p>
+            <a:r>
+              <a:rPr sz="1800" b="0">
+                <a:solidFill>
+                  <a:srgbClr val="1A2332"/>
+                </a:solidFill>
+              </a:rPr>
+              <a:t>Real patients are not multiple choice.</a:t>
+            </a:r>
+          </a:p>
+          <a:p>
+            <a:pPr>
+              <a:spcBef>
+                <a:spcPts val="1000"/>
+              </a:spcBef>
+            </a:pPr>
+            <a:r>
+              <a:rPr sz="1800" b="0">
+                <a:solidFill>
+                  <a:srgbClr val="1A2332"/>
+                </a:solidFill>
+              </a:rPr>
+              <a:t>It only answers what its author pre-imagined.</a:t>
+            </a:r>
+          </a:p>
+          <a:p>
+            <a:pPr>
+              <a:spcBef>
+                <a:spcPts val="1000"/>
+              </a:spcBef>
+            </a:pPr>
+            <a:r>
+              <a:rPr sz="1800" b="0">
+                <a:solidFill>
+                  <a:srgbClr val="1A2332"/>
+                </a:solidFill>
+              </a:rPr>
+              <a:t>A hiking trail, not open country.</a:t>
+            </a:r>
+          </a:p>
+        </p:txBody>
+      </p:sp>
+      <p:sp>
+        <p:nvSpPr>
+          <p:cNvPr id="13" name="TextBox 12"/>
+          <p:cNvSpPr txBox="1"/>
+          <p:nvPr/>
+        </p:nvSpPr>
+        <p:spPr>
+          <a:xfrm>
+            <a:off x="502919" y="5715000"/>
+            <a:ext cx="11155682" cy="300594"/>
+          </a:xfrm>
+          <a:prstGeom prst="rect">
+            <a:avLst/>
+          </a:prstGeom>
+          <a:noFill/>
+        </p:spPr>
+        <p:txBody>
+          <a:bodyPr wrap="square">
+            <a:spAutoFit/>
+          </a:bodyPr>
+          <a:lstStyle/>
+          <a:p>
+            <a:r>
+              <a:rPr sz="1600" b="0">
+                <a:solidFill>
+                  <a:srgbClr val="0000FF"/>
+                </a:solidFill>
+              </a:rPr>
+              <a:t>Workshop Guide → Section 2 (run the demo on your phone)</a:t>
+            </a:r>
+          </a:p>
+        </p:txBody>
+      </p:sp>
+    </p:spTree>
+  </p:cSld>
+  <p:clrMapOvr>
+    <a:masterClrMapping/>
+  </p:clrMapOvr>
+  <p:transition xmlns:p14="http://schemas.microsoft.com/office/powerpoint/2010/main" spd="med" advClick="1"/>
+</p:sld>
+</file>
+
+<file path=ppt/slides/slide6.xml><?xml version="1.0" encoding="utf-8"?>
+<p:sld xmlns:a="http://schemas.openxmlformats.org/drawingml/2006/main" xmlns:p="http://schemas.openxmlformats.org/presentationml/2006/main" xmlns:r="http://schemas.openxmlformats.org/officeDocument/2006/relationships">
+  <p:cSld>
+    <p:spTree>
+      <p:nvGrpSpPr>
+        <p:cNvPr id="1" name=""/>
+        <p:cNvGrpSpPr/>
+        <p:nvPr/>
+      </p:nvGrpSpPr>
+      <p:grpSpPr/>
+      <p:sp>
+        <p:nvSpPr>
+          <p:cNvPr id="2" name="Rectangle 1"/>
+          <p:cNvSpPr/>
+          <p:nvPr/>
+        </p:nvSpPr>
+        <p:spPr>
+          <a:xfrm>
+            <a:off x="-1" y="0"/>
+            <a:ext cx="12191697" cy="1005839"/>
+          </a:xfrm>
+          <a:prstGeom prst="rect">
+            <a:avLst/>
+          </a:prstGeom>
+          <a:solidFill>
+            <a:srgbClr val="2D5F7C"/>
+          </a:solidFill>
+          <a:ln>
+            <a:noFill/>
+          </a:ln>
+          <a:effectLst/>
+        </p:spPr>
+        <p:style>
+          <a:lnRef idx="1">
+            <a:schemeClr val="accent1"/>
+          </a:lnRef>
+          <a:fillRef idx="3">
+            <a:schemeClr val="accent1"/>
+          </a:fillRef>
+          <a:effectRef idx="2">
+            <a:schemeClr val="accent1"/>
+          </a:effectRef>
+          <a:fontRef idx="minor">
+            <a:schemeClr val="lt1"/>
+          </a:fontRef>
+        </p:style>
+        <p:txBody>
+          <a:bodyPr rtlCol="0" anchor="ctr"/>
+          <a:lstStyle/>
+          <a:p>
+            <a:pPr algn="ctr"/>
+          </a:p>
+        </p:txBody>
+      </p:sp>
+      <p:sp>
+        <p:nvSpPr>
+          <p:cNvPr id="3" name="Rectangle 2"/>
+          <p:cNvSpPr/>
+          <p:nvPr/>
+        </p:nvSpPr>
+        <p:spPr>
+          <a:xfrm>
+            <a:off x="640080" y="1371600"/>
+            <a:ext cx="5486401" cy="4114800"/>
+          </a:xfrm>
+          <a:prstGeom prst="rect">
+            <a:avLst/>
+          </a:prstGeom>
+          <a:solidFill>
+            <a:srgbClr val="F0F4F8"/>
+          </a:solidFill>
+          <a:ln>
+            <a:noFill/>
+          </a:ln>
+          <a:effectLst/>
+        </p:spPr>
+        <p:style>
+          <a:lnRef idx="1">
+            <a:schemeClr val="accent1"/>
+          </a:lnRef>
+          <a:fillRef idx="3">
+            <a:schemeClr val="accent1"/>
+          </a:fillRef>
+          <a:effectRef idx="2">
+            <a:schemeClr val="accent1"/>
+          </a:effectRef>
+          <a:fontRef idx="minor">
+            <a:schemeClr val="lt1"/>
+          </a:fontRef>
+        </p:style>
+        <p:txBody>
+          <a:bodyPr rtlCol="0" anchor="ctr"/>
+          <a:lstStyle/>
+          <a:p>
+            <a:pPr algn="ctr"/>
+          </a:p>
+        </p:txBody>
+      </p:sp>
+      <p:sp>
+        <p:nvSpPr>
+          <p:cNvPr id="4" name="Rectangle 3"/>
+          <p:cNvSpPr/>
+          <p:nvPr/>
+        </p:nvSpPr>
+        <p:spPr>
+          <a:xfrm>
+            <a:off x="640080" y="1371600"/>
+            <a:ext cx="50801" cy="4114800"/>
+          </a:xfrm>
+          <a:prstGeom prst="rect">
+            <a:avLst/>
+          </a:prstGeom>
+          <a:solidFill>
+            <a:srgbClr val="2D5F7C"/>
+          </a:solidFill>
+          <a:ln>
+            <a:noFill/>
+          </a:ln>
+          <a:effectLst/>
+        </p:spPr>
+        <p:style>
+          <a:lnRef idx="1">
+            <a:schemeClr val="accent1"/>
+          </a:lnRef>
+          <a:fillRef idx="3">
+            <a:schemeClr val="accent1"/>
+          </a:fillRef>
+          <a:effectRef idx="2">
+            <a:schemeClr val="accent1"/>
+          </a:effectRef>
+          <a:fontRef idx="minor">
+            <a:schemeClr val="lt1"/>
+          </a:fontRef>
+        </p:style>
+        <p:txBody>
+          <a:bodyPr rtlCol="0" anchor="ctr"/>
+          <a:lstStyle/>
+          <a:p>
+            <a:pPr algn="ctr"/>
+          </a:p>
+        </p:txBody>
+      </p:sp>
+      <p:sp>
+        <p:nvSpPr>
+          <p:cNvPr id="5" name="Rectangle 4"/>
+          <p:cNvSpPr/>
+          <p:nvPr/>
+        </p:nvSpPr>
+        <p:spPr>
+          <a:xfrm>
+            <a:off x="6583680" y="1371600"/>
+            <a:ext cx="5029201" cy="4114800"/>
+          </a:xfrm>
+          <a:prstGeom prst="rect">
+            <a:avLst/>
+          </a:prstGeom>
+          <a:solidFill>
+            <a:srgbClr val="FDF6F0"/>
+          </a:solidFill>
+          <a:ln>
+            <a:noFill/>
+          </a:ln>
+          <a:effectLst/>
+        </p:spPr>
+        <p:style>
+          <a:lnRef idx="1">
+            <a:schemeClr val="accent1"/>
+          </a:lnRef>
+          <a:fillRef idx="3">
+            <a:schemeClr val="accent1"/>
+          </a:fillRef>
+          <a:effectRef idx="2">
+            <a:schemeClr val="accent1"/>
+          </a:effectRef>
+          <a:fontRef idx="minor">
+            <a:schemeClr val="lt1"/>
+          </a:fontRef>
+        </p:style>
+        <p:txBody>
+          <a:bodyPr rtlCol="0" anchor="ctr"/>
+          <a:lstStyle/>
+          <a:p>
+            <a:pPr algn="ctr"/>
+          </a:p>
+        </p:txBody>
+      </p:sp>
+      <p:sp>
+        <p:nvSpPr>
+          <p:cNvPr id="6" name="Rectangle 5"/>
+          <p:cNvSpPr/>
+          <p:nvPr/>
+        </p:nvSpPr>
+        <p:spPr>
+          <a:xfrm>
+            <a:off x="6583680" y="1371600"/>
+            <a:ext cx="50801" cy="4114800"/>
+          </a:xfrm>
+          <a:prstGeom prst="rect">
+            <a:avLst/>
+          </a:prstGeom>
+          <a:solidFill>
+            <a:srgbClr val="E8833A"/>
+          </a:solidFill>
+          <a:ln>
+            <a:noFill/>
+          </a:ln>
+          <a:effectLst/>
+        </p:spPr>
+        <p:style>
+          <a:lnRef idx="1">
+            <a:schemeClr val="accent1"/>
+          </a:lnRef>
+          <a:fillRef idx="3">
+            <a:schemeClr val="accent1"/>
+          </a:fillRef>
+          <a:effectRef idx="2">
+            <a:schemeClr val="accent1"/>
+          </a:effectRef>
+          <a:fontRef idx="minor">
+            <a:schemeClr val="lt1"/>
+          </a:fontRef>
+        </p:style>
+        <p:txBody>
+          <a:bodyPr rtlCol="0" anchor="ctr"/>
+          <a:lstStyle/>
+          <a:p>
+            <a:pPr algn="ctr"/>
+          </a:p>
+        </p:txBody>
+      </p:sp>
+      <p:sp>
+        <p:nvSpPr>
+          <p:cNvPr id="7" name="TextBox 6"/>
+          <p:cNvSpPr txBox="1"/>
+          <p:nvPr/>
+        </p:nvSpPr>
+        <p:spPr>
+          <a:xfrm>
+            <a:off x="502919" y="182879"/>
+            <a:ext cx="11155682" cy="444759"/>
+          </a:xfrm>
+          <a:prstGeom prst="rect">
+            <a:avLst/>
+          </a:prstGeom>
+          <a:noFill/>
+        </p:spPr>
+        <p:txBody>
+          <a:bodyPr wrap="square">
+            <a:spAutoFit/>
+          </a:bodyPr>
+          <a:lstStyle/>
+          <a:p>
+            <a:r>
+              <a:rPr sz="2800" b="1">
+                <a:solidFill>
+                  <a:srgbClr val="FFFFFF"/>
+                </a:solidFill>
+              </a:rPr>
+              <a:t>Demo: The Realism Gap, Part 2: The AI Case, Live</a:t>
+            </a:r>
+          </a:p>
+        </p:txBody>
+      </p:sp>
+      <p:sp>
+        <p:nvSpPr>
+          <p:cNvPr id="8" name="TextBox 7"/>
+          <p:cNvSpPr txBox="1"/>
+          <p:nvPr/>
+        </p:nvSpPr>
+        <p:spPr>
+          <a:xfrm>
+            <a:off x="502919" y="1097280"/>
+            <a:ext cx="11155682" cy="300594"/>
+          </a:xfrm>
+          <a:prstGeom prst="rect">
+            <a:avLst/>
+          </a:prstGeom>
+          <a:noFill/>
+        </p:spPr>
+        <p:txBody>
+          <a:bodyPr wrap="square">
+            <a:spAutoFit/>
+          </a:bodyPr>
+          <a:lstStyle/>
+          <a:p>
+            <a:r>
+              <a:rPr sz="1600" b="0">
+                <a:solidFill>
+                  <a:srgbClr val="5B6B7C"/>
+                </a:solidFill>
+              </a:rPr>
+              <a:t>Same 19-year-old, now open-ended: one paste, sixty seconds</a:t>
+            </a:r>
+          </a:p>
+        </p:txBody>
+      </p:sp>
+      <p:sp>
+        <p:nvSpPr>
+          <p:cNvPr id="9" name="TextBox 8"/>
+          <p:cNvSpPr txBox="1"/>
+          <p:nvPr/>
+        </p:nvSpPr>
+        <p:spPr>
+          <a:xfrm>
+            <a:off x="960119" y="1554480"/>
+            <a:ext cx="4937762" cy="225708"/>
+          </a:xfrm>
+          <a:prstGeom prst="rect">
+            <a:avLst/>
+          </a:prstGeom>
+          <a:noFill/>
+        </p:spPr>
+        <p:txBody>
+          <a:bodyPr wrap="square">
+            <a:spAutoFit/>
+          </a:bodyPr>
+          <a:lstStyle/>
+          <a:p>
+            <a:r>
+              <a:rPr sz="1100" b="1">
+                <a:solidFill>
+                  <a:srgbClr val="2D5F7C"/>
+                </a:solidFill>
+              </a:rPr>
+              <a:t>WHAT THE PASTE PRODUCES</a:t>
+            </a:r>
+          </a:p>
+        </p:txBody>
+      </p:sp>
+      <p:sp>
+        <p:nvSpPr>
+          <p:cNvPr id="10" name="TextBox 9"/>
+          <p:cNvSpPr txBox="1"/>
+          <p:nvPr/>
+        </p:nvSpPr>
+        <p:spPr>
+          <a:xfrm>
+            <a:off x="960119" y="1920239"/>
+            <a:ext cx="4937762" cy="2301589"/>
+          </a:xfrm>
+          <a:prstGeom prst="rect">
+            <a:avLst/>
+          </a:prstGeom>
+          <a:noFill/>
+        </p:spPr>
+        <p:txBody>
+          <a:bodyPr wrap="square">
+            <a:spAutoFit/>
+          </a:bodyPr>
+          <a:lstStyle/>
+          <a:p>
+            <a:r>
+              <a:rPr sz="1800" b="0">
+                <a:solidFill>
+                  <a:srgbClr val="1A2332"/>
+                </a:solidFill>
+              </a:rPr>
+              <a:t>• An open-ended case: the learner asks anything</a:t>
+            </a:r>
+          </a:p>
+          <a:p>
+            <a:pPr>
+              <a:spcBef>
+                <a:spcPts val="1000"/>
+              </a:spcBef>
+            </a:pPr>
+            <a:r>
+              <a:rPr sz="1800" b="0">
+                <a:solidFill>
+                  <a:srgbClr val="1A2332"/>
+                </a:solidFill>
+              </a:rPr>
+              <a:t>• A student-ready prompt with rubric feedback</a:t>
+            </a:r>
+          </a:p>
+          <a:p>
+            <a:pPr>
+              <a:spcBef>
+                <a:spcPts val="1000"/>
+              </a:spcBef>
+            </a:pPr>
+            <a:r>
+              <a:rPr sz="1800" b="0">
+                <a:solidFill>
+                  <a:srgbClr val="1A2332"/>
+                </a:solidFill>
+              </a:rPr>
+              <a:t>• A provenance warning it writes itself</a:t>
+            </a:r>
+          </a:p>
+        </p:txBody>
+      </p:sp>
+      <p:sp>
+        <p:nvSpPr>
+          <p:cNvPr id="11" name="TextBox 10"/>
+          <p:cNvSpPr txBox="1"/>
+          <p:nvPr/>
+        </p:nvSpPr>
+        <p:spPr>
+          <a:xfrm>
+            <a:off x="6903719" y="1554480"/>
+            <a:ext cx="4480562" cy="225708"/>
+          </a:xfrm>
+          <a:prstGeom prst="rect">
+            <a:avLst/>
+          </a:prstGeom>
+          <a:noFill/>
+        </p:spPr>
+        <p:txBody>
+          <a:bodyPr wrap="square">
+            <a:spAutoFit/>
+          </a:bodyPr>
+          <a:lstStyle/>
+          <a:p>
+            <a:r>
+              <a:rPr sz="1100" b="1">
+                <a:solidFill>
+                  <a:srgbClr val="E8833A"/>
+                </a:solidFill>
+              </a:rPr>
+              <a:t>RUN IT AND COMPARE</a:t>
+            </a:r>
+          </a:p>
+        </p:txBody>
+      </p:sp>
+      <p:sp>
+        <p:nvSpPr>
+          <p:cNvPr id="12" name="TextBox 11"/>
+          <p:cNvSpPr txBox="1"/>
+          <p:nvPr/>
+        </p:nvSpPr>
+        <p:spPr>
+          <a:xfrm>
+            <a:off x="6903719" y="1920239"/>
+            <a:ext cx="4480562" cy="2301589"/>
+          </a:xfrm>
+          <a:prstGeom prst="rect">
+            <a:avLst/>
+          </a:prstGeom>
+          <a:noFill/>
+        </p:spPr>
+        <p:txBody>
+          <a:bodyPr wrap="square">
+            <a:spAutoFit/>
+          </a:bodyPr>
+          <a:lstStyle/>
+          <a:p>
+            <a:r>
+              <a:rPr sz="1800">
+                <a:solidFill>
+                  <a:srgbClr val="1A2332"/>
+                </a:solidFill>
+              </a:rPr>
+              <a:t>The prompt is in the guide, Section 3: Today's Demo Case.</a:t>
+            </a:r>
+          </a:p>
+          <a:p>
+            <a:r>
+              <a:rPr sz="1800">
+                <a:solidFill>
+                  <a:srgbClr val="1A2332"/>
+                </a:solidFill>
+              </a:rPr>
+              <a:t>Run it, then compare numbers with your neighbor.</a:t>
+            </a:r>
+          </a:p>
+        </p:txBody>
+      </p:sp>
+      <p:sp>
+        <p:nvSpPr>
+          <p:cNvPr id="13" name="TextBox 12"/>
+          <p:cNvSpPr txBox="1"/>
+          <p:nvPr/>
+        </p:nvSpPr>
+        <p:spPr>
+          <a:xfrm>
+            <a:off x="502919" y="5715000"/>
+            <a:ext cx="11155682" cy="300594"/>
+          </a:xfrm>
+          <a:prstGeom prst="rect">
+            <a:avLst/>
+          </a:prstGeom>
+          <a:noFill/>
+        </p:spPr>
+        <p:txBody>
+          <a:bodyPr wrap="square">
+            <a:spAutoFit/>
+          </a:bodyPr>
+          <a:lstStyle/>
+          <a:p>
+            <a:r>
+              <a:rPr sz="1600" b="0">
+                <a:solidFill>
+                  <a:srgbClr val="0000FF"/>
+                </a:solidFill>
+              </a:rPr>
+              <a:t>Workshop Guide → Section 3 (Today's Demo Case)</a:t>
+            </a:r>
+          </a:p>
+        </p:txBody>
+      </p:sp>
+    </p:spTree>
+  </p:cSld>
+  <p:clrMapOvr>
+    <a:masterClrMapping/>
+  </p:clrMapOvr>
+</p:sld>
+</file>
+
+<file path=ppt/slides/slide7.xml><?xml version="1.0" encoding="utf-8"?>
+<p:sld xmlns:a="http://schemas.openxmlformats.org/drawingml/2006/main" xmlns:r="http://schemas.openxmlformats.org/officeDocument/2006/relationships" xmlns:p="http://schemas.openxmlformats.org/presentationml/2006/main" xmlns:m="http://schemas.openxmlformats.org/officeDocument/2006/math" xmlns:a14="http://schemas.microsoft.com/office/drawing/2010/main" showMasterSp="1" showMasterPhAnim="1">
+  <p:cSld>
+    <p:spTree>
+      <p:nvGrpSpPr>
+        <p:cNvPr id="1" name=""/>
+        <p:cNvGrpSpPr/>
+        <p:nvPr/>
+      </p:nvGrpSpPr>
+      <p:grpSpPr>
+        <a:xfrm>
+          <a:off x="0" y="0"/>
+          <a:ext cx="0" cy="0"/>
+          <a:chOff x="0" y="0"/>
+          <a:chExt cx="0" cy="0"/>
+        </a:xfrm>
+      </p:grpSpPr>
+      <p:sp>
+        <p:nvSpPr>
+          <p:cNvPr id="2" name="Rectangle 1"/>
+          <p:cNvSpPr/>
+          <p:nvPr/>
+        </p:nvSpPr>
+        <p:spPr>
+          <a:xfrm>
+            <a:off x="-1" y="0"/>
+            <a:ext cx="12191697" cy="1005839"/>
+          </a:xfrm>
+          <a:prstGeom prst="rect">
+            <a:avLst/>
+          </a:prstGeom>
+          <a:solidFill>
+            <a:srgbClr val="2D5F7C"/>
+          </a:solidFill>
+          <a:ln>
+            <a:noFill/>
+          </a:ln>
+          <a:effectLst/>
+        </p:spPr>
+        <p:style>
+          <a:lnRef idx="1">
+            <a:schemeClr val="accent1"/>
+          </a:lnRef>
+          <a:fillRef idx="3">
+            <a:schemeClr val="accent1"/>
+          </a:fillRef>
+          <a:effectRef idx="2">
+            <a:schemeClr val="accent1"/>
+          </a:effectRef>
+          <a:fontRef idx="minor">
+            <a:schemeClr val="lt1"/>
+          </a:fontRef>
+        </p:style>
+        <p:txBody>
+          <a:bodyPr rtlCol="0" anchor="ctr"/>
+          <a:lstStyle/>
+          <a:p>
+            <a:pPr algn="ctr"/>
+          </a:p>
+        </p:txBody>
+      </p:sp>
+      <p:sp>
+        <p:nvSpPr>
+          <p:cNvPr id="3" name="Rectangle 2"/>
+          <p:cNvSpPr/>
+          <p:nvPr/>
+        </p:nvSpPr>
+        <p:spPr>
+          <a:xfrm>
+            <a:off x="640080" y="1371600"/>
+            <a:ext cx="10972801" cy="3657600"/>
+          </a:xfrm>
+          <a:prstGeom prst="rect">
+            <a:avLst/>
+          </a:prstGeom>
+          <a:solidFill>
+            <a:srgbClr val="F0F4F8"/>
+          </a:solidFill>
+          <a:ln>
+            <a:noFill/>
+          </a:ln>
+          <a:effectLst/>
+        </p:spPr>
+        <p:style>
+          <a:lnRef idx="1">
+            <a:schemeClr val="accent1"/>
+          </a:lnRef>
+          <a:fillRef idx="3">
+            <a:schemeClr val="accent1"/>
+          </a:fillRef>
+          <a:effectRef idx="2">
+            <a:schemeClr val="accent1"/>
+          </a:effectRef>
+          <a:fontRef idx="minor">
+            <a:schemeClr val="lt1"/>
+          </a:fontRef>
+        </p:style>
+        <p:txBody>
+          <a:bodyPr rtlCol="0" anchor="ctr"/>
+          <a:lstStyle/>
+          <a:p>
+            <a:pPr algn="ctr"/>
+          </a:p>
+        </p:txBody>
+      </p:sp>
+      <p:sp>
+        <p:nvSpPr>
+          <p:cNvPr id="4" name="Rectangle 3"/>
+          <p:cNvSpPr/>
+          <p:nvPr/>
+        </p:nvSpPr>
+        <p:spPr>
+          <a:xfrm>
+            <a:off x="640080" y="1371600"/>
+            <a:ext cx="50801" cy="3657600"/>
+          </a:xfrm>
+          <a:prstGeom prst="rect">
+            <a:avLst/>
+          </a:prstGeom>
+          <a:solidFill>
+            <a:srgbClr val="2D5F7C"/>
+          </a:solidFill>
+          <a:ln>
+            <a:noFill/>
+          </a:ln>
+          <a:effectLst/>
+        </p:spPr>
+        <p:style>
+          <a:lnRef idx="1">
+            <a:schemeClr val="accent1"/>
+          </a:lnRef>
+          <a:fillRef idx="3">
+            <a:schemeClr val="accent1"/>
+          </a:fillRef>
+          <a:effectRef idx="2">
+            <a:schemeClr val="accent1"/>
+          </a:effectRef>
+          <a:fontRef idx="minor">
+            <a:schemeClr val="lt1"/>
+          </a:fontRef>
+        </p:style>
+        <p:txBody>
+          <a:bodyPr rtlCol="0" anchor="ctr"/>
+          <a:lstStyle/>
+          <a:p>
+            <a:pPr algn="ctr"/>
+          </a:p>
+        </p:txBody>
+      </p:sp>
+      <p:sp>
+        <p:nvSpPr>
+          <p:cNvPr id="5" name="TextBox 4"/>
+          <p:cNvSpPr txBox="1"/>
+          <p:nvPr/>
+        </p:nvSpPr>
+        <p:spPr>
+          <a:xfrm>
+            <a:off x="502919" y="182879"/>
+            <a:ext cx="11155682" cy="444759"/>
+          </a:xfrm>
+          <a:prstGeom prst="rect">
+            <a:avLst/>
+          </a:prstGeom>
+          <a:noFill/>
+        </p:spPr>
+        <p:txBody>
+          <a:bodyPr wrap="square">
+            <a:spAutoFit/>
+          </a:bodyPr>
+          <a:lstStyle/>
+          <a:p>
+            <a:r>
+              <a:rPr sz="2800" b="1">
+                <a:solidFill>
+                  <a:srgbClr val="FFFFFF"/>
+                </a:solidFill>
+              </a:rPr>
+              <a:t>Think · Pair · Share: Run It and Compare (2 min)</a:t>
+            </a:r>
+          </a:p>
+        </p:txBody>
+      </p:sp>
+      <p:sp>
+        <p:nvSpPr>
+          <p:cNvPr id="6" name="TextBox 5"/>
+          <p:cNvSpPr txBox="1"/>
+          <p:nvPr/>
+        </p:nvSpPr>
+        <p:spPr>
+          <a:xfrm>
+            <a:off x="1143000" y="1828800"/>
+            <a:ext cx="9966961" cy="1985576"/>
+          </a:xfrm>
+          <a:prstGeom prst="rect">
+            <a:avLst/>
+          </a:prstGeom>
+          <a:noFill/>
+        </p:spPr>
+        <p:txBody>
+          <a:bodyPr wrap="square">
+            <a:spAutoFit/>
+          </a:bodyPr>
+          <a:lstStyle/>
+          <a:p>
+            <a:r>
+              <a:rPr sz="2200">
+                <a:solidFill>
+                  <a:srgbClr val="1E4258"/>
+                </a:solidFill>
+              </a:rPr>
+              <a:t>Run Today's Demo Case (guide → Section 3) in any chatbot.</a:t>
+            </a:r>
+          </a:p>
+          <a:p>
+            <a:pPr>
+              <a:spcBef>
+                <a:spcPts val="1000"/>
+              </a:spcBef>
+            </a:pPr>
+            <a:r>
+              <a:rPr sz="2200">
+                <a:solidFill>
+                  <a:srgbClr val="1E4258"/>
+                </a:solidFill>
+              </a:rPr>
+              <a:t>Compare your case with your neighbor's: vitals, labs, details.</a:t>
+            </a:r>
+          </a:p>
+          <a:p>
+            <a:pPr>
+              <a:spcBef>
+                <a:spcPts val="1000"/>
+              </a:spcBef>
+            </a:pPr>
+            <a:r>
+              <a:rPr sz="2200">
+                <a:solidFill>
+                  <a:srgbClr val="1E4258"/>
+                </a:solidFill>
+              </a:rPr>
+              <a:t>The numbers differ. Your students would see the same inconsistency.</a:t>
+            </a:r>
+          </a:p>
+        </p:txBody>
+      </p:sp>
+      <p:sp>
+        <p:nvSpPr>
+          <p:cNvPr id="7" name="TextBox 6"/>
+          <p:cNvSpPr txBox="1"/>
+          <p:nvPr/>
+        </p:nvSpPr>
+        <p:spPr>
+          <a:xfrm>
+            <a:off x="1143000" y="5303520"/>
+            <a:ext cx="9966961" cy="300594"/>
+          </a:xfrm>
+          <a:prstGeom prst="rect">
+            <a:avLst/>
+          </a:prstGeom>
+          <a:noFill/>
+        </p:spPr>
+        <p:txBody>
+          <a:bodyPr wrap="square">
+            <a:spAutoFit/>
+          </a:bodyPr>
+          <a:lstStyle/>
+          <a:p>
+            <a:r>
+              <a:rPr sz="1600" b="0">
+                <a:solidFill>
+                  <a:srgbClr val="0000FF"/>
+                </a:solidFill>
+              </a:rPr>
+              <a:t>Workshop Guide → Section 3</a:t>
+            </a:r>
+          </a:p>
+        </p:txBody>
+      </p:sp>
+    </p:spTree>
+  </p:cSld>
+  <p:clrMapOvr>
+    <a:masterClrMapping/>
+  </p:clrMapOvr>
+  <p:transition xmlns:p14="http://schemas.microsoft.com/office/powerpoint/2010/main" spd="med" advClick="1"/>
+</p:sld>
+</file>
+
+<file path=ppt/slides/slide8.xml><?xml version="1.0" encoding="utf-8"?>
+<p:sld xmlns:a="http://schemas.openxmlformats.org/drawingml/2006/main" xmlns:r="http://schemas.openxmlformats.org/officeDocument/2006/relationships" xmlns:p="http://schemas.openxmlformats.org/presentationml/2006/main" xmlns:m="http://schemas.openxmlformats.org/officeDocument/2006/math" xmlns:a14="http://schemas.microsoft.com/office/drawing/2010/main" showMasterSp="1" showMasterPhAnim="1">
+  <p:cSld>
+    <p:spTree>
+      <p:nvGrpSpPr>
+        <p:cNvPr id="1" name=""/>
+        <p:cNvGrpSpPr/>
+        <p:nvPr/>
+      </p:nvGrpSpPr>
+      <p:grpSpPr>
+        <a:xfrm>
+          <a:off x="0" y="0"/>
+          <a:ext cx="0" cy="0"/>
+          <a:chOff x="0" y="0"/>
+          <a:chExt cx="0" cy="0"/>
+        </a:xfrm>
+      </p:grpSpPr>
+      <p:sp>
+        <p:nvSpPr>
+          <p:cNvPr id="2" name="Rectangle 1"/>
+          <p:cNvSpPr/>
+          <p:nvPr/>
+        </p:nvSpPr>
+        <p:spPr>
+          <a:xfrm>
+            <a:off x="-1" y="0"/>
+            <a:ext cx="12191697" cy="1005839"/>
+          </a:xfrm>
+          <a:prstGeom prst="rect">
+            <a:avLst/>
+          </a:prstGeom>
+          <a:solidFill>
+            <a:srgbClr val="2D5F7C"/>
+          </a:solidFill>
+          <a:ln>
+            <a:noFill/>
+          </a:ln>
+          <a:effectLst/>
+        </p:spPr>
+        <p:style>
+          <a:lnRef idx="1">
+            <a:schemeClr val="accent1"/>
+          </a:lnRef>
+          <a:fillRef idx="3">
+            <a:schemeClr val="accent1"/>
+          </a:fillRef>
+          <a:effectRef idx="2">
+            <a:schemeClr val="accent1"/>
+          </a:effectRef>
+          <a:fontRef idx="minor">
+            <a:schemeClr val="lt1"/>
+          </a:fontRef>
+        </p:style>
+        <p:txBody>
+          <a:bodyPr rtlCol="0" anchor="ctr"/>
+          <a:lstStyle/>
+          <a:p>
+            <a:pPr algn="ctr"/>
+          </a:p>
+        </p:txBody>
+      </p:sp>
+      <p:sp>
+        <p:nvSpPr>
+          <p:cNvPr id="3" name="Rectangle 2"/>
+          <p:cNvSpPr/>
+          <p:nvPr/>
+        </p:nvSpPr>
+        <p:spPr>
+          <a:xfrm>
+            <a:off x="640080" y="1371600"/>
+            <a:ext cx="5486401" cy="4114800"/>
+          </a:xfrm>
+          <a:prstGeom prst="rect">
+            <a:avLst/>
+          </a:prstGeom>
+          <a:solidFill>
+            <a:srgbClr val="F0F4F8"/>
+          </a:solidFill>
+          <a:ln>
+            <a:noFill/>
+          </a:ln>
+          <a:effectLst/>
+        </p:spPr>
+        <p:style>
+          <a:lnRef idx="1">
+            <a:schemeClr val="accent1"/>
+          </a:lnRef>
+          <a:fillRef idx="3">
+            <a:schemeClr val="accent1"/>
+          </a:fillRef>
+          <a:effectRef idx="2">
+            <a:schemeClr val="accent1"/>
+          </a:effectRef>
+          <a:fontRef idx="minor">
+            <a:schemeClr val="lt1"/>
+          </a:fontRef>
+        </p:style>
+        <p:txBody>
+          <a:bodyPr rtlCol="0" anchor="ctr"/>
+          <a:lstStyle/>
+          <a:p>
+            <a:pPr algn="ctr"/>
+          </a:p>
+        </p:txBody>
+      </p:sp>
+      <p:sp>
+        <p:nvSpPr>
+          <p:cNvPr id="4" name="Rectangle 3"/>
+          <p:cNvSpPr/>
+          <p:nvPr/>
+        </p:nvSpPr>
+        <p:spPr>
+          <a:xfrm>
+            <a:off x="640080" y="1371600"/>
+            <a:ext cx="50801" cy="4114800"/>
+          </a:xfrm>
+          <a:prstGeom prst="rect">
+            <a:avLst/>
+          </a:prstGeom>
+          <a:solidFill>
+            <a:srgbClr val="2D5F7C"/>
+          </a:solidFill>
+          <a:ln>
+            <a:noFill/>
+          </a:ln>
+          <a:effectLst/>
+        </p:spPr>
+        <p:style>
+          <a:lnRef idx="1">
+            <a:schemeClr val="accent1"/>
+          </a:lnRef>
+          <a:fillRef idx="3">
+            <a:schemeClr val="accent1"/>
+          </a:fillRef>
+          <a:effectRef idx="2">
+            <a:schemeClr val="accent1"/>
+          </a:effectRef>
+          <a:fontRef idx="minor">
+            <a:schemeClr val="lt1"/>
+          </a:fontRef>
+        </p:style>
+        <p:txBody>
+          <a:bodyPr rtlCol="0" anchor="ctr"/>
+          <a:lstStyle/>
+          <a:p>
+            <a:pPr algn="ctr"/>
+          </a:p>
+        </p:txBody>
+      </p:sp>
+      <p:sp>
+        <p:nvSpPr>
+          <p:cNvPr id="5" name="Rectangle 4"/>
+          <p:cNvSpPr/>
+          <p:nvPr/>
+        </p:nvSpPr>
+        <p:spPr>
+          <a:xfrm>
+            <a:off x="6583680" y="1371600"/>
+            <a:ext cx="5029201" cy="4114800"/>
+          </a:xfrm>
+          <a:prstGeom prst="rect">
+            <a:avLst/>
+          </a:prstGeom>
+          <a:solidFill>
+            <a:srgbClr val="FDF6F0"/>
+          </a:solidFill>
+          <a:ln>
+            <a:noFill/>
+          </a:ln>
+          <a:effectLst/>
+        </p:spPr>
+        <p:style>
+          <a:lnRef idx="1">
+            <a:schemeClr val="accent1"/>
+          </a:lnRef>
+          <a:fillRef idx="3">
+            <a:schemeClr val="accent1"/>
+          </a:fillRef>
+          <a:effectRef idx="2">
+            <a:schemeClr val="accent1"/>
+          </a:effectRef>
+          <a:fontRef idx="minor">
+            <a:schemeClr val="lt1"/>
+          </a:fontRef>
+        </p:style>
+        <p:txBody>
+          <a:bodyPr rtlCol="0" anchor="ctr"/>
+          <a:lstStyle/>
+          <a:p>
+            <a:pPr algn="ctr"/>
+          </a:p>
+        </p:txBody>
+      </p:sp>
+      <p:sp>
+        <p:nvSpPr>
+          <p:cNvPr id="6" name="Rectangle 5"/>
+          <p:cNvSpPr/>
+          <p:nvPr/>
+        </p:nvSpPr>
+        <p:spPr>
+          <a:xfrm>
+            <a:off x="6583680" y="1371600"/>
+            <a:ext cx="50801" cy="4114800"/>
+          </a:xfrm>
+          <a:prstGeom prst="rect">
+            <a:avLst/>
+          </a:prstGeom>
+          <a:solidFill>
+            <a:srgbClr val="E8833A"/>
+          </a:solidFill>
+          <a:ln>
+            <a:noFill/>
+          </a:ln>
+          <a:effectLst/>
+        </p:spPr>
+        <p:style>
+          <a:lnRef idx="1">
+            <a:schemeClr val="accent1"/>
+          </a:lnRef>
+          <a:fillRef idx="3">
+            <a:schemeClr val="accent1"/>
+          </a:fillRef>
+          <a:effectRef idx="2">
+            <a:schemeClr val="accent1"/>
+          </a:effectRef>
+          <a:fontRef idx="minor">
+            <a:schemeClr val="lt1"/>
+          </a:fontRef>
+        </p:style>
+        <p:txBody>
+          <a:bodyPr rtlCol="0" anchor="ctr"/>
+          <a:lstStyle/>
+          <a:p>
+            <a:pPr algn="ctr"/>
+          </a:p>
+        </p:txBody>
+      </p:sp>
+      <p:sp>
+        <p:nvSpPr>
+          <p:cNvPr id="7" name="TextBox 6"/>
+          <p:cNvSpPr txBox="1"/>
+          <p:nvPr/>
+        </p:nvSpPr>
+        <p:spPr>
+          <a:xfrm>
+            <a:off x="502919" y="182879"/>
+            <a:ext cx="11155682" cy="444759"/>
+          </a:xfrm>
+          <a:prstGeom prst="rect">
+            <a:avLst/>
+          </a:prstGeom>
+          <a:noFill/>
+        </p:spPr>
+        <p:txBody>
+          <a:bodyPr wrap="square">
+            <a:spAutoFit/>
+          </a:bodyPr>
+          <a:lstStyle/>
+          <a:p>
+            <a:r>
+              <a:rPr sz="2800" b="1">
+                <a:solidFill>
+                  <a:srgbClr val="FFFFFF"/>
+                </a:solidFill>
+              </a:rPr>
+              <a:t>The Elephant: Nobody Wrote This Case</a:t>
+            </a:r>
+          </a:p>
+        </p:txBody>
+      </p:sp>
+      <p:sp>
+        <p:nvSpPr>
+          <p:cNvPr id="8" name="TextBox 7"/>
+          <p:cNvSpPr txBox="1"/>
+          <p:nvPr/>
+        </p:nvSpPr>
+        <p:spPr>
+          <a:xfrm>
+            <a:off x="502919" y="1097280"/>
+            <a:ext cx="11155682" cy="300594"/>
+          </a:xfrm>
+          <a:prstGeom prst="rect">
+            <a:avLst/>
+          </a:prstGeom>
+          <a:noFill/>
+        </p:spPr>
+        <p:txBody>
+          <a:bodyPr wrap="square">
+            <a:spAutoFit/>
+          </a:bodyPr>
+          <a:lstStyle/>
+          <a:p>
+            <a:r>
+              <a:rPr sz="1600" b="0">
+                <a:solidFill>
+                  <a:srgbClr val="5B6B7C"/>
+                </a:solidFill>
+              </a:rPr>
+              <a:t>Fast, realistic, and unverifiable</a:t>
+            </a:r>
+          </a:p>
+        </p:txBody>
+      </p:sp>
+      <p:sp>
+        <p:nvSpPr>
+          <p:cNvPr id="9" name="TextBox 8"/>
+          <p:cNvSpPr txBox="1"/>
+          <p:nvPr/>
+        </p:nvSpPr>
+        <p:spPr>
+          <a:xfrm>
+            <a:off x="960119" y="1554480"/>
+            <a:ext cx="4937762" cy="225708"/>
+          </a:xfrm>
+          <a:prstGeom prst="rect">
+            <a:avLst/>
+          </a:prstGeom>
+          <a:noFill/>
+        </p:spPr>
+        <p:txBody>
+          <a:bodyPr wrap="square">
+            <a:spAutoFit/>
+          </a:bodyPr>
+          <a:lstStyle/>
+          <a:p>
+            <a:r>
+              <a:rPr sz="1100" b="1">
+                <a:solidFill>
+                  <a:srgbClr val="2D5F7C"/>
+                </a:solidFill>
+              </a:rPr>
+              <a:t>THE RISK</a:t>
+            </a:r>
+          </a:p>
+        </p:txBody>
+      </p:sp>
+      <p:sp>
+        <p:nvSpPr>
+          <p:cNvPr id="10" name="TextBox 9"/>
+          <p:cNvSpPr txBox="1"/>
+          <p:nvPr/>
+        </p:nvSpPr>
+        <p:spPr>
+          <a:xfrm>
+            <a:off x="960119" y="1920239"/>
+            <a:ext cx="4937762" cy="2301589"/>
+          </a:xfrm>
+          <a:prstGeom prst="rect">
+            <a:avLst/>
+          </a:prstGeom>
+          <a:noFill/>
+        </p:spPr>
+        <p:txBody>
+          <a:bodyPr wrap="square">
+            <a:spAutoFit/>
+          </a:bodyPr>
+          <a:lstStyle/>
+          <a:p>
+            <a:r>
+              <a:rPr sz="1800">
+                <a:solidFill>
+                  <a:srgbClr val="1A2332"/>
+                </a:solidFill>
+              </a:rPr>
+              <a:t>• Every run is a fresh case with fresh numbers</a:t>
+            </a:r>
+          </a:p>
+          <a:p>
+            <a:r>
+              <a:rPr sz="1800">
+                <a:solidFill>
+                  <a:srgbClr val="1A2332"/>
+                </a:solidFill>
+              </a:rPr>
+              <a:t>• No source. No citation. No reviewer.</a:t>
+            </a:r>
+          </a:p>
+          <a:p>
+            <a:r>
+              <a:rPr sz="1800">
+                <a:solidFill>
+                  <a:srgbClr val="1A2332"/>
+                </a:solidFill>
+              </a:rPr>
+              <a:t>• Would you sign your name to it?</a:t>
+            </a:r>
+          </a:p>
+        </p:txBody>
+      </p:sp>
+      <p:sp>
+        <p:nvSpPr>
+          <p:cNvPr id="11" name="TextBox 10"/>
+          <p:cNvSpPr txBox="1"/>
+          <p:nvPr/>
+        </p:nvSpPr>
+        <p:spPr>
+          <a:xfrm>
+            <a:off x="6903719" y="1554480"/>
+            <a:ext cx="4480562" cy="225708"/>
+          </a:xfrm>
+          <a:prstGeom prst="rect">
+            <a:avLst/>
+          </a:prstGeom>
+          <a:noFill/>
+        </p:spPr>
+        <p:txBody>
+          <a:bodyPr wrap="square">
+            <a:spAutoFit/>
+          </a:bodyPr>
+          <a:lstStyle/>
+          <a:p>
+            <a:r>
+              <a:rPr sz="1100" b="1">
+                <a:solidFill>
+                  <a:srgbClr val="E8833A"/>
+                </a:solidFill>
+              </a:rPr>
+              <a:t>THE STAKES</a:t>
+            </a:r>
+          </a:p>
+        </p:txBody>
+      </p:sp>
+      <p:sp>
+        <p:nvSpPr>
+          <p:cNvPr id="12" name="TextBox 11"/>
+          <p:cNvSpPr txBox="1"/>
+          <p:nvPr/>
+        </p:nvSpPr>
+        <p:spPr>
+          <a:xfrm>
+            <a:off x="6903719" y="1920239"/>
+            <a:ext cx="4480562" cy="2301589"/>
+          </a:xfrm>
+          <a:prstGeom prst="rect">
+            <a:avLst/>
+          </a:prstGeom>
+          <a:noFill/>
+        </p:spPr>
+        <p:txBody>
+          <a:bodyPr wrap="square">
+            <a:spAutoFit/>
+          </a:bodyPr>
+          <a:lstStyle/>
+          <a:p>
+            <a:r>
+              <a:rPr sz="1800">
+                <a:solidFill>
+                  <a:srgbClr val="1A2332"/>
+                </a:solidFill>
+              </a:rPr>
+              <a:t>An error propagates to every learner who meets it.</a:t>
+            </a:r>
+          </a:p>
+          <a:p>
+            <a:r>
+              <a:rPr sz="1800">
+                <a:solidFill>
+                  <a:srgbClr val="1A2332"/>
+                </a:solidFill>
+              </a:rPr>
+              <a:t>The pitfall scales with the stakes: dosing, step order, discharge instructions.</a:t>
+            </a:r>
+          </a:p>
+          <a:p>
+            <a:r>
+              <a:rPr sz="1800">
+                <a:solidFill>
+                  <a:srgbClr val="1A2332"/>
+                </a:solidFill>
+              </a:rPr>
+              <a:t>Section 4 is how we get realism and verifiability.</a:t>
+            </a:r>
+          </a:p>
+        </p:txBody>
+      </p:sp>
+      <p:sp>
+        <p:nvSpPr>
+          <p:cNvPr id="13" name="TextBox 12"/>
+          <p:cNvSpPr txBox="1"/>
+          <p:nvPr/>
+        </p:nvSpPr>
+        <p:spPr>
+          <a:xfrm>
+            <a:off x="502919" y="5715000"/>
+            <a:ext cx="11155682" cy="300594"/>
+          </a:xfrm>
+          <a:prstGeom prst="rect">
+            <a:avLst/>
+          </a:prstGeom>
+          <a:noFill/>
+        </p:spPr>
+        <p:txBody>
+          <a:bodyPr wrap="square">
+            <a:spAutoFit/>
+          </a:bodyPr>
+          <a:lstStyle/>
+          <a:p>
+            <a:r>
+              <a:rPr sz="1600" b="0">
+                <a:solidFill>
+                  <a:srgbClr val="0000FF"/>
+                </a:solidFill>
+              </a:rPr>
+              <a:t>Workshop Guide → Section 4 (Beyond the Case)</a:t>
+            </a:r>
+          </a:p>
+        </p:txBody>
+      </p:sp>
+    </p:spTree>
+  </p:cSld>
+  <p:clrMapOvr>
+    <a:masterClrMapping/>
+  </p:clrMapOvr>
+  <p:transition xmlns:p14="http://schemas.microsoft.com/office/powerpoint/2010/main" spd="med" advClick="1"/>
+</p:sld>
+</file>
+
+<file path=ppt/slides/slide9.xml><?xml version="1.0" encoding="utf-8"?>
+<p:sld xmlns:a="http://schemas.openxmlformats.org/drawingml/2006/main" xmlns:r="http://schemas.openxmlformats.org/officeDocument/2006/relationships" xmlns:p="http://schemas.openxmlformats.org/presentationml/2006/main" xmlns:m="http://schemas.openxmlformats.org/officeDocument/2006/math" xmlns:a14="http://schemas.microsoft.com/office/drawing/2010/main" showMasterSp="1" showMasterPhAnim="1">
+  <p:cSld>
+    <p:bg>
+      <p:bgPr>
+        <a:solidFill>
           <a:srgbClr val="2D5F7C"/>
         </a:solidFill>
       </p:bgPr>
@@ -9288,7 +12203,7 @@
             <a:pPr/>
             <a:r>
               <a:rPr/>
-              <a:t>Objective 2: Grounded AI Workflow</a:t>
+              <a:t>Section 4: Grounded AI Workflow</a:t>
             </a:r>
           </a:p>
         </p:txBody>
@@ -9333,2972 +12248,7 @@
             <a:pPr/>
             <a:r>
               <a:rPr/>
-              <a:t>Upload published sources, get cited answers, every time · Guide → Section 4</a:t>
-            </a:r>
-          </a:p>
-        </p:txBody>
-      </p:sp>
-    </p:spTree>
-  </p:cSld>
-  <p:clrMapOvr>
-    <a:masterClrMapping/>
-  </p:clrMapOvr>
-  <p:transition xmlns:p14="http://schemas.microsoft.com/office/powerpoint/2010/main" spd="med" advClick="1"/>
-</p:sld>
-</file>
-
-<file path=ppt/slides/slide3.xml><?xml version="1.0" encoding="utf-8"?>
-<p:sld xmlns:a="http://schemas.openxmlformats.org/drawingml/2006/main" xmlns:r="http://schemas.openxmlformats.org/officeDocument/2006/relationships" xmlns:p="http://schemas.openxmlformats.org/presentationml/2006/main" xmlns:m="http://schemas.openxmlformats.org/officeDocument/2006/math" xmlns:a14="http://schemas.microsoft.com/office/drawing/2010/main" showMasterSp="1" showMasterPhAnim="1">
-  <p:cSld>
-    <p:spTree>
-      <p:nvGrpSpPr>
-        <p:cNvPr id="1" name=""/>
-        <p:cNvGrpSpPr/>
-        <p:nvPr/>
-      </p:nvGrpSpPr>
-      <p:grpSpPr>
-        <a:xfrm>
-          <a:off x="0" y="0"/>
-          <a:ext cx="0" cy="0"/>
-          <a:chOff x="0" y="0"/>
-          <a:chExt cx="0" cy="0"/>
-        </a:xfrm>
-      </p:grpSpPr>
-      <p:sp>
-        <p:nvSpPr>
-          <p:cNvPr id="105" name="Rectangle 1"/>
-          <p:cNvSpPr/>
-          <p:nvPr/>
-        </p:nvSpPr>
-        <p:spPr>
-          <a:xfrm>
-            <a:off x="-1" y="0"/>
-            <a:ext cx="12191697" cy="1005839"/>
-          </a:xfrm>
-          <a:prstGeom prst="rect">
-            <a:avLst/>
-          </a:prstGeom>
-          <a:solidFill>
-            <a:srgbClr val="2D5F7C"/>
-          </a:solidFill>
-          <a:ln w="12700">
-            <a:miter lim="400000"/>
-          </a:ln>
-          <a:effectLst>
-            <a:outerShdw sx="100000" sy="100000" kx="0" ky="0" algn="b" rotWithShape="0" blurRad="38100" dist="23000" dir="5400000">
-              <a:srgbClr val="000000">
-                <a:alpha val="35000"/>
-              </a:srgbClr>
-            </a:outerShdw>
-          </a:effectLst>
-        </p:spPr>
-        <p:txBody>
-          <a:bodyPr lIns="45719" rIns="45719" anchor="ctr"/>
-          <a:lstStyle/>
-          <a:p>
-            <a:pPr algn="ctr">
-              <a:defRPr>
-                <a:solidFill>
-                  <a:srgbClr val="FFFFFF"/>
-                </a:solidFill>
-              </a:defRPr>
-            </a:pPr>
-          </a:p>
-        </p:txBody>
-      </p:sp>
-      <p:sp>
-        <p:nvSpPr>
-          <p:cNvPr id="106" name="TextBox 2"/>
-          <p:cNvSpPr txBox="1"/>
-          <p:nvPr/>
-        </p:nvSpPr>
-        <p:spPr>
-          <a:xfrm>
-            <a:off x="502919" y="182879"/>
-            <a:ext cx="11155682" cy="444759"/>
-          </a:xfrm>
-          <a:prstGeom prst="rect">
-            <a:avLst/>
-          </a:prstGeom>
-          <a:ln w="12700">
-            <a:miter lim="400000"/>
-          </a:ln>
-          <a:extLst>
-            <a:ext uri="{C572A759-6A51-4108-AA02-DFA0A04FC94B}">
-              <ma14:wrappingTextBoxFlag xmlns:ma14="http://schemas.microsoft.com/office/mac/drawingml/2011/main" val="1"/>
-            </a:ext>
-          </a:extLst>
-        </p:spPr>
-        <p:txBody>
-          <a:bodyPr lIns="45719" rIns="45719">
-            <a:spAutoFit/>
-          </a:bodyPr>
-          <a:lstStyle>
-            <a:lvl1pPr>
-              <a:defRPr b="1" sz="2800">
-                <a:solidFill>
-                  <a:srgbClr val="FFFFFF"/>
-                </a:solidFill>
-              </a:defRPr>
-            </a:lvl1pPr>
-          </a:lstStyle>
-          <a:p>
-            <a:pPr/>
-            <a:r>
-              <a:rPr/>
-              <a:t>Conflict of Interest &amp; Session Format</a:t>
-            </a:r>
-          </a:p>
-        </p:txBody>
-      </p:sp>
-      <p:sp>
-        <p:nvSpPr>
-          <p:cNvPr id="107" name="TextBox 3"/>
-          <p:cNvSpPr txBox="1"/>
-          <p:nvPr/>
-        </p:nvSpPr>
-        <p:spPr>
-          <a:xfrm>
-            <a:off x="685800" y="1371600"/>
-            <a:ext cx="5394961" cy="2593688"/>
-          </a:xfrm>
-          <a:prstGeom prst="rect">
-            <a:avLst/>
-          </a:prstGeom>
-          <a:ln w="12700">
-            <a:miter lim="400000"/>
-          </a:ln>
-          <a:extLst>
-            <a:ext uri="{C572A759-6A51-4108-AA02-DFA0A04FC94B}">
-              <ma14:wrappingTextBoxFlag xmlns:ma14="http://schemas.microsoft.com/office/mac/drawingml/2011/main" val="1"/>
-            </a:ext>
-          </a:extLst>
-        </p:spPr>
-        <p:txBody>
-          <a:bodyPr lIns="45719" rIns="45719">
-            <a:spAutoFit/>
-          </a:bodyPr>
-          <a:lstStyle/>
-          <a:p>
-            <a:pPr>
-              <a:spcBef>
-                <a:spcPts val="800"/>
-              </a:spcBef>
-              <a:defRPr>
-                <a:solidFill>
-                  <a:srgbClr val="1A2332"/>
-                </a:solidFill>
-              </a:defRPr>
-            </a:pPr>
-            <a:r>
-              <a:rPr/>
-              <a:t>• COI: Diana Brewer is a co-founder of Sapient Clinician</a:t>
-            </a:r>
-          </a:p>
-          <a:p>
-            <a:pPr>
-              <a:spcBef>
-                <a:spcPts val="800"/>
-              </a:spcBef>
-              <a:defRPr>
-                <a:solidFill>
-                  <a:srgbClr val="1A2332"/>
-                </a:solidFill>
-              </a:defRPr>
-            </a:pPr>
-            <a:r>
-              <a:rPr/>
-              <a:t>• This session is vendor-neutral</a:t>
-            </a:r>
-          </a:p>
-          <a:p>
-            <a:pPr>
-              <a:spcBef>
-                <a:spcPts val="800"/>
-              </a:spcBef>
-              <a:defRPr>
-                <a:solidFill>
-                  <a:srgbClr val="1A2332"/>
-                </a:solidFill>
-              </a:defRPr>
-            </a:pPr>
-            <a:r>
-              <a:rPr/>
-              <a:t>• 60 min: ~35 min presentation + 20 min workshop + 5 min share &amp; wrap</a:t>
-            </a:r>
-          </a:p>
-          <a:p>
-            <a:pPr>
-              <a:spcBef>
-                <a:spcPts val="800"/>
-              </a:spcBef>
-              <a:defRPr>
-                <a:solidFill>
-                  <a:srgbClr val="1A2332"/>
-                </a:solidFill>
-              </a:defRPr>
-            </a:pPr>
-            <a:r>
-              <a:rPr/>
-              <a:t>• Keep the Workshop Guide open on your phone</a:t>
-            </a:r>
-          </a:p>
-          <a:p>
-            <a:pPr>
-              <a:spcBef>
-                <a:spcPts val="800"/>
-              </a:spcBef>
-              <a:defRPr>
-                <a:solidFill>
-                  <a:srgbClr val="1A2332"/>
-                </a:solidFill>
-              </a:defRPr>
-            </a:pPr>
-            <a:r>
-              <a:rPr/>
-              <a:t>• Think · Pair · Share after each section</a:t>
-            </a:r>
-          </a:p>
-          <a:p>
-            <a:pPr>
-              <a:spcBef>
-                <a:spcPts val="800"/>
-              </a:spcBef>
-              <a:defRPr>
-                <a:solidFill>
-                  <a:srgbClr val="1A2332"/>
-                </a:solidFill>
-              </a:defRPr>
-            </a:pPr>
-            <a:r>
-              <a:rPr/>
-              <a:t>• Everything stays available after the conference</a:t>
-            </a:r>
-          </a:p>
-        </p:txBody>
-      </p:sp>
-      <p:sp>
-        <p:nvSpPr>
-          <p:cNvPr id="108" name="TextBox 4"/>
-          <p:cNvSpPr txBox="1"/>
-          <p:nvPr/>
-        </p:nvSpPr>
-        <p:spPr>
-          <a:xfrm>
-            <a:off x="7360919" y="2286000"/>
-            <a:ext cx="4023362" cy="300594"/>
-          </a:xfrm>
-          <a:prstGeom prst="rect">
-            <a:avLst/>
-          </a:prstGeom>
-          <a:ln w="12700">
-            <a:miter lim="400000"/>
-          </a:ln>
-          <a:extLst>
-            <a:ext uri="{C572A759-6A51-4108-AA02-DFA0A04FC94B}">
-              <ma14:wrappingTextBoxFlag xmlns:ma14="http://schemas.microsoft.com/office/mac/drawingml/2011/main" val="1"/>
-            </a:ext>
-          </a:extLst>
-        </p:spPr>
-        <p:txBody>
-          <a:bodyPr lIns="45719" rIns="45719">
-            <a:spAutoFit/>
-          </a:bodyPr>
-          <a:lstStyle>
-            <a:lvl1pPr algn="ctr">
-              <a:defRPr sz="1600">
-                <a:solidFill>
-                  <a:srgbClr val="5A6B7E"/>
-                </a:solidFill>
-              </a:defRPr>
-            </a:lvl1pPr>
-          </a:lstStyle>
-          <a:p>
-            <a:pPr/>
-            <a:r>
-              <a:rPr/>
-              <a:t>Scan for the Workshop Guide page</a:t>
-            </a:r>
-          </a:p>
-        </p:txBody>
-      </p:sp>
-      <p:pic>
-        <p:nvPicPr>
-          <p:cNvPr id="109" name="Picture 108" descr="workshop-guide-qr.png"/>
-          <p:cNvPicPr>
-            <a:picLocks noChangeAspect="1"/>
-          </p:cNvPicPr>
-          <p:nvPr/>
-        </p:nvPicPr>
-        <p:blipFill>
-          <a:blip r:embed="rId2"/>
-          <a:stretch>
-            <a:fillRect/>
-          </a:stretch>
-        </p:blipFill>
-        <p:spPr>
-          <a:xfrm>
-            <a:off x="7772400" y="2560320"/>
-            <a:ext cx="3200400" cy="3200400"/>
-          </a:xfrm>
-          <a:prstGeom prst="rect">
-            <a:avLst/>
-          </a:prstGeom>
-        </p:spPr>
-      </p:pic>
-    </p:spTree>
-  </p:cSld>
-  <p:clrMapOvr>
-    <a:masterClrMapping/>
-  </p:clrMapOvr>
-  <p:transition xmlns:p14="http://schemas.microsoft.com/office/powerpoint/2010/main" spd="med" advClick="1"/>
-</p:sld>
-</file>
-
-<file path=ppt/slides/slide4.xml><?xml version="1.0" encoding="utf-8"?>
-<p:sld xmlns:a="http://schemas.openxmlformats.org/drawingml/2006/main" xmlns:r="http://schemas.openxmlformats.org/officeDocument/2006/relationships" xmlns:p="http://schemas.openxmlformats.org/presentationml/2006/main" xmlns:m="http://schemas.openxmlformats.org/officeDocument/2006/math" xmlns:a14="http://schemas.microsoft.com/office/drawing/2010/main" showMasterSp="1" showMasterPhAnim="1">
-  <p:cSld>
-    <p:bg>
-      <p:bgPr>
-        <a:solidFill>
-          <a:srgbClr val="2D5F7C"/>
-        </a:solidFill>
-      </p:bgPr>
-    </p:bg>
-    <p:spTree>
-      <p:nvGrpSpPr>
-        <p:cNvPr id="1" name=""/>
-        <p:cNvGrpSpPr/>
-        <p:nvPr/>
-      </p:nvGrpSpPr>
-      <p:grpSpPr>
-        <a:xfrm>
-          <a:off x="0" y="0"/>
-          <a:ext cx="0" cy="0"/>
-          <a:chOff x="0" y="0"/>
-          <a:chExt cx="0" cy="0"/>
-        </a:xfrm>
-      </p:grpSpPr>
-      <p:grpSp>
-        <p:nvGrpSpPr>
-          <p:cNvPr id="113" name="Oval 1"/>
-          <p:cNvGrpSpPr/>
-          <p:nvPr/>
-        </p:nvGrpSpPr>
-        <p:grpSpPr>
-          <a:xfrm>
-            <a:off x="914399" y="2285999"/>
-            <a:ext cx="1097282" cy="1097282"/>
-            <a:chOff x="0" y="0"/>
-            <a:chExt cx="1097280" cy="1097280"/>
-          </a:xfrm>
-        </p:grpSpPr>
-        <p:sp>
-          <p:nvSpPr>
-            <p:cNvPr id="111" name="Circle"/>
-            <p:cNvSpPr/>
-            <p:nvPr/>
-          </p:nvSpPr>
-          <p:spPr>
-            <a:xfrm>
-              <a:off x="-1" y="-1"/>
-              <a:ext cx="1097282" cy="1097282"/>
-            </a:xfrm>
-            <a:prstGeom prst="ellipse">
-              <a:avLst/>
-            </a:prstGeom>
-            <a:solidFill>
-              <a:srgbClr val="E8833A"/>
-            </a:solidFill>
-            <a:ln w="12700" cap="flat">
-              <a:noFill/>
-              <a:miter lim="400000"/>
-            </a:ln>
-            <a:effectLst>
-              <a:outerShdw sx="100000" sy="100000" kx="0" ky="0" algn="b" rotWithShape="0" blurRad="38100" dist="23000" dir="5400000">
-                <a:srgbClr val="000000">
-                  <a:alpha val="35000"/>
-                </a:srgbClr>
-              </a:outerShdw>
-            </a:effectLst>
-          </p:spPr>
-          <p:txBody>
-            <a:bodyPr wrap="square" lIns="45719" tIns="45719" rIns="45719" bIns="45719" numCol="1" anchor="ctr">
-              <a:noAutofit/>
-            </a:bodyPr>
-            <a:lstStyle/>
-            <a:p>
-              <a:pPr algn="ctr">
-                <a:defRPr b="1" sz="3600">
-                  <a:solidFill>
-                    <a:srgbClr val="FFFFFF"/>
-                  </a:solidFill>
-                </a:defRPr>
-              </a:pPr>
-            </a:p>
-          </p:txBody>
-        </p:sp>
-        <p:sp>
-          <p:nvSpPr>
-            <p:cNvPr id="112" name="2"/>
-            <p:cNvSpPr txBox="1"/>
-            <p:nvPr/>
-          </p:nvSpPr>
-          <p:spPr>
-            <a:xfrm>
-              <a:off x="206412" y="273972"/>
-              <a:ext cx="684456" cy="549336"/>
-            </a:xfrm>
-            <a:prstGeom prst="rect">
-              <a:avLst/>
-            </a:prstGeom>
-            <a:noFill/>
-            <a:ln w="12700" cap="flat">
-              <a:noFill/>
-              <a:miter lim="400000"/>
-            </a:ln>
-            <a:effectLst/>
-            <a:extLst>
-              <a:ext uri="{C572A759-6A51-4108-AA02-DFA0A04FC94B}">
-                <ma14:wrappingTextBoxFlag xmlns:ma14="http://schemas.microsoft.com/office/mac/drawingml/2011/main" val="1"/>
-              </a:ext>
-            </a:extLst>
-          </p:spPr>
-          <p:txBody>
-            <a:bodyPr wrap="square" lIns="45719" tIns="45719" rIns="45719" bIns="45719" numCol="1" anchor="ctr">
-              <a:spAutoFit/>
-            </a:bodyPr>
-            <a:lstStyle>
-              <a:lvl1pPr algn="ctr">
-                <a:defRPr b="1" sz="3600">
-                  <a:solidFill>
-                    <a:srgbClr val="FFFFFF"/>
-                  </a:solidFill>
-                </a:defRPr>
-              </a:lvl1pPr>
-            </a:lstStyle>
-            <a:p>
-              <a:pPr/>
-              <a:r>
-                <a:t>2</a:t>
-              </a:r>
-            </a:p>
-          </p:txBody>
-        </p:sp>
-      </p:grpSp>
-      <p:sp>
-        <p:nvSpPr>
-          <p:cNvPr id="114" name="TextBox 2"/>
-          <p:cNvSpPr txBox="1"/>
-          <p:nvPr/>
-        </p:nvSpPr>
-        <p:spPr>
-          <a:xfrm>
-            <a:off x="2331719" y="2286000"/>
-            <a:ext cx="8595362" cy="497047"/>
-          </a:xfrm>
-          <a:prstGeom prst="rect">
-            <a:avLst/>
-          </a:prstGeom>
-          <a:ln w="12700">
-            <a:miter lim="400000"/>
-          </a:ln>
-          <a:extLst>
-            <a:ext uri="{C572A759-6A51-4108-AA02-DFA0A04FC94B}">
-              <ma14:wrappingTextBoxFlag xmlns:ma14="http://schemas.microsoft.com/office/mac/drawingml/2011/main" val="1"/>
-            </a:ext>
-          </a:extLst>
-        </p:spPr>
-        <p:txBody>
-          <a:bodyPr lIns="45719" rIns="45719">
-            <a:spAutoFit/>
-          </a:bodyPr>
-          <a:lstStyle>
-            <a:lvl1pPr>
-              <a:defRPr b="1" sz="3200">
-                <a:solidFill>
-                  <a:srgbClr val="FFFFFF"/>
-                </a:solidFill>
-              </a:defRPr>
-            </a:lvl1pPr>
-          </a:lstStyle>
-          <a:p>
-            <a:pPr/>
-            <a:r>
-              <a:rPr/>
-              <a:t>Objective 1: Digital Tools</a:t>
-            </a:r>
-          </a:p>
-        </p:txBody>
-      </p:sp>
-      <p:sp>
-        <p:nvSpPr>
-          <p:cNvPr id="115" name="TextBox 3"/>
-          <p:cNvSpPr txBox="1"/>
-          <p:nvPr/>
-        </p:nvSpPr>
-        <p:spPr>
-          <a:xfrm>
-            <a:off x="2331719" y="3200400"/>
-            <a:ext cx="8595362" cy="333088"/>
-          </a:xfrm>
-          <a:prstGeom prst="rect">
-            <a:avLst/>
-          </a:prstGeom>
-          <a:ln w="12700">
-            <a:miter lim="400000"/>
-          </a:ln>
-          <a:extLst>
-            <a:ext uri="{C572A759-6A51-4108-AA02-DFA0A04FC94B}">
-              <ma14:wrappingTextBoxFlag xmlns:ma14="http://schemas.microsoft.com/office/mac/drawingml/2011/main" val="1"/>
-            </a:ext>
-          </a:extLst>
-        </p:spPr>
-        <p:txBody>
-          <a:bodyPr lIns="45719" rIns="45719">
-            <a:spAutoFit/>
-          </a:bodyPr>
-          <a:lstStyle>
-            <a:lvl1pPr>
-              <a:defRPr>
-                <a:solidFill>
-                  <a:srgbClr val="F4A55A"/>
-                </a:solidFill>
-              </a:defRPr>
-            </a:lvl1pPr>
-          </a:lstStyle>
-          <a:p>
-            <a:pPr/>
-            <a:r>
-              <a:rPr/>
-              <a:t>Free or low-cost platforms for creating interactive content</a:t>
-            </a:r>
-          </a:p>
-        </p:txBody>
-      </p:sp>
-    </p:spTree>
-  </p:cSld>
-  <p:clrMapOvr>
-    <a:masterClrMapping/>
-  </p:clrMapOvr>
-  <p:transition xmlns:p14="http://schemas.microsoft.com/office/powerpoint/2010/main" spd="med" advClick="1"/>
-</p:sld>
-</file>
-
-<file path=ppt/slides/slide5.xml><?xml version="1.0" encoding="utf-8"?>
-<p:sld xmlns:a="http://schemas.openxmlformats.org/drawingml/2006/main" xmlns:r="http://schemas.openxmlformats.org/officeDocument/2006/relationships" xmlns:p="http://schemas.openxmlformats.org/presentationml/2006/main" xmlns:m="http://schemas.openxmlformats.org/officeDocument/2006/math" xmlns:a14="http://schemas.microsoft.com/office/drawing/2010/main" showMasterSp="1" showMasterPhAnim="1">
-  <p:cSld>
-    <p:spTree>
-      <p:nvGrpSpPr>
-        <p:cNvPr id="1" name=""/>
-        <p:cNvGrpSpPr/>
-        <p:nvPr/>
-      </p:nvGrpSpPr>
-      <p:grpSpPr>
-        <a:xfrm>
-          <a:off x="0" y="0"/>
-          <a:ext cx="0" cy="0"/>
-          <a:chOff x="0" y="0"/>
-          <a:chExt cx="0" cy="0"/>
-        </a:xfrm>
-      </p:grpSpPr>
-      <p:sp>
-        <p:nvSpPr>
-          <p:cNvPr id="2" name="Rectangle 1"/>
-          <p:cNvSpPr/>
-          <p:nvPr/>
-        </p:nvSpPr>
-        <p:spPr>
-          <a:xfrm>
-            <a:off x="-1" y="0"/>
-            <a:ext cx="12191697" cy="1005839"/>
-          </a:xfrm>
-          <a:prstGeom prst="rect">
-            <a:avLst/>
-          </a:prstGeom>
-          <a:solidFill>
-            <a:srgbClr val="2D5F7C"/>
-          </a:solidFill>
-          <a:ln>
-            <a:noFill/>
-          </a:ln>
-          <a:effectLst/>
-        </p:spPr>
-        <p:style>
-          <a:lnRef idx="1">
-            <a:schemeClr val="accent1"/>
-          </a:lnRef>
-          <a:fillRef idx="3">
-            <a:schemeClr val="accent1"/>
-          </a:fillRef>
-          <a:effectRef idx="2">
-            <a:schemeClr val="accent1"/>
-          </a:effectRef>
-          <a:fontRef idx="minor">
-            <a:schemeClr val="lt1"/>
-          </a:fontRef>
-        </p:style>
-        <p:txBody>
-          <a:bodyPr rtlCol="0" anchor="ctr"/>
-          <a:lstStyle/>
-          <a:p>
-            <a:pPr algn="ctr"/>
-          </a:p>
-        </p:txBody>
-      </p:sp>
-      <p:sp>
-        <p:nvSpPr>
-          <p:cNvPr id="3" name="Rectangle 2"/>
-          <p:cNvSpPr/>
-          <p:nvPr/>
-        </p:nvSpPr>
-        <p:spPr>
-          <a:xfrm>
-            <a:off x="640080" y="1371600"/>
-            <a:ext cx="5486401" cy="4114800"/>
-          </a:xfrm>
-          <a:prstGeom prst="rect">
-            <a:avLst/>
-          </a:prstGeom>
-          <a:solidFill>
-            <a:srgbClr val="F0F4F8"/>
-          </a:solidFill>
-          <a:ln>
-            <a:noFill/>
-          </a:ln>
-          <a:effectLst/>
-        </p:spPr>
-        <p:style>
-          <a:lnRef idx="1">
-            <a:schemeClr val="accent1"/>
-          </a:lnRef>
-          <a:fillRef idx="3">
-            <a:schemeClr val="accent1"/>
-          </a:fillRef>
-          <a:effectRef idx="2">
-            <a:schemeClr val="accent1"/>
-          </a:effectRef>
-          <a:fontRef idx="minor">
-            <a:schemeClr val="lt1"/>
-          </a:fontRef>
-        </p:style>
-        <p:txBody>
-          <a:bodyPr rtlCol="0" anchor="ctr"/>
-          <a:lstStyle/>
-          <a:p>
-            <a:pPr algn="ctr"/>
-          </a:p>
-        </p:txBody>
-      </p:sp>
-      <p:sp>
-        <p:nvSpPr>
-          <p:cNvPr id="4" name="Rectangle 3"/>
-          <p:cNvSpPr/>
-          <p:nvPr/>
-        </p:nvSpPr>
-        <p:spPr>
-          <a:xfrm>
-            <a:off x="640080" y="1371600"/>
-            <a:ext cx="50801" cy="4114800"/>
-          </a:xfrm>
-          <a:prstGeom prst="rect">
-            <a:avLst/>
-          </a:prstGeom>
-          <a:solidFill>
-            <a:srgbClr val="2D5F7C"/>
-          </a:solidFill>
-          <a:ln>
-            <a:noFill/>
-          </a:ln>
-          <a:effectLst/>
-        </p:spPr>
-        <p:style>
-          <a:lnRef idx="1">
-            <a:schemeClr val="accent1"/>
-          </a:lnRef>
-          <a:fillRef idx="3">
-            <a:schemeClr val="accent1"/>
-          </a:fillRef>
-          <a:effectRef idx="2">
-            <a:schemeClr val="accent1"/>
-          </a:effectRef>
-          <a:fontRef idx="minor">
-            <a:schemeClr val="lt1"/>
-          </a:fontRef>
-        </p:style>
-        <p:txBody>
-          <a:bodyPr rtlCol="0" anchor="ctr"/>
-          <a:lstStyle/>
-          <a:p>
-            <a:pPr algn="ctr"/>
-          </a:p>
-        </p:txBody>
-      </p:sp>
-      <p:sp>
-        <p:nvSpPr>
-          <p:cNvPr id="5" name="Rectangle 4"/>
-          <p:cNvSpPr/>
-          <p:nvPr/>
-        </p:nvSpPr>
-        <p:spPr>
-          <a:xfrm>
-            <a:off x="6583680" y="1371600"/>
-            <a:ext cx="5029201" cy="4114800"/>
-          </a:xfrm>
-          <a:prstGeom prst="rect">
-            <a:avLst/>
-          </a:prstGeom>
-          <a:solidFill>
-            <a:srgbClr val="FDF6F0"/>
-          </a:solidFill>
-          <a:ln>
-            <a:noFill/>
-          </a:ln>
-          <a:effectLst/>
-        </p:spPr>
-        <p:style>
-          <a:lnRef idx="1">
-            <a:schemeClr val="accent1"/>
-          </a:lnRef>
-          <a:fillRef idx="3">
-            <a:schemeClr val="accent1"/>
-          </a:fillRef>
-          <a:effectRef idx="2">
-            <a:schemeClr val="accent1"/>
-          </a:effectRef>
-          <a:fontRef idx="minor">
-            <a:schemeClr val="lt1"/>
-          </a:fontRef>
-        </p:style>
-        <p:txBody>
-          <a:bodyPr rtlCol="0" anchor="ctr"/>
-          <a:lstStyle/>
-          <a:p>
-            <a:pPr algn="ctr"/>
-          </a:p>
-        </p:txBody>
-      </p:sp>
-      <p:sp>
-        <p:nvSpPr>
-          <p:cNvPr id="6" name="Rectangle 5"/>
-          <p:cNvSpPr/>
-          <p:nvPr/>
-        </p:nvSpPr>
-        <p:spPr>
-          <a:xfrm>
-            <a:off x="6583680" y="1371600"/>
-            <a:ext cx="50801" cy="4114800"/>
-          </a:xfrm>
-          <a:prstGeom prst="rect">
-            <a:avLst/>
-          </a:prstGeom>
-          <a:solidFill>
-            <a:srgbClr val="E8833A"/>
-          </a:solidFill>
-          <a:ln>
-            <a:noFill/>
-          </a:ln>
-          <a:effectLst/>
-        </p:spPr>
-        <p:style>
-          <a:lnRef idx="1">
-            <a:schemeClr val="accent1"/>
-          </a:lnRef>
-          <a:fillRef idx="3">
-            <a:schemeClr val="accent1"/>
-          </a:fillRef>
-          <a:effectRef idx="2">
-            <a:schemeClr val="accent1"/>
-          </a:effectRef>
-          <a:fontRef idx="minor">
-            <a:schemeClr val="lt1"/>
-          </a:fontRef>
-        </p:style>
-        <p:txBody>
-          <a:bodyPr rtlCol="0" anchor="ctr"/>
-          <a:lstStyle/>
-          <a:p>
-            <a:pPr algn="ctr"/>
-          </a:p>
-        </p:txBody>
-      </p:sp>
-      <p:sp>
-        <p:nvSpPr>
-          <p:cNvPr id="7" name="TextBox 6"/>
-          <p:cNvSpPr txBox="1"/>
-          <p:nvPr/>
-        </p:nvSpPr>
-        <p:spPr>
-          <a:xfrm>
-            <a:off x="502919" y="182879"/>
-            <a:ext cx="11155682" cy="444759"/>
-          </a:xfrm>
-          <a:prstGeom prst="rect">
-            <a:avLst/>
-          </a:prstGeom>
-          <a:noFill/>
-        </p:spPr>
-        <p:txBody>
-          <a:bodyPr wrap="square">
-            <a:spAutoFit/>
-          </a:bodyPr>
-          <a:lstStyle/>
-          <a:p>
-            <a:r>
-              <a:rPr sz="2800" b="1">
-                <a:solidFill>
-                  <a:srgbClr val="FFFFFF"/>
-                </a:solidFill>
-              </a:rPr>
-              <a:t>Demo: The Realism Gap, Part 1: The Hand-Built Case</a:t>
-            </a:r>
-          </a:p>
-        </p:txBody>
-      </p:sp>
-      <p:sp>
-        <p:nvSpPr>
-          <p:cNvPr id="8" name="TextBox 7"/>
-          <p:cNvSpPr txBox="1"/>
-          <p:nvPr/>
-        </p:nvSpPr>
-        <p:spPr>
-          <a:xfrm>
-            <a:off x="502919" y="1097280"/>
-            <a:ext cx="11155682" cy="300594"/>
-          </a:xfrm>
-          <a:prstGeom prst="rect">
-            <a:avLst/>
-          </a:prstGeom>
-          <a:noFill/>
-        </p:spPr>
-        <p:txBody>
-          <a:bodyPr wrap="square">
-            <a:spAutoFit/>
-          </a:bodyPr>
-          <a:lstStyle/>
-          <a:p>
-            <a:r>
-              <a:rPr sz="1600" b="0">
-                <a:solidFill>
-                  <a:srgbClr val="5B6B7C"/>
-                </a:solidFill>
-              </a:rPr>
-              <a:t>Built by hand, grounded by hand, live on screen now</a:t>
-            </a:r>
-          </a:p>
-        </p:txBody>
-      </p:sp>
-      <p:sp>
-        <p:nvSpPr>
-          <p:cNvPr id="9" name="TextBox 8"/>
-          <p:cNvSpPr txBox="1"/>
-          <p:nvPr/>
-        </p:nvSpPr>
-        <p:spPr>
-          <a:xfrm>
-            <a:off x="960119" y="1554480"/>
-            <a:ext cx="4937762" cy="225708"/>
-          </a:xfrm>
-          <a:prstGeom prst="rect">
-            <a:avLst/>
-          </a:prstGeom>
-          <a:noFill/>
-        </p:spPr>
-        <p:txBody>
-          <a:bodyPr wrap="square">
-            <a:spAutoFit/>
-          </a:bodyPr>
-          <a:lstStyle/>
-          <a:p>
-            <a:r>
-              <a:rPr sz="1100" b="1">
-                <a:solidFill>
-                  <a:srgbClr val="2D5F7C"/>
-                </a:solidFill>
-              </a:rPr>
-              <a:t>WHAT IT DOES WELL</a:t>
-            </a:r>
-          </a:p>
-        </p:txBody>
-      </p:sp>
-      <p:sp>
-        <p:nvSpPr>
-          <p:cNvPr id="10" name="TextBox 9"/>
-          <p:cNvSpPr txBox="1"/>
-          <p:nvPr/>
-        </p:nvSpPr>
-        <p:spPr>
-          <a:xfrm>
-            <a:off x="960119" y="1920239"/>
-            <a:ext cx="4937762" cy="2301589"/>
-          </a:xfrm>
-          <a:prstGeom prst="rect">
-            <a:avLst/>
-          </a:prstGeom>
-          <a:noFill/>
-        </p:spPr>
-        <p:txBody>
-          <a:bodyPr wrap="square">
-            <a:spAutoFit/>
-          </a:bodyPr>
-          <a:lstStyle/>
-          <a:p>
-            <a:r>
-              <a:rPr sz="1800" b="0">
-                <a:solidFill>
-                  <a:srgbClr val="1A2332"/>
-                </a:solidFill>
-              </a:rPr>
-              <a:t>• Captures clinical reasoning, branch by branch</a:t>
-            </a:r>
-          </a:p>
-          <a:p>
-            <a:pPr>
-              <a:spcBef>
-                <a:spcPts val="1000"/>
-              </a:spcBef>
-            </a:pPr>
-            <a:r>
-              <a:rPr sz="1800" b="0">
-                <a:solidFill>
-                  <a:srgbClr val="1A2332"/>
-                </a:solidFill>
-              </a:rPr>
-              <a:t>• Grounded: a human vetted every decision</a:t>
-            </a:r>
-          </a:p>
-          <a:p>
-            <a:pPr>
-              <a:spcBef>
-                <a:spcPts val="1000"/>
-              </a:spcBef>
-            </a:pPr>
-            <a:r>
-              <a:rPr sz="1800" b="0">
-                <a:solidFill>
-                  <a:srgbClr val="1A2332"/>
-                </a:solidFill>
-              </a:rPr>
-              <a:t>• Reusable: runs the same for every learner</a:t>
-            </a:r>
-          </a:p>
-        </p:txBody>
-      </p:sp>
-      <p:sp>
-        <p:nvSpPr>
-          <p:cNvPr id="11" name="TextBox 10"/>
-          <p:cNvSpPr txBox="1"/>
-          <p:nvPr/>
-        </p:nvSpPr>
-        <p:spPr>
-          <a:xfrm>
-            <a:off x="6903719" y="1554480"/>
-            <a:ext cx="4480562" cy="225708"/>
-          </a:xfrm>
-          <a:prstGeom prst="rect">
-            <a:avLst/>
-          </a:prstGeom>
-          <a:noFill/>
-        </p:spPr>
-        <p:txBody>
-          <a:bodyPr wrap="square">
-            <a:spAutoFit/>
-          </a:bodyPr>
-          <a:lstStyle/>
-          <a:p>
-            <a:r>
-              <a:rPr sz="1100" b="1">
-                <a:solidFill>
-                  <a:srgbClr val="E8833A"/>
-                </a:solidFill>
-              </a:rPr>
-              <a:t>THE GAP</a:t>
-            </a:r>
-          </a:p>
-        </p:txBody>
-      </p:sp>
-      <p:sp>
-        <p:nvSpPr>
-          <p:cNvPr id="12" name="TextBox 11"/>
-          <p:cNvSpPr txBox="1"/>
-          <p:nvPr/>
-        </p:nvSpPr>
-        <p:spPr>
-          <a:xfrm>
-            <a:off x="6903719" y="1920239"/>
-            <a:ext cx="4480562" cy="2301589"/>
-          </a:xfrm>
-          <a:prstGeom prst="rect">
-            <a:avLst/>
-          </a:prstGeom>
-          <a:noFill/>
-        </p:spPr>
-        <p:txBody>
-          <a:bodyPr wrap="square">
-            <a:spAutoFit/>
-          </a:bodyPr>
-          <a:lstStyle/>
-          <a:p>
-            <a:r>
-              <a:rPr sz="1800" b="0">
-                <a:solidFill>
-                  <a:srgbClr val="1A2332"/>
-                </a:solidFill>
-              </a:rPr>
-              <a:t>Real patients are not multiple choice.</a:t>
-            </a:r>
-          </a:p>
-          <a:p>
-            <a:pPr>
-              <a:spcBef>
-                <a:spcPts val="1000"/>
-              </a:spcBef>
-            </a:pPr>
-            <a:r>
-              <a:rPr sz="1800" b="0">
-                <a:solidFill>
-                  <a:srgbClr val="1A2332"/>
-                </a:solidFill>
-              </a:rPr>
-              <a:t>It only answers what its author pre-imagined.</a:t>
-            </a:r>
-          </a:p>
-          <a:p>
-            <a:pPr>
-              <a:spcBef>
-                <a:spcPts val="1000"/>
-              </a:spcBef>
-            </a:pPr>
-            <a:r>
-              <a:rPr sz="1800" b="0">
-                <a:solidFill>
-                  <a:srgbClr val="1A2332"/>
-                </a:solidFill>
-              </a:rPr>
-              <a:t>A hiking trail, not open country.</a:t>
-            </a:r>
-          </a:p>
-        </p:txBody>
-      </p:sp>
-      <p:sp>
-        <p:nvSpPr>
-          <p:cNvPr id="13" name="TextBox 12"/>
-          <p:cNvSpPr txBox="1"/>
-          <p:nvPr/>
-        </p:nvSpPr>
-        <p:spPr>
-          <a:xfrm>
-            <a:off x="502919" y="5715000"/>
-            <a:ext cx="11155682" cy="300594"/>
-          </a:xfrm>
-          <a:prstGeom prst="rect">
-            <a:avLst/>
-          </a:prstGeom>
-          <a:noFill/>
-        </p:spPr>
-        <p:txBody>
-          <a:bodyPr wrap="square">
-            <a:spAutoFit/>
-          </a:bodyPr>
-          <a:lstStyle/>
-          <a:p>
-            <a:r>
-              <a:rPr sz="1600" b="0">
-                <a:solidFill>
-                  <a:srgbClr val="0000FF"/>
-                </a:solidFill>
-              </a:rPr>
-              <a:t>Workshop Guide → Section 2 (run the demo on your phone)</a:t>
-            </a:r>
-          </a:p>
-        </p:txBody>
-      </p:sp>
-    </p:spTree>
-  </p:cSld>
-  <p:clrMapOvr>
-    <a:masterClrMapping/>
-  </p:clrMapOvr>
-  <p:transition xmlns:p14="http://schemas.microsoft.com/office/powerpoint/2010/main" spd="med" advClick="1"/>
-</p:sld>
-</file>
-
-<file path=ppt/slides/slide6.xml><?xml version="1.0" encoding="utf-8"?>
-<p:sld xmlns:a="http://schemas.openxmlformats.org/drawingml/2006/main" xmlns:p="http://schemas.openxmlformats.org/presentationml/2006/main" xmlns:r="http://schemas.openxmlformats.org/officeDocument/2006/relationships">
-  <p:cSld>
-    <p:spTree>
-      <p:nvGrpSpPr>
-        <p:cNvPr id="1" name=""/>
-        <p:cNvGrpSpPr/>
-        <p:nvPr/>
-      </p:nvGrpSpPr>
-      <p:grpSpPr/>
-      <p:sp>
-        <p:nvSpPr>
-          <p:cNvPr id="2" name="Rectangle 1"/>
-          <p:cNvSpPr/>
-          <p:nvPr/>
-        </p:nvSpPr>
-        <p:spPr>
-          <a:xfrm>
-            <a:off x="-1" y="0"/>
-            <a:ext cx="12191697" cy="1005839"/>
-          </a:xfrm>
-          <a:prstGeom prst="rect">
-            <a:avLst/>
-          </a:prstGeom>
-          <a:solidFill>
-            <a:srgbClr val="2D5F7C"/>
-          </a:solidFill>
-          <a:ln>
-            <a:noFill/>
-          </a:ln>
-          <a:effectLst/>
-        </p:spPr>
-        <p:style>
-          <a:lnRef idx="1">
-            <a:schemeClr val="accent1"/>
-          </a:lnRef>
-          <a:fillRef idx="3">
-            <a:schemeClr val="accent1"/>
-          </a:fillRef>
-          <a:effectRef idx="2">
-            <a:schemeClr val="accent1"/>
-          </a:effectRef>
-          <a:fontRef idx="minor">
-            <a:schemeClr val="lt1"/>
-          </a:fontRef>
-        </p:style>
-        <p:txBody>
-          <a:bodyPr rtlCol="0" anchor="ctr"/>
-          <a:lstStyle/>
-          <a:p>
-            <a:pPr algn="ctr"/>
-          </a:p>
-        </p:txBody>
-      </p:sp>
-      <p:sp>
-        <p:nvSpPr>
-          <p:cNvPr id="3" name="Rectangle 2"/>
-          <p:cNvSpPr/>
-          <p:nvPr/>
-        </p:nvSpPr>
-        <p:spPr>
-          <a:xfrm>
-            <a:off x="640080" y="1371600"/>
-            <a:ext cx="5486401" cy="4114800"/>
-          </a:xfrm>
-          <a:prstGeom prst="rect">
-            <a:avLst/>
-          </a:prstGeom>
-          <a:solidFill>
-            <a:srgbClr val="F0F4F8"/>
-          </a:solidFill>
-          <a:ln>
-            <a:noFill/>
-          </a:ln>
-          <a:effectLst/>
-        </p:spPr>
-        <p:style>
-          <a:lnRef idx="1">
-            <a:schemeClr val="accent1"/>
-          </a:lnRef>
-          <a:fillRef idx="3">
-            <a:schemeClr val="accent1"/>
-          </a:fillRef>
-          <a:effectRef idx="2">
-            <a:schemeClr val="accent1"/>
-          </a:effectRef>
-          <a:fontRef idx="minor">
-            <a:schemeClr val="lt1"/>
-          </a:fontRef>
-        </p:style>
-        <p:txBody>
-          <a:bodyPr rtlCol="0" anchor="ctr"/>
-          <a:lstStyle/>
-          <a:p>
-            <a:pPr algn="ctr"/>
-          </a:p>
-        </p:txBody>
-      </p:sp>
-      <p:sp>
-        <p:nvSpPr>
-          <p:cNvPr id="4" name="Rectangle 3"/>
-          <p:cNvSpPr/>
-          <p:nvPr/>
-        </p:nvSpPr>
-        <p:spPr>
-          <a:xfrm>
-            <a:off x="640080" y="1371600"/>
-            <a:ext cx="50801" cy="4114800"/>
-          </a:xfrm>
-          <a:prstGeom prst="rect">
-            <a:avLst/>
-          </a:prstGeom>
-          <a:solidFill>
-            <a:srgbClr val="2D5F7C"/>
-          </a:solidFill>
-          <a:ln>
-            <a:noFill/>
-          </a:ln>
-          <a:effectLst/>
-        </p:spPr>
-        <p:style>
-          <a:lnRef idx="1">
-            <a:schemeClr val="accent1"/>
-          </a:lnRef>
-          <a:fillRef idx="3">
-            <a:schemeClr val="accent1"/>
-          </a:fillRef>
-          <a:effectRef idx="2">
-            <a:schemeClr val="accent1"/>
-          </a:effectRef>
-          <a:fontRef idx="minor">
-            <a:schemeClr val="lt1"/>
-          </a:fontRef>
-        </p:style>
-        <p:txBody>
-          <a:bodyPr rtlCol="0" anchor="ctr"/>
-          <a:lstStyle/>
-          <a:p>
-            <a:pPr algn="ctr"/>
-          </a:p>
-        </p:txBody>
-      </p:sp>
-      <p:sp>
-        <p:nvSpPr>
-          <p:cNvPr id="5" name="Rectangle 4"/>
-          <p:cNvSpPr/>
-          <p:nvPr/>
-        </p:nvSpPr>
-        <p:spPr>
-          <a:xfrm>
-            <a:off x="6583680" y="1371600"/>
-            <a:ext cx="5029201" cy="4114800"/>
-          </a:xfrm>
-          <a:prstGeom prst="rect">
-            <a:avLst/>
-          </a:prstGeom>
-          <a:solidFill>
-            <a:srgbClr val="FDF6F0"/>
-          </a:solidFill>
-          <a:ln>
-            <a:noFill/>
-          </a:ln>
-          <a:effectLst/>
-        </p:spPr>
-        <p:style>
-          <a:lnRef idx="1">
-            <a:schemeClr val="accent1"/>
-          </a:lnRef>
-          <a:fillRef idx="3">
-            <a:schemeClr val="accent1"/>
-          </a:fillRef>
-          <a:effectRef idx="2">
-            <a:schemeClr val="accent1"/>
-          </a:effectRef>
-          <a:fontRef idx="minor">
-            <a:schemeClr val="lt1"/>
-          </a:fontRef>
-        </p:style>
-        <p:txBody>
-          <a:bodyPr rtlCol="0" anchor="ctr"/>
-          <a:lstStyle/>
-          <a:p>
-            <a:pPr algn="ctr"/>
-          </a:p>
-        </p:txBody>
-      </p:sp>
-      <p:sp>
-        <p:nvSpPr>
-          <p:cNvPr id="6" name="Rectangle 5"/>
-          <p:cNvSpPr/>
-          <p:nvPr/>
-        </p:nvSpPr>
-        <p:spPr>
-          <a:xfrm>
-            <a:off x="6583680" y="1371600"/>
-            <a:ext cx="50801" cy="4114800"/>
-          </a:xfrm>
-          <a:prstGeom prst="rect">
-            <a:avLst/>
-          </a:prstGeom>
-          <a:solidFill>
-            <a:srgbClr val="E8833A"/>
-          </a:solidFill>
-          <a:ln>
-            <a:noFill/>
-          </a:ln>
-          <a:effectLst/>
-        </p:spPr>
-        <p:style>
-          <a:lnRef idx="1">
-            <a:schemeClr val="accent1"/>
-          </a:lnRef>
-          <a:fillRef idx="3">
-            <a:schemeClr val="accent1"/>
-          </a:fillRef>
-          <a:effectRef idx="2">
-            <a:schemeClr val="accent1"/>
-          </a:effectRef>
-          <a:fontRef idx="minor">
-            <a:schemeClr val="lt1"/>
-          </a:fontRef>
-        </p:style>
-        <p:txBody>
-          <a:bodyPr rtlCol="0" anchor="ctr"/>
-          <a:lstStyle/>
-          <a:p>
-            <a:pPr algn="ctr"/>
-          </a:p>
-        </p:txBody>
-      </p:sp>
-      <p:sp>
-        <p:nvSpPr>
-          <p:cNvPr id="7" name="TextBox 6"/>
-          <p:cNvSpPr txBox="1"/>
-          <p:nvPr/>
-        </p:nvSpPr>
-        <p:spPr>
-          <a:xfrm>
-            <a:off x="502919" y="182879"/>
-            <a:ext cx="11155682" cy="444759"/>
-          </a:xfrm>
-          <a:prstGeom prst="rect">
-            <a:avLst/>
-          </a:prstGeom>
-          <a:noFill/>
-        </p:spPr>
-        <p:txBody>
-          <a:bodyPr wrap="square">
-            <a:spAutoFit/>
-          </a:bodyPr>
-          <a:lstStyle/>
-          <a:p>
-            <a:r>
-              <a:rPr sz="2800" b="1">
-                <a:solidFill>
-                  <a:srgbClr val="FFFFFF"/>
-                </a:solidFill>
-              </a:rPr>
-              <a:t>Demo: The Realism Gap, Part 2: The AI Case, Live</a:t>
-            </a:r>
-          </a:p>
-        </p:txBody>
-      </p:sp>
-      <p:sp>
-        <p:nvSpPr>
-          <p:cNvPr id="8" name="TextBox 7"/>
-          <p:cNvSpPr txBox="1"/>
-          <p:nvPr/>
-        </p:nvSpPr>
-        <p:spPr>
-          <a:xfrm>
-            <a:off x="502919" y="1097280"/>
-            <a:ext cx="11155682" cy="300594"/>
-          </a:xfrm>
-          <a:prstGeom prst="rect">
-            <a:avLst/>
-          </a:prstGeom>
-          <a:noFill/>
-        </p:spPr>
-        <p:txBody>
-          <a:bodyPr wrap="square">
-            <a:spAutoFit/>
-          </a:bodyPr>
-          <a:lstStyle/>
-          <a:p>
-            <a:r>
-              <a:rPr sz="1600" b="0">
-                <a:solidFill>
-                  <a:srgbClr val="5B6B7C"/>
-                </a:solidFill>
-              </a:rPr>
-              <a:t>One paste, about sixty seconds, on screen now</a:t>
-            </a:r>
-          </a:p>
-        </p:txBody>
-      </p:sp>
-      <p:sp>
-        <p:nvSpPr>
-          <p:cNvPr id="9" name="TextBox 8"/>
-          <p:cNvSpPr txBox="1"/>
-          <p:nvPr/>
-        </p:nvSpPr>
-        <p:spPr>
-          <a:xfrm>
-            <a:off x="960119" y="1554480"/>
-            <a:ext cx="4937762" cy="225708"/>
-          </a:xfrm>
-          <a:prstGeom prst="rect">
-            <a:avLst/>
-          </a:prstGeom>
-          <a:noFill/>
-        </p:spPr>
-        <p:txBody>
-          <a:bodyPr wrap="square">
-            <a:spAutoFit/>
-          </a:bodyPr>
-          <a:lstStyle/>
-          <a:p>
-            <a:r>
-              <a:rPr sz="1100" b="1">
-                <a:solidFill>
-                  <a:srgbClr val="2D5F7C"/>
-                </a:solidFill>
-              </a:rPr>
-              <a:t>WHAT THE PASTE PRODUCES</a:t>
-            </a:r>
-          </a:p>
-        </p:txBody>
-      </p:sp>
-      <p:sp>
-        <p:nvSpPr>
-          <p:cNvPr id="10" name="TextBox 9"/>
-          <p:cNvSpPr txBox="1"/>
-          <p:nvPr/>
-        </p:nvSpPr>
-        <p:spPr>
-          <a:xfrm>
-            <a:off x="960119" y="1920239"/>
-            <a:ext cx="4937762" cy="2301589"/>
-          </a:xfrm>
-          <a:prstGeom prst="rect">
-            <a:avLst/>
-          </a:prstGeom>
-          <a:noFill/>
-        </p:spPr>
-        <p:txBody>
-          <a:bodyPr wrap="square">
-            <a:spAutoFit/>
-          </a:bodyPr>
-          <a:lstStyle/>
-          <a:p>
-            <a:r>
-              <a:rPr sz="1800" b="0">
-                <a:solidFill>
-                  <a:srgbClr val="1A2332"/>
-                </a:solidFill>
-              </a:rPr>
-              <a:t>• An open-ended case: the learner asks anything</a:t>
-            </a:r>
-          </a:p>
-          <a:p>
-            <a:pPr>
-              <a:spcBef>
-                <a:spcPts val="1000"/>
-              </a:spcBef>
-            </a:pPr>
-            <a:r>
-              <a:rPr sz="1800" b="0">
-                <a:solidFill>
-                  <a:srgbClr val="1A2332"/>
-                </a:solidFill>
-              </a:rPr>
-              <a:t>• A student-ready prompt with rubric feedback</a:t>
-            </a:r>
-          </a:p>
-          <a:p>
-            <a:pPr>
-              <a:spcBef>
-                <a:spcPts val="1000"/>
-              </a:spcBef>
-            </a:pPr>
-            <a:r>
-              <a:rPr sz="1800" b="0">
-                <a:solidFill>
-                  <a:srgbClr val="1A2332"/>
-                </a:solidFill>
-              </a:rPr>
-              <a:t>• A provenance warning it writes itself</a:t>
-            </a:r>
-          </a:p>
-        </p:txBody>
-      </p:sp>
-      <p:sp>
-        <p:nvSpPr>
-          <p:cNvPr id="11" name="TextBox 10"/>
-          <p:cNvSpPr txBox="1"/>
-          <p:nvPr/>
-        </p:nvSpPr>
-        <p:spPr>
-          <a:xfrm>
-            <a:off x="6903719" y="1554480"/>
-            <a:ext cx="4480562" cy="225708"/>
-          </a:xfrm>
-          <a:prstGeom prst="rect">
-            <a:avLst/>
-          </a:prstGeom>
-          <a:noFill/>
-        </p:spPr>
-        <p:txBody>
-          <a:bodyPr wrap="square">
-            <a:spAutoFit/>
-          </a:bodyPr>
-          <a:lstStyle/>
-          <a:p>
-            <a:r>
-              <a:rPr sz="1100" b="1">
-                <a:solidFill>
-                  <a:srgbClr val="E8833A"/>
-                </a:solidFill>
-              </a:rPr>
-              <a:t>YOUR TURN COMES AT THE TPS</a:t>
-            </a:r>
-          </a:p>
-        </p:txBody>
-      </p:sp>
-      <p:sp>
-        <p:nvSpPr>
-          <p:cNvPr id="12" name="TextBox 11"/>
-          <p:cNvSpPr txBox="1"/>
-          <p:nvPr/>
-        </p:nvSpPr>
-        <p:spPr>
-          <a:xfrm>
-            <a:off x="6903719" y="1920239"/>
-            <a:ext cx="4480562" cy="2301589"/>
-          </a:xfrm>
-          <a:prstGeom prst="rect">
-            <a:avLst/>
-          </a:prstGeom>
-          <a:noFill/>
-        </p:spPr>
-        <p:txBody>
-          <a:bodyPr wrap="square">
-            <a:spAutoFit/>
-          </a:bodyPr>
-          <a:lstStyle/>
-          <a:p>
-            <a:r>
-              <a:rPr sz="1800" b="0">
-                <a:solidFill>
-                  <a:srgbClr val="1A2332"/>
-                </a:solidFill>
-              </a:rPr>
-              <a:t>The exact prompt is in the guide:</a:t>
-            </a:r>
-          </a:p>
-          <a:p>
-            <a:pPr>
-              <a:spcBef>
-                <a:spcPts val="1000"/>
-              </a:spcBef>
-            </a:pPr>
-            <a:r>
-              <a:rPr sz="1800" b="0">
-                <a:solidFill>
-                  <a:srgbClr val="1A2332"/>
-                </a:solidFill>
-              </a:rPr>
-              <a:t>Section 4, prompt 5b: Today's Demo Case.</a:t>
-            </a:r>
-          </a:p>
-          <a:p>
-            <a:pPr>
-              <a:spcBef>
-                <a:spcPts val="1000"/>
-              </a:spcBef>
-            </a:pPr>
-            <a:r>
-              <a:rPr sz="1800" b="0">
-                <a:solidFill>
-                  <a:srgbClr val="1A2332"/>
-                </a:solidFill>
-              </a:rPr>
-              <a:t>Copy it on your phone when we get there.</a:t>
-            </a:r>
-          </a:p>
-        </p:txBody>
-      </p:sp>
-      <p:sp>
-        <p:nvSpPr>
-          <p:cNvPr id="13" name="TextBox 12"/>
-          <p:cNvSpPr txBox="1"/>
-          <p:nvPr/>
-        </p:nvSpPr>
-        <p:spPr>
-          <a:xfrm>
-            <a:off x="502919" y="5715000"/>
-            <a:ext cx="11155682" cy="300594"/>
-          </a:xfrm>
-          <a:prstGeom prst="rect">
-            <a:avLst/>
-          </a:prstGeom>
-          <a:noFill/>
-        </p:spPr>
-        <p:txBody>
-          <a:bodyPr wrap="square">
-            <a:spAutoFit/>
-          </a:bodyPr>
-          <a:lstStyle/>
-          <a:p>
-            <a:r>
-              <a:rPr sz="1600" b="0">
-                <a:solidFill>
-                  <a:srgbClr val="0000FF"/>
-                </a:solidFill>
-              </a:rPr>
-              <a:t>Workshop Guide → Section 4 (prompts 5 and 5b)</a:t>
-            </a:r>
-          </a:p>
-        </p:txBody>
-      </p:sp>
-    </p:spTree>
-  </p:cSld>
-  <p:clrMapOvr>
-    <a:masterClrMapping/>
-  </p:clrMapOvr>
-</p:sld>
-</file>
-
-<file path=ppt/slides/slide7.xml><?xml version="1.0" encoding="utf-8"?>
-<p:sld xmlns:a="http://schemas.openxmlformats.org/drawingml/2006/main" xmlns:r="http://schemas.openxmlformats.org/officeDocument/2006/relationships" xmlns:p="http://schemas.openxmlformats.org/presentationml/2006/main" xmlns:m="http://schemas.openxmlformats.org/officeDocument/2006/math" xmlns:a14="http://schemas.microsoft.com/office/drawing/2010/main" showMasterSp="1" showMasterPhAnim="1">
-  <p:cSld>
-    <p:spTree>
-      <p:nvGrpSpPr>
-        <p:cNvPr id="1" name=""/>
-        <p:cNvGrpSpPr/>
-        <p:nvPr/>
-      </p:nvGrpSpPr>
-      <p:grpSpPr>
-        <a:xfrm>
-          <a:off x="0" y="0"/>
-          <a:ext cx="0" cy="0"/>
-          <a:chOff x="0" y="0"/>
-          <a:chExt cx="0" cy="0"/>
-        </a:xfrm>
-      </p:grpSpPr>
-      <p:sp>
-        <p:nvSpPr>
-          <p:cNvPr id="2" name="Rectangle 1"/>
-          <p:cNvSpPr/>
-          <p:nvPr/>
-        </p:nvSpPr>
-        <p:spPr>
-          <a:xfrm>
-            <a:off x="-1" y="0"/>
-            <a:ext cx="12191697" cy="1005839"/>
-          </a:xfrm>
-          <a:prstGeom prst="rect">
-            <a:avLst/>
-          </a:prstGeom>
-          <a:solidFill>
-            <a:srgbClr val="2D5F7C"/>
-          </a:solidFill>
-          <a:ln>
-            <a:noFill/>
-          </a:ln>
-          <a:effectLst/>
-        </p:spPr>
-        <p:style>
-          <a:lnRef idx="1">
-            <a:schemeClr val="accent1"/>
-          </a:lnRef>
-          <a:fillRef idx="3">
-            <a:schemeClr val="accent1"/>
-          </a:fillRef>
-          <a:effectRef idx="2">
-            <a:schemeClr val="accent1"/>
-          </a:effectRef>
-          <a:fontRef idx="minor">
-            <a:schemeClr val="lt1"/>
-          </a:fontRef>
-        </p:style>
-        <p:txBody>
-          <a:bodyPr rtlCol="0" anchor="ctr"/>
-          <a:lstStyle/>
-          <a:p>
-            <a:pPr algn="ctr"/>
-          </a:p>
-        </p:txBody>
-      </p:sp>
-      <p:sp>
-        <p:nvSpPr>
-          <p:cNvPr id="3" name="Rectangle 2"/>
-          <p:cNvSpPr/>
-          <p:nvPr/>
-        </p:nvSpPr>
-        <p:spPr>
-          <a:xfrm>
-            <a:off x="640080" y="1371600"/>
-            <a:ext cx="10972801" cy="3657600"/>
-          </a:xfrm>
-          <a:prstGeom prst="rect">
-            <a:avLst/>
-          </a:prstGeom>
-          <a:solidFill>
-            <a:srgbClr val="F0F4F8"/>
-          </a:solidFill>
-          <a:ln>
-            <a:noFill/>
-          </a:ln>
-          <a:effectLst/>
-        </p:spPr>
-        <p:style>
-          <a:lnRef idx="1">
-            <a:schemeClr val="accent1"/>
-          </a:lnRef>
-          <a:fillRef idx="3">
-            <a:schemeClr val="accent1"/>
-          </a:fillRef>
-          <a:effectRef idx="2">
-            <a:schemeClr val="accent1"/>
-          </a:effectRef>
-          <a:fontRef idx="minor">
-            <a:schemeClr val="lt1"/>
-          </a:fontRef>
-        </p:style>
-        <p:txBody>
-          <a:bodyPr rtlCol="0" anchor="ctr"/>
-          <a:lstStyle/>
-          <a:p>
-            <a:pPr algn="ctr"/>
-          </a:p>
-        </p:txBody>
-      </p:sp>
-      <p:sp>
-        <p:nvSpPr>
-          <p:cNvPr id="4" name="Rectangle 3"/>
-          <p:cNvSpPr/>
-          <p:nvPr/>
-        </p:nvSpPr>
-        <p:spPr>
-          <a:xfrm>
-            <a:off x="640080" y="1371600"/>
-            <a:ext cx="50801" cy="3657600"/>
-          </a:xfrm>
-          <a:prstGeom prst="rect">
-            <a:avLst/>
-          </a:prstGeom>
-          <a:solidFill>
-            <a:srgbClr val="2D5F7C"/>
-          </a:solidFill>
-          <a:ln>
-            <a:noFill/>
-          </a:ln>
-          <a:effectLst/>
-        </p:spPr>
-        <p:style>
-          <a:lnRef idx="1">
-            <a:schemeClr val="accent1"/>
-          </a:lnRef>
-          <a:fillRef idx="3">
-            <a:schemeClr val="accent1"/>
-          </a:fillRef>
-          <a:effectRef idx="2">
-            <a:schemeClr val="accent1"/>
-          </a:effectRef>
-          <a:fontRef idx="minor">
-            <a:schemeClr val="lt1"/>
-          </a:fontRef>
-        </p:style>
-        <p:txBody>
-          <a:bodyPr rtlCol="0" anchor="ctr"/>
-          <a:lstStyle/>
-          <a:p>
-            <a:pPr algn="ctr"/>
-          </a:p>
-        </p:txBody>
-      </p:sp>
-      <p:sp>
-        <p:nvSpPr>
-          <p:cNvPr id="5" name="TextBox 4"/>
-          <p:cNvSpPr txBox="1"/>
-          <p:nvPr/>
-        </p:nvSpPr>
-        <p:spPr>
-          <a:xfrm>
-            <a:off x="502919" y="182879"/>
-            <a:ext cx="11155682" cy="444759"/>
-          </a:xfrm>
-          <a:prstGeom prst="rect">
-            <a:avLst/>
-          </a:prstGeom>
-          <a:noFill/>
-        </p:spPr>
-        <p:txBody>
-          <a:bodyPr wrap="square">
-            <a:spAutoFit/>
-          </a:bodyPr>
-          <a:lstStyle/>
-          <a:p>
-            <a:r>
-              <a:rPr sz="2800" b="1">
-                <a:solidFill>
-                  <a:srgbClr val="FFFFFF"/>
-                </a:solidFill>
-              </a:rPr>
-              <a:t>Think · Pair · Share: The Realism Gap (2 min)</a:t>
-            </a:r>
-          </a:p>
-        </p:txBody>
-      </p:sp>
-      <p:sp>
-        <p:nvSpPr>
-          <p:cNvPr id="6" name="TextBox 5"/>
-          <p:cNvSpPr txBox="1"/>
-          <p:nvPr/>
-        </p:nvSpPr>
-        <p:spPr>
-          <a:xfrm>
-            <a:off x="1143000" y="1828800"/>
-            <a:ext cx="9966961" cy="1985576"/>
-          </a:xfrm>
-          <a:prstGeom prst="rect">
-            <a:avLst/>
-          </a:prstGeom>
-          <a:noFill/>
-        </p:spPr>
-        <p:txBody>
-          <a:bodyPr wrap="square">
-            <a:spAutoFit/>
-          </a:bodyPr>
-          <a:lstStyle/>
-          <a:p>
-            <a:r>
-              <a:rPr sz="2200" b="0">
-                <a:solidFill>
-                  <a:srgbClr val="1E4258"/>
-                </a:solidFill>
-              </a:rPr>
-              <a:t>Pick one thing you already teach: a case, a treatment update, a procedure, a journal club.</a:t>
-            </a:r>
-          </a:p>
-          <a:p>
-            <a:pPr>
-              <a:spcBef>
-                <a:spcPts val="1600"/>
-              </a:spcBef>
-            </a:pPr>
-            <a:r>
-              <a:rPr sz="2200" b="0">
-                <a:solidFill>
-                  <a:srgbClr val="1E4258"/>
-                </a:solidFill>
-              </a:rPr>
-              <a:t>Where is its realism gap?</a:t>
-            </a:r>
-          </a:p>
-          <a:p>
-            <a:pPr>
-              <a:spcBef>
-                <a:spcPts val="1600"/>
-              </a:spcBef>
-            </a:pPr>
-            <a:r>
-              <a:rPr sz="2200" b="0">
-                <a:solidFill>
-                  <a:srgbClr val="1E4258"/>
-                </a:solidFill>
-              </a:rPr>
-              <a:t>Which format would you try first?</a:t>
-            </a:r>
-          </a:p>
-        </p:txBody>
-      </p:sp>
-      <p:sp>
-        <p:nvSpPr>
-          <p:cNvPr id="7" name="TextBox 6"/>
-          <p:cNvSpPr txBox="1"/>
-          <p:nvPr/>
-        </p:nvSpPr>
-        <p:spPr>
-          <a:xfrm>
-            <a:off x="1143000" y="5303520"/>
-            <a:ext cx="9966961" cy="300594"/>
-          </a:xfrm>
-          <a:prstGeom prst="rect">
-            <a:avLst/>
-          </a:prstGeom>
-          <a:noFill/>
-        </p:spPr>
-        <p:txBody>
-          <a:bodyPr wrap="square">
-            <a:spAutoFit/>
-          </a:bodyPr>
-          <a:lstStyle/>
-          <a:p>
-            <a:r>
-              <a:rPr sz="1600" b="0">
-                <a:solidFill>
-                  <a:srgbClr val="0000FF"/>
-                </a:solidFill>
-              </a:rPr>
-              <a:t>Workshop Guide → Section 2</a:t>
-            </a:r>
-          </a:p>
-        </p:txBody>
-      </p:sp>
-    </p:spTree>
-  </p:cSld>
-  <p:clrMapOvr>
-    <a:masterClrMapping/>
-  </p:clrMapOvr>
-  <p:transition xmlns:p14="http://schemas.microsoft.com/office/powerpoint/2010/main" spd="med" advClick="1"/>
-</p:sld>
-</file>
-
-<file path=ppt/slides/slide8.xml><?xml version="1.0" encoding="utf-8"?>
-<p:sld xmlns:a="http://schemas.openxmlformats.org/drawingml/2006/main" xmlns:r="http://schemas.openxmlformats.org/officeDocument/2006/relationships" xmlns:p="http://schemas.openxmlformats.org/presentationml/2006/main" xmlns:m="http://schemas.openxmlformats.org/officeDocument/2006/math" xmlns:a14="http://schemas.microsoft.com/office/drawing/2010/main" showMasterSp="1" showMasterPhAnim="1">
-  <p:cSld>
-    <p:spTree>
-      <p:nvGrpSpPr>
-        <p:cNvPr id="1" name=""/>
-        <p:cNvGrpSpPr/>
-        <p:nvPr/>
-      </p:nvGrpSpPr>
-      <p:grpSpPr>
-        <a:xfrm>
-          <a:off x="0" y="0"/>
-          <a:ext cx="0" cy="0"/>
-          <a:chOff x="0" y="0"/>
-          <a:chExt cx="0" cy="0"/>
-        </a:xfrm>
-      </p:grpSpPr>
-      <p:sp>
-        <p:nvSpPr>
-          <p:cNvPr id="2" name="Rectangle 1"/>
-          <p:cNvSpPr/>
-          <p:nvPr/>
-        </p:nvSpPr>
-        <p:spPr>
-          <a:xfrm>
-            <a:off x="-1" y="0"/>
-            <a:ext cx="12191697" cy="1005839"/>
-          </a:xfrm>
-          <a:prstGeom prst="rect">
-            <a:avLst/>
-          </a:prstGeom>
-          <a:solidFill>
-            <a:srgbClr val="2D5F7C"/>
-          </a:solidFill>
-          <a:ln>
-            <a:noFill/>
-          </a:ln>
-          <a:effectLst/>
-        </p:spPr>
-        <p:style>
-          <a:lnRef idx="1">
-            <a:schemeClr val="accent1"/>
-          </a:lnRef>
-          <a:fillRef idx="3">
-            <a:schemeClr val="accent1"/>
-          </a:fillRef>
-          <a:effectRef idx="2">
-            <a:schemeClr val="accent1"/>
-          </a:effectRef>
-          <a:fontRef idx="minor">
-            <a:schemeClr val="lt1"/>
-          </a:fontRef>
-        </p:style>
-        <p:txBody>
-          <a:bodyPr rtlCol="0" anchor="ctr"/>
-          <a:lstStyle/>
-          <a:p>
-            <a:pPr algn="ctr"/>
-          </a:p>
-        </p:txBody>
-      </p:sp>
-      <p:sp>
-        <p:nvSpPr>
-          <p:cNvPr id="3" name="Rectangle 2"/>
-          <p:cNvSpPr/>
-          <p:nvPr/>
-        </p:nvSpPr>
-        <p:spPr>
-          <a:xfrm>
-            <a:off x="640080" y="1371600"/>
-            <a:ext cx="5486401" cy="4114800"/>
-          </a:xfrm>
-          <a:prstGeom prst="rect">
-            <a:avLst/>
-          </a:prstGeom>
-          <a:solidFill>
-            <a:srgbClr val="F0F4F8"/>
-          </a:solidFill>
-          <a:ln>
-            <a:noFill/>
-          </a:ln>
-          <a:effectLst/>
-        </p:spPr>
-        <p:style>
-          <a:lnRef idx="1">
-            <a:schemeClr val="accent1"/>
-          </a:lnRef>
-          <a:fillRef idx="3">
-            <a:schemeClr val="accent1"/>
-          </a:fillRef>
-          <a:effectRef idx="2">
-            <a:schemeClr val="accent1"/>
-          </a:effectRef>
-          <a:fontRef idx="minor">
-            <a:schemeClr val="lt1"/>
-          </a:fontRef>
-        </p:style>
-        <p:txBody>
-          <a:bodyPr rtlCol="0" anchor="ctr"/>
-          <a:lstStyle/>
-          <a:p>
-            <a:pPr algn="ctr"/>
-          </a:p>
-        </p:txBody>
-      </p:sp>
-      <p:sp>
-        <p:nvSpPr>
-          <p:cNvPr id="4" name="Rectangle 3"/>
-          <p:cNvSpPr/>
-          <p:nvPr/>
-        </p:nvSpPr>
-        <p:spPr>
-          <a:xfrm>
-            <a:off x="640080" y="1371600"/>
-            <a:ext cx="50801" cy="4114800"/>
-          </a:xfrm>
-          <a:prstGeom prst="rect">
-            <a:avLst/>
-          </a:prstGeom>
-          <a:solidFill>
-            <a:srgbClr val="2D5F7C"/>
-          </a:solidFill>
-          <a:ln>
-            <a:noFill/>
-          </a:ln>
-          <a:effectLst/>
-        </p:spPr>
-        <p:style>
-          <a:lnRef idx="1">
-            <a:schemeClr val="accent1"/>
-          </a:lnRef>
-          <a:fillRef idx="3">
-            <a:schemeClr val="accent1"/>
-          </a:fillRef>
-          <a:effectRef idx="2">
-            <a:schemeClr val="accent1"/>
-          </a:effectRef>
-          <a:fontRef idx="minor">
-            <a:schemeClr val="lt1"/>
-          </a:fontRef>
-        </p:style>
-        <p:txBody>
-          <a:bodyPr rtlCol="0" anchor="ctr"/>
-          <a:lstStyle/>
-          <a:p>
-            <a:pPr algn="ctr"/>
-          </a:p>
-        </p:txBody>
-      </p:sp>
-      <p:sp>
-        <p:nvSpPr>
-          <p:cNvPr id="5" name="Rectangle 4"/>
-          <p:cNvSpPr/>
-          <p:nvPr/>
-        </p:nvSpPr>
-        <p:spPr>
-          <a:xfrm>
-            <a:off x="6583680" y="1371600"/>
-            <a:ext cx="5029201" cy="4114800"/>
-          </a:xfrm>
-          <a:prstGeom prst="rect">
-            <a:avLst/>
-          </a:prstGeom>
-          <a:solidFill>
-            <a:srgbClr val="FDF6F0"/>
-          </a:solidFill>
-          <a:ln>
-            <a:noFill/>
-          </a:ln>
-          <a:effectLst/>
-        </p:spPr>
-        <p:style>
-          <a:lnRef idx="1">
-            <a:schemeClr val="accent1"/>
-          </a:lnRef>
-          <a:fillRef idx="3">
-            <a:schemeClr val="accent1"/>
-          </a:fillRef>
-          <a:effectRef idx="2">
-            <a:schemeClr val="accent1"/>
-          </a:effectRef>
-          <a:fontRef idx="minor">
-            <a:schemeClr val="lt1"/>
-          </a:fontRef>
-        </p:style>
-        <p:txBody>
-          <a:bodyPr rtlCol="0" anchor="ctr"/>
-          <a:lstStyle/>
-          <a:p>
-            <a:pPr algn="ctr"/>
-          </a:p>
-        </p:txBody>
-      </p:sp>
-      <p:sp>
-        <p:nvSpPr>
-          <p:cNvPr id="6" name="Rectangle 5"/>
-          <p:cNvSpPr/>
-          <p:nvPr/>
-        </p:nvSpPr>
-        <p:spPr>
-          <a:xfrm>
-            <a:off x="6583680" y="1371600"/>
-            <a:ext cx="50801" cy="4114800"/>
-          </a:xfrm>
-          <a:prstGeom prst="rect">
-            <a:avLst/>
-          </a:prstGeom>
-          <a:solidFill>
-            <a:srgbClr val="E8833A"/>
-          </a:solidFill>
-          <a:ln>
-            <a:noFill/>
-          </a:ln>
-          <a:effectLst/>
-        </p:spPr>
-        <p:style>
-          <a:lnRef idx="1">
-            <a:schemeClr val="accent1"/>
-          </a:lnRef>
-          <a:fillRef idx="3">
-            <a:schemeClr val="accent1"/>
-          </a:fillRef>
-          <a:effectRef idx="2">
-            <a:schemeClr val="accent1"/>
-          </a:effectRef>
-          <a:fontRef idx="minor">
-            <a:schemeClr val="lt1"/>
-          </a:fontRef>
-        </p:style>
-        <p:txBody>
-          <a:bodyPr rtlCol="0" anchor="ctr"/>
-          <a:lstStyle/>
-          <a:p>
-            <a:pPr algn="ctr"/>
-          </a:p>
-        </p:txBody>
-      </p:sp>
-      <p:sp>
-        <p:nvSpPr>
-          <p:cNvPr id="7" name="TextBox 6"/>
-          <p:cNvSpPr txBox="1"/>
-          <p:nvPr/>
-        </p:nvSpPr>
-        <p:spPr>
-          <a:xfrm>
-            <a:off x="502919" y="182879"/>
-            <a:ext cx="11155682" cy="444759"/>
-          </a:xfrm>
-          <a:prstGeom prst="rect">
-            <a:avLst/>
-          </a:prstGeom>
-          <a:noFill/>
-        </p:spPr>
-        <p:txBody>
-          <a:bodyPr wrap="square">
-            <a:spAutoFit/>
-          </a:bodyPr>
-          <a:lstStyle/>
-          <a:p>
-            <a:r>
-              <a:rPr sz="2800" b="1">
-                <a:solidFill>
-                  <a:srgbClr val="FFFFFF"/>
-                </a:solidFill>
-              </a:rPr>
-              <a:t>The Elephant: Nobody Wrote This Case</a:t>
-            </a:r>
-          </a:p>
-        </p:txBody>
-      </p:sp>
-      <p:sp>
-        <p:nvSpPr>
-          <p:cNvPr id="8" name="TextBox 7"/>
-          <p:cNvSpPr txBox="1"/>
-          <p:nvPr/>
-        </p:nvSpPr>
-        <p:spPr>
-          <a:xfrm>
-            <a:off x="502919" y="1097280"/>
-            <a:ext cx="11155682" cy="300594"/>
-          </a:xfrm>
-          <a:prstGeom prst="rect">
-            <a:avLst/>
-          </a:prstGeom>
-          <a:noFill/>
-        </p:spPr>
-        <p:txBody>
-          <a:bodyPr wrap="square">
-            <a:spAutoFit/>
-          </a:bodyPr>
-          <a:lstStyle/>
-          <a:p>
-            <a:r>
-              <a:rPr sz="1600" b="0">
-                <a:solidFill>
-                  <a:srgbClr val="5B6B7C"/>
-                </a:solidFill>
-              </a:rPr>
-              <a:t>Fast, realistic, and unverifiable</a:t>
-            </a:r>
-          </a:p>
-        </p:txBody>
-      </p:sp>
-      <p:sp>
-        <p:nvSpPr>
-          <p:cNvPr id="9" name="TextBox 8"/>
-          <p:cNvSpPr txBox="1"/>
-          <p:nvPr/>
-        </p:nvSpPr>
-        <p:spPr>
-          <a:xfrm>
-            <a:off x="960119" y="1554480"/>
-            <a:ext cx="4937762" cy="225708"/>
-          </a:xfrm>
-          <a:prstGeom prst="rect">
-            <a:avLst/>
-          </a:prstGeom>
-          <a:noFill/>
-        </p:spPr>
-        <p:txBody>
-          <a:bodyPr wrap="square">
-            <a:spAutoFit/>
-          </a:bodyPr>
-          <a:lstStyle/>
-          <a:p>
-            <a:r>
-              <a:rPr sz="1100" b="1">
-                <a:solidFill>
-                  <a:srgbClr val="2D5F7C"/>
-                </a:solidFill>
-              </a:rPr>
-              <a:t>THE RISK</a:t>
-            </a:r>
-          </a:p>
-        </p:txBody>
-      </p:sp>
-      <p:sp>
-        <p:nvSpPr>
-          <p:cNvPr id="10" name="TextBox 9"/>
-          <p:cNvSpPr txBox="1"/>
-          <p:nvPr/>
-        </p:nvSpPr>
-        <p:spPr>
-          <a:xfrm>
-            <a:off x="960119" y="1920239"/>
-            <a:ext cx="4937762" cy="2301589"/>
-          </a:xfrm>
-          <a:prstGeom prst="rect">
-            <a:avLst/>
-          </a:prstGeom>
-          <a:noFill/>
-        </p:spPr>
-        <p:txBody>
-          <a:bodyPr wrap="square">
-            <a:spAutoFit/>
-          </a:bodyPr>
-          <a:lstStyle/>
-          <a:p>
-            <a:r>
-              <a:rPr sz="1800" b="0">
-                <a:solidFill>
-                  <a:srgbClr val="1A2332"/>
-                </a:solidFill>
-              </a:rPr>
-              <a:t>• Every run is a fresh, unreviewed case</a:t>
-            </a:r>
-          </a:p>
-          <a:p>
-            <a:pPr>
-              <a:spcBef>
-                <a:spcPts val="1000"/>
-              </a:spcBef>
-            </a:pPr>
-            <a:r>
-              <a:rPr sz="1800" b="0">
-                <a:solidFill>
-                  <a:srgbClr val="1A2332"/>
-                </a:solidFill>
-              </a:rPr>
-              <a:t>• No source. No citation. No reviewer.</a:t>
-            </a:r>
-          </a:p>
-          <a:p>
-            <a:pPr>
-              <a:spcBef>
-                <a:spcPts val="1000"/>
-              </a:spcBef>
-            </a:pPr>
-            <a:r>
-              <a:rPr sz="1800" b="0">
-                <a:solidFill>
-                  <a:srgbClr val="1A2332"/>
-                </a:solidFill>
-              </a:rPr>
-              <a:t>• Would you sign your name to it?</a:t>
-            </a:r>
-          </a:p>
-        </p:txBody>
-      </p:sp>
-      <p:sp>
-        <p:nvSpPr>
-          <p:cNvPr id="11" name="TextBox 10"/>
-          <p:cNvSpPr txBox="1"/>
-          <p:nvPr/>
-        </p:nvSpPr>
-        <p:spPr>
-          <a:xfrm>
-            <a:off x="6903719" y="1554480"/>
-            <a:ext cx="4480562" cy="225708"/>
-          </a:xfrm>
-          <a:prstGeom prst="rect">
-            <a:avLst/>
-          </a:prstGeom>
-          <a:noFill/>
-        </p:spPr>
-        <p:txBody>
-          <a:bodyPr wrap="square">
-            <a:spAutoFit/>
-          </a:bodyPr>
-          <a:lstStyle/>
-          <a:p>
-            <a:r>
-              <a:rPr sz="1100" b="1">
-                <a:solidFill>
-                  <a:srgbClr val="E8833A"/>
-                </a:solidFill>
-              </a:rPr>
-              <a:t>THE STAKES</a:t>
-            </a:r>
-          </a:p>
-        </p:txBody>
-      </p:sp>
-      <p:sp>
-        <p:nvSpPr>
-          <p:cNvPr id="12" name="TextBox 11"/>
-          <p:cNvSpPr txBox="1"/>
-          <p:nvPr/>
-        </p:nvSpPr>
-        <p:spPr>
-          <a:xfrm>
-            <a:off x="6903719" y="1920239"/>
-            <a:ext cx="4480562" cy="2301589"/>
-          </a:xfrm>
-          <a:prstGeom prst="rect">
-            <a:avLst/>
-          </a:prstGeom>
-          <a:noFill/>
-        </p:spPr>
-        <p:txBody>
-          <a:bodyPr wrap="square">
-            <a:spAutoFit/>
-          </a:bodyPr>
-          <a:lstStyle/>
-          <a:p>
-            <a:r>
-              <a:rPr sz="1800" b="0">
-                <a:solidFill>
-                  <a:srgbClr val="1A2332"/>
-                </a:solidFill>
-              </a:rPr>
-              <a:t>An error propagates to every learner who meets it.</a:t>
-            </a:r>
-          </a:p>
-          <a:p>
-            <a:pPr>
-              <a:spcBef>
-                <a:spcPts val="1000"/>
-              </a:spcBef>
-            </a:pPr>
-            <a:r>
-              <a:rPr sz="1800" b="0">
-                <a:solidFill>
-                  <a:srgbClr val="1A2332"/>
-                </a:solidFill>
-              </a:rPr>
-              <a:t>The pitfall scales with the stakes: dosing, step order, discharge instructions.</a:t>
-            </a:r>
-          </a:p>
-          <a:p>
-            <a:pPr>
-              <a:spcBef>
-                <a:spcPts val="1000"/>
-              </a:spcBef>
-            </a:pPr>
-            <a:r>
-              <a:rPr sz="1800" b="0">
-                <a:solidFill>
-                  <a:srgbClr val="1A2332"/>
-                </a:solidFill>
-              </a:rPr>
-              <a:t>Objective 2 is how we get realism and verifiability.</a:t>
-            </a:r>
-          </a:p>
-        </p:txBody>
-      </p:sp>
-      <p:sp>
-        <p:nvSpPr>
-          <p:cNvPr id="13" name="TextBox 12"/>
-          <p:cNvSpPr txBox="1"/>
-          <p:nvPr/>
-        </p:nvSpPr>
-        <p:spPr>
-          <a:xfrm>
-            <a:off x="502919" y="5715000"/>
-            <a:ext cx="11155682" cy="300594"/>
-          </a:xfrm>
-          <a:prstGeom prst="rect">
-            <a:avLst/>
-          </a:prstGeom>
-          <a:noFill/>
-        </p:spPr>
-        <p:txBody>
-          <a:bodyPr wrap="square">
-            <a:spAutoFit/>
-          </a:bodyPr>
-          <a:lstStyle/>
-          <a:p>
-            <a:r>
-              <a:rPr sz="1600" b="0">
-                <a:solidFill>
-                  <a:srgbClr val="0000FF"/>
-                </a:solidFill>
-              </a:rPr>
-              <a:t>Workshop Guide → Section 4 (Beyond the Case)</a:t>
-            </a:r>
-          </a:p>
-        </p:txBody>
-      </p:sp>
-    </p:spTree>
-  </p:cSld>
-  <p:clrMapOvr>
-    <a:masterClrMapping/>
-  </p:clrMapOvr>
-  <p:transition xmlns:p14="http://schemas.microsoft.com/office/powerpoint/2010/main" spd="med" advClick="1"/>
-</p:sld>
-</file>
-
-<file path=ppt/slides/slide9.xml><?xml version="1.0" encoding="utf-8"?>
-<p:sld xmlns:a="http://schemas.openxmlformats.org/drawingml/2006/main" xmlns:r="http://schemas.openxmlformats.org/officeDocument/2006/relationships" xmlns:p="http://schemas.openxmlformats.org/presentationml/2006/main" xmlns:m="http://schemas.openxmlformats.org/officeDocument/2006/math" xmlns:a14="http://schemas.microsoft.com/office/drawing/2010/main" showMasterSp="1" showMasterPhAnim="1">
-  <p:cSld>
-    <p:spTree>
-      <p:nvGrpSpPr>
-        <p:cNvPr id="1" name=""/>
-        <p:cNvGrpSpPr/>
-        <p:nvPr/>
-      </p:nvGrpSpPr>
-      <p:grpSpPr>
-        <a:xfrm>
-          <a:off x="0" y="0"/>
-          <a:ext cx="0" cy="0"/>
-          <a:chOff x="0" y="0"/>
-          <a:chExt cx="0" cy="0"/>
-        </a:xfrm>
-      </p:grpSpPr>
-      <p:sp>
-        <p:nvSpPr>
-          <p:cNvPr id="2" name="Rectangle 1"/>
-          <p:cNvSpPr/>
-          <p:nvPr/>
-        </p:nvSpPr>
-        <p:spPr>
-          <a:xfrm>
-            <a:off x="-1" y="0"/>
-            <a:ext cx="12191697" cy="1005839"/>
-          </a:xfrm>
-          <a:prstGeom prst="rect">
-            <a:avLst/>
-          </a:prstGeom>
-          <a:solidFill>
-            <a:srgbClr val="2D5F7C"/>
-          </a:solidFill>
-          <a:ln>
-            <a:noFill/>
-          </a:ln>
-          <a:effectLst/>
-        </p:spPr>
-        <p:style>
-          <a:lnRef idx="1">
-            <a:schemeClr val="accent1"/>
-          </a:lnRef>
-          <a:fillRef idx="3">
-            <a:schemeClr val="accent1"/>
-          </a:fillRef>
-          <a:effectRef idx="2">
-            <a:schemeClr val="accent1"/>
-          </a:effectRef>
-          <a:fontRef idx="minor">
-            <a:schemeClr val="lt1"/>
-          </a:fontRef>
-        </p:style>
-        <p:txBody>
-          <a:bodyPr rtlCol="0" anchor="ctr"/>
-          <a:lstStyle/>
-          <a:p>
-            <a:pPr algn="ctr"/>
-          </a:p>
-        </p:txBody>
-      </p:sp>
-      <p:sp>
-        <p:nvSpPr>
-          <p:cNvPr id="3" name="Rectangle 2"/>
-          <p:cNvSpPr/>
-          <p:nvPr/>
-        </p:nvSpPr>
-        <p:spPr>
-          <a:xfrm>
-            <a:off x="640080" y="1371600"/>
-            <a:ext cx="5486401" cy="4114800"/>
-          </a:xfrm>
-          <a:prstGeom prst="rect">
-            <a:avLst/>
-          </a:prstGeom>
-          <a:solidFill>
-            <a:srgbClr val="F0F4F8"/>
-          </a:solidFill>
-          <a:ln>
-            <a:noFill/>
-          </a:ln>
-          <a:effectLst/>
-        </p:spPr>
-        <p:style>
-          <a:lnRef idx="1">
-            <a:schemeClr val="accent1"/>
-          </a:lnRef>
-          <a:fillRef idx="3">
-            <a:schemeClr val="accent1"/>
-          </a:fillRef>
-          <a:effectRef idx="2">
-            <a:schemeClr val="accent1"/>
-          </a:effectRef>
-          <a:fontRef idx="minor">
-            <a:schemeClr val="lt1"/>
-          </a:fontRef>
-        </p:style>
-        <p:txBody>
-          <a:bodyPr rtlCol="0" anchor="ctr"/>
-          <a:lstStyle/>
-          <a:p>
-            <a:pPr algn="ctr"/>
-          </a:p>
-        </p:txBody>
-      </p:sp>
-      <p:sp>
-        <p:nvSpPr>
-          <p:cNvPr id="4" name="Rectangle 3"/>
-          <p:cNvSpPr/>
-          <p:nvPr/>
-        </p:nvSpPr>
-        <p:spPr>
-          <a:xfrm>
-            <a:off x="640080" y="1371600"/>
-            <a:ext cx="50801" cy="4114800"/>
-          </a:xfrm>
-          <a:prstGeom prst="rect">
-            <a:avLst/>
-          </a:prstGeom>
-          <a:solidFill>
-            <a:srgbClr val="2D5F7C"/>
-          </a:solidFill>
-          <a:ln>
-            <a:noFill/>
-          </a:ln>
-          <a:effectLst/>
-        </p:spPr>
-        <p:style>
-          <a:lnRef idx="1">
-            <a:schemeClr val="accent1"/>
-          </a:lnRef>
-          <a:fillRef idx="3">
-            <a:schemeClr val="accent1"/>
-          </a:fillRef>
-          <a:effectRef idx="2">
-            <a:schemeClr val="accent1"/>
-          </a:effectRef>
-          <a:fontRef idx="minor">
-            <a:schemeClr val="lt1"/>
-          </a:fontRef>
-        </p:style>
-        <p:txBody>
-          <a:bodyPr rtlCol="0" anchor="ctr"/>
-          <a:lstStyle/>
-          <a:p>
-            <a:pPr algn="ctr"/>
-          </a:p>
-        </p:txBody>
-      </p:sp>
-      <p:sp>
-        <p:nvSpPr>
-          <p:cNvPr id="5" name="Rectangle 4"/>
-          <p:cNvSpPr/>
-          <p:nvPr/>
-        </p:nvSpPr>
-        <p:spPr>
-          <a:xfrm>
-            <a:off x="6583680" y="1371600"/>
-            <a:ext cx="5029201" cy="4114800"/>
-          </a:xfrm>
-          <a:prstGeom prst="rect">
-            <a:avLst/>
-          </a:prstGeom>
-          <a:solidFill>
-            <a:srgbClr val="FDF6F0"/>
-          </a:solidFill>
-          <a:ln>
-            <a:noFill/>
-          </a:ln>
-          <a:effectLst/>
-        </p:spPr>
-        <p:style>
-          <a:lnRef idx="1">
-            <a:schemeClr val="accent1"/>
-          </a:lnRef>
-          <a:fillRef idx="3">
-            <a:schemeClr val="accent1"/>
-          </a:fillRef>
-          <a:effectRef idx="2">
-            <a:schemeClr val="accent1"/>
-          </a:effectRef>
-          <a:fontRef idx="minor">
-            <a:schemeClr val="lt1"/>
-          </a:fontRef>
-        </p:style>
-        <p:txBody>
-          <a:bodyPr rtlCol="0" anchor="ctr"/>
-          <a:lstStyle/>
-          <a:p>
-            <a:pPr algn="ctr"/>
-          </a:p>
-        </p:txBody>
-      </p:sp>
-      <p:sp>
-        <p:nvSpPr>
-          <p:cNvPr id="6" name="Rectangle 5"/>
-          <p:cNvSpPr/>
-          <p:nvPr/>
-        </p:nvSpPr>
-        <p:spPr>
-          <a:xfrm>
-            <a:off x="6583680" y="1371600"/>
-            <a:ext cx="50801" cy="4114800"/>
-          </a:xfrm>
-          <a:prstGeom prst="rect">
-            <a:avLst/>
-          </a:prstGeom>
-          <a:solidFill>
-            <a:srgbClr val="E8833A"/>
-          </a:solidFill>
-          <a:ln>
-            <a:noFill/>
-          </a:ln>
-          <a:effectLst/>
-        </p:spPr>
-        <p:style>
-          <a:lnRef idx="1">
-            <a:schemeClr val="accent1"/>
-          </a:lnRef>
-          <a:fillRef idx="3">
-            <a:schemeClr val="accent1"/>
-          </a:fillRef>
-          <a:effectRef idx="2">
-            <a:schemeClr val="accent1"/>
-          </a:effectRef>
-          <a:fontRef idx="minor">
-            <a:schemeClr val="lt1"/>
-          </a:fontRef>
-        </p:style>
-        <p:txBody>
-          <a:bodyPr rtlCol="0" anchor="ctr"/>
-          <a:lstStyle/>
-          <a:p>
-            <a:pPr algn="ctr"/>
-          </a:p>
-        </p:txBody>
-      </p:sp>
-      <p:sp>
-        <p:nvSpPr>
-          <p:cNvPr id="7" name="TextBox 6"/>
-          <p:cNvSpPr txBox="1"/>
-          <p:nvPr/>
-        </p:nvSpPr>
-        <p:spPr>
-          <a:xfrm>
-            <a:off x="502919" y="182879"/>
-            <a:ext cx="11155682" cy="444759"/>
-          </a:xfrm>
-          <a:prstGeom prst="rect">
-            <a:avLst/>
-          </a:prstGeom>
-          <a:noFill/>
-        </p:spPr>
-        <p:txBody>
-          <a:bodyPr wrap="square">
-            <a:spAutoFit/>
-          </a:bodyPr>
-          <a:lstStyle/>
-          <a:p>
-            <a:r>
-              <a:rPr sz="2800" b="1">
-                <a:solidFill>
-                  <a:srgbClr val="FFFFFF"/>
-                </a:solidFill>
-              </a:rPr>
-              <a:t>Where Ground Truth Lives</a:t>
-            </a:r>
-          </a:p>
-        </p:txBody>
-      </p:sp>
-      <p:sp>
-        <p:nvSpPr>
-          <p:cNvPr id="8" name="TextBox 7"/>
-          <p:cNvSpPr txBox="1"/>
-          <p:nvPr/>
-        </p:nvSpPr>
-        <p:spPr>
-          <a:xfrm>
-            <a:off x="502919" y="1097280"/>
-            <a:ext cx="11155682" cy="300594"/>
-          </a:xfrm>
-          <a:prstGeom prst="rect">
-            <a:avLst/>
-          </a:prstGeom>
-          <a:noFill/>
-        </p:spPr>
-        <p:txBody>
-          <a:bodyPr wrap="square">
-            <a:spAutoFit/>
-          </a:bodyPr>
-          <a:lstStyle/>
-          <a:p>
-            <a:r>
-              <a:rPr sz="1600" b="0">
-                <a:solidFill>
-                  <a:srgbClr val="5B6B7C"/>
-                </a:solidFill>
-              </a:rPr>
-              <a:t>Whatever you teach, someone already published it</a:t>
-            </a:r>
-          </a:p>
-        </p:txBody>
-      </p:sp>
-      <p:sp>
-        <p:nvSpPr>
-          <p:cNvPr id="9" name="TextBox 8"/>
-          <p:cNvSpPr txBox="1"/>
-          <p:nvPr/>
-        </p:nvSpPr>
-        <p:spPr>
-          <a:xfrm>
-            <a:off x="960119" y="1554480"/>
-            <a:ext cx="4937762" cy="225708"/>
-          </a:xfrm>
-          <a:prstGeom prst="rect">
-            <a:avLst/>
-          </a:prstGeom>
-          <a:noFill/>
-        </p:spPr>
-        <p:txBody>
-          <a:bodyPr wrap="square">
-            <a:spAutoFit/>
-          </a:bodyPr>
-          <a:lstStyle/>
-          <a:p>
-            <a:r>
-              <a:rPr sz="1100" b="1">
-                <a:solidFill>
-                  <a:srgbClr val="2D5F7C"/>
-                </a:solidFill>
-              </a:rPr>
-              <a:t>GROUNDING IS BUILT IN NOW</a:t>
-            </a:r>
-          </a:p>
-        </p:txBody>
-      </p:sp>
-      <p:sp>
-        <p:nvSpPr>
-          <p:cNvPr id="10" name="TextBox 9"/>
-          <p:cNvSpPr txBox="1"/>
-          <p:nvPr/>
-        </p:nvSpPr>
-        <p:spPr>
-          <a:xfrm>
-            <a:off x="960119" y="1920239"/>
-            <a:ext cx="4937762" cy="2301589"/>
-          </a:xfrm>
-          <a:prstGeom prst="rect">
-            <a:avLst/>
-          </a:prstGeom>
-          <a:noFill/>
-        </p:spPr>
-        <p:txBody>
-          <a:bodyPr wrap="square">
-            <a:spAutoFit/>
-          </a:bodyPr>
-          <a:lstStyle/>
-          <a:p>
-            <a:r>
-              <a:rPr sz="1800" b="0">
-                <a:solidFill>
-                  <a:srgbClr val="1A2332"/>
-                </a:solidFill>
-              </a:rPr>
-              <a:t>• ChatGPT Projects: your files and instructions</a:t>
-            </a:r>
-          </a:p>
-          <a:p>
-            <a:pPr>
-              <a:spcBef>
-                <a:spcPts val="1000"/>
-              </a:spcBef>
-            </a:pPr>
-            <a:r>
-              <a:rPr sz="1800" b="0">
-                <a:solidFill>
-                  <a:srgbClr val="1A2332"/>
-                </a:solidFill>
-              </a:rPr>
-              <a:t>• Claude: point a project at a folder</a:t>
-            </a:r>
-          </a:p>
-          <a:p>
-            <a:pPr>
-              <a:spcBef>
-                <a:spcPts val="1000"/>
-              </a:spcBef>
-            </a:pPr>
-            <a:r>
-              <a:rPr sz="1800" b="0">
-                <a:solidFill>
-                  <a:srgbClr val="1A2332"/>
-                </a:solidFill>
-              </a:rPr>
-              <a:t>• Gemini: grounded in your Google Drive</a:t>
-            </a:r>
-          </a:p>
-        </p:txBody>
-      </p:sp>
-      <p:sp>
-        <p:nvSpPr>
-          <p:cNvPr id="11" name="TextBox 10"/>
-          <p:cNvSpPr txBox="1"/>
-          <p:nvPr/>
-        </p:nvSpPr>
-        <p:spPr>
-          <a:xfrm>
-            <a:off x="6903719" y="1554480"/>
-            <a:ext cx="4480562" cy="225708"/>
-          </a:xfrm>
-          <a:prstGeom prst="rect">
-            <a:avLst/>
-          </a:prstGeom>
-          <a:noFill/>
-        </p:spPr>
-        <p:txBody>
-          <a:bodyPr wrap="square">
-            <a:spAutoFit/>
-          </a:bodyPr>
-          <a:lstStyle/>
-          <a:p>
-            <a:r>
-              <a:rPr sz="1100" b="1">
-                <a:solidFill>
-                  <a:srgbClr val="E8833A"/>
-                </a:solidFill>
-              </a:rPr>
-              <a:t>TODAY'S RUNNING EXAMPLE</a:t>
-            </a:r>
-          </a:p>
-        </p:txBody>
-      </p:sp>
-      <p:sp>
-        <p:nvSpPr>
-          <p:cNvPr id="12" name="TextBox 11"/>
-          <p:cNvSpPr txBox="1"/>
-          <p:nvPr/>
-        </p:nvSpPr>
-        <p:spPr>
-          <a:xfrm>
-            <a:off x="6903719" y="1920239"/>
-            <a:ext cx="4480562" cy="2301589"/>
-          </a:xfrm>
-          <a:prstGeom prst="rect">
-            <a:avLst/>
-          </a:prstGeom>
-          <a:noFill/>
-        </p:spPr>
-        <p:txBody>
-          <a:bodyPr wrap="square">
-            <a:spAutoFit/>
-          </a:bodyPr>
-          <a:lstStyle/>
-          <a:p>
-            <a:r>
-              <a:rPr sz="1800" b="0">
-                <a:solidFill>
-                  <a:srgbClr val="1A2332"/>
-                </a:solidFill>
-              </a:rPr>
-              <a:t>A published MedEdPORTAL case: sore throat to peritonsillar abscess, with a benzocaine twist.</a:t>
-            </a:r>
-          </a:p>
-          <a:p>
-            <a:pPr>
-              <a:spcBef>
-                <a:spcPts val="1000"/>
-              </a:spcBef>
-            </a:pPr>
-            <a:r>
-              <a:rPr sz="1800" b="0">
-                <a:solidFill>
-                  <a:srgbClr val="1A2332"/>
-                </a:solidFill>
-              </a:rPr>
-              <a:t>Six files, peer-reviewed, downloadable in the guide.</a:t>
-            </a:r>
-          </a:p>
-          <a:p>
-            <a:pPr>
-              <a:spcBef>
-                <a:spcPts val="1000"/>
-              </a:spcBef>
-            </a:pPr>
-            <a:r>
-              <a:rPr sz="1800" b="0">
-                <a:solidFill>
-                  <a:srgbClr val="1A2332"/>
-                </a:solidFill>
-              </a:rPr>
-              <a:t>NotebookLM is one easy dedicated example, demoing next.</a:t>
-            </a:r>
-          </a:p>
-        </p:txBody>
-      </p:sp>
-      <p:sp>
-        <p:nvSpPr>
-          <p:cNvPr id="13" name="TextBox 12"/>
-          <p:cNvSpPr txBox="1"/>
-          <p:nvPr/>
-        </p:nvSpPr>
-        <p:spPr>
-          <a:xfrm>
-            <a:off x="502919" y="5715000"/>
-            <a:ext cx="11155682" cy="300594"/>
-          </a:xfrm>
-          <a:prstGeom prst="rect">
-            <a:avLst/>
-          </a:prstGeom>
-          <a:noFill/>
-        </p:spPr>
-        <p:txBody>
-          <a:bodyPr wrap="square">
-            <a:spAutoFit/>
-          </a:bodyPr>
-          <a:lstStyle/>
-          <a:p>
-            <a:r>
-              <a:rPr sz="1600" b="0">
-                <a:solidFill>
-                  <a:srgbClr val="0000FF"/>
-                </a:solidFill>
-              </a:rPr>
-              <a:t>Workshop Guide → Sections 3 and 4 (tools, sources, case files)</a:t>
+              <a:t>Upload published sources, get cited answers, every time</a:t>
             </a:r>
           </a:p>
         </p:txBody>

--- a/Digital Learning Unlocked - Slide Deck.pptx
+++ b/Digital Learning Unlocked - Slide Deck.pptx
@@ -13,6 +13,7 @@
     <p:sldId id="258" r:id="rId10"/>
     <p:sldId id="259" r:id="rId11"/>
     <p:sldId id="260" r:id="rId12"/>
+    <p:sldId id="301" r:id="rId101"/>
     <p:sldId id="285" r:id="rId30"/>
     <p:sldId id="262" r:id="rId14"/>
     <p:sldId id="266" r:id="rId18"/>
@@ -2952,6 +2953,13 @@
 <file path=ppt/slides/slide10.xml><?xml version="1.0" encoding="utf-8"?>
 <p:sld xmlns:a="http://schemas.openxmlformats.org/drawingml/2006/main" xmlns:r="http://schemas.openxmlformats.org/officeDocument/2006/relationships" xmlns:p="http://schemas.openxmlformats.org/presentationml/2006/main" xmlns:m="http://schemas.openxmlformats.org/officeDocument/2006/math" xmlns:a14="http://schemas.microsoft.com/office/drawing/2010/main" showMasterSp="1" showMasterPhAnim="1">
   <p:cSld>
+    <p:bg>
+      <p:bgPr>
+        <a:solidFill>
+          <a:srgbClr val="2D5F7C"/>
+        </a:solidFill>
+      </p:bgPr>
+    </p:bg>
     <p:spTree>
       <p:nvGrpSpPr>
         <p:cNvPr id="1" name=""/>
@@ -2966,6 +2974,229 @@
           <a:chExt cx="0" cy="0"/>
         </a:xfrm>
       </p:grpSpPr>
+      <p:grpSp>
+        <p:nvGrpSpPr>
+          <p:cNvPr id="266" name="Oval 1"/>
+          <p:cNvGrpSpPr/>
+          <p:nvPr/>
+        </p:nvGrpSpPr>
+        <p:grpSpPr>
+          <a:xfrm>
+            <a:off x="914399" y="2285999"/>
+            <a:ext cx="1097282" cy="1097282"/>
+            <a:chOff x="0" y="0"/>
+            <a:chExt cx="1097280" cy="1097280"/>
+          </a:xfrm>
+        </p:grpSpPr>
+        <p:sp>
+          <p:nvSpPr>
+            <p:cNvPr id="264" name="Circle"/>
+            <p:cNvSpPr/>
+            <p:nvPr/>
+          </p:nvSpPr>
+          <p:spPr>
+            <a:xfrm>
+              <a:off x="-1" y="-1"/>
+              <a:ext cx="1097282" cy="1097282"/>
+            </a:xfrm>
+            <a:prstGeom prst="ellipse">
+              <a:avLst/>
+            </a:prstGeom>
+            <a:solidFill>
+              <a:srgbClr val="E8833A"/>
+            </a:solidFill>
+            <a:ln w="12700" cap="flat">
+              <a:noFill/>
+              <a:miter lim="400000"/>
+            </a:ln>
+            <a:effectLst>
+              <a:outerShdw sx="100000" sy="100000" kx="0" ky="0" algn="b" rotWithShape="0" blurRad="38100" dist="23000" dir="5400000">
+                <a:srgbClr val="000000">
+                  <a:alpha val="35000"/>
+                </a:srgbClr>
+              </a:outerShdw>
+            </a:effectLst>
+          </p:spPr>
+          <p:txBody>
+            <a:bodyPr wrap="square" lIns="45719" tIns="45719" rIns="45719" bIns="45719" numCol="1" anchor="ctr">
+              <a:noAutofit/>
+            </a:bodyPr>
+            <a:lstStyle/>
+            <a:p>
+              <a:pPr algn="ctr">
+                <a:defRPr b="1" sz="3600">
+                  <a:solidFill>
+                    <a:srgbClr val="FFFFFF"/>
+                  </a:solidFill>
+                </a:defRPr>
+              </a:pPr>
+            </a:p>
+          </p:txBody>
+        </p:sp>
+        <p:sp>
+          <p:nvSpPr>
+            <p:cNvPr id="265" name="5"/>
+            <p:cNvSpPr txBox="1"/>
+            <p:nvPr/>
+          </p:nvSpPr>
+          <p:spPr>
+            <a:xfrm>
+              <a:off x="206412" y="273972"/>
+              <a:ext cx="684456" cy="549336"/>
+            </a:xfrm>
+            <a:prstGeom prst="rect">
+              <a:avLst/>
+            </a:prstGeom>
+            <a:noFill/>
+            <a:ln w="12700" cap="flat">
+              <a:noFill/>
+              <a:miter lim="400000"/>
+            </a:ln>
+            <a:effectLst/>
+            <a:extLst>
+              <a:ext uri="{C572A759-6A51-4108-AA02-DFA0A04FC94B}">
+                <ma14:wrappingTextBoxFlag xmlns:ma14="http://schemas.microsoft.com/office/mac/drawingml/2011/main" val="1"/>
+              </a:ext>
+            </a:extLst>
+          </p:spPr>
+          <p:txBody>
+            <a:bodyPr wrap="square" lIns="45719" tIns="45719" rIns="45719" bIns="45719" numCol="1" anchor="ctr">
+              <a:spAutoFit/>
+            </a:bodyPr>
+            <a:lstStyle>
+              <a:lvl1pPr algn="ctr">
+                <a:defRPr b="1" sz="3600">
+                  <a:solidFill>
+                    <a:srgbClr val="FFFFFF"/>
+                  </a:solidFill>
+                </a:defRPr>
+              </a:lvl1pPr>
+            </a:lstStyle>
+            <a:p>
+              <a:pPr/>
+              <a:r>
+                <a:t>4</a:t>
+              </a:r>
+            </a:p>
+          </p:txBody>
+        </p:sp>
+      </p:grpSp>
+      <p:sp>
+        <p:nvSpPr>
+          <p:cNvPr id="267" name="TextBox 2"/>
+          <p:cNvSpPr txBox="1"/>
+          <p:nvPr/>
+        </p:nvSpPr>
+        <p:spPr>
+          <a:xfrm>
+            <a:off x="2331719" y="2286000"/>
+            <a:ext cx="8595362" cy="497047"/>
+          </a:xfrm>
+          <a:prstGeom prst="rect">
+            <a:avLst/>
+          </a:prstGeom>
+          <a:ln w="12700">
+            <a:miter lim="400000"/>
+          </a:ln>
+          <a:extLst>
+            <a:ext uri="{C572A759-6A51-4108-AA02-DFA0A04FC94B}">
+              <ma14:wrappingTextBoxFlag xmlns:ma14="http://schemas.microsoft.com/office/mac/drawingml/2011/main" val="1"/>
+            </a:ext>
+          </a:extLst>
+        </p:spPr>
+        <p:txBody>
+          <a:bodyPr lIns="45719" rIns="45719">
+            <a:spAutoFit/>
+          </a:bodyPr>
+          <a:lstStyle>
+            <a:lvl1pPr>
+              <a:defRPr b="1" sz="3200">
+                <a:solidFill>
+                  <a:srgbClr val="FFFFFF"/>
+                </a:solidFill>
+              </a:defRPr>
+            </a:lvl1pPr>
+          </a:lstStyle>
+          <a:p>
+            <a:pPr/>
+            <a:r>
+              <a:rPr/>
+              <a:t>Section 4: Grounded AI Workflow</a:t>
+            </a:r>
+          </a:p>
+        </p:txBody>
+      </p:sp>
+      <p:sp>
+        <p:nvSpPr>
+          <p:cNvPr id="268" name="TextBox 3"/>
+          <p:cNvSpPr txBox="1"/>
+          <p:nvPr/>
+        </p:nvSpPr>
+        <p:spPr>
+          <a:xfrm>
+            <a:off x="2331719" y="3200400"/>
+            <a:ext cx="8595362" cy="333088"/>
+          </a:xfrm>
+          <a:prstGeom prst="rect">
+            <a:avLst/>
+          </a:prstGeom>
+          <a:ln w="12700">
+            <a:miter lim="400000"/>
+          </a:ln>
+          <a:extLst>
+            <a:ext uri="{C572A759-6A51-4108-AA02-DFA0A04FC94B}">
+              <ma14:wrappingTextBoxFlag xmlns:ma14="http://schemas.microsoft.com/office/mac/drawingml/2011/main" val="1"/>
+            </a:ext>
+          </a:extLst>
+        </p:spPr>
+        <p:txBody>
+          <a:bodyPr lIns="45719" rIns="45719">
+            <a:spAutoFit/>
+          </a:bodyPr>
+          <a:lstStyle>
+            <a:lvl1pPr>
+              <a:defRPr>
+                <a:solidFill>
+                  <a:srgbClr val="F4A55A"/>
+                </a:solidFill>
+              </a:defRPr>
+            </a:lvl1pPr>
+          </a:lstStyle>
+          <a:p>
+            <a:pPr/>
+            <a:r>
+              <a:rPr/>
+              <a:t>Upload published sources, get cited answers, every time</a:t>
+            </a:r>
+          </a:p>
+        </p:txBody>
+      </p:sp>
+    </p:spTree>
+  </p:cSld>
+  <p:clrMapOvr>
+    <a:masterClrMapping/>
+  </p:clrMapOvr>
+  <p:transition xmlns:p14="http://schemas.microsoft.com/office/powerpoint/2010/main" spd="med" advClick="1"/>
+</p:sld>
+</file>
+
+<file path=ppt/slides/slide11.xml><?xml version="1.0" encoding="utf-8"?>
+<p:sld xmlns:a="http://schemas.openxmlformats.org/drawingml/2006/main" xmlns:r="http://schemas.openxmlformats.org/officeDocument/2006/relationships" xmlns:p="http://schemas.openxmlformats.org/presentationml/2006/main" xmlns:m="http://schemas.openxmlformats.org/officeDocument/2006/math" xmlns:a14="http://schemas.microsoft.com/office/drawing/2010/main" showMasterSp="1" showMasterPhAnim="1">
+  <p:cSld>
+    <p:spTree>
+      <p:nvGrpSpPr>
+        <p:cNvPr id="1" name=""/>
+        <p:cNvGrpSpPr/>
+        <p:nvPr/>
+      </p:nvGrpSpPr>
+      <p:grpSpPr>
+        <a:xfrm>
+          <a:off x="0" y="0"/>
+          <a:ext cx="0" cy="0"/>
+          <a:chOff x="0" y="0"/>
+          <a:chExt cx="0" cy="0"/>
+        </a:xfrm>
+      </p:grpSpPr>
       <p:sp>
         <p:nvSpPr>
           <p:cNvPr id="2" name="Rectangle 1"/>
@@ -3486,7 +3717,7 @@
 </p:sld>
 </file>
 
-<file path=ppt/slides/slide11.xml><?xml version="1.0" encoding="utf-8"?>
+<file path=ppt/slides/slide12.xml><?xml version="1.0" encoding="utf-8"?>
 <p:sld xmlns:a="http://schemas.openxmlformats.org/drawingml/2006/main" xmlns:r="http://schemas.openxmlformats.org/officeDocument/2006/relationships" xmlns:p="http://schemas.openxmlformats.org/presentationml/2006/main" xmlns:m="http://schemas.openxmlformats.org/officeDocument/2006/math" xmlns:a14="http://schemas.microsoft.com/office/drawing/2010/main" showMasterSp="1" showMasterPhAnim="1">
   <p:cSld>
     <p:spTree>
@@ -5046,543 +5277,6 @@
 </p:sld>
 </file>
 
-<file path=ppt/slides/slide12.xml><?xml version="1.0" encoding="utf-8"?>
-<p:sld xmlns:a="http://schemas.openxmlformats.org/drawingml/2006/main" xmlns:r="http://schemas.openxmlformats.org/officeDocument/2006/relationships" xmlns:p="http://schemas.openxmlformats.org/presentationml/2006/main" xmlns:m="http://schemas.openxmlformats.org/officeDocument/2006/math" xmlns:a14="http://schemas.microsoft.com/office/drawing/2010/main" showMasterSp="1" showMasterPhAnim="1">
-  <p:cSld>
-    <p:spTree>
-      <p:nvGrpSpPr>
-        <p:cNvPr id="1" name=""/>
-        <p:cNvGrpSpPr/>
-        <p:nvPr/>
-      </p:nvGrpSpPr>
-      <p:grpSpPr>
-        <a:xfrm>
-          <a:off x="0" y="0"/>
-          <a:ext cx="0" cy="0"/>
-          <a:chOff x="0" y="0"/>
-          <a:chExt cx="0" cy="0"/>
-        </a:xfrm>
-      </p:grpSpPr>
-      <p:sp>
-        <p:nvSpPr>
-          <p:cNvPr id="2" name="Rectangle 1"/>
-          <p:cNvSpPr/>
-          <p:nvPr/>
-        </p:nvSpPr>
-        <p:spPr>
-          <a:xfrm>
-            <a:off x="-1" y="0"/>
-            <a:ext cx="12191697" cy="1005839"/>
-          </a:xfrm>
-          <a:prstGeom prst="rect">
-            <a:avLst/>
-          </a:prstGeom>
-          <a:solidFill>
-            <a:srgbClr val="2D5F7C"/>
-          </a:solidFill>
-          <a:ln>
-            <a:noFill/>
-          </a:ln>
-          <a:effectLst/>
-        </p:spPr>
-        <p:style>
-          <a:lnRef idx="1">
-            <a:schemeClr val="accent1"/>
-          </a:lnRef>
-          <a:fillRef idx="3">
-            <a:schemeClr val="accent1"/>
-          </a:fillRef>
-          <a:effectRef idx="2">
-            <a:schemeClr val="accent1"/>
-          </a:effectRef>
-          <a:fontRef idx="minor">
-            <a:schemeClr val="lt1"/>
-          </a:fontRef>
-        </p:style>
-        <p:txBody>
-          <a:bodyPr rtlCol="0" anchor="ctr"/>
-          <a:lstStyle/>
-          <a:p>
-            <a:pPr algn="ctr"/>
-          </a:p>
-        </p:txBody>
-      </p:sp>
-      <p:sp>
-        <p:nvSpPr>
-          <p:cNvPr id="3" name="Rectangle 2"/>
-          <p:cNvSpPr/>
-          <p:nvPr/>
-        </p:nvSpPr>
-        <p:spPr>
-          <a:xfrm>
-            <a:off x="640080" y="1371600"/>
-            <a:ext cx="5486401" cy="4114800"/>
-          </a:xfrm>
-          <a:prstGeom prst="rect">
-            <a:avLst/>
-          </a:prstGeom>
-          <a:solidFill>
-            <a:srgbClr val="F0F4F8"/>
-          </a:solidFill>
-          <a:ln>
-            <a:noFill/>
-          </a:ln>
-          <a:effectLst/>
-        </p:spPr>
-        <p:style>
-          <a:lnRef idx="1">
-            <a:schemeClr val="accent1"/>
-          </a:lnRef>
-          <a:fillRef idx="3">
-            <a:schemeClr val="accent1"/>
-          </a:fillRef>
-          <a:effectRef idx="2">
-            <a:schemeClr val="accent1"/>
-          </a:effectRef>
-          <a:fontRef idx="minor">
-            <a:schemeClr val="lt1"/>
-          </a:fontRef>
-        </p:style>
-        <p:txBody>
-          <a:bodyPr rtlCol="0" anchor="ctr"/>
-          <a:lstStyle/>
-          <a:p>
-            <a:pPr algn="ctr"/>
-          </a:p>
-        </p:txBody>
-      </p:sp>
-      <p:sp>
-        <p:nvSpPr>
-          <p:cNvPr id="4" name="Rectangle 3"/>
-          <p:cNvSpPr/>
-          <p:nvPr/>
-        </p:nvSpPr>
-        <p:spPr>
-          <a:xfrm>
-            <a:off x="640080" y="1371600"/>
-            <a:ext cx="50801" cy="4114800"/>
-          </a:xfrm>
-          <a:prstGeom prst="rect">
-            <a:avLst/>
-          </a:prstGeom>
-          <a:solidFill>
-            <a:srgbClr val="2D5F7C"/>
-          </a:solidFill>
-          <a:ln>
-            <a:noFill/>
-          </a:ln>
-          <a:effectLst/>
-        </p:spPr>
-        <p:style>
-          <a:lnRef idx="1">
-            <a:schemeClr val="accent1"/>
-          </a:lnRef>
-          <a:fillRef idx="3">
-            <a:schemeClr val="accent1"/>
-          </a:fillRef>
-          <a:effectRef idx="2">
-            <a:schemeClr val="accent1"/>
-          </a:effectRef>
-          <a:fontRef idx="minor">
-            <a:schemeClr val="lt1"/>
-          </a:fontRef>
-        </p:style>
-        <p:txBody>
-          <a:bodyPr rtlCol="0" anchor="ctr"/>
-          <a:lstStyle/>
-          <a:p>
-            <a:pPr algn="ctr"/>
-          </a:p>
-        </p:txBody>
-      </p:sp>
-      <p:sp>
-        <p:nvSpPr>
-          <p:cNvPr id="5" name="Rectangle 4"/>
-          <p:cNvSpPr/>
-          <p:nvPr/>
-        </p:nvSpPr>
-        <p:spPr>
-          <a:xfrm>
-            <a:off x="6583680" y="1371600"/>
-            <a:ext cx="5029201" cy="4114800"/>
-          </a:xfrm>
-          <a:prstGeom prst="rect">
-            <a:avLst/>
-          </a:prstGeom>
-          <a:solidFill>
-            <a:srgbClr val="FDF6F0"/>
-          </a:solidFill>
-          <a:ln>
-            <a:noFill/>
-          </a:ln>
-          <a:effectLst/>
-        </p:spPr>
-        <p:style>
-          <a:lnRef idx="1">
-            <a:schemeClr val="accent1"/>
-          </a:lnRef>
-          <a:fillRef idx="3">
-            <a:schemeClr val="accent1"/>
-          </a:fillRef>
-          <a:effectRef idx="2">
-            <a:schemeClr val="accent1"/>
-          </a:effectRef>
-          <a:fontRef idx="minor">
-            <a:schemeClr val="lt1"/>
-          </a:fontRef>
-        </p:style>
-        <p:txBody>
-          <a:bodyPr rtlCol="0" anchor="ctr"/>
-          <a:lstStyle/>
-          <a:p>
-            <a:pPr algn="ctr"/>
-          </a:p>
-        </p:txBody>
-      </p:sp>
-      <p:sp>
-        <p:nvSpPr>
-          <p:cNvPr id="6" name="Rectangle 5"/>
-          <p:cNvSpPr/>
-          <p:nvPr/>
-        </p:nvSpPr>
-        <p:spPr>
-          <a:xfrm>
-            <a:off x="6583680" y="1371600"/>
-            <a:ext cx="50801" cy="4114800"/>
-          </a:xfrm>
-          <a:prstGeom prst="rect">
-            <a:avLst/>
-          </a:prstGeom>
-          <a:solidFill>
-            <a:srgbClr val="E8833A"/>
-          </a:solidFill>
-          <a:ln>
-            <a:noFill/>
-          </a:ln>
-          <a:effectLst/>
-        </p:spPr>
-        <p:style>
-          <a:lnRef idx="1">
-            <a:schemeClr val="accent1"/>
-          </a:lnRef>
-          <a:fillRef idx="3">
-            <a:schemeClr val="accent1"/>
-          </a:fillRef>
-          <a:effectRef idx="2">
-            <a:schemeClr val="accent1"/>
-          </a:effectRef>
-          <a:fontRef idx="minor">
-            <a:schemeClr val="lt1"/>
-          </a:fontRef>
-        </p:style>
-        <p:txBody>
-          <a:bodyPr rtlCol="0" anchor="ctr"/>
-          <a:lstStyle/>
-          <a:p>
-            <a:pPr algn="ctr"/>
-          </a:p>
-        </p:txBody>
-      </p:sp>
-      <p:sp>
-        <p:nvSpPr>
-          <p:cNvPr id="7" name="TextBox 6"/>
-          <p:cNvSpPr txBox="1"/>
-          <p:nvPr/>
-        </p:nvSpPr>
-        <p:spPr>
-          <a:xfrm>
-            <a:off x="502919" y="182879"/>
-            <a:ext cx="11155682" cy="444759"/>
-          </a:xfrm>
-          <a:prstGeom prst="rect">
-            <a:avLst/>
-          </a:prstGeom>
-          <a:noFill/>
-        </p:spPr>
-        <p:txBody>
-          <a:bodyPr wrap="square">
-            <a:spAutoFit/>
-          </a:bodyPr>
-          <a:lstStyle/>
-          <a:p>
-            <a:r>
-              <a:rPr sz="2800" b="1">
-                <a:solidFill>
-                  <a:srgbClr val="FFFFFF"/>
-                </a:solidFill>
-              </a:rPr>
-              <a:t>Live Demo: The Same Case, Grounded</a:t>
-            </a:r>
-          </a:p>
-        </p:txBody>
-      </p:sp>
-      <p:sp>
-        <p:nvSpPr>
-          <p:cNvPr id="8" name="TextBox 7"/>
-          <p:cNvSpPr txBox="1"/>
-          <p:nvPr/>
-        </p:nvSpPr>
-        <p:spPr>
-          <a:xfrm>
-            <a:off x="502919" y="1097280"/>
-            <a:ext cx="11155682" cy="300594"/>
-          </a:xfrm>
-          <a:prstGeom prst="rect">
-            <a:avLst/>
-          </a:prstGeom>
-          <a:noFill/>
-        </p:spPr>
-        <p:txBody>
-          <a:bodyPr wrap="square">
-            <a:spAutoFit/>
-          </a:bodyPr>
-          <a:lstStyle/>
-          <a:p>
-            <a:r>
-              <a:rPr sz="1600" b="0">
-                <a:solidFill>
-                  <a:srgbClr val="5B6B7C"/>
-                </a:solidFill>
-              </a:rPr>
-              <a:t>Same question, asked twice</a:t>
-            </a:r>
-          </a:p>
-        </p:txBody>
-      </p:sp>
-      <p:sp>
-        <p:nvSpPr>
-          <p:cNvPr id="9" name="TextBox 8"/>
-          <p:cNvSpPr txBox="1"/>
-          <p:nvPr/>
-        </p:nvSpPr>
-        <p:spPr>
-          <a:xfrm>
-            <a:off x="960119" y="1554480"/>
-            <a:ext cx="4937762" cy="225708"/>
-          </a:xfrm>
-          <a:prstGeom prst="rect">
-            <a:avLst/>
-          </a:prstGeom>
-          <a:noFill/>
-        </p:spPr>
-        <p:txBody>
-          <a:bodyPr wrap="square">
-            <a:spAutoFit/>
-          </a:bodyPr>
-          <a:lstStyle/>
-          <a:p>
-            <a:r>
-              <a:rPr sz="1100" b="1">
-                <a:solidFill>
-                  <a:srgbClr val="2D5F7C"/>
-                </a:solidFill>
-              </a:rPr>
-              <a:t>ON SCREEN, DIANA DRIVES</a:t>
-            </a:r>
-          </a:p>
-        </p:txBody>
-      </p:sp>
-      <p:sp>
-        <p:nvSpPr>
-          <p:cNvPr id="10" name="TextBox 9"/>
-          <p:cNvSpPr txBox="1"/>
-          <p:nvPr/>
-        </p:nvSpPr>
-        <p:spPr>
-          <a:xfrm>
-            <a:off x="960119" y="1920239"/>
-            <a:ext cx="4937762" cy="2301589"/>
-          </a:xfrm>
-          <a:prstGeom prst="rect">
-            <a:avLst/>
-          </a:prstGeom>
-          <a:noFill/>
-        </p:spPr>
-        <p:txBody>
-          <a:bodyPr wrap="square">
-            <a:spAutoFit/>
-          </a:bodyPr>
-          <a:lstStyle/>
-          <a:p>
-            <a:r>
-              <a:rPr sz="1800" b="0">
-                <a:solidFill>
-                  <a:srgbClr val="1A2332"/>
-                </a:solidFill>
-              </a:rPr>
-              <a:t>1 · Ungrounded: the same question, no sources</a:t>
-            </a:r>
-          </a:p>
-          <a:p>
-            <a:pPr>
-              <a:spcBef>
-                <a:spcPts val="1000"/>
-              </a:spcBef>
-            </a:pPr>
-            <a:r>
-              <a:rPr sz="1800" b="0">
-                <a:solidFill>
-                  <a:srgbClr val="1A2332"/>
-                </a:solidFill>
-              </a:rPr>
-              <a:t>2 · Grounded: the pre-built notebook answers with citations</a:t>
-            </a:r>
-          </a:p>
-          <a:p>
-            <a:pPr>
-              <a:spcBef>
-                <a:spcPts val="1000"/>
-              </a:spcBef>
-            </a:pPr>
-            <a:r>
-              <a:rPr sz="1800" b="0">
-                <a:solidFill>
-                  <a:srgbClr val="1A2332"/>
-                </a:solidFill>
-              </a:rPr>
-              <a:t>3 · Bonus: a rubric, and 15 seconds of the audio overview</a:t>
-            </a:r>
-          </a:p>
-        </p:txBody>
-      </p:sp>
-      <p:sp>
-        <p:nvSpPr>
-          <p:cNvPr id="11" name="TextBox 10"/>
-          <p:cNvSpPr txBox="1"/>
-          <p:nvPr/>
-        </p:nvSpPr>
-        <p:spPr>
-          <a:xfrm>
-            <a:off x="6903719" y="1554480"/>
-            <a:ext cx="4480562" cy="225708"/>
-          </a:xfrm>
-          <a:prstGeom prst="rect">
-            <a:avLst/>
-          </a:prstGeom>
-          <a:noFill/>
-        </p:spPr>
-        <p:txBody>
-          <a:bodyPr wrap="square">
-            <a:spAutoFit/>
-          </a:bodyPr>
-          <a:lstStyle/>
-          <a:p>
-            <a:r>
-              <a:rPr sz="1100" b="1">
-                <a:solidFill>
-                  <a:srgbClr val="E8833A"/>
-                </a:solidFill>
-              </a:rPr>
-              <a:t>ON YOUR PHONE</a:t>
-            </a:r>
-          </a:p>
-        </p:txBody>
-      </p:sp>
-      <p:sp>
-        <p:nvSpPr>
-          <p:cNvPr id="12" name="TextBox 11"/>
-          <p:cNvSpPr txBox="1"/>
-          <p:nvPr/>
-        </p:nvSpPr>
-        <p:spPr>
-          <a:xfrm>
-            <a:off x="6903719" y="1920239"/>
-            <a:ext cx="4480562" cy="2301589"/>
-          </a:xfrm>
-          <a:prstGeom prst="rect">
-            <a:avLst/>
-          </a:prstGeom>
-          <a:noFill/>
-        </p:spPr>
-        <p:txBody>
-          <a:bodyPr wrap="square">
-            <a:spAutoFit/>
-          </a:bodyPr>
-          <a:lstStyle/>
-          <a:p>
-            <a:r>
-              <a:rPr sz="1600">
-                <a:solidFill>
-                  <a:srgbClr val="1A2332"/>
-                </a:solidFill>
-              </a:rPr>
-              <a:t>The case notebook is pre-built. Link in the guide, Section 4.</a:t>
-            </a:r>
-          </a:p>
-          <a:p>
-            <a:pPr>
-              <a:spcBef>
-                <a:spcPts val="1000"/>
-              </a:spcBef>
-            </a:pPr>
-            <a:r>
-              <a:rPr sz="1600">
-                <a:solidFill>
-                  <a:srgbClr val="1A2332"/>
-                </a:solidFill>
-              </a:rPr>
-              <a:t>Ask the benzocaine question and watch it cite the files.</a:t>
-            </a:r>
-          </a:p>
-          <a:p>
-            <a:pPr>
-              <a:spcBef>
-                <a:spcPts val="1000"/>
-              </a:spcBef>
-            </a:pPr>
-            <a:r>
-              <a:rPr sz="1600">
-                <a:solidFill>
-                  <a:srgbClr val="1A2332"/>
-                </a:solidFill>
-              </a:rPr>
-              <a:t>No NotebookLM account? ChatGPT or Claude work too.</a:t>
-            </a:r>
-          </a:p>
-        </p:txBody>
-      </p:sp>
-      <p:sp>
-        <p:nvSpPr>
-          <p:cNvPr id="13" name="TextBox 12"/>
-          <p:cNvSpPr txBox="1"/>
-          <p:nvPr/>
-        </p:nvSpPr>
-        <p:spPr>
-          <a:xfrm>
-            <a:off x="502919" y="5715000"/>
-            <a:ext cx="11155682" cy="300594"/>
-          </a:xfrm>
-          <a:prstGeom prst="rect">
-            <a:avLst/>
-          </a:prstGeom>
-          <a:noFill/>
-        </p:spPr>
-        <p:txBody>
-          <a:bodyPr wrap="square">
-            <a:spAutoFit/>
-          </a:bodyPr>
-          <a:lstStyle/>
-          <a:p>
-            <a:r>
-              <a:rPr sz="1600" b="0">
-                <a:solidFill>
-                  <a:srgbClr val="0000FF"/>
-                </a:solidFill>
-              </a:rPr>
-              <a:t>Workshop Guide → Section 4 (Prompt #1)</a:t>
-            </a:r>
-          </a:p>
-        </p:txBody>
-      </p:sp>
-    </p:spTree>
-  </p:cSld>
-  <p:clrMapOvr>
-    <a:masterClrMapping/>
-  </p:clrMapOvr>
-  <p:transition xmlns:p14="http://schemas.microsoft.com/office/powerpoint/2010/main" spd="med" advClick="1"/>
-</p:sld>
-</file>
-
 <file path=ppt/slides/slide13.xml><?xml version="1.0" encoding="utf-8"?>
 <p:sld xmlns:a="http://schemas.openxmlformats.org/drawingml/2006/main" xmlns:r="http://schemas.openxmlformats.org/officeDocument/2006/relationships" xmlns:p="http://schemas.openxmlformats.org/presentationml/2006/main" xmlns:m="http://schemas.openxmlformats.org/officeDocument/2006/math" xmlns:a14="http://schemas.microsoft.com/office/drawing/2010/main" showMasterSp="1" showMasterPhAnim="1">
   <p:cSld>
@@ -5653,7 +5347,7 @@
         <p:spPr>
           <a:xfrm>
             <a:off x="640080" y="1371600"/>
-            <a:ext cx="10972801" cy="3657600"/>
+            <a:ext cx="5486401" cy="4114800"/>
           </a:xfrm>
           <a:prstGeom prst="rect">
             <a:avLst/>
@@ -5697,7 +5391,7 @@
         <p:spPr>
           <a:xfrm>
             <a:off x="640080" y="1371600"/>
-            <a:ext cx="50801" cy="3657600"/>
+            <a:ext cx="50801" cy="4114800"/>
           </a:xfrm>
           <a:prstGeom prst="rect">
             <a:avLst/>
@@ -5734,7 +5428,95 @@
       </p:sp>
       <p:sp>
         <p:nvSpPr>
-          <p:cNvPr id="5" name="TextBox 4"/>
+          <p:cNvPr id="5" name="Rectangle 4"/>
+          <p:cNvSpPr/>
+          <p:nvPr/>
+        </p:nvSpPr>
+        <p:spPr>
+          <a:xfrm>
+            <a:off x="6583680" y="1371600"/>
+            <a:ext cx="5029201" cy="4114800"/>
+          </a:xfrm>
+          <a:prstGeom prst="rect">
+            <a:avLst/>
+          </a:prstGeom>
+          <a:solidFill>
+            <a:srgbClr val="FDF6F0"/>
+          </a:solidFill>
+          <a:ln>
+            <a:noFill/>
+          </a:ln>
+          <a:effectLst/>
+        </p:spPr>
+        <p:style>
+          <a:lnRef idx="1">
+            <a:schemeClr val="accent1"/>
+          </a:lnRef>
+          <a:fillRef idx="3">
+            <a:schemeClr val="accent1"/>
+          </a:fillRef>
+          <a:effectRef idx="2">
+            <a:schemeClr val="accent1"/>
+          </a:effectRef>
+          <a:fontRef idx="minor">
+            <a:schemeClr val="lt1"/>
+          </a:fontRef>
+        </p:style>
+        <p:txBody>
+          <a:bodyPr rtlCol="0" anchor="ctr"/>
+          <a:lstStyle/>
+          <a:p>
+            <a:pPr algn="ctr"/>
+          </a:p>
+        </p:txBody>
+      </p:sp>
+      <p:sp>
+        <p:nvSpPr>
+          <p:cNvPr id="6" name="Rectangle 5"/>
+          <p:cNvSpPr/>
+          <p:nvPr/>
+        </p:nvSpPr>
+        <p:spPr>
+          <a:xfrm>
+            <a:off x="6583680" y="1371600"/>
+            <a:ext cx="50801" cy="4114800"/>
+          </a:xfrm>
+          <a:prstGeom prst="rect">
+            <a:avLst/>
+          </a:prstGeom>
+          <a:solidFill>
+            <a:srgbClr val="E8833A"/>
+          </a:solidFill>
+          <a:ln>
+            <a:noFill/>
+          </a:ln>
+          <a:effectLst/>
+        </p:spPr>
+        <p:style>
+          <a:lnRef idx="1">
+            <a:schemeClr val="accent1"/>
+          </a:lnRef>
+          <a:fillRef idx="3">
+            <a:schemeClr val="accent1"/>
+          </a:fillRef>
+          <a:effectRef idx="2">
+            <a:schemeClr val="accent1"/>
+          </a:effectRef>
+          <a:fontRef idx="minor">
+            <a:schemeClr val="lt1"/>
+          </a:fontRef>
+        </p:style>
+        <p:txBody>
+          <a:bodyPr rtlCol="0" anchor="ctr"/>
+          <a:lstStyle/>
+          <a:p>
+            <a:pPr algn="ctr"/>
+          </a:p>
+        </p:txBody>
+      </p:sp>
+      <p:sp>
+        <p:nvSpPr>
+          <p:cNvPr id="7" name="TextBox 6"/>
           <p:cNvSpPr txBox="1"/>
           <p:nvPr/>
         </p:nvSpPr>
@@ -5760,21 +5542,21 @@
                   <a:srgbClr val="FFFFFF"/>
                 </a:solidFill>
               </a:rPr>
-              <a:t>Think · Pair · Share: Try It Now (4 min)</a:t>
-            </a:r>
-          </a:p>
-        </p:txBody>
-      </p:sp>
-      <p:sp>
-        <p:nvSpPr>
-          <p:cNvPr id="6" name="TextBox 5"/>
+              <a:t>Live Demo: The Same Case, Grounded</a:t>
+            </a:r>
+          </a:p>
+        </p:txBody>
+      </p:sp>
+      <p:sp>
+        <p:nvSpPr>
+          <p:cNvPr id="8" name="TextBox 7"/>
           <p:cNvSpPr txBox="1"/>
           <p:nvPr/>
         </p:nvSpPr>
         <p:spPr>
           <a:xfrm>
-            <a:off x="1143000" y="1828800"/>
-            <a:ext cx="9966961" cy="1985576"/>
+            <a:off x="502919" y="1097280"/>
+            <a:ext cx="11155682" cy="300594"/>
           </a:xfrm>
           <a:prstGeom prst="rect">
             <a:avLst/>
@@ -5788,12 +5570,78 @@
           <a:lstStyle/>
           <a:p>
             <a:r>
-              <a:rPr sz="2200">
-                <a:solidFill>
-                  <a:srgbClr val="1E4258"/>
+              <a:rPr sz="1600" b="0">
+                <a:solidFill>
+                  <a:srgbClr val="5B6B7C"/>
                 </a:solidFill>
               </a:rPr>
-              <a:t>The grounded contrast: open the pre-built case notebook (guide, Section 4), or build your own in NotebookLM, ChatGPT, or Claude.</a:t>
+              <a:t>Same question, asked twice</a:t>
+            </a:r>
+          </a:p>
+        </p:txBody>
+      </p:sp>
+      <p:sp>
+        <p:nvSpPr>
+          <p:cNvPr id="9" name="TextBox 8"/>
+          <p:cNvSpPr txBox="1"/>
+          <p:nvPr/>
+        </p:nvSpPr>
+        <p:spPr>
+          <a:xfrm>
+            <a:off x="960119" y="1554480"/>
+            <a:ext cx="4937762" cy="225708"/>
+          </a:xfrm>
+          <a:prstGeom prst="rect">
+            <a:avLst/>
+          </a:prstGeom>
+          <a:noFill/>
+        </p:spPr>
+        <p:txBody>
+          <a:bodyPr wrap="square">
+            <a:spAutoFit/>
+          </a:bodyPr>
+          <a:lstStyle/>
+          <a:p>
+            <a:r>
+              <a:rPr sz="1100" b="1">
+                <a:solidFill>
+                  <a:srgbClr val="2D5F7C"/>
+                </a:solidFill>
+              </a:rPr>
+              <a:t>ON SCREEN, DIANA DRIVES</a:t>
+            </a:r>
+          </a:p>
+        </p:txBody>
+      </p:sp>
+      <p:sp>
+        <p:nvSpPr>
+          <p:cNvPr id="10" name="TextBox 9"/>
+          <p:cNvSpPr txBox="1"/>
+          <p:nvPr/>
+        </p:nvSpPr>
+        <p:spPr>
+          <a:xfrm>
+            <a:off x="960119" y="1920239"/>
+            <a:ext cx="4937762" cy="2301589"/>
+          </a:xfrm>
+          <a:prstGeom prst="rect">
+            <a:avLst/>
+          </a:prstGeom>
+          <a:noFill/>
+        </p:spPr>
+        <p:txBody>
+          <a:bodyPr wrap="square">
+            <a:spAutoFit/>
+          </a:bodyPr>
+          <a:lstStyle/>
+          <a:p>
+            <a:r>
+              <a:rPr sz="1800" b="0">
+                <a:solidFill>
+                  <a:srgbClr val="1A2332"/>
+                </a:solidFill>
+              </a:rPr>
+              <a:t>1 · Ungrounded: the same question, no sources</a:t>
             </a:r>
           </a:p>
           <a:p>
@@ -5803,12 +5651,12 @@
               </a:spcBef>
             </a:pPr>
             <a:r>
-              <a:rPr sz="2200">
-                <a:solidFill>
-                  <a:srgbClr val="1E4258"/>
+              <a:rPr sz="1800" b="0">
+                <a:solidFill>
+                  <a:srgbClr val="1A2332"/>
                 </a:solidFill>
               </a:rPr>
-              <a:t>Upload files 1 and 2, run Prompt #1: the same 19-year-old, now with citations.</a:t>
+              <a:t>2 · Grounded: the pre-built notebook answers with citations</a:t>
             </a:r>
           </a:p>
           <a:p>
@@ -5818,26 +5666,26 @@
               </a:spcBef>
             </a:pPr>
             <a:r>
-              <a:rPr sz="2200">
-                <a:solidFill>
-                  <a:srgbClr val="1E4258"/>
+              <a:rPr sz="1800" b="0">
+                <a:solidFill>
+                  <a:srgbClr val="1A2332"/>
                 </a:solidFill>
               </a:rPr>
-              <a:t>Compare with Section 3's run: what did the AI invent, skip, or get right?</a:t>
-            </a:r>
-          </a:p>
-        </p:txBody>
-      </p:sp>
-      <p:sp>
-        <p:nvSpPr>
-          <p:cNvPr id="7" name="TextBox 6"/>
+              <a:t>3 · Bonus: a rubric, and 15 seconds of the audio overview</a:t>
+            </a:r>
+          </a:p>
+        </p:txBody>
+      </p:sp>
+      <p:sp>
+        <p:nvSpPr>
+          <p:cNvPr id="11" name="TextBox 10"/>
           <p:cNvSpPr txBox="1"/>
           <p:nvPr/>
         </p:nvSpPr>
         <p:spPr>
           <a:xfrm>
-            <a:off x="1143000" y="5303520"/>
-            <a:ext cx="9966961" cy="300594"/>
+            <a:off x="6903719" y="1554480"/>
+            <a:ext cx="4480562" cy="225708"/>
           </a:xfrm>
           <a:prstGeom prst="rect">
             <a:avLst/>
@@ -5851,12 +5699,98 @@
           <a:lstStyle/>
           <a:p>
             <a:r>
+              <a:rPr sz="1100" b="1">
+                <a:solidFill>
+                  <a:srgbClr val="E8833A"/>
+                </a:solidFill>
+              </a:rPr>
+              <a:t>ON YOUR PHONE</a:t>
+            </a:r>
+          </a:p>
+        </p:txBody>
+      </p:sp>
+      <p:sp>
+        <p:nvSpPr>
+          <p:cNvPr id="12" name="TextBox 11"/>
+          <p:cNvSpPr txBox="1"/>
+          <p:nvPr/>
+        </p:nvSpPr>
+        <p:spPr>
+          <a:xfrm>
+            <a:off x="6903719" y="1920239"/>
+            <a:ext cx="4480562" cy="2301589"/>
+          </a:xfrm>
+          <a:prstGeom prst="rect">
+            <a:avLst/>
+          </a:prstGeom>
+          <a:noFill/>
+        </p:spPr>
+        <p:txBody>
+          <a:bodyPr wrap="square">
+            <a:spAutoFit/>
+          </a:bodyPr>
+          <a:lstStyle/>
+          <a:p>
+            <a:r>
+              <a:rPr sz="1600">
+                <a:solidFill>
+                  <a:srgbClr val="1A2332"/>
+                </a:solidFill>
+              </a:rPr>
+              <a:t>The case notebook is pre-built. Link in the guide, Section 4.</a:t>
+            </a:r>
+          </a:p>
+          <a:p>
+            <a:r>
+              <a:rPr sz="1600">
+                <a:solidFill>
+                  <a:srgbClr val="1A2332"/>
+                </a:solidFill>
+              </a:rPr>
+              <a:t>Ask the benzocaine question and watch it cite the files.</a:t>
+            </a:r>
+          </a:p>
+          <a:p>
+            <a:r>
+              <a:rPr sz="1600">
+                <a:solidFill>
+                  <a:srgbClr val="1A2332"/>
+                </a:solidFill>
+              </a:rPr>
+              <a:t>Prefer ChatGPT or Claude? The same files work there.</a:t>
+            </a:r>
+          </a:p>
+        </p:txBody>
+      </p:sp>
+      <p:sp>
+        <p:nvSpPr>
+          <p:cNvPr id="13" name="TextBox 12"/>
+          <p:cNvSpPr txBox="1"/>
+          <p:nvPr/>
+        </p:nvSpPr>
+        <p:spPr>
+          <a:xfrm>
+            <a:off x="502919" y="5715000"/>
+            <a:ext cx="11155682" cy="300594"/>
+          </a:xfrm>
+          <a:prstGeom prst="rect">
+            <a:avLst/>
+          </a:prstGeom>
+          <a:noFill/>
+        </p:spPr>
+        <p:txBody>
+          <a:bodyPr wrap="square">
+            <a:spAutoFit/>
+          </a:bodyPr>
+          <a:lstStyle/>
+          <a:p>
+            <a:r>
               <a:rPr sz="1600" b="0">
                 <a:solidFill>
                   <a:srgbClr val="0000FF"/>
                 </a:solidFill>
               </a:rPr>
-              <a:t>Workshop Guide → Section 4</a:t>
+              <a:t>Workshop Guide → Section 4 (Prompt #1)</a:t>
             </a:r>
           </a:p>
         </p:txBody>
@@ -5871,6 +5805,293 @@
 </file>
 
 <file path=ppt/slides/slide14.xml><?xml version="1.0" encoding="utf-8"?>
+<p:sld xmlns:a="http://schemas.openxmlformats.org/drawingml/2006/main" xmlns:r="http://schemas.openxmlformats.org/officeDocument/2006/relationships" xmlns:p="http://schemas.openxmlformats.org/presentationml/2006/main" xmlns:m="http://schemas.openxmlformats.org/officeDocument/2006/math" xmlns:a14="http://schemas.microsoft.com/office/drawing/2010/main" showMasterSp="1" showMasterPhAnim="1">
+  <p:cSld>
+    <p:spTree>
+      <p:nvGrpSpPr>
+        <p:cNvPr id="1" name=""/>
+        <p:cNvGrpSpPr/>
+        <p:nvPr/>
+      </p:nvGrpSpPr>
+      <p:grpSpPr>
+        <a:xfrm>
+          <a:off x="0" y="0"/>
+          <a:ext cx="0" cy="0"/>
+          <a:chOff x="0" y="0"/>
+          <a:chExt cx="0" cy="0"/>
+        </a:xfrm>
+      </p:grpSpPr>
+      <p:sp>
+        <p:nvSpPr>
+          <p:cNvPr id="2" name="Rectangle 1"/>
+          <p:cNvSpPr/>
+          <p:nvPr/>
+        </p:nvSpPr>
+        <p:spPr>
+          <a:xfrm>
+            <a:off x="-1" y="0"/>
+            <a:ext cx="12191697" cy="1005839"/>
+          </a:xfrm>
+          <a:prstGeom prst="rect">
+            <a:avLst/>
+          </a:prstGeom>
+          <a:solidFill>
+            <a:srgbClr val="2D5F7C"/>
+          </a:solidFill>
+          <a:ln>
+            <a:noFill/>
+          </a:ln>
+          <a:effectLst/>
+        </p:spPr>
+        <p:style>
+          <a:lnRef idx="1">
+            <a:schemeClr val="accent1"/>
+          </a:lnRef>
+          <a:fillRef idx="3">
+            <a:schemeClr val="accent1"/>
+          </a:fillRef>
+          <a:effectRef idx="2">
+            <a:schemeClr val="accent1"/>
+          </a:effectRef>
+          <a:fontRef idx="minor">
+            <a:schemeClr val="lt1"/>
+          </a:fontRef>
+        </p:style>
+        <p:txBody>
+          <a:bodyPr rtlCol="0" anchor="ctr"/>
+          <a:lstStyle/>
+          <a:p>
+            <a:pPr algn="ctr"/>
+          </a:p>
+        </p:txBody>
+      </p:sp>
+      <p:sp>
+        <p:nvSpPr>
+          <p:cNvPr id="3" name="Rectangle 2"/>
+          <p:cNvSpPr/>
+          <p:nvPr/>
+        </p:nvSpPr>
+        <p:spPr>
+          <a:xfrm>
+            <a:off x="640080" y="1371600"/>
+            <a:ext cx="10972801" cy="3657600"/>
+          </a:xfrm>
+          <a:prstGeom prst="rect">
+            <a:avLst/>
+          </a:prstGeom>
+          <a:solidFill>
+            <a:srgbClr val="F0F4F8"/>
+          </a:solidFill>
+          <a:ln>
+            <a:noFill/>
+          </a:ln>
+          <a:effectLst/>
+        </p:spPr>
+        <p:style>
+          <a:lnRef idx="1">
+            <a:schemeClr val="accent1"/>
+          </a:lnRef>
+          <a:fillRef idx="3">
+            <a:schemeClr val="accent1"/>
+          </a:fillRef>
+          <a:effectRef idx="2">
+            <a:schemeClr val="accent1"/>
+          </a:effectRef>
+          <a:fontRef idx="minor">
+            <a:schemeClr val="lt1"/>
+          </a:fontRef>
+        </p:style>
+        <p:txBody>
+          <a:bodyPr rtlCol="0" anchor="ctr"/>
+          <a:lstStyle/>
+          <a:p>
+            <a:pPr algn="ctr"/>
+          </a:p>
+        </p:txBody>
+      </p:sp>
+      <p:sp>
+        <p:nvSpPr>
+          <p:cNvPr id="4" name="Rectangle 3"/>
+          <p:cNvSpPr/>
+          <p:nvPr/>
+        </p:nvSpPr>
+        <p:spPr>
+          <a:xfrm>
+            <a:off x="640080" y="1371600"/>
+            <a:ext cx="50801" cy="3657600"/>
+          </a:xfrm>
+          <a:prstGeom prst="rect">
+            <a:avLst/>
+          </a:prstGeom>
+          <a:solidFill>
+            <a:srgbClr val="2D5F7C"/>
+          </a:solidFill>
+          <a:ln>
+            <a:noFill/>
+          </a:ln>
+          <a:effectLst/>
+        </p:spPr>
+        <p:style>
+          <a:lnRef idx="1">
+            <a:schemeClr val="accent1"/>
+          </a:lnRef>
+          <a:fillRef idx="3">
+            <a:schemeClr val="accent1"/>
+          </a:fillRef>
+          <a:effectRef idx="2">
+            <a:schemeClr val="accent1"/>
+          </a:effectRef>
+          <a:fontRef idx="minor">
+            <a:schemeClr val="lt1"/>
+          </a:fontRef>
+        </p:style>
+        <p:txBody>
+          <a:bodyPr rtlCol="0" anchor="ctr"/>
+          <a:lstStyle/>
+          <a:p>
+            <a:pPr algn="ctr"/>
+          </a:p>
+        </p:txBody>
+      </p:sp>
+      <p:sp>
+        <p:nvSpPr>
+          <p:cNvPr id="5" name="TextBox 4"/>
+          <p:cNvSpPr txBox="1"/>
+          <p:nvPr/>
+        </p:nvSpPr>
+        <p:spPr>
+          <a:xfrm>
+            <a:off x="502919" y="182879"/>
+            <a:ext cx="11155682" cy="444759"/>
+          </a:xfrm>
+          <a:prstGeom prst="rect">
+            <a:avLst/>
+          </a:prstGeom>
+          <a:noFill/>
+        </p:spPr>
+        <p:txBody>
+          <a:bodyPr wrap="square">
+            <a:spAutoFit/>
+          </a:bodyPr>
+          <a:lstStyle/>
+          <a:p>
+            <a:r>
+              <a:rPr sz="2800" b="1">
+                <a:solidFill>
+                  <a:srgbClr val="FFFFFF"/>
+                </a:solidFill>
+              </a:rPr>
+              <a:t>Think · Pair · Share: Try It Now (4 min)</a:t>
+            </a:r>
+          </a:p>
+        </p:txBody>
+      </p:sp>
+      <p:sp>
+        <p:nvSpPr>
+          <p:cNvPr id="6" name="TextBox 5"/>
+          <p:cNvSpPr txBox="1"/>
+          <p:nvPr/>
+        </p:nvSpPr>
+        <p:spPr>
+          <a:xfrm>
+            <a:off x="1143000" y="1828800"/>
+            <a:ext cx="9966961" cy="1985576"/>
+          </a:xfrm>
+          <a:prstGeom prst="rect">
+            <a:avLst/>
+          </a:prstGeom>
+          <a:noFill/>
+        </p:spPr>
+        <p:txBody>
+          <a:bodyPr wrap="square">
+            <a:spAutoFit/>
+          </a:bodyPr>
+          <a:lstStyle/>
+          <a:p>
+            <a:r>
+              <a:rPr sz="2200">
+                <a:solidFill>
+                  <a:srgbClr val="1E4258"/>
+                </a:solidFill>
+              </a:rPr>
+              <a:t>The grounded contrast: open the pre-built case notebook (guide, Section 4), or build your own in NotebookLM, ChatGPT, or Claude.</a:t>
+            </a:r>
+          </a:p>
+          <a:p>
+            <a:pPr>
+              <a:spcBef>
+                <a:spcPts val="1000"/>
+              </a:spcBef>
+            </a:pPr>
+            <a:r>
+              <a:rPr sz="2200">
+                <a:solidFill>
+                  <a:srgbClr val="1E4258"/>
+                </a:solidFill>
+              </a:rPr>
+              <a:t>Upload files 1 and 2, run Prompt #1: the same 19-year-old, now with citations.</a:t>
+            </a:r>
+          </a:p>
+          <a:p>
+            <a:pPr>
+              <a:spcBef>
+                <a:spcPts val="1000"/>
+              </a:spcBef>
+            </a:pPr>
+            <a:r>
+              <a:rPr sz="2200">
+                <a:solidFill>
+                  <a:srgbClr val="1E4258"/>
+                </a:solidFill>
+              </a:rPr>
+              <a:t>Compare with Section 3's run: what did the AI invent, skip, or get right?</a:t>
+            </a:r>
+          </a:p>
+        </p:txBody>
+      </p:sp>
+      <p:sp>
+        <p:nvSpPr>
+          <p:cNvPr id="7" name="TextBox 6"/>
+          <p:cNvSpPr txBox="1"/>
+          <p:nvPr/>
+        </p:nvSpPr>
+        <p:spPr>
+          <a:xfrm>
+            <a:off x="1143000" y="5303520"/>
+            <a:ext cx="9966961" cy="300594"/>
+          </a:xfrm>
+          <a:prstGeom prst="rect">
+            <a:avLst/>
+          </a:prstGeom>
+          <a:noFill/>
+        </p:spPr>
+        <p:txBody>
+          <a:bodyPr wrap="square">
+            <a:spAutoFit/>
+          </a:bodyPr>
+          <a:lstStyle/>
+          <a:p>
+            <a:r>
+              <a:rPr sz="1600" b="0">
+                <a:solidFill>
+                  <a:srgbClr val="0000FF"/>
+                </a:solidFill>
+              </a:rPr>
+              <a:t>Workshop Guide → Section 4</a:t>
+            </a:r>
+          </a:p>
+        </p:txBody>
+      </p:sp>
+    </p:spTree>
+  </p:cSld>
+  <p:clrMapOvr>
+    <a:masterClrMapping/>
+  </p:clrMapOvr>
+  <p:transition xmlns:p14="http://schemas.microsoft.com/office/powerpoint/2010/main" spd="med" advClick="1"/>
+</p:sld>
+</file>
+
+<file path=ppt/slides/slide15.xml><?xml version="1.0" encoding="utf-8"?>
 <p:sld xmlns:a="http://schemas.openxmlformats.org/drawingml/2006/main" xmlns:r="http://schemas.openxmlformats.org/officeDocument/2006/relationships" xmlns:p="http://schemas.openxmlformats.org/presentationml/2006/main" xmlns:m="http://schemas.openxmlformats.org/officeDocument/2006/math" xmlns:a14="http://schemas.microsoft.com/office/drawing/2010/main" showMasterSp="1" showMasterPhAnim="1">
   <p:cSld>
     <p:bg>
@@ -6100,573 +6321,6 @@
 </p:sld>
 </file>
 
-<file path=ppt/slides/slide15.xml><?xml version="1.0" encoding="utf-8"?>
-<p:sld xmlns:a="http://schemas.openxmlformats.org/drawingml/2006/main" xmlns:r="http://schemas.openxmlformats.org/officeDocument/2006/relationships" xmlns:p="http://schemas.openxmlformats.org/presentationml/2006/main" xmlns:m="http://schemas.openxmlformats.org/officeDocument/2006/math" xmlns:a14="http://schemas.microsoft.com/office/drawing/2010/main" showMasterSp="1" showMasterPhAnim="1">
-  <p:cSld>
-    <p:spTree>
-      <p:nvGrpSpPr>
-        <p:cNvPr id="1" name=""/>
-        <p:cNvGrpSpPr/>
-        <p:nvPr/>
-      </p:nvGrpSpPr>
-      <p:grpSpPr>
-        <a:xfrm>
-          <a:off x="0" y="0"/>
-          <a:ext cx="0" cy="0"/>
-          <a:chOff x="0" y="0"/>
-          <a:chExt cx="0" cy="0"/>
-        </a:xfrm>
-      </p:grpSpPr>
-      <p:sp>
-        <p:nvSpPr>
-          <p:cNvPr id="2" name="Rectangle 1"/>
-          <p:cNvSpPr/>
-          <p:nvPr/>
-        </p:nvSpPr>
-        <p:spPr>
-          <a:xfrm>
-            <a:off x="-1" y="0"/>
-            <a:ext cx="12191697" cy="1005839"/>
-          </a:xfrm>
-          <a:prstGeom prst="rect">
-            <a:avLst/>
-          </a:prstGeom>
-          <a:solidFill>
-            <a:srgbClr val="2D5F7C"/>
-          </a:solidFill>
-          <a:ln>
-            <a:noFill/>
-          </a:ln>
-          <a:effectLst/>
-        </p:spPr>
-        <p:style>
-          <a:lnRef idx="1">
-            <a:schemeClr val="accent1"/>
-          </a:lnRef>
-          <a:fillRef idx="3">
-            <a:schemeClr val="accent1"/>
-          </a:fillRef>
-          <a:effectRef idx="2">
-            <a:schemeClr val="accent1"/>
-          </a:effectRef>
-          <a:fontRef idx="minor">
-            <a:schemeClr val="lt1"/>
-          </a:fontRef>
-        </p:style>
-        <p:txBody>
-          <a:bodyPr rtlCol="0" anchor="ctr"/>
-          <a:lstStyle/>
-          <a:p>
-            <a:pPr algn="ctr"/>
-          </a:p>
-        </p:txBody>
-      </p:sp>
-      <p:sp>
-        <p:nvSpPr>
-          <p:cNvPr id="3" name="Rectangle 2"/>
-          <p:cNvSpPr/>
-          <p:nvPr/>
-        </p:nvSpPr>
-        <p:spPr>
-          <a:xfrm>
-            <a:off x="640080" y="1371600"/>
-            <a:ext cx="5486401" cy="4114800"/>
-          </a:xfrm>
-          <a:prstGeom prst="rect">
-            <a:avLst/>
-          </a:prstGeom>
-          <a:solidFill>
-            <a:srgbClr val="F0F4F8"/>
-          </a:solidFill>
-          <a:ln>
-            <a:noFill/>
-          </a:ln>
-          <a:effectLst/>
-        </p:spPr>
-        <p:style>
-          <a:lnRef idx="1">
-            <a:schemeClr val="accent1"/>
-          </a:lnRef>
-          <a:fillRef idx="3">
-            <a:schemeClr val="accent1"/>
-          </a:fillRef>
-          <a:effectRef idx="2">
-            <a:schemeClr val="accent1"/>
-          </a:effectRef>
-          <a:fontRef idx="minor">
-            <a:schemeClr val="lt1"/>
-          </a:fontRef>
-        </p:style>
-        <p:txBody>
-          <a:bodyPr rtlCol="0" anchor="ctr"/>
-          <a:lstStyle/>
-          <a:p>
-            <a:pPr algn="ctr"/>
-          </a:p>
-        </p:txBody>
-      </p:sp>
-      <p:sp>
-        <p:nvSpPr>
-          <p:cNvPr id="4" name="Rectangle 3"/>
-          <p:cNvSpPr/>
-          <p:nvPr/>
-        </p:nvSpPr>
-        <p:spPr>
-          <a:xfrm>
-            <a:off x="640080" y="1371600"/>
-            <a:ext cx="50801" cy="4114800"/>
-          </a:xfrm>
-          <a:prstGeom prst="rect">
-            <a:avLst/>
-          </a:prstGeom>
-          <a:solidFill>
-            <a:srgbClr val="2D5F7C"/>
-          </a:solidFill>
-          <a:ln>
-            <a:noFill/>
-          </a:ln>
-          <a:effectLst/>
-        </p:spPr>
-        <p:style>
-          <a:lnRef idx="1">
-            <a:schemeClr val="accent1"/>
-          </a:lnRef>
-          <a:fillRef idx="3">
-            <a:schemeClr val="accent1"/>
-          </a:fillRef>
-          <a:effectRef idx="2">
-            <a:schemeClr val="accent1"/>
-          </a:effectRef>
-          <a:fontRef idx="minor">
-            <a:schemeClr val="lt1"/>
-          </a:fontRef>
-        </p:style>
-        <p:txBody>
-          <a:bodyPr rtlCol="0" anchor="ctr"/>
-          <a:lstStyle/>
-          <a:p>
-            <a:pPr algn="ctr"/>
-          </a:p>
-        </p:txBody>
-      </p:sp>
-      <p:sp>
-        <p:nvSpPr>
-          <p:cNvPr id="5" name="Rectangle 4"/>
-          <p:cNvSpPr/>
-          <p:nvPr/>
-        </p:nvSpPr>
-        <p:spPr>
-          <a:xfrm>
-            <a:off x="6583680" y="1371600"/>
-            <a:ext cx="5029201" cy="4114800"/>
-          </a:xfrm>
-          <a:prstGeom prst="rect">
-            <a:avLst/>
-          </a:prstGeom>
-          <a:solidFill>
-            <a:srgbClr val="FDF6F0"/>
-          </a:solidFill>
-          <a:ln>
-            <a:noFill/>
-          </a:ln>
-          <a:effectLst/>
-        </p:spPr>
-        <p:style>
-          <a:lnRef idx="1">
-            <a:schemeClr val="accent1"/>
-          </a:lnRef>
-          <a:fillRef idx="3">
-            <a:schemeClr val="accent1"/>
-          </a:fillRef>
-          <a:effectRef idx="2">
-            <a:schemeClr val="accent1"/>
-          </a:effectRef>
-          <a:fontRef idx="minor">
-            <a:schemeClr val="lt1"/>
-          </a:fontRef>
-        </p:style>
-        <p:txBody>
-          <a:bodyPr rtlCol="0" anchor="ctr"/>
-          <a:lstStyle/>
-          <a:p>
-            <a:pPr algn="ctr"/>
-          </a:p>
-        </p:txBody>
-      </p:sp>
-      <p:sp>
-        <p:nvSpPr>
-          <p:cNvPr id="6" name="Rectangle 5"/>
-          <p:cNvSpPr/>
-          <p:nvPr/>
-        </p:nvSpPr>
-        <p:spPr>
-          <a:xfrm>
-            <a:off x="6583680" y="1371600"/>
-            <a:ext cx="50801" cy="4114800"/>
-          </a:xfrm>
-          <a:prstGeom prst="rect">
-            <a:avLst/>
-          </a:prstGeom>
-          <a:solidFill>
-            <a:srgbClr val="E8833A"/>
-          </a:solidFill>
-          <a:ln>
-            <a:noFill/>
-          </a:ln>
-          <a:effectLst/>
-        </p:spPr>
-        <p:style>
-          <a:lnRef idx="1">
-            <a:schemeClr val="accent1"/>
-          </a:lnRef>
-          <a:fillRef idx="3">
-            <a:schemeClr val="accent1"/>
-          </a:fillRef>
-          <a:effectRef idx="2">
-            <a:schemeClr val="accent1"/>
-          </a:effectRef>
-          <a:fontRef idx="minor">
-            <a:schemeClr val="lt1"/>
-          </a:fontRef>
-        </p:style>
-        <p:txBody>
-          <a:bodyPr rtlCol="0" anchor="ctr"/>
-          <a:lstStyle/>
-          <a:p>
-            <a:pPr algn="ctr"/>
-          </a:p>
-        </p:txBody>
-      </p:sp>
-      <p:sp>
-        <p:nvSpPr>
-          <p:cNvPr id="7" name="TextBox 6"/>
-          <p:cNvSpPr txBox="1"/>
-          <p:nvPr/>
-        </p:nvSpPr>
-        <p:spPr>
-          <a:xfrm>
-            <a:off x="502919" y="182879"/>
-            <a:ext cx="11155682" cy="444759"/>
-          </a:xfrm>
-          <a:prstGeom prst="rect">
-            <a:avLst/>
-          </a:prstGeom>
-          <a:noFill/>
-        </p:spPr>
-        <p:txBody>
-          <a:bodyPr wrap="square">
-            <a:spAutoFit/>
-          </a:bodyPr>
-          <a:lstStyle/>
-          <a:p>
-            <a:r>
-              <a:rPr sz="2800" b="1">
-                <a:solidFill>
-                  <a:srgbClr val="FFFFFF"/>
-                </a:solidFill>
-              </a:rPr>
-              <a:t>The Fidelity Spectrum</a:t>
-            </a:r>
-          </a:p>
-        </p:txBody>
-      </p:sp>
-      <p:sp>
-        <p:nvSpPr>
-          <p:cNvPr id="8" name="TextBox 7"/>
-          <p:cNvSpPr txBox="1"/>
-          <p:nvPr/>
-        </p:nvSpPr>
-        <p:spPr>
-          <a:xfrm>
-            <a:off x="502919" y="1097280"/>
-            <a:ext cx="11155682" cy="300594"/>
-          </a:xfrm>
-          <a:prstGeom prst="rect">
-            <a:avLst/>
-          </a:prstGeom>
-          <a:noFill/>
-        </p:spPr>
-        <p:txBody>
-          <a:bodyPr wrap="square">
-            <a:spAutoFit/>
-          </a:bodyPr>
-          <a:lstStyle/>
-          <a:p>
-            <a:r>
-              <a:rPr sz="1600" b="0">
-                <a:solidFill>
-                  <a:srgbClr val="5B6B7C"/>
-                </a:solidFill>
-              </a:rPr>
-              <a:t>Match the tool to the goal, not the other way around</a:t>
-            </a:r>
-          </a:p>
-        </p:txBody>
-      </p:sp>
-      <p:sp>
-        <p:nvSpPr>
-          <p:cNvPr id="9" name="TextBox 8"/>
-          <p:cNvSpPr txBox="1"/>
-          <p:nvPr/>
-        </p:nvSpPr>
-        <p:spPr>
-          <a:xfrm>
-            <a:off x="960119" y="1554480"/>
-            <a:ext cx="4937762" cy="225708"/>
-          </a:xfrm>
-          <a:prstGeom prst="rect">
-            <a:avLst/>
-          </a:prstGeom>
-          <a:noFill/>
-        </p:spPr>
-        <p:txBody>
-          <a:bodyPr wrap="square">
-            <a:spAutoFit/>
-          </a:bodyPr>
-          <a:lstStyle/>
-          <a:p>
-            <a:r>
-              <a:rPr sz="1100" b="1">
-                <a:solidFill>
-                  <a:srgbClr val="2D5F7C"/>
-                </a:solidFill>
-              </a:rPr>
-              <a:t>THE SPECTRUM, LEFT TO RIGHT</a:t>
-            </a:r>
-          </a:p>
-        </p:txBody>
-      </p:sp>
-      <p:sp>
-        <p:nvSpPr>
-          <p:cNvPr id="10" name="TextBox 9"/>
-          <p:cNvSpPr txBox="1"/>
-          <p:nvPr/>
-        </p:nvSpPr>
-        <p:spPr>
-          <a:xfrm>
-            <a:off x="960119" y="1920239"/>
-            <a:ext cx="4937762" cy="2301589"/>
-          </a:xfrm>
-          <a:prstGeom prst="rect">
-            <a:avLst/>
-          </a:prstGeom>
-          <a:noFill/>
-        </p:spPr>
-        <p:txBody>
-          <a:bodyPr wrap="square">
-            <a:spAutoFit/>
-          </a:bodyPr>
-          <a:lstStyle/>
-          <a:p>
-            <a:r>
-              <a:rPr sz="1800" b="0">
-                <a:solidFill>
-                  <a:srgbClr val="1A2332"/>
-                </a:solidFill>
-              </a:rPr>
-              <a:t>• Text and audio, $0 to $20/mo</a:t>
-            </a:r>
-          </a:p>
-          <a:p>
-            <a:pPr>
-              <a:spcBef>
-                <a:spcPts val="1000"/>
-              </a:spcBef>
-            </a:pPr>
-            <a:r>
-              <a:rPr sz="1800" b="0">
-                <a:solidFill>
-                  <a:srgbClr val="1A2332"/>
-                </a:solidFill>
-              </a:rPr>
-              <a:t>• Image-based, free to $25</a:t>
-            </a:r>
-          </a:p>
-          <a:p>
-            <a:pPr>
-              <a:spcBef>
-                <a:spcPts val="1000"/>
-              </a:spcBef>
-            </a:pPr>
-            <a:r>
-              <a:rPr sz="1800" b="0">
-                <a:solidFill>
-                  <a:srgbClr val="1A2332"/>
-                </a:solidFill>
-              </a:rPr>
-              <a:t>• Screen-based, free trials</a:t>
-            </a:r>
-          </a:p>
-          <a:p>
-            <a:pPr>
-              <a:spcBef>
-                <a:spcPts val="1000"/>
-              </a:spcBef>
-            </a:pPr>
-            <a:r>
-              <a:rPr sz="1800" b="0">
-                <a:solidFill>
-                  <a:srgbClr val="1A2332"/>
-                </a:solidFill>
-              </a:rPr>
-              <a:t>• AR on your phone, free to $25</a:t>
-            </a:r>
-          </a:p>
-          <a:p>
-            <a:pPr>
-              <a:spcBef>
-                <a:spcPts val="1000"/>
-              </a:spcBef>
-            </a:pPr>
-            <a:r>
-              <a:rPr sz="1800" b="0">
-                <a:solidFill>
-                  <a:srgbClr val="1A2332"/>
-                </a:solidFill>
-              </a:rPr>
-              <a:t>• Immersive VR, $100 to $600</a:t>
-            </a:r>
-          </a:p>
-        </p:txBody>
-      </p:sp>
-      <p:sp>
-        <p:nvSpPr>
-          <p:cNvPr id="11" name="TextBox 10"/>
-          <p:cNvSpPr txBox="1"/>
-          <p:nvPr/>
-        </p:nvSpPr>
-        <p:spPr>
-          <a:xfrm>
-            <a:off x="6903719" y="1554480"/>
-            <a:ext cx="4480562" cy="225708"/>
-          </a:xfrm>
-          <a:prstGeom prst="rect">
-            <a:avLst/>
-          </a:prstGeom>
-          <a:noFill/>
-        </p:spPr>
-        <p:txBody>
-          <a:bodyPr wrap="square">
-            <a:spAutoFit/>
-          </a:bodyPr>
-          <a:lstStyle/>
-          <a:p>
-            <a:r>
-              <a:rPr sz="1100" b="1">
-                <a:solidFill>
-                  <a:srgbClr val="E8833A"/>
-                </a:solidFill>
-              </a:rPr>
-              <a:t>WHERE REASONING LIVES</a:t>
-            </a:r>
-          </a:p>
-        </p:txBody>
-      </p:sp>
-      <p:sp>
-        <p:nvSpPr>
-          <p:cNvPr id="12" name="TextBox 11"/>
-          <p:cNvSpPr txBox="1"/>
-          <p:nvPr/>
-        </p:nvSpPr>
-        <p:spPr>
-          <a:xfrm>
-            <a:off x="6903719" y="1920239"/>
-            <a:ext cx="4480562" cy="2301589"/>
-          </a:xfrm>
-          <a:prstGeom prst="rect">
-            <a:avLst/>
-          </a:prstGeom>
-          <a:noFill/>
-        </p:spPr>
-        <p:txBody>
-          <a:bodyPr wrap="square">
-            <a:spAutoFit/>
-          </a:bodyPr>
-          <a:lstStyle/>
-          <a:p>
-            <a:r>
-              <a:rPr sz="1800" b="0">
-                <a:solidFill>
-                  <a:srgbClr val="1A2332"/>
-                </a:solidFill>
-              </a:rPr>
-              <a:t>Text and audio, images included: ECG, X-ray, CT, labs.</a:t>
-            </a:r>
-          </a:p>
-          <a:p>
-            <a:pPr>
-              <a:spcBef>
-                <a:spcPts val="1000"/>
-              </a:spcBef>
-            </a:pPr>
-            <a:r>
-              <a:rPr sz="1800" b="0">
-                <a:solidFill>
-                  <a:srgbClr val="1A2332"/>
-                </a:solidFill>
-              </a:rPr>
-              <a:t>The uncanny valley of avatar tools is real.</a:t>
-            </a:r>
-          </a:p>
-          <a:p>
-            <a:pPr>
-              <a:spcBef>
-                <a:spcPts val="1000"/>
-              </a:spcBef>
-            </a:pPr>
-            <a:r>
-              <a:rPr sz="1800" b="0">
-                <a:solidFill>
-                  <a:srgbClr val="1A2332"/>
-                </a:solidFill>
-              </a:rPr>
-              <a:t>Sapient Clinician does this well (see the COI slide).</a:t>
-            </a:r>
-          </a:p>
-        </p:txBody>
-      </p:sp>
-      <p:sp>
-        <p:nvSpPr>
-          <p:cNvPr id="13" name="TextBox 12"/>
-          <p:cNvSpPr txBox="1"/>
-          <p:nvPr/>
-        </p:nvSpPr>
-        <p:spPr>
-          <a:xfrm>
-            <a:off x="502919" y="5715000"/>
-            <a:ext cx="11155682" cy="300594"/>
-          </a:xfrm>
-          <a:prstGeom prst="rect">
-            <a:avLst/>
-          </a:prstGeom>
-          <a:noFill/>
-        </p:spPr>
-        <p:txBody>
-          <a:bodyPr wrap="square">
-            <a:spAutoFit/>
-          </a:bodyPr>
-          <a:lstStyle/>
-          <a:p>
-            <a:r>
-              <a:rPr sz="1600" b="0">
-                <a:solidFill>
-                  <a:srgbClr val="0000FF"/>
-                </a:solidFill>
-              </a:rPr>
-              <a:t>Workshop Guide → Section 5</a:t>
-            </a:r>
-          </a:p>
-        </p:txBody>
-      </p:sp>
-    </p:spTree>
-  </p:cSld>
-  <p:clrMapOvr>
-    <a:masterClrMapping/>
-  </p:clrMapOvr>
-  <p:transition xmlns:p14="http://schemas.microsoft.com/office/powerpoint/2010/main" spd="med" advClick="1"/>
-</p:sld>
-</file>
-
 <file path=ppt/slides/slide16.xml><?xml version="1.0" encoding="utf-8"?>
 <p:sld xmlns:a="http://schemas.openxmlformats.org/drawingml/2006/main" xmlns:r="http://schemas.openxmlformats.org/officeDocument/2006/relationships" xmlns:p="http://schemas.openxmlformats.org/presentationml/2006/main" xmlns:m="http://schemas.openxmlformats.org/officeDocument/2006/math" xmlns:a14="http://schemas.microsoft.com/office/drawing/2010/main" showMasterSp="1" showMasterPhAnim="1">
   <p:cSld>
@@ -6737,7 +6391,7 @@
         <p:spPr>
           <a:xfrm>
             <a:off x="640080" y="1371600"/>
-            <a:ext cx="10972801" cy="3657600"/>
+            <a:ext cx="5486401" cy="4114800"/>
           </a:xfrm>
           <a:prstGeom prst="rect">
             <a:avLst/>
@@ -6781,7 +6435,7 @@
         <p:spPr>
           <a:xfrm>
             <a:off x="640080" y="1371600"/>
-            <a:ext cx="50801" cy="3657600"/>
+            <a:ext cx="50801" cy="4114800"/>
           </a:xfrm>
           <a:prstGeom prst="rect">
             <a:avLst/>
@@ -6818,7 +6472,95 @@
       </p:sp>
       <p:sp>
         <p:nvSpPr>
-          <p:cNvPr id="5" name="TextBox 4"/>
+          <p:cNvPr id="5" name="Rectangle 4"/>
+          <p:cNvSpPr/>
+          <p:nvPr/>
+        </p:nvSpPr>
+        <p:spPr>
+          <a:xfrm>
+            <a:off x="6583680" y="1371600"/>
+            <a:ext cx="5029201" cy="4114800"/>
+          </a:xfrm>
+          <a:prstGeom prst="rect">
+            <a:avLst/>
+          </a:prstGeom>
+          <a:solidFill>
+            <a:srgbClr val="FDF6F0"/>
+          </a:solidFill>
+          <a:ln>
+            <a:noFill/>
+          </a:ln>
+          <a:effectLst/>
+        </p:spPr>
+        <p:style>
+          <a:lnRef idx="1">
+            <a:schemeClr val="accent1"/>
+          </a:lnRef>
+          <a:fillRef idx="3">
+            <a:schemeClr val="accent1"/>
+          </a:fillRef>
+          <a:effectRef idx="2">
+            <a:schemeClr val="accent1"/>
+          </a:effectRef>
+          <a:fontRef idx="minor">
+            <a:schemeClr val="lt1"/>
+          </a:fontRef>
+        </p:style>
+        <p:txBody>
+          <a:bodyPr rtlCol="0" anchor="ctr"/>
+          <a:lstStyle/>
+          <a:p>
+            <a:pPr algn="ctr"/>
+          </a:p>
+        </p:txBody>
+      </p:sp>
+      <p:sp>
+        <p:nvSpPr>
+          <p:cNvPr id="6" name="Rectangle 5"/>
+          <p:cNvSpPr/>
+          <p:nvPr/>
+        </p:nvSpPr>
+        <p:spPr>
+          <a:xfrm>
+            <a:off x="6583680" y="1371600"/>
+            <a:ext cx="50801" cy="4114800"/>
+          </a:xfrm>
+          <a:prstGeom prst="rect">
+            <a:avLst/>
+          </a:prstGeom>
+          <a:solidFill>
+            <a:srgbClr val="E8833A"/>
+          </a:solidFill>
+          <a:ln>
+            <a:noFill/>
+          </a:ln>
+          <a:effectLst/>
+        </p:spPr>
+        <p:style>
+          <a:lnRef idx="1">
+            <a:schemeClr val="accent1"/>
+          </a:lnRef>
+          <a:fillRef idx="3">
+            <a:schemeClr val="accent1"/>
+          </a:fillRef>
+          <a:effectRef idx="2">
+            <a:schemeClr val="accent1"/>
+          </a:effectRef>
+          <a:fontRef idx="minor">
+            <a:schemeClr val="lt1"/>
+          </a:fontRef>
+        </p:style>
+        <p:txBody>
+          <a:bodyPr rtlCol="0" anchor="ctr"/>
+          <a:lstStyle/>
+          <a:p>
+            <a:pPr algn="ctr"/>
+          </a:p>
+        </p:txBody>
+      </p:sp>
+      <p:sp>
+        <p:nvSpPr>
+          <p:cNvPr id="7" name="TextBox 6"/>
           <p:cNvSpPr txBox="1"/>
           <p:nvPr/>
         </p:nvSpPr>
@@ -6844,21 +6586,21 @@
                   <a:srgbClr val="FFFFFF"/>
                 </a:solidFill>
               </a:rPr>
-              <a:t>Think · Pair · Share: Match the Tool (2 min)</a:t>
-            </a:r>
-          </a:p>
-        </p:txBody>
-      </p:sp>
-      <p:sp>
-        <p:nvSpPr>
-          <p:cNvPr id="6" name="TextBox 5"/>
+              <a:t>The Fidelity Spectrum</a:t>
+            </a:r>
+          </a:p>
+        </p:txBody>
+      </p:sp>
+      <p:sp>
+        <p:nvSpPr>
+          <p:cNvPr id="8" name="TextBox 7"/>
           <p:cNvSpPr txBox="1"/>
           <p:nvPr/>
         </p:nvSpPr>
         <p:spPr>
           <a:xfrm>
-            <a:off x="1143000" y="1828800"/>
-            <a:ext cx="9966961" cy="1985576"/>
+            <a:off x="502919" y="1097280"/>
+            <a:ext cx="11155682" cy="300594"/>
           </a:xfrm>
           <a:prstGeom prst="rect">
             <a:avLst/>
@@ -6872,41 +6614,26 @@
           <a:lstStyle/>
           <a:p>
             <a:r>
-              <a:rPr sz="2200" b="0">
-                <a:solidFill>
-                  <a:srgbClr val="1E4258"/>
+              <a:rPr sz="1600" b="0">
+                <a:solidFill>
+                  <a:srgbClr val="5B6B7C"/>
                 </a:solidFill>
               </a:rPr>
-              <a:t>Pick a clinical skill your fellows need to learn.</a:t>
-            </a:r>
-          </a:p>
-          <a:p>
-            <a:pPr>
-              <a:spcBef>
-                <a:spcPts val="1600"/>
-              </a:spcBef>
-            </a:pPr>
-            <a:r>
-              <a:rPr sz="2200" b="0">
-                <a:solidFill>
-                  <a:srgbClr val="1E4258"/>
-                </a:solidFill>
-              </a:rPr>
-              <a:t>Which point on the spectrum fits, and would the free option do the job?</a:t>
-            </a:r>
-          </a:p>
-        </p:txBody>
-      </p:sp>
-      <p:sp>
-        <p:nvSpPr>
-          <p:cNvPr id="7" name="TextBox 6"/>
+              <a:t>Match the tool to the goal, not the other way around</a:t>
+            </a:r>
+          </a:p>
+        </p:txBody>
+      </p:sp>
+      <p:sp>
+        <p:nvSpPr>
+          <p:cNvPr id="9" name="TextBox 8"/>
           <p:cNvSpPr txBox="1"/>
           <p:nvPr/>
         </p:nvSpPr>
         <p:spPr>
           <a:xfrm>
-            <a:off x="1143000" y="5303520"/>
-            <a:ext cx="9966961" cy="300594"/>
+            <a:off x="960119" y="1554480"/>
+            <a:ext cx="4937762" cy="225708"/>
           </a:xfrm>
           <a:prstGeom prst="rect">
             <a:avLst/>
@@ -6920,12 +6647,224 @@
           <a:lstStyle/>
           <a:p>
             <a:r>
+              <a:rPr sz="1100" b="1">
+                <a:solidFill>
+                  <a:srgbClr val="2D5F7C"/>
+                </a:solidFill>
+              </a:rPr>
+              <a:t>THE SPECTRUM, LEFT TO RIGHT</a:t>
+            </a:r>
+          </a:p>
+        </p:txBody>
+      </p:sp>
+      <p:sp>
+        <p:nvSpPr>
+          <p:cNvPr id="10" name="TextBox 9"/>
+          <p:cNvSpPr txBox="1"/>
+          <p:nvPr/>
+        </p:nvSpPr>
+        <p:spPr>
+          <a:xfrm>
+            <a:off x="960119" y="1920239"/>
+            <a:ext cx="4937762" cy="2301589"/>
+          </a:xfrm>
+          <a:prstGeom prst="rect">
+            <a:avLst/>
+          </a:prstGeom>
+          <a:noFill/>
+        </p:spPr>
+        <p:txBody>
+          <a:bodyPr wrap="square">
+            <a:spAutoFit/>
+          </a:bodyPr>
+          <a:lstStyle/>
+          <a:p>
+            <a:r>
+              <a:rPr sz="1800" b="0">
+                <a:solidFill>
+                  <a:srgbClr val="1A2332"/>
+                </a:solidFill>
+              </a:rPr>
+              <a:t>• Text and audio, $0 to $20/mo</a:t>
+            </a:r>
+          </a:p>
+          <a:p>
+            <a:pPr>
+              <a:spcBef>
+                <a:spcPts val="1000"/>
+              </a:spcBef>
+            </a:pPr>
+            <a:r>
+              <a:rPr sz="1800" b="0">
+                <a:solidFill>
+                  <a:srgbClr val="1A2332"/>
+                </a:solidFill>
+              </a:rPr>
+              <a:t>• Image-based, free to $25</a:t>
+            </a:r>
+          </a:p>
+          <a:p>
+            <a:pPr>
+              <a:spcBef>
+                <a:spcPts val="1000"/>
+              </a:spcBef>
+            </a:pPr>
+            <a:r>
+              <a:rPr sz="1800" b="0">
+                <a:solidFill>
+                  <a:srgbClr val="1A2332"/>
+                </a:solidFill>
+              </a:rPr>
+              <a:t>• Screen-based, free trials</a:t>
+            </a:r>
+          </a:p>
+          <a:p>
+            <a:pPr>
+              <a:spcBef>
+                <a:spcPts val="1000"/>
+              </a:spcBef>
+            </a:pPr>
+            <a:r>
+              <a:rPr sz="1800" b="0">
+                <a:solidFill>
+                  <a:srgbClr val="1A2332"/>
+                </a:solidFill>
+              </a:rPr>
+              <a:t>• AR on your phone, free to $25</a:t>
+            </a:r>
+          </a:p>
+          <a:p>
+            <a:pPr>
+              <a:spcBef>
+                <a:spcPts val="1000"/>
+              </a:spcBef>
+            </a:pPr>
+            <a:r>
+              <a:rPr sz="1800" b="0">
+                <a:solidFill>
+                  <a:srgbClr val="1A2332"/>
+                </a:solidFill>
+              </a:rPr>
+              <a:t>• Immersive VR, $100 to $600</a:t>
+            </a:r>
+          </a:p>
+        </p:txBody>
+      </p:sp>
+      <p:sp>
+        <p:nvSpPr>
+          <p:cNvPr id="11" name="TextBox 10"/>
+          <p:cNvSpPr txBox="1"/>
+          <p:nvPr/>
+        </p:nvSpPr>
+        <p:spPr>
+          <a:xfrm>
+            <a:off x="6903719" y="1554480"/>
+            <a:ext cx="4480562" cy="225708"/>
+          </a:xfrm>
+          <a:prstGeom prst="rect">
+            <a:avLst/>
+          </a:prstGeom>
+          <a:noFill/>
+        </p:spPr>
+        <p:txBody>
+          <a:bodyPr wrap="square">
+            <a:spAutoFit/>
+          </a:bodyPr>
+          <a:lstStyle/>
+          <a:p>
+            <a:r>
+              <a:rPr sz="1100" b="1">
+                <a:solidFill>
+                  <a:srgbClr val="E8833A"/>
+                </a:solidFill>
+              </a:rPr>
+              <a:t>WHERE REASONING LIVES</a:t>
+            </a:r>
+          </a:p>
+        </p:txBody>
+      </p:sp>
+      <p:sp>
+        <p:nvSpPr>
+          <p:cNvPr id="12" name="TextBox 11"/>
+          <p:cNvSpPr txBox="1"/>
+          <p:nvPr/>
+        </p:nvSpPr>
+        <p:spPr>
+          <a:xfrm>
+            <a:off x="6903719" y="1920239"/>
+            <a:ext cx="4480562" cy="2301589"/>
+          </a:xfrm>
+          <a:prstGeom prst="rect">
+            <a:avLst/>
+          </a:prstGeom>
+          <a:noFill/>
+        </p:spPr>
+        <p:txBody>
+          <a:bodyPr wrap="square">
+            <a:spAutoFit/>
+          </a:bodyPr>
+          <a:lstStyle/>
+          <a:p>
+            <a:r>
+              <a:rPr sz="1800">
+                <a:solidFill>
+                  <a:srgbClr val="1A2332"/>
+                </a:solidFill>
+              </a:rPr>
+              <a:t>Text and audio, images included: ECG, X-ray, CT, labs.</a:t>
+            </a:r>
+          </a:p>
+          <a:p>
+            <a:r>
+              <a:rPr sz="1800">
+                <a:solidFill>
+                  <a:srgbClr val="1A2332"/>
+                </a:solidFill>
+              </a:rPr>
+              <a:t>The uncanny valley of avatar tools is real.</a:t>
+            </a:r>
+          </a:p>
+          <a:p>
+            <a:r>
+              <a:rPr sz="1800">
+                <a:solidFill>
+                  <a:srgbClr val="1A2332"/>
+                </a:solidFill>
+              </a:rPr>
+              <a:t>Some text-and-audio tools already do this well.</a:t>
+            </a:r>
+          </a:p>
+        </p:txBody>
+      </p:sp>
+      <p:sp>
+        <p:nvSpPr>
+          <p:cNvPr id="13" name="TextBox 12"/>
+          <p:cNvSpPr txBox="1"/>
+          <p:nvPr/>
+        </p:nvSpPr>
+        <p:spPr>
+          <a:xfrm>
+            <a:off x="502919" y="5715000"/>
+            <a:ext cx="11155682" cy="300594"/>
+          </a:xfrm>
+          <a:prstGeom prst="rect">
+            <a:avLst/>
+          </a:prstGeom>
+          <a:noFill/>
+        </p:spPr>
+        <p:txBody>
+          <a:bodyPr wrap="square">
+            <a:spAutoFit/>
+          </a:bodyPr>
+          <a:lstStyle/>
+          <a:p>
+            <a:r>
               <a:rPr sz="1600" b="0">
                 <a:solidFill>
                   <a:srgbClr val="0000FF"/>
                 </a:solidFill>
               </a:rPr>
-              <a:t>Workshop Guide → Section 5</a:t>
+              <a:t>Workshop Guide → Sections 5 + 6 (VR: your take-home)</a:t>
             </a:r>
           </a:p>
         </p:txBody>
@@ -6940,6 +6879,278 @@
 </file>
 
 <file path=ppt/slides/slide17.xml><?xml version="1.0" encoding="utf-8"?>
+<p:sld xmlns:a="http://schemas.openxmlformats.org/drawingml/2006/main" xmlns:r="http://schemas.openxmlformats.org/officeDocument/2006/relationships" xmlns:p="http://schemas.openxmlformats.org/presentationml/2006/main" xmlns:m="http://schemas.openxmlformats.org/officeDocument/2006/math" xmlns:a14="http://schemas.microsoft.com/office/drawing/2010/main" showMasterSp="1" showMasterPhAnim="1">
+  <p:cSld>
+    <p:spTree>
+      <p:nvGrpSpPr>
+        <p:cNvPr id="1" name=""/>
+        <p:cNvGrpSpPr/>
+        <p:nvPr/>
+      </p:nvGrpSpPr>
+      <p:grpSpPr>
+        <a:xfrm>
+          <a:off x="0" y="0"/>
+          <a:ext cx="0" cy="0"/>
+          <a:chOff x="0" y="0"/>
+          <a:chExt cx="0" cy="0"/>
+        </a:xfrm>
+      </p:grpSpPr>
+      <p:sp>
+        <p:nvSpPr>
+          <p:cNvPr id="2" name="Rectangle 1"/>
+          <p:cNvSpPr/>
+          <p:nvPr/>
+        </p:nvSpPr>
+        <p:spPr>
+          <a:xfrm>
+            <a:off x="-1" y="0"/>
+            <a:ext cx="12191697" cy="1005839"/>
+          </a:xfrm>
+          <a:prstGeom prst="rect">
+            <a:avLst/>
+          </a:prstGeom>
+          <a:solidFill>
+            <a:srgbClr val="2D5F7C"/>
+          </a:solidFill>
+          <a:ln>
+            <a:noFill/>
+          </a:ln>
+          <a:effectLst/>
+        </p:spPr>
+        <p:style>
+          <a:lnRef idx="1">
+            <a:schemeClr val="accent1"/>
+          </a:lnRef>
+          <a:fillRef idx="3">
+            <a:schemeClr val="accent1"/>
+          </a:fillRef>
+          <a:effectRef idx="2">
+            <a:schemeClr val="accent1"/>
+          </a:effectRef>
+          <a:fontRef idx="minor">
+            <a:schemeClr val="lt1"/>
+          </a:fontRef>
+        </p:style>
+        <p:txBody>
+          <a:bodyPr rtlCol="0" anchor="ctr"/>
+          <a:lstStyle/>
+          <a:p>
+            <a:pPr algn="ctr"/>
+          </a:p>
+        </p:txBody>
+      </p:sp>
+      <p:sp>
+        <p:nvSpPr>
+          <p:cNvPr id="3" name="Rectangle 2"/>
+          <p:cNvSpPr/>
+          <p:nvPr/>
+        </p:nvSpPr>
+        <p:spPr>
+          <a:xfrm>
+            <a:off x="640080" y="1371600"/>
+            <a:ext cx="10972801" cy="3657600"/>
+          </a:xfrm>
+          <a:prstGeom prst="rect">
+            <a:avLst/>
+          </a:prstGeom>
+          <a:solidFill>
+            <a:srgbClr val="F0F4F8"/>
+          </a:solidFill>
+          <a:ln>
+            <a:noFill/>
+          </a:ln>
+          <a:effectLst/>
+        </p:spPr>
+        <p:style>
+          <a:lnRef idx="1">
+            <a:schemeClr val="accent1"/>
+          </a:lnRef>
+          <a:fillRef idx="3">
+            <a:schemeClr val="accent1"/>
+          </a:fillRef>
+          <a:effectRef idx="2">
+            <a:schemeClr val="accent1"/>
+          </a:effectRef>
+          <a:fontRef idx="minor">
+            <a:schemeClr val="lt1"/>
+          </a:fontRef>
+        </p:style>
+        <p:txBody>
+          <a:bodyPr rtlCol="0" anchor="ctr"/>
+          <a:lstStyle/>
+          <a:p>
+            <a:pPr algn="ctr"/>
+          </a:p>
+        </p:txBody>
+      </p:sp>
+      <p:sp>
+        <p:nvSpPr>
+          <p:cNvPr id="4" name="Rectangle 3"/>
+          <p:cNvSpPr/>
+          <p:nvPr/>
+        </p:nvSpPr>
+        <p:spPr>
+          <a:xfrm>
+            <a:off x="640080" y="1371600"/>
+            <a:ext cx="50801" cy="3657600"/>
+          </a:xfrm>
+          <a:prstGeom prst="rect">
+            <a:avLst/>
+          </a:prstGeom>
+          <a:solidFill>
+            <a:srgbClr val="2D5F7C"/>
+          </a:solidFill>
+          <a:ln>
+            <a:noFill/>
+          </a:ln>
+          <a:effectLst/>
+        </p:spPr>
+        <p:style>
+          <a:lnRef idx="1">
+            <a:schemeClr val="accent1"/>
+          </a:lnRef>
+          <a:fillRef idx="3">
+            <a:schemeClr val="accent1"/>
+          </a:fillRef>
+          <a:effectRef idx="2">
+            <a:schemeClr val="accent1"/>
+          </a:effectRef>
+          <a:fontRef idx="minor">
+            <a:schemeClr val="lt1"/>
+          </a:fontRef>
+        </p:style>
+        <p:txBody>
+          <a:bodyPr rtlCol="0" anchor="ctr"/>
+          <a:lstStyle/>
+          <a:p>
+            <a:pPr algn="ctr"/>
+          </a:p>
+        </p:txBody>
+      </p:sp>
+      <p:sp>
+        <p:nvSpPr>
+          <p:cNvPr id="5" name="TextBox 4"/>
+          <p:cNvSpPr txBox="1"/>
+          <p:nvPr/>
+        </p:nvSpPr>
+        <p:spPr>
+          <a:xfrm>
+            <a:off x="502919" y="182879"/>
+            <a:ext cx="11155682" cy="444759"/>
+          </a:xfrm>
+          <a:prstGeom prst="rect">
+            <a:avLst/>
+          </a:prstGeom>
+          <a:noFill/>
+        </p:spPr>
+        <p:txBody>
+          <a:bodyPr wrap="square">
+            <a:spAutoFit/>
+          </a:bodyPr>
+          <a:lstStyle/>
+          <a:p>
+            <a:r>
+              <a:rPr sz="2800" b="1">
+                <a:solidFill>
+                  <a:srgbClr val="FFFFFF"/>
+                </a:solidFill>
+              </a:rPr>
+              <a:t>Think · Pair · Share: Match the Tool (2 min)</a:t>
+            </a:r>
+          </a:p>
+        </p:txBody>
+      </p:sp>
+      <p:sp>
+        <p:nvSpPr>
+          <p:cNvPr id="6" name="TextBox 5"/>
+          <p:cNvSpPr txBox="1"/>
+          <p:nvPr/>
+        </p:nvSpPr>
+        <p:spPr>
+          <a:xfrm>
+            <a:off x="1143000" y="1828800"/>
+            <a:ext cx="9966961" cy="1985576"/>
+          </a:xfrm>
+          <a:prstGeom prst="rect">
+            <a:avLst/>
+          </a:prstGeom>
+          <a:noFill/>
+        </p:spPr>
+        <p:txBody>
+          <a:bodyPr wrap="square">
+            <a:spAutoFit/>
+          </a:bodyPr>
+          <a:lstStyle/>
+          <a:p>
+            <a:r>
+              <a:rPr sz="2200" b="0">
+                <a:solidFill>
+                  <a:srgbClr val="1E4258"/>
+                </a:solidFill>
+              </a:rPr>
+              <a:t>Pick a clinical skill your fellows need to learn.</a:t>
+            </a:r>
+          </a:p>
+          <a:p>
+            <a:pPr>
+              <a:spcBef>
+                <a:spcPts val="1600"/>
+              </a:spcBef>
+            </a:pPr>
+            <a:r>
+              <a:rPr sz="2200" b="0">
+                <a:solidFill>
+                  <a:srgbClr val="1E4258"/>
+                </a:solidFill>
+              </a:rPr>
+              <a:t>Which point on the spectrum fits, and would the free option do the job?</a:t>
+            </a:r>
+          </a:p>
+        </p:txBody>
+      </p:sp>
+      <p:sp>
+        <p:nvSpPr>
+          <p:cNvPr id="7" name="TextBox 6"/>
+          <p:cNvSpPr txBox="1"/>
+          <p:nvPr/>
+        </p:nvSpPr>
+        <p:spPr>
+          <a:xfrm>
+            <a:off x="1143000" y="5303520"/>
+            <a:ext cx="9966961" cy="300594"/>
+          </a:xfrm>
+          <a:prstGeom prst="rect">
+            <a:avLst/>
+          </a:prstGeom>
+          <a:noFill/>
+        </p:spPr>
+        <p:txBody>
+          <a:bodyPr wrap="square">
+            <a:spAutoFit/>
+          </a:bodyPr>
+          <a:lstStyle/>
+          <a:p>
+            <a:r>
+              <a:rPr sz="1600" b="0">
+                <a:solidFill>
+                  <a:srgbClr val="0000FF"/>
+                </a:solidFill>
+              </a:rPr>
+              <a:t>Workshop Guide → Section 5</a:t>
+            </a:r>
+          </a:p>
+        </p:txBody>
+      </p:sp>
+    </p:spTree>
+  </p:cSld>
+  <p:clrMapOvr>
+    <a:masterClrMapping/>
+  </p:clrMapOvr>
+  <p:transition xmlns:p14="http://schemas.microsoft.com/office/powerpoint/2010/main" spd="med" advClick="1"/>
+</p:sld>
+</file>
+
+<file path=ppt/slides/slide18.xml><?xml version="1.0" encoding="utf-8"?>
 <p:sld xmlns:a="http://schemas.openxmlformats.org/drawingml/2006/main" xmlns:r="http://schemas.openxmlformats.org/officeDocument/2006/relationships" xmlns:p="http://schemas.openxmlformats.org/presentationml/2006/main" xmlns:m="http://schemas.openxmlformats.org/officeDocument/2006/math" xmlns:a14="http://schemas.microsoft.com/office/drawing/2010/main" showMasterSp="1" showMasterPhAnim="1">
   <p:cSld>
     <p:spTree>
@@ -8534,278 +8745,6 @@
 </p:sld>
 </file>
 
-<file path=ppt/slides/slide18.xml><?xml version="1.0" encoding="utf-8"?>
-<p:sld xmlns:a="http://schemas.openxmlformats.org/drawingml/2006/main" xmlns:r="http://schemas.openxmlformats.org/officeDocument/2006/relationships" xmlns:p="http://schemas.openxmlformats.org/presentationml/2006/main" xmlns:m="http://schemas.openxmlformats.org/officeDocument/2006/math" xmlns:a14="http://schemas.microsoft.com/office/drawing/2010/main" showMasterSp="1" showMasterPhAnim="1">
-  <p:cSld>
-    <p:spTree>
-      <p:nvGrpSpPr>
-        <p:cNvPr id="1" name=""/>
-        <p:cNvGrpSpPr/>
-        <p:nvPr/>
-      </p:nvGrpSpPr>
-      <p:grpSpPr>
-        <a:xfrm>
-          <a:off x="0" y="0"/>
-          <a:ext cx="0" cy="0"/>
-          <a:chOff x="0" y="0"/>
-          <a:chExt cx="0" cy="0"/>
-        </a:xfrm>
-      </p:grpSpPr>
-      <p:sp>
-        <p:nvSpPr>
-          <p:cNvPr id="2" name="Rectangle 1"/>
-          <p:cNvSpPr/>
-          <p:nvPr/>
-        </p:nvSpPr>
-        <p:spPr>
-          <a:xfrm>
-            <a:off x="-1" y="0"/>
-            <a:ext cx="12191697" cy="1005839"/>
-          </a:xfrm>
-          <a:prstGeom prst="rect">
-            <a:avLst/>
-          </a:prstGeom>
-          <a:solidFill>
-            <a:srgbClr val="2D5F7C"/>
-          </a:solidFill>
-          <a:ln>
-            <a:noFill/>
-          </a:ln>
-          <a:effectLst/>
-        </p:spPr>
-        <p:style>
-          <a:lnRef idx="1">
-            <a:schemeClr val="accent1"/>
-          </a:lnRef>
-          <a:fillRef idx="3">
-            <a:schemeClr val="accent1"/>
-          </a:fillRef>
-          <a:effectRef idx="2">
-            <a:schemeClr val="accent1"/>
-          </a:effectRef>
-          <a:fontRef idx="minor">
-            <a:schemeClr val="lt1"/>
-          </a:fontRef>
-        </p:style>
-        <p:txBody>
-          <a:bodyPr rtlCol="0" anchor="ctr"/>
-          <a:lstStyle/>
-          <a:p>
-            <a:pPr algn="ctr"/>
-          </a:p>
-        </p:txBody>
-      </p:sp>
-      <p:sp>
-        <p:nvSpPr>
-          <p:cNvPr id="3" name="Rectangle 2"/>
-          <p:cNvSpPr/>
-          <p:nvPr/>
-        </p:nvSpPr>
-        <p:spPr>
-          <a:xfrm>
-            <a:off x="640080" y="1371600"/>
-            <a:ext cx="10972801" cy="3657600"/>
-          </a:xfrm>
-          <a:prstGeom prst="rect">
-            <a:avLst/>
-          </a:prstGeom>
-          <a:solidFill>
-            <a:srgbClr val="F0F4F8"/>
-          </a:solidFill>
-          <a:ln>
-            <a:noFill/>
-          </a:ln>
-          <a:effectLst/>
-        </p:spPr>
-        <p:style>
-          <a:lnRef idx="1">
-            <a:schemeClr val="accent1"/>
-          </a:lnRef>
-          <a:fillRef idx="3">
-            <a:schemeClr val="accent1"/>
-          </a:fillRef>
-          <a:effectRef idx="2">
-            <a:schemeClr val="accent1"/>
-          </a:effectRef>
-          <a:fontRef idx="minor">
-            <a:schemeClr val="lt1"/>
-          </a:fontRef>
-        </p:style>
-        <p:txBody>
-          <a:bodyPr rtlCol="0" anchor="ctr"/>
-          <a:lstStyle/>
-          <a:p>
-            <a:pPr algn="ctr"/>
-          </a:p>
-        </p:txBody>
-      </p:sp>
-      <p:sp>
-        <p:nvSpPr>
-          <p:cNvPr id="4" name="Rectangle 3"/>
-          <p:cNvSpPr/>
-          <p:nvPr/>
-        </p:nvSpPr>
-        <p:spPr>
-          <a:xfrm>
-            <a:off x="640080" y="1371600"/>
-            <a:ext cx="50801" cy="3657600"/>
-          </a:xfrm>
-          <a:prstGeom prst="rect">
-            <a:avLst/>
-          </a:prstGeom>
-          <a:solidFill>
-            <a:srgbClr val="2D5F7C"/>
-          </a:solidFill>
-          <a:ln>
-            <a:noFill/>
-          </a:ln>
-          <a:effectLst/>
-        </p:spPr>
-        <p:style>
-          <a:lnRef idx="1">
-            <a:schemeClr val="accent1"/>
-          </a:lnRef>
-          <a:fillRef idx="3">
-            <a:schemeClr val="accent1"/>
-          </a:fillRef>
-          <a:effectRef idx="2">
-            <a:schemeClr val="accent1"/>
-          </a:effectRef>
-          <a:fontRef idx="minor">
-            <a:schemeClr val="lt1"/>
-          </a:fontRef>
-        </p:style>
-        <p:txBody>
-          <a:bodyPr rtlCol="0" anchor="ctr"/>
-          <a:lstStyle/>
-          <a:p>
-            <a:pPr algn="ctr"/>
-          </a:p>
-        </p:txBody>
-      </p:sp>
-      <p:sp>
-        <p:nvSpPr>
-          <p:cNvPr id="5" name="TextBox 4"/>
-          <p:cNvSpPr txBox="1"/>
-          <p:nvPr/>
-        </p:nvSpPr>
-        <p:spPr>
-          <a:xfrm>
-            <a:off x="502919" y="182879"/>
-            <a:ext cx="11155682" cy="444759"/>
-          </a:xfrm>
-          <a:prstGeom prst="rect">
-            <a:avLst/>
-          </a:prstGeom>
-          <a:noFill/>
-        </p:spPr>
-        <p:txBody>
-          <a:bodyPr wrap="square">
-            <a:spAutoFit/>
-          </a:bodyPr>
-          <a:lstStyle/>
-          <a:p>
-            <a:r>
-              <a:rPr sz="2800" b="1">
-                <a:solidFill>
-                  <a:srgbClr val="FFFFFF"/>
-                </a:solidFill>
-              </a:rPr>
-              <a:t>Share-Out (4 min)</a:t>
-            </a:r>
-          </a:p>
-        </p:txBody>
-      </p:sp>
-      <p:sp>
-        <p:nvSpPr>
-          <p:cNvPr id="6" name="TextBox 5"/>
-          <p:cNvSpPr txBox="1"/>
-          <p:nvPr/>
-        </p:nvSpPr>
-        <p:spPr>
-          <a:xfrm>
-            <a:off x="1143000" y="1828800"/>
-            <a:ext cx="9966961" cy="1985576"/>
-          </a:xfrm>
-          <a:prstGeom prst="rect">
-            <a:avLst/>
-          </a:prstGeom>
-          <a:noFill/>
-        </p:spPr>
-        <p:txBody>
-          <a:bodyPr wrap="square">
-            <a:spAutoFit/>
-          </a:bodyPr>
-          <a:lstStyle/>
-          <a:p>
-            <a:r>
-              <a:rPr sz="2200" b="0">
-                <a:solidFill>
-                  <a:srgbClr val="1E4258"/>
-                </a:solidFill>
-              </a:rPr>
-              <a:t>Two or three groups share their plan, 60 seconds each.</a:t>
-            </a:r>
-          </a:p>
-          <a:p>
-            <a:pPr>
-              <a:spcBef>
-                <a:spcPts val="1600"/>
-              </a:spcBef>
-            </a:pPr>
-            <a:r>
-              <a:rPr sz="2200" b="0">
-                <a:solidFill>
-                  <a:srgbClr val="1E4258"/>
-                </a:solidFill>
-              </a:rPr>
-              <a:t>What is your educational need? Your tool? Your first step?</a:t>
-            </a:r>
-          </a:p>
-        </p:txBody>
-      </p:sp>
-      <p:sp>
-        <p:nvSpPr>
-          <p:cNvPr id="7" name="TextBox 6"/>
-          <p:cNvSpPr txBox="1"/>
-          <p:nvPr/>
-        </p:nvSpPr>
-        <p:spPr>
-          <a:xfrm>
-            <a:off x="1143000" y="5303520"/>
-            <a:ext cx="9966961" cy="300594"/>
-          </a:xfrm>
-          <a:prstGeom prst="rect">
-            <a:avLst/>
-          </a:prstGeom>
-          <a:noFill/>
-        </p:spPr>
-        <p:txBody>
-          <a:bodyPr wrap="square">
-            <a:spAutoFit/>
-          </a:bodyPr>
-          <a:lstStyle/>
-          <a:p>
-            <a:r>
-              <a:rPr sz="1600" b="0">
-                <a:solidFill>
-                  <a:srgbClr val="0000FF"/>
-                </a:solidFill>
-              </a:rPr>
-              <a:t>Workshop Guide → Section 7 (the worksheet)</a:t>
-            </a:r>
-          </a:p>
-        </p:txBody>
-      </p:sp>
-    </p:spTree>
-  </p:cSld>
-  <p:clrMapOvr>
-    <a:masterClrMapping/>
-  </p:clrMapOvr>
-  <p:transition xmlns:p14="http://schemas.microsoft.com/office/powerpoint/2010/main" spd="med" advClick="1"/>
-</p:sld>
-</file>
-
 <file path=ppt/slides/slide19.xml><?xml version="1.0" encoding="utf-8"?>
 <p:sld xmlns:a="http://schemas.openxmlformats.org/drawingml/2006/main" xmlns:r="http://schemas.openxmlformats.org/officeDocument/2006/relationships" xmlns:p="http://schemas.openxmlformats.org/presentationml/2006/main" xmlns:m="http://schemas.openxmlformats.org/officeDocument/2006/math" xmlns:a14="http://schemas.microsoft.com/office/drawing/2010/main" showMasterSp="1" showMasterPhAnim="1">
   <p:cSld>
@@ -8983,7 +8922,7 @@
                   <a:srgbClr val="FFFFFF"/>
                 </a:solidFill>
               </a:rPr>
-              <a:t>Wrap-Up</a:t>
+              <a:t>Share-Out (4 min)</a:t>
             </a:r>
           </a:p>
         </p:txBody>
@@ -9016,7 +8955,7 @@
                   <a:srgbClr val="1E4258"/>
                 </a:solidFill>
               </a:rPr>
-              <a:t>Start with one tool, one need, one small experiment.</a:t>
+              <a:t>Two or three groups share their plan, 60 seconds each.</a:t>
             </a:r>
           </a:p>
           <a:p>
@@ -9031,22 +8970,7 @@
                   <a:srgbClr val="1E4258"/>
                 </a:solidFill>
               </a:rPr>
-              <a:t>Everything from today is in the Workshop Guide: bookmark it now.</a:t>
-            </a:r>
-          </a:p>
-          <a:p>
-            <a:pPr>
-              <a:spcBef>
-                <a:spcPts val="1600"/>
-              </a:spcBef>
-            </a:pPr>
-            <a:r>
-              <a:rPr sz="2200" b="0">
-                <a:solidFill>
-                  <a:srgbClr val="1E4258"/>
-                </a:solidFill>
-              </a:rPr>
-              <a:t>The Zero Dollar starter kit is in Section 8.</a:t>
+              <a:t>What is your educational need? Your tool? Your first step?</a:t>
             </a:r>
           </a:p>
         </p:txBody>
@@ -9079,7 +9003,7 @@
                   <a:srgbClr val="0000FF"/>
                 </a:solidFill>
               </a:rPr>
-              <a:t>Workshop Guide → Section 8 (all resources)</a:t>
+              <a:t>Workshop Guide → Section 7 (the worksheet)</a:t>
             </a:r>
           </a:p>
         </p:txBody>
@@ -9326,6 +9250,293 @@
 <file path=ppt/slides/slide20.xml><?xml version="1.0" encoding="utf-8"?>
 <p:sld xmlns:a="http://schemas.openxmlformats.org/drawingml/2006/main" xmlns:r="http://schemas.openxmlformats.org/officeDocument/2006/relationships" xmlns:p="http://schemas.openxmlformats.org/presentationml/2006/main" xmlns:m="http://schemas.openxmlformats.org/officeDocument/2006/math" xmlns:a14="http://schemas.microsoft.com/office/drawing/2010/main" showMasterSp="1" showMasterPhAnim="1">
   <p:cSld>
+    <p:spTree>
+      <p:nvGrpSpPr>
+        <p:cNvPr id="1" name=""/>
+        <p:cNvGrpSpPr/>
+        <p:nvPr/>
+      </p:nvGrpSpPr>
+      <p:grpSpPr>
+        <a:xfrm>
+          <a:off x="0" y="0"/>
+          <a:ext cx="0" cy="0"/>
+          <a:chOff x="0" y="0"/>
+          <a:chExt cx="0" cy="0"/>
+        </a:xfrm>
+      </p:grpSpPr>
+      <p:sp>
+        <p:nvSpPr>
+          <p:cNvPr id="2" name="Rectangle 1"/>
+          <p:cNvSpPr/>
+          <p:nvPr/>
+        </p:nvSpPr>
+        <p:spPr>
+          <a:xfrm>
+            <a:off x="-1" y="0"/>
+            <a:ext cx="12191697" cy="1005839"/>
+          </a:xfrm>
+          <a:prstGeom prst="rect">
+            <a:avLst/>
+          </a:prstGeom>
+          <a:solidFill>
+            <a:srgbClr val="2D5F7C"/>
+          </a:solidFill>
+          <a:ln>
+            <a:noFill/>
+          </a:ln>
+          <a:effectLst/>
+        </p:spPr>
+        <p:style>
+          <a:lnRef idx="1">
+            <a:schemeClr val="accent1"/>
+          </a:lnRef>
+          <a:fillRef idx="3">
+            <a:schemeClr val="accent1"/>
+          </a:fillRef>
+          <a:effectRef idx="2">
+            <a:schemeClr val="accent1"/>
+          </a:effectRef>
+          <a:fontRef idx="minor">
+            <a:schemeClr val="lt1"/>
+          </a:fontRef>
+        </p:style>
+        <p:txBody>
+          <a:bodyPr rtlCol="0" anchor="ctr"/>
+          <a:lstStyle/>
+          <a:p>
+            <a:pPr algn="ctr"/>
+          </a:p>
+        </p:txBody>
+      </p:sp>
+      <p:sp>
+        <p:nvSpPr>
+          <p:cNvPr id="3" name="Rectangle 2"/>
+          <p:cNvSpPr/>
+          <p:nvPr/>
+        </p:nvSpPr>
+        <p:spPr>
+          <a:xfrm>
+            <a:off x="640080" y="1371600"/>
+            <a:ext cx="10972801" cy="3657600"/>
+          </a:xfrm>
+          <a:prstGeom prst="rect">
+            <a:avLst/>
+          </a:prstGeom>
+          <a:solidFill>
+            <a:srgbClr val="F0F4F8"/>
+          </a:solidFill>
+          <a:ln>
+            <a:noFill/>
+          </a:ln>
+          <a:effectLst/>
+        </p:spPr>
+        <p:style>
+          <a:lnRef idx="1">
+            <a:schemeClr val="accent1"/>
+          </a:lnRef>
+          <a:fillRef idx="3">
+            <a:schemeClr val="accent1"/>
+          </a:fillRef>
+          <a:effectRef idx="2">
+            <a:schemeClr val="accent1"/>
+          </a:effectRef>
+          <a:fontRef idx="minor">
+            <a:schemeClr val="lt1"/>
+          </a:fontRef>
+        </p:style>
+        <p:txBody>
+          <a:bodyPr rtlCol="0" anchor="ctr"/>
+          <a:lstStyle/>
+          <a:p>
+            <a:pPr algn="ctr"/>
+          </a:p>
+        </p:txBody>
+      </p:sp>
+      <p:sp>
+        <p:nvSpPr>
+          <p:cNvPr id="4" name="Rectangle 3"/>
+          <p:cNvSpPr/>
+          <p:nvPr/>
+        </p:nvSpPr>
+        <p:spPr>
+          <a:xfrm>
+            <a:off x="640080" y="1371600"/>
+            <a:ext cx="50801" cy="3657600"/>
+          </a:xfrm>
+          <a:prstGeom prst="rect">
+            <a:avLst/>
+          </a:prstGeom>
+          <a:solidFill>
+            <a:srgbClr val="2D5F7C"/>
+          </a:solidFill>
+          <a:ln>
+            <a:noFill/>
+          </a:ln>
+          <a:effectLst/>
+        </p:spPr>
+        <p:style>
+          <a:lnRef idx="1">
+            <a:schemeClr val="accent1"/>
+          </a:lnRef>
+          <a:fillRef idx="3">
+            <a:schemeClr val="accent1"/>
+          </a:fillRef>
+          <a:effectRef idx="2">
+            <a:schemeClr val="accent1"/>
+          </a:effectRef>
+          <a:fontRef idx="minor">
+            <a:schemeClr val="lt1"/>
+          </a:fontRef>
+        </p:style>
+        <p:txBody>
+          <a:bodyPr rtlCol="0" anchor="ctr"/>
+          <a:lstStyle/>
+          <a:p>
+            <a:pPr algn="ctr"/>
+          </a:p>
+        </p:txBody>
+      </p:sp>
+      <p:sp>
+        <p:nvSpPr>
+          <p:cNvPr id="5" name="TextBox 4"/>
+          <p:cNvSpPr txBox="1"/>
+          <p:nvPr/>
+        </p:nvSpPr>
+        <p:spPr>
+          <a:xfrm>
+            <a:off x="502919" y="182879"/>
+            <a:ext cx="11155682" cy="444759"/>
+          </a:xfrm>
+          <a:prstGeom prst="rect">
+            <a:avLst/>
+          </a:prstGeom>
+          <a:noFill/>
+        </p:spPr>
+        <p:txBody>
+          <a:bodyPr wrap="square">
+            <a:spAutoFit/>
+          </a:bodyPr>
+          <a:lstStyle/>
+          <a:p>
+            <a:r>
+              <a:rPr sz="2800" b="1">
+                <a:solidFill>
+                  <a:srgbClr val="FFFFFF"/>
+                </a:solidFill>
+              </a:rPr>
+              <a:t>Wrap-Up</a:t>
+            </a:r>
+          </a:p>
+        </p:txBody>
+      </p:sp>
+      <p:sp>
+        <p:nvSpPr>
+          <p:cNvPr id="6" name="TextBox 5"/>
+          <p:cNvSpPr txBox="1"/>
+          <p:nvPr/>
+        </p:nvSpPr>
+        <p:spPr>
+          <a:xfrm>
+            <a:off x="1143000" y="1828800"/>
+            <a:ext cx="9966961" cy="1985576"/>
+          </a:xfrm>
+          <a:prstGeom prst="rect">
+            <a:avLst/>
+          </a:prstGeom>
+          <a:noFill/>
+        </p:spPr>
+        <p:txBody>
+          <a:bodyPr wrap="square">
+            <a:spAutoFit/>
+          </a:bodyPr>
+          <a:lstStyle/>
+          <a:p>
+            <a:r>
+              <a:rPr sz="2200" b="0">
+                <a:solidFill>
+                  <a:srgbClr val="1E4258"/>
+                </a:solidFill>
+              </a:rPr>
+              <a:t>Start with one tool, one need, one small experiment.</a:t>
+            </a:r>
+          </a:p>
+          <a:p>
+            <a:pPr>
+              <a:spcBef>
+                <a:spcPts val="1600"/>
+              </a:spcBef>
+            </a:pPr>
+            <a:r>
+              <a:rPr sz="2200" b="0">
+                <a:solidFill>
+                  <a:srgbClr val="1E4258"/>
+                </a:solidFill>
+              </a:rPr>
+              <a:t>Everything from today is in the Workshop Guide: bookmark it now.</a:t>
+            </a:r>
+          </a:p>
+          <a:p>
+            <a:pPr>
+              <a:spcBef>
+                <a:spcPts val="1600"/>
+              </a:spcBef>
+            </a:pPr>
+            <a:r>
+              <a:rPr sz="2200" b="0">
+                <a:solidFill>
+                  <a:srgbClr val="1E4258"/>
+                </a:solidFill>
+              </a:rPr>
+              <a:t>The Zero Dollar starter kit is in Section 8.</a:t>
+            </a:r>
+          </a:p>
+        </p:txBody>
+      </p:sp>
+      <p:sp>
+        <p:nvSpPr>
+          <p:cNvPr id="7" name="TextBox 6"/>
+          <p:cNvSpPr txBox="1"/>
+          <p:nvPr/>
+        </p:nvSpPr>
+        <p:spPr>
+          <a:xfrm>
+            <a:off x="1143000" y="5303520"/>
+            <a:ext cx="9966961" cy="300594"/>
+          </a:xfrm>
+          <a:prstGeom prst="rect">
+            <a:avLst/>
+          </a:prstGeom>
+          <a:noFill/>
+        </p:spPr>
+        <p:txBody>
+          <a:bodyPr wrap="square">
+            <a:spAutoFit/>
+          </a:bodyPr>
+          <a:lstStyle/>
+          <a:p>
+            <a:r>
+              <a:rPr sz="1600" b="0">
+                <a:solidFill>
+                  <a:srgbClr val="0000FF"/>
+                </a:solidFill>
+              </a:rPr>
+              <a:t>Workshop Guide → Section 8 (all resources)</a:t>
+            </a:r>
+          </a:p>
+        </p:txBody>
+      </p:sp>
+    </p:spTree>
+  </p:cSld>
+  <p:clrMapOvr>
+    <a:masterClrMapping/>
+  </p:clrMapOvr>
+  <p:transition xmlns:p14="http://schemas.microsoft.com/office/powerpoint/2010/main" spd="med" advClick="1"/>
+</p:sld>
+</file>
+
+<file path=ppt/slides/slide21.xml><?xml version="1.0" encoding="utf-8"?>
+<p:sld xmlns:a="http://schemas.openxmlformats.org/drawingml/2006/main" xmlns:r="http://schemas.openxmlformats.org/officeDocument/2006/relationships" xmlns:p="http://schemas.openxmlformats.org/presentationml/2006/main" xmlns:m="http://schemas.openxmlformats.org/officeDocument/2006/math" xmlns:a14="http://schemas.microsoft.com/office/drawing/2010/main" showMasterSp="1" showMasterPhAnim="1">
+  <p:cSld>
     <p:bg>
       <p:bgPr>
         <a:solidFill>
@@ -9798,87 +10009,61 @@
               </a:defRPr>
             </a:pPr>
             <a:r>
-              <a:rPr/>
+              <a:rPr sz="1600">
+                <a:solidFill>
+                  <a:srgbClr val="1A2332"/>
+                </a:solidFill>
+              </a:rPr>
               <a:t>• COI: Diana Brewer is a co-founder of Sapient Clinician</a:t>
             </a:r>
           </a:p>
           <a:p>
-            <a:pPr>
-              <a:spcBef>
-                <a:spcPts val="800"/>
-              </a:spcBef>
-              <a:defRPr>
+            <a:r>
+              <a:rPr sz="1600">
                 <a:solidFill>
                   <a:srgbClr val="1A2332"/>
                 </a:solidFill>
-              </a:defRPr>
-            </a:pPr>
-            <a:r>
-              <a:rPr/>
+              </a:rPr>
               <a:t>• This session is vendor-neutral</a:t>
             </a:r>
           </a:p>
           <a:p>
-            <a:pPr>
-              <a:spcBef>
-                <a:spcPts val="800"/>
-              </a:spcBef>
-              <a:defRPr>
+            <a:r>
+              <a:rPr sz="1600">
                 <a:solidFill>
                   <a:srgbClr val="1A2332"/>
                 </a:solidFill>
-              </a:defRPr>
-            </a:pPr>
-            <a:r>
-              <a:rPr/>
-              <a:t>• 60 min: ~35 min presentation + 20 min workshop + 5 min share &amp; wrap</a:t>
-            </a:r>
-          </a:p>
-          <a:p>
-            <a:pPr>
-              <a:spcBef>
-                <a:spcPts val="800"/>
-              </a:spcBef>
-              <a:defRPr>
+              </a:rPr>
+              <a:t>• 60 min: ~30 min presentation + 20 min workshop + 5 min share &amp; wrap</a:t>
+            </a:r>
+          </a:p>
+          <a:p>
+            <a:r>
+              <a:rPr sz="1600">
                 <a:solidFill>
                   <a:srgbClr val="1A2332"/>
                 </a:solidFill>
-              </a:defRPr>
-            </a:pPr>
-            <a:r>
-              <a:rPr/>
+              </a:rPr>
               <a:t>• Keep the Workshop Guide open on your phone</a:t>
             </a:r>
           </a:p>
           <a:p>
-            <a:pPr>
-              <a:spcBef>
-                <a:spcPts val="800"/>
-              </a:spcBef>
-              <a:defRPr>
+            <a:r>
+              <a:rPr sz="1600">
                 <a:solidFill>
                   <a:srgbClr val="1A2332"/>
                 </a:solidFill>
-              </a:defRPr>
-            </a:pPr>
-            <a:r>
-              <a:rPr/>
+              </a:rPr>
               <a:t>• Think · Pair · Share after each section</a:t>
             </a:r>
           </a:p>
           <a:p>
-            <a:pPr>
-              <a:spcBef>
-                <a:spcPts val="800"/>
-              </a:spcBef>
-              <a:defRPr>
+            <a:r>
+              <a:rPr sz="1600">
                 <a:solidFill>
                   <a:srgbClr val="1A2332"/>
                 </a:solidFill>
-              </a:defRPr>
-            </a:pPr>
-            <a:r>
-              <a:rPr/>
+              </a:rPr>
               <a:t>• Everything stays available after the conference</a:t>
             </a:r>
           </a:p>
@@ -10720,1319 +10905,6 @@
 </file>
 
 <file path=ppt/slides/slide6.xml><?xml version="1.0" encoding="utf-8"?>
-<p:sld xmlns:a="http://schemas.openxmlformats.org/drawingml/2006/main" xmlns:p="http://schemas.openxmlformats.org/presentationml/2006/main" xmlns:r="http://schemas.openxmlformats.org/officeDocument/2006/relationships">
-  <p:cSld>
-    <p:spTree>
-      <p:nvGrpSpPr>
-        <p:cNvPr id="1" name=""/>
-        <p:cNvGrpSpPr/>
-        <p:nvPr/>
-      </p:nvGrpSpPr>
-      <p:grpSpPr/>
-      <p:sp>
-        <p:nvSpPr>
-          <p:cNvPr id="2" name="Rectangle 1"/>
-          <p:cNvSpPr/>
-          <p:nvPr/>
-        </p:nvSpPr>
-        <p:spPr>
-          <a:xfrm>
-            <a:off x="-1" y="0"/>
-            <a:ext cx="12191697" cy="1005839"/>
-          </a:xfrm>
-          <a:prstGeom prst="rect">
-            <a:avLst/>
-          </a:prstGeom>
-          <a:solidFill>
-            <a:srgbClr val="2D5F7C"/>
-          </a:solidFill>
-          <a:ln>
-            <a:noFill/>
-          </a:ln>
-          <a:effectLst/>
-        </p:spPr>
-        <p:style>
-          <a:lnRef idx="1">
-            <a:schemeClr val="accent1"/>
-          </a:lnRef>
-          <a:fillRef idx="3">
-            <a:schemeClr val="accent1"/>
-          </a:fillRef>
-          <a:effectRef idx="2">
-            <a:schemeClr val="accent1"/>
-          </a:effectRef>
-          <a:fontRef idx="minor">
-            <a:schemeClr val="lt1"/>
-          </a:fontRef>
-        </p:style>
-        <p:txBody>
-          <a:bodyPr rtlCol="0" anchor="ctr"/>
-          <a:lstStyle/>
-          <a:p>
-            <a:pPr algn="ctr"/>
-          </a:p>
-        </p:txBody>
-      </p:sp>
-      <p:sp>
-        <p:nvSpPr>
-          <p:cNvPr id="3" name="Rectangle 2"/>
-          <p:cNvSpPr/>
-          <p:nvPr/>
-        </p:nvSpPr>
-        <p:spPr>
-          <a:xfrm>
-            <a:off x="640080" y="1371600"/>
-            <a:ext cx="5486401" cy="4114800"/>
-          </a:xfrm>
-          <a:prstGeom prst="rect">
-            <a:avLst/>
-          </a:prstGeom>
-          <a:solidFill>
-            <a:srgbClr val="F0F4F8"/>
-          </a:solidFill>
-          <a:ln>
-            <a:noFill/>
-          </a:ln>
-          <a:effectLst/>
-        </p:spPr>
-        <p:style>
-          <a:lnRef idx="1">
-            <a:schemeClr val="accent1"/>
-          </a:lnRef>
-          <a:fillRef idx="3">
-            <a:schemeClr val="accent1"/>
-          </a:fillRef>
-          <a:effectRef idx="2">
-            <a:schemeClr val="accent1"/>
-          </a:effectRef>
-          <a:fontRef idx="minor">
-            <a:schemeClr val="lt1"/>
-          </a:fontRef>
-        </p:style>
-        <p:txBody>
-          <a:bodyPr rtlCol="0" anchor="ctr"/>
-          <a:lstStyle/>
-          <a:p>
-            <a:pPr algn="ctr"/>
-          </a:p>
-        </p:txBody>
-      </p:sp>
-      <p:sp>
-        <p:nvSpPr>
-          <p:cNvPr id="4" name="Rectangle 3"/>
-          <p:cNvSpPr/>
-          <p:nvPr/>
-        </p:nvSpPr>
-        <p:spPr>
-          <a:xfrm>
-            <a:off x="640080" y="1371600"/>
-            <a:ext cx="50801" cy="4114800"/>
-          </a:xfrm>
-          <a:prstGeom prst="rect">
-            <a:avLst/>
-          </a:prstGeom>
-          <a:solidFill>
-            <a:srgbClr val="2D5F7C"/>
-          </a:solidFill>
-          <a:ln>
-            <a:noFill/>
-          </a:ln>
-          <a:effectLst/>
-        </p:spPr>
-        <p:style>
-          <a:lnRef idx="1">
-            <a:schemeClr val="accent1"/>
-          </a:lnRef>
-          <a:fillRef idx="3">
-            <a:schemeClr val="accent1"/>
-          </a:fillRef>
-          <a:effectRef idx="2">
-            <a:schemeClr val="accent1"/>
-          </a:effectRef>
-          <a:fontRef idx="minor">
-            <a:schemeClr val="lt1"/>
-          </a:fontRef>
-        </p:style>
-        <p:txBody>
-          <a:bodyPr rtlCol="0" anchor="ctr"/>
-          <a:lstStyle/>
-          <a:p>
-            <a:pPr algn="ctr"/>
-          </a:p>
-        </p:txBody>
-      </p:sp>
-      <p:sp>
-        <p:nvSpPr>
-          <p:cNvPr id="5" name="Rectangle 4"/>
-          <p:cNvSpPr/>
-          <p:nvPr/>
-        </p:nvSpPr>
-        <p:spPr>
-          <a:xfrm>
-            <a:off x="6583680" y="1371600"/>
-            <a:ext cx="5029201" cy="4114800"/>
-          </a:xfrm>
-          <a:prstGeom prst="rect">
-            <a:avLst/>
-          </a:prstGeom>
-          <a:solidFill>
-            <a:srgbClr val="FDF6F0"/>
-          </a:solidFill>
-          <a:ln>
-            <a:noFill/>
-          </a:ln>
-          <a:effectLst/>
-        </p:spPr>
-        <p:style>
-          <a:lnRef idx="1">
-            <a:schemeClr val="accent1"/>
-          </a:lnRef>
-          <a:fillRef idx="3">
-            <a:schemeClr val="accent1"/>
-          </a:fillRef>
-          <a:effectRef idx="2">
-            <a:schemeClr val="accent1"/>
-          </a:effectRef>
-          <a:fontRef idx="minor">
-            <a:schemeClr val="lt1"/>
-          </a:fontRef>
-        </p:style>
-        <p:txBody>
-          <a:bodyPr rtlCol="0" anchor="ctr"/>
-          <a:lstStyle/>
-          <a:p>
-            <a:pPr algn="ctr"/>
-          </a:p>
-        </p:txBody>
-      </p:sp>
-      <p:sp>
-        <p:nvSpPr>
-          <p:cNvPr id="6" name="Rectangle 5"/>
-          <p:cNvSpPr/>
-          <p:nvPr/>
-        </p:nvSpPr>
-        <p:spPr>
-          <a:xfrm>
-            <a:off x="6583680" y="1371600"/>
-            <a:ext cx="50801" cy="4114800"/>
-          </a:xfrm>
-          <a:prstGeom prst="rect">
-            <a:avLst/>
-          </a:prstGeom>
-          <a:solidFill>
-            <a:srgbClr val="E8833A"/>
-          </a:solidFill>
-          <a:ln>
-            <a:noFill/>
-          </a:ln>
-          <a:effectLst/>
-        </p:spPr>
-        <p:style>
-          <a:lnRef idx="1">
-            <a:schemeClr val="accent1"/>
-          </a:lnRef>
-          <a:fillRef idx="3">
-            <a:schemeClr val="accent1"/>
-          </a:fillRef>
-          <a:effectRef idx="2">
-            <a:schemeClr val="accent1"/>
-          </a:effectRef>
-          <a:fontRef idx="minor">
-            <a:schemeClr val="lt1"/>
-          </a:fontRef>
-        </p:style>
-        <p:txBody>
-          <a:bodyPr rtlCol="0" anchor="ctr"/>
-          <a:lstStyle/>
-          <a:p>
-            <a:pPr algn="ctr"/>
-          </a:p>
-        </p:txBody>
-      </p:sp>
-      <p:sp>
-        <p:nvSpPr>
-          <p:cNvPr id="7" name="TextBox 6"/>
-          <p:cNvSpPr txBox="1"/>
-          <p:nvPr/>
-        </p:nvSpPr>
-        <p:spPr>
-          <a:xfrm>
-            <a:off x="502919" y="182879"/>
-            <a:ext cx="11155682" cy="444759"/>
-          </a:xfrm>
-          <a:prstGeom prst="rect">
-            <a:avLst/>
-          </a:prstGeom>
-          <a:noFill/>
-        </p:spPr>
-        <p:txBody>
-          <a:bodyPr wrap="square">
-            <a:spAutoFit/>
-          </a:bodyPr>
-          <a:lstStyle/>
-          <a:p>
-            <a:r>
-              <a:rPr sz="2800" b="1">
-                <a:solidFill>
-                  <a:srgbClr val="FFFFFF"/>
-                </a:solidFill>
-              </a:rPr>
-              <a:t>Demo: The Realism Gap, Part 2: The AI Case, Live</a:t>
-            </a:r>
-          </a:p>
-        </p:txBody>
-      </p:sp>
-      <p:sp>
-        <p:nvSpPr>
-          <p:cNvPr id="8" name="TextBox 7"/>
-          <p:cNvSpPr txBox="1"/>
-          <p:nvPr/>
-        </p:nvSpPr>
-        <p:spPr>
-          <a:xfrm>
-            <a:off x="502919" y="1097280"/>
-            <a:ext cx="11155682" cy="300594"/>
-          </a:xfrm>
-          <a:prstGeom prst="rect">
-            <a:avLst/>
-          </a:prstGeom>
-          <a:noFill/>
-        </p:spPr>
-        <p:txBody>
-          <a:bodyPr wrap="square">
-            <a:spAutoFit/>
-          </a:bodyPr>
-          <a:lstStyle/>
-          <a:p>
-            <a:r>
-              <a:rPr sz="1600" b="0">
-                <a:solidFill>
-                  <a:srgbClr val="5B6B7C"/>
-                </a:solidFill>
-              </a:rPr>
-              <a:t>Same 19-year-old, now open-ended: one paste, sixty seconds</a:t>
-            </a:r>
-          </a:p>
-        </p:txBody>
-      </p:sp>
-      <p:sp>
-        <p:nvSpPr>
-          <p:cNvPr id="9" name="TextBox 8"/>
-          <p:cNvSpPr txBox="1"/>
-          <p:nvPr/>
-        </p:nvSpPr>
-        <p:spPr>
-          <a:xfrm>
-            <a:off x="960119" y="1554480"/>
-            <a:ext cx="4937762" cy="225708"/>
-          </a:xfrm>
-          <a:prstGeom prst="rect">
-            <a:avLst/>
-          </a:prstGeom>
-          <a:noFill/>
-        </p:spPr>
-        <p:txBody>
-          <a:bodyPr wrap="square">
-            <a:spAutoFit/>
-          </a:bodyPr>
-          <a:lstStyle/>
-          <a:p>
-            <a:r>
-              <a:rPr sz="1100" b="1">
-                <a:solidFill>
-                  <a:srgbClr val="2D5F7C"/>
-                </a:solidFill>
-              </a:rPr>
-              <a:t>WHAT THE PASTE PRODUCES</a:t>
-            </a:r>
-          </a:p>
-        </p:txBody>
-      </p:sp>
-      <p:sp>
-        <p:nvSpPr>
-          <p:cNvPr id="10" name="TextBox 9"/>
-          <p:cNvSpPr txBox="1"/>
-          <p:nvPr/>
-        </p:nvSpPr>
-        <p:spPr>
-          <a:xfrm>
-            <a:off x="960119" y="1920239"/>
-            <a:ext cx="4937762" cy="2301589"/>
-          </a:xfrm>
-          <a:prstGeom prst="rect">
-            <a:avLst/>
-          </a:prstGeom>
-          <a:noFill/>
-        </p:spPr>
-        <p:txBody>
-          <a:bodyPr wrap="square">
-            <a:spAutoFit/>
-          </a:bodyPr>
-          <a:lstStyle/>
-          <a:p>
-            <a:r>
-              <a:rPr sz="1800" b="0">
-                <a:solidFill>
-                  <a:srgbClr val="1A2332"/>
-                </a:solidFill>
-              </a:rPr>
-              <a:t>• An open-ended case: the learner asks anything</a:t>
-            </a:r>
-          </a:p>
-          <a:p>
-            <a:pPr>
-              <a:spcBef>
-                <a:spcPts val="1000"/>
-              </a:spcBef>
-            </a:pPr>
-            <a:r>
-              <a:rPr sz="1800" b="0">
-                <a:solidFill>
-                  <a:srgbClr val="1A2332"/>
-                </a:solidFill>
-              </a:rPr>
-              <a:t>• A student-ready prompt with rubric feedback</a:t>
-            </a:r>
-          </a:p>
-          <a:p>
-            <a:pPr>
-              <a:spcBef>
-                <a:spcPts val="1000"/>
-              </a:spcBef>
-            </a:pPr>
-            <a:r>
-              <a:rPr sz="1800" b="0">
-                <a:solidFill>
-                  <a:srgbClr val="1A2332"/>
-                </a:solidFill>
-              </a:rPr>
-              <a:t>• A provenance warning it writes itself</a:t>
-            </a:r>
-          </a:p>
-        </p:txBody>
-      </p:sp>
-      <p:sp>
-        <p:nvSpPr>
-          <p:cNvPr id="11" name="TextBox 10"/>
-          <p:cNvSpPr txBox="1"/>
-          <p:nvPr/>
-        </p:nvSpPr>
-        <p:spPr>
-          <a:xfrm>
-            <a:off x="6903719" y="1554480"/>
-            <a:ext cx="4480562" cy="225708"/>
-          </a:xfrm>
-          <a:prstGeom prst="rect">
-            <a:avLst/>
-          </a:prstGeom>
-          <a:noFill/>
-        </p:spPr>
-        <p:txBody>
-          <a:bodyPr wrap="square">
-            <a:spAutoFit/>
-          </a:bodyPr>
-          <a:lstStyle/>
-          <a:p>
-            <a:r>
-              <a:rPr sz="1100" b="1">
-                <a:solidFill>
-                  <a:srgbClr val="E8833A"/>
-                </a:solidFill>
-              </a:rPr>
-              <a:t>RUN IT AND COMPARE</a:t>
-            </a:r>
-          </a:p>
-        </p:txBody>
-      </p:sp>
-      <p:sp>
-        <p:nvSpPr>
-          <p:cNvPr id="12" name="TextBox 11"/>
-          <p:cNvSpPr txBox="1"/>
-          <p:nvPr/>
-        </p:nvSpPr>
-        <p:spPr>
-          <a:xfrm>
-            <a:off x="6903719" y="1920239"/>
-            <a:ext cx="4480562" cy="2301589"/>
-          </a:xfrm>
-          <a:prstGeom prst="rect">
-            <a:avLst/>
-          </a:prstGeom>
-          <a:noFill/>
-        </p:spPr>
-        <p:txBody>
-          <a:bodyPr wrap="square">
-            <a:spAutoFit/>
-          </a:bodyPr>
-          <a:lstStyle/>
-          <a:p>
-            <a:r>
-              <a:rPr sz="1800">
-                <a:solidFill>
-                  <a:srgbClr val="1A2332"/>
-                </a:solidFill>
-              </a:rPr>
-              <a:t>The prompt is in the guide, Section 3: Today's Demo Case.</a:t>
-            </a:r>
-          </a:p>
-          <a:p>
-            <a:r>
-              <a:rPr sz="1800">
-                <a:solidFill>
-                  <a:srgbClr val="1A2332"/>
-                </a:solidFill>
-              </a:rPr>
-              <a:t>Run it, then compare numbers with your neighbor.</a:t>
-            </a:r>
-          </a:p>
-        </p:txBody>
-      </p:sp>
-      <p:sp>
-        <p:nvSpPr>
-          <p:cNvPr id="13" name="TextBox 12"/>
-          <p:cNvSpPr txBox="1"/>
-          <p:nvPr/>
-        </p:nvSpPr>
-        <p:spPr>
-          <a:xfrm>
-            <a:off x="502919" y="5715000"/>
-            <a:ext cx="11155682" cy="300594"/>
-          </a:xfrm>
-          <a:prstGeom prst="rect">
-            <a:avLst/>
-          </a:prstGeom>
-          <a:noFill/>
-        </p:spPr>
-        <p:txBody>
-          <a:bodyPr wrap="square">
-            <a:spAutoFit/>
-          </a:bodyPr>
-          <a:lstStyle/>
-          <a:p>
-            <a:r>
-              <a:rPr sz="1600" b="0">
-                <a:solidFill>
-                  <a:srgbClr val="0000FF"/>
-                </a:solidFill>
-              </a:rPr>
-              <a:t>Workshop Guide → Section 3 (Today's Demo Case)</a:t>
-            </a:r>
-          </a:p>
-        </p:txBody>
-      </p:sp>
-    </p:spTree>
-  </p:cSld>
-  <p:clrMapOvr>
-    <a:masterClrMapping/>
-  </p:clrMapOvr>
-</p:sld>
-</file>
-
-<file path=ppt/slides/slide7.xml><?xml version="1.0" encoding="utf-8"?>
-<p:sld xmlns:a="http://schemas.openxmlformats.org/drawingml/2006/main" xmlns:r="http://schemas.openxmlformats.org/officeDocument/2006/relationships" xmlns:p="http://schemas.openxmlformats.org/presentationml/2006/main" xmlns:m="http://schemas.openxmlformats.org/officeDocument/2006/math" xmlns:a14="http://schemas.microsoft.com/office/drawing/2010/main" showMasterSp="1" showMasterPhAnim="1">
-  <p:cSld>
-    <p:spTree>
-      <p:nvGrpSpPr>
-        <p:cNvPr id="1" name=""/>
-        <p:cNvGrpSpPr/>
-        <p:nvPr/>
-      </p:nvGrpSpPr>
-      <p:grpSpPr>
-        <a:xfrm>
-          <a:off x="0" y="0"/>
-          <a:ext cx="0" cy="0"/>
-          <a:chOff x="0" y="0"/>
-          <a:chExt cx="0" cy="0"/>
-        </a:xfrm>
-      </p:grpSpPr>
-      <p:sp>
-        <p:nvSpPr>
-          <p:cNvPr id="2" name="Rectangle 1"/>
-          <p:cNvSpPr/>
-          <p:nvPr/>
-        </p:nvSpPr>
-        <p:spPr>
-          <a:xfrm>
-            <a:off x="-1" y="0"/>
-            <a:ext cx="12191697" cy="1005839"/>
-          </a:xfrm>
-          <a:prstGeom prst="rect">
-            <a:avLst/>
-          </a:prstGeom>
-          <a:solidFill>
-            <a:srgbClr val="2D5F7C"/>
-          </a:solidFill>
-          <a:ln>
-            <a:noFill/>
-          </a:ln>
-          <a:effectLst/>
-        </p:spPr>
-        <p:style>
-          <a:lnRef idx="1">
-            <a:schemeClr val="accent1"/>
-          </a:lnRef>
-          <a:fillRef idx="3">
-            <a:schemeClr val="accent1"/>
-          </a:fillRef>
-          <a:effectRef idx="2">
-            <a:schemeClr val="accent1"/>
-          </a:effectRef>
-          <a:fontRef idx="minor">
-            <a:schemeClr val="lt1"/>
-          </a:fontRef>
-        </p:style>
-        <p:txBody>
-          <a:bodyPr rtlCol="0" anchor="ctr"/>
-          <a:lstStyle/>
-          <a:p>
-            <a:pPr algn="ctr"/>
-          </a:p>
-        </p:txBody>
-      </p:sp>
-      <p:sp>
-        <p:nvSpPr>
-          <p:cNvPr id="3" name="Rectangle 2"/>
-          <p:cNvSpPr/>
-          <p:nvPr/>
-        </p:nvSpPr>
-        <p:spPr>
-          <a:xfrm>
-            <a:off x="640080" y="1371600"/>
-            <a:ext cx="10972801" cy="3657600"/>
-          </a:xfrm>
-          <a:prstGeom prst="rect">
-            <a:avLst/>
-          </a:prstGeom>
-          <a:solidFill>
-            <a:srgbClr val="F0F4F8"/>
-          </a:solidFill>
-          <a:ln>
-            <a:noFill/>
-          </a:ln>
-          <a:effectLst/>
-        </p:spPr>
-        <p:style>
-          <a:lnRef idx="1">
-            <a:schemeClr val="accent1"/>
-          </a:lnRef>
-          <a:fillRef idx="3">
-            <a:schemeClr val="accent1"/>
-          </a:fillRef>
-          <a:effectRef idx="2">
-            <a:schemeClr val="accent1"/>
-          </a:effectRef>
-          <a:fontRef idx="minor">
-            <a:schemeClr val="lt1"/>
-          </a:fontRef>
-        </p:style>
-        <p:txBody>
-          <a:bodyPr rtlCol="0" anchor="ctr"/>
-          <a:lstStyle/>
-          <a:p>
-            <a:pPr algn="ctr"/>
-          </a:p>
-        </p:txBody>
-      </p:sp>
-      <p:sp>
-        <p:nvSpPr>
-          <p:cNvPr id="4" name="Rectangle 3"/>
-          <p:cNvSpPr/>
-          <p:nvPr/>
-        </p:nvSpPr>
-        <p:spPr>
-          <a:xfrm>
-            <a:off x="640080" y="1371600"/>
-            <a:ext cx="50801" cy="3657600"/>
-          </a:xfrm>
-          <a:prstGeom prst="rect">
-            <a:avLst/>
-          </a:prstGeom>
-          <a:solidFill>
-            <a:srgbClr val="2D5F7C"/>
-          </a:solidFill>
-          <a:ln>
-            <a:noFill/>
-          </a:ln>
-          <a:effectLst/>
-        </p:spPr>
-        <p:style>
-          <a:lnRef idx="1">
-            <a:schemeClr val="accent1"/>
-          </a:lnRef>
-          <a:fillRef idx="3">
-            <a:schemeClr val="accent1"/>
-          </a:fillRef>
-          <a:effectRef idx="2">
-            <a:schemeClr val="accent1"/>
-          </a:effectRef>
-          <a:fontRef idx="minor">
-            <a:schemeClr val="lt1"/>
-          </a:fontRef>
-        </p:style>
-        <p:txBody>
-          <a:bodyPr rtlCol="0" anchor="ctr"/>
-          <a:lstStyle/>
-          <a:p>
-            <a:pPr algn="ctr"/>
-          </a:p>
-        </p:txBody>
-      </p:sp>
-      <p:sp>
-        <p:nvSpPr>
-          <p:cNvPr id="5" name="TextBox 4"/>
-          <p:cNvSpPr txBox="1"/>
-          <p:nvPr/>
-        </p:nvSpPr>
-        <p:spPr>
-          <a:xfrm>
-            <a:off x="502919" y="182879"/>
-            <a:ext cx="11155682" cy="444759"/>
-          </a:xfrm>
-          <a:prstGeom prst="rect">
-            <a:avLst/>
-          </a:prstGeom>
-          <a:noFill/>
-        </p:spPr>
-        <p:txBody>
-          <a:bodyPr wrap="square">
-            <a:spAutoFit/>
-          </a:bodyPr>
-          <a:lstStyle/>
-          <a:p>
-            <a:r>
-              <a:rPr sz="2800" b="1">
-                <a:solidFill>
-                  <a:srgbClr val="FFFFFF"/>
-                </a:solidFill>
-              </a:rPr>
-              <a:t>Think · Pair · Share: Run It and Compare (2 min)</a:t>
-            </a:r>
-          </a:p>
-        </p:txBody>
-      </p:sp>
-      <p:sp>
-        <p:nvSpPr>
-          <p:cNvPr id="6" name="TextBox 5"/>
-          <p:cNvSpPr txBox="1"/>
-          <p:nvPr/>
-        </p:nvSpPr>
-        <p:spPr>
-          <a:xfrm>
-            <a:off x="1143000" y="1828800"/>
-            <a:ext cx="9966961" cy="1985576"/>
-          </a:xfrm>
-          <a:prstGeom prst="rect">
-            <a:avLst/>
-          </a:prstGeom>
-          <a:noFill/>
-        </p:spPr>
-        <p:txBody>
-          <a:bodyPr wrap="square">
-            <a:spAutoFit/>
-          </a:bodyPr>
-          <a:lstStyle/>
-          <a:p>
-            <a:r>
-              <a:rPr sz="2200">
-                <a:solidFill>
-                  <a:srgbClr val="1E4258"/>
-                </a:solidFill>
-              </a:rPr>
-              <a:t>Run Today's Demo Case (guide → Section 3) in any chatbot.</a:t>
-            </a:r>
-          </a:p>
-          <a:p>
-            <a:pPr>
-              <a:spcBef>
-                <a:spcPts val="1000"/>
-              </a:spcBef>
-            </a:pPr>
-            <a:r>
-              <a:rPr sz="2200">
-                <a:solidFill>
-                  <a:srgbClr val="1E4258"/>
-                </a:solidFill>
-              </a:rPr>
-              <a:t>Compare your case with your neighbor's: vitals, labs, details.</a:t>
-            </a:r>
-          </a:p>
-          <a:p>
-            <a:pPr>
-              <a:spcBef>
-                <a:spcPts val="1000"/>
-              </a:spcBef>
-            </a:pPr>
-            <a:r>
-              <a:rPr sz="2200">
-                <a:solidFill>
-                  <a:srgbClr val="1E4258"/>
-                </a:solidFill>
-              </a:rPr>
-              <a:t>The numbers differ. Your students would see the same inconsistency.</a:t>
-            </a:r>
-          </a:p>
-        </p:txBody>
-      </p:sp>
-      <p:sp>
-        <p:nvSpPr>
-          <p:cNvPr id="7" name="TextBox 6"/>
-          <p:cNvSpPr txBox="1"/>
-          <p:nvPr/>
-        </p:nvSpPr>
-        <p:spPr>
-          <a:xfrm>
-            <a:off x="1143000" y="5303520"/>
-            <a:ext cx="9966961" cy="300594"/>
-          </a:xfrm>
-          <a:prstGeom prst="rect">
-            <a:avLst/>
-          </a:prstGeom>
-          <a:noFill/>
-        </p:spPr>
-        <p:txBody>
-          <a:bodyPr wrap="square">
-            <a:spAutoFit/>
-          </a:bodyPr>
-          <a:lstStyle/>
-          <a:p>
-            <a:r>
-              <a:rPr sz="1600" b="0">
-                <a:solidFill>
-                  <a:srgbClr val="0000FF"/>
-                </a:solidFill>
-              </a:rPr>
-              <a:t>Workshop Guide → Section 3</a:t>
-            </a:r>
-          </a:p>
-        </p:txBody>
-      </p:sp>
-    </p:spTree>
-  </p:cSld>
-  <p:clrMapOvr>
-    <a:masterClrMapping/>
-  </p:clrMapOvr>
-  <p:transition xmlns:p14="http://schemas.microsoft.com/office/powerpoint/2010/main" spd="med" advClick="1"/>
-</p:sld>
-</file>
-
-<file path=ppt/slides/slide8.xml><?xml version="1.0" encoding="utf-8"?>
-<p:sld xmlns:a="http://schemas.openxmlformats.org/drawingml/2006/main" xmlns:r="http://schemas.openxmlformats.org/officeDocument/2006/relationships" xmlns:p="http://schemas.openxmlformats.org/presentationml/2006/main" xmlns:m="http://schemas.openxmlformats.org/officeDocument/2006/math" xmlns:a14="http://schemas.microsoft.com/office/drawing/2010/main" showMasterSp="1" showMasterPhAnim="1">
-  <p:cSld>
-    <p:spTree>
-      <p:nvGrpSpPr>
-        <p:cNvPr id="1" name=""/>
-        <p:cNvGrpSpPr/>
-        <p:nvPr/>
-      </p:nvGrpSpPr>
-      <p:grpSpPr>
-        <a:xfrm>
-          <a:off x="0" y="0"/>
-          <a:ext cx="0" cy="0"/>
-          <a:chOff x="0" y="0"/>
-          <a:chExt cx="0" cy="0"/>
-        </a:xfrm>
-      </p:grpSpPr>
-      <p:sp>
-        <p:nvSpPr>
-          <p:cNvPr id="2" name="Rectangle 1"/>
-          <p:cNvSpPr/>
-          <p:nvPr/>
-        </p:nvSpPr>
-        <p:spPr>
-          <a:xfrm>
-            <a:off x="-1" y="0"/>
-            <a:ext cx="12191697" cy="1005839"/>
-          </a:xfrm>
-          <a:prstGeom prst="rect">
-            <a:avLst/>
-          </a:prstGeom>
-          <a:solidFill>
-            <a:srgbClr val="2D5F7C"/>
-          </a:solidFill>
-          <a:ln>
-            <a:noFill/>
-          </a:ln>
-          <a:effectLst/>
-        </p:spPr>
-        <p:style>
-          <a:lnRef idx="1">
-            <a:schemeClr val="accent1"/>
-          </a:lnRef>
-          <a:fillRef idx="3">
-            <a:schemeClr val="accent1"/>
-          </a:fillRef>
-          <a:effectRef idx="2">
-            <a:schemeClr val="accent1"/>
-          </a:effectRef>
-          <a:fontRef idx="minor">
-            <a:schemeClr val="lt1"/>
-          </a:fontRef>
-        </p:style>
-        <p:txBody>
-          <a:bodyPr rtlCol="0" anchor="ctr"/>
-          <a:lstStyle/>
-          <a:p>
-            <a:pPr algn="ctr"/>
-          </a:p>
-        </p:txBody>
-      </p:sp>
-      <p:sp>
-        <p:nvSpPr>
-          <p:cNvPr id="3" name="Rectangle 2"/>
-          <p:cNvSpPr/>
-          <p:nvPr/>
-        </p:nvSpPr>
-        <p:spPr>
-          <a:xfrm>
-            <a:off x="640080" y="1371600"/>
-            <a:ext cx="5486401" cy="4114800"/>
-          </a:xfrm>
-          <a:prstGeom prst="rect">
-            <a:avLst/>
-          </a:prstGeom>
-          <a:solidFill>
-            <a:srgbClr val="F0F4F8"/>
-          </a:solidFill>
-          <a:ln>
-            <a:noFill/>
-          </a:ln>
-          <a:effectLst/>
-        </p:spPr>
-        <p:style>
-          <a:lnRef idx="1">
-            <a:schemeClr val="accent1"/>
-          </a:lnRef>
-          <a:fillRef idx="3">
-            <a:schemeClr val="accent1"/>
-          </a:fillRef>
-          <a:effectRef idx="2">
-            <a:schemeClr val="accent1"/>
-          </a:effectRef>
-          <a:fontRef idx="minor">
-            <a:schemeClr val="lt1"/>
-          </a:fontRef>
-        </p:style>
-        <p:txBody>
-          <a:bodyPr rtlCol="0" anchor="ctr"/>
-          <a:lstStyle/>
-          <a:p>
-            <a:pPr algn="ctr"/>
-          </a:p>
-        </p:txBody>
-      </p:sp>
-      <p:sp>
-        <p:nvSpPr>
-          <p:cNvPr id="4" name="Rectangle 3"/>
-          <p:cNvSpPr/>
-          <p:nvPr/>
-        </p:nvSpPr>
-        <p:spPr>
-          <a:xfrm>
-            <a:off x="640080" y="1371600"/>
-            <a:ext cx="50801" cy="4114800"/>
-          </a:xfrm>
-          <a:prstGeom prst="rect">
-            <a:avLst/>
-          </a:prstGeom>
-          <a:solidFill>
-            <a:srgbClr val="2D5F7C"/>
-          </a:solidFill>
-          <a:ln>
-            <a:noFill/>
-          </a:ln>
-          <a:effectLst/>
-        </p:spPr>
-        <p:style>
-          <a:lnRef idx="1">
-            <a:schemeClr val="accent1"/>
-          </a:lnRef>
-          <a:fillRef idx="3">
-            <a:schemeClr val="accent1"/>
-          </a:fillRef>
-          <a:effectRef idx="2">
-            <a:schemeClr val="accent1"/>
-          </a:effectRef>
-          <a:fontRef idx="minor">
-            <a:schemeClr val="lt1"/>
-          </a:fontRef>
-        </p:style>
-        <p:txBody>
-          <a:bodyPr rtlCol="0" anchor="ctr"/>
-          <a:lstStyle/>
-          <a:p>
-            <a:pPr algn="ctr"/>
-          </a:p>
-        </p:txBody>
-      </p:sp>
-      <p:sp>
-        <p:nvSpPr>
-          <p:cNvPr id="5" name="Rectangle 4"/>
-          <p:cNvSpPr/>
-          <p:nvPr/>
-        </p:nvSpPr>
-        <p:spPr>
-          <a:xfrm>
-            <a:off x="6583680" y="1371600"/>
-            <a:ext cx="5029201" cy="4114800"/>
-          </a:xfrm>
-          <a:prstGeom prst="rect">
-            <a:avLst/>
-          </a:prstGeom>
-          <a:solidFill>
-            <a:srgbClr val="FDF6F0"/>
-          </a:solidFill>
-          <a:ln>
-            <a:noFill/>
-          </a:ln>
-          <a:effectLst/>
-        </p:spPr>
-        <p:style>
-          <a:lnRef idx="1">
-            <a:schemeClr val="accent1"/>
-          </a:lnRef>
-          <a:fillRef idx="3">
-            <a:schemeClr val="accent1"/>
-          </a:fillRef>
-          <a:effectRef idx="2">
-            <a:schemeClr val="accent1"/>
-          </a:effectRef>
-          <a:fontRef idx="minor">
-            <a:schemeClr val="lt1"/>
-          </a:fontRef>
-        </p:style>
-        <p:txBody>
-          <a:bodyPr rtlCol="0" anchor="ctr"/>
-          <a:lstStyle/>
-          <a:p>
-            <a:pPr algn="ctr"/>
-          </a:p>
-        </p:txBody>
-      </p:sp>
-      <p:sp>
-        <p:nvSpPr>
-          <p:cNvPr id="6" name="Rectangle 5"/>
-          <p:cNvSpPr/>
-          <p:nvPr/>
-        </p:nvSpPr>
-        <p:spPr>
-          <a:xfrm>
-            <a:off x="6583680" y="1371600"/>
-            <a:ext cx="50801" cy="4114800"/>
-          </a:xfrm>
-          <a:prstGeom prst="rect">
-            <a:avLst/>
-          </a:prstGeom>
-          <a:solidFill>
-            <a:srgbClr val="E8833A"/>
-          </a:solidFill>
-          <a:ln>
-            <a:noFill/>
-          </a:ln>
-          <a:effectLst/>
-        </p:spPr>
-        <p:style>
-          <a:lnRef idx="1">
-            <a:schemeClr val="accent1"/>
-          </a:lnRef>
-          <a:fillRef idx="3">
-            <a:schemeClr val="accent1"/>
-          </a:fillRef>
-          <a:effectRef idx="2">
-            <a:schemeClr val="accent1"/>
-          </a:effectRef>
-          <a:fontRef idx="minor">
-            <a:schemeClr val="lt1"/>
-          </a:fontRef>
-        </p:style>
-        <p:txBody>
-          <a:bodyPr rtlCol="0" anchor="ctr"/>
-          <a:lstStyle/>
-          <a:p>
-            <a:pPr algn="ctr"/>
-          </a:p>
-        </p:txBody>
-      </p:sp>
-      <p:sp>
-        <p:nvSpPr>
-          <p:cNvPr id="7" name="TextBox 6"/>
-          <p:cNvSpPr txBox="1"/>
-          <p:nvPr/>
-        </p:nvSpPr>
-        <p:spPr>
-          <a:xfrm>
-            <a:off x="502919" y="182879"/>
-            <a:ext cx="11155682" cy="444759"/>
-          </a:xfrm>
-          <a:prstGeom prst="rect">
-            <a:avLst/>
-          </a:prstGeom>
-          <a:noFill/>
-        </p:spPr>
-        <p:txBody>
-          <a:bodyPr wrap="square">
-            <a:spAutoFit/>
-          </a:bodyPr>
-          <a:lstStyle/>
-          <a:p>
-            <a:r>
-              <a:rPr sz="2800" b="1">
-                <a:solidFill>
-                  <a:srgbClr val="FFFFFF"/>
-                </a:solidFill>
-              </a:rPr>
-              <a:t>The Elephant: Nobody Wrote This Case</a:t>
-            </a:r>
-          </a:p>
-        </p:txBody>
-      </p:sp>
-      <p:sp>
-        <p:nvSpPr>
-          <p:cNvPr id="8" name="TextBox 7"/>
-          <p:cNvSpPr txBox="1"/>
-          <p:nvPr/>
-        </p:nvSpPr>
-        <p:spPr>
-          <a:xfrm>
-            <a:off x="502919" y="1097280"/>
-            <a:ext cx="11155682" cy="300594"/>
-          </a:xfrm>
-          <a:prstGeom prst="rect">
-            <a:avLst/>
-          </a:prstGeom>
-          <a:noFill/>
-        </p:spPr>
-        <p:txBody>
-          <a:bodyPr wrap="square">
-            <a:spAutoFit/>
-          </a:bodyPr>
-          <a:lstStyle/>
-          <a:p>
-            <a:r>
-              <a:rPr sz="1600" b="0">
-                <a:solidFill>
-                  <a:srgbClr val="5B6B7C"/>
-                </a:solidFill>
-              </a:rPr>
-              <a:t>Fast, realistic, and unverifiable</a:t>
-            </a:r>
-          </a:p>
-        </p:txBody>
-      </p:sp>
-      <p:sp>
-        <p:nvSpPr>
-          <p:cNvPr id="9" name="TextBox 8"/>
-          <p:cNvSpPr txBox="1"/>
-          <p:nvPr/>
-        </p:nvSpPr>
-        <p:spPr>
-          <a:xfrm>
-            <a:off x="960119" y="1554480"/>
-            <a:ext cx="4937762" cy="225708"/>
-          </a:xfrm>
-          <a:prstGeom prst="rect">
-            <a:avLst/>
-          </a:prstGeom>
-          <a:noFill/>
-        </p:spPr>
-        <p:txBody>
-          <a:bodyPr wrap="square">
-            <a:spAutoFit/>
-          </a:bodyPr>
-          <a:lstStyle/>
-          <a:p>
-            <a:r>
-              <a:rPr sz="1100" b="1">
-                <a:solidFill>
-                  <a:srgbClr val="2D5F7C"/>
-                </a:solidFill>
-              </a:rPr>
-              <a:t>THE RISK</a:t>
-            </a:r>
-          </a:p>
-        </p:txBody>
-      </p:sp>
-      <p:sp>
-        <p:nvSpPr>
-          <p:cNvPr id="10" name="TextBox 9"/>
-          <p:cNvSpPr txBox="1"/>
-          <p:nvPr/>
-        </p:nvSpPr>
-        <p:spPr>
-          <a:xfrm>
-            <a:off x="960119" y="1920239"/>
-            <a:ext cx="4937762" cy="2301589"/>
-          </a:xfrm>
-          <a:prstGeom prst="rect">
-            <a:avLst/>
-          </a:prstGeom>
-          <a:noFill/>
-        </p:spPr>
-        <p:txBody>
-          <a:bodyPr wrap="square">
-            <a:spAutoFit/>
-          </a:bodyPr>
-          <a:lstStyle/>
-          <a:p>
-            <a:r>
-              <a:rPr sz="1800">
-                <a:solidFill>
-                  <a:srgbClr val="1A2332"/>
-                </a:solidFill>
-              </a:rPr>
-              <a:t>• Every run is a fresh case with fresh numbers</a:t>
-            </a:r>
-          </a:p>
-          <a:p>
-            <a:r>
-              <a:rPr sz="1800">
-                <a:solidFill>
-                  <a:srgbClr val="1A2332"/>
-                </a:solidFill>
-              </a:rPr>
-              <a:t>• No source. No citation. No reviewer.</a:t>
-            </a:r>
-          </a:p>
-          <a:p>
-            <a:r>
-              <a:rPr sz="1800">
-                <a:solidFill>
-                  <a:srgbClr val="1A2332"/>
-                </a:solidFill>
-              </a:rPr>
-              <a:t>• Would you sign your name to it?</a:t>
-            </a:r>
-          </a:p>
-        </p:txBody>
-      </p:sp>
-      <p:sp>
-        <p:nvSpPr>
-          <p:cNvPr id="11" name="TextBox 10"/>
-          <p:cNvSpPr txBox="1"/>
-          <p:nvPr/>
-        </p:nvSpPr>
-        <p:spPr>
-          <a:xfrm>
-            <a:off x="6903719" y="1554480"/>
-            <a:ext cx="4480562" cy="225708"/>
-          </a:xfrm>
-          <a:prstGeom prst="rect">
-            <a:avLst/>
-          </a:prstGeom>
-          <a:noFill/>
-        </p:spPr>
-        <p:txBody>
-          <a:bodyPr wrap="square">
-            <a:spAutoFit/>
-          </a:bodyPr>
-          <a:lstStyle/>
-          <a:p>
-            <a:r>
-              <a:rPr sz="1100" b="1">
-                <a:solidFill>
-                  <a:srgbClr val="E8833A"/>
-                </a:solidFill>
-              </a:rPr>
-              <a:t>THE STAKES</a:t>
-            </a:r>
-          </a:p>
-        </p:txBody>
-      </p:sp>
-      <p:sp>
-        <p:nvSpPr>
-          <p:cNvPr id="12" name="TextBox 11"/>
-          <p:cNvSpPr txBox="1"/>
-          <p:nvPr/>
-        </p:nvSpPr>
-        <p:spPr>
-          <a:xfrm>
-            <a:off x="6903719" y="1920239"/>
-            <a:ext cx="4480562" cy="2301589"/>
-          </a:xfrm>
-          <a:prstGeom prst="rect">
-            <a:avLst/>
-          </a:prstGeom>
-          <a:noFill/>
-        </p:spPr>
-        <p:txBody>
-          <a:bodyPr wrap="square">
-            <a:spAutoFit/>
-          </a:bodyPr>
-          <a:lstStyle/>
-          <a:p>
-            <a:r>
-              <a:rPr sz="1800">
-                <a:solidFill>
-                  <a:srgbClr val="1A2332"/>
-                </a:solidFill>
-              </a:rPr>
-              <a:t>An error propagates to every learner who meets it.</a:t>
-            </a:r>
-          </a:p>
-          <a:p>
-            <a:r>
-              <a:rPr sz="1800">
-                <a:solidFill>
-                  <a:srgbClr val="1A2332"/>
-                </a:solidFill>
-              </a:rPr>
-              <a:t>The pitfall scales with the stakes: dosing, step order, discharge instructions.</a:t>
-            </a:r>
-          </a:p>
-          <a:p>
-            <a:r>
-              <a:rPr sz="1800">
-                <a:solidFill>
-                  <a:srgbClr val="1A2332"/>
-                </a:solidFill>
-              </a:rPr>
-              <a:t>Section 4 is how we get realism and verifiability.</a:t>
-            </a:r>
-          </a:p>
-        </p:txBody>
-      </p:sp>
-      <p:sp>
-        <p:nvSpPr>
-          <p:cNvPr id="13" name="TextBox 12"/>
-          <p:cNvSpPr txBox="1"/>
-          <p:nvPr/>
-        </p:nvSpPr>
-        <p:spPr>
-          <a:xfrm>
-            <a:off x="502919" y="5715000"/>
-            <a:ext cx="11155682" cy="300594"/>
-          </a:xfrm>
-          <a:prstGeom prst="rect">
-            <a:avLst/>
-          </a:prstGeom>
-          <a:noFill/>
-        </p:spPr>
-        <p:txBody>
-          <a:bodyPr wrap="square">
-            <a:spAutoFit/>
-          </a:bodyPr>
-          <a:lstStyle/>
-          <a:p>
-            <a:r>
-              <a:rPr sz="1600" b="0">
-                <a:solidFill>
-                  <a:srgbClr val="0000FF"/>
-                </a:solidFill>
-              </a:rPr>
-              <a:t>Workshop Guide → Section 4 (Beyond the Case)</a:t>
-            </a:r>
-          </a:p>
-        </p:txBody>
-      </p:sp>
-    </p:spTree>
-  </p:cSld>
-  <p:clrMapOvr>
-    <a:masterClrMapping/>
-  </p:clrMapOvr>
-  <p:transition xmlns:p14="http://schemas.microsoft.com/office/powerpoint/2010/main" spd="med" advClick="1"/>
-</p:sld>
-</file>
-
-<file path=ppt/slides/slide9.xml><?xml version="1.0" encoding="utf-8"?>
 <p:sld xmlns:a="http://schemas.openxmlformats.org/drawingml/2006/main" xmlns:r="http://schemas.openxmlformats.org/officeDocument/2006/relationships" xmlns:p="http://schemas.openxmlformats.org/presentationml/2006/main" xmlns:m="http://schemas.openxmlformats.org/officeDocument/2006/math" xmlns:a14="http://schemas.microsoft.com/office/drawing/2010/main" showMasterSp="1" showMasterPhAnim="1">
   <p:cSld>
     <p:bg>
@@ -12157,7 +11029,7 @@
             <a:p>
               <a:pPr/>
               <a:r>
-                <a:t>4</a:t>
+                <a:t>3</a:t>
               </a:r>
             </a:p>
           </p:txBody>
@@ -12203,7 +11075,7 @@
             <a:pPr/>
             <a:r>
               <a:rPr/>
-              <a:t>Section 4: Grounded AI Workflow</a:t>
+              <a:t>Section 3: AI Chatbots</a:t>
             </a:r>
           </a:p>
         </p:txBody>
@@ -12248,7 +11120,1320 @@
             <a:pPr/>
             <a:r>
               <a:rPr/>
-              <a:t>Upload published sources, get cited answers, every time</a:t>
+              <a:t>The same 19-year-old, but the chatbot writes it · Guide → Section 3</a:t>
+            </a:r>
+          </a:p>
+        </p:txBody>
+      </p:sp>
+    </p:spTree>
+  </p:cSld>
+  <p:clrMapOvr>
+    <a:masterClrMapping/>
+  </p:clrMapOvr>
+  <p:transition xmlns:p14="http://schemas.microsoft.com/office/powerpoint/2010/main" spd="med" advClick="1"/>
+</p:sld>
+</file>
+
+<file path=ppt/slides/slide7.xml><?xml version="1.0" encoding="utf-8"?>
+<p:sld xmlns:a="http://schemas.openxmlformats.org/drawingml/2006/main" xmlns:p="http://schemas.openxmlformats.org/presentationml/2006/main" xmlns:r="http://schemas.openxmlformats.org/officeDocument/2006/relationships">
+  <p:cSld>
+    <p:spTree>
+      <p:nvGrpSpPr>
+        <p:cNvPr id="1" name=""/>
+        <p:cNvGrpSpPr/>
+        <p:nvPr/>
+      </p:nvGrpSpPr>
+      <p:grpSpPr/>
+      <p:sp>
+        <p:nvSpPr>
+          <p:cNvPr id="2" name="Rectangle 1"/>
+          <p:cNvSpPr/>
+          <p:nvPr/>
+        </p:nvSpPr>
+        <p:spPr>
+          <a:xfrm>
+            <a:off x="-1" y="0"/>
+            <a:ext cx="12191697" cy="1005839"/>
+          </a:xfrm>
+          <a:prstGeom prst="rect">
+            <a:avLst/>
+          </a:prstGeom>
+          <a:solidFill>
+            <a:srgbClr val="2D5F7C"/>
+          </a:solidFill>
+          <a:ln>
+            <a:noFill/>
+          </a:ln>
+          <a:effectLst/>
+        </p:spPr>
+        <p:style>
+          <a:lnRef idx="1">
+            <a:schemeClr val="accent1"/>
+          </a:lnRef>
+          <a:fillRef idx="3">
+            <a:schemeClr val="accent1"/>
+          </a:fillRef>
+          <a:effectRef idx="2">
+            <a:schemeClr val="accent1"/>
+          </a:effectRef>
+          <a:fontRef idx="minor">
+            <a:schemeClr val="lt1"/>
+          </a:fontRef>
+        </p:style>
+        <p:txBody>
+          <a:bodyPr rtlCol="0" anchor="ctr"/>
+          <a:lstStyle/>
+          <a:p>
+            <a:pPr algn="ctr"/>
+          </a:p>
+        </p:txBody>
+      </p:sp>
+      <p:sp>
+        <p:nvSpPr>
+          <p:cNvPr id="3" name="Rectangle 2"/>
+          <p:cNvSpPr/>
+          <p:nvPr/>
+        </p:nvSpPr>
+        <p:spPr>
+          <a:xfrm>
+            <a:off x="640080" y="1371600"/>
+            <a:ext cx="5486401" cy="4114800"/>
+          </a:xfrm>
+          <a:prstGeom prst="rect">
+            <a:avLst/>
+          </a:prstGeom>
+          <a:solidFill>
+            <a:srgbClr val="F0F4F8"/>
+          </a:solidFill>
+          <a:ln>
+            <a:noFill/>
+          </a:ln>
+          <a:effectLst/>
+        </p:spPr>
+        <p:style>
+          <a:lnRef idx="1">
+            <a:schemeClr val="accent1"/>
+          </a:lnRef>
+          <a:fillRef idx="3">
+            <a:schemeClr val="accent1"/>
+          </a:fillRef>
+          <a:effectRef idx="2">
+            <a:schemeClr val="accent1"/>
+          </a:effectRef>
+          <a:fontRef idx="minor">
+            <a:schemeClr val="lt1"/>
+          </a:fontRef>
+        </p:style>
+        <p:txBody>
+          <a:bodyPr rtlCol="0" anchor="ctr"/>
+          <a:lstStyle/>
+          <a:p>
+            <a:pPr algn="ctr"/>
+          </a:p>
+        </p:txBody>
+      </p:sp>
+      <p:sp>
+        <p:nvSpPr>
+          <p:cNvPr id="4" name="Rectangle 3"/>
+          <p:cNvSpPr/>
+          <p:nvPr/>
+        </p:nvSpPr>
+        <p:spPr>
+          <a:xfrm>
+            <a:off x="640080" y="1371600"/>
+            <a:ext cx="50801" cy="4114800"/>
+          </a:xfrm>
+          <a:prstGeom prst="rect">
+            <a:avLst/>
+          </a:prstGeom>
+          <a:solidFill>
+            <a:srgbClr val="2D5F7C"/>
+          </a:solidFill>
+          <a:ln>
+            <a:noFill/>
+          </a:ln>
+          <a:effectLst/>
+        </p:spPr>
+        <p:style>
+          <a:lnRef idx="1">
+            <a:schemeClr val="accent1"/>
+          </a:lnRef>
+          <a:fillRef idx="3">
+            <a:schemeClr val="accent1"/>
+          </a:fillRef>
+          <a:effectRef idx="2">
+            <a:schemeClr val="accent1"/>
+          </a:effectRef>
+          <a:fontRef idx="minor">
+            <a:schemeClr val="lt1"/>
+          </a:fontRef>
+        </p:style>
+        <p:txBody>
+          <a:bodyPr rtlCol="0" anchor="ctr"/>
+          <a:lstStyle/>
+          <a:p>
+            <a:pPr algn="ctr"/>
+          </a:p>
+        </p:txBody>
+      </p:sp>
+      <p:sp>
+        <p:nvSpPr>
+          <p:cNvPr id="5" name="Rectangle 4"/>
+          <p:cNvSpPr/>
+          <p:nvPr/>
+        </p:nvSpPr>
+        <p:spPr>
+          <a:xfrm>
+            <a:off x="6583680" y="1371600"/>
+            <a:ext cx="5029201" cy="4114800"/>
+          </a:xfrm>
+          <a:prstGeom prst="rect">
+            <a:avLst/>
+          </a:prstGeom>
+          <a:solidFill>
+            <a:srgbClr val="FDF6F0"/>
+          </a:solidFill>
+          <a:ln>
+            <a:noFill/>
+          </a:ln>
+          <a:effectLst/>
+        </p:spPr>
+        <p:style>
+          <a:lnRef idx="1">
+            <a:schemeClr val="accent1"/>
+          </a:lnRef>
+          <a:fillRef idx="3">
+            <a:schemeClr val="accent1"/>
+          </a:fillRef>
+          <a:effectRef idx="2">
+            <a:schemeClr val="accent1"/>
+          </a:effectRef>
+          <a:fontRef idx="minor">
+            <a:schemeClr val="lt1"/>
+          </a:fontRef>
+        </p:style>
+        <p:txBody>
+          <a:bodyPr rtlCol="0" anchor="ctr"/>
+          <a:lstStyle/>
+          <a:p>
+            <a:pPr algn="ctr"/>
+          </a:p>
+        </p:txBody>
+      </p:sp>
+      <p:sp>
+        <p:nvSpPr>
+          <p:cNvPr id="6" name="Rectangle 5"/>
+          <p:cNvSpPr/>
+          <p:nvPr/>
+        </p:nvSpPr>
+        <p:spPr>
+          <a:xfrm>
+            <a:off x="6583680" y="1371600"/>
+            <a:ext cx="50801" cy="4114800"/>
+          </a:xfrm>
+          <a:prstGeom prst="rect">
+            <a:avLst/>
+          </a:prstGeom>
+          <a:solidFill>
+            <a:srgbClr val="E8833A"/>
+          </a:solidFill>
+          <a:ln>
+            <a:noFill/>
+          </a:ln>
+          <a:effectLst/>
+        </p:spPr>
+        <p:style>
+          <a:lnRef idx="1">
+            <a:schemeClr val="accent1"/>
+          </a:lnRef>
+          <a:fillRef idx="3">
+            <a:schemeClr val="accent1"/>
+          </a:fillRef>
+          <a:effectRef idx="2">
+            <a:schemeClr val="accent1"/>
+          </a:effectRef>
+          <a:fontRef idx="minor">
+            <a:schemeClr val="lt1"/>
+          </a:fontRef>
+        </p:style>
+        <p:txBody>
+          <a:bodyPr rtlCol="0" anchor="ctr"/>
+          <a:lstStyle/>
+          <a:p>
+            <a:pPr algn="ctr"/>
+          </a:p>
+        </p:txBody>
+      </p:sp>
+      <p:sp>
+        <p:nvSpPr>
+          <p:cNvPr id="7" name="TextBox 6"/>
+          <p:cNvSpPr txBox="1"/>
+          <p:nvPr/>
+        </p:nvSpPr>
+        <p:spPr>
+          <a:xfrm>
+            <a:off x="502919" y="182879"/>
+            <a:ext cx="11155682" cy="444759"/>
+          </a:xfrm>
+          <a:prstGeom prst="rect">
+            <a:avLst/>
+          </a:prstGeom>
+          <a:noFill/>
+        </p:spPr>
+        <p:txBody>
+          <a:bodyPr wrap="square">
+            <a:spAutoFit/>
+          </a:bodyPr>
+          <a:lstStyle/>
+          <a:p>
+            <a:r>
+              <a:rPr sz="2800" b="1">
+                <a:solidFill>
+                  <a:srgbClr val="FFFFFF"/>
+                </a:solidFill>
+              </a:rPr>
+              <a:t>Demo: The Realism Gap, Part 2: The AI Case, Live</a:t>
+            </a:r>
+          </a:p>
+        </p:txBody>
+      </p:sp>
+      <p:sp>
+        <p:nvSpPr>
+          <p:cNvPr id="8" name="TextBox 7"/>
+          <p:cNvSpPr txBox="1"/>
+          <p:nvPr/>
+        </p:nvSpPr>
+        <p:spPr>
+          <a:xfrm>
+            <a:off x="502919" y="1097280"/>
+            <a:ext cx="11155682" cy="300594"/>
+          </a:xfrm>
+          <a:prstGeom prst="rect">
+            <a:avLst/>
+          </a:prstGeom>
+          <a:noFill/>
+        </p:spPr>
+        <p:txBody>
+          <a:bodyPr wrap="square">
+            <a:spAutoFit/>
+          </a:bodyPr>
+          <a:lstStyle/>
+          <a:p>
+            <a:r>
+              <a:rPr sz="1600" b="0">
+                <a:solidFill>
+                  <a:srgbClr val="5B6B7C"/>
+                </a:solidFill>
+              </a:rPr>
+              <a:t>Same 19-year-old, now open-ended: one paste, sixty seconds</a:t>
+            </a:r>
+          </a:p>
+        </p:txBody>
+      </p:sp>
+      <p:sp>
+        <p:nvSpPr>
+          <p:cNvPr id="9" name="TextBox 8"/>
+          <p:cNvSpPr txBox="1"/>
+          <p:nvPr/>
+        </p:nvSpPr>
+        <p:spPr>
+          <a:xfrm>
+            <a:off x="960119" y="1554480"/>
+            <a:ext cx="4937762" cy="225708"/>
+          </a:xfrm>
+          <a:prstGeom prst="rect">
+            <a:avLst/>
+          </a:prstGeom>
+          <a:noFill/>
+        </p:spPr>
+        <p:txBody>
+          <a:bodyPr wrap="square">
+            <a:spAutoFit/>
+          </a:bodyPr>
+          <a:lstStyle/>
+          <a:p>
+            <a:r>
+              <a:rPr sz="1100" b="1">
+                <a:solidFill>
+                  <a:srgbClr val="2D5F7C"/>
+                </a:solidFill>
+              </a:rPr>
+              <a:t>WHAT THE PASTE PRODUCES</a:t>
+            </a:r>
+          </a:p>
+        </p:txBody>
+      </p:sp>
+      <p:sp>
+        <p:nvSpPr>
+          <p:cNvPr id="10" name="TextBox 9"/>
+          <p:cNvSpPr txBox="1"/>
+          <p:nvPr/>
+        </p:nvSpPr>
+        <p:spPr>
+          <a:xfrm>
+            <a:off x="960119" y="1920239"/>
+            <a:ext cx="4937762" cy="2301589"/>
+          </a:xfrm>
+          <a:prstGeom prst="rect">
+            <a:avLst/>
+          </a:prstGeom>
+          <a:noFill/>
+        </p:spPr>
+        <p:txBody>
+          <a:bodyPr wrap="square">
+            <a:spAutoFit/>
+          </a:bodyPr>
+          <a:lstStyle/>
+          <a:p>
+            <a:r>
+              <a:rPr sz="1800" b="0">
+                <a:solidFill>
+                  <a:srgbClr val="1A2332"/>
+                </a:solidFill>
+              </a:rPr>
+              <a:t>• An open-ended case: the learner asks anything</a:t>
+            </a:r>
+          </a:p>
+          <a:p>
+            <a:pPr>
+              <a:spcBef>
+                <a:spcPts val="1000"/>
+              </a:spcBef>
+            </a:pPr>
+            <a:r>
+              <a:rPr sz="1800" b="0">
+                <a:solidFill>
+                  <a:srgbClr val="1A2332"/>
+                </a:solidFill>
+              </a:rPr>
+              <a:t>• A student-ready prompt with rubric feedback</a:t>
+            </a:r>
+          </a:p>
+          <a:p>
+            <a:pPr>
+              <a:spcBef>
+                <a:spcPts val="1000"/>
+              </a:spcBef>
+            </a:pPr>
+            <a:r>
+              <a:rPr sz="1800" b="0">
+                <a:solidFill>
+                  <a:srgbClr val="1A2332"/>
+                </a:solidFill>
+              </a:rPr>
+              <a:t>• A provenance warning it writes itself</a:t>
+            </a:r>
+          </a:p>
+        </p:txBody>
+      </p:sp>
+      <p:sp>
+        <p:nvSpPr>
+          <p:cNvPr id="11" name="TextBox 10"/>
+          <p:cNvSpPr txBox="1"/>
+          <p:nvPr/>
+        </p:nvSpPr>
+        <p:spPr>
+          <a:xfrm>
+            <a:off x="6903719" y="1554480"/>
+            <a:ext cx="4480562" cy="225708"/>
+          </a:xfrm>
+          <a:prstGeom prst="rect">
+            <a:avLst/>
+          </a:prstGeom>
+          <a:noFill/>
+        </p:spPr>
+        <p:txBody>
+          <a:bodyPr wrap="square">
+            <a:spAutoFit/>
+          </a:bodyPr>
+          <a:lstStyle/>
+          <a:p>
+            <a:r>
+              <a:rPr sz="1100" b="1">
+                <a:solidFill>
+                  <a:srgbClr val="E8833A"/>
+                </a:solidFill>
+              </a:rPr>
+              <a:t>RUN IT AND COMPARE</a:t>
+            </a:r>
+          </a:p>
+        </p:txBody>
+      </p:sp>
+      <p:sp>
+        <p:nvSpPr>
+          <p:cNvPr id="12" name="TextBox 11"/>
+          <p:cNvSpPr txBox="1"/>
+          <p:nvPr/>
+        </p:nvSpPr>
+        <p:spPr>
+          <a:xfrm>
+            <a:off x="6903719" y="1920239"/>
+            <a:ext cx="4480562" cy="2301589"/>
+          </a:xfrm>
+          <a:prstGeom prst="rect">
+            <a:avLst/>
+          </a:prstGeom>
+          <a:noFill/>
+        </p:spPr>
+        <p:txBody>
+          <a:bodyPr wrap="square">
+            <a:spAutoFit/>
+          </a:bodyPr>
+          <a:lstStyle/>
+          <a:p>
+            <a:r>
+              <a:rPr sz="1800">
+                <a:solidFill>
+                  <a:srgbClr val="1A2332"/>
+                </a:solidFill>
+              </a:rPr>
+              <a:t>The prompt is in the guide, Section 3: Today's Demo Case.</a:t>
+            </a:r>
+          </a:p>
+          <a:p>
+            <a:r>
+              <a:rPr sz="1800">
+                <a:solidFill>
+                  <a:srgbClr val="1A2332"/>
+                </a:solidFill>
+              </a:rPr>
+              <a:t>Run it, then compare numbers with your neighbor.</a:t>
+            </a:r>
+          </a:p>
+        </p:txBody>
+      </p:sp>
+      <p:sp>
+        <p:nvSpPr>
+          <p:cNvPr id="13" name="TextBox 12"/>
+          <p:cNvSpPr txBox="1"/>
+          <p:nvPr/>
+        </p:nvSpPr>
+        <p:spPr>
+          <a:xfrm>
+            <a:off x="502919" y="5715000"/>
+            <a:ext cx="11155682" cy="300594"/>
+          </a:xfrm>
+          <a:prstGeom prst="rect">
+            <a:avLst/>
+          </a:prstGeom>
+          <a:noFill/>
+        </p:spPr>
+        <p:txBody>
+          <a:bodyPr wrap="square">
+            <a:spAutoFit/>
+          </a:bodyPr>
+          <a:lstStyle/>
+          <a:p>
+            <a:r>
+              <a:rPr sz="1600" b="0">
+                <a:solidFill>
+                  <a:srgbClr val="0000FF"/>
+                </a:solidFill>
+              </a:rPr>
+              <a:t>Workshop Guide → Section 3 (Today's Demo Case)</a:t>
+            </a:r>
+          </a:p>
+        </p:txBody>
+      </p:sp>
+    </p:spTree>
+  </p:cSld>
+  <p:clrMapOvr>
+    <a:masterClrMapping/>
+  </p:clrMapOvr>
+</p:sld>
+</file>
+
+<file path=ppt/slides/slide8.xml><?xml version="1.0" encoding="utf-8"?>
+<p:sld xmlns:a="http://schemas.openxmlformats.org/drawingml/2006/main" xmlns:r="http://schemas.openxmlformats.org/officeDocument/2006/relationships" xmlns:p="http://schemas.openxmlformats.org/presentationml/2006/main" xmlns:m="http://schemas.openxmlformats.org/officeDocument/2006/math" xmlns:a14="http://schemas.microsoft.com/office/drawing/2010/main" showMasterSp="1" showMasterPhAnim="1">
+  <p:cSld>
+    <p:spTree>
+      <p:nvGrpSpPr>
+        <p:cNvPr id="1" name=""/>
+        <p:cNvGrpSpPr/>
+        <p:nvPr/>
+      </p:nvGrpSpPr>
+      <p:grpSpPr>
+        <a:xfrm>
+          <a:off x="0" y="0"/>
+          <a:ext cx="0" cy="0"/>
+          <a:chOff x="0" y="0"/>
+          <a:chExt cx="0" cy="0"/>
+        </a:xfrm>
+      </p:grpSpPr>
+      <p:sp>
+        <p:nvSpPr>
+          <p:cNvPr id="2" name="Rectangle 1"/>
+          <p:cNvSpPr/>
+          <p:nvPr/>
+        </p:nvSpPr>
+        <p:spPr>
+          <a:xfrm>
+            <a:off x="-1" y="0"/>
+            <a:ext cx="12191697" cy="1005839"/>
+          </a:xfrm>
+          <a:prstGeom prst="rect">
+            <a:avLst/>
+          </a:prstGeom>
+          <a:solidFill>
+            <a:srgbClr val="2D5F7C"/>
+          </a:solidFill>
+          <a:ln>
+            <a:noFill/>
+          </a:ln>
+          <a:effectLst/>
+        </p:spPr>
+        <p:style>
+          <a:lnRef idx="1">
+            <a:schemeClr val="accent1"/>
+          </a:lnRef>
+          <a:fillRef idx="3">
+            <a:schemeClr val="accent1"/>
+          </a:fillRef>
+          <a:effectRef idx="2">
+            <a:schemeClr val="accent1"/>
+          </a:effectRef>
+          <a:fontRef idx="minor">
+            <a:schemeClr val="lt1"/>
+          </a:fontRef>
+        </p:style>
+        <p:txBody>
+          <a:bodyPr rtlCol="0" anchor="ctr"/>
+          <a:lstStyle/>
+          <a:p>
+            <a:pPr algn="ctr"/>
+          </a:p>
+        </p:txBody>
+      </p:sp>
+      <p:sp>
+        <p:nvSpPr>
+          <p:cNvPr id="3" name="Rectangle 2"/>
+          <p:cNvSpPr/>
+          <p:nvPr/>
+        </p:nvSpPr>
+        <p:spPr>
+          <a:xfrm>
+            <a:off x="640080" y="1371600"/>
+            <a:ext cx="10972801" cy="3657600"/>
+          </a:xfrm>
+          <a:prstGeom prst="rect">
+            <a:avLst/>
+          </a:prstGeom>
+          <a:solidFill>
+            <a:srgbClr val="F0F4F8"/>
+          </a:solidFill>
+          <a:ln>
+            <a:noFill/>
+          </a:ln>
+          <a:effectLst/>
+        </p:spPr>
+        <p:style>
+          <a:lnRef idx="1">
+            <a:schemeClr val="accent1"/>
+          </a:lnRef>
+          <a:fillRef idx="3">
+            <a:schemeClr val="accent1"/>
+          </a:fillRef>
+          <a:effectRef idx="2">
+            <a:schemeClr val="accent1"/>
+          </a:effectRef>
+          <a:fontRef idx="minor">
+            <a:schemeClr val="lt1"/>
+          </a:fontRef>
+        </p:style>
+        <p:txBody>
+          <a:bodyPr rtlCol="0" anchor="ctr"/>
+          <a:lstStyle/>
+          <a:p>
+            <a:pPr algn="ctr"/>
+          </a:p>
+        </p:txBody>
+      </p:sp>
+      <p:sp>
+        <p:nvSpPr>
+          <p:cNvPr id="4" name="Rectangle 3"/>
+          <p:cNvSpPr/>
+          <p:nvPr/>
+        </p:nvSpPr>
+        <p:spPr>
+          <a:xfrm>
+            <a:off x="640080" y="1371600"/>
+            <a:ext cx="50801" cy="3657600"/>
+          </a:xfrm>
+          <a:prstGeom prst="rect">
+            <a:avLst/>
+          </a:prstGeom>
+          <a:solidFill>
+            <a:srgbClr val="2D5F7C"/>
+          </a:solidFill>
+          <a:ln>
+            <a:noFill/>
+          </a:ln>
+          <a:effectLst/>
+        </p:spPr>
+        <p:style>
+          <a:lnRef idx="1">
+            <a:schemeClr val="accent1"/>
+          </a:lnRef>
+          <a:fillRef idx="3">
+            <a:schemeClr val="accent1"/>
+          </a:fillRef>
+          <a:effectRef idx="2">
+            <a:schemeClr val="accent1"/>
+          </a:effectRef>
+          <a:fontRef idx="minor">
+            <a:schemeClr val="lt1"/>
+          </a:fontRef>
+        </p:style>
+        <p:txBody>
+          <a:bodyPr rtlCol="0" anchor="ctr"/>
+          <a:lstStyle/>
+          <a:p>
+            <a:pPr algn="ctr"/>
+          </a:p>
+        </p:txBody>
+      </p:sp>
+      <p:sp>
+        <p:nvSpPr>
+          <p:cNvPr id="5" name="TextBox 4"/>
+          <p:cNvSpPr txBox="1"/>
+          <p:nvPr/>
+        </p:nvSpPr>
+        <p:spPr>
+          <a:xfrm>
+            <a:off x="502919" y="182879"/>
+            <a:ext cx="11155682" cy="444759"/>
+          </a:xfrm>
+          <a:prstGeom prst="rect">
+            <a:avLst/>
+          </a:prstGeom>
+          <a:noFill/>
+        </p:spPr>
+        <p:txBody>
+          <a:bodyPr wrap="square">
+            <a:spAutoFit/>
+          </a:bodyPr>
+          <a:lstStyle/>
+          <a:p>
+            <a:r>
+              <a:rPr sz="2800" b="1">
+                <a:solidFill>
+                  <a:srgbClr val="FFFFFF"/>
+                </a:solidFill>
+              </a:rPr>
+              <a:t>Think · Pair · Share: Run It and Compare (2 min)</a:t>
+            </a:r>
+          </a:p>
+        </p:txBody>
+      </p:sp>
+      <p:sp>
+        <p:nvSpPr>
+          <p:cNvPr id="6" name="TextBox 5"/>
+          <p:cNvSpPr txBox="1"/>
+          <p:nvPr/>
+        </p:nvSpPr>
+        <p:spPr>
+          <a:xfrm>
+            <a:off x="1143000" y="1828800"/>
+            <a:ext cx="9966961" cy="1985576"/>
+          </a:xfrm>
+          <a:prstGeom prst="rect">
+            <a:avLst/>
+          </a:prstGeom>
+          <a:noFill/>
+        </p:spPr>
+        <p:txBody>
+          <a:bodyPr wrap="square">
+            <a:spAutoFit/>
+          </a:bodyPr>
+          <a:lstStyle/>
+          <a:p>
+            <a:r>
+              <a:rPr sz="2200">
+                <a:solidFill>
+                  <a:srgbClr val="1E4258"/>
+                </a:solidFill>
+              </a:rPr>
+              <a:t>Run Today's Demo Case (guide → Section 3) in any chatbot.</a:t>
+            </a:r>
+          </a:p>
+          <a:p>
+            <a:pPr>
+              <a:spcBef>
+                <a:spcPts val="1000"/>
+              </a:spcBef>
+            </a:pPr>
+            <a:r>
+              <a:rPr sz="2200">
+                <a:solidFill>
+                  <a:srgbClr val="1E4258"/>
+                </a:solidFill>
+              </a:rPr>
+              <a:t>Compare your case with your neighbor's: vitals, labs, details.</a:t>
+            </a:r>
+          </a:p>
+          <a:p>
+            <a:pPr>
+              <a:spcBef>
+                <a:spcPts val="1000"/>
+              </a:spcBef>
+            </a:pPr>
+            <a:r>
+              <a:rPr sz="2200">
+                <a:solidFill>
+                  <a:srgbClr val="1E4258"/>
+                </a:solidFill>
+              </a:rPr>
+              <a:t>The numbers differ. Your students would see the same inconsistency.</a:t>
+            </a:r>
+          </a:p>
+        </p:txBody>
+      </p:sp>
+      <p:sp>
+        <p:nvSpPr>
+          <p:cNvPr id="7" name="TextBox 6"/>
+          <p:cNvSpPr txBox="1"/>
+          <p:nvPr/>
+        </p:nvSpPr>
+        <p:spPr>
+          <a:xfrm>
+            <a:off x="1143000" y="5303520"/>
+            <a:ext cx="9966961" cy="300594"/>
+          </a:xfrm>
+          <a:prstGeom prst="rect">
+            <a:avLst/>
+          </a:prstGeom>
+          <a:noFill/>
+        </p:spPr>
+        <p:txBody>
+          <a:bodyPr wrap="square">
+            <a:spAutoFit/>
+          </a:bodyPr>
+          <a:lstStyle/>
+          <a:p>
+            <a:r>
+              <a:rPr sz="1600" b="0">
+                <a:solidFill>
+                  <a:srgbClr val="0000FF"/>
+                </a:solidFill>
+              </a:rPr>
+              <a:t>Workshop Guide → Section 3</a:t>
+            </a:r>
+          </a:p>
+        </p:txBody>
+      </p:sp>
+    </p:spTree>
+  </p:cSld>
+  <p:clrMapOvr>
+    <a:masterClrMapping/>
+  </p:clrMapOvr>
+  <p:transition xmlns:p14="http://schemas.microsoft.com/office/powerpoint/2010/main" spd="med" advClick="1"/>
+</p:sld>
+</file>
+
+<file path=ppt/slides/slide9.xml><?xml version="1.0" encoding="utf-8"?>
+<p:sld xmlns:a="http://schemas.openxmlformats.org/drawingml/2006/main" xmlns:r="http://schemas.openxmlformats.org/officeDocument/2006/relationships" xmlns:p="http://schemas.openxmlformats.org/presentationml/2006/main" xmlns:m="http://schemas.openxmlformats.org/officeDocument/2006/math" xmlns:a14="http://schemas.microsoft.com/office/drawing/2010/main" showMasterSp="1" showMasterPhAnim="1">
+  <p:cSld>
+    <p:spTree>
+      <p:nvGrpSpPr>
+        <p:cNvPr id="1" name=""/>
+        <p:cNvGrpSpPr/>
+        <p:nvPr/>
+      </p:nvGrpSpPr>
+      <p:grpSpPr>
+        <a:xfrm>
+          <a:off x="0" y="0"/>
+          <a:ext cx="0" cy="0"/>
+          <a:chOff x="0" y="0"/>
+          <a:chExt cx="0" cy="0"/>
+        </a:xfrm>
+      </p:grpSpPr>
+      <p:sp>
+        <p:nvSpPr>
+          <p:cNvPr id="2" name="Rectangle 1"/>
+          <p:cNvSpPr/>
+          <p:nvPr/>
+        </p:nvSpPr>
+        <p:spPr>
+          <a:xfrm>
+            <a:off x="-1" y="0"/>
+            <a:ext cx="12191697" cy="1005839"/>
+          </a:xfrm>
+          <a:prstGeom prst="rect">
+            <a:avLst/>
+          </a:prstGeom>
+          <a:solidFill>
+            <a:srgbClr val="2D5F7C"/>
+          </a:solidFill>
+          <a:ln>
+            <a:noFill/>
+          </a:ln>
+          <a:effectLst/>
+        </p:spPr>
+        <p:style>
+          <a:lnRef idx="1">
+            <a:schemeClr val="accent1"/>
+          </a:lnRef>
+          <a:fillRef idx="3">
+            <a:schemeClr val="accent1"/>
+          </a:fillRef>
+          <a:effectRef idx="2">
+            <a:schemeClr val="accent1"/>
+          </a:effectRef>
+          <a:fontRef idx="minor">
+            <a:schemeClr val="lt1"/>
+          </a:fontRef>
+        </p:style>
+        <p:txBody>
+          <a:bodyPr rtlCol="0" anchor="ctr"/>
+          <a:lstStyle/>
+          <a:p>
+            <a:pPr algn="ctr"/>
+          </a:p>
+        </p:txBody>
+      </p:sp>
+      <p:sp>
+        <p:nvSpPr>
+          <p:cNvPr id="3" name="Rectangle 2"/>
+          <p:cNvSpPr/>
+          <p:nvPr/>
+        </p:nvSpPr>
+        <p:spPr>
+          <a:xfrm>
+            <a:off x="640080" y="1371600"/>
+            <a:ext cx="5486401" cy="4114800"/>
+          </a:xfrm>
+          <a:prstGeom prst="rect">
+            <a:avLst/>
+          </a:prstGeom>
+          <a:solidFill>
+            <a:srgbClr val="F0F4F8"/>
+          </a:solidFill>
+          <a:ln>
+            <a:noFill/>
+          </a:ln>
+          <a:effectLst/>
+        </p:spPr>
+        <p:style>
+          <a:lnRef idx="1">
+            <a:schemeClr val="accent1"/>
+          </a:lnRef>
+          <a:fillRef idx="3">
+            <a:schemeClr val="accent1"/>
+          </a:fillRef>
+          <a:effectRef idx="2">
+            <a:schemeClr val="accent1"/>
+          </a:effectRef>
+          <a:fontRef idx="minor">
+            <a:schemeClr val="lt1"/>
+          </a:fontRef>
+        </p:style>
+        <p:txBody>
+          <a:bodyPr rtlCol="0" anchor="ctr"/>
+          <a:lstStyle/>
+          <a:p>
+            <a:pPr algn="ctr"/>
+          </a:p>
+        </p:txBody>
+      </p:sp>
+      <p:sp>
+        <p:nvSpPr>
+          <p:cNvPr id="4" name="Rectangle 3"/>
+          <p:cNvSpPr/>
+          <p:nvPr/>
+        </p:nvSpPr>
+        <p:spPr>
+          <a:xfrm>
+            <a:off x="640080" y="1371600"/>
+            <a:ext cx="50801" cy="4114800"/>
+          </a:xfrm>
+          <a:prstGeom prst="rect">
+            <a:avLst/>
+          </a:prstGeom>
+          <a:solidFill>
+            <a:srgbClr val="2D5F7C"/>
+          </a:solidFill>
+          <a:ln>
+            <a:noFill/>
+          </a:ln>
+          <a:effectLst/>
+        </p:spPr>
+        <p:style>
+          <a:lnRef idx="1">
+            <a:schemeClr val="accent1"/>
+          </a:lnRef>
+          <a:fillRef idx="3">
+            <a:schemeClr val="accent1"/>
+          </a:fillRef>
+          <a:effectRef idx="2">
+            <a:schemeClr val="accent1"/>
+          </a:effectRef>
+          <a:fontRef idx="minor">
+            <a:schemeClr val="lt1"/>
+          </a:fontRef>
+        </p:style>
+        <p:txBody>
+          <a:bodyPr rtlCol="0" anchor="ctr"/>
+          <a:lstStyle/>
+          <a:p>
+            <a:pPr algn="ctr"/>
+          </a:p>
+        </p:txBody>
+      </p:sp>
+      <p:sp>
+        <p:nvSpPr>
+          <p:cNvPr id="5" name="Rectangle 4"/>
+          <p:cNvSpPr/>
+          <p:nvPr/>
+        </p:nvSpPr>
+        <p:spPr>
+          <a:xfrm>
+            <a:off x="6583680" y="1371600"/>
+            <a:ext cx="5029201" cy="4114800"/>
+          </a:xfrm>
+          <a:prstGeom prst="rect">
+            <a:avLst/>
+          </a:prstGeom>
+          <a:solidFill>
+            <a:srgbClr val="FDF6F0"/>
+          </a:solidFill>
+          <a:ln>
+            <a:noFill/>
+          </a:ln>
+          <a:effectLst/>
+        </p:spPr>
+        <p:style>
+          <a:lnRef idx="1">
+            <a:schemeClr val="accent1"/>
+          </a:lnRef>
+          <a:fillRef idx="3">
+            <a:schemeClr val="accent1"/>
+          </a:fillRef>
+          <a:effectRef idx="2">
+            <a:schemeClr val="accent1"/>
+          </a:effectRef>
+          <a:fontRef idx="minor">
+            <a:schemeClr val="lt1"/>
+          </a:fontRef>
+        </p:style>
+        <p:txBody>
+          <a:bodyPr rtlCol="0" anchor="ctr"/>
+          <a:lstStyle/>
+          <a:p>
+            <a:pPr algn="ctr"/>
+          </a:p>
+        </p:txBody>
+      </p:sp>
+      <p:sp>
+        <p:nvSpPr>
+          <p:cNvPr id="6" name="Rectangle 5"/>
+          <p:cNvSpPr/>
+          <p:nvPr/>
+        </p:nvSpPr>
+        <p:spPr>
+          <a:xfrm>
+            <a:off x="6583680" y="1371600"/>
+            <a:ext cx="50801" cy="4114800"/>
+          </a:xfrm>
+          <a:prstGeom prst="rect">
+            <a:avLst/>
+          </a:prstGeom>
+          <a:solidFill>
+            <a:srgbClr val="E8833A"/>
+          </a:solidFill>
+          <a:ln>
+            <a:noFill/>
+          </a:ln>
+          <a:effectLst/>
+        </p:spPr>
+        <p:style>
+          <a:lnRef idx="1">
+            <a:schemeClr val="accent1"/>
+          </a:lnRef>
+          <a:fillRef idx="3">
+            <a:schemeClr val="accent1"/>
+          </a:fillRef>
+          <a:effectRef idx="2">
+            <a:schemeClr val="accent1"/>
+          </a:effectRef>
+          <a:fontRef idx="minor">
+            <a:schemeClr val="lt1"/>
+          </a:fontRef>
+        </p:style>
+        <p:txBody>
+          <a:bodyPr rtlCol="0" anchor="ctr"/>
+          <a:lstStyle/>
+          <a:p>
+            <a:pPr algn="ctr"/>
+          </a:p>
+        </p:txBody>
+      </p:sp>
+      <p:sp>
+        <p:nvSpPr>
+          <p:cNvPr id="7" name="TextBox 6"/>
+          <p:cNvSpPr txBox="1"/>
+          <p:nvPr/>
+        </p:nvSpPr>
+        <p:spPr>
+          <a:xfrm>
+            <a:off x="502919" y="182879"/>
+            <a:ext cx="11155682" cy="444759"/>
+          </a:xfrm>
+          <a:prstGeom prst="rect">
+            <a:avLst/>
+          </a:prstGeom>
+          <a:noFill/>
+        </p:spPr>
+        <p:txBody>
+          <a:bodyPr wrap="square">
+            <a:spAutoFit/>
+          </a:bodyPr>
+          <a:lstStyle/>
+          <a:p>
+            <a:r>
+              <a:rPr sz="2800" b="1">
+                <a:solidFill>
+                  <a:srgbClr val="FFFFFF"/>
+                </a:solidFill>
+              </a:rPr>
+              <a:t>The Elephant: Nobody Wrote This Case</a:t>
+            </a:r>
+          </a:p>
+        </p:txBody>
+      </p:sp>
+      <p:sp>
+        <p:nvSpPr>
+          <p:cNvPr id="8" name="TextBox 7"/>
+          <p:cNvSpPr txBox="1"/>
+          <p:nvPr/>
+        </p:nvSpPr>
+        <p:spPr>
+          <a:xfrm>
+            <a:off x="502919" y="1097280"/>
+            <a:ext cx="11155682" cy="300594"/>
+          </a:xfrm>
+          <a:prstGeom prst="rect">
+            <a:avLst/>
+          </a:prstGeom>
+          <a:noFill/>
+        </p:spPr>
+        <p:txBody>
+          <a:bodyPr wrap="square">
+            <a:spAutoFit/>
+          </a:bodyPr>
+          <a:lstStyle/>
+          <a:p>
+            <a:r>
+              <a:rPr sz="1600" b="0">
+                <a:solidFill>
+                  <a:srgbClr val="5B6B7C"/>
+                </a:solidFill>
+              </a:rPr>
+              <a:t>Fast, realistic, and unverifiable</a:t>
+            </a:r>
+          </a:p>
+        </p:txBody>
+      </p:sp>
+      <p:sp>
+        <p:nvSpPr>
+          <p:cNvPr id="9" name="TextBox 8"/>
+          <p:cNvSpPr txBox="1"/>
+          <p:nvPr/>
+        </p:nvSpPr>
+        <p:spPr>
+          <a:xfrm>
+            <a:off x="960119" y="1554480"/>
+            <a:ext cx="4937762" cy="225708"/>
+          </a:xfrm>
+          <a:prstGeom prst="rect">
+            <a:avLst/>
+          </a:prstGeom>
+          <a:noFill/>
+        </p:spPr>
+        <p:txBody>
+          <a:bodyPr wrap="square">
+            <a:spAutoFit/>
+          </a:bodyPr>
+          <a:lstStyle/>
+          <a:p>
+            <a:r>
+              <a:rPr sz="1100" b="1">
+                <a:solidFill>
+                  <a:srgbClr val="2D5F7C"/>
+                </a:solidFill>
+              </a:rPr>
+              <a:t>THE RISK</a:t>
+            </a:r>
+          </a:p>
+        </p:txBody>
+      </p:sp>
+      <p:sp>
+        <p:nvSpPr>
+          <p:cNvPr id="10" name="TextBox 9"/>
+          <p:cNvSpPr txBox="1"/>
+          <p:nvPr/>
+        </p:nvSpPr>
+        <p:spPr>
+          <a:xfrm>
+            <a:off x="960119" y="1920239"/>
+            <a:ext cx="4937762" cy="2301589"/>
+          </a:xfrm>
+          <a:prstGeom prst="rect">
+            <a:avLst/>
+          </a:prstGeom>
+          <a:noFill/>
+        </p:spPr>
+        <p:txBody>
+          <a:bodyPr wrap="square">
+            <a:spAutoFit/>
+          </a:bodyPr>
+          <a:lstStyle/>
+          <a:p>
+            <a:r>
+              <a:rPr sz="1800">
+                <a:solidFill>
+                  <a:srgbClr val="1A2332"/>
+                </a:solidFill>
+              </a:rPr>
+              <a:t>• Every run is a fresh case with fresh numbers</a:t>
+            </a:r>
+          </a:p>
+          <a:p>
+            <a:r>
+              <a:rPr sz="1800">
+                <a:solidFill>
+                  <a:srgbClr val="1A2332"/>
+                </a:solidFill>
+              </a:rPr>
+              <a:t>• No source. No citation. No reviewer.</a:t>
+            </a:r>
+          </a:p>
+          <a:p>
+            <a:r>
+              <a:rPr sz="1800">
+                <a:solidFill>
+                  <a:srgbClr val="1A2332"/>
+                </a:solidFill>
+              </a:rPr>
+              <a:t>• Would you sign your name to it?</a:t>
+            </a:r>
+          </a:p>
+        </p:txBody>
+      </p:sp>
+      <p:sp>
+        <p:nvSpPr>
+          <p:cNvPr id="11" name="TextBox 10"/>
+          <p:cNvSpPr txBox="1"/>
+          <p:nvPr/>
+        </p:nvSpPr>
+        <p:spPr>
+          <a:xfrm>
+            <a:off x="6903719" y="1554480"/>
+            <a:ext cx="4480562" cy="225708"/>
+          </a:xfrm>
+          <a:prstGeom prst="rect">
+            <a:avLst/>
+          </a:prstGeom>
+          <a:noFill/>
+        </p:spPr>
+        <p:txBody>
+          <a:bodyPr wrap="square">
+            <a:spAutoFit/>
+          </a:bodyPr>
+          <a:lstStyle/>
+          <a:p>
+            <a:r>
+              <a:rPr sz="1100" b="1">
+                <a:solidFill>
+                  <a:srgbClr val="E8833A"/>
+                </a:solidFill>
+              </a:rPr>
+              <a:t>THE STAKES</a:t>
+            </a:r>
+          </a:p>
+        </p:txBody>
+      </p:sp>
+      <p:sp>
+        <p:nvSpPr>
+          <p:cNvPr id="12" name="TextBox 11"/>
+          <p:cNvSpPr txBox="1"/>
+          <p:nvPr/>
+        </p:nvSpPr>
+        <p:spPr>
+          <a:xfrm>
+            <a:off x="6903719" y="1920239"/>
+            <a:ext cx="4480562" cy="2301589"/>
+          </a:xfrm>
+          <a:prstGeom prst="rect">
+            <a:avLst/>
+          </a:prstGeom>
+          <a:noFill/>
+        </p:spPr>
+        <p:txBody>
+          <a:bodyPr wrap="square">
+            <a:spAutoFit/>
+          </a:bodyPr>
+          <a:lstStyle/>
+          <a:p>
+            <a:r>
+              <a:rPr sz="1800">
+                <a:solidFill>
+                  <a:srgbClr val="1A2332"/>
+                </a:solidFill>
+              </a:rPr>
+              <a:t>An error propagates to every learner who meets it.</a:t>
+            </a:r>
+          </a:p>
+          <a:p>
+            <a:r>
+              <a:rPr sz="1800">
+                <a:solidFill>
+                  <a:srgbClr val="1A2332"/>
+                </a:solidFill>
+              </a:rPr>
+              <a:t>The pitfall scales with the stakes: dosing, step order, discharge instructions.</a:t>
+            </a:r>
+          </a:p>
+          <a:p>
+            <a:r>
+              <a:rPr sz="1800">
+                <a:solidFill>
+                  <a:srgbClr val="1A2332"/>
+                </a:solidFill>
+              </a:rPr>
+              <a:t>Section 4 is how we get realism and verifiability.</a:t>
+            </a:r>
+          </a:p>
+        </p:txBody>
+      </p:sp>
+      <p:sp>
+        <p:nvSpPr>
+          <p:cNvPr id="13" name="TextBox 12"/>
+          <p:cNvSpPr txBox="1"/>
+          <p:nvPr/>
+        </p:nvSpPr>
+        <p:spPr>
+          <a:xfrm>
+            <a:off x="502919" y="5715000"/>
+            <a:ext cx="11155682" cy="300594"/>
+          </a:xfrm>
+          <a:prstGeom prst="rect">
+            <a:avLst/>
+          </a:prstGeom>
+          <a:noFill/>
+        </p:spPr>
+        <p:txBody>
+          <a:bodyPr wrap="square">
+            <a:spAutoFit/>
+          </a:bodyPr>
+          <a:lstStyle/>
+          <a:p>
+            <a:r>
+              <a:rPr sz="1600" b="0">
+                <a:solidFill>
+                  <a:srgbClr val="0000FF"/>
+                </a:solidFill>
+              </a:rPr>
+              <a:t>Workshop Guide → Section 4 (Beyond the Case)</a:t>
             </a:r>
           </a:p>
         </p:txBody>

--- a/Digital Learning Unlocked - Slide Deck.pptx
+++ b/Digital Learning Unlocked - Slide Deck.pptx
@@ -11,18 +11,17 @@
     <p:sldId id="500" r:id="rId8"/>
     <p:sldId id="501" r:id="rId9"/>
     <p:sldId id="502" r:id="rId10"/>
-    <p:sldId id="503" r:id="rId200"/>
+    <p:sldId id="503" r:id="rId205"/>
     <p:sldId id="504" r:id="rId201"/>
     <p:sldId id="505" r:id="rId202"/>
     <p:sldId id="506" r:id="rId203"/>
     <p:sldId id="507" r:id="rId204"/>
-    <p:sldId id="508" r:id="rId24"/>
-    <p:sldId id="509" r:id="rId26"/>
-    <p:sldId id="510" r:id="rId31"/>
-    <p:sldId id="511" r:id="rId33"/>
-    <p:sldId id="512" r:id="rId34"/>
-    <p:sldId id="513" r:id="rId35"/>
-    <p:sldId id="514" r:id="rId36"/>
+    <p:sldId id="508" r:id="rId26"/>
+    <p:sldId id="509" r:id="rId31"/>
+    <p:sldId id="510" r:id="rId206"/>
+    <p:sldId id="511" r:id="rId34"/>
+    <p:sldId id="512" r:id="rId35"/>
+    <p:sldId id="513" r:id="rId36"/>
   </p:sldIdLst>
   <p:sldSz cx="12179300" cy="6858000"/>
   <p:notesSz cx="6858000" cy="9144000"/>
@@ -3014,7 +3013,7 @@
         <p:spPr>
           <a:xfrm>
             <a:off x="640080" y="1371600"/>
-            <a:ext cx="5486401" cy="4114800"/>
+            <a:ext cx="10972801" cy="3657600"/>
           </a:xfrm>
           <a:prstGeom prst="rect">
             <a:avLst/>
@@ -3058,7 +3057,7 @@
         <p:spPr>
           <a:xfrm>
             <a:off x="640080" y="1371600"/>
-            <a:ext cx="50801" cy="4114800"/>
+            <a:ext cx="50801" cy="3657600"/>
           </a:xfrm>
           <a:prstGeom prst="rect">
             <a:avLst/>
@@ -3095,95 +3094,7 @@
       </p:sp>
       <p:sp>
         <p:nvSpPr>
-          <p:cNvPr id="5" name="Rectangle 4"/>
-          <p:cNvSpPr/>
-          <p:nvPr/>
-        </p:nvSpPr>
-        <p:spPr>
-          <a:xfrm>
-            <a:off x="6583680" y="1371600"/>
-            <a:ext cx="5029201" cy="4114800"/>
-          </a:xfrm>
-          <a:prstGeom prst="rect">
-            <a:avLst/>
-          </a:prstGeom>
-          <a:solidFill>
-            <a:srgbClr val="FDF6F0"/>
-          </a:solidFill>
-          <a:ln>
-            <a:noFill/>
-          </a:ln>
-          <a:effectLst/>
-        </p:spPr>
-        <p:style>
-          <a:lnRef idx="1">
-            <a:schemeClr val="accent1"/>
-          </a:lnRef>
-          <a:fillRef idx="3">
-            <a:schemeClr val="accent1"/>
-          </a:fillRef>
-          <a:effectRef idx="2">
-            <a:schemeClr val="accent1"/>
-          </a:effectRef>
-          <a:fontRef idx="minor">
-            <a:schemeClr val="lt1"/>
-          </a:fontRef>
-        </p:style>
-        <p:txBody>
-          <a:bodyPr rtlCol="0" anchor="ctr"/>
-          <a:lstStyle/>
-          <a:p>
-            <a:pPr algn="ctr"/>
-          </a:p>
-        </p:txBody>
-      </p:sp>
-      <p:sp>
-        <p:nvSpPr>
-          <p:cNvPr id="6" name="Rectangle 5"/>
-          <p:cNvSpPr/>
-          <p:nvPr/>
-        </p:nvSpPr>
-        <p:spPr>
-          <a:xfrm>
-            <a:off x="6583680" y="1371600"/>
-            <a:ext cx="50801" cy="4114800"/>
-          </a:xfrm>
-          <a:prstGeom prst="rect">
-            <a:avLst/>
-          </a:prstGeom>
-          <a:solidFill>
-            <a:srgbClr val="E8833A"/>
-          </a:solidFill>
-          <a:ln>
-            <a:noFill/>
-          </a:ln>
-          <a:effectLst/>
-        </p:spPr>
-        <p:style>
-          <a:lnRef idx="1">
-            <a:schemeClr val="accent1"/>
-          </a:lnRef>
-          <a:fillRef idx="3">
-            <a:schemeClr val="accent1"/>
-          </a:fillRef>
-          <a:effectRef idx="2">
-            <a:schemeClr val="accent1"/>
-          </a:effectRef>
-          <a:fontRef idx="minor">
-            <a:schemeClr val="lt1"/>
-          </a:fontRef>
-        </p:style>
-        <p:txBody>
-          <a:bodyPr rtlCol="0" anchor="ctr"/>
-          <a:lstStyle/>
-          <a:p>
-            <a:pPr algn="ctr"/>
-          </a:p>
-        </p:txBody>
-      </p:sp>
-      <p:sp>
-        <p:nvSpPr>
-          <p:cNvPr id="7" name="TextBox 6"/>
+          <p:cNvPr id="5" name="TextBox 4"/>
           <p:cNvSpPr txBox="1"/>
           <p:nvPr/>
         </p:nvSpPr>
@@ -3209,21 +3120,21 @@
                   <a:srgbClr val="FFFFFF"/>
                 </a:solidFill>
               </a:rPr>
-              <a:t>The Fidelity Spectrum</a:t>
-            </a:r>
-          </a:p>
-        </p:txBody>
-      </p:sp>
-      <p:sp>
-        <p:nvSpPr>
-          <p:cNvPr id="8" name="TextBox 7"/>
+              <a:t>Think · Pair · Share: Match the Tool (2 min)</a:t>
+            </a:r>
+          </a:p>
+        </p:txBody>
+      </p:sp>
+      <p:sp>
+        <p:nvSpPr>
+          <p:cNvPr id="6" name="TextBox 5"/>
           <p:cNvSpPr txBox="1"/>
           <p:nvPr/>
         </p:nvSpPr>
         <p:spPr>
           <a:xfrm>
-            <a:off x="502919" y="1097280"/>
-            <a:ext cx="11155682" cy="300594"/>
+            <a:off x="1143000" y="1828800"/>
+            <a:ext cx="9966961" cy="1985576"/>
           </a:xfrm>
           <a:prstGeom prst="rect">
             <a:avLst/>
@@ -3237,26 +3148,41 @@
           <a:lstStyle/>
           <a:p>
             <a:r>
-              <a:rPr sz="1600" b="0">
-                <a:solidFill>
-                  <a:srgbClr val="5B6B7C"/>
+              <a:rPr sz="2200" b="0">
+                <a:solidFill>
+                  <a:srgbClr val="1E4258"/>
                 </a:solidFill>
               </a:rPr>
-              <a:t>Match the tool to the goal, not the other way around</a:t>
-            </a:r>
-          </a:p>
-        </p:txBody>
-      </p:sp>
-      <p:sp>
-        <p:nvSpPr>
-          <p:cNvPr id="9" name="TextBox 8"/>
+              <a:t>Pick a clinical skill your fellows need to learn.</a:t>
+            </a:r>
+          </a:p>
+          <a:p>
+            <a:pPr>
+              <a:spcBef>
+                <a:spcPts val="1600"/>
+              </a:spcBef>
+            </a:pPr>
+            <a:r>
+              <a:rPr sz="2200" b="0">
+                <a:solidFill>
+                  <a:srgbClr val="1E4258"/>
+                </a:solidFill>
+              </a:rPr>
+              <a:t>Which point on the spectrum fits, and would the free option do the job?</a:t>
+            </a:r>
+          </a:p>
+        </p:txBody>
+      </p:sp>
+      <p:sp>
+        <p:nvSpPr>
+          <p:cNvPr id="7" name="TextBox 6"/>
           <p:cNvSpPr txBox="1"/>
           <p:nvPr/>
         </p:nvSpPr>
         <p:spPr>
           <a:xfrm>
-            <a:off x="960119" y="1554480"/>
-            <a:ext cx="4937762" cy="225708"/>
+            <a:off x="1143000" y="5303520"/>
+            <a:ext cx="9966961" cy="300594"/>
           </a:xfrm>
           <a:prstGeom prst="rect">
             <a:avLst/>
@@ -3270,224 +3196,12 @@
           <a:lstStyle/>
           <a:p>
             <a:r>
-              <a:rPr sz="1100" b="1">
-                <a:solidFill>
-                  <a:srgbClr val="2D5F7C"/>
+              <a:rPr sz="1600" b="0">
+                <a:solidFill>
+                  <a:srgbClr val="0000FF"/>
                 </a:solidFill>
               </a:rPr>
-              <a:t>THE SPECTRUM, LEFT TO RIGHT</a:t>
-            </a:r>
-          </a:p>
-        </p:txBody>
-      </p:sp>
-      <p:sp>
-        <p:nvSpPr>
-          <p:cNvPr id="10" name="TextBox 9"/>
-          <p:cNvSpPr txBox="1"/>
-          <p:nvPr/>
-        </p:nvSpPr>
-        <p:spPr>
-          <a:xfrm>
-            <a:off x="960119" y="1920239"/>
-            <a:ext cx="4937762" cy="2301589"/>
-          </a:xfrm>
-          <a:prstGeom prst="rect">
-            <a:avLst/>
-          </a:prstGeom>
-          <a:noFill/>
-        </p:spPr>
-        <p:txBody>
-          <a:bodyPr wrap="square">
-            <a:spAutoFit/>
-          </a:bodyPr>
-          <a:lstStyle/>
-          <a:p>
-            <a:r>
-              <a:rPr sz="1800" b="0">
-                <a:solidFill>
-                  <a:srgbClr val="1A2332"/>
-                </a:solidFill>
-              </a:rPr>
-              <a:t>• Text and audio, $0 to $20/mo</a:t>
-            </a:r>
-          </a:p>
-          <a:p>
-            <a:pPr>
-              <a:spcBef>
-                <a:spcPts val="1000"/>
-              </a:spcBef>
-            </a:pPr>
-            <a:r>
-              <a:rPr sz="1800" b="0">
-                <a:solidFill>
-                  <a:srgbClr val="1A2332"/>
-                </a:solidFill>
-              </a:rPr>
-              <a:t>• Image-based, free to $25</a:t>
-            </a:r>
-          </a:p>
-          <a:p>
-            <a:pPr>
-              <a:spcBef>
-                <a:spcPts val="1000"/>
-              </a:spcBef>
-            </a:pPr>
-            <a:r>
-              <a:rPr sz="1800" b="0">
-                <a:solidFill>
-                  <a:srgbClr val="1A2332"/>
-                </a:solidFill>
-              </a:rPr>
-              <a:t>• Screen-based, free trials</a:t>
-            </a:r>
-          </a:p>
-          <a:p>
-            <a:pPr>
-              <a:spcBef>
-                <a:spcPts val="1000"/>
-              </a:spcBef>
-            </a:pPr>
-            <a:r>
-              <a:rPr sz="1800" b="0">
-                <a:solidFill>
-                  <a:srgbClr val="1A2332"/>
-                </a:solidFill>
-              </a:rPr>
-              <a:t>• AR on your phone, free to $25</a:t>
-            </a:r>
-          </a:p>
-          <a:p>
-            <a:pPr>
-              <a:spcBef>
-                <a:spcPts val="1000"/>
-              </a:spcBef>
-            </a:pPr>
-            <a:r>
-              <a:rPr sz="1800" b="0">
-                <a:solidFill>
-                  <a:srgbClr val="1A2332"/>
-                </a:solidFill>
-              </a:rPr>
-              <a:t>• Immersive VR, $100 to $600</a:t>
-            </a:r>
-          </a:p>
-        </p:txBody>
-      </p:sp>
-      <p:sp>
-        <p:nvSpPr>
-          <p:cNvPr id="11" name="TextBox 10"/>
-          <p:cNvSpPr txBox="1"/>
-          <p:nvPr/>
-        </p:nvSpPr>
-        <p:spPr>
-          <a:xfrm>
-            <a:off x="6903719" y="1554480"/>
-            <a:ext cx="4480562" cy="225708"/>
-          </a:xfrm>
-          <a:prstGeom prst="rect">
-            <a:avLst/>
-          </a:prstGeom>
-          <a:noFill/>
-        </p:spPr>
-        <p:txBody>
-          <a:bodyPr wrap="square">
-            <a:spAutoFit/>
-          </a:bodyPr>
-          <a:lstStyle/>
-          <a:p>
-            <a:r>
-              <a:rPr sz="1100" b="1">
-                <a:solidFill>
-                  <a:srgbClr val="E8833A"/>
-                </a:solidFill>
-              </a:rPr>
-              <a:t>WHERE REASONING LIVES</a:t>
-            </a:r>
-          </a:p>
-        </p:txBody>
-      </p:sp>
-      <p:sp>
-        <p:nvSpPr>
-          <p:cNvPr id="12" name="TextBox 11"/>
-          <p:cNvSpPr txBox="1"/>
-          <p:nvPr/>
-        </p:nvSpPr>
-        <p:spPr>
-          <a:xfrm>
-            <a:off x="6903719" y="1920239"/>
-            <a:ext cx="4480562" cy="2301589"/>
-          </a:xfrm>
-          <a:prstGeom prst="rect">
-            <a:avLst/>
-          </a:prstGeom>
-          <a:noFill/>
-        </p:spPr>
-        <p:txBody>
-          <a:bodyPr wrap="square">
-            <a:spAutoFit/>
-          </a:bodyPr>
-          <a:lstStyle/>
-          <a:p>
-            <a:r>
-              <a:rPr sz="1800">
-                <a:solidFill>
-                  <a:srgbClr val="1A2332"/>
-                </a:solidFill>
-              </a:rPr>
-              <a:t>Text and audio, images included: ECG, X-ray, CT, labs.</a:t>
-            </a:r>
-          </a:p>
-          <a:p>
-            <a:r>
-              <a:rPr sz="1800">
-                <a:solidFill>
-                  <a:srgbClr val="1A2332"/>
-                </a:solidFill>
-              </a:rPr>
-              <a:t>The uncanny valley of avatar tools is real.</a:t>
-            </a:r>
-          </a:p>
-          <a:p>
-            <a:r>
-              <a:rPr sz="1800">
-                <a:solidFill>
-                  <a:srgbClr val="1A2332"/>
-                </a:solidFill>
-              </a:rPr>
-              <a:t>Some text-and-audio tools already do this well.</a:t>
-            </a:r>
-          </a:p>
-        </p:txBody>
-      </p:sp>
-      <p:sp>
-        <p:nvSpPr>
-          <p:cNvPr id="13" name="TextBox 12"/>
-          <p:cNvSpPr txBox="1"/>
-          <p:nvPr/>
-        </p:nvSpPr>
-        <p:spPr>
-          <a:xfrm>
-            <a:off x="502919" y="5715000"/>
-            <a:ext cx="11155682" cy="300594"/>
-          </a:xfrm>
-          <a:prstGeom prst="rect">
-            <a:avLst/>
-          </a:prstGeom>
-          <a:noFill/>
-        </p:spPr>
-        <p:txBody>
-          <a:bodyPr wrap="square">
-            <a:spAutoFit/>
-          </a:bodyPr>
-          <a:lstStyle/>
-          <a:p>
-            <a:r>
-              <a:rPr sz="1600" b="0">
-                <a:solidFill>
-                  <a:srgbClr val="0000FF"/>
-                </a:solidFill>
-              </a:rPr>
-              <a:t>Workshop Guide → Sections 5 + 6 (VR: your take-home)</a:t>
+              <a:t>Workshop Guide → Section 5</a:t>
             </a:r>
           </a:p>
         </p:txBody>
@@ -3571,7 +3285,7 @@
         <p:spPr>
           <a:xfrm>
             <a:off x="640080" y="1371600"/>
-            <a:ext cx="10972801" cy="3657600"/>
+            <a:ext cx="5486401" cy="4114800"/>
           </a:xfrm>
           <a:prstGeom prst="rect">
             <a:avLst/>
@@ -3615,7 +3329,7 @@
         <p:spPr>
           <a:xfrm>
             <a:off x="640080" y="1371600"/>
-            <a:ext cx="50801" cy="3657600"/>
+            <a:ext cx="50801" cy="4114800"/>
           </a:xfrm>
           <a:prstGeom prst="rect">
             <a:avLst/>
@@ -3652,7 +3366,95 @@
       </p:sp>
       <p:sp>
         <p:nvSpPr>
-          <p:cNvPr id="5" name="TextBox 4"/>
+          <p:cNvPr id="5" name="Rectangle 4"/>
+          <p:cNvSpPr/>
+          <p:nvPr/>
+        </p:nvSpPr>
+        <p:spPr>
+          <a:xfrm>
+            <a:off x="6583680" y="1371600"/>
+            <a:ext cx="5029201" cy="4114800"/>
+          </a:xfrm>
+          <a:prstGeom prst="rect">
+            <a:avLst/>
+          </a:prstGeom>
+          <a:solidFill>
+            <a:srgbClr val="FDF6F0"/>
+          </a:solidFill>
+          <a:ln>
+            <a:noFill/>
+          </a:ln>
+          <a:effectLst/>
+        </p:spPr>
+        <p:style>
+          <a:lnRef idx="1">
+            <a:schemeClr val="accent1"/>
+          </a:lnRef>
+          <a:fillRef idx="3">
+            <a:schemeClr val="accent1"/>
+          </a:fillRef>
+          <a:effectRef idx="2">
+            <a:schemeClr val="accent1"/>
+          </a:effectRef>
+          <a:fontRef idx="minor">
+            <a:schemeClr val="lt1"/>
+          </a:fontRef>
+        </p:style>
+        <p:txBody>
+          <a:bodyPr rtlCol="0" anchor="ctr"/>
+          <a:lstStyle/>
+          <a:p>
+            <a:pPr algn="ctr"/>
+          </a:p>
+        </p:txBody>
+      </p:sp>
+      <p:sp>
+        <p:nvSpPr>
+          <p:cNvPr id="6" name="Rectangle 5"/>
+          <p:cNvSpPr/>
+          <p:nvPr/>
+        </p:nvSpPr>
+        <p:spPr>
+          <a:xfrm>
+            <a:off x="6583680" y="1371600"/>
+            <a:ext cx="50801" cy="4114800"/>
+          </a:xfrm>
+          <a:prstGeom prst="rect">
+            <a:avLst/>
+          </a:prstGeom>
+          <a:solidFill>
+            <a:srgbClr val="E8833A"/>
+          </a:solidFill>
+          <a:ln>
+            <a:noFill/>
+          </a:ln>
+          <a:effectLst/>
+        </p:spPr>
+        <p:style>
+          <a:lnRef idx="1">
+            <a:schemeClr val="accent1"/>
+          </a:lnRef>
+          <a:fillRef idx="3">
+            <a:schemeClr val="accent1"/>
+          </a:fillRef>
+          <a:effectRef idx="2">
+            <a:schemeClr val="accent1"/>
+          </a:effectRef>
+          <a:fontRef idx="minor">
+            <a:schemeClr val="lt1"/>
+          </a:fontRef>
+        </p:style>
+        <p:txBody>
+          <a:bodyPr rtlCol="0" anchor="ctr"/>
+          <a:lstStyle/>
+          <a:p>
+            <a:pPr algn="ctr"/>
+          </a:p>
+        </p:txBody>
+      </p:sp>
+      <p:sp>
+        <p:nvSpPr>
+          <p:cNvPr id="7" name="TextBox 6"/>
           <p:cNvSpPr txBox="1"/>
           <p:nvPr/>
         </p:nvSpPr>
@@ -3678,21 +3480,21 @@
                   <a:srgbClr val="FFFFFF"/>
                 </a:solidFill>
               </a:rPr>
-              <a:t>Think · Pair · Share: Match the Tool (2 min)</a:t>
-            </a:r>
-          </a:p>
-        </p:txBody>
-      </p:sp>
-      <p:sp>
-        <p:nvSpPr>
-          <p:cNvPr id="6" name="TextBox 5"/>
+              <a:t>The Build Block: Make One Real Thing (23 min)</a:t>
+            </a:r>
+          </a:p>
+        </p:txBody>
+      </p:sp>
+      <p:sp>
+        <p:nvSpPr>
+          <p:cNvPr id="8" name="TextBox 7"/>
           <p:cNvSpPr txBox="1"/>
           <p:nvPr/>
         </p:nvSpPr>
         <p:spPr>
           <a:xfrm>
-            <a:off x="1143000" y="1828800"/>
-            <a:ext cx="9966961" cy="1985576"/>
+            <a:off x="502919" y="1097280"/>
+            <a:ext cx="11155682" cy="300594"/>
           </a:xfrm>
           <a:prstGeom prst="rect">
             <a:avLst/>
@@ -3706,41 +3508,26 @@
           <a:lstStyle/>
           <a:p>
             <a:r>
-              <a:rPr sz="2200" b="0">
-                <a:solidFill>
-                  <a:srgbClr val="1E4258"/>
+              <a:rPr sz="1600" b="0">
+                <a:solidFill>
+                  <a:srgbClr val="5B6B7C"/>
                 </a:solidFill>
               </a:rPr>
-              <a:t>Pick a clinical skill your fellows need to learn.</a:t>
-            </a:r>
-          </a:p>
-          <a:p>
-            <a:pPr>
-              <a:spcBef>
-                <a:spcPts val="1600"/>
-              </a:spcBef>
-            </a:pPr>
-            <a:r>
-              <a:rPr sz="2200" b="0">
-                <a:solidFill>
-                  <a:srgbClr val="1E4258"/>
-                </a:solidFill>
-              </a:rPr>
-              <a:t>Which point on the spectrum fits, and would the free option do the job?</a:t>
-            </a:r>
-          </a:p>
-        </p:txBody>
-      </p:sp>
-      <p:sp>
-        <p:nvSpPr>
-          <p:cNvPr id="7" name="TextBox 6"/>
+              <a:t>Your pick, your sources, our prompts · Guide → Section 7</a:t>
+            </a:r>
+          </a:p>
+        </p:txBody>
+      </p:sp>
+      <p:sp>
+        <p:nvSpPr>
+          <p:cNvPr id="9" name="TextBox 8"/>
           <p:cNvSpPr txBox="1"/>
           <p:nvPr/>
         </p:nvSpPr>
         <p:spPr>
           <a:xfrm>
-            <a:off x="1143000" y="5303520"/>
-            <a:ext cx="9966961" cy="300594"/>
+            <a:off x="960119" y="1554480"/>
+            <a:ext cx="4937762" cy="225708"/>
           </a:xfrm>
           <a:prstGeom prst="rect">
             <a:avLst/>
@@ -3754,12 +3541,204 @@
           <a:lstStyle/>
           <a:p>
             <a:r>
+              <a:rPr sz="1100" b="1">
+                <a:solidFill>
+                  <a:srgbClr val="2D5F7C"/>
+                </a:solidFill>
+              </a:rPr>
+              <a:t>PICK YOUR BUILD</a:t>
+            </a:r>
+          </a:p>
+        </p:txBody>
+      </p:sp>
+      <p:sp>
+        <p:nvSpPr>
+          <p:cNvPr id="10" name="TextBox 9"/>
+          <p:cNvSpPr txBox="1"/>
+          <p:nvPr/>
+        </p:nvSpPr>
+        <p:spPr>
+          <a:xfrm>
+            <a:off x="960119" y="1920239"/>
+            <a:ext cx="4937762" cy="2301589"/>
+          </a:xfrm>
+          <a:prstGeom prst="rect">
+            <a:avLst/>
+          </a:prstGeom>
+          <a:noFill/>
+        </p:spPr>
+        <p:txBody>
+          <a:bodyPr wrap="square">
+            <a:spAutoFit/>
+          </a:bodyPr>
+          <a:lstStyle/>
+          <a:p>
+            <a:r>
+              <a:rPr sz="1800" b="0">
+                <a:solidFill>
+                  <a:srgbClr val="1A2332"/>
+                </a:solidFill>
+              </a:rPr>
+              <a:t>Your own static case: Prompt 1, any published case</a:t>
+            </a:r>
+          </a:p>
+          <a:p>
+            <a:r>
+              <a:rPr sz="1800" b="0">
+                <a:solidFill>
+                  <a:srgbClr val="1A2332"/>
+                </a:solidFill>
+              </a:rPr>
+              <a:t>Your own dynamic case: Prompt 2, same files</a:t>
+            </a:r>
+          </a:p>
+          <a:p>
+            <a:r>
+              <a:rPr sz="1800" b="0">
+                <a:solidFill>
+                  <a:srgbClr val="1A2332"/>
+                </a:solidFill>
+              </a:rPr>
+              <a:t>Something from a notebook: the AML sources, or any topic</a:t>
+            </a:r>
+          </a:p>
+          <a:p>
+            <a:r>
+              <a:rPr sz="1800" b="0">
+                <a:solidFill>
+                  <a:srgbClr val="1A2332"/>
+                </a:solidFill>
+              </a:rPr>
+              <a:t>Teaching session, journal club, pre-brief: Prompts 3-8</a:t>
+            </a:r>
+          </a:p>
+        </p:txBody>
+      </p:sp>
+      <p:sp>
+        <p:nvSpPr>
+          <p:cNvPr id="11" name="TextBox 10"/>
+          <p:cNvSpPr txBox="1"/>
+          <p:nvPr/>
+        </p:nvSpPr>
+        <p:spPr>
+          <a:xfrm>
+            <a:off x="6903719" y="1554480"/>
+            <a:ext cx="4480562" cy="225708"/>
+          </a:xfrm>
+          <a:prstGeom prst="rect">
+            <a:avLst/>
+          </a:prstGeom>
+          <a:noFill/>
+        </p:spPr>
+        <p:txBody>
+          <a:bodyPr wrap="square">
+            <a:spAutoFit/>
+          </a:bodyPr>
+          <a:lstStyle/>
+          <a:p>
+            <a:r>
+              <a:rPr sz="1100" b="1">
+                <a:solidFill>
+                  <a:srgbClr val="E8833A"/>
+                </a:solidFill>
+              </a:rPr>
+              <a:t>HOW IT RUNS</a:t>
+            </a:r>
+          </a:p>
+        </p:txBody>
+      </p:sp>
+      <p:sp>
+        <p:nvSpPr>
+          <p:cNvPr id="12" name="TextBox 11"/>
+          <p:cNvSpPr txBox="1"/>
+          <p:nvPr/>
+        </p:nvSpPr>
+        <p:spPr>
+          <a:xfrm>
+            <a:off x="6903719" y="1920239"/>
+            <a:ext cx="4480562" cy="2301589"/>
+          </a:xfrm>
+          <a:prstGeom prst="rect">
+            <a:avLst/>
+          </a:prstGeom>
+          <a:noFill/>
+        </p:spPr>
+        <p:txBody>
+          <a:bodyPr wrap="square">
+            <a:spAutoFit/>
+          </a:bodyPr>
+          <a:lstStyle/>
+          <a:p>
+            <a:r>
+              <a:rPr sz="1800">
+                <a:solidFill>
+                  <a:srgbClr val="1A2332"/>
+                </a:solidFill>
+              </a:rPr>
+              <a:t>The Prompt Builder worksheet assembles your prompt as you fill it in</a:t>
+            </a:r>
+          </a:p>
+          <a:p>
+            <a:r>
+              <a:rPr sz="1800">
+                <a:solidFill>
+                  <a:srgbClr val="1A2332"/>
+                </a:solidFill>
+              </a:rPr>
+              <a:t>Build with your table or solo, Diana circulates</a:t>
+            </a:r>
+          </a:p>
+          <a:p>
+            <a:r>
+              <a:rPr sz="1800">
+                <a:solidFill>
+                  <a:srgbClr val="1A2332"/>
+                </a:solidFill>
+              </a:rPr>
+              <a:t>At 0:52 we share a few cool things people made</a:t>
+            </a:r>
+          </a:p>
+          <a:p>
+            <a:r>
+              <a:rPr sz="1800">
+                <a:solidFill>
+                  <a:srgbClr val="1A2332"/>
+                </a:solidFill>
+              </a:rPr>
+              <a:t>Everything you build today goes home with you</a:t>
+            </a:r>
+          </a:p>
+        </p:txBody>
+      </p:sp>
+      <p:sp>
+        <p:nvSpPr>
+          <p:cNvPr id="13" name="TextBox 12"/>
+          <p:cNvSpPr txBox="1"/>
+          <p:nvPr/>
+        </p:nvSpPr>
+        <p:spPr>
+          <a:xfrm>
+            <a:off x="502919" y="5715000"/>
+            <a:ext cx="11155682" cy="300594"/>
+          </a:xfrm>
+          <a:prstGeom prst="rect">
+            <a:avLst/>
+          </a:prstGeom>
+          <a:noFill/>
+        </p:spPr>
+        <p:txBody>
+          <a:bodyPr wrap="square">
+            <a:spAutoFit/>
+          </a:bodyPr>
+          <a:lstStyle/>
+          <a:p>
+            <a:r>
               <a:rPr sz="1600" b="0">
                 <a:solidFill>
                   <a:srgbClr val="0000FF"/>
                 </a:solidFill>
               </a:rPr>
-              <a:t>Workshop Guide → Section 5</a:t>
+              <a:t>Guide → Section 7, the Prompt Builder</a:t>
             </a:r>
           </a:p>
         </p:txBody>
@@ -3792,7 +3771,7 @@
       </p:grpSpPr>
       <p:sp>
         <p:nvSpPr>
-          <p:cNvPr id="383" name="Rectangle 1"/>
+          <p:cNvPr id="2" name="Rectangle 1"/>
           <p:cNvSpPr/>
           <p:nvPr/>
         </p:nvSpPr>
@@ -3807,305 +3786,43 @@
           <a:solidFill>
             <a:srgbClr val="2D5F7C"/>
           </a:solidFill>
-          <a:ln w="12700">
-            <a:miter lim="400000"/>
+          <a:ln>
+            <a:noFill/>
           </a:ln>
-          <a:effectLst>
-            <a:outerShdw sx="100000" sy="100000" kx="0" ky="0" algn="b" rotWithShape="0" blurRad="38100" dist="23000" dir="5400000">
-              <a:srgbClr val="000000">
-                <a:alpha val="35000"/>
-              </a:srgbClr>
-            </a:outerShdw>
-          </a:effectLst>
-        </p:spPr>
-        <p:txBody>
-          <a:bodyPr lIns="45719" rIns="45719" anchor="ctr"/>
-          <a:lstStyle/>
-          <a:p>
-            <a:pPr algn="ctr">
-              <a:defRPr>
-                <a:solidFill>
-                  <a:srgbClr val="FFFFFF"/>
-                </a:solidFill>
-              </a:defRPr>
-            </a:pPr>
-          </a:p>
-        </p:txBody>
-      </p:sp>
-      <p:sp>
-        <p:nvSpPr>
-          <p:cNvPr id="384" name="TextBox 2"/>
-          <p:cNvSpPr txBox="1"/>
-          <p:nvPr/>
-        </p:nvSpPr>
-        <p:spPr>
-          <a:xfrm>
-            <a:off x="502919" y="182879"/>
-            <a:ext cx="11155682" cy="444759"/>
-          </a:xfrm>
-          <a:prstGeom prst="rect">
-            <a:avLst/>
-          </a:prstGeom>
-          <a:ln w="12700">
-            <a:miter lim="400000"/>
-          </a:ln>
-          <a:extLst>
-            <a:ext uri="{C572A759-6A51-4108-AA02-DFA0A04FC94B}">
-              <ma14:wrappingTextBoxFlag xmlns:ma14="http://schemas.microsoft.com/office/mac/drawingml/2011/main" val="1"/>
-            </a:ext>
-          </a:extLst>
-        </p:spPr>
-        <p:txBody>
-          <a:bodyPr lIns="45719" rIns="45719">
-            <a:spAutoFit/>
-          </a:bodyPr>
-          <a:lstStyle>
-            <a:lvl1pPr>
-              <a:defRPr b="1" sz="2800">
-                <a:solidFill>
-                  <a:srgbClr val="FFFFFF"/>
-                </a:solidFill>
-              </a:defRPr>
-            </a:lvl1pPr>
-          </a:lstStyle>
-          <a:p>
-            <a:pPr/>
-            <a:r>
-              <a:rPr/>
-              <a:t>Capstone Design Sprint (20 min)</a:t>
-            </a:r>
-          </a:p>
-        </p:txBody>
-      </p:sp>
-      <p:sp>
-        <p:nvSpPr>
-          <p:cNvPr id="385" name="TextBox 3"/>
-          <p:cNvSpPr txBox="1"/>
-          <p:nvPr/>
-        </p:nvSpPr>
-        <p:spPr>
-          <a:xfrm>
-            <a:off x="502919" y="1097280"/>
-            <a:ext cx="11155682" cy="300594"/>
-          </a:xfrm>
-          <a:prstGeom prst="rect">
-            <a:avLst/>
-          </a:prstGeom>
-          <a:ln w="12700">
-            <a:miter lim="400000"/>
-          </a:ln>
-          <a:extLst>
-            <a:ext uri="{C572A759-6A51-4108-AA02-DFA0A04FC94B}">
-              <ma14:wrappingTextBoxFlag xmlns:ma14="http://schemas.microsoft.com/office/mac/drawingml/2011/main" val="1"/>
-            </a:ext>
-          </a:extLst>
-        </p:spPr>
-        <p:txBody>
-          <a:bodyPr lIns="45719" rIns="45719">
-            <a:spAutoFit/>
-          </a:bodyPr>
-          <a:lstStyle>
-            <a:lvl1pPr>
-              <a:defRPr sz="1600">
-                <a:solidFill>
-                  <a:srgbClr val="5A6B7E"/>
-                </a:solidFill>
-              </a:defRPr>
-            </a:lvl1pPr>
-          </a:lstStyle>
-          <a:p>
-            <a:pPr/>
-            <a:r>
-              <a:rPr/>
-              <a:t>Turn one of your ideas into a plan you can take back to your program</a:t>
-            </a:r>
-          </a:p>
-        </p:txBody>
-      </p:sp>
-      <p:sp>
-        <p:nvSpPr>
-          <p:cNvPr id="386" name="Rectangle 4"/>
+          <a:effectLst/>
+        </p:spPr>
+        <p:style>
+          <a:lnRef idx="1">
+            <a:schemeClr val="accent1"/>
+          </a:lnRef>
+          <a:fillRef idx="3">
+            <a:schemeClr val="accent1"/>
+          </a:fillRef>
+          <a:effectRef idx="2">
+            <a:schemeClr val="accent1"/>
+          </a:effectRef>
+          <a:fontRef idx="minor">
+            <a:schemeClr val="lt1"/>
+          </a:fontRef>
+        </p:style>
+        <p:txBody>
+          <a:bodyPr rtlCol="0" anchor="ctr"/>
+          <a:lstStyle/>
+          <a:p>
+            <a:pPr algn="ctr"/>
+          </a:p>
+        </p:txBody>
+      </p:sp>
+      <p:sp>
+        <p:nvSpPr>
+          <p:cNvPr id="3" name="Rectangle 2"/>
           <p:cNvSpPr/>
           <p:nvPr/>
         </p:nvSpPr>
         <p:spPr>
           <a:xfrm>
             <a:off x="640080" y="1371600"/>
-            <a:ext cx="10972801" cy="1371600"/>
-          </a:xfrm>
-          <a:prstGeom prst="rect">
-            <a:avLst/>
-          </a:prstGeom>
-          <a:solidFill>
-            <a:srgbClr val="FDF6F0"/>
-          </a:solidFill>
-          <a:ln w="12700">
-            <a:miter lim="400000"/>
-          </a:ln>
-          <a:effectLst>
-            <a:outerShdw sx="100000" sy="100000" kx="0" ky="0" algn="b" rotWithShape="0" blurRad="38100" dist="23000" dir="5400000">
-              <a:srgbClr val="000000">
-                <a:alpha val="35000"/>
-              </a:srgbClr>
-            </a:outerShdw>
-          </a:effectLst>
-        </p:spPr>
-        <p:txBody>
-          <a:bodyPr lIns="45719" rIns="45719" anchor="ctr"/>
-          <a:lstStyle/>
-          <a:p>
-            <a:pPr algn="ctr">
-              <a:defRPr>
-                <a:solidFill>
-                  <a:srgbClr val="FFFFFF"/>
-                </a:solidFill>
-              </a:defRPr>
-            </a:pPr>
-          </a:p>
-        </p:txBody>
-      </p:sp>
-      <p:sp>
-        <p:nvSpPr>
-          <p:cNvPr id="387" name="Rectangle 5"/>
-          <p:cNvSpPr/>
-          <p:nvPr/>
-        </p:nvSpPr>
-        <p:spPr>
-          <a:xfrm>
-            <a:off x="640080" y="1371600"/>
-            <a:ext cx="50801" cy="1371600"/>
-          </a:xfrm>
-          <a:prstGeom prst="rect">
-            <a:avLst/>
-          </a:prstGeom>
-          <a:solidFill>
-            <a:srgbClr val="E8833A"/>
-          </a:solidFill>
-          <a:ln w="12700">
-            <a:miter lim="400000"/>
-          </a:ln>
-          <a:effectLst>
-            <a:outerShdw sx="100000" sy="100000" kx="0" ky="0" algn="b" rotWithShape="0" blurRad="38100" dist="23000" dir="5400000">
-              <a:srgbClr val="000000">
-                <a:alpha val="35000"/>
-              </a:srgbClr>
-            </a:outerShdw>
-          </a:effectLst>
-        </p:spPr>
-        <p:txBody>
-          <a:bodyPr lIns="45719" rIns="45719" anchor="ctr"/>
-          <a:lstStyle/>
-          <a:p>
-            <a:pPr algn="ctr">
-              <a:defRPr>
-                <a:solidFill>
-                  <a:srgbClr val="FFFFFF"/>
-                </a:solidFill>
-              </a:defRPr>
-            </a:pPr>
-          </a:p>
-        </p:txBody>
-      </p:sp>
-      <p:sp>
-        <p:nvSpPr>
-          <p:cNvPr id="388" name="TextBox 6"/>
-          <p:cNvSpPr txBox="1"/>
-          <p:nvPr/>
-        </p:nvSpPr>
-        <p:spPr>
-          <a:xfrm>
-            <a:off x="914399" y="1444752"/>
-            <a:ext cx="10515602" cy="225708"/>
-          </a:xfrm>
-          <a:prstGeom prst="rect">
-            <a:avLst/>
-          </a:prstGeom>
-          <a:ln w="12700">
-            <a:miter lim="400000"/>
-          </a:ln>
-          <a:extLst>
-            <a:ext uri="{C572A759-6A51-4108-AA02-DFA0A04FC94B}">
-              <ma14:wrappingTextBoxFlag xmlns:ma14="http://schemas.microsoft.com/office/mac/drawingml/2011/main" val="1"/>
-            </a:ext>
-          </a:extLst>
-        </p:spPr>
-        <p:txBody>
-          <a:bodyPr lIns="45719" rIns="45719">
-            <a:spAutoFit/>
-          </a:bodyPr>
-          <a:lstStyle>
-            <a:lvl1pPr>
-              <a:defRPr b="1" sz="1100">
-                <a:solidFill>
-                  <a:srgbClr val="E8833A"/>
-                </a:solidFill>
-              </a:defRPr>
-            </a:lvl1pPr>
-          </a:lstStyle>
-          <a:p>
-            <a:pPr/>
-            <a:r>
-              <a:rPr/>
-              <a:t>WHAT THIS IS</a:t>
-            </a:r>
-          </a:p>
-        </p:txBody>
-      </p:sp>
-      <p:sp>
-        <p:nvSpPr>
-          <p:cNvPr id="389" name="TextBox 7"/>
-          <p:cNvSpPr txBox="1"/>
-          <p:nvPr/>
-        </p:nvSpPr>
-        <p:spPr>
-          <a:xfrm>
-            <a:off x="914399" y="1737360"/>
-            <a:ext cx="10515602" cy="506597"/>
-          </a:xfrm>
-          <a:prstGeom prst="rect">
-            <a:avLst/>
-          </a:prstGeom>
-          <a:ln w="12700">
-            <a:miter lim="400000"/>
-          </a:ln>
-          <a:extLst>
-            <a:ext uri="{C572A759-6A51-4108-AA02-DFA0A04FC94B}">
-              <ma14:wrappingTextBoxFlag xmlns:ma14="http://schemas.microsoft.com/office/mac/drawingml/2011/main" val="1"/>
-            </a:ext>
-          </a:extLst>
-        </p:spPr>
-        <p:txBody>
-          <a:bodyPr lIns="45719" rIns="45719">
-            <a:spAutoFit/>
-          </a:bodyPr>
-          <a:lstStyle>
-            <a:lvl1pPr>
-              <a:defRPr sz="1500">
-                <a:solidFill>
-                  <a:srgbClr val="1A2332"/>
-                </a:solidFill>
-              </a:defRPr>
-            </a:lvl1pPr>
-          </a:lstStyle>
-          <a:p>
-            <a:pPr/>
-            <a:r>
-              <a:rPr/>
-              <a:t>You've been discussing tools and ideas after each section, now extend that into a full implementation plan. Pick the idea that feels most feasible.</a:t>
-            </a:r>
-          </a:p>
-        </p:txBody>
-      </p:sp>
-      <p:sp>
-        <p:nvSpPr>
-          <p:cNvPr id="390" name="Rectangle 8"/>
-          <p:cNvSpPr/>
-          <p:nvPr/>
-        </p:nvSpPr>
-        <p:spPr>
-          <a:xfrm>
-            <a:off x="640079" y="3017520"/>
-            <a:ext cx="2103122" cy="1828801"/>
+            <a:ext cx="10972801" cy="3657600"/>
           </a:xfrm>
           <a:prstGeom prst="rect">
             <a:avLst/>
@@ -4113,1248 +3830,182 @@
           <a:solidFill>
             <a:srgbClr val="F0F4F8"/>
           </a:solidFill>
-          <a:ln w="12700">
-            <a:miter lim="400000"/>
+          <a:ln>
+            <a:noFill/>
           </a:ln>
-          <a:effectLst>
-            <a:outerShdw sx="100000" sy="100000" kx="0" ky="0" algn="b" rotWithShape="0" blurRad="38100" dist="23000" dir="5400000">
-              <a:srgbClr val="000000">
-                <a:alpha val="35000"/>
-              </a:srgbClr>
-            </a:outerShdw>
-          </a:effectLst>
-        </p:spPr>
-        <p:txBody>
-          <a:bodyPr lIns="45719" rIns="45719" anchor="ctr"/>
-          <a:lstStyle/>
-          <a:p>
-            <a:pPr algn="ctr">
-              <a:defRPr>
-                <a:solidFill>
-                  <a:srgbClr val="FFFFFF"/>
-                </a:solidFill>
-              </a:defRPr>
-            </a:pPr>
-          </a:p>
-        </p:txBody>
-      </p:sp>
-      <p:sp>
-        <p:nvSpPr>
-          <p:cNvPr id="391" name="Rectangle 9"/>
+          <a:effectLst/>
+        </p:spPr>
+        <p:style>
+          <a:lnRef idx="1">
+            <a:schemeClr val="accent1"/>
+          </a:lnRef>
+          <a:fillRef idx="3">
+            <a:schemeClr val="accent1"/>
+          </a:fillRef>
+          <a:effectRef idx="2">
+            <a:schemeClr val="accent1"/>
+          </a:effectRef>
+          <a:fontRef idx="minor">
+            <a:schemeClr val="lt1"/>
+          </a:fontRef>
+        </p:style>
+        <p:txBody>
+          <a:bodyPr rtlCol="0" anchor="ctr"/>
+          <a:lstStyle/>
+          <a:p>
+            <a:pPr algn="ctr"/>
+          </a:p>
+        </p:txBody>
+      </p:sp>
+      <p:sp>
+        <p:nvSpPr>
+          <p:cNvPr id="4" name="Rectangle 3"/>
           <p:cNvSpPr/>
           <p:nvPr/>
         </p:nvSpPr>
         <p:spPr>
           <a:xfrm>
-            <a:off x="640079" y="3017520"/>
-            <a:ext cx="2103122" cy="50801"/>
+            <a:off x="640080" y="1371600"/>
+            <a:ext cx="50801" cy="3657600"/>
           </a:xfrm>
           <a:prstGeom prst="rect">
             <a:avLst/>
           </a:prstGeom>
           <a:solidFill>
-            <a:srgbClr val="E8833A"/>
+            <a:srgbClr val="2D5F7C"/>
           </a:solidFill>
-          <a:ln w="12700">
-            <a:miter lim="400000"/>
+          <a:ln>
+            <a:noFill/>
           </a:ln>
-          <a:effectLst>
-            <a:outerShdw sx="100000" sy="100000" kx="0" ky="0" algn="b" rotWithShape="0" blurRad="38100" dist="23000" dir="5400000">
-              <a:srgbClr val="000000">
-                <a:alpha val="35000"/>
-              </a:srgbClr>
-            </a:outerShdw>
-          </a:effectLst>
-        </p:spPr>
-        <p:txBody>
-          <a:bodyPr lIns="45719" rIns="45719" anchor="ctr"/>
-          <a:lstStyle/>
-          <a:p>
-            <a:pPr algn="ctr">
-              <a:defRPr>
-                <a:solidFill>
-                  <a:srgbClr val="FFFFFF"/>
-                </a:solidFill>
-              </a:defRPr>
-            </a:pPr>
-          </a:p>
-        </p:txBody>
-      </p:sp>
-      <p:grpSp>
-        <p:nvGrpSpPr>
-          <p:cNvPr id="394" name="Oval 10"/>
-          <p:cNvGrpSpPr/>
-          <p:nvPr/>
-        </p:nvGrpSpPr>
-        <p:grpSpPr>
-          <a:xfrm>
-            <a:off x="1325880" y="3200399"/>
-            <a:ext cx="640081" cy="640082"/>
-            <a:chOff x="0" y="0"/>
-            <a:chExt cx="640080" cy="640080"/>
-          </a:xfrm>
-        </p:grpSpPr>
-        <p:sp>
-          <p:nvSpPr>
-            <p:cNvPr id="392" name="Circle"/>
-            <p:cNvSpPr/>
-            <p:nvPr/>
-          </p:nvSpPr>
-          <p:spPr>
-            <a:xfrm>
-              <a:off x="-1" y="-1"/>
-              <a:ext cx="640082" cy="640082"/>
-            </a:xfrm>
-            <a:prstGeom prst="ellipse">
-              <a:avLst/>
-            </a:prstGeom>
-            <a:solidFill>
-              <a:srgbClr val="E8833A"/>
-            </a:solidFill>
-            <a:ln w="12700" cap="flat">
-              <a:noFill/>
-              <a:miter lim="400000"/>
-            </a:ln>
-            <a:effectLst>
-              <a:outerShdw sx="100000" sy="100000" kx="0" ky="0" algn="b" rotWithShape="0" blurRad="38100" dist="23000" dir="5400000">
-                <a:srgbClr val="000000">
-                  <a:alpha val="35000"/>
-                </a:srgbClr>
-              </a:outerShdw>
-            </a:effectLst>
-          </p:spPr>
-          <p:txBody>
-            <a:bodyPr wrap="square" lIns="45719" tIns="45719" rIns="45719" bIns="45719" numCol="1" anchor="ctr">
-              <a:noAutofit/>
-            </a:bodyPr>
-            <a:lstStyle/>
-            <a:p>
-              <a:pPr algn="ctr">
-                <a:defRPr b="1">
-                  <a:solidFill>
-                    <a:srgbClr val="FFFFFF"/>
-                  </a:solidFill>
-                </a:defRPr>
-              </a:pPr>
-            </a:p>
-          </p:txBody>
-        </p:sp>
-        <p:sp>
-          <p:nvSpPr>
-            <p:cNvPr id="393" name="1"/>
-            <p:cNvSpPr txBox="1"/>
-            <p:nvPr/>
-          </p:nvSpPr>
-          <p:spPr>
-            <a:xfrm>
-              <a:off x="139457" y="153496"/>
-              <a:ext cx="361166" cy="333088"/>
-            </a:xfrm>
-            <a:prstGeom prst="rect">
-              <a:avLst/>
-            </a:prstGeom>
-            <a:noFill/>
-            <a:ln w="12700" cap="flat">
-              <a:noFill/>
-              <a:miter lim="400000"/>
-            </a:ln>
-            <a:effectLst/>
-            <a:extLst>
-              <a:ext uri="{C572A759-6A51-4108-AA02-DFA0A04FC94B}">
-                <ma14:wrappingTextBoxFlag xmlns:ma14="http://schemas.microsoft.com/office/mac/drawingml/2011/main" val="1"/>
-              </a:ext>
-            </a:extLst>
-          </p:spPr>
-          <p:txBody>
-            <a:bodyPr wrap="square" lIns="45719" tIns="45719" rIns="45719" bIns="45719" numCol="1" anchor="ctr">
-              <a:spAutoFit/>
-            </a:bodyPr>
-            <a:lstStyle>
-              <a:lvl1pPr algn="ctr">
-                <a:defRPr b="1">
-                  <a:solidFill>
-                    <a:srgbClr val="FFFFFF"/>
-                  </a:solidFill>
-                </a:defRPr>
-              </a:lvl1pPr>
-            </a:lstStyle>
-            <a:p>
-              <a:pPr/>
-              <a:r>
-                <a:t>1</a:t>
-              </a:r>
-            </a:p>
-          </p:txBody>
-        </p:sp>
-      </p:grpSp>
-      <p:sp>
-        <p:nvSpPr>
-          <p:cNvPr id="395" name="TextBox 11"/>
+          <a:effectLst/>
+        </p:spPr>
+        <p:style>
+          <a:lnRef idx="1">
+            <a:schemeClr val="accent1"/>
+          </a:lnRef>
+          <a:fillRef idx="3">
+            <a:schemeClr val="accent1"/>
+          </a:fillRef>
+          <a:effectRef idx="2">
+            <a:schemeClr val="accent1"/>
+          </a:effectRef>
+          <a:fontRef idx="minor">
+            <a:schemeClr val="lt1"/>
+          </a:fontRef>
+        </p:style>
+        <p:txBody>
+          <a:bodyPr rtlCol="0" anchor="ctr"/>
+          <a:lstStyle/>
+          <a:p>
+            <a:pPr algn="ctr"/>
+          </a:p>
+        </p:txBody>
+      </p:sp>
+      <p:sp>
+        <p:nvSpPr>
+          <p:cNvPr id="5" name="TextBox 4"/>
           <p:cNvSpPr txBox="1"/>
           <p:nvPr/>
         </p:nvSpPr>
         <p:spPr>
           <a:xfrm>
-            <a:off x="777239" y="4023359"/>
-            <a:ext cx="1828801" cy="509400"/>
-          </a:xfrm>
-          <a:prstGeom prst="rect">
-            <a:avLst/>
-          </a:prstGeom>
-          <a:ln w="12700">
-            <a:miter lim="400000"/>
-          </a:ln>
-          <a:extLst>
-            <a:ext uri="{C572A759-6A51-4108-AA02-DFA0A04FC94B}">
-              <ma14:wrappingTextBoxFlag xmlns:ma14="http://schemas.microsoft.com/office/mac/drawingml/2011/main" val="1"/>
-            </a:ext>
-          </a:extLst>
-        </p:spPr>
-        <p:txBody>
-          <a:bodyPr lIns="45719" rIns="45719">
+            <a:off x="502919" y="182879"/>
+            <a:ext cx="11155682" cy="444759"/>
+          </a:xfrm>
+          <a:prstGeom prst="rect">
+            <a:avLst/>
+          </a:prstGeom>
+          <a:noFill/>
+        </p:spPr>
+        <p:txBody>
+          <a:bodyPr wrap="square">
             <a:spAutoFit/>
           </a:bodyPr>
           <a:lstStyle/>
           <a:p>
-            <a:pPr algn="ctr">
-              <a:defRPr sz="1400">
-                <a:solidFill>
-                  <a:srgbClr val="1E4258"/>
-                </a:solidFill>
-              </a:defRPr>
-            </a:pPr>
-            <a:r>
-              <a:rPr/>
-              <a:t>Identify</a:t>
-            </a:r>
-            <a:br/>
-            <a:r>
-              <a:rPr/>
-              <a:t>a Need</a:t>
-            </a:r>
-          </a:p>
-        </p:txBody>
-      </p:sp>
-      <p:sp>
-        <p:nvSpPr>
-          <p:cNvPr id="396" name="Rectangle 12"/>
-          <p:cNvSpPr/>
-          <p:nvPr/>
-        </p:nvSpPr>
-        <p:spPr>
-          <a:xfrm>
-            <a:off x="2926079" y="3017520"/>
-            <a:ext cx="2103121" cy="1828801"/>
-          </a:xfrm>
-          <a:prstGeom prst="rect">
-            <a:avLst/>
-          </a:prstGeom>
-          <a:solidFill>
-            <a:srgbClr val="F0F4F8"/>
-          </a:solidFill>
-          <a:ln w="12700">
-            <a:miter lim="400000"/>
-          </a:ln>
-          <a:effectLst>
-            <a:outerShdw sx="100000" sy="100000" kx="0" ky="0" algn="b" rotWithShape="0" blurRad="38100" dist="23000" dir="5400000">
-              <a:srgbClr val="000000">
-                <a:alpha val="35000"/>
-              </a:srgbClr>
-            </a:outerShdw>
-          </a:effectLst>
-        </p:spPr>
-        <p:txBody>
-          <a:bodyPr lIns="45719" rIns="45719" anchor="ctr"/>
-          <a:lstStyle/>
-          <a:p>
-            <a:pPr algn="ctr">
-              <a:defRPr>
+            <a:r>
+              <a:rPr sz="2800" b="1">
                 <a:solidFill>
                   <a:srgbClr val="FFFFFF"/>
                 </a:solidFill>
-              </a:defRPr>
-            </a:pPr>
-          </a:p>
-        </p:txBody>
-      </p:sp>
-      <p:sp>
-        <p:nvSpPr>
-          <p:cNvPr id="397" name="Rectangle 13"/>
-          <p:cNvSpPr/>
-          <p:nvPr/>
-        </p:nvSpPr>
-        <p:spPr>
-          <a:xfrm>
-            <a:off x="2926079" y="3017520"/>
-            <a:ext cx="2103121" cy="50801"/>
-          </a:xfrm>
-          <a:prstGeom prst="rect">
-            <a:avLst/>
-          </a:prstGeom>
-          <a:solidFill>
-            <a:srgbClr val="E8833A"/>
-          </a:solidFill>
-          <a:ln w="12700">
-            <a:miter lim="400000"/>
-          </a:ln>
-          <a:effectLst>
-            <a:outerShdw sx="100000" sy="100000" kx="0" ky="0" algn="b" rotWithShape="0" blurRad="38100" dist="23000" dir="5400000">
-              <a:srgbClr val="000000">
-                <a:alpha val="35000"/>
-              </a:srgbClr>
-            </a:outerShdw>
-          </a:effectLst>
-        </p:spPr>
-        <p:txBody>
-          <a:bodyPr lIns="45719" rIns="45719" anchor="ctr"/>
-          <a:lstStyle/>
-          <a:p>
-            <a:pPr algn="ctr">
-              <a:defRPr>
-                <a:solidFill>
-                  <a:srgbClr val="FFFFFF"/>
-                </a:solidFill>
-              </a:defRPr>
-            </a:pPr>
-          </a:p>
-        </p:txBody>
-      </p:sp>
-      <p:grpSp>
-        <p:nvGrpSpPr>
-          <p:cNvPr id="400" name="Oval 14"/>
-          <p:cNvGrpSpPr/>
-          <p:nvPr/>
-        </p:nvGrpSpPr>
-        <p:grpSpPr>
-          <a:xfrm>
-            <a:off x="3611879" y="3200399"/>
-            <a:ext cx="640081" cy="640082"/>
-            <a:chOff x="0" y="0"/>
-            <a:chExt cx="640080" cy="640080"/>
-          </a:xfrm>
-        </p:grpSpPr>
-        <p:sp>
-          <p:nvSpPr>
-            <p:cNvPr id="398" name="Circle"/>
-            <p:cNvSpPr/>
-            <p:nvPr/>
-          </p:nvSpPr>
-          <p:spPr>
-            <a:xfrm>
-              <a:off x="-1" y="-1"/>
-              <a:ext cx="640082" cy="640082"/>
-            </a:xfrm>
-            <a:prstGeom prst="ellipse">
-              <a:avLst/>
-            </a:prstGeom>
-            <a:solidFill>
-              <a:srgbClr val="E8833A"/>
-            </a:solidFill>
-            <a:ln w="12700" cap="flat">
-              <a:noFill/>
-              <a:miter lim="400000"/>
-            </a:ln>
-            <a:effectLst>
-              <a:outerShdw sx="100000" sy="100000" kx="0" ky="0" algn="b" rotWithShape="0" blurRad="38100" dist="23000" dir="5400000">
-                <a:srgbClr val="000000">
-                  <a:alpha val="35000"/>
-                </a:srgbClr>
-              </a:outerShdw>
-            </a:effectLst>
-          </p:spPr>
-          <p:txBody>
-            <a:bodyPr wrap="square" lIns="45719" tIns="45719" rIns="45719" bIns="45719" numCol="1" anchor="ctr">
-              <a:noAutofit/>
-            </a:bodyPr>
-            <a:lstStyle/>
-            <a:p>
-              <a:pPr algn="ctr">
-                <a:defRPr b="1">
-                  <a:solidFill>
-                    <a:srgbClr val="FFFFFF"/>
-                  </a:solidFill>
-                </a:defRPr>
-              </a:pPr>
-            </a:p>
-          </p:txBody>
-        </p:sp>
-        <p:sp>
-          <p:nvSpPr>
-            <p:cNvPr id="399" name="2"/>
-            <p:cNvSpPr txBox="1"/>
-            <p:nvPr/>
-          </p:nvSpPr>
-          <p:spPr>
-            <a:xfrm>
-              <a:off x="139457" y="153496"/>
-              <a:ext cx="361166" cy="333088"/>
-            </a:xfrm>
-            <a:prstGeom prst="rect">
-              <a:avLst/>
-            </a:prstGeom>
-            <a:noFill/>
-            <a:ln w="12700" cap="flat">
-              <a:noFill/>
-              <a:miter lim="400000"/>
-            </a:ln>
-            <a:effectLst/>
-            <a:extLst>
-              <a:ext uri="{C572A759-6A51-4108-AA02-DFA0A04FC94B}">
-                <ma14:wrappingTextBoxFlag xmlns:ma14="http://schemas.microsoft.com/office/mac/drawingml/2011/main" val="1"/>
-              </a:ext>
-            </a:extLst>
-          </p:spPr>
-          <p:txBody>
-            <a:bodyPr wrap="square" lIns="45719" tIns="45719" rIns="45719" bIns="45719" numCol="1" anchor="ctr">
-              <a:spAutoFit/>
-            </a:bodyPr>
-            <a:lstStyle>
-              <a:lvl1pPr algn="ctr">
-                <a:defRPr b="1">
-                  <a:solidFill>
-                    <a:srgbClr val="FFFFFF"/>
-                  </a:solidFill>
-                </a:defRPr>
-              </a:lvl1pPr>
-            </a:lstStyle>
-            <a:p>
-              <a:pPr/>
-              <a:r>
-                <a:t>2</a:t>
-              </a:r>
-            </a:p>
-          </p:txBody>
-        </p:sp>
-      </p:grpSp>
-      <p:sp>
-        <p:nvSpPr>
-          <p:cNvPr id="401" name="TextBox 15"/>
+              </a:rPr>
+              <a:t>Share-Out (4 min)</a:t>
+            </a:r>
+          </a:p>
+        </p:txBody>
+      </p:sp>
+      <p:sp>
+        <p:nvSpPr>
+          <p:cNvPr id="6" name="TextBox 5"/>
           <p:cNvSpPr txBox="1"/>
           <p:nvPr/>
         </p:nvSpPr>
         <p:spPr>
           <a:xfrm>
-            <a:off x="3063240" y="4023359"/>
-            <a:ext cx="1828801" cy="509400"/>
-          </a:xfrm>
-          <a:prstGeom prst="rect">
-            <a:avLst/>
-          </a:prstGeom>
-          <a:ln w="12700">
-            <a:miter lim="400000"/>
-          </a:ln>
-          <a:extLst>
-            <a:ext uri="{C572A759-6A51-4108-AA02-DFA0A04FC94B}">
-              <ma14:wrappingTextBoxFlag xmlns:ma14="http://schemas.microsoft.com/office/mac/drawingml/2011/main" val="1"/>
-            </a:ext>
-          </a:extLst>
-        </p:spPr>
-        <p:txBody>
-          <a:bodyPr lIns="45719" rIns="45719">
+            <a:off x="1143000" y="1828800"/>
+            <a:ext cx="9966961" cy="1985576"/>
+          </a:xfrm>
+          <a:prstGeom prst="rect">
+            <a:avLst/>
+          </a:prstGeom>
+          <a:noFill/>
+        </p:spPr>
+        <p:txBody>
+          <a:bodyPr wrap="square">
             <a:spAutoFit/>
           </a:bodyPr>
           <a:lstStyle/>
           <a:p>
-            <a:pPr algn="ctr">
-              <a:defRPr sz="1400">
+            <a:r>
+              <a:rPr sz="2200" b="0">
                 <a:solidFill>
                   <a:srgbClr val="1E4258"/>
                 </a:solidFill>
-              </a:defRPr>
-            </a:pPr>
-            <a:r>
-              <a:rPr/>
-              <a:t>Define</a:t>
-            </a:r>
-            <a:br/>
-            <a:r>
-              <a:rPr/>
-              <a:t>Learning Goals</a:t>
-            </a:r>
-          </a:p>
-        </p:txBody>
-      </p:sp>
-      <p:sp>
-        <p:nvSpPr>
-          <p:cNvPr id="402" name="Rectangle 16"/>
-          <p:cNvSpPr/>
-          <p:nvPr/>
-        </p:nvSpPr>
-        <p:spPr>
-          <a:xfrm>
-            <a:off x="5212079" y="3017520"/>
-            <a:ext cx="2103121" cy="1828801"/>
-          </a:xfrm>
-          <a:prstGeom prst="rect">
-            <a:avLst/>
-          </a:prstGeom>
-          <a:solidFill>
-            <a:srgbClr val="F0F4F8"/>
-          </a:solidFill>
-          <a:ln w="12700">
-            <a:miter lim="400000"/>
-          </a:ln>
-          <a:effectLst>
-            <a:outerShdw sx="100000" sy="100000" kx="0" ky="0" algn="b" rotWithShape="0" blurRad="38100" dist="23000" dir="5400000">
-              <a:srgbClr val="000000">
-                <a:alpha val="35000"/>
-              </a:srgbClr>
-            </a:outerShdw>
-          </a:effectLst>
-        </p:spPr>
-        <p:txBody>
-          <a:bodyPr lIns="45719" rIns="45719" anchor="ctr"/>
-          <a:lstStyle/>
-          <a:p>
-            <a:pPr algn="ctr">
-              <a:defRPr>
-                <a:solidFill>
-                  <a:srgbClr val="FFFFFF"/>
-                </a:solidFill>
-              </a:defRPr>
-            </a:pPr>
-          </a:p>
-        </p:txBody>
-      </p:sp>
-      <p:sp>
-        <p:nvSpPr>
-          <p:cNvPr id="403" name="Rectangle 17"/>
-          <p:cNvSpPr/>
-          <p:nvPr/>
-        </p:nvSpPr>
-        <p:spPr>
-          <a:xfrm>
-            <a:off x="5212079" y="3017520"/>
-            <a:ext cx="2103121" cy="50801"/>
-          </a:xfrm>
-          <a:prstGeom prst="rect">
-            <a:avLst/>
-          </a:prstGeom>
-          <a:solidFill>
-            <a:srgbClr val="E8833A"/>
-          </a:solidFill>
-          <a:ln w="12700">
-            <a:miter lim="400000"/>
-          </a:ln>
-          <a:effectLst>
-            <a:outerShdw sx="100000" sy="100000" kx="0" ky="0" algn="b" rotWithShape="0" blurRad="38100" dist="23000" dir="5400000">
-              <a:srgbClr val="000000">
-                <a:alpha val="35000"/>
-              </a:srgbClr>
-            </a:outerShdw>
-          </a:effectLst>
-        </p:spPr>
-        <p:txBody>
-          <a:bodyPr lIns="45719" rIns="45719" anchor="ctr"/>
-          <a:lstStyle/>
-          <a:p>
-            <a:pPr algn="ctr">
-              <a:defRPr>
-                <a:solidFill>
-                  <a:srgbClr val="FFFFFF"/>
-                </a:solidFill>
-              </a:defRPr>
-            </a:pPr>
-          </a:p>
-        </p:txBody>
-      </p:sp>
-      <p:grpSp>
-        <p:nvGrpSpPr>
-          <p:cNvPr id="406" name="Oval 18"/>
-          <p:cNvGrpSpPr/>
-          <p:nvPr/>
-        </p:nvGrpSpPr>
-        <p:grpSpPr>
-          <a:xfrm>
-            <a:off x="5897879" y="3200399"/>
-            <a:ext cx="640081" cy="640082"/>
-            <a:chOff x="0" y="0"/>
-            <a:chExt cx="640080" cy="640080"/>
-          </a:xfrm>
-        </p:grpSpPr>
-        <p:sp>
-          <p:nvSpPr>
-            <p:cNvPr id="404" name="Circle"/>
-            <p:cNvSpPr/>
-            <p:nvPr/>
-          </p:nvSpPr>
-          <p:spPr>
-            <a:xfrm>
-              <a:off x="-1" y="-1"/>
-              <a:ext cx="640082" cy="640082"/>
-            </a:xfrm>
-            <a:prstGeom prst="ellipse">
-              <a:avLst/>
-            </a:prstGeom>
-            <a:solidFill>
-              <a:srgbClr val="E8833A"/>
-            </a:solidFill>
-            <a:ln w="12700" cap="flat">
-              <a:noFill/>
-              <a:miter lim="400000"/>
-            </a:ln>
-            <a:effectLst>
-              <a:outerShdw sx="100000" sy="100000" kx="0" ky="0" algn="b" rotWithShape="0" blurRad="38100" dist="23000" dir="5400000">
-                <a:srgbClr val="000000">
-                  <a:alpha val="35000"/>
-                </a:srgbClr>
-              </a:outerShdw>
-            </a:effectLst>
-          </p:spPr>
-          <p:txBody>
-            <a:bodyPr wrap="square" lIns="45719" tIns="45719" rIns="45719" bIns="45719" numCol="1" anchor="ctr">
-              <a:noAutofit/>
-            </a:bodyPr>
-            <a:lstStyle/>
-            <a:p>
-              <a:pPr algn="ctr">
-                <a:defRPr b="1">
-                  <a:solidFill>
-                    <a:srgbClr val="FFFFFF"/>
-                  </a:solidFill>
-                </a:defRPr>
-              </a:pPr>
-            </a:p>
-          </p:txBody>
-        </p:sp>
-        <p:sp>
-          <p:nvSpPr>
-            <p:cNvPr id="405" name="3"/>
-            <p:cNvSpPr txBox="1"/>
-            <p:nvPr/>
-          </p:nvSpPr>
-          <p:spPr>
-            <a:xfrm>
-              <a:off x="139457" y="153496"/>
-              <a:ext cx="361166" cy="333088"/>
-            </a:xfrm>
-            <a:prstGeom prst="rect">
-              <a:avLst/>
-            </a:prstGeom>
-            <a:noFill/>
-            <a:ln w="12700" cap="flat">
-              <a:noFill/>
-              <a:miter lim="400000"/>
-            </a:ln>
-            <a:effectLst/>
-            <a:extLst>
-              <a:ext uri="{C572A759-6A51-4108-AA02-DFA0A04FC94B}">
-                <ma14:wrappingTextBoxFlag xmlns:ma14="http://schemas.microsoft.com/office/mac/drawingml/2011/main" val="1"/>
-              </a:ext>
-            </a:extLst>
-          </p:spPr>
-          <p:txBody>
-            <a:bodyPr wrap="square" lIns="45719" tIns="45719" rIns="45719" bIns="45719" numCol="1" anchor="ctr">
-              <a:spAutoFit/>
-            </a:bodyPr>
-            <a:lstStyle>
-              <a:lvl1pPr algn="ctr">
-                <a:defRPr b="1">
-                  <a:solidFill>
-                    <a:srgbClr val="FFFFFF"/>
-                  </a:solidFill>
-                </a:defRPr>
-              </a:lvl1pPr>
-            </a:lstStyle>
-            <a:p>
-              <a:pPr/>
-              <a:r>
-                <a:t>3</a:t>
-              </a:r>
-            </a:p>
-          </p:txBody>
-        </p:sp>
-      </p:grpSp>
-      <p:sp>
-        <p:nvSpPr>
-          <p:cNvPr id="407" name="TextBox 19"/>
+              </a:rPr>
+              <a:t>A few cool things people made: show us what you built.</a:t>
+            </a:r>
+          </a:p>
+          <a:p>
+            <a:r>
+              <a:rPr sz="2200" b="0">
+                <a:solidFill>
+                  <a:srgbClr val="1E4258"/>
+                </a:solidFill>
+              </a:rPr>
+              <a:t>What it is, how you would use it, and what you would still need to make it real Monday.</a:t>
+            </a:r>
+          </a:p>
+        </p:txBody>
+      </p:sp>
+      <p:sp>
+        <p:nvSpPr>
+          <p:cNvPr id="7" name="TextBox 6"/>
           <p:cNvSpPr txBox="1"/>
           <p:nvPr/>
         </p:nvSpPr>
         <p:spPr>
           <a:xfrm>
-            <a:off x="5349240" y="4023359"/>
-            <a:ext cx="1828801" cy="509400"/>
-          </a:xfrm>
-          <a:prstGeom prst="rect">
-            <a:avLst/>
-          </a:prstGeom>
-          <a:ln w="12700">
-            <a:miter lim="400000"/>
-          </a:ln>
-          <a:extLst>
-            <a:ext uri="{C572A759-6A51-4108-AA02-DFA0A04FC94B}">
-              <ma14:wrappingTextBoxFlag xmlns:ma14="http://schemas.microsoft.com/office/mac/drawingml/2011/main" val="1"/>
-            </a:ext>
-          </a:extLst>
-        </p:spPr>
-        <p:txBody>
-          <a:bodyPr lIns="45719" rIns="45719">
+            <a:off x="1143000" y="5303520"/>
+            <a:ext cx="9966961" cy="300594"/>
+          </a:xfrm>
+          <a:prstGeom prst="rect">
+            <a:avLst/>
+          </a:prstGeom>
+          <a:noFill/>
+        </p:spPr>
+        <p:txBody>
+          <a:bodyPr wrap="square">
             <a:spAutoFit/>
           </a:bodyPr>
           <a:lstStyle/>
           <a:p>
-            <a:pPr algn="ctr">
-              <a:defRPr sz="1400">
-                <a:solidFill>
-                  <a:srgbClr val="1E4258"/>
-                </a:solidFill>
-              </a:defRPr>
-            </a:pPr>
-            <a:r>
-              <a:rPr/>
-              <a:t>Select</a:t>
-            </a:r>
-            <a:br/>
-            <a:r>
-              <a:rPr/>
-              <a:t>a Tool</a:t>
-            </a:r>
-          </a:p>
-        </p:txBody>
-      </p:sp>
-      <p:sp>
-        <p:nvSpPr>
-          <p:cNvPr id="408" name="Rectangle 20"/>
-          <p:cNvSpPr/>
-          <p:nvPr/>
-        </p:nvSpPr>
-        <p:spPr>
-          <a:xfrm>
-            <a:off x="7498078" y="3017520"/>
-            <a:ext cx="2103121" cy="1828801"/>
-          </a:xfrm>
-          <a:prstGeom prst="rect">
-            <a:avLst/>
-          </a:prstGeom>
-          <a:solidFill>
-            <a:srgbClr val="F0F4F8"/>
-          </a:solidFill>
-          <a:ln w="12700">
-            <a:miter lim="400000"/>
-          </a:ln>
-          <a:effectLst>
-            <a:outerShdw sx="100000" sy="100000" kx="0" ky="0" algn="b" rotWithShape="0" blurRad="38100" dist="23000" dir="5400000">
-              <a:srgbClr val="000000">
-                <a:alpha val="35000"/>
-              </a:srgbClr>
-            </a:outerShdw>
-          </a:effectLst>
-        </p:spPr>
-        <p:txBody>
-          <a:bodyPr lIns="45719" rIns="45719" anchor="ctr"/>
-          <a:lstStyle/>
-          <a:p>
-            <a:pPr algn="ctr">
-              <a:defRPr>
-                <a:solidFill>
-                  <a:srgbClr val="FFFFFF"/>
-                </a:solidFill>
-              </a:defRPr>
-            </a:pPr>
-          </a:p>
-        </p:txBody>
-      </p:sp>
-      <p:sp>
-        <p:nvSpPr>
-          <p:cNvPr id="409" name="Rectangle 21"/>
-          <p:cNvSpPr/>
-          <p:nvPr/>
-        </p:nvSpPr>
-        <p:spPr>
-          <a:xfrm>
-            <a:off x="7498078" y="3017520"/>
-            <a:ext cx="2103121" cy="50801"/>
-          </a:xfrm>
-          <a:prstGeom prst="rect">
-            <a:avLst/>
-          </a:prstGeom>
-          <a:solidFill>
-            <a:srgbClr val="E8833A"/>
-          </a:solidFill>
-          <a:ln w="12700">
-            <a:miter lim="400000"/>
-          </a:ln>
-          <a:effectLst>
-            <a:outerShdw sx="100000" sy="100000" kx="0" ky="0" algn="b" rotWithShape="0" blurRad="38100" dist="23000" dir="5400000">
-              <a:srgbClr val="000000">
-                <a:alpha val="35000"/>
-              </a:srgbClr>
-            </a:outerShdw>
-          </a:effectLst>
-        </p:spPr>
-        <p:txBody>
-          <a:bodyPr lIns="45719" rIns="45719" anchor="ctr"/>
-          <a:lstStyle/>
-          <a:p>
-            <a:pPr algn="ctr">
-              <a:defRPr>
-                <a:solidFill>
-                  <a:srgbClr val="FFFFFF"/>
-                </a:solidFill>
-              </a:defRPr>
-            </a:pPr>
-          </a:p>
-        </p:txBody>
-      </p:sp>
-      <p:grpSp>
-        <p:nvGrpSpPr>
-          <p:cNvPr id="412" name="Oval 22"/>
-          <p:cNvGrpSpPr/>
-          <p:nvPr/>
-        </p:nvGrpSpPr>
-        <p:grpSpPr>
-          <a:xfrm>
-            <a:off x="8183878" y="3200399"/>
-            <a:ext cx="640081" cy="640082"/>
-            <a:chOff x="0" y="0"/>
-            <a:chExt cx="640080" cy="640080"/>
-          </a:xfrm>
-        </p:grpSpPr>
-        <p:sp>
-          <p:nvSpPr>
-            <p:cNvPr id="410" name="Circle"/>
-            <p:cNvSpPr/>
-            <p:nvPr/>
-          </p:nvSpPr>
-          <p:spPr>
-            <a:xfrm>
-              <a:off x="-1" y="-1"/>
-              <a:ext cx="640082" cy="640082"/>
-            </a:xfrm>
-            <a:prstGeom prst="ellipse">
-              <a:avLst/>
-            </a:prstGeom>
-            <a:solidFill>
-              <a:srgbClr val="E8833A"/>
-            </a:solidFill>
-            <a:ln w="12700" cap="flat">
-              <a:noFill/>
-              <a:miter lim="400000"/>
-            </a:ln>
-            <a:effectLst>
-              <a:outerShdw sx="100000" sy="100000" kx="0" ky="0" algn="b" rotWithShape="0" blurRad="38100" dist="23000" dir="5400000">
-                <a:srgbClr val="000000">
-                  <a:alpha val="35000"/>
-                </a:srgbClr>
-              </a:outerShdw>
-            </a:effectLst>
-          </p:spPr>
-          <p:txBody>
-            <a:bodyPr wrap="square" lIns="45719" tIns="45719" rIns="45719" bIns="45719" numCol="1" anchor="ctr">
-              <a:noAutofit/>
-            </a:bodyPr>
-            <a:lstStyle/>
-            <a:p>
-              <a:pPr algn="ctr">
-                <a:defRPr b="1">
-                  <a:solidFill>
-                    <a:srgbClr val="FFFFFF"/>
-                  </a:solidFill>
-                </a:defRPr>
-              </a:pPr>
-            </a:p>
-          </p:txBody>
-        </p:sp>
-        <p:sp>
-          <p:nvSpPr>
-            <p:cNvPr id="411" name="4"/>
-            <p:cNvSpPr txBox="1"/>
-            <p:nvPr/>
-          </p:nvSpPr>
-          <p:spPr>
-            <a:xfrm>
-              <a:off x="139457" y="153496"/>
-              <a:ext cx="361166" cy="333088"/>
-            </a:xfrm>
-            <a:prstGeom prst="rect">
-              <a:avLst/>
-            </a:prstGeom>
-            <a:noFill/>
-            <a:ln w="12700" cap="flat">
-              <a:noFill/>
-              <a:miter lim="400000"/>
-            </a:ln>
-            <a:effectLst/>
-            <a:extLst>
-              <a:ext uri="{C572A759-6A51-4108-AA02-DFA0A04FC94B}">
-                <ma14:wrappingTextBoxFlag xmlns:ma14="http://schemas.microsoft.com/office/mac/drawingml/2011/main" val="1"/>
-              </a:ext>
-            </a:extLst>
-          </p:spPr>
-          <p:txBody>
-            <a:bodyPr wrap="square" lIns="45719" tIns="45719" rIns="45719" bIns="45719" numCol="1" anchor="ctr">
-              <a:spAutoFit/>
-            </a:bodyPr>
-            <a:lstStyle>
-              <a:lvl1pPr algn="ctr">
-                <a:defRPr b="1">
-                  <a:solidFill>
-                    <a:srgbClr val="FFFFFF"/>
-                  </a:solidFill>
-                </a:defRPr>
-              </a:lvl1pPr>
-            </a:lstStyle>
-            <a:p>
-              <a:pPr/>
-              <a:r>
-                <a:t>4</a:t>
-              </a:r>
-            </a:p>
-          </p:txBody>
-        </p:sp>
-      </p:grpSp>
-      <p:sp>
-        <p:nvSpPr>
-          <p:cNvPr id="413" name="TextBox 23"/>
-          <p:cNvSpPr txBox="1"/>
-          <p:nvPr/>
-        </p:nvSpPr>
-        <p:spPr>
-          <a:xfrm>
-            <a:off x="7635238" y="4023359"/>
-            <a:ext cx="1828801" cy="509400"/>
-          </a:xfrm>
-          <a:prstGeom prst="rect">
-            <a:avLst/>
-          </a:prstGeom>
-          <a:ln w="12700">
-            <a:miter lim="400000"/>
-          </a:ln>
-          <a:extLst>
-            <a:ext uri="{C572A759-6A51-4108-AA02-DFA0A04FC94B}">
-              <ma14:wrappingTextBoxFlag xmlns:ma14="http://schemas.microsoft.com/office/mac/drawingml/2011/main" val="1"/>
-            </a:ext>
-          </a:extLst>
-        </p:spPr>
-        <p:txBody>
-          <a:bodyPr lIns="45719" rIns="45719">
-            <a:spAutoFit/>
-          </a:bodyPr>
-          <a:lstStyle/>
-          <a:p>
-            <a:pPr algn="ctr">
-              <a:defRPr sz="1400">
-                <a:solidFill>
-                  <a:srgbClr val="1E4258"/>
-                </a:solidFill>
-              </a:defRPr>
-            </a:pPr>
-            <a:r>
-              <a:rPr/>
-              <a:t>Map Pedagogy</a:t>
-            </a:r>
-            <a:br/>
-            <a:r>
-              <a:rPr/>
-              <a:t>to Technology</a:t>
-            </a:r>
-          </a:p>
-        </p:txBody>
-      </p:sp>
-      <p:sp>
-        <p:nvSpPr>
-          <p:cNvPr id="414" name="Rectangle 24"/>
-          <p:cNvSpPr/>
-          <p:nvPr/>
-        </p:nvSpPr>
-        <p:spPr>
-          <a:xfrm>
-            <a:off x="9784080" y="3017520"/>
-            <a:ext cx="2103121" cy="1828801"/>
-          </a:xfrm>
-          <a:prstGeom prst="rect">
-            <a:avLst/>
-          </a:prstGeom>
-          <a:solidFill>
-            <a:srgbClr val="F0F4F8"/>
-          </a:solidFill>
-          <a:ln w="12700">
-            <a:miter lim="400000"/>
-          </a:ln>
-          <a:effectLst>
-            <a:outerShdw sx="100000" sy="100000" kx="0" ky="0" algn="b" rotWithShape="0" blurRad="38100" dist="23000" dir="5400000">
-              <a:srgbClr val="000000">
-                <a:alpha val="35000"/>
-              </a:srgbClr>
-            </a:outerShdw>
-          </a:effectLst>
-        </p:spPr>
-        <p:txBody>
-          <a:bodyPr lIns="45719" rIns="45719" anchor="ctr"/>
-          <a:lstStyle/>
-          <a:p>
-            <a:pPr algn="ctr">
-              <a:defRPr>
-                <a:solidFill>
-                  <a:srgbClr val="FFFFFF"/>
-                </a:solidFill>
-              </a:defRPr>
-            </a:pPr>
-          </a:p>
-        </p:txBody>
-      </p:sp>
-      <p:sp>
-        <p:nvSpPr>
-          <p:cNvPr id="415" name="Rectangle 25"/>
-          <p:cNvSpPr/>
-          <p:nvPr/>
-        </p:nvSpPr>
-        <p:spPr>
-          <a:xfrm>
-            <a:off x="9784080" y="3017520"/>
-            <a:ext cx="2103121" cy="50801"/>
-          </a:xfrm>
-          <a:prstGeom prst="rect">
-            <a:avLst/>
-          </a:prstGeom>
-          <a:solidFill>
-            <a:srgbClr val="E8833A"/>
-          </a:solidFill>
-          <a:ln w="12700">
-            <a:miter lim="400000"/>
-          </a:ln>
-          <a:effectLst>
-            <a:outerShdw sx="100000" sy="100000" kx="0" ky="0" algn="b" rotWithShape="0" blurRad="38100" dist="23000" dir="5400000">
-              <a:srgbClr val="000000">
-                <a:alpha val="35000"/>
-              </a:srgbClr>
-            </a:outerShdw>
-          </a:effectLst>
-        </p:spPr>
-        <p:txBody>
-          <a:bodyPr lIns="45719" rIns="45719" anchor="ctr"/>
-          <a:lstStyle/>
-          <a:p>
-            <a:pPr algn="ctr">
-              <a:defRPr>
-                <a:solidFill>
-                  <a:srgbClr val="FFFFFF"/>
-                </a:solidFill>
-              </a:defRPr>
-            </a:pPr>
-          </a:p>
-        </p:txBody>
-      </p:sp>
-      <p:grpSp>
-        <p:nvGrpSpPr>
-          <p:cNvPr id="418" name="Oval 26"/>
-          <p:cNvGrpSpPr/>
-          <p:nvPr/>
-        </p:nvGrpSpPr>
-        <p:grpSpPr>
-          <a:xfrm>
-            <a:off x="10469880" y="3200399"/>
-            <a:ext cx="640081" cy="640082"/>
-            <a:chOff x="0" y="0"/>
-            <a:chExt cx="640080" cy="640080"/>
-          </a:xfrm>
-        </p:grpSpPr>
-        <p:sp>
-          <p:nvSpPr>
-            <p:cNvPr id="416" name="Circle"/>
-            <p:cNvSpPr/>
-            <p:nvPr/>
-          </p:nvSpPr>
-          <p:spPr>
-            <a:xfrm>
-              <a:off x="-1" y="-1"/>
-              <a:ext cx="640082" cy="640082"/>
-            </a:xfrm>
-            <a:prstGeom prst="ellipse">
-              <a:avLst/>
-            </a:prstGeom>
-            <a:solidFill>
-              <a:srgbClr val="E8833A"/>
-            </a:solidFill>
-            <a:ln w="12700" cap="flat">
-              <a:noFill/>
-              <a:miter lim="400000"/>
-            </a:ln>
-            <a:effectLst>
-              <a:outerShdw sx="100000" sy="100000" kx="0" ky="0" algn="b" rotWithShape="0" blurRad="38100" dist="23000" dir="5400000">
-                <a:srgbClr val="000000">
-                  <a:alpha val="35000"/>
-                </a:srgbClr>
-              </a:outerShdw>
-            </a:effectLst>
-          </p:spPr>
-          <p:txBody>
-            <a:bodyPr wrap="square" lIns="45719" tIns="45719" rIns="45719" bIns="45719" numCol="1" anchor="ctr">
-              <a:noAutofit/>
-            </a:bodyPr>
-            <a:lstStyle/>
-            <a:p>
-              <a:pPr algn="ctr">
-                <a:defRPr b="1">
-                  <a:solidFill>
-                    <a:srgbClr val="FFFFFF"/>
-                  </a:solidFill>
-                </a:defRPr>
-              </a:pPr>
-            </a:p>
-          </p:txBody>
-        </p:sp>
-        <p:sp>
-          <p:nvSpPr>
-            <p:cNvPr id="417" name="5"/>
-            <p:cNvSpPr txBox="1"/>
-            <p:nvPr/>
-          </p:nvSpPr>
-          <p:spPr>
-            <a:xfrm>
-              <a:off x="139457" y="153496"/>
-              <a:ext cx="361166" cy="333088"/>
-            </a:xfrm>
-            <a:prstGeom prst="rect">
-              <a:avLst/>
-            </a:prstGeom>
-            <a:noFill/>
-            <a:ln w="12700" cap="flat">
-              <a:noFill/>
-              <a:miter lim="400000"/>
-            </a:ln>
-            <a:effectLst/>
-            <a:extLst>
-              <a:ext uri="{C572A759-6A51-4108-AA02-DFA0A04FC94B}">
-                <ma14:wrappingTextBoxFlag xmlns:ma14="http://schemas.microsoft.com/office/mac/drawingml/2011/main" val="1"/>
-              </a:ext>
-            </a:extLst>
-          </p:spPr>
-          <p:txBody>
-            <a:bodyPr wrap="square" lIns="45719" tIns="45719" rIns="45719" bIns="45719" numCol="1" anchor="ctr">
-              <a:spAutoFit/>
-            </a:bodyPr>
-            <a:lstStyle>
-              <a:lvl1pPr algn="ctr">
-                <a:defRPr b="1">
-                  <a:solidFill>
-                    <a:srgbClr val="FFFFFF"/>
-                  </a:solidFill>
-                </a:defRPr>
-              </a:lvl1pPr>
-            </a:lstStyle>
-            <a:p>
-              <a:pPr/>
-              <a:r>
-                <a:t>5</a:t>
-              </a:r>
-            </a:p>
-          </p:txBody>
-        </p:sp>
-      </p:grpSp>
-      <p:sp>
-        <p:nvSpPr>
-          <p:cNvPr id="419" name="TextBox 27"/>
-          <p:cNvSpPr txBox="1"/>
-          <p:nvPr/>
-        </p:nvSpPr>
-        <p:spPr>
-          <a:xfrm>
-            <a:off x="9921239" y="4023359"/>
-            <a:ext cx="1828801" cy="509400"/>
-          </a:xfrm>
-          <a:prstGeom prst="rect">
-            <a:avLst/>
-          </a:prstGeom>
-          <a:ln w="12700">
-            <a:miter lim="400000"/>
-          </a:ln>
-          <a:extLst>
-            <a:ext uri="{C572A759-6A51-4108-AA02-DFA0A04FC94B}">
-              <ma14:wrappingTextBoxFlag xmlns:ma14="http://schemas.microsoft.com/office/mac/drawingml/2011/main" val="1"/>
-            </a:ext>
-          </a:extLst>
-        </p:spPr>
-        <p:txBody>
-          <a:bodyPr lIns="45719" rIns="45719">
-            <a:spAutoFit/>
-          </a:bodyPr>
-          <a:lstStyle/>
-          <a:p>
-            <a:pPr algn="ctr">
-              <a:defRPr sz="1400">
-                <a:solidFill>
-                  <a:srgbClr val="1E4258"/>
-                </a:solidFill>
-              </a:defRPr>
-            </a:pPr>
-            <a:r>
-              <a:rPr/>
-              <a:t>Sketch</a:t>
-            </a:r>
-            <a:br/>
-            <a:r>
-              <a:rPr/>
-              <a:t>Implementation</a:t>
-            </a:r>
-          </a:p>
-        </p:txBody>
-      </p:sp>
-      <p:sp>
-        <p:nvSpPr>
-          <p:cNvPr id="420" name="TextBox 28"/>
-          <p:cNvSpPr txBox="1"/>
-          <p:nvPr/>
-        </p:nvSpPr>
-        <p:spPr>
-          <a:xfrm>
-            <a:off x="685800" y="5303520"/>
-            <a:ext cx="10881361" cy="300594"/>
-          </a:xfrm>
-          <a:prstGeom prst="rect">
-            <a:avLst/>
-          </a:prstGeom>
-          <a:ln w="12700">
-            <a:miter lim="400000"/>
-          </a:ln>
-          <a:extLst>
-            <a:ext uri="{C572A759-6A51-4108-AA02-DFA0A04FC94B}">
-              <ma14:wrappingTextBoxFlag xmlns:ma14="http://schemas.microsoft.com/office/mac/drawingml/2011/main" val="1"/>
-            </a:ext>
-          </a:extLst>
-        </p:spPr>
-        <p:txBody>
-          <a:bodyPr lIns="45719" rIns="45719">
-            <a:spAutoFit/>
-          </a:bodyPr>
-          <a:lstStyle>
-            <a:lvl1pPr>
-              <a:defRPr sz="1600" u="sng">
+            <a:r>
+              <a:rPr sz="1600" b="0">
                 <a:solidFill>
                   <a:srgbClr val="0000FF"/>
                 </a:solidFill>
-                <a:uFill>
-                  <a:solidFill>
-                    <a:srgbClr val="0000FF"/>
-                  </a:solidFill>
-                </a:uFill>
-                <a:hlinkClick r:id="rId2" invalidUrl="" action="" tgtFrame="" tooltip="" history="1" highlightClick="0" endSnd="0"/>
-              </a:defRPr>
-            </a:lvl1pPr>
-          </a:lstStyle>
-          <a:p>
-            <a:pPr>
-              <a:defRPr u="none">
-                <a:solidFill>
-                  <a:srgbClr val="2D5F7C"/>
-                </a:solidFill>
-                <a:uFillTx/>
-              </a:defRPr>
-            </a:pPr>
-            <a:r>
-              <a:rPr u="sng">
-                <a:solidFill>
-                  <a:srgbClr val="0000FF"/>
-                </a:solidFill>
-                <a:uFill>
-                  <a:solidFill>
-                    <a:srgbClr val="0000FF"/>
-                  </a:solidFill>
-                </a:uFill>
-                <a:hlinkClick r:id="rId2" invalidUrl="" action="" tgtFrame="" tooltip="" history="1" highlightClick="0" endSnd="0"/>
               </a:rPr>
-              <a:t>Workshop Guide → Section 7 (Worksheet)</a:t>
+              <a:t>Workshop Guide → Section 7</a:t>
             </a:r>
           </a:p>
         </p:txBody>
@@ -5545,7 +4196,7 @@
                   <a:srgbClr val="FFFFFF"/>
                 </a:solidFill>
               </a:rPr>
-              <a:t>Share-Out (4 min)</a:t>
+              <a:t>Wrap-Up</a:t>
             </a:r>
           </a:p>
         </p:txBody>
@@ -5578,7 +4229,7 @@
                   <a:srgbClr val="1E4258"/>
                 </a:solidFill>
               </a:rPr>
-              <a:t>Two or three groups share their plan, 60 seconds each.</a:t>
+              <a:t>Start with one tool, one need, one small experiment.</a:t>
             </a:r>
           </a:p>
           <a:p>
@@ -5593,7 +4244,22 @@
                   <a:srgbClr val="1E4258"/>
                 </a:solidFill>
               </a:rPr>
-              <a:t>What is your educational need? Your tool? Your first step?</a:t>
+              <a:t>Everything from today is in the Workshop Guide: bookmark it now.</a:t>
+            </a:r>
+          </a:p>
+          <a:p>
+            <a:pPr>
+              <a:spcBef>
+                <a:spcPts val="1600"/>
+              </a:spcBef>
+            </a:pPr>
+            <a:r>
+              <a:rPr sz="2200" b="0">
+                <a:solidFill>
+                  <a:srgbClr val="1E4258"/>
+                </a:solidFill>
+              </a:rPr>
+              <a:t>The Zero Dollar starter kit is in Section 8.</a:t>
             </a:r>
           </a:p>
         </p:txBody>
@@ -5626,7 +4292,7 @@
                   <a:srgbClr val="0000FF"/>
                 </a:solidFill>
               </a:rPr>
-              <a:t>Workshop Guide → Section 7 (the worksheet)</a:t>
+              <a:t>Workshop Guide → Section 8 (all resources)</a:t>
             </a:r>
           </a:p>
         </p:txBody>
@@ -5641,293 +4307,6 @@
 </file>
 
 <file path=ppt/slides/slide14.xml><?xml version="1.0" encoding="utf-8"?>
-<p:sld xmlns:a="http://schemas.openxmlformats.org/drawingml/2006/main" xmlns:r="http://schemas.openxmlformats.org/officeDocument/2006/relationships" xmlns:p="http://schemas.openxmlformats.org/presentationml/2006/main" xmlns:m="http://schemas.openxmlformats.org/officeDocument/2006/math" xmlns:a14="http://schemas.microsoft.com/office/drawing/2010/main" showMasterSp="1" showMasterPhAnim="1">
-  <p:cSld>
-    <p:spTree>
-      <p:nvGrpSpPr>
-        <p:cNvPr id="1" name=""/>
-        <p:cNvGrpSpPr/>
-        <p:nvPr/>
-      </p:nvGrpSpPr>
-      <p:grpSpPr>
-        <a:xfrm>
-          <a:off x="0" y="0"/>
-          <a:ext cx="0" cy="0"/>
-          <a:chOff x="0" y="0"/>
-          <a:chExt cx="0" cy="0"/>
-        </a:xfrm>
-      </p:grpSpPr>
-      <p:sp>
-        <p:nvSpPr>
-          <p:cNvPr id="2" name="Rectangle 1"/>
-          <p:cNvSpPr/>
-          <p:nvPr/>
-        </p:nvSpPr>
-        <p:spPr>
-          <a:xfrm>
-            <a:off x="-1" y="0"/>
-            <a:ext cx="12191697" cy="1005839"/>
-          </a:xfrm>
-          <a:prstGeom prst="rect">
-            <a:avLst/>
-          </a:prstGeom>
-          <a:solidFill>
-            <a:srgbClr val="2D5F7C"/>
-          </a:solidFill>
-          <a:ln>
-            <a:noFill/>
-          </a:ln>
-          <a:effectLst/>
-        </p:spPr>
-        <p:style>
-          <a:lnRef idx="1">
-            <a:schemeClr val="accent1"/>
-          </a:lnRef>
-          <a:fillRef idx="3">
-            <a:schemeClr val="accent1"/>
-          </a:fillRef>
-          <a:effectRef idx="2">
-            <a:schemeClr val="accent1"/>
-          </a:effectRef>
-          <a:fontRef idx="minor">
-            <a:schemeClr val="lt1"/>
-          </a:fontRef>
-        </p:style>
-        <p:txBody>
-          <a:bodyPr rtlCol="0" anchor="ctr"/>
-          <a:lstStyle/>
-          <a:p>
-            <a:pPr algn="ctr"/>
-          </a:p>
-        </p:txBody>
-      </p:sp>
-      <p:sp>
-        <p:nvSpPr>
-          <p:cNvPr id="3" name="Rectangle 2"/>
-          <p:cNvSpPr/>
-          <p:nvPr/>
-        </p:nvSpPr>
-        <p:spPr>
-          <a:xfrm>
-            <a:off x="640080" y="1371600"/>
-            <a:ext cx="10972801" cy="3657600"/>
-          </a:xfrm>
-          <a:prstGeom prst="rect">
-            <a:avLst/>
-          </a:prstGeom>
-          <a:solidFill>
-            <a:srgbClr val="F0F4F8"/>
-          </a:solidFill>
-          <a:ln>
-            <a:noFill/>
-          </a:ln>
-          <a:effectLst/>
-        </p:spPr>
-        <p:style>
-          <a:lnRef idx="1">
-            <a:schemeClr val="accent1"/>
-          </a:lnRef>
-          <a:fillRef idx="3">
-            <a:schemeClr val="accent1"/>
-          </a:fillRef>
-          <a:effectRef idx="2">
-            <a:schemeClr val="accent1"/>
-          </a:effectRef>
-          <a:fontRef idx="minor">
-            <a:schemeClr val="lt1"/>
-          </a:fontRef>
-        </p:style>
-        <p:txBody>
-          <a:bodyPr rtlCol="0" anchor="ctr"/>
-          <a:lstStyle/>
-          <a:p>
-            <a:pPr algn="ctr"/>
-          </a:p>
-        </p:txBody>
-      </p:sp>
-      <p:sp>
-        <p:nvSpPr>
-          <p:cNvPr id="4" name="Rectangle 3"/>
-          <p:cNvSpPr/>
-          <p:nvPr/>
-        </p:nvSpPr>
-        <p:spPr>
-          <a:xfrm>
-            <a:off x="640080" y="1371600"/>
-            <a:ext cx="50801" cy="3657600"/>
-          </a:xfrm>
-          <a:prstGeom prst="rect">
-            <a:avLst/>
-          </a:prstGeom>
-          <a:solidFill>
-            <a:srgbClr val="2D5F7C"/>
-          </a:solidFill>
-          <a:ln>
-            <a:noFill/>
-          </a:ln>
-          <a:effectLst/>
-        </p:spPr>
-        <p:style>
-          <a:lnRef idx="1">
-            <a:schemeClr val="accent1"/>
-          </a:lnRef>
-          <a:fillRef idx="3">
-            <a:schemeClr val="accent1"/>
-          </a:fillRef>
-          <a:effectRef idx="2">
-            <a:schemeClr val="accent1"/>
-          </a:effectRef>
-          <a:fontRef idx="minor">
-            <a:schemeClr val="lt1"/>
-          </a:fontRef>
-        </p:style>
-        <p:txBody>
-          <a:bodyPr rtlCol="0" anchor="ctr"/>
-          <a:lstStyle/>
-          <a:p>
-            <a:pPr algn="ctr"/>
-          </a:p>
-        </p:txBody>
-      </p:sp>
-      <p:sp>
-        <p:nvSpPr>
-          <p:cNvPr id="5" name="TextBox 4"/>
-          <p:cNvSpPr txBox="1"/>
-          <p:nvPr/>
-        </p:nvSpPr>
-        <p:spPr>
-          <a:xfrm>
-            <a:off x="502919" y="182879"/>
-            <a:ext cx="11155682" cy="444759"/>
-          </a:xfrm>
-          <a:prstGeom prst="rect">
-            <a:avLst/>
-          </a:prstGeom>
-          <a:noFill/>
-        </p:spPr>
-        <p:txBody>
-          <a:bodyPr wrap="square">
-            <a:spAutoFit/>
-          </a:bodyPr>
-          <a:lstStyle/>
-          <a:p>
-            <a:r>
-              <a:rPr sz="2800" b="1">
-                <a:solidFill>
-                  <a:srgbClr val="FFFFFF"/>
-                </a:solidFill>
-              </a:rPr>
-              <a:t>Wrap-Up</a:t>
-            </a:r>
-          </a:p>
-        </p:txBody>
-      </p:sp>
-      <p:sp>
-        <p:nvSpPr>
-          <p:cNvPr id="6" name="TextBox 5"/>
-          <p:cNvSpPr txBox="1"/>
-          <p:nvPr/>
-        </p:nvSpPr>
-        <p:spPr>
-          <a:xfrm>
-            <a:off x="1143000" y="1828800"/>
-            <a:ext cx="9966961" cy="1985576"/>
-          </a:xfrm>
-          <a:prstGeom prst="rect">
-            <a:avLst/>
-          </a:prstGeom>
-          <a:noFill/>
-        </p:spPr>
-        <p:txBody>
-          <a:bodyPr wrap="square">
-            <a:spAutoFit/>
-          </a:bodyPr>
-          <a:lstStyle/>
-          <a:p>
-            <a:r>
-              <a:rPr sz="2200" b="0">
-                <a:solidFill>
-                  <a:srgbClr val="1E4258"/>
-                </a:solidFill>
-              </a:rPr>
-              <a:t>Start with one tool, one need, one small experiment.</a:t>
-            </a:r>
-          </a:p>
-          <a:p>
-            <a:pPr>
-              <a:spcBef>
-                <a:spcPts val="1600"/>
-              </a:spcBef>
-            </a:pPr>
-            <a:r>
-              <a:rPr sz="2200" b="0">
-                <a:solidFill>
-                  <a:srgbClr val="1E4258"/>
-                </a:solidFill>
-              </a:rPr>
-              <a:t>Everything from today is in the Workshop Guide: bookmark it now.</a:t>
-            </a:r>
-          </a:p>
-          <a:p>
-            <a:pPr>
-              <a:spcBef>
-                <a:spcPts val="1600"/>
-              </a:spcBef>
-            </a:pPr>
-            <a:r>
-              <a:rPr sz="2200" b="0">
-                <a:solidFill>
-                  <a:srgbClr val="1E4258"/>
-                </a:solidFill>
-              </a:rPr>
-              <a:t>The Zero Dollar starter kit is in Section 8.</a:t>
-            </a:r>
-          </a:p>
-        </p:txBody>
-      </p:sp>
-      <p:sp>
-        <p:nvSpPr>
-          <p:cNvPr id="7" name="TextBox 6"/>
-          <p:cNvSpPr txBox="1"/>
-          <p:nvPr/>
-        </p:nvSpPr>
-        <p:spPr>
-          <a:xfrm>
-            <a:off x="1143000" y="5303520"/>
-            <a:ext cx="9966961" cy="300594"/>
-          </a:xfrm>
-          <a:prstGeom prst="rect">
-            <a:avLst/>
-          </a:prstGeom>
-          <a:noFill/>
-        </p:spPr>
-        <p:txBody>
-          <a:bodyPr wrap="square">
-            <a:spAutoFit/>
-          </a:bodyPr>
-          <a:lstStyle/>
-          <a:p>
-            <a:r>
-              <a:rPr sz="1600" b="0">
-                <a:solidFill>
-                  <a:srgbClr val="0000FF"/>
-                </a:solidFill>
-              </a:rPr>
-              <a:t>Workshop Guide → Section 8 (all resources)</a:t>
-            </a:r>
-          </a:p>
-        </p:txBody>
-      </p:sp>
-    </p:spTree>
-  </p:cSld>
-  <p:clrMapOvr>
-    <a:masterClrMapping/>
-  </p:clrMapOvr>
-  <p:transition xmlns:p14="http://schemas.microsoft.com/office/powerpoint/2010/main" spd="med" advClick="1"/>
-</p:sld>
-</file>
-
-<file path=ppt/slides/slide15.xml><?xml version="1.0" encoding="utf-8"?>
 <p:sld xmlns:a="http://schemas.openxmlformats.org/drawingml/2006/main" xmlns:r="http://schemas.openxmlformats.org/officeDocument/2006/relationships" xmlns:p="http://schemas.openxmlformats.org/presentationml/2006/main" xmlns:m="http://schemas.openxmlformats.org/officeDocument/2006/math" xmlns:a14="http://schemas.microsoft.com/office/drawing/2010/main" showMasterSp="1" showMasterPhAnim="1">
   <p:cSld>
     <p:bg>
@@ -6473,8 +4852,12 @@
           <a:p>
             <a:pPr/>
             <a:r>
-              <a:rPr/>
-              <a:t>You don't need to be a technology expert. You need to be a clinician who knows what your learners need.</a:t>
+              <a:t>You don't need to be a technology expert, just a clinician who knows what your learners need.</a:t>
+            </a:r>
+          </a:p>
+          <a:p>
+            <a:r>
+              <a:t>Today we practice building small things, then spend real time building more things.</a:t>
             </a:r>
           </a:p>
         </p:txBody>
@@ -6657,7 +5040,7 @@
                   <a:srgbClr val="1A2332"/>
                 </a:solidFill>
               </a:rPr>
-              <a:t>• 60 min: ~30 min presentation + 20 min workshop + 5 min share &amp; wrap</a:t>
+              <a:t>• 60 min: three short demos you play along with, then a long build block</a:t>
             </a:r>
           </a:p>
           <a:p>
@@ -6677,17 +5060,7 @@
                   <a:srgbClr val="1A2332"/>
                 </a:solidFill>
               </a:rPr>
-              <a:t>• Think · Pair · Share after each section</a:t>
-            </a:r>
-          </a:p>
-          <a:p>
-            <a:r>
-              <a:rPr sz="1600">
-                <a:solidFill>
-                  <a:srgbClr val="1A2332"/>
-                </a:solidFill>
-              </a:rPr>
-              <a:t>• Everything stays available after the conference</a:t>
+              <a:t>• Everything stays available after the conference, including every prompt</a:t>
             </a:r>
           </a:p>
         </p:txBody>
@@ -6833,259 +5206,25 @@
       </p:sp>
       <p:sp>
         <p:nvSpPr>
-          <p:cNvPr id="7" name="TextBox 6"/>
-          <p:cNvSpPr txBox="1"/>
-          <p:nvPr/>
-        </p:nvSpPr>
-        <p:spPr>
-          <a:xfrm>
-            <a:off x="502919" y="182879"/>
-            <a:ext cx="11155682" cy="444759"/>
-          </a:xfrm>
-          <a:prstGeom prst="rect">
-            <a:avLst/>
-          </a:prstGeom>
-          <a:noFill/>
-        </p:spPr>
-        <p:txBody>
-          <a:bodyPr wrap="square">
-            <a:spAutoFit/>
-          </a:bodyPr>
-          <a:lstStyle/>
-          <a:p>
-            <a:r>
-              <a:rPr sz="2800" b="1">
-                <a:solidFill>
-                  <a:srgbClr val="FFFFFF"/>
-                </a:solidFill>
-              </a:rPr>
-              <a:t>Every AI Teaching Tool Sits on This Map</a:t>
-            </a:r>
-          </a:p>
-        </p:txBody>
-      </p:sp>
-      <p:sp>
-        <p:nvSpPr>
-          <p:cNvPr id="8" name="TextBox 7"/>
-          <p:cNvSpPr txBox="1"/>
-          <p:nvPr/>
-        </p:nvSpPr>
-        <p:spPr>
-          <a:xfrm>
-            <a:off x="502919" y="1097280"/>
-            <a:ext cx="11155682" cy="300594"/>
-          </a:xfrm>
-          <a:prstGeom prst="rect">
-            <a:avLst/>
-          </a:prstGeom>
-          <a:noFill/>
-        </p:spPr>
-        <p:txBody>
-          <a:bodyPr wrap="square">
-            <a:spAutoFit/>
-          </a:bodyPr>
-          <a:lstStyle/>
-          <a:p>
-            <a:r>
-              <a:rPr sz="1600" b="0">
-                <a:solidFill>
-                  <a:srgbClr val="5B6B7C"/>
-                </a:solidFill>
-              </a:rPr>
-              <a:t>Static or dynamic, grounded or ungrounded: today we visit three quadrants together</a:t>
-            </a:r>
-          </a:p>
-        </p:txBody>
-      </p:sp>
-      <p:sp>
-        <p:nvSpPr>
-          <p:cNvPr id="13" name="TextBox 12"/>
-          <p:cNvSpPr txBox="1"/>
-          <p:nvPr/>
-        </p:nvSpPr>
-        <p:spPr>
-          <a:xfrm>
-            <a:off x="502919" y="5715000"/>
-            <a:ext cx="11155682" cy="300594"/>
-          </a:xfrm>
-          <a:prstGeom prst="rect">
-            <a:avLst/>
-          </a:prstGeom>
-          <a:noFill/>
-        </p:spPr>
-        <p:txBody>
-          <a:bodyPr wrap="square">
-            <a:spAutoFit/>
-          </a:bodyPr>
-          <a:lstStyle/>
-          <a:p>
-            <a:r>
-              <a:rPr sz="1600" b="0">
-                <a:solidFill>
-                  <a:srgbClr val="0000FF"/>
-                </a:solidFill>
-              </a:rPr>
-              <a:t>The map lives in your guide, Section 1, with links to all three demos</a:t>
-            </a:r>
-          </a:p>
-        </p:txBody>
-      </p:sp>
-      <p:sp>
-        <p:nvSpPr>
-          <p:cNvPr id="14" name="TextBox 13"/>
-          <p:cNvSpPr txBox="1"/>
-          <p:nvPr/>
-        </p:nvSpPr>
-        <p:spPr>
-          <a:xfrm>
-            <a:off x="1417320" y="1444752"/>
-            <a:ext cx="4892040" cy="274320"/>
-          </a:xfrm>
-          <a:prstGeom prst="rect">
-            <a:avLst/>
-          </a:prstGeom>
-          <a:noFill/>
-        </p:spPr>
-        <p:txBody>
-          <a:bodyPr wrap="square">
-            <a:spAutoFit/>
-          </a:bodyPr>
-          <a:lstStyle/>
-          <a:p>
-            <a:r>
-              <a:rPr sz="1200" b="1">
-                <a:solidFill>
-                  <a:srgbClr val="5A6B7E"/>
-                </a:solidFill>
-              </a:rPr>
-              <a:t>STATIC (built once, fixed)</a:t>
-            </a:r>
-          </a:p>
-        </p:txBody>
-      </p:sp>
-      <p:sp>
-        <p:nvSpPr>
-          <p:cNvPr id="15" name="TextBox 14"/>
-          <p:cNvSpPr txBox="1"/>
-          <p:nvPr/>
-        </p:nvSpPr>
-        <p:spPr>
-          <a:xfrm>
-            <a:off x="6629400" y="1444752"/>
-            <a:ext cx="4892040" cy="274320"/>
-          </a:xfrm>
-          <a:prstGeom prst="rect">
-            <a:avLst/>
-          </a:prstGeom>
-          <a:noFill/>
-        </p:spPr>
-        <p:txBody>
-          <a:bodyPr wrap="square">
-            <a:spAutoFit/>
-          </a:bodyPr>
-          <a:lstStyle/>
-          <a:p>
-            <a:r>
-              <a:rPr sz="1200" b="1">
-                <a:solidFill>
-                  <a:srgbClr val="5A6B7E"/>
-                </a:solidFill>
-              </a:rPr>
-              <a:t>DYNAMIC (regenerated each time)</a:t>
-            </a:r>
-          </a:p>
-        </p:txBody>
-      </p:sp>
-      <p:sp>
-        <p:nvSpPr>
-          <p:cNvPr id="16" name="TextBox 15"/>
-          <p:cNvSpPr txBox="1"/>
-          <p:nvPr/>
-        </p:nvSpPr>
-        <p:spPr>
-          <a:xfrm>
-            <a:off x="274320" y="2560320"/>
-            <a:ext cx="1051560" cy="274320"/>
-          </a:xfrm>
-          <a:prstGeom prst="rect">
-            <a:avLst/>
-          </a:prstGeom>
-          <a:noFill/>
-        </p:spPr>
-        <p:txBody>
-          <a:bodyPr wrap="square">
-            <a:spAutoFit/>
-          </a:bodyPr>
-          <a:lstStyle/>
-          <a:p>
-            <a:pPr algn="ctr"/>
-            <a:r>
-              <a:rPr sz="1200" b="1">
-                <a:solidFill>
-                  <a:srgbClr val="5A6B7E"/>
-                </a:solidFill>
-              </a:rPr>
-              <a:t>UNGROUNDED</a:t>
-            </a:r>
-          </a:p>
-        </p:txBody>
-      </p:sp>
-      <p:sp>
-        <p:nvSpPr>
-          <p:cNvPr id="17" name="TextBox 16"/>
-          <p:cNvSpPr txBox="1"/>
-          <p:nvPr/>
-        </p:nvSpPr>
-        <p:spPr>
-          <a:xfrm>
-            <a:off x="274320" y="4526280"/>
-            <a:ext cx="1051560" cy="274320"/>
-          </a:xfrm>
-          <a:prstGeom prst="rect">
-            <a:avLst/>
-          </a:prstGeom>
-          <a:noFill/>
-        </p:spPr>
-        <p:txBody>
-          <a:bodyPr wrap="square">
-            <a:spAutoFit/>
-          </a:bodyPr>
-          <a:lstStyle/>
-          <a:p>
-            <a:pPr algn="ctr"/>
-            <a:r>
-              <a:rPr sz="1200" b="1">
-                <a:solidFill>
-                  <a:srgbClr val="5A6B7E"/>
-                </a:solidFill>
-              </a:rPr>
-              <a:t>GROUNDED</a:t>
-            </a:r>
-          </a:p>
-        </p:txBody>
-      </p:sp>
-      <p:sp>
-        <p:nvSpPr>
-          <p:cNvPr id="18" name="Rounded Rectangle 17"/>
+          <p:cNvPr id="3" name="Rectangle 2"/>
           <p:cNvSpPr/>
           <p:nvPr/>
         </p:nvSpPr>
         <p:spPr>
           <a:xfrm>
-            <a:off x="1417320" y="1755648"/>
-            <a:ext cx="4892040" cy="1828800"/>
-          </a:xfrm>
-          <a:prstGeom prst="roundRect">
+            <a:off x="640080" y="1371600"/>
+            <a:ext cx="5486401" cy="4114800"/>
+          </a:xfrm>
+          <a:prstGeom prst="rect">
             <a:avLst/>
           </a:prstGeom>
           <a:solidFill>
             <a:srgbClr val="F0F4F8"/>
           </a:solidFill>
-          <a:ln w="15875">
-            <a:solidFill>
-              <a:srgbClr val="D5DDE5"/>
-            </a:solidFill>
+          <a:ln>
+            <a:noFill/>
           </a:ln>
+          <a:effectLst/>
         </p:spPr>
         <p:style>
           <a:lnRef idx="1">
@@ -7102,58 +5241,34 @@
           </a:fontRef>
         </p:style>
         <p:txBody>
-          <a:bodyPr rtlCol="0" anchor="ctr" wrap="square" lIns="164592" rIns="164592" tIns="128016"/>
+          <a:bodyPr rtlCol="0" anchor="ctr"/>
           <a:lstStyle/>
           <a:p>
             <a:pPr algn="ctr"/>
-            <a:r>
-              <a:rPr sz="1400" b="1">
-                <a:solidFill>
-                  <a:srgbClr val="5A6B7E"/>
-                </a:solidFill>
-              </a:rPr>
-              <a:t>STATIC + UNGROUNDED</a:t>
-            </a:r>
-          </a:p>
-          <a:p>
-            <a:pPr>
-              <a:spcBef>
-                <a:spcPts val="600"/>
-              </a:spcBef>
-            </a:pPr>
-            <a:r>
-              <a:rPr sz="1150" b="0">
-                <a:solidFill>
-                  <a:srgbClr val="1A2332"/>
-                </a:solidFill>
-              </a:rPr>
-              <a:t>A made-up case, frozen. Not today’s focus.</a:t>
-            </a:r>
-          </a:p>
-        </p:txBody>
-      </p:sp>
-      <p:sp>
-        <p:nvSpPr>
-          <p:cNvPr id="19" name="Rounded Rectangle 18"/>
+          </a:p>
+        </p:txBody>
+      </p:sp>
+      <p:sp>
+        <p:nvSpPr>
+          <p:cNvPr id="4" name="Rectangle 3"/>
           <p:cNvSpPr/>
           <p:nvPr/>
         </p:nvSpPr>
         <p:spPr>
           <a:xfrm>
-            <a:off x="6629400" y="1755648"/>
-            <a:ext cx="4892040" cy="1828800"/>
-          </a:xfrm>
-          <a:prstGeom prst="roundRect">
+            <a:off x="640080" y="1371600"/>
+            <a:ext cx="50801" cy="4114800"/>
+          </a:xfrm>
+          <a:prstGeom prst="rect">
             <a:avLst/>
           </a:prstGeom>
           <a:solidFill>
-            <a:srgbClr val="FDF6F0"/>
+            <a:srgbClr val="2D5F7C"/>
           </a:solidFill>
-          <a:ln w="15875">
-            <a:solidFill>
-              <a:srgbClr val="E8833A"/>
-            </a:solidFill>
+          <a:ln>
+            <a:noFill/>
           </a:ln>
+          <a:effectLst/>
         </p:spPr>
         <p:style>
           <a:lnRef idx="1">
@@ -7170,58 +5285,34 @@
           </a:fontRef>
         </p:style>
         <p:txBody>
-          <a:bodyPr rtlCol="0" anchor="ctr" wrap="square" lIns="164592" rIns="164592" tIns="128016"/>
+          <a:bodyPr rtlCol="0" anchor="ctr"/>
           <a:lstStyle/>
           <a:p>
             <a:pPr algn="ctr"/>
-            <a:r>
-              <a:rPr sz="1400" b="1">
-                <a:solidFill>
-                  <a:srgbClr val="C66A28"/>
-                </a:solidFill>
-              </a:rPr>
-              <a:t>DYNAMIC + UNGROUNDED</a:t>
-            </a:r>
-          </a:p>
-          <a:p>
-            <a:pPr>
-              <a:spcBef>
-                <a:spcPts val="600"/>
-              </a:spcBef>
-            </a:pPr>
-            <a:r>
-              <a:rPr sz="1150" b="0">
-                <a:solidFill>
-                  <a:srgbClr val="1A2332"/>
-                </a:solidFill>
-              </a:rPr>
-              <a:t>Demo 2 · the chatbot case. Fresh numbers every run; nobody wrote it.</a:t>
-            </a:r>
-          </a:p>
-        </p:txBody>
-      </p:sp>
-      <p:sp>
-        <p:nvSpPr>
-          <p:cNvPr id="20" name="Rounded Rectangle 19"/>
+          </a:p>
+        </p:txBody>
+      </p:sp>
+      <p:sp>
+        <p:nvSpPr>
+          <p:cNvPr id="5" name="Rectangle 4"/>
           <p:cNvSpPr/>
           <p:nvPr/>
         </p:nvSpPr>
         <p:spPr>
           <a:xfrm>
-            <a:off x="1417320" y="3730752"/>
-            <a:ext cx="4892040" cy="1828800"/>
-          </a:xfrm>
-          <a:prstGeom prst="roundRect">
+            <a:off x="6583680" y="1371600"/>
+            <a:ext cx="5029201" cy="4114800"/>
+          </a:xfrm>
+          <a:prstGeom prst="rect">
             <a:avLst/>
           </a:prstGeom>
           <a:solidFill>
-            <a:srgbClr val="F0F6FA"/>
+            <a:srgbClr val="FDF6F0"/>
           </a:solidFill>
-          <a:ln w="15875">
-            <a:solidFill>
-              <a:srgbClr val="2D5F7C"/>
-            </a:solidFill>
+          <a:ln>
+            <a:noFill/>
           </a:ln>
+          <a:effectLst/>
         </p:spPr>
         <p:style>
           <a:lnRef idx="1">
@@ -7238,58 +5329,34 @@
           </a:fontRef>
         </p:style>
         <p:txBody>
-          <a:bodyPr rtlCol="0" anchor="ctr" wrap="square" lIns="164592" rIns="164592" tIns="128016"/>
+          <a:bodyPr rtlCol="0" anchor="ctr"/>
           <a:lstStyle/>
           <a:p>
             <a:pPr algn="ctr"/>
-            <a:r>
-              <a:rPr sz="1400" b="1">
-                <a:solidFill>
-                  <a:srgbClr val="2D5F7C"/>
-                </a:solidFill>
-              </a:rPr>
-              <a:t>STATIC + GROUNDED</a:t>
-            </a:r>
-          </a:p>
-          <a:p>
-            <a:pPr>
-              <a:spcBef>
-                <a:spcPts val="600"/>
-              </a:spcBef>
-            </a:pPr>
-            <a:r>
-              <a:rPr sz="1150" b="0">
-                <a:solidFill>
-                  <a:srgbClr val="1A2332"/>
-                </a:solidFill>
-              </a:rPr>
-              <a:t>Demo 1 · the AI-built branching case, grounded in the published MedEdPORTAL case.</a:t>
-            </a:r>
-          </a:p>
-        </p:txBody>
-      </p:sp>
-      <p:sp>
-        <p:nvSpPr>
-          <p:cNvPr id="21" name="Rounded Rectangle 20"/>
+          </a:p>
+        </p:txBody>
+      </p:sp>
+      <p:sp>
+        <p:nvSpPr>
+          <p:cNvPr id="6" name="Rectangle 5"/>
           <p:cNvSpPr/>
           <p:nvPr/>
         </p:nvSpPr>
         <p:spPr>
           <a:xfrm>
-            <a:off x="6629400" y="3730752"/>
-            <a:ext cx="4892040" cy="1828800"/>
-          </a:xfrm>
-          <a:prstGeom prst="roundRect">
+            <a:off x="6583680" y="1371600"/>
+            <a:ext cx="50801" cy="4114800"/>
+          </a:xfrm>
+          <a:prstGeom prst="rect">
             <a:avLst/>
           </a:prstGeom>
           <a:solidFill>
-            <a:srgbClr val="F0F8F4"/>
+            <a:srgbClr val="E8833A"/>
           </a:solidFill>
-          <a:ln w="15875">
-            <a:solidFill>
-              <a:srgbClr val="2D8659"/>
-            </a:solidFill>
+          <a:ln>
+            <a:noFill/>
           </a:ln>
+          <a:effectLst/>
         </p:spPr>
         <p:style>
           <a:lnRef idx="1">
@@ -7306,32 +5373,290 @@
           </a:fontRef>
         </p:style>
         <p:txBody>
-          <a:bodyPr rtlCol="0" anchor="ctr" wrap="square" lIns="164592" rIns="164592" tIns="128016"/>
+          <a:bodyPr rtlCol="0" anchor="ctr"/>
           <a:lstStyle/>
           <a:p>
             <a:pPr algn="ctr"/>
-            <a:r>
-              <a:rPr sz="1400" b="1">
-                <a:solidFill>
-                  <a:srgbClr val="2D8659"/>
+          </a:p>
+        </p:txBody>
+      </p:sp>
+      <p:sp>
+        <p:nvSpPr>
+          <p:cNvPr id="7" name="TextBox 6"/>
+          <p:cNvSpPr txBox="1"/>
+          <p:nvPr/>
+        </p:nvSpPr>
+        <p:spPr>
+          <a:xfrm>
+            <a:off x="502919" y="182879"/>
+            <a:ext cx="11155682" cy="444759"/>
+          </a:xfrm>
+          <a:prstGeom prst="rect">
+            <a:avLst/>
+          </a:prstGeom>
+          <a:noFill/>
+        </p:spPr>
+        <p:txBody>
+          <a:bodyPr wrap="square">
+            <a:spAutoFit/>
+          </a:bodyPr>
+          <a:lstStyle/>
+          <a:p>
+            <a:r>
+              <a:rPr sz="2800" b="1">
+                <a:solidFill>
+                  <a:srgbClr val="FFFFFF"/>
                 </a:solidFill>
               </a:rPr>
-              <a:t>DYNAMIC + GROUNDED</a:t>
-            </a:r>
-          </a:p>
-          <a:p>
-            <a:pPr>
-              <a:spcBef>
-                <a:spcPts val="600"/>
-              </a:spcBef>
-            </a:pPr>
-            <a:r>
-              <a:rPr sz="1150" b="0">
+              <a:t>Great Cases Already Exist, Free</a:t>
+            </a:r>
+          </a:p>
+        </p:txBody>
+      </p:sp>
+      <p:sp>
+        <p:nvSpPr>
+          <p:cNvPr id="8" name="TextBox 7"/>
+          <p:cNvSpPr txBox="1"/>
+          <p:nvPr/>
+        </p:nvSpPr>
+        <p:spPr>
+          <a:xfrm>
+            <a:off x="502919" y="1097280"/>
+            <a:ext cx="11155682" cy="300594"/>
+          </a:xfrm>
+          <a:prstGeom prst="rect">
+            <a:avLst/>
+          </a:prstGeom>
+          <a:noFill/>
+        </p:spPr>
+        <p:txBody>
+          <a:bodyPr wrap="square">
+            <a:spAutoFit/>
+          </a:bodyPr>
+          <a:lstStyle/>
+          <a:p>
+            <a:r>
+              <a:rPr sz="1600" b="0">
+                <a:solidFill>
+                  <a:srgbClr val="5B6B7C"/>
+                </a:solidFill>
+              </a:rPr>
+              <a:t>Where the material for everything we build today comes from · Guide → Section 2</a:t>
+            </a:r>
+          </a:p>
+        </p:txBody>
+      </p:sp>
+      <p:sp>
+        <p:nvSpPr>
+          <p:cNvPr id="9" name="TextBox 8"/>
+          <p:cNvSpPr txBox="1"/>
+          <p:nvPr/>
+        </p:nvSpPr>
+        <p:spPr>
+          <a:xfrm>
+            <a:off x="960119" y="1554480"/>
+            <a:ext cx="4937762" cy="225708"/>
+          </a:xfrm>
+          <a:prstGeom prst="rect">
+            <a:avLst/>
+          </a:prstGeom>
+          <a:noFill/>
+        </p:spPr>
+        <p:txBody>
+          <a:bodyPr wrap="square">
+            <a:spAutoFit/>
+          </a:bodyPr>
+          <a:lstStyle/>
+          <a:p>
+            <a:r>
+              <a:rPr sz="1100" b="1">
+                <a:solidFill>
+                  <a:srgbClr val="2D5F7C"/>
+                </a:solidFill>
+              </a:rPr>
+              <a:t>THE SOURCE: MedEdPORTAL</a:t>
+            </a:r>
+          </a:p>
+        </p:txBody>
+      </p:sp>
+      <p:sp>
+        <p:nvSpPr>
+          <p:cNvPr id="10" name="TextBox 9"/>
+          <p:cNvSpPr txBox="1"/>
+          <p:nvPr/>
+        </p:nvSpPr>
+        <p:spPr>
+          <a:xfrm>
+            <a:off x="960119" y="1920239"/>
+            <a:ext cx="4937762" cy="2301589"/>
+          </a:xfrm>
+          <a:prstGeom prst="rect">
+            <a:avLst/>
+          </a:prstGeom>
+          <a:noFill/>
+        </p:spPr>
+        <p:txBody>
+          <a:bodyPr wrap="square">
+            <a:spAutoFit/>
+          </a:bodyPr>
+          <a:lstStyle/>
+          <a:p>
+            <a:r>
+              <a:rPr sz="1800" b="0">
                 <a:solidFill>
                   <a:srgbClr val="1A2332"/>
                 </a:solidFill>
               </a:rPr>
-              <a:t>Demo 3 · the case notebook. Every answer cites the source it came from.</a:t>
+              <a:t>The AAMC's peer-reviewed, free teaching-case library</a:t>
+            </a:r>
+          </a:p>
+          <a:p>
+            <a:r>
+              <a:rPr sz="1800" b="0">
+                <a:solidFill>
+                  <a:srgbClr val="1A2332"/>
+                </a:solidFill>
+              </a:rPr>
+              <a:t>Today's running example: a peritonsillar abscess case, six published files</a:t>
+            </a:r>
+          </a:p>
+          <a:p>
+            <a:r>
+              <a:rPr sz="1800" b="0">
+                <a:solidFill>
+                  <a:srgbClr val="1A2332"/>
+                </a:solidFill>
+              </a:rPr>
+              <a:t>Narrative, labs, EKG, CT, X-ray, and the faculty rubric: download in Section 2</a:t>
+            </a:r>
+          </a:p>
+        </p:txBody>
+      </p:sp>
+      <p:sp>
+        <p:nvSpPr>
+          <p:cNvPr id="11" name="TextBox 10"/>
+          <p:cNvSpPr txBox="1"/>
+          <p:nvPr/>
+        </p:nvSpPr>
+        <p:spPr>
+          <a:xfrm>
+            <a:off x="6903719" y="1554480"/>
+            <a:ext cx="4480562" cy="225708"/>
+          </a:xfrm>
+          <a:prstGeom prst="rect">
+            <a:avLst/>
+          </a:prstGeom>
+          <a:noFill/>
+        </p:spPr>
+        <p:txBody>
+          <a:bodyPr wrap="square">
+            <a:spAutoFit/>
+          </a:bodyPr>
+          <a:lstStyle/>
+          <a:p>
+            <a:r>
+              <a:rPr sz="1100" b="1">
+                <a:solidFill>
+                  <a:srgbClr val="E8833A"/>
+                </a:solidFill>
+              </a:rPr>
+              <a:t>WHY START HERE</a:t>
+            </a:r>
+          </a:p>
+        </p:txBody>
+      </p:sp>
+      <p:sp>
+        <p:nvSpPr>
+          <p:cNvPr id="12" name="TextBox 11"/>
+          <p:cNvSpPr txBox="1"/>
+          <p:nvPr/>
+        </p:nvSpPr>
+        <p:spPr>
+          <a:xfrm>
+            <a:off x="6903719" y="1920239"/>
+            <a:ext cx="4480562" cy="2301589"/>
+          </a:xfrm>
+          <a:prstGeom prst="rect">
+            <a:avLst/>
+          </a:prstGeom>
+          <a:noFill/>
+        </p:spPr>
+        <p:txBody>
+          <a:bodyPr wrap="square">
+            <a:spAutoFit/>
+          </a:bodyPr>
+          <a:lstStyle/>
+          <a:p>
+            <a:r>
+              <a:rPr sz="1800">
+                <a:solidFill>
+                  <a:srgbClr val="1A2332"/>
+                </a:solidFill>
+              </a:rPr>
+              <a:t>Peer-reviewed, citable, expert-vetted: this is ground truth</a:t>
+            </a:r>
+          </a:p>
+          <a:p>
+            <a:r>
+              <a:rPr sz="1800">
+                <a:solidFill>
+                  <a:srgbClr val="1A2332"/>
+                </a:solidFill>
+              </a:rPr>
+              <a:t>You never start from a blank page</a:t>
+            </a:r>
+          </a:p>
+          <a:p>
+            <a:r>
+              <a:rPr sz="1800">
+                <a:solidFill>
+                  <a:srgbClr val="1A2332"/>
+                </a:solidFill>
+              </a:rPr>
+              <a:t>The same six files power every build today</a:t>
+            </a:r>
+          </a:p>
+          <a:p>
+            <a:r>
+              <a:rPr sz="1800">
+                <a:solidFill>
+                  <a:srgbClr val="1A2332"/>
+                </a:solidFill>
+              </a:rPr>
+              <a:t>De-identify your own material the same way</a:t>
+            </a:r>
+          </a:p>
+        </p:txBody>
+      </p:sp>
+      <p:sp>
+        <p:nvSpPr>
+          <p:cNvPr id="13" name="TextBox 12"/>
+          <p:cNvSpPr txBox="1"/>
+          <p:nvPr/>
+        </p:nvSpPr>
+        <p:spPr>
+          <a:xfrm>
+            <a:off x="502919" y="5715000"/>
+            <a:ext cx="11155682" cy="300594"/>
+          </a:xfrm>
+          <a:prstGeom prst="rect">
+            <a:avLst/>
+          </a:prstGeom>
+          <a:noFill/>
+        </p:spPr>
+        <p:txBody>
+          <a:bodyPr wrap="square">
+            <a:spAutoFit/>
+          </a:bodyPr>
+          <a:lstStyle/>
+          <a:p>
+            <a:r>
+              <a:rPr sz="1600" b="0">
+                <a:solidFill>
+                  <a:srgbClr val="0000FF"/>
+                </a:solidFill>
+              </a:rPr>
+              <a:t>Guide → Section 2, Running Example (download the files)</a:t>
             </a:r>
           </a:p>
         </p:txBody>
@@ -7610,7 +5935,7 @@
                   <a:srgbClr val="FFFFFF"/>
                 </a:solidFill>
               </a:rPr>
-              <a:t>Demo 1: Build a Static, Grounded Case (6 min)</a:t>
+              <a:t>Demo 1: AI Builds the Static Case (5 min)</a:t>
             </a:r>
           </a:p>
         </p:txBody>
@@ -7643,7 +5968,7 @@
                   <a:srgbClr val="5B6B7C"/>
                 </a:solidFill>
               </a:rPr>
-              <a:t>Your turn: a chatbot builds a branching case from a real source · Guide → Section 2</a:t>
+              <a:t>Published files in, one shareable HTML file out · Guide → Section 2</a:t>
             </a:r>
           </a:p>
         </p:txBody>
@@ -7676,7 +6001,7 @@
                   <a:srgbClr val="2D5F7C"/>
                 </a:solidFill>
               </a:rPr>
-              <a:t>BUILD IT, IN-CHAT</a:t>
+              <a:t>THE BUILD</a:t>
             </a:r>
           </a:p>
         </p:txBody>
@@ -7709,7 +6034,7 @@
                   <a:srgbClr val="1A2332"/>
                 </a:solidFill>
               </a:rPr>
-              <a:t>Claude Artifacts or ChatGPT Canvas, laptop or phone</a:t>
+              <a:t>Upload the six case files, then paste Prompt 1 from Section 2</a:t>
             </a:r>
           </a:p>
           <a:p>
@@ -7719,7 +6044,7 @@
                   <a:srgbClr val="1A2332"/>
                 </a:solidFill>
               </a:rPr>
-              <a:t>Paste the Prompt Card from Section 2</a:t>
+              <a:t>Out comes index.html: a complete branching scenario</a:t>
             </a:r>
           </a:p>
           <a:p>
@@ -7729,7 +6054,7 @@
                   <a:srgbClr val="1A2332"/>
                 </a:solidFill>
               </a:rPr>
-              <a:t>Your branching case renders in the chat, no files to save</a:t>
+              <a:t>No H5P, no code, no install: share one file by link, LMS, or email</a:t>
             </a:r>
           </a:p>
         </p:txBody>
@@ -7795,27 +6120,37 @@
                   <a:srgbClr val="1A2332"/>
                 </a:solidFill>
               </a:rPr>
-              <a:t>Click through your own case and feel a built-once tool</a:t>
-            </a:r>
-          </a:p>
-          <a:p>
-            <a:r>
-              <a:rPr sz="1800" b="0">
+              <a:t>Click through the finished case as a student</a:t>
+            </a:r>
+          </a:p>
+          <a:p>
+            <a:r>
+              <a:rPr sz="1800">
                 <a:solidFill>
                   <a:srgbClr val="1A2332"/>
                 </a:solidFill>
               </a:rPr>
-              <a:t>Grounded: it draws on the published MedEdPORTAL case, the 19-year-old from the Running Example</a:t>
-            </a:r>
-          </a:p>
-          <a:p>
-            <a:r>
-              <a:rPr sz="1800" b="0">
+              <a:t>Type your reasoning at every decision</a:t>
+            </a:r>
+          </a:p>
+          <a:p>
+            <a:r>
+              <a:rPr sz="1800">
                 <a:solidFill>
                   <a:srgbClr val="1A2332"/>
                 </a:solidFill>
               </a:rPr>
-              <a:t>On your phone? Pair with a laptop neighbor, or pick it up tonight: the prompt is saved in your guide</a:t>
+              <a:t>On the debrief screen, download your results file</a:t>
+            </a:r>
+          </a:p>
+          <a:p>
+            <a:r>
+              <a:rPr sz="1800">
+                <a:solidFill>
+                  <a:srgbClr val="1A2332"/>
+                </a:solidFill>
+              </a:rPr>
+              <a:t>That download is exactly what your instructor receives back</a:t>
             </a:r>
           </a:p>
         </p:txBody>
@@ -7848,7 +6183,7 @@
                   <a:srgbClr val="0000FF"/>
                 </a:solidFill>
               </a:rPr>
-              <a:t>Quadrant: Static + Grounded. Built once, tied to a real, cited source</a:t>
+              <a:t>Static: built once, every learner gets the same published case</a:t>
             </a:r>
           </a:p>
         </p:txBody>
@@ -8127,7 +6462,7 @@
                   <a:srgbClr val="FFFFFF"/>
                 </a:solidFill>
               </a:rPr>
-              <a:t>Demo 2: Run the AI Conversational Case (5 min)</a:t>
+              <a:t>Demo 2: The Same Case, Live and Grounded (5 min)</a:t>
             </a:r>
           </a:p>
         </p:txBody>
@@ -8160,7 +6495,7 @@
                   <a:srgbClr val="5B6B7C"/>
                 </a:solidFill>
               </a:rPr>
-              <a:t>Your turn: paste Today’s Demo Case into any chatbot · Guide → Section 3</a:t>
+              <a:t>You build this one: same files, new chat · Guide → Section 3</a:t>
             </a:r>
           </a:p>
         </p:txBody>
@@ -8193,7 +6528,7 @@
                   <a:srgbClr val="2D5F7C"/>
                 </a:solidFill>
               </a:rPr>
-              <a:t>RUN IT</a:t>
+              <a:t>THE BUILD</a:t>
             </a:r>
           </a:p>
         </p:txBody>
@@ -8279,7 +6614,7 @@
                   <a:srgbClr val="E8833A"/>
                 </a:solidFill>
               </a:rPr>
-              <a:t>COMPARE</a:t>
+              <a:t>PLAY, THEN SHARE IT</a:t>
             </a:r>
           </a:p>
         </p:txBody>
@@ -8312,27 +6647,37 @@
                   <a:srgbClr val="1A2332"/>
                 </a:solidFill>
               </a:rPr>
-              <a:t>Trade screens with your neighbor</a:t>
-            </a:r>
-          </a:p>
-          <a:p>
-            <a:r>
-              <a:rPr sz="1800" b="0">
+              <a:t>Run the encounter, then type encounter over</a:t>
+            </a:r>
+          </a:p>
+          <a:p>
+            <a:r>
+              <a:rPr sz="1800">
                 <a:solidFill>
                   <a:srgbClr val="1A2332"/>
                 </a:solidFill>
               </a:rPr>
-              <a:t>The vitals, the labs, the exam details</a:t>
-            </a:r>
-          </a:p>
-          <a:p>
-            <a:r>
-              <a:rPr sz="1800" b="0">
+              <a:t>Full debrief: five domains, rated, with evidence</a:t>
+            </a:r>
+          </a:p>
+          <a:p>
+            <a:r>
+              <a:rPr sz="1800">
                 <a:solidFill>
                   <a:srgbClr val="1A2332"/>
                 </a:solidFill>
               </a:rPr>
-              <a:t>They will not match</a:t>
+              <a:t>Run it once yourself, then share the chat link with students</a:t>
+            </a:r>
+          </a:p>
+          <a:p>
+            <a:r>
+              <a:rPr sz="1800">
+                <a:solidFill>
+                  <a:srgbClr val="1A2332"/>
+                </a:solidFill>
+              </a:rPr>
+              <a:t>Diana's shared conversation is open in Section 3</a:t>
             </a:r>
           </a:p>
         </p:txBody>
@@ -8365,7 +6710,7 @@
                   <a:srgbClr val="0000FF"/>
                 </a:solidFill>
               </a:rPr>
-              <a:t>Quadrant: Dynamic + Ungrounded. Fresh numbers every run, nobody wrote this case</a:t>
+              <a:t>Dynamic: regenerated each time, and grounded in the source</a:t>
             </a:r>
           </a:p>
         </p:txBody>
@@ -8644,7 +6989,7 @@
                   <a:srgbClr val="FFFFFF"/>
                 </a:solidFill>
               </a:rPr>
-              <a:t>The Elephant, Live (2 min)</a:t>
+              <a:t>Table Talk: Static or Dynamic? (2 min)</a:t>
             </a:r>
           </a:p>
         </p:txBody>
@@ -8677,7 +7022,7 @@
                   <a:srgbClr val="5B6B7C"/>
                 </a:solidFill>
               </a:rPr>
-              <a:t>Fast, engaging, and nobody wrote this case</a:t>
+              <a:t>Two versions of the same case, two different jobs · Guide → Section 3</a:t>
             </a:r>
           </a:p>
         </p:txBody>
@@ -8710,7 +7055,7 @@
                   <a:srgbClr val="2D5F7C"/>
                 </a:solidFill>
               </a:rPr>
-              <a:t>THE ELEPHANT</a:t>
+              <a:t>THE QUESTION</a:t>
             </a:r>
           </a:p>
         </p:txBody>
@@ -8743,7 +7088,7 @@
                   <a:srgbClr val="1A2332"/>
                 </a:solidFill>
               </a:rPr>
-              <a:t>Every run is a fresh case with fresh numbers</a:t>
+              <a:t>When would you reach for the static version?</a:t>
             </a:r>
           </a:p>
           <a:p>
@@ -8753,7 +7098,7 @@
                   <a:srgbClr val="1A2332"/>
                 </a:solidFill>
               </a:rPr>
-              <a:t>No source, no review, and no consistency between your run and your neighbor’s</a:t>
+              <a:t>And when does the dynamic version win?</a:t>
             </a:r>
           </a:p>
           <a:p>
@@ -8763,7 +7108,7 @@
                   <a:srgbClr val="1A2332"/>
                 </a:solidFill>
               </a:rPr>
-              <a:t>Dynamic, yes. Grounded, no</a:t>
+              <a:t>Standardization, grading, replay, feedback: which one fits?</a:t>
             </a:r>
           </a:p>
         </p:txBody>
@@ -8796,7 +7141,7 @@
                   <a:srgbClr val="E8833A"/>
                 </a:solidFill>
               </a:rPr>
-              <a:t>DEBRIEF WITH YOUR TABLE</a:t>
+              <a:t>WHAT EACH DOES BEST</a:t>
             </a:r>
           </a:p>
         </p:txBody>
@@ -8829,17 +7174,27 @@
                   <a:srgbClr val="1A2332"/>
                 </a:solidFill>
               </a:rPr>
-              <a:t>What did you notice was different between your case and your neighbor’s?</a:t>
-            </a:r>
-          </a:p>
-          <a:p>
-            <a:r>
-              <a:rPr sz="1800" b="0">
+              <a:t>Static: the same path for every learner, easy to standardize</a:t>
+            </a:r>
+          </a:p>
+          <a:p>
+            <a:r>
+              <a:rPr sz="1800">
                 <a:solidFill>
                   <a:srgbClr val="1A2332"/>
                 </a:solidFill>
               </a:rPr>
-              <a:t>What would that mean for grading students on this?</a:t>
+              <a:t>Dynamic: practice the encounter itself, feedback on the reasoning</a:t>
+            </a:r>
+          </a:p>
+          <a:p>
+            <a:r>
+              <a:rPr sz="1800">
+                <a:solidFill>
+                  <a:srgbClr val="1A2332"/>
+                </a:solidFill>
+              </a:rPr>
+              <a:t>Same case, same files, different teaching moments</a:t>
             </a:r>
           </a:p>
         </p:txBody>
@@ -8872,7 +7227,7 @@
                   <a:srgbClr val="0000FF"/>
                 </a:solidFill>
               </a:rPr>
-              <a:t>Hold that thought. The fix is one quadrant away</a:t>
+              <a:t>Guide → Section 3, the table conversation</a:t>
             </a:r>
           </a:p>
         </p:txBody>
@@ -9151,7 +7506,7 @@
                   <a:srgbClr val="FFFFFF"/>
                 </a:solidFill>
               </a:rPr>
-              <a:t>Demo 3: The Grounded, Dynamic Case (5 min)</a:t>
+              <a:t>Demo 3: The Neat Things NotebookLM Does (8 min)</a:t>
             </a:r>
           </a:p>
         </p:txBody>
@@ -9184,7 +7539,7 @@
                   <a:srgbClr val="5B6B7C"/>
                 </a:solidFill>
               </a:rPr>
-              <a:t>Watch live, then ask it one question · Guide → Section 4</a:t>
+              <a:t>Upload sources once, then everything cites them · Guide → Section 4</a:t>
             </a:r>
           </a:p>
         </p:txBody>
@@ -9217,7 +7572,7 @@
                   <a:srgbClr val="2D5F7C"/>
                 </a:solidFill>
               </a:rPr>
-              <a:t>WATCH, THEN ASK</a:t>
+              <a:t>THE TOUR</a:t>
             </a:r>
           </a:p>
         </p:txBody>
@@ -9250,7 +7605,7 @@
                   <a:srgbClr val="1A2332"/>
                 </a:solidFill>
               </a:rPr>
-              <a:t>The pre-built notebook: all six published case files, already in it</a:t>
+              <a:t>The case notebook: all six files, every answer cited</a:t>
             </a:r>
           </a:p>
           <a:p>
@@ -9260,7 +7615,7 @@
                   <a:srgbClr val="1A2332"/>
                 </a:solidFill>
               </a:rPr>
-              <a:t>Open the link and ask it one question about the case</a:t>
+              <a:t>Built-in creators: quiz, flashcards, study guide, audio overview</a:t>
             </a:r>
           </a:p>
           <a:p>
@@ -9270,7 +7625,7 @@
                   <a:srgbClr val="1A2332"/>
                 </a:solidFill>
               </a:rPr>
-              <a:t>Watch where it points: every answer shows the source it came from</a:t>
+              <a:t>The AML notebook's audio overview is in your guide: press play</a:t>
             </a:r>
           </a:p>
         </p:txBody>
@@ -9303,7 +7658,7 @@
                   <a:srgbClr val="E8833A"/>
                 </a:solidFill>
               </a:rPr>
-              <a:t>TRY IT AFTER THE SESSION</a:t>
+              <a:t>POKE AND PROD, 5 MIN</a:t>
             </a:r>
           </a:p>
         </p:txBody>
@@ -9336,17 +7691,27 @@
                   <a:srgbClr val="1A2332"/>
                 </a:solidFill>
               </a:rPr>
-              <a:t>Quizzes, flashcards, and audio overviews come from the same sources: after the session, or during the capstone once your table has a notebook open</a:t>
-            </a:r>
-          </a:p>
-          <a:p>
-            <a:r>
-              <a:rPr sz="1800" b="0">
+              <a:t>Open the shared notebook, ask it anything about the case</a:t>
+            </a:r>
+          </a:p>
+          <a:p>
+            <a:r>
+              <a:rPr sz="1800">
                 <a:solidFill>
                   <a:srgbClr val="1A2332"/>
                 </a:solidFill>
               </a:rPr>
-              <a:t>One is already in your guide: the AML notebook’s audio overview</a:t>
+              <a:t>Chase the citations: the pointer is the point</a:t>
+            </a:r>
+          </a:p>
+          <a:p>
+            <a:r>
+              <a:rPr sz="1800">
+                <a:solidFill>
+                  <a:srgbClr val="1A2332"/>
+                </a:solidFill>
+              </a:rPr>
+              <a:t>Try one creator, then make your own at the end</a:t>
             </a:r>
           </a:p>
         </p:txBody>
@@ -9379,7 +7744,7 @@
                   <a:srgbClr val="0000FF"/>
                 </a:solidFill>
               </a:rPr>
-              <a:t>Quadrant: Dynamic + Grounded, the payoff. Fresh answers, real sources</a:t>
+              <a:t>The build block is where you make your own</a:t>
             </a:r>
           </a:p>
         </p:txBody>
@@ -9396,13 +7761,6 @@
 <file path=ppt/slides/slide9.xml><?xml version="1.0" encoding="utf-8"?>
 <p:sld xmlns:a="http://schemas.openxmlformats.org/drawingml/2006/main" xmlns:r="http://schemas.openxmlformats.org/officeDocument/2006/relationships" xmlns:p="http://schemas.openxmlformats.org/presentationml/2006/main" xmlns:m="http://schemas.openxmlformats.org/officeDocument/2006/math" xmlns:a14="http://schemas.microsoft.com/office/drawing/2010/main" showMasterSp="1" showMasterPhAnim="1">
   <p:cSld>
-    <p:bg>
-      <p:bgPr>
-        <a:solidFill>
-          <a:srgbClr val="2D5F7C"/>
-        </a:solidFill>
-      </p:bgPr>
-    </p:bg>
     <p:spTree>
       <p:nvGrpSpPr>
         <p:cNvPr id="1" name=""/>
@@ -9417,199 +7775,533 @@
           <a:chExt cx="0" cy="0"/>
         </a:xfrm>
       </p:grpSpPr>
-      <p:grpSp>
-        <p:nvGrpSpPr>
-          <p:cNvPr id="266" name="Oval 1"/>
-          <p:cNvGrpSpPr/>
-          <p:nvPr/>
-        </p:nvGrpSpPr>
-        <p:grpSpPr>
-          <a:xfrm>
-            <a:off x="914399" y="2285999"/>
-            <a:ext cx="1097282" cy="1097282"/>
-            <a:chOff x="0" y="0"/>
-            <a:chExt cx="1097280" cy="1097280"/>
-          </a:xfrm>
-        </p:grpSpPr>
-        <p:sp>
-          <p:nvSpPr>
-            <p:cNvPr id="264" name="Circle"/>
-            <p:cNvSpPr/>
-            <p:nvPr/>
-          </p:nvSpPr>
-          <p:spPr>
-            <a:xfrm>
-              <a:off x="-1" y="-1"/>
-              <a:ext cx="1097282" cy="1097282"/>
-            </a:xfrm>
-            <a:prstGeom prst="ellipse">
-              <a:avLst/>
-            </a:prstGeom>
-            <a:solidFill>
-              <a:srgbClr val="E8833A"/>
-            </a:solidFill>
-            <a:ln w="12700" cap="flat">
-              <a:noFill/>
-              <a:miter lim="400000"/>
-            </a:ln>
-            <a:effectLst>
-              <a:outerShdw sx="100000" sy="100000" kx="0" ky="0" algn="b" rotWithShape="0" blurRad="38100" dist="23000" dir="5400000">
-                <a:srgbClr val="000000">
-                  <a:alpha val="35000"/>
-                </a:srgbClr>
-              </a:outerShdw>
-            </a:effectLst>
-          </p:spPr>
-          <p:txBody>
-            <a:bodyPr wrap="square" lIns="45719" tIns="45719" rIns="45719" bIns="45719" numCol="1" anchor="ctr">
-              <a:noAutofit/>
-            </a:bodyPr>
-            <a:lstStyle/>
-            <a:p>
-              <a:pPr algn="ctr">
-                <a:defRPr b="1" sz="3600">
-                  <a:solidFill>
-                    <a:srgbClr val="FFFFFF"/>
-                  </a:solidFill>
-                </a:defRPr>
-              </a:pPr>
-            </a:p>
-          </p:txBody>
-        </p:sp>
-        <p:sp>
-          <p:nvSpPr>
-            <p:cNvPr id="265" name="5"/>
-            <p:cNvSpPr txBox="1"/>
-            <p:nvPr/>
-          </p:nvSpPr>
-          <p:spPr>
-            <a:xfrm>
-              <a:off x="206412" y="273972"/>
-              <a:ext cx="684456" cy="549336"/>
-            </a:xfrm>
-            <a:prstGeom prst="rect">
-              <a:avLst/>
-            </a:prstGeom>
+      <p:sp>
+        <p:nvSpPr>
+          <p:cNvPr id="2" name="Rectangle 1"/>
+          <p:cNvSpPr/>
+          <p:nvPr/>
+        </p:nvSpPr>
+        <p:spPr>
+          <a:xfrm>
+            <a:off x="-1" y="0"/>
+            <a:ext cx="12191697" cy="1005839"/>
+          </a:xfrm>
+          <a:prstGeom prst="rect">
+            <a:avLst/>
+          </a:prstGeom>
+          <a:solidFill>
+            <a:srgbClr val="2D5F7C"/>
+          </a:solidFill>
+          <a:ln>
             <a:noFill/>
-            <a:ln w="12700" cap="flat">
-              <a:noFill/>
-              <a:miter lim="400000"/>
-            </a:ln>
-            <a:effectLst/>
-            <a:extLst>
-              <a:ext uri="{C572A759-6A51-4108-AA02-DFA0A04FC94B}">
-                <ma14:wrappingTextBoxFlag xmlns:ma14="http://schemas.microsoft.com/office/mac/drawingml/2011/main" val="1"/>
-              </a:ext>
-            </a:extLst>
-          </p:spPr>
-          <p:txBody>
-            <a:bodyPr wrap="square" lIns="45719" tIns="45719" rIns="45719" bIns="45719" numCol="1" anchor="ctr">
-              <a:spAutoFit/>
-            </a:bodyPr>
-            <a:lstStyle>
-              <a:lvl1pPr algn="ctr">
-                <a:defRPr b="1" sz="3600">
-                  <a:solidFill>
-                    <a:srgbClr val="FFFFFF"/>
-                  </a:solidFill>
-                </a:defRPr>
-              </a:lvl1pPr>
-            </a:lstStyle>
-            <a:p>
-              <a:pPr/>
-              <a:r>
-                <a:t>5</a:t>
-              </a:r>
-            </a:p>
-          </p:txBody>
-        </p:sp>
-      </p:grpSp>
-      <p:sp>
-        <p:nvSpPr>
-          <p:cNvPr id="267" name="TextBox 2"/>
+          </a:ln>
+          <a:effectLst/>
+        </p:spPr>
+        <p:style>
+          <a:lnRef idx="1">
+            <a:schemeClr val="accent1"/>
+          </a:lnRef>
+          <a:fillRef idx="3">
+            <a:schemeClr val="accent1"/>
+          </a:fillRef>
+          <a:effectRef idx="2">
+            <a:schemeClr val="accent1"/>
+          </a:effectRef>
+          <a:fontRef idx="minor">
+            <a:schemeClr val="lt1"/>
+          </a:fontRef>
+        </p:style>
+        <p:txBody>
+          <a:bodyPr rtlCol="0" anchor="ctr"/>
+          <a:lstStyle/>
+          <a:p>
+            <a:pPr algn="ctr"/>
+          </a:p>
+        </p:txBody>
+      </p:sp>
+      <p:sp>
+        <p:nvSpPr>
+          <p:cNvPr id="3" name="Rectangle 2"/>
+          <p:cNvSpPr/>
+          <p:nvPr/>
+        </p:nvSpPr>
+        <p:spPr>
+          <a:xfrm>
+            <a:off x="640080" y="1371600"/>
+            <a:ext cx="5486401" cy="4114800"/>
+          </a:xfrm>
+          <a:prstGeom prst="rect">
+            <a:avLst/>
+          </a:prstGeom>
+          <a:solidFill>
+            <a:srgbClr val="F0F4F8"/>
+          </a:solidFill>
+          <a:ln>
+            <a:noFill/>
+          </a:ln>
+          <a:effectLst/>
+        </p:spPr>
+        <p:style>
+          <a:lnRef idx="1">
+            <a:schemeClr val="accent1"/>
+          </a:lnRef>
+          <a:fillRef idx="3">
+            <a:schemeClr val="accent1"/>
+          </a:fillRef>
+          <a:effectRef idx="2">
+            <a:schemeClr val="accent1"/>
+          </a:effectRef>
+          <a:fontRef idx="minor">
+            <a:schemeClr val="lt1"/>
+          </a:fontRef>
+        </p:style>
+        <p:txBody>
+          <a:bodyPr rtlCol="0" anchor="ctr"/>
+          <a:lstStyle/>
+          <a:p>
+            <a:pPr algn="ctr"/>
+          </a:p>
+        </p:txBody>
+      </p:sp>
+      <p:sp>
+        <p:nvSpPr>
+          <p:cNvPr id="4" name="Rectangle 3"/>
+          <p:cNvSpPr/>
+          <p:nvPr/>
+        </p:nvSpPr>
+        <p:spPr>
+          <a:xfrm>
+            <a:off x="640080" y="1371600"/>
+            <a:ext cx="50801" cy="4114800"/>
+          </a:xfrm>
+          <a:prstGeom prst="rect">
+            <a:avLst/>
+          </a:prstGeom>
+          <a:solidFill>
+            <a:srgbClr val="2D5F7C"/>
+          </a:solidFill>
+          <a:ln>
+            <a:noFill/>
+          </a:ln>
+          <a:effectLst/>
+        </p:spPr>
+        <p:style>
+          <a:lnRef idx="1">
+            <a:schemeClr val="accent1"/>
+          </a:lnRef>
+          <a:fillRef idx="3">
+            <a:schemeClr val="accent1"/>
+          </a:fillRef>
+          <a:effectRef idx="2">
+            <a:schemeClr val="accent1"/>
+          </a:effectRef>
+          <a:fontRef idx="minor">
+            <a:schemeClr val="lt1"/>
+          </a:fontRef>
+        </p:style>
+        <p:txBody>
+          <a:bodyPr rtlCol="0" anchor="ctr"/>
+          <a:lstStyle/>
+          <a:p>
+            <a:pPr algn="ctr"/>
+          </a:p>
+        </p:txBody>
+      </p:sp>
+      <p:sp>
+        <p:nvSpPr>
+          <p:cNvPr id="5" name="Rectangle 4"/>
+          <p:cNvSpPr/>
+          <p:nvPr/>
+        </p:nvSpPr>
+        <p:spPr>
+          <a:xfrm>
+            <a:off x="6583680" y="1371600"/>
+            <a:ext cx="5029201" cy="4114800"/>
+          </a:xfrm>
+          <a:prstGeom prst="rect">
+            <a:avLst/>
+          </a:prstGeom>
+          <a:solidFill>
+            <a:srgbClr val="FDF6F0"/>
+          </a:solidFill>
+          <a:ln>
+            <a:noFill/>
+          </a:ln>
+          <a:effectLst/>
+        </p:spPr>
+        <p:style>
+          <a:lnRef idx="1">
+            <a:schemeClr val="accent1"/>
+          </a:lnRef>
+          <a:fillRef idx="3">
+            <a:schemeClr val="accent1"/>
+          </a:fillRef>
+          <a:effectRef idx="2">
+            <a:schemeClr val="accent1"/>
+          </a:effectRef>
+          <a:fontRef idx="minor">
+            <a:schemeClr val="lt1"/>
+          </a:fontRef>
+        </p:style>
+        <p:txBody>
+          <a:bodyPr rtlCol="0" anchor="ctr"/>
+          <a:lstStyle/>
+          <a:p>
+            <a:pPr algn="ctr"/>
+          </a:p>
+        </p:txBody>
+      </p:sp>
+      <p:sp>
+        <p:nvSpPr>
+          <p:cNvPr id="6" name="Rectangle 5"/>
+          <p:cNvSpPr/>
+          <p:nvPr/>
+        </p:nvSpPr>
+        <p:spPr>
+          <a:xfrm>
+            <a:off x="6583680" y="1371600"/>
+            <a:ext cx="50801" cy="4114800"/>
+          </a:xfrm>
+          <a:prstGeom prst="rect">
+            <a:avLst/>
+          </a:prstGeom>
+          <a:solidFill>
+            <a:srgbClr val="E8833A"/>
+          </a:solidFill>
+          <a:ln>
+            <a:noFill/>
+          </a:ln>
+          <a:effectLst/>
+        </p:spPr>
+        <p:style>
+          <a:lnRef idx="1">
+            <a:schemeClr val="accent1"/>
+          </a:lnRef>
+          <a:fillRef idx="3">
+            <a:schemeClr val="accent1"/>
+          </a:fillRef>
+          <a:effectRef idx="2">
+            <a:schemeClr val="accent1"/>
+          </a:effectRef>
+          <a:fontRef idx="minor">
+            <a:schemeClr val="lt1"/>
+          </a:fontRef>
+        </p:style>
+        <p:txBody>
+          <a:bodyPr rtlCol="0" anchor="ctr"/>
+          <a:lstStyle/>
+          <a:p>
+            <a:pPr algn="ctr"/>
+          </a:p>
+        </p:txBody>
+      </p:sp>
+      <p:sp>
+        <p:nvSpPr>
+          <p:cNvPr id="7" name="TextBox 6"/>
           <p:cNvSpPr txBox="1"/>
           <p:nvPr/>
         </p:nvSpPr>
         <p:spPr>
           <a:xfrm>
-            <a:off x="2331719" y="2286000"/>
-            <a:ext cx="8595362" cy="497047"/>
-          </a:xfrm>
-          <a:prstGeom prst="rect">
-            <a:avLst/>
-          </a:prstGeom>
-          <a:ln w="12700">
-            <a:miter lim="400000"/>
-          </a:ln>
-          <a:extLst>
-            <a:ext uri="{C572A759-6A51-4108-AA02-DFA0A04FC94B}">
-              <ma14:wrappingTextBoxFlag xmlns:ma14="http://schemas.microsoft.com/office/mac/drawingml/2011/main" val="1"/>
-            </a:ext>
-          </a:extLst>
-        </p:spPr>
-        <p:txBody>
-          <a:bodyPr lIns="45719" rIns="45719">
+            <a:off x="502919" y="182879"/>
+            <a:ext cx="11155682" cy="444759"/>
+          </a:xfrm>
+          <a:prstGeom prst="rect">
+            <a:avLst/>
+          </a:prstGeom>
+          <a:noFill/>
+        </p:spPr>
+        <p:txBody>
+          <a:bodyPr wrap="square">
             <a:spAutoFit/>
           </a:bodyPr>
-          <a:lstStyle>
-            <a:lvl1pPr>
-              <a:defRPr b="1" sz="3200">
+          <a:lstStyle/>
+          <a:p>
+            <a:r>
+              <a:rPr sz="2800" b="1">
                 <a:solidFill>
                   <a:srgbClr val="FFFFFF"/>
                 </a:solidFill>
-              </a:defRPr>
-            </a:lvl1pPr>
-          </a:lstStyle>
-          <a:p>
-            <a:pPr/>
-            <a:r>
-              <a:rPr/>
-              <a:t>Section 5: Simulation Spectrum</a:t>
-            </a:r>
-          </a:p>
-        </p:txBody>
-      </p:sp>
-      <p:sp>
-        <p:nvSpPr>
-          <p:cNvPr id="268" name="TextBox 3"/>
+              </a:rPr>
+              <a:t>The Fidelity Spectrum</a:t>
+            </a:r>
+          </a:p>
+        </p:txBody>
+      </p:sp>
+      <p:sp>
+        <p:nvSpPr>
+          <p:cNvPr id="8" name="TextBox 7"/>
           <p:cNvSpPr txBox="1"/>
           <p:nvPr/>
         </p:nvSpPr>
         <p:spPr>
           <a:xfrm>
-            <a:off x="2331719" y="3200400"/>
-            <a:ext cx="8595362" cy="333088"/>
-          </a:xfrm>
-          <a:prstGeom prst="rect">
-            <a:avLst/>
-          </a:prstGeom>
-          <a:ln w="12700">
-            <a:miter lim="400000"/>
-          </a:ln>
-          <a:extLst>
-            <a:ext uri="{C572A759-6A51-4108-AA02-DFA0A04FC94B}">
-              <ma14:wrappingTextBoxFlag xmlns:ma14="http://schemas.microsoft.com/office/mac/drawingml/2011/main" val="1"/>
-            </a:ext>
-          </a:extLst>
-        </p:spPr>
-        <p:txBody>
-          <a:bodyPr lIns="45719" rIns="45719">
+            <a:off x="502919" y="1097280"/>
+            <a:ext cx="11155682" cy="300594"/>
+          </a:xfrm>
+          <a:prstGeom prst="rect">
+            <a:avLst/>
+          </a:prstGeom>
+          <a:noFill/>
+        </p:spPr>
+        <p:txBody>
+          <a:bodyPr wrap="square">
             <a:spAutoFit/>
           </a:bodyPr>
-          <a:lstStyle>
-            <a:lvl1pPr>
-              <a:defRPr>
-                <a:solidFill>
-                  <a:srgbClr val="F4A55A"/>
-                </a:solidFill>
-              </a:defRPr>
-            </a:lvl1pPr>
-          </a:lstStyle>
-          <a:p>
-            <a:pPr/>
-            <a:r>
-              <a:rPr/>
-              <a:t>Match the technology to the learning goal, from text to VR</a:t>
+          <a:lstStyle/>
+          <a:p>
+            <a:r>
+              <a:rPr sz="1600" b="0">
+                <a:solidFill>
+                  <a:srgbClr val="5B6B7C"/>
+                </a:solidFill>
+              </a:rPr>
+              <a:t>Match the tool to the goal, not the other way around</a:t>
+            </a:r>
+          </a:p>
+        </p:txBody>
+      </p:sp>
+      <p:sp>
+        <p:nvSpPr>
+          <p:cNvPr id="9" name="TextBox 8"/>
+          <p:cNvSpPr txBox="1"/>
+          <p:nvPr/>
+        </p:nvSpPr>
+        <p:spPr>
+          <a:xfrm>
+            <a:off x="960119" y="1554480"/>
+            <a:ext cx="4937762" cy="225708"/>
+          </a:xfrm>
+          <a:prstGeom prst="rect">
+            <a:avLst/>
+          </a:prstGeom>
+          <a:noFill/>
+        </p:spPr>
+        <p:txBody>
+          <a:bodyPr wrap="square">
+            <a:spAutoFit/>
+          </a:bodyPr>
+          <a:lstStyle/>
+          <a:p>
+            <a:r>
+              <a:rPr sz="1100" b="1">
+                <a:solidFill>
+                  <a:srgbClr val="2D5F7C"/>
+                </a:solidFill>
+              </a:rPr>
+              <a:t>THE SPECTRUM, LEFT TO RIGHT</a:t>
+            </a:r>
+          </a:p>
+        </p:txBody>
+      </p:sp>
+      <p:sp>
+        <p:nvSpPr>
+          <p:cNvPr id="10" name="TextBox 9"/>
+          <p:cNvSpPr txBox="1"/>
+          <p:nvPr/>
+        </p:nvSpPr>
+        <p:spPr>
+          <a:xfrm>
+            <a:off x="960119" y="1920239"/>
+            <a:ext cx="4937762" cy="2301589"/>
+          </a:xfrm>
+          <a:prstGeom prst="rect">
+            <a:avLst/>
+          </a:prstGeom>
+          <a:noFill/>
+        </p:spPr>
+        <p:txBody>
+          <a:bodyPr wrap="square">
+            <a:spAutoFit/>
+          </a:bodyPr>
+          <a:lstStyle/>
+          <a:p>
+            <a:r>
+              <a:rPr sz="1800" b="0">
+                <a:solidFill>
+                  <a:srgbClr val="1A2332"/>
+                </a:solidFill>
+              </a:rPr>
+              <a:t>• Text and audio, $0 to $20/mo</a:t>
+            </a:r>
+          </a:p>
+          <a:p>
+            <a:pPr>
+              <a:spcBef>
+                <a:spcPts val="1000"/>
+              </a:spcBef>
+            </a:pPr>
+            <a:r>
+              <a:rPr sz="1800" b="0">
+                <a:solidFill>
+                  <a:srgbClr val="1A2332"/>
+                </a:solidFill>
+              </a:rPr>
+              <a:t>• Image-based, free to $25</a:t>
+            </a:r>
+          </a:p>
+          <a:p>
+            <a:pPr>
+              <a:spcBef>
+                <a:spcPts val="1000"/>
+              </a:spcBef>
+            </a:pPr>
+            <a:r>
+              <a:rPr sz="1800" b="0">
+                <a:solidFill>
+                  <a:srgbClr val="1A2332"/>
+                </a:solidFill>
+              </a:rPr>
+              <a:t>• Screen-based, free trials</a:t>
+            </a:r>
+          </a:p>
+          <a:p>
+            <a:pPr>
+              <a:spcBef>
+                <a:spcPts val="1000"/>
+              </a:spcBef>
+            </a:pPr>
+            <a:r>
+              <a:rPr sz="1800" b="0">
+                <a:solidFill>
+                  <a:srgbClr val="1A2332"/>
+                </a:solidFill>
+              </a:rPr>
+              <a:t>• AR on your phone, free to $25</a:t>
+            </a:r>
+          </a:p>
+          <a:p>
+            <a:pPr>
+              <a:spcBef>
+                <a:spcPts val="1000"/>
+              </a:spcBef>
+            </a:pPr>
+            <a:r>
+              <a:rPr sz="1800" b="0">
+                <a:solidFill>
+                  <a:srgbClr val="1A2332"/>
+                </a:solidFill>
+              </a:rPr>
+              <a:t>• Immersive VR, $100 to $600</a:t>
+            </a:r>
+          </a:p>
+        </p:txBody>
+      </p:sp>
+      <p:sp>
+        <p:nvSpPr>
+          <p:cNvPr id="11" name="TextBox 10"/>
+          <p:cNvSpPr txBox="1"/>
+          <p:nvPr/>
+        </p:nvSpPr>
+        <p:spPr>
+          <a:xfrm>
+            <a:off x="6903719" y="1554480"/>
+            <a:ext cx="4480562" cy="225708"/>
+          </a:xfrm>
+          <a:prstGeom prst="rect">
+            <a:avLst/>
+          </a:prstGeom>
+          <a:noFill/>
+        </p:spPr>
+        <p:txBody>
+          <a:bodyPr wrap="square">
+            <a:spAutoFit/>
+          </a:bodyPr>
+          <a:lstStyle/>
+          <a:p>
+            <a:r>
+              <a:rPr sz="1100" b="1">
+                <a:solidFill>
+                  <a:srgbClr val="E8833A"/>
+                </a:solidFill>
+              </a:rPr>
+              <a:t>WHERE REASONING LIVES</a:t>
+            </a:r>
+          </a:p>
+        </p:txBody>
+      </p:sp>
+      <p:sp>
+        <p:nvSpPr>
+          <p:cNvPr id="12" name="TextBox 11"/>
+          <p:cNvSpPr txBox="1"/>
+          <p:nvPr/>
+        </p:nvSpPr>
+        <p:spPr>
+          <a:xfrm>
+            <a:off x="6903719" y="1920239"/>
+            <a:ext cx="4480562" cy="2301589"/>
+          </a:xfrm>
+          <a:prstGeom prst="rect">
+            <a:avLst/>
+          </a:prstGeom>
+          <a:noFill/>
+        </p:spPr>
+        <p:txBody>
+          <a:bodyPr wrap="square">
+            <a:spAutoFit/>
+          </a:bodyPr>
+          <a:lstStyle/>
+          <a:p>
+            <a:r>
+              <a:rPr sz="1800">
+                <a:solidFill>
+                  <a:srgbClr val="1A2332"/>
+                </a:solidFill>
+              </a:rPr>
+              <a:t>Text and audio, images included: ECG, X-ray, CT, labs.</a:t>
+            </a:r>
+          </a:p>
+          <a:p>
+            <a:r>
+              <a:rPr sz="1800">
+                <a:solidFill>
+                  <a:srgbClr val="1A2332"/>
+                </a:solidFill>
+              </a:rPr>
+              <a:t>The uncanny valley of avatar tools is real.</a:t>
+            </a:r>
+          </a:p>
+          <a:p>
+            <a:r>
+              <a:rPr sz="1800">
+                <a:solidFill>
+                  <a:srgbClr val="1A2332"/>
+                </a:solidFill>
+              </a:rPr>
+              <a:t>Some text-and-audio tools already do this well.</a:t>
+            </a:r>
+          </a:p>
+        </p:txBody>
+      </p:sp>
+      <p:sp>
+        <p:nvSpPr>
+          <p:cNvPr id="13" name="TextBox 12"/>
+          <p:cNvSpPr txBox="1"/>
+          <p:nvPr/>
+        </p:nvSpPr>
+        <p:spPr>
+          <a:xfrm>
+            <a:off x="502919" y="5715000"/>
+            <a:ext cx="11155682" cy="300594"/>
+          </a:xfrm>
+          <a:prstGeom prst="rect">
+            <a:avLst/>
+          </a:prstGeom>
+          <a:noFill/>
+        </p:spPr>
+        <p:txBody>
+          <a:bodyPr wrap="square">
+            <a:spAutoFit/>
+          </a:bodyPr>
+          <a:lstStyle/>
+          <a:p>
+            <a:r>
+              <a:rPr sz="1600" b="0">
+                <a:solidFill>
+                  <a:srgbClr val="0000FF"/>
+                </a:solidFill>
+              </a:rPr>
+              <a:t>Workshop Guide → Sections 5 + 6 (VR: your take-home)</a:t>
             </a:r>
           </a:p>
         </p:txBody>

--- a/Digital Learning Unlocked - Slide Deck.pptx
+++ b/Digital Learning Unlocked - Slide Deck.pptx
@@ -7615,7 +7615,7 @@
                   <a:srgbClr val="1A2332"/>
                 </a:solidFill>
               </a:rPr>
-              <a:t>Built-in creators: quiz, flashcards, study guide, audio overview</a:t>
+              <a:t>Built-in creators: flashcards, study guide, audio overview</a:t>
             </a:r>
           </a:p>
           <a:p>

--- a/Digital Learning Unlocked - Slide Deck.pptx
+++ b/Digital Learning Unlocked - Slide Deck.pptx
@@ -3480,7 +3480,7 @@
                   <a:srgbClr val="FFFFFF"/>
                 </a:solidFill>
               </a:rPr>
-              <a:t>The Build Block: Make One Real Thing (23 min)</a:t>
+              <a:t>The Build Block: Make One Real Thing (24 min)</a:t>
             </a:r>
           </a:p>
         </p:txBody>
@@ -6495,7 +6495,7 @@
                   <a:srgbClr val="5B6B7C"/>
                 </a:solidFill>
               </a:rPr>
-              <a:t>You build this one: same files, new chat · Guide → Section 3</a:t>
+              <a:t>You build this one: one paste, nothing to upload · Guide → Section 3</a:t>
             </a:r>
           </a:p>
         </p:txBody>
@@ -6561,7 +6561,7 @@
                   <a:srgbClr val="1A2332"/>
                 </a:solidFill>
               </a:rPr>
-              <a:t>Paste Today’s Demo Case from Section 3</a:t>
+              <a:t>New chat, paste Prompt 2 from Section 3: the case file rides inside</a:t>
             </a:r>
           </a:p>
           <a:p>
@@ -6571,7 +6571,7 @@
                   <a:srgbClr val="1A2332"/>
                 </a:solidFill>
               </a:rPr>
-              <a:t>Role-play a few turns as the student</a:t>
+              <a:t>The chatbot becomes the patient: first person, grounded</a:t>
             </a:r>
           </a:p>
           <a:p>
@@ -6581,7 +6581,7 @@
                   <a:srgbClr val="1A2332"/>
                 </a:solidFill>
               </a:rPr>
-              <a:t>Let the case take you wherever it goes</a:t>
+              <a:t>Ask for labs and you get the published values, never inventions</a:t>
             </a:r>
           </a:p>
         </p:txBody>
@@ -7506,7 +7506,7 @@
                   <a:srgbClr val="FFFFFF"/>
                 </a:solidFill>
               </a:rPr>
-              <a:t>Demo 3: The Neat Things NotebookLM Does (8 min)</a:t>
+              <a:t>Demo 3: The Neat Things NotebookLM Does (7 min)</a:t>
             </a:r>
           </a:p>
         </p:txBody>
@@ -7539,7 +7539,7 @@
                   <a:srgbClr val="5B6B7C"/>
                 </a:solidFill>
               </a:rPr>
-              <a:t>Upload sources once, then everything cites them · Guide → Section 4</a:t>
+              <a:t>From grounding by hand to grounding as the product · Guide → Section 4</a:t>
             </a:r>
           </a:p>
         </p:txBody>
@@ -7572,7 +7572,7 @@
                   <a:srgbClr val="2D5F7C"/>
                 </a:solidFill>
               </a:rPr>
-              <a:t>THE TOUR</a:t>
+              <a:t>WHY IT'S DIFFERENT</a:t>
             </a:r>
           </a:p>
         </p:txBody>
@@ -7605,7 +7605,7 @@
                   <a:srgbClr val="1A2332"/>
                 </a:solidFill>
               </a:rPr>
-              <a:t>The case notebook: all six files, every answer cited</a:t>
+              <a:t>All session: the prompt plus the published files, grounding by hand</a:t>
             </a:r>
           </a:p>
           <a:p>
@@ -7615,7 +7615,7 @@
                   <a:srgbClr val="1A2332"/>
                 </a:solidFill>
               </a:rPr>
-              <a:t>Built-in creators: flashcards, study guide, audio overview</a:t>
+              <a:t>NotebookLM: upload sources once, grounding is the whole product</a:t>
             </a:r>
           </a:p>
           <a:p>
@@ -7625,7 +7625,7 @@
                   <a:srgbClr val="1A2332"/>
                 </a:solidFill>
               </a:rPr>
-              <a:t>The AML notebook's audio overview is in your guide: press play</a:t>
+              <a:t>Every answer cites the source and section: checkable</a:t>
             </a:r>
           </a:p>
         </p:txBody>
@@ -7658,7 +7658,7 @@
                   <a:srgbClr val="E8833A"/>
                 </a:solidFill>
               </a:rPr>
-              <a:t>POKE AND PROD, 5 MIN</a:t>
+              <a:t>THE AML NOTEBOOK</a:t>
             </a:r>
           </a:p>
         </p:txBody>
@@ -7691,7 +7691,7 @@
                   <a:srgbClr val="1A2332"/>
                 </a:solidFill>
               </a:rPr>
-              <a:t>Open the shared notebook, ask it anything about the case</a:t>
+              <a:t>Six published sources on a new leukemia drug, already uploaded</a:t>
             </a:r>
           </a:p>
           <a:p>
@@ -7701,7 +7701,7 @@
                   <a:srgbClr val="1A2332"/>
                 </a:solidFill>
               </a:rPr>
-              <a:t>Chase the citations: the pointer is the point</a:t>
+              <a:t>The audio overview is in your guide: press play</a:t>
             </a:r>
           </a:p>
           <a:p>
@@ -7711,7 +7711,7 @@
                   <a:srgbClr val="1A2332"/>
                 </a:solidFill>
               </a:rPr>
-              <a:t>Try one creator, then make your own at the end</a:t>
+              <a:t>Five minutes: poke and prod, ask anything, try one creator</a:t>
             </a:r>
           </a:p>
         </p:txBody>

--- a/Digital Learning Unlocked - Slide Deck.pptx
+++ b/Digital Learning Unlocked - Slide Deck.pptx
@@ -5527,7 +5527,7 @@
                   <a:srgbClr val="1A2332"/>
                 </a:solidFill>
               </a:rPr>
-              <a:t>Narrative, labs, EKG, CT, X-ray, and the faculty rubric: download in Section 2</a:t>
+              <a:t>Narrative, labs, EKG, CT, X-ray, and the faculty rubric: download from the Running Example, Section 2</a:t>
             </a:r>
           </a:p>
         </p:txBody>

--- a/Digital Learning Unlocked - Slide Deck.pptx
+++ b/Digital Learning Unlocked - Slide Deck.pptx
@@ -5050,7 +5050,7 @@
                   <a:srgbClr val="1A2332"/>
                 </a:solidFill>
               </a:rPr>
-              <a:t>• Keep the Workshop Guide open on your phone</a:t>
+              <a:t>• Keep the Workshop Guide open: the tool tables in Section 2 are worth a scroll now</a:t>
             </a:r>
           </a:p>
           <a:p>
